--- a/design/FE_phi.vu_Design of Secure Remote Diag on Container Separation Architecture_3rd.pptx
+++ b/design/FE_phi.vu_Design of Secure Remote Diag on Container Separation Architecture_3rd.pptx
@@ -5,7 +5,7 @@
     <p:sldMasterId id="2147483648" r:id="rId1"/>
   </p:sldMasterIdLst>
   <p:notesMasterIdLst>
-    <p:notesMasterId r:id="rId24"/>
+    <p:notesMasterId r:id="rId25"/>
   </p:notesMasterIdLst>
   <p:sldIdLst>
     <p:sldId id="256" r:id="rId2"/>
@@ -19,17 +19,18 @@
     <p:sldId id="271" r:id="rId10"/>
     <p:sldId id="287" r:id="rId11"/>
     <p:sldId id="279" r:id="rId12"/>
-    <p:sldId id="274" r:id="rId13"/>
-    <p:sldId id="273" r:id="rId14"/>
-    <p:sldId id="278" r:id="rId15"/>
-    <p:sldId id="277" r:id="rId16"/>
-    <p:sldId id="276" r:id="rId17"/>
-    <p:sldId id="258" r:id="rId18"/>
-    <p:sldId id="259" r:id="rId19"/>
-    <p:sldId id="282" r:id="rId20"/>
-    <p:sldId id="285" r:id="rId21"/>
-    <p:sldId id="286" r:id="rId22"/>
-    <p:sldId id="272" r:id="rId23"/>
+    <p:sldId id="288" r:id="rId13"/>
+    <p:sldId id="274" r:id="rId14"/>
+    <p:sldId id="273" r:id="rId15"/>
+    <p:sldId id="278" r:id="rId16"/>
+    <p:sldId id="277" r:id="rId17"/>
+    <p:sldId id="276" r:id="rId18"/>
+    <p:sldId id="258" r:id="rId19"/>
+    <p:sldId id="259" r:id="rId20"/>
+    <p:sldId id="282" r:id="rId21"/>
+    <p:sldId id="285" r:id="rId22"/>
+    <p:sldId id="286" r:id="rId23"/>
+    <p:sldId id="272" r:id="rId24"/>
   </p:sldIdLst>
   <p:sldSz cx="12192000" cy="6858000"/>
   <p:notesSz cx="6858000" cy="9144000"/>
@@ -218,7 +219,7 @@
           <a:p>
             <a:fld id="{341C17E2-92C1-406A-80C1-BA1B838099E9}" type="datetimeFigureOut">
               <a:rPr lang="en-US" smtClean="0"/>
-              <a:t>9/23/2026</a:t>
+              <a:t>9/24/2026</a:t>
             </a:fld>
             <a:endParaRPr lang="en-US"/>
           </a:p>
@@ -529,7 +530,7 @@
           <a:bodyPr/>
           <a:lstStyle/>
           <a:p>
-            <a:endParaRPr lang="en-US" dirty="0"/>
+            <a:endParaRPr lang="en-US"/>
           </a:p>
         </p:txBody>
       </p:sp>
@@ -613,7 +614,7 @@
           <a:bodyPr/>
           <a:lstStyle/>
           <a:p>
-            <a:endParaRPr lang="en-US" dirty="0"/>
+            <a:endParaRPr lang="en-US"/>
           </a:p>
         </p:txBody>
       </p:sp>
@@ -699,7 +700,7 @@
           <a:p>
             <a:pPr fontAlgn="t"/>
             <a:r>
-              <a:rPr lang="en-US" sz="1200" b="1" i="0" kern="1200" dirty="0">
+              <a:rPr lang="en-US" sz="1200" b="1" i="0" kern="1200">
                 <a:solidFill>
                   <a:schemeClr val="tx1"/>
                 </a:solidFill>
@@ -714,7 +715,7 @@
           <a:p>
             <a:pPr fontAlgn="t"/>
             <a:r>
-              <a:rPr lang="en-US" sz="1200" b="1" i="0" kern="1200" dirty="0">
+              <a:rPr lang="en-US" sz="1200" b="1" i="0" kern="1200">
                 <a:solidFill>
                   <a:schemeClr val="tx1"/>
                 </a:solidFill>
@@ -726,7 +727,7 @@
               <a:t>Maintainability:</a:t>
             </a:r>
             <a:r>
-              <a:rPr lang="en-US" sz="1200" b="0" i="0" kern="1200" dirty="0">
+              <a:rPr lang="en-US" sz="1200" b="0" i="0" kern="1200">
                 <a:solidFill>
                   <a:schemeClr val="tx1"/>
                 </a:solidFill>
@@ -739,7 +740,7 @@
             </a:r>
           </a:p>
           <a:p>
-            <a:endParaRPr lang="en-US" dirty="0"/>
+            <a:endParaRPr lang="en-US"/>
           </a:p>
         </p:txBody>
       </p:sp>
@@ -823,7 +824,7 @@
           <a:bodyPr/>
           <a:lstStyle/>
           <a:p>
-            <a:endParaRPr lang="en-US" dirty="0"/>
+            <a:endParaRPr lang="en-US"/>
           </a:p>
         </p:txBody>
       </p:sp>
@@ -844,7 +845,7 @@
           <a:p>
             <a:fld id="{EF277405-33BD-42BD-B604-93760E4185DC}" type="slidenum">
               <a:rPr lang="en-US" smtClean="0"/>
-              <a:t>17</a:t>
+              <a:t>11</a:t>
             </a:fld>
             <a:endParaRPr lang="en-US"/>
           </a:p>
@@ -853,7 +854,7 @@
     </p:spTree>
     <p:extLst>
       <p:ext uri="{BB962C8B-B14F-4D97-AF65-F5344CB8AC3E}">
-        <p14:creationId xmlns:p14="http://schemas.microsoft.com/office/powerpoint/2010/main" val="357080838"/>
+        <p14:creationId xmlns:p14="http://schemas.microsoft.com/office/powerpoint/2010/main" val="194177539"/>
       </p:ext>
     </p:extLst>
   </p:cSld>
@@ -907,49 +908,7 @@
           <a:bodyPr/>
           <a:lstStyle/>
           <a:p>
-            <a:pPr fontAlgn="t"/>
-            <a:r>
-              <a:rPr lang="en-US" sz="1200" b="1" i="0" kern="1200" dirty="0">
-                <a:solidFill>
-                  <a:schemeClr val="tx1"/>
-                </a:solidFill>
-                <a:effectLst/>
-                <a:latin typeface="+mn-lt"/>
-                <a:ea typeface="+mn-ea"/>
-                <a:cs typeface="+mn-cs"/>
-              </a:rPr>
-              <a:t>Trade-offs</a:t>
-            </a:r>
-          </a:p>
-          <a:p>
-            <a:pPr fontAlgn="t"/>
-            <a:r>
-              <a:rPr lang="en-US" sz="1200" b="1" i="0" kern="1200" dirty="0">
-                <a:solidFill>
-                  <a:schemeClr val="tx1"/>
-                </a:solidFill>
-                <a:effectLst/>
-                <a:latin typeface="+mn-lt"/>
-                <a:ea typeface="+mn-ea"/>
-                <a:cs typeface="+mn-cs"/>
-              </a:rPr>
-              <a:t>Maintainability:</a:t>
-            </a:r>
-            <a:r>
-              <a:rPr lang="en-US" sz="1200" b="0" i="0" kern="1200" dirty="0">
-                <a:solidFill>
-                  <a:schemeClr val="tx1"/>
-                </a:solidFill>
-                <a:effectLst/>
-                <a:latin typeface="+mn-lt"/>
-                <a:ea typeface="+mn-ea"/>
-                <a:cs typeface="+mn-cs"/>
-              </a:rPr>
-              <a:t> All EP modules require cross-container IPC support, increasing implementation effort and code-change scope.</a:t>
-            </a:r>
-          </a:p>
-          <a:p>
-            <a:endParaRPr lang="en-US" dirty="0"/>
+            <a:endParaRPr lang="en-US"/>
           </a:p>
         </p:txBody>
       </p:sp>
@@ -970,7 +929,133 @@
           <a:p>
             <a:fld id="{EF277405-33BD-42BD-B604-93760E4185DC}" type="slidenum">
               <a:rPr lang="en-US" smtClean="0"/>
-              <a:t>21</a:t>
+              <a:t>18</a:t>
+            </a:fld>
+            <a:endParaRPr lang="en-US"/>
+          </a:p>
+        </p:txBody>
+      </p:sp>
+    </p:spTree>
+    <p:extLst>
+      <p:ext uri="{BB962C8B-B14F-4D97-AF65-F5344CB8AC3E}">
+        <p14:creationId xmlns:p14="http://schemas.microsoft.com/office/powerpoint/2010/main" val="357080838"/>
+      </p:ext>
+    </p:extLst>
+  </p:cSld>
+  <p:clrMapOvr>
+    <a:masterClrMapping/>
+  </p:clrMapOvr>
+</p:notes>
+</file>
+
+<file path=ppt/notesSlides/notesSlide6.xml><?xml version="1.0" encoding="utf-8"?>
+<p:notes xmlns:a="http://schemas.openxmlformats.org/drawingml/2006/main" xmlns:r="http://schemas.openxmlformats.org/officeDocument/2006/relationships" xmlns:p="http://schemas.openxmlformats.org/presentationml/2006/main">
+  <p:cSld>
+    <p:spTree>
+      <p:nvGrpSpPr>
+        <p:cNvPr id="1" name=""/>
+        <p:cNvGrpSpPr/>
+        <p:nvPr/>
+      </p:nvGrpSpPr>
+      <p:grpSpPr>
+        <a:xfrm>
+          <a:off x="0" y="0"/>
+          <a:ext cx="0" cy="0"/>
+          <a:chOff x="0" y="0"/>
+          <a:chExt cx="0" cy="0"/>
+        </a:xfrm>
+      </p:grpSpPr>
+      <p:sp>
+        <p:nvSpPr>
+          <p:cNvPr id="2" name="Slide Image Placeholder 1"/>
+          <p:cNvSpPr>
+            <a:spLocks noGrp="1" noRot="1" noChangeAspect="1"/>
+          </p:cNvSpPr>
+          <p:nvPr>
+            <p:ph type="sldImg"/>
+          </p:nvPr>
+        </p:nvSpPr>
+        <p:spPr/>
+      </p:sp>
+      <p:sp>
+        <p:nvSpPr>
+          <p:cNvPr id="3" name="Notes Placeholder 2"/>
+          <p:cNvSpPr>
+            <a:spLocks noGrp="1"/>
+          </p:cNvSpPr>
+          <p:nvPr>
+            <p:ph type="body" idx="1"/>
+          </p:nvPr>
+        </p:nvSpPr>
+        <p:spPr/>
+        <p:txBody>
+          <a:bodyPr/>
+          <a:lstStyle/>
+          <a:p>
+            <a:pPr fontAlgn="t"/>
+            <a:r>
+              <a:rPr lang="en-US" sz="1200" b="1" i="0" kern="1200">
+                <a:solidFill>
+                  <a:schemeClr val="tx1"/>
+                </a:solidFill>
+                <a:effectLst/>
+                <a:latin typeface="+mn-lt"/>
+                <a:ea typeface="+mn-ea"/>
+                <a:cs typeface="+mn-cs"/>
+              </a:rPr>
+              <a:t>Trade-offs</a:t>
+            </a:r>
+          </a:p>
+          <a:p>
+            <a:pPr fontAlgn="t"/>
+            <a:r>
+              <a:rPr lang="en-US" sz="1200" b="1" i="0" kern="1200">
+                <a:solidFill>
+                  <a:schemeClr val="tx1"/>
+                </a:solidFill>
+                <a:effectLst/>
+                <a:latin typeface="+mn-lt"/>
+                <a:ea typeface="+mn-ea"/>
+                <a:cs typeface="+mn-cs"/>
+              </a:rPr>
+              <a:t>Maintainability:</a:t>
+            </a:r>
+            <a:r>
+              <a:rPr lang="en-US" sz="1200" b="0" i="0" kern="1200">
+                <a:solidFill>
+                  <a:schemeClr val="tx1"/>
+                </a:solidFill>
+                <a:effectLst/>
+                <a:latin typeface="+mn-lt"/>
+                <a:ea typeface="+mn-ea"/>
+                <a:cs typeface="+mn-cs"/>
+              </a:rPr>
+              <a:t> All EP modules require cross-container IPC support, increasing implementation effort and code-change scope.</a:t>
+            </a:r>
+          </a:p>
+          <a:p>
+            <a:endParaRPr lang="en-US"/>
+          </a:p>
+        </p:txBody>
+      </p:sp>
+      <p:sp>
+        <p:nvSpPr>
+          <p:cNvPr id="4" name="Slide Number Placeholder 3"/>
+          <p:cNvSpPr>
+            <a:spLocks noGrp="1"/>
+          </p:cNvSpPr>
+          <p:nvPr>
+            <p:ph type="sldNum" sz="quarter" idx="10"/>
+          </p:nvPr>
+        </p:nvSpPr>
+        <p:spPr/>
+        <p:txBody>
+          <a:bodyPr/>
+          <a:lstStyle/>
+          <a:p>
+            <a:fld id="{EF277405-33BD-42BD-B604-93760E4185DC}" type="slidenum">
+              <a:rPr lang="en-US" smtClean="0"/>
+              <a:t>22</a:t>
             </a:fld>
             <a:endParaRPr lang="en-US"/>
           </a:p>
@@ -1118,7 +1203,7 @@
           <a:p>
             <a:fld id="{B934B22C-8C05-4817-830F-8B9F9DEAE546}" type="datetimeFigureOut">
               <a:rPr lang="en-US" smtClean="0"/>
-              <a:t>9/23/2026</a:t>
+              <a:t>9/24/2026</a:t>
             </a:fld>
             <a:endParaRPr lang="en-US"/>
           </a:p>
@@ -1286,7 +1371,7 @@
           <a:p>
             <a:fld id="{B934B22C-8C05-4817-830F-8B9F9DEAE546}" type="datetimeFigureOut">
               <a:rPr lang="en-US" smtClean="0"/>
-              <a:t>9/23/2026</a:t>
+              <a:t>9/24/2026</a:t>
             </a:fld>
             <a:endParaRPr lang="en-US"/>
           </a:p>
@@ -1464,7 +1549,7 @@
           <a:p>
             <a:fld id="{B934B22C-8C05-4817-830F-8B9F9DEAE546}" type="datetimeFigureOut">
               <a:rPr lang="en-US" smtClean="0"/>
-              <a:t>9/23/2026</a:t>
+              <a:t>9/24/2026</a:t>
             </a:fld>
             <a:endParaRPr lang="en-US"/>
           </a:p>
@@ -1658,7 +1743,7 @@
           <a:p>
             <a:fld id="{B934B22C-8C05-4817-830F-8B9F9DEAE546}" type="datetimeFigureOut">
               <a:rPr lang="en-US" smtClean="0"/>
-              <a:t>9/23/2026</a:t>
+              <a:t>9/24/2026</a:t>
             </a:fld>
             <a:endParaRPr lang="en-US"/>
           </a:p>
@@ -1711,7 +1796,7 @@
           <p:cNvPr id="7" name="그림 5" descr="백색바탕.png">
             <a:extLst>
               <a:ext uri="{FF2B5EF4-FFF2-40B4-BE49-F238E27FC236}">
-                <a16:creationId xmlns:a16="http://schemas.microsoft.com/office/drawing/2014/main" xmlns="" id="{28873918-42A2-05FA-4A84-F17869DE34CF}"/>
+                <a16:creationId xmlns="" xmlns:a16="http://schemas.microsoft.com/office/drawing/2014/main" id="{28873918-42A2-05FA-4A84-F17869DE34CF}"/>
               </a:ext>
             </a:extLst>
           </p:cNvPr>
@@ -1963,7 +2048,7 @@
           <a:p>
             <a:fld id="{B934B22C-8C05-4817-830F-8B9F9DEAE546}" type="datetimeFigureOut">
               <a:rPr lang="en-US" smtClean="0"/>
-              <a:t>9/23/2026</a:t>
+              <a:t>9/24/2026</a:t>
             </a:fld>
             <a:endParaRPr lang="en-US"/>
           </a:p>
@@ -2192,7 +2277,7 @@
           <a:p>
             <a:fld id="{B934B22C-8C05-4817-830F-8B9F9DEAE546}" type="datetimeFigureOut">
               <a:rPr lang="en-US" smtClean="0"/>
-              <a:t>9/23/2026</a:t>
+              <a:t>9/24/2026</a:t>
             </a:fld>
             <a:endParaRPr lang="en-US"/>
           </a:p>
@@ -2556,7 +2641,7 @@
           <a:p>
             <a:fld id="{B934B22C-8C05-4817-830F-8B9F9DEAE546}" type="datetimeFigureOut">
               <a:rPr lang="en-US" smtClean="0"/>
-              <a:t>9/23/2026</a:t>
+              <a:t>9/24/2026</a:t>
             </a:fld>
             <a:endParaRPr lang="en-US"/>
           </a:p>
@@ -2673,7 +2758,7 @@
           <a:p>
             <a:fld id="{B934B22C-8C05-4817-830F-8B9F9DEAE546}" type="datetimeFigureOut">
               <a:rPr lang="en-US" smtClean="0"/>
-              <a:t>9/23/2026</a:t>
+              <a:t>9/24/2026</a:t>
             </a:fld>
             <a:endParaRPr lang="en-US"/>
           </a:p>
@@ -2768,7 +2853,7 @@
           <a:p>
             <a:fld id="{B934B22C-8C05-4817-830F-8B9F9DEAE546}" type="datetimeFigureOut">
               <a:rPr lang="en-US" smtClean="0"/>
-              <a:t>9/23/2026</a:t>
+              <a:t>9/24/2026</a:t>
             </a:fld>
             <a:endParaRPr lang="en-US"/>
           </a:p>
@@ -3043,7 +3128,7 @@
           <a:p>
             <a:fld id="{B934B22C-8C05-4817-830F-8B9F9DEAE546}" type="datetimeFigureOut">
               <a:rPr lang="en-US" smtClean="0"/>
-              <a:t>9/23/2026</a:t>
+              <a:t>9/24/2026</a:t>
             </a:fld>
             <a:endParaRPr lang="en-US"/>
           </a:p>
@@ -3295,7 +3380,7 @@
           <a:p>
             <a:fld id="{B934B22C-8C05-4817-830F-8B9F9DEAE546}" type="datetimeFigureOut">
               <a:rPr lang="en-US" smtClean="0"/>
-              <a:t>9/23/2026</a:t>
+              <a:t>9/24/2026</a:t>
             </a:fld>
             <a:endParaRPr lang="en-US"/>
           </a:p>
@@ -3506,7 +3591,7 @@
           <a:p>
             <a:fld id="{B934B22C-8C05-4817-830F-8B9F9DEAE546}" type="datetimeFigureOut">
               <a:rPr lang="en-US" smtClean="0"/>
-              <a:t>9/23/2026</a:t>
+              <a:t>9/24/2026</a:t>
             </a:fld>
             <a:endParaRPr lang="en-US"/>
           </a:p>
@@ -3595,7 +3680,7 @@
           <p:cNvPr id="8" name="TextBox 7">
             <a:extLst>
               <a:ext uri="{FF2B5EF4-FFF2-40B4-BE49-F238E27FC236}">
-                <a16:creationId xmlns:a16="http://schemas.microsoft.com/office/drawing/2014/main" xmlns="" id="{7DC87BF5-B759-FAAB-FE6D-F0E5F640800D}"/>
+                <a16:creationId xmlns="" xmlns:a16="http://schemas.microsoft.com/office/drawing/2014/main" id="{7DC87BF5-B759-FAAB-FE6D-F0E5F640800D}"/>
               </a:ext>
             </a:extLst>
           </p:cNvPr>
@@ -3603,7 +3688,7 @@
           <p:nvPr userDrawn="1">
             <p:extLst>
               <p:ext uri="{1162E1C5-73C7-4A58-AE30-91384D911F3F}">
-                <p184:classification xmlns:p184="http://schemas.microsoft.com/office/powerpoint/2018/4/main" xmlns="" val="hdr"/>
+                <p184:classification xmlns="" xmlns:p184="http://schemas.microsoft.com/office/powerpoint/2018/4/main" val="hdr"/>
               </p:ext>
             </p:extLst>
           </p:nvPr>
@@ -3984,15 +4069,15 @@
           <a:lstStyle/>
           <a:p>
             <a:r>
-              <a:rPr lang="en-US" b="1" dirty="0"/>
+              <a:rPr lang="en-US" b="1"/>
               <a:t>Design of Secure Remote </a:t>
             </a:r>
             <a:r>
-              <a:rPr lang="en-US" b="1" dirty="0" err="1"/>
+              <a:rPr lang="en-US" b="1" err="1"/>
               <a:t>Diag</a:t>
             </a:r>
             <a:r>
-              <a:rPr lang="en-US" b="1" dirty="0"/>
+              <a:rPr lang="en-US" b="1"/>
               <a:t> on Container Separation Architecture</a:t>
             </a:r>
           </a:p>
@@ -4019,24 +4104,24 @@
           <a:lstStyle/>
           <a:p>
             <a:r>
-              <a:rPr lang="en-US" dirty="0"/>
+              <a:rPr lang="en-US"/>
               <a:t>Candidate: Vu Hoang Phi (phi.vu) </a:t>
             </a:r>
           </a:p>
           <a:p>
             <a:r>
-              <a:rPr lang="en-US" dirty="0"/>
+              <a:rPr lang="en-US"/>
               <a:t>LGEDV – September 2026</a:t>
             </a:r>
           </a:p>
           <a:p>
-            <a:endParaRPr lang="en-US" dirty="0"/>
-          </a:p>
-          <a:p>
-            <a:endParaRPr lang="en-US" dirty="0"/>
-          </a:p>
-          <a:p>
-            <a:endParaRPr lang="en-US" dirty="0"/>
+            <a:endParaRPr lang="en-US"/>
+          </a:p>
+          <a:p>
+            <a:endParaRPr lang="en-US"/>
+          </a:p>
+          <a:p>
+            <a:endParaRPr lang="en-US"/>
           </a:p>
         </p:txBody>
       </p:sp>
@@ -4068,7 +4153,7 @@
         <p:cNvPr id="1" name="">
           <a:extLst>
             <a:ext uri="{FF2B5EF4-FFF2-40B4-BE49-F238E27FC236}">
-              <a16:creationId xmlns:a16="http://schemas.microsoft.com/office/drawing/2014/main" xmlns="" id="{7A3A9F39-394E-5437-993F-29D2F2093B00}"/>
+              <a16:creationId xmlns="" xmlns:a16="http://schemas.microsoft.com/office/drawing/2014/main" id="{7A3A9F39-394E-5437-993F-29D2F2093B00}"/>
             </a:ext>
           </a:extLst>
         </p:cNvPr>
@@ -4088,7 +4173,7 @@
           <p:cNvPr id="2" name="Title 1">
             <a:extLst>
               <a:ext uri="{FF2B5EF4-FFF2-40B4-BE49-F238E27FC236}">
-                <a16:creationId xmlns:a16="http://schemas.microsoft.com/office/drawing/2014/main" xmlns="" id="{554F77EA-2B30-AFDC-1349-3C58C2AB9061}"/>
+                <a16:creationId xmlns="" xmlns:a16="http://schemas.microsoft.com/office/drawing/2014/main" id="{554F77EA-2B30-AFDC-1349-3C58C2AB9061}"/>
               </a:ext>
             </a:extLst>
           </p:cNvPr>
@@ -4105,26 +4190,30 @@
           <a:lstStyle/>
           <a:p>
             <a:r>
-              <a:rPr lang="en-US" dirty="0"/>
+              <a:rPr lang="en-US"/>
               <a:t>Design Alternative – </a:t>
             </a:r>
             <a:r>
-              <a:rPr lang="en-US" dirty="0" smtClean="0"/>
+              <a:rPr lang="en-US" smtClean="0"/>
               <a:t>Alt-C</a:t>
             </a:r>
             <a:r>
-              <a:rPr lang="en-US" dirty="0"/>
+              <a:rPr lang="en-US"/>
               <a:t>: Move </a:t>
             </a:r>
             <a:r>
-              <a:rPr lang="en-US" dirty="0" err="1" smtClean="0"/>
+              <a:rPr lang="en-US" err="1" smtClean="0"/>
               <a:t>RemoteDiag</a:t>
             </a:r>
             <a:r>
-              <a:rPr lang="en-US" dirty="0" smtClean="0"/>
-              <a:t> + Use Proxy</a:t>
-            </a:r>
-            <a:endParaRPr lang="en-US" dirty="0"/>
+              <a:rPr lang="en-US" smtClean="0"/>
+              <a:t> + </a:t>
+            </a:r>
+            <a:r>
+              <a:rPr lang="en-US" smtClean="0"/>
+              <a:t>Proxy</a:t>
+            </a:r>
+            <a:endParaRPr lang="en-US"/>
           </a:p>
         </p:txBody>
       </p:sp>
@@ -4133,7 +4222,7 @@
           <p:cNvPr id="3" name="Content Placeholder 2">
             <a:extLst>
               <a:ext uri="{FF2B5EF4-FFF2-40B4-BE49-F238E27FC236}">
-                <a16:creationId xmlns:a16="http://schemas.microsoft.com/office/drawing/2014/main" xmlns="" id="{64FB7A4A-CF56-C0BD-9AB9-923B2D043291}"/>
+                <a16:creationId xmlns="" xmlns:a16="http://schemas.microsoft.com/office/drawing/2014/main" id="{64FB7A4A-CF56-C0BD-9AB9-923B2D043291}"/>
               </a:ext>
             </a:extLst>
           </p:cNvPr>
@@ -4156,13 +4245,13 @@
           </a:bodyPr>
           <a:lstStyle/>
           <a:p>
-            <a:endParaRPr lang="en-US" sz="1800" dirty="0"/>
+            <a:endParaRPr lang="en-US" sz="1800"/>
           </a:p>
         </p:txBody>
       </p:sp>
       <p:pic>
         <p:nvPicPr>
-          <p:cNvPr id="6" name="Picture 5"/>
+          <p:cNvPr id="4" name="Picture 3"/>
           <p:cNvPicPr>
             <a:picLocks noChangeAspect="1"/>
           </p:cNvPicPr>
@@ -4176,8 +4265,8 @@
         </p:blipFill>
         <p:spPr>
           <a:xfrm>
-            <a:off x="160866" y="1274279"/>
-            <a:ext cx="11891434" cy="5337366"/>
+            <a:off x="70046" y="990600"/>
+            <a:ext cx="12007654" cy="5335153"/>
           </a:xfrm>
           <a:prstGeom prst="rect">
             <a:avLst/>
@@ -4231,13 +4320,20 @@
             <p:ph type="title"/>
           </p:nvPr>
         </p:nvSpPr>
-        <p:spPr/>
+        <p:spPr>
+          <a:xfrm>
+            <a:off x="160866" y="189169"/>
+            <a:ext cx="10871201" cy="489842"/>
+          </a:xfrm>
+        </p:spPr>
         <p:txBody>
-          <a:bodyPr/>
+          <a:bodyPr>
+            <a:normAutofit fontScale="90000"/>
+          </a:bodyPr>
           <a:lstStyle/>
           <a:p>
             <a:r>
-              <a:rPr lang="en-US" dirty="0"/>
+              <a:rPr lang="en-US"/>
               <a:t>Comparison &amp; Decision</a:t>
             </a:r>
           </a:p>
@@ -4272,28 +4368,28 @@
                 <a:gridCol w="1630147">
                   <a:extLst>
                     <a:ext uri="{9D8B030D-6E8A-4147-A177-3AD203B41FA5}">
-                      <a16:colId xmlns:a16="http://schemas.microsoft.com/office/drawing/2014/main" xmlns="" val="20000"/>
+                      <a16:colId xmlns="" xmlns:a16="http://schemas.microsoft.com/office/drawing/2014/main" val="20000"/>
                     </a:ext>
                   </a:extLst>
                 </a:gridCol>
                 <a:gridCol w="3619436">
                   <a:extLst>
                     <a:ext uri="{9D8B030D-6E8A-4147-A177-3AD203B41FA5}">
-                      <a16:colId xmlns:a16="http://schemas.microsoft.com/office/drawing/2014/main" xmlns="" val="20001"/>
+                      <a16:colId xmlns="" xmlns:a16="http://schemas.microsoft.com/office/drawing/2014/main" val="20001"/>
                     </a:ext>
                   </a:extLst>
                 </a:gridCol>
                 <a:gridCol w="3279774">
                   <a:extLst>
                     <a:ext uri="{9D8B030D-6E8A-4147-A177-3AD203B41FA5}">
-                      <a16:colId xmlns:a16="http://schemas.microsoft.com/office/drawing/2014/main" xmlns="" val="20002"/>
+                      <a16:colId xmlns="" xmlns:a16="http://schemas.microsoft.com/office/drawing/2014/main" val="20002"/>
                     </a:ext>
                   </a:extLst>
                 </a:gridCol>
                 <a:gridCol w="3490332">
                   <a:extLst>
                     <a:ext uri="{9D8B030D-6E8A-4147-A177-3AD203B41FA5}">
-                      <a16:colId xmlns:a16="http://schemas.microsoft.com/office/drawing/2014/main" xmlns="" val="20003"/>
+                      <a16:colId xmlns="" xmlns:a16="http://schemas.microsoft.com/office/drawing/2014/main" val="20003"/>
                     </a:ext>
                   </a:extLst>
                 </a:gridCol>
@@ -4306,7 +4402,7 @@
                     <a:p>
                       <a:pPr algn="ctr"/>
                       <a:r>
-                        <a:rPr lang="en-US" dirty="0"/>
+                        <a:rPr lang="en-US"/>
                         <a:t>QA</a:t>
                       </a:r>
                     </a:p>
@@ -4320,15 +4416,15 @@
                     <a:p>
                       <a:pPr algn="ctr"/>
                       <a:r>
-                        <a:rPr lang="en-US" dirty="0"/>
+                        <a:rPr lang="en-US"/>
                         <a:t>Alt-A – Keep </a:t>
                       </a:r>
                       <a:r>
-                        <a:rPr lang="en-US" dirty="0" err="1"/>
+                        <a:rPr lang="en-US" err="1"/>
                         <a:t>RemoteDiag</a:t>
                       </a:r>
                       <a:r>
-                        <a:rPr lang="en-US" dirty="0"/>
+                        <a:rPr lang="en-US"/>
                         <a:t> in EP</a:t>
                       </a:r>
                     </a:p>
@@ -4342,15 +4438,15 @@
                     <a:p>
                       <a:pPr algn="ctr"/>
                       <a:r>
-                        <a:rPr lang="en-US" dirty="0"/>
+                        <a:rPr lang="en-US"/>
                         <a:t>Alt-B – Move </a:t>
                       </a:r>
                       <a:r>
-                        <a:rPr lang="en-US" dirty="0" err="1"/>
+                        <a:rPr lang="en-US" err="1"/>
                         <a:t>RemoteDiag</a:t>
                       </a:r>
                       <a:r>
-                        <a:rPr lang="en-US" dirty="0"/>
+                        <a:rPr lang="en-US"/>
                         <a:t> to IP</a:t>
                       </a:r>
                     </a:p>
@@ -4364,21 +4460,21 @@
                     <a:p>
                       <a:pPr algn="ctr"/>
                       <a:r>
-                        <a:rPr lang="en-US" dirty="0"/>
+                        <a:rPr lang="en-US"/>
                         <a:t>Alt-C – Move +</a:t>
                       </a:r>
                       <a:r>
-                        <a:rPr lang="en-US" baseline="0" dirty="0"/>
+                        <a:rPr lang="en-US" baseline="0"/>
                         <a:t> Proxy</a:t>
                       </a:r>
-                      <a:endParaRPr lang="en-US" dirty="0"/>
+                      <a:endParaRPr lang="en-US"/>
                     </a:p>
                   </a:txBody>
                   <a:tcPr/>
                 </a:tc>
                 <a:extLst>
                   <a:ext uri="{0D108BD9-81ED-4DB2-BD59-A6C34878D82A}">
-                    <a16:rowId xmlns:a16="http://schemas.microsoft.com/office/drawing/2014/main" xmlns="" val="10000"/>
+                    <a16:rowId xmlns="" xmlns:a16="http://schemas.microsoft.com/office/drawing/2014/main" val="10000"/>
                   </a:ext>
                 </a:extLst>
               </a:tr>
@@ -4389,7 +4485,7 @@
                     <a:lstStyle/>
                     <a:p>
                       <a:r>
-                        <a:rPr lang="en-US" dirty="0"/>
+                        <a:rPr lang="en-US"/>
                         <a:t>Security</a:t>
                       </a:r>
                     </a:p>
@@ -4402,7 +4498,7 @@
                     <a:lstStyle/>
                     <a:p>
                       <a:r>
-                        <a:rPr lang="en-US" b="1" dirty="0">
+                        <a:rPr lang="en-US" b="1">
                           <a:solidFill>
                             <a:schemeClr val="accent2"/>
                           </a:solidFill>
@@ -4412,26 +4508,26 @@
                     </a:p>
                     <a:p>
                       <a:r>
-                        <a:rPr lang="en-US" dirty="0"/>
+                        <a:rPr lang="en-US"/>
                         <a:t>CAN</a:t>
                       </a:r>
                       <a:r>
-                        <a:rPr lang="en-US" baseline="0" dirty="0"/>
+                        <a:rPr lang="en-US" baseline="0"/>
                         <a:t> is protected by SID Filter but </a:t>
                       </a:r>
                       <a:r>
-                        <a:rPr lang="en-US" dirty="0" err="1"/>
+                        <a:rPr lang="en-US" err="1"/>
                         <a:t>RemoteDiag</a:t>
                       </a:r>
                       <a:r>
-                        <a:rPr lang="en-US" dirty="0"/>
+                        <a:rPr lang="en-US"/>
                         <a:t> </a:t>
                       </a:r>
                       <a:r>
-                        <a:rPr lang="en-US" baseline="0" dirty="0"/>
+                        <a:rPr lang="en-US" baseline="0"/>
                         <a:t>remains controllable from compromised EP</a:t>
                       </a:r>
-                      <a:endParaRPr lang="en-US" dirty="0"/>
+                      <a:endParaRPr lang="en-US"/>
                     </a:p>
                   </a:txBody>
                   <a:tcPr/>
@@ -4442,7 +4538,7 @@
                     <a:lstStyle/>
                     <a:p>
                       <a:r>
-                        <a:rPr lang="en-US" b="1" dirty="0">
+                        <a:rPr lang="en-US" b="1">
                           <a:solidFill>
                             <a:srgbClr val="00B050"/>
                           </a:solidFill>
@@ -4452,7 +4548,7 @@
                     </a:p>
                     <a:p>
                       <a:r>
-                        <a:rPr lang="en-US" b="0" dirty="0">
+                        <a:rPr lang="en-US" b="0">
                           <a:solidFill>
                             <a:schemeClr val="tx1"/>
                           </a:solidFill>
@@ -4460,15 +4556,15 @@
                         <a:t>Complete </a:t>
                       </a:r>
                       <a:r>
-                        <a:rPr lang="en-US" dirty="0" err="1"/>
+                        <a:rPr lang="en-US" err="1"/>
                         <a:t>RemoteDiag</a:t>
                       </a:r>
                       <a:r>
-                        <a:rPr lang="en-US" dirty="0"/>
+                        <a:rPr lang="en-US"/>
                         <a:t> </a:t>
                       </a:r>
                       <a:r>
-                        <a:rPr lang="en-US" b="0" dirty="0">
+                        <a:rPr lang="en-US" b="0">
                           <a:solidFill>
                             <a:schemeClr val="tx1"/>
                           </a:solidFill>
@@ -4476,14 +4572,14 @@
                         <a:t>isolation and SID Filter</a:t>
                       </a:r>
                       <a:r>
-                        <a:rPr lang="en-US" b="0" baseline="0" dirty="0">
+                        <a:rPr lang="en-US" b="0" baseline="0">
                           <a:solidFill>
                             <a:schemeClr val="tx1"/>
                           </a:solidFill>
                         </a:rPr>
                         <a:t> in trusted IP.</a:t>
                       </a:r>
-                      <a:endParaRPr lang="en-US" b="0" dirty="0">
+                      <a:endParaRPr lang="en-US" b="0">
                         <a:solidFill>
                           <a:schemeClr val="tx1"/>
                         </a:solidFill>
@@ -4498,7 +4594,7 @@
                     <a:lstStyle/>
                     <a:p>
                       <a:r>
-                        <a:rPr lang="en-US" b="1" dirty="0">
+                        <a:rPr lang="en-US" b="1">
                           <a:solidFill>
                             <a:srgbClr val="00B050"/>
                           </a:solidFill>
@@ -4508,7 +4604,7 @@
                     </a:p>
                     <a:p>
                       <a:r>
-                        <a:rPr lang="en-US" b="0" dirty="0">
+                        <a:rPr lang="en-US" b="0">
                           <a:solidFill>
                             <a:schemeClr val="tx1"/>
                           </a:solidFill>
@@ -4516,15 +4612,15 @@
                         <a:t>Complete </a:t>
                       </a:r>
                       <a:r>
-                        <a:rPr lang="en-US" dirty="0" err="1"/>
+                        <a:rPr lang="en-US" err="1"/>
                         <a:t>RemoteDiag</a:t>
                       </a:r>
                       <a:r>
-                        <a:rPr lang="en-US" dirty="0"/>
+                        <a:rPr lang="en-US"/>
                         <a:t> </a:t>
                       </a:r>
                       <a:r>
-                        <a:rPr lang="en-US" b="0" dirty="0">
+                        <a:rPr lang="en-US" b="0">
                           <a:solidFill>
                             <a:schemeClr val="tx1"/>
                           </a:solidFill>
@@ -4532,14 +4628,14 @@
                         <a:t>isolation and SID Filter</a:t>
                       </a:r>
                       <a:r>
-                        <a:rPr lang="en-US" b="0" baseline="0" dirty="0">
+                        <a:rPr lang="en-US" b="0" baseline="0">
                           <a:solidFill>
                             <a:schemeClr val="tx1"/>
                           </a:solidFill>
                         </a:rPr>
                         <a:t> in trusted IP.</a:t>
                       </a:r>
-                      <a:endParaRPr lang="en-US" b="0" dirty="0">
+                      <a:endParaRPr lang="en-US" b="0">
                         <a:solidFill>
                           <a:schemeClr val="tx1"/>
                         </a:solidFill>
@@ -4550,7 +4646,7 @@
                 </a:tc>
                 <a:extLst>
                   <a:ext uri="{0D108BD9-81ED-4DB2-BD59-A6C34878D82A}">
-                    <a16:rowId xmlns:a16="http://schemas.microsoft.com/office/drawing/2014/main" xmlns="" val="10001"/>
+                    <a16:rowId xmlns="" xmlns:a16="http://schemas.microsoft.com/office/drawing/2014/main" val="10001"/>
                   </a:ext>
                 </a:extLst>
               </a:tr>
@@ -4561,7 +4657,7 @@
                     <a:lstStyle/>
                     <a:p>
                       <a:r>
-                        <a:rPr lang="en-US" dirty="0"/>
+                        <a:rPr lang="en-US"/>
                         <a:t>Maintainability</a:t>
                       </a:r>
                     </a:p>
@@ -4574,14 +4670,14 @@
                     <a:lstStyle/>
                     <a:p>
                       <a:r>
-                        <a:rPr lang="en-US" b="1" dirty="0">
+                        <a:rPr lang="en-US" b="1">
                           <a:solidFill>
                             <a:schemeClr val="accent2"/>
                           </a:solidFill>
                         </a:rPr>
                         <a:t>Medium</a:t>
                       </a:r>
-                      <a:endParaRPr lang="en-US" b="1" dirty="0">
+                      <a:endParaRPr lang="en-US" b="1">
                         <a:solidFill>
                           <a:srgbClr val="00B050"/>
                         </a:solidFill>
@@ -4589,7 +4685,7 @@
                     </a:p>
                     <a:p>
                       <a:r>
-                        <a:rPr lang="en-US" b="0" dirty="0">
+                        <a:rPr lang="en-US" b="0">
                           <a:solidFill>
                             <a:schemeClr val="tx1"/>
                           </a:solidFill>
@@ -4597,7 +4693,7 @@
                         <a:t>Existing</a:t>
                       </a:r>
                       <a:r>
-                        <a:rPr lang="en-US" b="0" baseline="0" dirty="0">
+                        <a:rPr lang="en-US" b="0" baseline="0">
                           <a:solidFill>
                             <a:schemeClr val="tx1"/>
                           </a:solidFill>
@@ -4605,7 +4701,7 @@
                         <a:t> </a:t>
                       </a:r>
                       <a:r>
-                        <a:rPr lang="en-US" b="0" dirty="0">
+                        <a:rPr lang="en-US" b="0">
                           <a:solidFill>
                             <a:schemeClr val="tx1"/>
                           </a:solidFill>
@@ -4613,15 +4709,15 @@
                         <a:t>EP modules and </a:t>
                       </a:r>
                       <a:r>
-                        <a:rPr lang="en-US" dirty="0" err="1"/>
+                        <a:rPr lang="en-US" err="1"/>
                         <a:t>RemoteDiag</a:t>
                       </a:r>
                       <a:r>
-                        <a:rPr lang="en-US" dirty="0"/>
+                        <a:rPr lang="en-US"/>
                         <a:t> </a:t>
                       </a:r>
                       <a:r>
-                        <a:rPr lang="en-US" b="0" dirty="0">
+                        <a:rPr lang="en-US" b="0">
                           <a:solidFill>
                             <a:schemeClr val="tx1"/>
                           </a:solidFill>
@@ -4629,7 +4725,7 @@
                         <a:t>keep their current</a:t>
                       </a:r>
                       <a:r>
-                        <a:rPr lang="en-US" b="0" baseline="0" dirty="0">
+                        <a:rPr lang="en-US" b="0" baseline="0">
                           <a:solidFill>
                             <a:schemeClr val="tx1"/>
                           </a:solidFill>
@@ -4637,7 +4733,7 @@
                         <a:t> </a:t>
                       </a:r>
                       <a:r>
-                        <a:rPr lang="en-US" b="0" dirty="0">
+                        <a:rPr lang="en-US" b="0">
                           <a:solidFill>
                             <a:schemeClr val="tx1"/>
                           </a:solidFill>
@@ -4645,7 +4741,7 @@
                         <a:t>interface. But </a:t>
                       </a:r>
                       <a:r>
-                        <a:rPr lang="en-US" b="0" dirty="0" err="1">
+                        <a:rPr lang="en-US" b="0" err="1">
                           <a:solidFill>
                             <a:schemeClr val="tx1"/>
                           </a:solidFill>
@@ -4653,21 +4749,21 @@
                         <a:t>OnBoardClient</a:t>
                       </a:r>
                       <a:r>
-                        <a:rPr lang="en-US" b="0" baseline="0" dirty="0">
+                        <a:rPr lang="en-US" b="0" baseline="0">
                           <a:solidFill>
                             <a:schemeClr val="tx1"/>
                           </a:solidFill>
                         </a:rPr>
                         <a:t> has to be modified.</a:t>
                       </a:r>
-                      <a:endParaRPr lang="en-US" b="0" dirty="0">
+                      <a:endParaRPr lang="en-US" b="0">
                         <a:solidFill>
                           <a:schemeClr val="tx1"/>
                         </a:solidFill>
                       </a:endParaRPr>
                     </a:p>
                     <a:p>
-                      <a:endParaRPr lang="en-US" b="0" dirty="0">
+                      <a:endParaRPr lang="en-US" b="0">
                         <a:solidFill>
                           <a:schemeClr val="tx1"/>
                         </a:solidFill>
@@ -4682,7 +4778,7 @@
                     <a:lstStyle/>
                     <a:p>
                       <a:r>
-                        <a:rPr lang="en-US" b="1" dirty="0">
+                        <a:rPr lang="en-US" b="1">
                           <a:solidFill>
                             <a:srgbClr val="FF0000"/>
                           </a:solidFill>
@@ -4692,7 +4788,7 @@
                     </a:p>
                     <a:p>
                       <a:r>
-                        <a:rPr lang="en-US" b="0" dirty="0">
+                        <a:rPr lang="en-US" b="0">
                           <a:solidFill>
                             <a:schemeClr val="tx1"/>
                           </a:solidFill>
@@ -4700,14 +4796,14 @@
                         <a:t>More than 10 EP modules have to change their implementation to support cross-container IPC</a:t>
                       </a:r>
                       <a:r>
-                        <a:rPr lang="en-US" b="0" baseline="0" dirty="0">
+                        <a:rPr lang="en-US" b="0" baseline="0">
                           <a:solidFill>
                             <a:schemeClr val="tx1"/>
                           </a:solidFill>
                         </a:rPr>
                         <a:t> mechanism.</a:t>
                       </a:r>
-                      <a:endParaRPr lang="en-US" b="0" dirty="0">
+                      <a:endParaRPr lang="en-US" b="0">
                         <a:solidFill>
                           <a:schemeClr val="tx1"/>
                         </a:solidFill>
@@ -4722,7 +4818,7 @@
                     <a:lstStyle/>
                     <a:p>
                       <a:r>
-                        <a:rPr lang="en-US" b="1" dirty="0">
+                        <a:rPr lang="en-US" b="1">
                           <a:solidFill>
                             <a:schemeClr val="accent2"/>
                           </a:solidFill>
@@ -4732,7 +4828,7 @@
                     </a:p>
                     <a:p>
                       <a:r>
-                        <a:rPr lang="en-US" b="0" dirty="0">
+                        <a:rPr lang="en-US" b="0">
                           <a:solidFill>
                             <a:schemeClr val="tx1"/>
                           </a:solidFill>
@@ -4740,7 +4836,7 @@
                         <a:t>EP modules’ interface unchanged,</a:t>
                       </a:r>
                       <a:r>
-                        <a:rPr lang="en-US" b="0" baseline="0" dirty="0">
+                        <a:rPr lang="en-US" b="0" baseline="0">
                           <a:solidFill>
                             <a:schemeClr val="tx1"/>
                           </a:solidFill>
@@ -4748,7 +4844,7 @@
                         <a:t> but</a:t>
                       </a:r>
                       <a:r>
-                        <a:rPr lang="en-US" b="0" dirty="0">
+                        <a:rPr lang="en-US" b="0">
                           <a:solidFill>
                             <a:schemeClr val="tx1"/>
                           </a:solidFill>
@@ -4756,19 +4852,19 @@
                         <a:t> </a:t>
                       </a:r>
                       <a:r>
-                        <a:rPr lang="en-US" dirty="0"/>
+                        <a:rPr lang="en-US"/>
                         <a:t>additional</a:t>
                       </a:r>
                       <a:r>
-                        <a:rPr lang="en-US" baseline="0" dirty="0"/>
+                        <a:rPr lang="en-US" baseline="0"/>
                         <a:t> components (proxy and cross-container IPC)</a:t>
                       </a:r>
                       <a:r>
-                        <a:rPr lang="en-US" dirty="0"/>
+                        <a:rPr lang="en-US"/>
                         <a:t> </a:t>
                       </a:r>
                       <a:r>
-                        <a:rPr lang="en-US" b="0" dirty="0">
+                        <a:rPr lang="en-US" b="0">
                           <a:solidFill>
                             <a:schemeClr val="tx1"/>
                           </a:solidFill>
@@ -4776,14 +4872,14 @@
                         <a:t>have to</a:t>
                       </a:r>
                       <a:r>
-                        <a:rPr lang="en-US" b="0" baseline="0" dirty="0">
+                        <a:rPr lang="en-US" b="0" baseline="0">
                           <a:solidFill>
                             <a:schemeClr val="tx1"/>
                           </a:solidFill>
                         </a:rPr>
                         <a:t> be implemented and maintained.</a:t>
                       </a:r>
-                      <a:endParaRPr lang="en-US" b="0" dirty="0">
+                      <a:endParaRPr lang="en-US" b="0">
                         <a:solidFill>
                           <a:schemeClr val="tx1"/>
                         </a:solidFill>
@@ -4794,7 +4890,7 @@
                 </a:tc>
                 <a:extLst>
                   <a:ext uri="{0D108BD9-81ED-4DB2-BD59-A6C34878D82A}">
-                    <a16:rowId xmlns:a16="http://schemas.microsoft.com/office/drawing/2014/main" xmlns="" val="2845297163"/>
+                    <a16:rowId xmlns="" xmlns:a16="http://schemas.microsoft.com/office/drawing/2014/main" val="2845297163"/>
                   </a:ext>
                 </a:extLst>
               </a:tr>
@@ -4810,7 +4906,7 @@
         </p:nvSpPr>
         <p:spPr>
           <a:xfrm>
-            <a:off x="0" y="5583700"/>
+            <a:off x="160866" y="6258135"/>
             <a:ext cx="11871189" cy="430887"/>
           </a:xfrm>
           <a:prstGeom prst="rect">
@@ -4829,11 +4925,11 @@
               <a:buChar char="ü"/>
             </a:pPr>
             <a:r>
-              <a:rPr lang="en-US" sz="2200" b="1" dirty="0"/>
+              <a:rPr lang="en-US" sz="2200" b="1"/>
               <a:t>Final decision: </a:t>
             </a:r>
             <a:r>
-              <a:rPr lang="en-US" sz="2200" b="1" dirty="0">
+              <a:rPr lang="en-US" sz="2200" b="1">
                 <a:solidFill>
                   <a:srgbClr val="00B050"/>
                 </a:solidFill>
@@ -4848,7 +4944,7 @@
           <p:cNvPr id="7" name="Table 6">
             <a:extLst>
               <a:ext uri="{FF2B5EF4-FFF2-40B4-BE49-F238E27FC236}">
-                <a16:creationId xmlns:a16="http://schemas.microsoft.com/office/drawing/2014/main" xmlns="" id="{6C8AAA51-C203-CD8B-4B02-DE7401134C21}"/>
+                <a16:creationId xmlns="" xmlns:a16="http://schemas.microsoft.com/office/drawing/2014/main" id="{6C8AAA51-C203-CD8B-4B02-DE7401134C21}"/>
               </a:ext>
             </a:extLst>
           </p:cNvPr>
@@ -4858,14 +4954,14 @@
           <p:nvPr>
             <p:extLst>
               <p:ext uri="{D42A27DB-BD31-4B8C-83A1-F6EECF244321}">
-                <p14:modId xmlns:p14="http://schemas.microsoft.com/office/powerpoint/2010/main" val="964228328"/>
+                <p14:modId xmlns:p14="http://schemas.microsoft.com/office/powerpoint/2010/main" val="1319929839"/>
               </p:ext>
             </p:extLst>
           </p:nvPr>
         </p:nvGraphicFramePr>
         <p:xfrm>
-          <a:off x="160866" y="1391839"/>
-          <a:ext cx="11888259" cy="2164688"/>
+          <a:off x="72428" y="616718"/>
+          <a:ext cx="12050161" cy="5471280"/>
         </p:xfrm>
         <a:graphic>
           <a:graphicData uri="http://schemas.openxmlformats.org/drawingml/2006/table">
@@ -4874,31 +4970,31 @@
                 <a:tableStyleId>{5C22544A-7EE6-4342-B048-85BDC9FD1C3A}</a:tableStyleId>
               </a:tblPr>
               <a:tblGrid>
-                <a:gridCol w="1467909">
+                <a:gridCol w="1149790">
                   <a:extLst>
                     <a:ext uri="{9D8B030D-6E8A-4147-A177-3AD203B41FA5}">
-                      <a16:colId xmlns:a16="http://schemas.microsoft.com/office/drawing/2014/main" xmlns="" val="20000"/>
+                      <a16:colId xmlns="" xmlns:a16="http://schemas.microsoft.com/office/drawing/2014/main" val="20000"/>
                     </a:ext>
                   </a:extLst>
                 </a:gridCol>
-                <a:gridCol w="3473450">
+                <a:gridCol w="3633457">
                   <a:extLst>
                     <a:ext uri="{9D8B030D-6E8A-4147-A177-3AD203B41FA5}">
-                      <a16:colId xmlns:a16="http://schemas.microsoft.com/office/drawing/2014/main" xmlns="" val="20001"/>
+                      <a16:colId xmlns="" xmlns:a16="http://schemas.microsoft.com/office/drawing/2014/main" val="20001"/>
                     </a:ext>
                   </a:extLst>
                 </a:gridCol>
-                <a:gridCol w="3473450">
+                <a:gridCol w="3781331">
                   <a:extLst>
                     <a:ext uri="{9D8B030D-6E8A-4147-A177-3AD203B41FA5}">
-                      <a16:colId xmlns:a16="http://schemas.microsoft.com/office/drawing/2014/main" xmlns="" val="2530683369"/>
+                      <a16:colId xmlns="" xmlns:a16="http://schemas.microsoft.com/office/drawing/2014/main" val="2530683369"/>
                     </a:ext>
                   </a:extLst>
                 </a:gridCol>
-                <a:gridCol w="3473450">
+                <a:gridCol w="3485583">
                   <a:extLst>
                     <a:ext uri="{9D8B030D-6E8A-4147-A177-3AD203B41FA5}">
-                      <a16:colId xmlns:a16="http://schemas.microsoft.com/office/drawing/2014/main" xmlns="" val="20002"/>
+                      <a16:colId xmlns="" xmlns:a16="http://schemas.microsoft.com/office/drawing/2014/main" val="20002"/>
                     </a:ext>
                   </a:extLst>
                 </a:gridCol>
@@ -4909,15 +5005,12 @@
                     <a:bodyPr/>
                     <a:lstStyle/>
                     <a:p>
-                      <a:pPr algn="ctr" latinLnBrk="0"/>
-                      <a:r>
-                        <a:rPr lang="en-US" sz="1600" b="0" dirty="0" smtClean="0">
-                          <a:latin typeface="+mn-lt"/>
-                          <a:cs typeface="Arial" panose="020B0604020202020204" pitchFamily="34" charset="0"/>
-                        </a:rPr>
-                        <a:t>QA</a:t>
-                      </a:r>
-                      <a:endParaRPr lang="en-US" sz="1600" b="0" dirty="0">
+                      <a:pPr algn="ctr" latinLnBrk="0">
+                        <a:lnSpc>
+                          <a:spcPct val="130000"/>
+                        </a:lnSpc>
+                      </a:pPr>
+                      <a:endParaRPr lang="en-US" sz="1200" b="0">
                         <a:latin typeface="+mn-lt"/>
                         <a:cs typeface="Arial" panose="020B0604020202020204" pitchFamily="34" charset="0"/>
                       </a:endParaRPr>
@@ -4969,7 +5062,7 @@
                     <a:p>
                       <a:pPr marL="0" marR="0" indent="0" algn="ctr" defTabSz="914400" rtl="0" eaLnBrk="1" fontAlgn="auto" latinLnBrk="0" hangingPunct="1">
                         <a:lnSpc>
-                          <a:spcPct val="100000"/>
+                          <a:spcPct val="130000"/>
                         </a:lnSpc>
                         <a:spcBef>
                           <a:spcPts val="0"/>
@@ -4985,7 +5078,7 @@
                         <a:defRPr/>
                       </a:pPr>
                       <a:r>
-                        <a:rPr lang="en-US" sz="1600" b="0" dirty="0" smtClean="0">
+                        <a:rPr lang="en-US" sz="1200" b="0" smtClean="0">
                           <a:effectLst/>
                           <a:latin typeface="+mn-lt"/>
                           <a:ea typeface="Malgun Gothic" panose="020B0503020000020004" pitchFamily="34" charset="-127"/>
@@ -4994,7 +5087,7 @@
                         <a:t>Alt-A</a:t>
                       </a:r>
                       <a:r>
-                        <a:rPr lang="en-US" sz="1600" b="0" baseline="0" dirty="0" smtClean="0">
+                        <a:rPr lang="en-US" sz="1200" b="0" baseline="0" smtClean="0">
                           <a:effectLst/>
                           <a:latin typeface="+mn-lt"/>
                           <a:ea typeface="Malgun Gothic" panose="020B0503020000020004" pitchFamily="34" charset="-127"/>
@@ -5003,7 +5096,7 @@
                         <a:t> – Split </a:t>
                       </a:r>
                       <a:r>
-                        <a:rPr lang="en-US" sz="1600" b="0" baseline="0" dirty="0" err="1" smtClean="0">
+                        <a:rPr lang="en-US" sz="1200" b="0" baseline="0" err="1" smtClean="0">
                           <a:effectLst/>
                           <a:latin typeface="+mn-lt"/>
                           <a:ea typeface="Malgun Gothic" panose="020B0503020000020004" pitchFamily="34" charset="-127"/>
@@ -5011,7 +5104,7 @@
                         </a:rPr>
                         <a:t>RemoteDiag</a:t>
                       </a:r>
-                      <a:endParaRPr lang="en-US" sz="1600" b="0" dirty="0">
+                      <a:endParaRPr lang="en-US" sz="1200" b="0">
                         <a:effectLst/>
                         <a:latin typeface="+mn-lt"/>
                         <a:ea typeface="Malgun Gothic" panose="020B0503020000020004" pitchFamily="34" charset="-127"/>
@@ -5065,7 +5158,7 @@
                     <a:p>
                       <a:pPr marL="0" marR="0" indent="0" algn="ctr" defTabSz="914400" rtl="0" eaLnBrk="1" fontAlgn="auto" latinLnBrk="0" hangingPunct="1">
                         <a:lnSpc>
-                          <a:spcPct val="100000"/>
+                          <a:spcPct val="130000"/>
                         </a:lnSpc>
                         <a:spcBef>
                           <a:spcPts val="0"/>
@@ -5081,7 +5174,7 @@
                         <a:defRPr/>
                       </a:pPr>
                       <a:r>
-                        <a:rPr lang="en-US" sz="1600" b="0" dirty="0" smtClean="0">
+                        <a:rPr lang="en-US" sz="1200" b="0" smtClean="0">
                           <a:effectLst/>
                           <a:latin typeface="+mn-lt"/>
                           <a:ea typeface="Malgun Gothic" panose="020B0503020000020004" pitchFamily="34" charset="-127"/>
@@ -5090,7 +5183,7 @@
                         <a:t>Alt-B: Move </a:t>
                       </a:r>
                       <a:r>
-                        <a:rPr lang="en-US" sz="1600" b="0" dirty="0" err="1" smtClean="0">
+                        <a:rPr lang="en-US" sz="1200" b="0" err="1" smtClean="0">
                           <a:effectLst/>
                           <a:latin typeface="+mn-lt"/>
                           <a:ea typeface="Malgun Gothic" panose="020B0503020000020004" pitchFamily="34" charset="-127"/>
@@ -5098,7 +5191,7 @@
                         </a:rPr>
                         <a:t>RemoteDiag</a:t>
                       </a:r>
-                      <a:endParaRPr lang="en-US" sz="1600" b="0" dirty="0">
+                      <a:endParaRPr lang="en-US" sz="1200" b="0">
                         <a:effectLst/>
                         <a:latin typeface="+mn-lt"/>
                         <a:ea typeface="Malgun Gothic" panose="020B0503020000020004" pitchFamily="34" charset="-127"/>
@@ -5152,7 +5245,7 @@
                     <a:p>
                       <a:pPr marL="0" marR="0" indent="0" algn="ctr" defTabSz="914400" rtl="0" eaLnBrk="1" fontAlgn="auto" latinLnBrk="0" hangingPunct="1">
                         <a:lnSpc>
-                          <a:spcPct val="100000"/>
+                          <a:spcPct val="130000"/>
                         </a:lnSpc>
                         <a:spcBef>
                           <a:spcPts val="0"/>
@@ -5168,7 +5261,7 @@
                         <a:defRPr/>
                       </a:pPr>
                       <a:r>
-                        <a:rPr lang="en-US" sz="1600" b="0" dirty="0" smtClean="0">
+                        <a:rPr lang="en-US" sz="1200" b="0" smtClean="0">
                           <a:effectLst/>
                           <a:latin typeface="+mn-lt"/>
                           <a:cs typeface="Arial" panose="020B0604020202020204" pitchFamily="34" charset="0"/>
@@ -5176,7 +5269,7 @@
                         <a:t>Alt-C: Move </a:t>
                       </a:r>
                       <a:r>
-                        <a:rPr lang="en-US" sz="1600" b="0" dirty="0" err="1" smtClean="0">
+                        <a:rPr lang="en-US" sz="1200" b="0" err="1" smtClean="0">
                           <a:effectLst/>
                           <a:latin typeface="+mn-lt"/>
                           <a:cs typeface="Arial" panose="020B0604020202020204" pitchFamily="34" charset="0"/>
@@ -5184,14 +5277,22 @@
                         <a:t>RemoteDiag</a:t>
                       </a:r>
                       <a:r>
-                        <a:rPr lang="en-US" sz="1600" b="0" dirty="0" smtClean="0">
+                        <a:rPr lang="en-US" sz="1200" b="0" smtClean="0">
                           <a:effectLst/>
                           <a:latin typeface="+mn-lt"/>
                           <a:cs typeface="Arial" panose="020B0604020202020204" pitchFamily="34" charset="0"/>
                         </a:rPr>
-                        <a:t> + Use Proxy</a:t>
+                        <a:t> + </a:t>
                       </a:r>
-                      <a:endParaRPr lang="en-US" sz="1600" b="0" dirty="0">
+                      <a:r>
+                        <a:rPr lang="en-US" sz="1200" b="0" smtClean="0">
+                          <a:effectLst/>
+                          <a:latin typeface="+mn-lt"/>
+                          <a:cs typeface="Arial" panose="020B0604020202020204" pitchFamily="34" charset="0"/>
+                        </a:rPr>
+                        <a:t>Proxy</a:t>
+                      </a:r>
+                      <a:endParaRPr lang="en-US" sz="1200" b="0">
                         <a:effectLst/>
                         <a:latin typeface="+mn-lt"/>
                         <a:ea typeface="Malgun Gothic" panose="020B0503020000020004" pitchFamily="34" charset="-127"/>
@@ -5240,7 +5341,7 @@
                 </a:tc>
                 <a:extLst>
                   <a:ext uri="{0D108BD9-81ED-4DB2-BD59-A6C34878D82A}">
-                    <a16:rowId xmlns:a16="http://schemas.microsoft.com/office/drawing/2014/main" xmlns="" val="10000"/>
+                    <a16:rowId xmlns="" xmlns:a16="http://schemas.microsoft.com/office/drawing/2014/main" val="10000"/>
                   </a:ext>
                 </a:extLst>
               </a:tr>
@@ -5252,11 +5353,11 @@
                     <a:p>
                       <a:pPr algn="ctr" latinLnBrk="0">
                         <a:lnSpc>
-                          <a:spcPct val="150000"/>
+                          <a:spcPct val="130000"/>
                         </a:lnSpc>
                       </a:pPr>
                       <a:r>
-                        <a:rPr lang="en-US" sz="1600" b="0" kern="1200" dirty="0" smtClean="0">
+                        <a:rPr lang="en-US" sz="1200" b="0" kern="1200" smtClean="0">
                           <a:solidFill>
                             <a:schemeClr val="dk1"/>
                           </a:solidFill>
@@ -5267,7 +5368,26 @@
                         </a:rPr>
                         <a:t>QA-01</a:t>
                       </a:r>
-                      <a:endParaRPr lang="en-US" sz="1600" b="0" kern="1200" dirty="0">
+                    </a:p>
+                    <a:p>
+                      <a:pPr algn="ctr" latinLnBrk="0">
+                        <a:lnSpc>
+                          <a:spcPct val="130000"/>
+                        </a:lnSpc>
+                      </a:pPr>
+                      <a:r>
+                        <a:rPr lang="en-US" sz="1200" b="0" kern="1200" smtClean="0">
+                          <a:solidFill>
+                            <a:schemeClr val="dk1"/>
+                          </a:solidFill>
+                          <a:effectLst/>
+                          <a:latin typeface="+mn-lt"/>
+                          <a:ea typeface="+mn-ea"/>
+                          <a:cs typeface="Arial" panose="020B0604020202020204" pitchFamily="34" charset="0"/>
+                        </a:rPr>
+                        <a:t>Security</a:t>
+                      </a:r>
+                      <a:endParaRPr lang="en-US" sz="1200" b="0" kern="1200">
                         <a:solidFill>
                           <a:schemeClr val="dk1"/>
                         </a:solidFill>
@@ -5278,7 +5398,7 @@
                       </a:endParaRPr>
                     </a:p>
                   </a:txBody>
-                  <a:tcPr marL="106700" marR="106700" marT="53350" marB="53350" anchor="ctr">
+                  <a:tcPr marL="106700" marR="106700" marT="53350" marB="53350">
                     <a:lnL w="12700" cap="flat" cmpd="sng" algn="ctr">
                       <a:solidFill>
                         <a:schemeClr val="tx1"/>
@@ -5322,9 +5442,9 @@
                     <a:bodyPr/>
                     <a:lstStyle/>
                     <a:p>
-                      <a:pPr marL="285750" marR="0" indent="-285750" algn="l">
+                      <a:pPr marL="0" marR="0" indent="0" algn="l">
                         <a:lnSpc>
-                          <a:spcPct val="150000"/>
+                          <a:spcPct val="130000"/>
                         </a:lnSpc>
                         <a:spcBef>
                           <a:spcPts val="200"/>
@@ -5332,21 +5452,61 @@
                         <a:spcAft>
                           <a:spcPts val="200"/>
                         </a:spcAft>
-                        <a:buFont typeface="Arial" panose="020B0604020202020204" pitchFamily="34" charset="0"/>
-                        <a:buChar char="•"/>
+                        <a:buFont typeface="Wingdings" panose="05000000000000000000" pitchFamily="2" charset="2"/>
+                        <a:buNone/>
                       </a:pPr>
-                      <a:endParaRPr lang="en-US" sz="1600" b="0" kern="1200" baseline="0" dirty="0">
+                      <a:r>
+                        <a:rPr lang="en-US" sz="1200" b="1" smtClean="0">
+                          <a:solidFill>
+                            <a:srgbClr val="00B050"/>
+                          </a:solidFill>
+                        </a:rPr>
+                        <a:t>High</a:t>
+                      </a:r>
+                      <a:endParaRPr lang="en-US" sz="1200" b="0" smtClean="0">
                         <a:solidFill>
-                          <a:schemeClr val="dk1"/>
+                          <a:schemeClr val="tx1"/>
                         </a:solidFill>
-                        <a:effectLst/>
-                        <a:latin typeface="+mn-lt"/>
-                        <a:ea typeface="+mn-ea"/>
-                        <a:cs typeface="Arial" panose="020B0604020202020204" pitchFamily="34" charset="0"/>
+                      </a:endParaRPr>
+                    </a:p>
+                    <a:p>
+                      <a:pPr marL="0" marR="0" indent="0" algn="l">
+                        <a:lnSpc>
+                          <a:spcPct val="130000"/>
+                        </a:lnSpc>
+                        <a:spcBef>
+                          <a:spcPts val="200"/>
+                        </a:spcBef>
+                        <a:spcAft>
+                          <a:spcPts val="200"/>
+                        </a:spcAft>
+                        <a:buFont typeface="Wingdings" panose="05000000000000000000" pitchFamily="2" charset="2"/>
+                        <a:buNone/>
+                      </a:pPr>
+                      <a:r>
+                        <a:rPr lang="en-US" sz="1200" b="0" smtClean="0">
+                          <a:solidFill>
+                            <a:schemeClr val="tx1"/>
+                          </a:solidFill>
+                        </a:rPr>
+                        <a:t>Unauthorized diagnostic commands are</a:t>
+                      </a:r>
+                      <a:r>
+                        <a:rPr lang="en-US" sz="1200" b="0" baseline="0" smtClean="0">
+                          <a:solidFill>
+                            <a:schemeClr val="tx1"/>
+                          </a:solidFill>
+                        </a:rPr>
+                        <a:t> filtered.</a:t>
+                      </a:r>
+                      <a:endParaRPr lang="en-US" sz="1200" b="0" smtClean="0">
+                        <a:solidFill>
+                          <a:schemeClr val="tx1"/>
+                        </a:solidFill>
                       </a:endParaRPr>
                     </a:p>
                   </a:txBody>
-                  <a:tcPr marL="25400" marR="25400" marT="0" marB="0" anchor="ctr">
+                  <a:tcPr marL="25400" marR="25400" marT="0" marB="0">
                     <a:lnL w="12700" cap="flat" cmpd="sng" algn="ctr">
                       <a:solidFill>
                         <a:schemeClr val="tx1"/>
@@ -5392,7 +5552,110 @@
                     <a:p>
                       <a:pPr marL="0" marR="0" lvl="0" indent="0" algn="l" defTabSz="914400" rtl="0" eaLnBrk="1" fontAlgn="auto" latinLnBrk="0" hangingPunct="1">
                         <a:lnSpc>
-                          <a:spcPct val="150000"/>
+                          <a:spcPct val="130000"/>
+                        </a:lnSpc>
+                        <a:spcBef>
+                          <a:spcPts val="0"/>
+                        </a:spcBef>
+                        <a:spcAft>
+                          <a:spcPts val="0"/>
+                        </a:spcAft>
+                        <a:buClrTx/>
+                        <a:buSzTx/>
+                        <a:buFont typeface="Wingdings" panose="05000000000000000000" pitchFamily="2" charset="2"/>
+                        <a:buNone/>
+                        <a:tabLst/>
+                        <a:defRPr/>
+                      </a:pPr>
+                      <a:r>
+                        <a:rPr lang="en-US" sz="1200" b="1" smtClean="0">
+                          <a:solidFill>
+                            <a:srgbClr val="00B050"/>
+                          </a:solidFill>
+                        </a:rPr>
+                        <a:t>High</a:t>
+                      </a:r>
+                      <a:endParaRPr lang="en-US" sz="1200" b="0" smtClean="0">
+                        <a:solidFill>
+                          <a:schemeClr val="tx1"/>
+                        </a:solidFill>
+                      </a:endParaRPr>
+                    </a:p>
+                    <a:p>
+                      <a:pPr marL="0" marR="0" lvl="0" indent="0" algn="l" defTabSz="914400" rtl="0" eaLnBrk="1" fontAlgn="auto" latinLnBrk="0" hangingPunct="1">
+                        <a:lnSpc>
+                          <a:spcPct val="130000"/>
+                        </a:lnSpc>
+                        <a:spcBef>
+                          <a:spcPts val="0"/>
+                        </a:spcBef>
+                        <a:spcAft>
+                          <a:spcPts val="0"/>
+                        </a:spcAft>
+                        <a:buClrTx/>
+                        <a:buSzTx/>
+                        <a:buFont typeface="Wingdings" panose="05000000000000000000" pitchFamily="2" charset="2"/>
+                        <a:buNone/>
+                        <a:tabLst/>
+                        <a:defRPr/>
+                      </a:pPr>
+                      <a:r>
+                        <a:rPr lang="en-US" sz="1200" b="0" smtClean="0">
+                          <a:solidFill>
+                            <a:schemeClr val="tx1"/>
+                          </a:solidFill>
+                        </a:rPr>
+                        <a:t>Unauthorized diagnostic commands are filtered.</a:t>
+                      </a:r>
+                    </a:p>
+                  </a:txBody>
+                  <a:tcPr marL="106700" marR="106700" marT="53350" marB="53350">
+                    <a:lnL w="12700" cap="flat" cmpd="sng" algn="ctr">
+                      <a:solidFill>
+                        <a:schemeClr val="tx1"/>
+                      </a:solidFill>
+                      <a:prstDash val="solid"/>
+                      <a:round/>
+                      <a:headEnd type="none" w="med" len="med"/>
+                      <a:tailEnd type="none" w="med" len="med"/>
+                    </a:lnL>
+                    <a:lnR w="12700" cap="flat" cmpd="sng" algn="ctr">
+                      <a:solidFill>
+                        <a:schemeClr val="tx1"/>
+                      </a:solidFill>
+                      <a:prstDash val="solid"/>
+                      <a:round/>
+                      <a:headEnd type="none" w="med" len="med"/>
+                      <a:tailEnd type="none" w="med" len="med"/>
+                    </a:lnR>
+                    <a:lnT w="12700" cap="flat" cmpd="sng" algn="ctr">
+                      <a:solidFill>
+                        <a:schemeClr val="tx1"/>
+                      </a:solidFill>
+                      <a:prstDash val="solid"/>
+                      <a:round/>
+                      <a:headEnd type="none" w="med" len="med"/>
+                      <a:tailEnd type="none" w="med" len="med"/>
+                    </a:lnT>
+                    <a:lnB w="12700" cap="flat" cmpd="sng" algn="ctr">
+                      <a:solidFill>
+                        <a:schemeClr val="tx1"/>
+                      </a:solidFill>
+                      <a:prstDash val="solid"/>
+                      <a:round/>
+                      <a:headEnd type="none" w="med" len="med"/>
+                      <a:tailEnd type="none" w="med" len="med"/>
+                    </a:lnB>
+                  </a:tcPr>
+                </a:tc>
+                <a:tc>
+                  <a:txBody>
+                    <a:bodyPr/>
+                    <a:lstStyle/>
+                    <a:p>
+                      <a:pPr marL="0" marR="0" indent="0" algn="l" defTabSz="914400" rtl="0" eaLnBrk="1" fontAlgn="auto" latinLnBrk="0" hangingPunct="1">
+                        <a:lnSpc>
+                          <a:spcPct val="130000"/>
                         </a:lnSpc>
                         <a:spcBef>
                           <a:spcPts val="0"/>
@@ -5407,499 +5670,24 @@
                         <a:tabLst/>
                         <a:defRPr/>
                       </a:pPr>
-                      <a:endParaRPr lang="en-US" sz="1600" b="0" dirty="0"/>
-                    </a:p>
-                  </a:txBody>
-                  <a:tcPr marL="106700" marR="106700" marT="53350" marB="53350" anchor="ctr">
-                    <a:lnL w="12700" cap="flat" cmpd="sng" algn="ctr">
-                      <a:solidFill>
-                        <a:schemeClr val="tx1"/>
-                      </a:solidFill>
-                      <a:prstDash val="solid"/>
-                      <a:round/>
-                      <a:headEnd type="none" w="med" len="med"/>
-                      <a:tailEnd type="none" w="med" len="med"/>
-                    </a:lnL>
-                    <a:lnR w="12700" cap="flat" cmpd="sng" algn="ctr">
-                      <a:solidFill>
-                        <a:schemeClr val="tx1"/>
-                      </a:solidFill>
-                      <a:prstDash val="solid"/>
-                      <a:round/>
-                      <a:headEnd type="none" w="med" len="med"/>
-                      <a:tailEnd type="none" w="med" len="med"/>
-                    </a:lnR>
-                    <a:lnT w="12700" cap="flat" cmpd="sng" algn="ctr">
-                      <a:solidFill>
-                        <a:schemeClr val="tx1"/>
-                      </a:solidFill>
-                      <a:prstDash val="solid"/>
-                      <a:round/>
-                      <a:headEnd type="none" w="med" len="med"/>
-                      <a:tailEnd type="none" w="med" len="med"/>
-                    </a:lnT>
-                    <a:lnB w="12700" cap="flat" cmpd="sng" algn="ctr">
-                      <a:solidFill>
-                        <a:schemeClr val="tx1"/>
-                      </a:solidFill>
-                      <a:prstDash val="solid"/>
-                      <a:round/>
-                      <a:headEnd type="none" w="med" len="med"/>
-                      <a:tailEnd type="none" w="med" len="med"/>
-                    </a:lnB>
-                  </a:tcPr>
-                </a:tc>
-                <a:tc>
-                  <a:txBody>
-                    <a:bodyPr/>
-                    <a:lstStyle/>
-                    <a:p>
-                      <a:pPr algn="ctr" latinLnBrk="0">
-                        <a:lnSpc>
-                          <a:spcPct val="150000"/>
-                        </a:lnSpc>
-                      </a:pPr>
-                      <a:endParaRPr lang="en-US" sz="1600" b="0" dirty="0">
-                        <a:latin typeface="+mn-lt"/>
-                        <a:cs typeface="Arial" panose="020B0604020202020204" pitchFamily="34" charset="0"/>
+                      <a:r>
+                        <a:rPr lang="en-US" sz="1200" b="1" smtClean="0">
+                          <a:solidFill>
+                            <a:srgbClr val="00B050"/>
+                          </a:solidFill>
+                        </a:rPr>
+                        <a:t>High</a:t>
+                      </a:r>
+                      <a:endParaRPr lang="en-US" sz="1200" b="0" smtClean="0">
+                        <a:solidFill>
+                          <a:schemeClr val="tx1"/>
+                        </a:solidFill>
                       </a:endParaRPr>
                     </a:p>
-                  </a:txBody>
-                  <a:tcPr marL="106700" marR="106700" marT="53350" marB="53350" anchor="ctr">
-                    <a:lnL w="12700" cap="flat" cmpd="sng" algn="ctr">
-                      <a:solidFill>
-                        <a:schemeClr val="tx1"/>
-                      </a:solidFill>
-                      <a:prstDash val="solid"/>
-                      <a:round/>
-                      <a:headEnd type="none" w="med" len="med"/>
-                      <a:tailEnd type="none" w="med" len="med"/>
-                    </a:lnL>
-                    <a:lnR w="12700" cap="flat" cmpd="sng" algn="ctr">
-                      <a:solidFill>
-                        <a:schemeClr val="tx1"/>
-                      </a:solidFill>
-                      <a:prstDash val="solid"/>
-                      <a:round/>
-                      <a:headEnd type="none" w="med" len="med"/>
-                      <a:tailEnd type="none" w="med" len="med"/>
-                    </a:lnR>
-                    <a:lnT w="12700" cap="flat" cmpd="sng" algn="ctr">
-                      <a:solidFill>
-                        <a:schemeClr val="tx1"/>
-                      </a:solidFill>
-                      <a:prstDash val="solid"/>
-                      <a:round/>
-                      <a:headEnd type="none" w="med" len="med"/>
-                      <a:tailEnd type="none" w="med" len="med"/>
-                    </a:lnT>
-                    <a:lnB w="12700" cap="flat" cmpd="sng" algn="ctr">
-                      <a:solidFill>
-                        <a:schemeClr val="tx1"/>
-                      </a:solidFill>
-                      <a:prstDash val="solid"/>
-                      <a:round/>
-                      <a:headEnd type="none" w="med" len="med"/>
-                      <a:tailEnd type="none" w="med" len="med"/>
-                    </a:lnB>
-                  </a:tcPr>
-                </a:tc>
-                <a:extLst>
-                  <a:ext uri="{0D108BD9-81ED-4DB2-BD59-A6C34878D82A}">
-                    <a16:rowId xmlns:a16="http://schemas.microsoft.com/office/drawing/2014/main" xmlns="" val="10001"/>
-                  </a:ext>
-                </a:extLst>
-              </a:tr>
-              <a:tr h="0">
-                <a:tc>
-                  <a:txBody>
-                    <a:bodyPr/>
-                    <a:lstStyle/>
-                    <a:p>
-                      <a:pPr algn="ctr" latinLnBrk="0">
-                        <a:lnSpc>
-                          <a:spcPct val="150000"/>
-                        </a:lnSpc>
-                      </a:pPr>
-                      <a:r>
-                        <a:rPr lang="en-US" sz="1600" b="0" kern="1200" dirty="0" smtClean="0">
-                          <a:solidFill>
-                            <a:schemeClr val="dk1"/>
-                          </a:solidFill>
-                          <a:effectLst/>
-                          <a:latin typeface="+mn-lt"/>
-                          <a:ea typeface="+mn-ea"/>
-                          <a:cs typeface="Arial" panose="020B0604020202020204" pitchFamily="34" charset="0"/>
-                        </a:rPr>
-                        <a:t>QA-02</a:t>
-                      </a:r>
-                      <a:endParaRPr lang="en-US" sz="1600" b="0" kern="1200" dirty="0">
-                        <a:solidFill>
-                          <a:schemeClr val="dk1"/>
-                        </a:solidFill>
-                        <a:effectLst/>
-                        <a:latin typeface="+mn-lt"/>
-                        <a:ea typeface="+mn-ea"/>
-                        <a:cs typeface="Arial" panose="020B0604020202020204" pitchFamily="34" charset="0"/>
-                      </a:endParaRPr>
-                    </a:p>
-                  </a:txBody>
-                  <a:tcPr marL="106700" marR="106700" marT="53350" marB="53350" anchor="ctr">
-                    <a:lnL w="12700" cap="flat" cmpd="sng" algn="ctr">
-                      <a:solidFill>
-                        <a:schemeClr val="tx1"/>
-                      </a:solidFill>
-                      <a:prstDash val="solid"/>
-                      <a:round/>
-                      <a:headEnd type="none" w="med" len="med"/>
-                      <a:tailEnd type="none" w="med" len="med"/>
-                    </a:lnL>
-                    <a:lnR w="12700" cap="flat" cmpd="sng" algn="ctr">
-                      <a:solidFill>
-                        <a:schemeClr val="tx1"/>
-                      </a:solidFill>
-                      <a:prstDash val="solid"/>
-                      <a:round/>
-                      <a:headEnd type="none" w="med" len="med"/>
-                      <a:tailEnd type="none" w="med" len="med"/>
-                    </a:lnR>
-                    <a:lnT w="12700" cap="flat" cmpd="sng" algn="ctr">
-                      <a:solidFill>
-                        <a:schemeClr val="tx1"/>
-                      </a:solidFill>
-                      <a:prstDash val="solid"/>
-                      <a:round/>
-                      <a:headEnd type="none" w="med" len="med"/>
-                      <a:tailEnd type="none" w="med" len="med"/>
-                    </a:lnT>
-                    <a:lnB w="12700" cap="flat" cmpd="sng" algn="ctr">
-                      <a:solidFill>
-                        <a:schemeClr val="tx1"/>
-                      </a:solidFill>
-                      <a:prstDash val="solid"/>
-                      <a:round/>
-                      <a:headEnd type="none" w="med" len="med"/>
-                      <a:tailEnd type="none" w="med" len="med"/>
-                    </a:lnB>
-                  </a:tcPr>
-                </a:tc>
-                <a:tc>
-                  <a:txBody>
-                    <a:bodyPr/>
-                    <a:lstStyle/>
-                    <a:p>
-                      <a:pPr marL="0" marR="0" algn="l">
-                        <a:lnSpc>
-                          <a:spcPct val="150000"/>
-                        </a:lnSpc>
-                        <a:spcBef>
-                          <a:spcPts val="200"/>
-                        </a:spcBef>
-                        <a:spcAft>
-                          <a:spcPts val="200"/>
-                        </a:spcAft>
-                      </a:pPr>
-                      <a:endParaRPr lang="en-US" sz="1600" b="0" kern="1200" baseline="0" dirty="0">
-                        <a:solidFill>
-                          <a:schemeClr val="dk1"/>
-                        </a:solidFill>
-                        <a:effectLst/>
-                        <a:latin typeface="+mn-lt"/>
-                        <a:ea typeface="+mn-ea"/>
-                        <a:cs typeface="Arial" panose="020B0604020202020204" pitchFamily="34" charset="0"/>
-                      </a:endParaRPr>
-                    </a:p>
-                  </a:txBody>
-                  <a:tcPr marL="25400" marR="25400" marT="0" marB="0" anchor="ctr">
-                    <a:lnL w="12700" cap="flat" cmpd="sng" algn="ctr">
-                      <a:solidFill>
-                        <a:schemeClr val="tx1"/>
-                      </a:solidFill>
-                      <a:prstDash val="solid"/>
-                      <a:round/>
-                      <a:headEnd type="none" w="med" len="med"/>
-                      <a:tailEnd type="none" w="med" len="med"/>
-                    </a:lnL>
-                    <a:lnR w="12700" cap="flat" cmpd="sng" algn="ctr">
-                      <a:solidFill>
-                        <a:schemeClr val="tx1"/>
-                      </a:solidFill>
-                      <a:prstDash val="solid"/>
-                      <a:round/>
-                      <a:headEnd type="none" w="med" len="med"/>
-                      <a:tailEnd type="none" w="med" len="med"/>
-                    </a:lnR>
-                    <a:lnT w="12700" cap="flat" cmpd="sng" algn="ctr">
-                      <a:solidFill>
-                        <a:schemeClr val="tx1"/>
-                      </a:solidFill>
-                      <a:prstDash val="solid"/>
-                      <a:round/>
-                      <a:headEnd type="none" w="med" len="med"/>
-                      <a:tailEnd type="none" w="med" len="med"/>
-                    </a:lnT>
-                    <a:lnB w="12700" cap="flat" cmpd="sng" algn="ctr">
-                      <a:solidFill>
-                        <a:schemeClr val="tx1"/>
-                      </a:solidFill>
-                      <a:prstDash val="solid"/>
-                      <a:round/>
-                      <a:headEnd type="none" w="med" len="med"/>
-                      <a:tailEnd type="none" w="med" len="med"/>
-                    </a:lnB>
-                  </a:tcPr>
-                </a:tc>
-                <a:tc>
-                  <a:txBody>
-                    <a:bodyPr/>
-                    <a:lstStyle/>
-                    <a:p>
-                      <a:pPr algn="l" latinLnBrk="0">
-                        <a:lnSpc>
-                          <a:spcPct val="150000"/>
-                        </a:lnSpc>
-                      </a:pPr>
-                      <a:endParaRPr lang="en-US" sz="1600" b="0" dirty="0">
-                        <a:latin typeface="+mn-lt"/>
-                        <a:cs typeface="Arial" panose="020B0604020202020204" pitchFamily="34" charset="0"/>
-                      </a:endParaRPr>
-                    </a:p>
-                  </a:txBody>
-                  <a:tcPr marL="106700" marR="106700" marT="53350" marB="53350" anchor="ctr">
-                    <a:lnL w="12700" cap="flat" cmpd="sng" algn="ctr">
-                      <a:solidFill>
-                        <a:schemeClr val="tx1"/>
-                      </a:solidFill>
-                      <a:prstDash val="solid"/>
-                      <a:round/>
-                      <a:headEnd type="none" w="med" len="med"/>
-                      <a:tailEnd type="none" w="med" len="med"/>
-                    </a:lnL>
-                    <a:lnR w="12700" cap="flat" cmpd="sng" algn="ctr">
-                      <a:solidFill>
-                        <a:schemeClr val="tx1"/>
-                      </a:solidFill>
-                      <a:prstDash val="solid"/>
-                      <a:round/>
-                      <a:headEnd type="none" w="med" len="med"/>
-                      <a:tailEnd type="none" w="med" len="med"/>
-                    </a:lnR>
-                    <a:lnT w="12700" cap="flat" cmpd="sng" algn="ctr">
-                      <a:solidFill>
-                        <a:schemeClr val="tx1"/>
-                      </a:solidFill>
-                      <a:prstDash val="solid"/>
-                      <a:round/>
-                      <a:headEnd type="none" w="med" len="med"/>
-                      <a:tailEnd type="none" w="med" len="med"/>
-                    </a:lnT>
-                    <a:lnB w="12700" cap="flat" cmpd="sng" algn="ctr">
-                      <a:solidFill>
-                        <a:schemeClr val="tx1"/>
-                      </a:solidFill>
-                      <a:prstDash val="solid"/>
-                      <a:round/>
-                      <a:headEnd type="none" w="med" len="med"/>
-                      <a:tailEnd type="none" w="med" len="med"/>
-                    </a:lnB>
-                  </a:tcPr>
-                </a:tc>
-                <a:tc>
-                  <a:txBody>
-                    <a:bodyPr/>
-                    <a:lstStyle/>
-                    <a:p>
-                      <a:pPr algn="ctr" latinLnBrk="0">
-                        <a:lnSpc>
-                          <a:spcPct val="150000"/>
-                        </a:lnSpc>
-                      </a:pPr>
-                      <a:endParaRPr lang="en-US" sz="1600" b="0" dirty="0">
-                        <a:latin typeface="+mn-lt"/>
-                        <a:cs typeface="Arial" panose="020B0604020202020204" pitchFamily="34" charset="0"/>
-                      </a:endParaRPr>
-                    </a:p>
-                  </a:txBody>
-                  <a:tcPr marL="106700" marR="106700" marT="53350" marB="53350" anchor="ctr">
-                    <a:lnL w="12700" cap="flat" cmpd="sng" algn="ctr">
-                      <a:solidFill>
-                        <a:schemeClr val="tx1"/>
-                      </a:solidFill>
-                      <a:prstDash val="solid"/>
-                      <a:round/>
-                      <a:headEnd type="none" w="med" len="med"/>
-                      <a:tailEnd type="none" w="med" len="med"/>
-                    </a:lnL>
-                    <a:lnR w="12700" cap="flat" cmpd="sng" algn="ctr">
-                      <a:solidFill>
-                        <a:schemeClr val="tx1"/>
-                      </a:solidFill>
-                      <a:prstDash val="solid"/>
-                      <a:round/>
-                      <a:headEnd type="none" w="med" len="med"/>
-                      <a:tailEnd type="none" w="med" len="med"/>
-                    </a:lnR>
-                    <a:lnT w="12700" cap="flat" cmpd="sng" algn="ctr">
-                      <a:solidFill>
-                        <a:schemeClr val="tx1"/>
-                      </a:solidFill>
-                      <a:prstDash val="solid"/>
-                      <a:round/>
-                      <a:headEnd type="none" w="med" len="med"/>
-                      <a:tailEnd type="none" w="med" len="med"/>
-                    </a:lnT>
-                    <a:lnB w="12700" cap="flat" cmpd="sng" algn="ctr">
-                      <a:solidFill>
-                        <a:schemeClr val="tx1"/>
-                      </a:solidFill>
-                      <a:prstDash val="solid"/>
-                      <a:round/>
-                      <a:headEnd type="none" w="med" len="med"/>
-                      <a:tailEnd type="none" w="med" len="med"/>
-                    </a:lnB>
-                  </a:tcPr>
-                </a:tc>
-                <a:extLst>
-                  <a:ext uri="{0D108BD9-81ED-4DB2-BD59-A6C34878D82A}">
-                    <a16:rowId xmlns:a16="http://schemas.microsoft.com/office/drawing/2014/main" xmlns="" val="10002"/>
-                  </a:ext>
-                </a:extLst>
-              </a:tr>
-              <a:tr h="0">
-                <a:tc>
-                  <a:txBody>
-                    <a:bodyPr/>
-                    <a:lstStyle/>
-                    <a:p>
-                      <a:pPr algn="ctr" latinLnBrk="0">
-                        <a:lnSpc>
-                          <a:spcPct val="150000"/>
-                        </a:lnSpc>
-                      </a:pPr>
-                      <a:endParaRPr lang="en-US" sz="1600" b="0" kern="1200" dirty="0">
-                        <a:solidFill>
-                          <a:schemeClr val="dk1"/>
-                        </a:solidFill>
-                        <a:effectLst/>
-                        <a:latin typeface="+mn-lt"/>
-                        <a:ea typeface="+mn-ea"/>
-                        <a:cs typeface="Arial" panose="020B0604020202020204" pitchFamily="34" charset="0"/>
-                      </a:endParaRPr>
-                    </a:p>
-                  </a:txBody>
-                  <a:tcPr marL="106700" marR="106700" marT="53350" marB="53350" anchor="ctr">
-                    <a:lnL w="12700" cap="flat" cmpd="sng" algn="ctr">
-                      <a:solidFill>
-                        <a:schemeClr val="tx1"/>
-                      </a:solidFill>
-                      <a:prstDash val="solid"/>
-                      <a:round/>
-                      <a:headEnd type="none" w="med" len="med"/>
-                      <a:tailEnd type="none" w="med" len="med"/>
-                    </a:lnL>
-                    <a:lnR w="12700" cap="flat" cmpd="sng" algn="ctr">
-                      <a:solidFill>
-                        <a:schemeClr val="tx1"/>
-                      </a:solidFill>
-                      <a:prstDash val="solid"/>
-                      <a:round/>
-                      <a:headEnd type="none" w="med" len="med"/>
-                      <a:tailEnd type="none" w="med" len="med"/>
-                    </a:lnR>
-                    <a:lnT w="12700" cap="flat" cmpd="sng" algn="ctr">
-                      <a:solidFill>
-                        <a:schemeClr val="tx1"/>
-                      </a:solidFill>
-                      <a:prstDash val="solid"/>
-                      <a:round/>
-                      <a:headEnd type="none" w="med" len="med"/>
-                      <a:tailEnd type="none" w="med" len="med"/>
-                    </a:lnT>
-                    <a:lnB w="12700" cap="flat" cmpd="sng" algn="ctr">
-                      <a:solidFill>
-                        <a:schemeClr val="tx1"/>
-                      </a:solidFill>
-                      <a:prstDash val="solid"/>
-                      <a:round/>
-                      <a:headEnd type="none" w="med" len="med"/>
-                      <a:tailEnd type="none" w="med" len="med"/>
-                    </a:lnB>
-                  </a:tcPr>
-                </a:tc>
-                <a:tc>
-                  <a:txBody>
-                    <a:bodyPr/>
-                    <a:lstStyle/>
-                    <a:p>
-                      <a:pPr marL="0" marR="0" algn="just">
-                        <a:lnSpc>
-                          <a:spcPct val="150000"/>
-                        </a:lnSpc>
-                        <a:spcBef>
-                          <a:spcPts val="200"/>
-                        </a:spcBef>
-                        <a:spcAft>
-                          <a:spcPts val="200"/>
-                        </a:spcAft>
-                      </a:pPr>
-                      <a:endParaRPr lang="en-US" sz="1600" b="0" kern="1200" baseline="0" dirty="0">
-                        <a:solidFill>
-                          <a:schemeClr val="dk1"/>
-                        </a:solidFill>
-                        <a:effectLst/>
-                        <a:latin typeface="+mn-lt"/>
-                        <a:ea typeface="+mn-ea"/>
-                        <a:cs typeface="Arial" panose="020B0604020202020204" pitchFamily="34" charset="0"/>
-                      </a:endParaRPr>
-                    </a:p>
-                  </a:txBody>
-                  <a:tcPr marL="25400" marR="25400" marT="0" marB="0" anchor="ctr">
-                    <a:lnL w="12700" cap="flat" cmpd="sng" algn="ctr">
-                      <a:solidFill>
-                        <a:schemeClr val="tx1"/>
-                      </a:solidFill>
-                      <a:prstDash val="solid"/>
-                      <a:round/>
-                      <a:headEnd type="none" w="med" len="med"/>
-                      <a:tailEnd type="none" w="med" len="med"/>
-                    </a:lnL>
-                    <a:lnR w="12700" cap="flat" cmpd="sng" algn="ctr">
-                      <a:solidFill>
-                        <a:schemeClr val="tx1"/>
-                      </a:solidFill>
-                      <a:prstDash val="solid"/>
-                      <a:round/>
-                      <a:headEnd type="none" w="med" len="med"/>
-                      <a:tailEnd type="none" w="med" len="med"/>
-                    </a:lnR>
-                    <a:lnT w="12700" cap="flat" cmpd="sng" algn="ctr">
-                      <a:solidFill>
-                        <a:schemeClr val="tx1"/>
-                      </a:solidFill>
-                      <a:prstDash val="solid"/>
-                      <a:round/>
-                      <a:headEnd type="none" w="med" len="med"/>
-                      <a:tailEnd type="none" w="med" len="med"/>
-                    </a:lnT>
-                    <a:lnB w="12700" cap="flat" cmpd="sng" algn="ctr">
-                      <a:solidFill>
-                        <a:schemeClr val="tx1"/>
-                      </a:solidFill>
-                      <a:prstDash val="solid"/>
-                      <a:round/>
-                      <a:headEnd type="none" w="med" len="med"/>
-                      <a:tailEnd type="none" w="med" len="med"/>
-                    </a:lnB>
-                  </a:tcPr>
-                </a:tc>
-                <a:tc>
-                  <a:txBody>
-                    <a:bodyPr/>
-                    <a:lstStyle/>
                     <a:p>
                       <a:pPr marL="0" marR="0" indent="0" algn="l" defTabSz="914400" rtl="0" eaLnBrk="1" fontAlgn="auto" latinLnBrk="0" hangingPunct="1">
                         <a:lnSpc>
-                          <a:spcPct val="150000"/>
+                          <a:spcPct val="130000"/>
                         </a:lnSpc>
                         <a:spcBef>
                           <a:spcPts val="0"/>
@@ -5914,15 +5702,115 @@
                         <a:tabLst/>
                         <a:defRPr/>
                       </a:pPr>
-                      <a:endParaRPr lang="en-US" sz="1600" b="0" dirty="0">
+                      <a:r>
+                        <a:rPr lang="en-US" sz="1200" b="0" smtClean="0">
+                          <a:solidFill>
+                            <a:schemeClr val="tx1"/>
+                          </a:solidFill>
+                        </a:rPr>
+                        <a:t>Unauthorized diagnostic commands are filtered.</a:t>
+                      </a:r>
+                    </a:p>
+                  </a:txBody>
+                  <a:tcPr marL="106700" marR="106700" marT="53350" marB="53350">
+                    <a:lnL w="12700" cap="flat" cmpd="sng" algn="ctr">
+                      <a:solidFill>
+                        <a:schemeClr val="tx1"/>
+                      </a:solidFill>
+                      <a:prstDash val="solid"/>
+                      <a:round/>
+                      <a:headEnd type="none" w="med" len="med"/>
+                      <a:tailEnd type="none" w="med" len="med"/>
+                    </a:lnL>
+                    <a:lnR w="12700" cap="flat" cmpd="sng" algn="ctr">
+                      <a:solidFill>
+                        <a:schemeClr val="tx1"/>
+                      </a:solidFill>
+                      <a:prstDash val="solid"/>
+                      <a:round/>
+                      <a:headEnd type="none" w="med" len="med"/>
+                      <a:tailEnd type="none" w="med" len="med"/>
+                    </a:lnR>
+                    <a:lnT w="12700" cap="flat" cmpd="sng" algn="ctr">
+                      <a:solidFill>
+                        <a:schemeClr val="tx1"/>
+                      </a:solidFill>
+                      <a:prstDash val="solid"/>
+                      <a:round/>
+                      <a:headEnd type="none" w="med" len="med"/>
+                      <a:tailEnd type="none" w="med" len="med"/>
+                    </a:lnT>
+                    <a:lnB w="12700" cap="flat" cmpd="sng" algn="ctr">
+                      <a:solidFill>
+                        <a:schemeClr val="tx1"/>
+                      </a:solidFill>
+                      <a:prstDash val="solid"/>
+                      <a:round/>
+                      <a:headEnd type="none" w="med" len="med"/>
+                      <a:tailEnd type="none" w="med" len="med"/>
+                    </a:lnB>
+                  </a:tcPr>
+                </a:tc>
+                <a:extLst>
+                  <a:ext uri="{0D108BD9-81ED-4DB2-BD59-A6C34878D82A}">
+                    <a16:rowId xmlns="" xmlns:a16="http://schemas.microsoft.com/office/drawing/2014/main" val="10001"/>
+                  </a:ext>
+                </a:extLst>
+              </a:tr>
+              <a:tr h="0">
+                <a:tc>
+                  <a:txBody>
+                    <a:bodyPr/>
+                    <a:lstStyle/>
+                    <a:p>
+                      <a:pPr algn="ctr" latinLnBrk="0">
+                        <a:lnSpc>
+                          <a:spcPct val="130000"/>
+                        </a:lnSpc>
+                      </a:pPr>
+                      <a:r>
+                        <a:rPr lang="en-US" sz="1200" b="0" kern="1200" smtClean="0">
+                          <a:solidFill>
+                            <a:schemeClr val="dk1"/>
+                          </a:solidFill>
+                          <a:effectLst/>
+                          <a:latin typeface="+mn-lt"/>
+                          <a:ea typeface="+mn-ea"/>
+                          <a:cs typeface="Arial" panose="020B0604020202020204" pitchFamily="34" charset="0"/>
+                        </a:rPr>
+                        <a:t>QA-02</a:t>
+                      </a:r>
+                    </a:p>
+                    <a:p>
+                      <a:pPr algn="ctr" latinLnBrk="0">
+                        <a:lnSpc>
+                          <a:spcPct val="130000"/>
+                        </a:lnSpc>
+                      </a:pPr>
+                      <a:r>
+                        <a:rPr lang="en-US" sz="1200" b="0" kern="1200" smtClean="0">
+                          <a:solidFill>
+                            <a:schemeClr val="dk1"/>
+                          </a:solidFill>
+                          <a:effectLst/>
+                          <a:latin typeface="+mn-lt"/>
+                          <a:ea typeface="+mn-ea"/>
+                          <a:cs typeface="Arial" panose="020B0604020202020204" pitchFamily="34" charset="0"/>
+                        </a:rPr>
+                        <a:t>Security</a:t>
+                      </a:r>
+                      <a:endParaRPr lang="en-US" sz="1200" b="0" kern="1200">
+                        <a:solidFill>
+                          <a:schemeClr val="dk1"/>
+                        </a:solidFill>
                         <a:effectLst/>
                         <a:latin typeface="+mn-lt"/>
-                        <a:ea typeface="Malgun Gothic" panose="020B0503020000020004" pitchFamily="34" charset="-127"/>
+                        <a:ea typeface="+mn-ea"/>
                         <a:cs typeface="Arial" panose="020B0604020202020204" pitchFamily="34" charset="0"/>
                       </a:endParaRPr>
                     </a:p>
                   </a:txBody>
-                  <a:tcPr marL="106700" marR="106700" marT="53350" marB="53350" anchor="ctr">
+                  <a:tcPr marL="106700" marR="106700" marT="53350" marB="53350">
                     <a:lnL w="12700" cap="flat" cmpd="sng" algn="ctr">
                       <a:solidFill>
                         <a:schemeClr val="tx1"/>
@@ -5966,9 +5854,508 @@
                     <a:bodyPr/>
                     <a:lstStyle/>
                     <a:p>
-                      <a:pPr marL="0" marR="0" indent="0" algn="ctr" defTabSz="914400" rtl="0" eaLnBrk="1" fontAlgn="auto" latinLnBrk="0" hangingPunct="1">
+                      <a:pPr marL="0" marR="0" indent="0" algn="l">
                         <a:lnSpc>
-                          <a:spcPct val="150000"/>
+                          <a:spcPct val="130000"/>
+                        </a:lnSpc>
+                        <a:spcBef>
+                          <a:spcPts val="200"/>
+                        </a:spcBef>
+                        <a:spcAft>
+                          <a:spcPts val="200"/>
+                        </a:spcAft>
+                        <a:buFont typeface="Wingdings" panose="05000000000000000000" pitchFamily="2" charset="2"/>
+                        <a:buNone/>
+                      </a:pPr>
+                      <a:r>
+                        <a:rPr lang="en-US" sz="1200" b="1" smtClean="0">
+                          <a:solidFill>
+                            <a:srgbClr val="00B050"/>
+                          </a:solidFill>
+                        </a:rPr>
+                        <a:t>High</a:t>
+                      </a:r>
+                      <a:endParaRPr lang="en-US" sz="1200" b="0" kern="1200" baseline="0" smtClean="0">
+                        <a:solidFill>
+                          <a:schemeClr val="dk1"/>
+                        </a:solidFill>
+                        <a:effectLst/>
+                        <a:latin typeface="+mn-lt"/>
+                        <a:ea typeface="+mn-ea"/>
+                        <a:cs typeface="Arial" panose="020B0604020202020204" pitchFamily="34" charset="0"/>
+                      </a:endParaRPr>
+                    </a:p>
+                    <a:p>
+                      <a:pPr marL="0" marR="0" indent="0" algn="l">
+                        <a:lnSpc>
+                          <a:spcPct val="130000"/>
+                        </a:lnSpc>
+                        <a:spcBef>
+                          <a:spcPts val="200"/>
+                        </a:spcBef>
+                        <a:spcAft>
+                          <a:spcPts val="200"/>
+                        </a:spcAft>
+                        <a:buFont typeface="Wingdings" panose="05000000000000000000" pitchFamily="2" charset="2"/>
+                        <a:buNone/>
+                      </a:pPr>
+                      <a:r>
+                        <a:rPr lang="en-US" sz="1200" b="0" kern="1200" baseline="0" smtClean="0">
+                          <a:solidFill>
+                            <a:schemeClr val="dk1"/>
+                          </a:solidFill>
+                          <a:effectLst/>
+                          <a:latin typeface="+mn-lt"/>
+                          <a:ea typeface="+mn-ea"/>
+                          <a:cs typeface="Arial" panose="020B0604020202020204" pitchFamily="34" charset="0"/>
+                        </a:rPr>
+                        <a:t>MM ECU diagnostic traffic remains within the EP container.</a:t>
+                      </a:r>
+                      <a:endParaRPr lang="en-US" sz="1200" b="0" kern="1200" baseline="0">
+                        <a:solidFill>
+                          <a:schemeClr val="dk1"/>
+                        </a:solidFill>
+                        <a:effectLst/>
+                        <a:latin typeface="+mn-lt"/>
+                        <a:ea typeface="+mn-ea"/>
+                        <a:cs typeface="Arial" panose="020B0604020202020204" pitchFamily="34" charset="0"/>
+                      </a:endParaRPr>
+                    </a:p>
+                  </a:txBody>
+                  <a:tcPr marL="25400" marR="25400" marT="0" marB="0">
+                    <a:lnL w="12700" cap="flat" cmpd="sng" algn="ctr">
+                      <a:solidFill>
+                        <a:schemeClr val="tx1"/>
+                      </a:solidFill>
+                      <a:prstDash val="solid"/>
+                      <a:round/>
+                      <a:headEnd type="none" w="med" len="med"/>
+                      <a:tailEnd type="none" w="med" len="med"/>
+                    </a:lnL>
+                    <a:lnR w="12700" cap="flat" cmpd="sng" algn="ctr">
+                      <a:solidFill>
+                        <a:schemeClr val="tx1"/>
+                      </a:solidFill>
+                      <a:prstDash val="solid"/>
+                      <a:round/>
+                      <a:headEnd type="none" w="med" len="med"/>
+                      <a:tailEnd type="none" w="med" len="med"/>
+                    </a:lnR>
+                    <a:lnT w="12700" cap="flat" cmpd="sng" algn="ctr">
+                      <a:solidFill>
+                        <a:schemeClr val="tx1"/>
+                      </a:solidFill>
+                      <a:prstDash val="solid"/>
+                      <a:round/>
+                      <a:headEnd type="none" w="med" len="med"/>
+                      <a:tailEnd type="none" w="med" len="med"/>
+                    </a:lnT>
+                    <a:lnB w="12700" cap="flat" cmpd="sng" algn="ctr">
+                      <a:solidFill>
+                        <a:schemeClr val="tx1"/>
+                      </a:solidFill>
+                      <a:prstDash val="solid"/>
+                      <a:round/>
+                      <a:headEnd type="none" w="med" len="med"/>
+                      <a:tailEnd type="none" w="med" len="med"/>
+                    </a:lnB>
+                  </a:tcPr>
+                </a:tc>
+                <a:tc>
+                  <a:txBody>
+                    <a:bodyPr/>
+                    <a:lstStyle/>
+                    <a:p>
+                      <a:pPr algn="l" latinLnBrk="0">
+                        <a:lnSpc>
+                          <a:spcPct val="130000"/>
+                        </a:lnSpc>
+                      </a:pPr>
+                      <a:r>
+                        <a:rPr lang="en-US" sz="1200" b="1" smtClean="0">
+                          <a:solidFill>
+                            <a:srgbClr val="00B050"/>
+                          </a:solidFill>
+                        </a:rPr>
+                        <a:t>High</a:t>
+                      </a:r>
+                    </a:p>
+                    <a:p>
+                      <a:pPr marL="0" marR="0" indent="0" algn="l">
+                        <a:lnSpc>
+                          <a:spcPct val="130000"/>
+                        </a:lnSpc>
+                        <a:spcBef>
+                          <a:spcPts val="200"/>
+                        </a:spcBef>
+                        <a:spcAft>
+                          <a:spcPts val="200"/>
+                        </a:spcAft>
+                        <a:buFont typeface="Wingdings" panose="05000000000000000000" pitchFamily="2" charset="2"/>
+                        <a:buNone/>
+                      </a:pPr>
+                      <a:r>
+                        <a:rPr lang="en-US" sz="1200" b="0" kern="1200" baseline="0" smtClean="0">
+                          <a:solidFill>
+                            <a:schemeClr val="dk1"/>
+                          </a:solidFill>
+                          <a:effectLst/>
+                          <a:latin typeface="+mn-lt"/>
+                          <a:ea typeface="+mn-ea"/>
+                          <a:cs typeface="Arial" panose="020B0604020202020204" pitchFamily="34" charset="0"/>
+                        </a:rPr>
+                        <a:t>MM ECU diagnostic traffic remains within the EP container.</a:t>
+                      </a:r>
+                      <a:endParaRPr lang="en-US" sz="1200" b="0" kern="1200" baseline="0">
+                        <a:solidFill>
+                          <a:schemeClr val="dk1"/>
+                        </a:solidFill>
+                        <a:effectLst/>
+                        <a:latin typeface="+mn-lt"/>
+                        <a:ea typeface="+mn-ea"/>
+                        <a:cs typeface="Arial" panose="020B0604020202020204" pitchFamily="34" charset="0"/>
+                      </a:endParaRPr>
+                    </a:p>
+                  </a:txBody>
+                  <a:tcPr marL="106700" marR="106700" marT="53350" marB="53350">
+                    <a:lnL w="12700" cap="flat" cmpd="sng" algn="ctr">
+                      <a:solidFill>
+                        <a:schemeClr val="tx1"/>
+                      </a:solidFill>
+                      <a:prstDash val="solid"/>
+                      <a:round/>
+                      <a:headEnd type="none" w="med" len="med"/>
+                      <a:tailEnd type="none" w="med" len="med"/>
+                    </a:lnL>
+                    <a:lnR w="12700" cap="flat" cmpd="sng" algn="ctr">
+                      <a:solidFill>
+                        <a:schemeClr val="tx1"/>
+                      </a:solidFill>
+                      <a:prstDash val="solid"/>
+                      <a:round/>
+                      <a:headEnd type="none" w="med" len="med"/>
+                      <a:tailEnd type="none" w="med" len="med"/>
+                    </a:lnR>
+                    <a:lnT w="12700" cap="flat" cmpd="sng" algn="ctr">
+                      <a:solidFill>
+                        <a:schemeClr val="tx1"/>
+                      </a:solidFill>
+                      <a:prstDash val="solid"/>
+                      <a:round/>
+                      <a:headEnd type="none" w="med" len="med"/>
+                      <a:tailEnd type="none" w="med" len="med"/>
+                    </a:lnT>
+                    <a:lnB w="12700" cap="flat" cmpd="sng" algn="ctr">
+                      <a:solidFill>
+                        <a:schemeClr val="tx1"/>
+                      </a:solidFill>
+                      <a:prstDash val="solid"/>
+                      <a:round/>
+                      <a:headEnd type="none" w="med" len="med"/>
+                      <a:tailEnd type="none" w="med" len="med"/>
+                    </a:lnB>
+                  </a:tcPr>
+                </a:tc>
+                <a:tc>
+                  <a:txBody>
+                    <a:bodyPr/>
+                    <a:lstStyle/>
+                    <a:p>
+                      <a:pPr algn="l" latinLnBrk="0">
+                        <a:lnSpc>
+                          <a:spcPct val="130000"/>
+                        </a:lnSpc>
+                      </a:pPr>
+                      <a:r>
+                        <a:rPr lang="en-US" sz="1200" b="1" smtClean="0">
+                          <a:solidFill>
+                            <a:srgbClr val="00B050"/>
+                          </a:solidFill>
+                        </a:rPr>
+                        <a:t>High</a:t>
+                      </a:r>
+                    </a:p>
+                    <a:p>
+                      <a:pPr marL="0" marR="0" indent="0" algn="l">
+                        <a:lnSpc>
+                          <a:spcPct val="130000"/>
+                        </a:lnSpc>
+                        <a:spcBef>
+                          <a:spcPts val="200"/>
+                        </a:spcBef>
+                        <a:spcAft>
+                          <a:spcPts val="200"/>
+                        </a:spcAft>
+                        <a:buFont typeface="Wingdings" panose="05000000000000000000" pitchFamily="2" charset="2"/>
+                        <a:buNone/>
+                      </a:pPr>
+                      <a:r>
+                        <a:rPr lang="en-US" sz="1200" b="0" kern="1200" baseline="0" smtClean="0">
+                          <a:solidFill>
+                            <a:schemeClr val="dk1"/>
+                          </a:solidFill>
+                          <a:effectLst/>
+                          <a:latin typeface="+mn-lt"/>
+                          <a:ea typeface="+mn-ea"/>
+                          <a:cs typeface="Arial" panose="020B0604020202020204" pitchFamily="34" charset="0"/>
+                        </a:rPr>
+                        <a:t>MM ECU diagnostic traffic remains within the EP container.</a:t>
+                      </a:r>
+                      <a:endParaRPr lang="en-US" sz="1200" b="0" kern="1200" baseline="0">
+                        <a:solidFill>
+                          <a:schemeClr val="dk1"/>
+                        </a:solidFill>
+                        <a:effectLst/>
+                        <a:latin typeface="+mn-lt"/>
+                        <a:ea typeface="+mn-ea"/>
+                        <a:cs typeface="Arial" panose="020B0604020202020204" pitchFamily="34" charset="0"/>
+                      </a:endParaRPr>
+                    </a:p>
+                  </a:txBody>
+                  <a:tcPr marL="106700" marR="106700" marT="53350" marB="53350">
+                    <a:lnL w="12700" cap="flat" cmpd="sng" algn="ctr">
+                      <a:solidFill>
+                        <a:schemeClr val="tx1"/>
+                      </a:solidFill>
+                      <a:prstDash val="solid"/>
+                      <a:round/>
+                      <a:headEnd type="none" w="med" len="med"/>
+                      <a:tailEnd type="none" w="med" len="med"/>
+                    </a:lnL>
+                    <a:lnR w="12700" cap="flat" cmpd="sng" algn="ctr">
+                      <a:solidFill>
+                        <a:schemeClr val="tx1"/>
+                      </a:solidFill>
+                      <a:prstDash val="solid"/>
+                      <a:round/>
+                      <a:headEnd type="none" w="med" len="med"/>
+                      <a:tailEnd type="none" w="med" len="med"/>
+                    </a:lnR>
+                    <a:lnT w="12700" cap="flat" cmpd="sng" algn="ctr">
+                      <a:solidFill>
+                        <a:schemeClr val="tx1"/>
+                      </a:solidFill>
+                      <a:prstDash val="solid"/>
+                      <a:round/>
+                      <a:headEnd type="none" w="med" len="med"/>
+                      <a:tailEnd type="none" w="med" len="med"/>
+                    </a:lnT>
+                    <a:lnB w="12700" cap="flat" cmpd="sng" algn="ctr">
+                      <a:solidFill>
+                        <a:schemeClr val="tx1"/>
+                      </a:solidFill>
+                      <a:prstDash val="solid"/>
+                      <a:round/>
+                      <a:headEnd type="none" w="med" len="med"/>
+                      <a:tailEnd type="none" w="med" len="med"/>
+                    </a:lnB>
+                  </a:tcPr>
+                </a:tc>
+                <a:extLst>
+                  <a:ext uri="{0D108BD9-81ED-4DB2-BD59-A6C34878D82A}">
+                    <a16:rowId xmlns="" xmlns:a16="http://schemas.microsoft.com/office/drawing/2014/main" val="10002"/>
+                  </a:ext>
+                </a:extLst>
+              </a:tr>
+              <a:tr h="0">
+                <a:tc>
+                  <a:txBody>
+                    <a:bodyPr/>
+                    <a:lstStyle/>
+                    <a:p>
+                      <a:pPr algn="ctr" latinLnBrk="0">
+                        <a:lnSpc>
+                          <a:spcPct val="130000"/>
+                        </a:lnSpc>
+                      </a:pPr>
+                      <a:r>
+                        <a:rPr lang="en-US" sz="1200" b="0" kern="1200" smtClean="0">
+                          <a:solidFill>
+                            <a:schemeClr val="dk1"/>
+                          </a:solidFill>
+                          <a:effectLst/>
+                          <a:latin typeface="+mn-lt"/>
+                          <a:ea typeface="+mn-ea"/>
+                          <a:cs typeface="Arial" panose="020B0604020202020204" pitchFamily="34" charset="0"/>
+                        </a:rPr>
+                        <a:t>QA-03</a:t>
+                      </a:r>
+                    </a:p>
+                    <a:p>
+                      <a:pPr algn="ctr" latinLnBrk="0">
+                        <a:lnSpc>
+                          <a:spcPct val="130000"/>
+                        </a:lnSpc>
+                      </a:pPr>
+                      <a:r>
+                        <a:rPr lang="en-US" sz="1200" b="0" kern="1200" smtClean="0">
+                          <a:solidFill>
+                            <a:schemeClr val="dk1"/>
+                          </a:solidFill>
+                          <a:effectLst/>
+                          <a:latin typeface="+mn-lt"/>
+                          <a:ea typeface="+mn-ea"/>
+                          <a:cs typeface="Arial" panose="020B0604020202020204" pitchFamily="34" charset="0"/>
+                        </a:rPr>
+                        <a:t>Modifiability</a:t>
+                      </a:r>
+                      <a:endParaRPr lang="en-US" sz="1200" b="0" kern="1200">
+                        <a:solidFill>
+                          <a:schemeClr val="dk1"/>
+                        </a:solidFill>
+                        <a:effectLst/>
+                        <a:latin typeface="+mn-lt"/>
+                        <a:ea typeface="+mn-ea"/>
+                        <a:cs typeface="Arial" panose="020B0604020202020204" pitchFamily="34" charset="0"/>
+                      </a:endParaRPr>
+                    </a:p>
+                  </a:txBody>
+                  <a:tcPr marL="106700" marR="106700" marT="53350" marB="53350" anchor="ctr">
+                    <a:lnL w="12700" cap="flat" cmpd="sng" algn="ctr">
+                      <a:solidFill>
+                        <a:schemeClr val="tx1"/>
+                      </a:solidFill>
+                      <a:prstDash val="solid"/>
+                      <a:round/>
+                      <a:headEnd type="none" w="med" len="med"/>
+                      <a:tailEnd type="none" w="med" len="med"/>
+                    </a:lnL>
+                    <a:lnR w="12700" cap="flat" cmpd="sng" algn="ctr">
+                      <a:solidFill>
+                        <a:schemeClr val="tx1"/>
+                      </a:solidFill>
+                      <a:prstDash val="solid"/>
+                      <a:round/>
+                      <a:headEnd type="none" w="med" len="med"/>
+                      <a:tailEnd type="none" w="med" len="med"/>
+                    </a:lnR>
+                    <a:lnT w="12700" cap="flat" cmpd="sng" algn="ctr">
+                      <a:solidFill>
+                        <a:schemeClr val="tx1"/>
+                      </a:solidFill>
+                      <a:prstDash val="solid"/>
+                      <a:round/>
+                      <a:headEnd type="none" w="med" len="med"/>
+                      <a:tailEnd type="none" w="med" len="med"/>
+                    </a:lnT>
+                    <a:lnB w="12700" cap="flat" cmpd="sng" algn="ctr">
+                      <a:solidFill>
+                        <a:schemeClr val="tx1"/>
+                      </a:solidFill>
+                      <a:prstDash val="solid"/>
+                      <a:round/>
+                      <a:headEnd type="none" w="med" len="med"/>
+                      <a:tailEnd type="none" w="med" len="med"/>
+                    </a:lnB>
+                  </a:tcPr>
+                </a:tc>
+                <a:tc>
+                  <a:txBody>
+                    <a:bodyPr/>
+                    <a:lstStyle/>
+                    <a:p>
+                      <a:pPr marL="0" marR="0" algn="l">
+                        <a:lnSpc>
+                          <a:spcPct val="130000"/>
+                        </a:lnSpc>
+                        <a:spcBef>
+                          <a:spcPts val="200"/>
+                        </a:spcBef>
+                        <a:spcAft>
+                          <a:spcPts val="200"/>
+                        </a:spcAft>
+                      </a:pPr>
+                      <a:r>
+                        <a:rPr lang="en-US" sz="1200" b="1" smtClean="0">
+                          <a:solidFill>
+                            <a:srgbClr val="FF0000"/>
+                          </a:solidFill>
+                        </a:rPr>
+                        <a:t>Low</a:t>
+                      </a:r>
+                      <a:endParaRPr lang="en-US" sz="1200" b="1" kern="1200" baseline="0" smtClean="0">
+                        <a:solidFill>
+                          <a:schemeClr val="dk1"/>
+                        </a:solidFill>
+                        <a:effectLst/>
+                        <a:latin typeface="+mn-lt"/>
+                        <a:ea typeface="+mn-ea"/>
+                        <a:cs typeface="Arial" panose="020B0604020202020204" pitchFamily="34" charset="0"/>
+                      </a:endParaRPr>
+                    </a:p>
+                    <a:p>
+                      <a:pPr marL="0" marR="0" algn="l">
+                        <a:lnSpc>
+                          <a:spcPct val="130000"/>
+                        </a:lnSpc>
+                        <a:spcBef>
+                          <a:spcPts val="200"/>
+                        </a:spcBef>
+                        <a:spcAft>
+                          <a:spcPts val="200"/>
+                        </a:spcAft>
+                      </a:pPr>
+                      <a:r>
+                        <a:rPr lang="en-US" sz="1200" b="0" kern="1200" baseline="0" smtClean="0">
+                          <a:solidFill>
+                            <a:schemeClr val="dk1"/>
+                          </a:solidFill>
+                          <a:effectLst/>
+                          <a:latin typeface="+mn-lt"/>
+                          <a:ea typeface="+mn-ea"/>
+                          <a:cs typeface="Arial" panose="020B0604020202020204" pitchFamily="34" charset="0"/>
+                        </a:rPr>
+                        <a:t>Responsibilities of RemoteDiag and OnBoardClient change (diagnostic priority control moves to OnBoardClient), requiring updates to requirements and specifications..</a:t>
+                      </a:r>
+                    </a:p>
+                  </a:txBody>
+                  <a:tcPr marL="25400" marR="25400" marT="0" marB="0">
+                    <a:lnL w="12700" cap="flat" cmpd="sng" algn="ctr">
+                      <a:solidFill>
+                        <a:schemeClr val="tx1"/>
+                      </a:solidFill>
+                      <a:prstDash val="solid"/>
+                      <a:round/>
+                      <a:headEnd type="none" w="med" len="med"/>
+                      <a:tailEnd type="none" w="med" len="med"/>
+                    </a:lnL>
+                    <a:lnR w="12700" cap="flat" cmpd="sng" algn="ctr">
+                      <a:solidFill>
+                        <a:schemeClr val="tx1"/>
+                      </a:solidFill>
+                      <a:prstDash val="solid"/>
+                      <a:round/>
+                      <a:headEnd type="none" w="med" len="med"/>
+                      <a:tailEnd type="none" w="med" len="med"/>
+                    </a:lnR>
+                    <a:lnT w="12700" cap="flat" cmpd="sng" algn="ctr">
+                      <a:solidFill>
+                        <a:schemeClr val="tx1"/>
+                      </a:solidFill>
+                      <a:prstDash val="solid"/>
+                      <a:round/>
+                      <a:headEnd type="none" w="med" len="med"/>
+                      <a:tailEnd type="none" w="med" len="med"/>
+                    </a:lnT>
+                    <a:lnB w="12700" cap="flat" cmpd="sng" algn="ctr">
+                      <a:solidFill>
+                        <a:schemeClr val="tx1"/>
+                      </a:solidFill>
+                      <a:prstDash val="solid"/>
+                      <a:round/>
+                      <a:headEnd type="none" w="med" len="med"/>
+                      <a:tailEnd type="none" w="med" len="med"/>
+                    </a:lnB>
+                  </a:tcPr>
+                </a:tc>
+                <a:tc>
+                  <a:txBody>
+                    <a:bodyPr/>
+                    <a:lstStyle/>
+                    <a:p>
+                      <a:pPr marL="0" marR="0" indent="0" algn="l" defTabSz="914400" rtl="0" eaLnBrk="1" fontAlgn="auto" latinLnBrk="0" hangingPunct="1">
+                        <a:lnSpc>
+                          <a:spcPct val="130000"/>
                         </a:lnSpc>
                         <a:spcBef>
                           <a:spcPts val="0"/>
@@ -5983,194 +6370,19 @@
                         <a:tabLst/>
                         <a:defRPr/>
                       </a:pPr>
-                      <a:endParaRPr lang="en-US" sz="1600" b="0" dirty="0">
-                        <a:effectLst/>
-                        <a:latin typeface="+mn-lt"/>
-                        <a:ea typeface="Malgun Gothic" panose="020B0503020000020004" pitchFamily="34" charset="-127"/>
-                        <a:cs typeface="Arial" panose="020B0604020202020204" pitchFamily="34" charset="0"/>
-                      </a:endParaRPr>
+                      <a:r>
+                        <a:rPr lang="en-US" sz="1200" b="1" smtClean="0">
+                          <a:solidFill>
+                            <a:srgbClr val="00B050"/>
+                          </a:solidFill>
+                        </a:rPr>
+                        <a:t>High</a:t>
+                      </a:r>
                     </a:p>
-                  </a:txBody>
-                  <a:tcPr marL="106700" marR="106700" marT="53350" marB="53350" anchor="ctr">
-                    <a:lnL w="12700" cap="flat" cmpd="sng" algn="ctr">
-                      <a:solidFill>
-                        <a:schemeClr val="tx1"/>
-                      </a:solidFill>
-                      <a:prstDash val="solid"/>
-                      <a:round/>
-                      <a:headEnd type="none" w="med" len="med"/>
-                      <a:tailEnd type="none" w="med" len="med"/>
-                    </a:lnL>
-                    <a:lnR w="12700" cap="flat" cmpd="sng" algn="ctr">
-                      <a:solidFill>
-                        <a:schemeClr val="tx1"/>
-                      </a:solidFill>
-                      <a:prstDash val="solid"/>
-                      <a:round/>
-                      <a:headEnd type="none" w="med" len="med"/>
-                      <a:tailEnd type="none" w="med" len="med"/>
-                    </a:lnR>
-                    <a:lnT w="12700" cap="flat" cmpd="sng" algn="ctr">
-                      <a:solidFill>
-                        <a:schemeClr val="tx1"/>
-                      </a:solidFill>
-                      <a:prstDash val="solid"/>
-                      <a:round/>
-                      <a:headEnd type="none" w="med" len="med"/>
-                      <a:tailEnd type="none" w="med" len="med"/>
-                    </a:lnT>
-                    <a:lnB w="12700" cap="flat" cmpd="sng" algn="ctr">
-                      <a:solidFill>
-                        <a:schemeClr val="tx1"/>
-                      </a:solidFill>
-                      <a:prstDash val="solid"/>
-                      <a:round/>
-                      <a:headEnd type="none" w="med" len="med"/>
-                      <a:tailEnd type="none" w="med" len="med"/>
-                    </a:lnB>
-                  </a:tcPr>
-                </a:tc>
-                <a:extLst>
-                  <a:ext uri="{0D108BD9-81ED-4DB2-BD59-A6C34878D82A}">
-                    <a16:rowId xmlns:a16="http://schemas.microsoft.com/office/drawing/2014/main" xmlns="" val="10003"/>
-                  </a:ext>
-                </a:extLst>
-              </a:tr>
-              <a:tr h="0">
-                <a:tc>
-                  <a:txBody>
-                    <a:bodyPr/>
-                    <a:lstStyle/>
-                    <a:p>
-                      <a:pPr algn="ctr" latinLnBrk="0">
-                        <a:lnSpc>
-                          <a:spcPct val="150000"/>
-                        </a:lnSpc>
-                      </a:pPr>
-                      <a:endParaRPr lang="en-US" sz="1600" b="0" kern="1200" dirty="0">
-                        <a:solidFill>
-                          <a:schemeClr val="dk1"/>
-                        </a:solidFill>
-                        <a:effectLst/>
-                        <a:latin typeface="+mn-lt"/>
-                        <a:ea typeface="+mn-ea"/>
-                        <a:cs typeface="Arial" panose="020B0604020202020204" pitchFamily="34" charset="0"/>
-                      </a:endParaRPr>
-                    </a:p>
-                  </a:txBody>
-                  <a:tcPr marL="106700" marR="106700" marT="53350" marB="53350" anchor="ctr">
-                    <a:lnL w="12700" cap="flat" cmpd="sng" algn="ctr">
-                      <a:solidFill>
-                        <a:schemeClr val="tx1"/>
-                      </a:solidFill>
-                      <a:prstDash val="solid"/>
-                      <a:round/>
-                      <a:headEnd type="none" w="med" len="med"/>
-                      <a:tailEnd type="none" w="med" len="med"/>
-                    </a:lnL>
-                    <a:lnR w="12700" cap="flat" cmpd="sng" algn="ctr">
-                      <a:solidFill>
-                        <a:schemeClr val="tx1"/>
-                      </a:solidFill>
-                      <a:prstDash val="solid"/>
-                      <a:round/>
-                      <a:headEnd type="none" w="med" len="med"/>
-                      <a:tailEnd type="none" w="med" len="med"/>
-                    </a:lnR>
-                    <a:lnT w="12700" cap="flat" cmpd="sng" algn="ctr">
-                      <a:solidFill>
-                        <a:schemeClr val="tx1"/>
-                      </a:solidFill>
-                      <a:prstDash val="solid"/>
-                      <a:round/>
-                      <a:headEnd type="none" w="med" len="med"/>
-                      <a:tailEnd type="none" w="med" len="med"/>
-                    </a:lnT>
-                    <a:lnB w="12700" cap="flat" cmpd="sng" algn="ctr">
-                      <a:solidFill>
-                        <a:schemeClr val="tx1"/>
-                      </a:solidFill>
-                      <a:prstDash val="solid"/>
-                      <a:round/>
-                      <a:headEnd type="none" w="med" len="med"/>
-                      <a:tailEnd type="none" w="med" len="med"/>
-                    </a:lnB>
-                  </a:tcPr>
-                </a:tc>
-                <a:tc>
-                  <a:txBody>
-                    <a:bodyPr/>
-                    <a:lstStyle/>
-                    <a:p>
-                      <a:pPr marL="0" marR="0" algn="l">
-                        <a:lnSpc>
-                          <a:spcPct val="150000"/>
-                        </a:lnSpc>
-                        <a:spcBef>
-                          <a:spcPts val="200"/>
-                        </a:spcBef>
-                        <a:spcAft>
-                          <a:spcPts val="200"/>
-                        </a:spcAft>
-                      </a:pPr>
-                      <a:endParaRPr lang="en-US" sz="1600" b="0" kern="1200" baseline="0" dirty="0">
-                        <a:solidFill>
-                          <a:schemeClr val="dk1"/>
-                        </a:solidFill>
-                        <a:effectLst/>
-                        <a:latin typeface="+mn-lt"/>
-                        <a:ea typeface="+mn-ea"/>
-                        <a:cs typeface="Arial" panose="020B0604020202020204" pitchFamily="34" charset="0"/>
-                      </a:endParaRPr>
-                    </a:p>
-                  </a:txBody>
-                  <a:tcPr marL="25400" marR="25400" marT="0" marB="0" anchor="ctr">
-                    <a:lnL w="12700" cap="flat" cmpd="sng" algn="ctr">
-                      <a:solidFill>
-                        <a:schemeClr val="tx1"/>
-                      </a:solidFill>
-                      <a:prstDash val="solid"/>
-                      <a:round/>
-                      <a:headEnd type="none" w="med" len="med"/>
-                      <a:tailEnd type="none" w="med" len="med"/>
-                    </a:lnL>
-                    <a:lnR w="12700" cap="flat" cmpd="sng" algn="ctr">
-                      <a:solidFill>
-                        <a:schemeClr val="tx1"/>
-                      </a:solidFill>
-                      <a:prstDash val="solid"/>
-                      <a:round/>
-                      <a:headEnd type="none" w="med" len="med"/>
-                      <a:tailEnd type="none" w="med" len="med"/>
-                    </a:lnR>
-                    <a:lnT w="12700" cap="flat" cmpd="sng" algn="ctr">
-                      <a:solidFill>
-                        <a:schemeClr val="tx1"/>
-                      </a:solidFill>
-                      <a:prstDash val="solid"/>
-                      <a:round/>
-                      <a:headEnd type="none" w="med" len="med"/>
-                      <a:tailEnd type="none" w="med" len="med"/>
-                    </a:lnT>
-                    <a:lnB w="12700" cap="flat" cmpd="sng" algn="ctr">
-                      <a:solidFill>
-                        <a:schemeClr val="tx1"/>
-                      </a:solidFill>
-                      <a:prstDash val="solid"/>
-                      <a:round/>
-                      <a:headEnd type="none" w="med" len="med"/>
-                      <a:tailEnd type="none" w="med" len="med"/>
-                    </a:lnB>
-                  </a:tcPr>
-                </a:tc>
-                <a:tc>
-                  <a:txBody>
-                    <a:bodyPr/>
-                    <a:lstStyle/>
                     <a:p>
                       <a:pPr marL="0" marR="0" indent="0" algn="l" defTabSz="914400" rtl="0" eaLnBrk="1" fontAlgn="auto" latinLnBrk="0" hangingPunct="1">
                         <a:lnSpc>
-                          <a:spcPct val="150000"/>
+                          <a:spcPct val="130000"/>
                         </a:lnSpc>
                         <a:spcBef>
                           <a:spcPts val="0"/>
@@ -6185,15 +6397,21 @@
                         <a:tabLst/>
                         <a:defRPr/>
                       </a:pPr>
-                      <a:endParaRPr lang="en-US" sz="1600" b="0" dirty="0">
-                        <a:effectLst/>
-                        <a:latin typeface="+mn-lt"/>
-                        <a:ea typeface="Malgun Gothic" panose="020B0503020000020004" pitchFamily="34" charset="-127"/>
-                        <a:cs typeface="Arial" panose="020B0604020202020204" pitchFamily="34" charset="0"/>
-                      </a:endParaRPr>
+                      <a:r>
+                        <a:rPr lang="en-US" sz="1200" b="0" kern="1200" baseline="0" smtClean="0">
+                          <a:solidFill>
+                            <a:schemeClr val="tx1"/>
+                          </a:solidFill>
+                          <a:effectLst/>
+                          <a:latin typeface="+mn-lt"/>
+                          <a:ea typeface="+mn-ea"/>
+                          <a:cs typeface="Arial" panose="020B0604020202020204" pitchFamily="34" charset="0"/>
+                        </a:rPr>
+                        <a:t>Core responsibilities of existing components remain unchanged after migration.</a:t>
+                      </a:r>
                     </a:p>
                   </a:txBody>
-                  <a:tcPr marL="106700" marR="106700" marT="53350" marB="53350" anchor="ctr">
+                  <a:tcPr marL="106700" marR="106700" marT="53350" marB="53350">
                     <a:lnL w="12700" cap="flat" cmpd="sng" algn="ctr">
                       <a:solidFill>
                         <a:schemeClr val="tx1"/>
@@ -6237,9 +6455,9 @@
                     <a:bodyPr/>
                     <a:lstStyle/>
                     <a:p>
-                      <a:pPr marL="0" marR="0" indent="0" algn="ctr" defTabSz="914400" rtl="0" eaLnBrk="1" fontAlgn="auto" latinLnBrk="0" hangingPunct="1">
+                      <a:pPr marL="0" marR="0" indent="0" algn="l" defTabSz="914400" rtl="0" eaLnBrk="1" fontAlgn="auto" latinLnBrk="0" hangingPunct="1">
                         <a:lnSpc>
-                          <a:spcPct val="150000"/>
+                          <a:spcPct val="130000"/>
                         </a:lnSpc>
                         <a:spcBef>
                           <a:spcPts val="0"/>
@@ -6254,10 +6472,147 @@
                         <a:tabLst/>
                         <a:defRPr/>
                       </a:pPr>
-                      <a:endParaRPr lang="en-US" sz="1600" b="0" dirty="0">
+                      <a:r>
+                        <a:rPr lang="en-US" sz="1200" b="1" smtClean="0">
+                          <a:solidFill>
+                            <a:srgbClr val="00B050"/>
+                          </a:solidFill>
+                        </a:rPr>
+                        <a:t>High</a:t>
+                      </a:r>
+                    </a:p>
+                    <a:p>
+                      <a:pPr marL="0" marR="0" indent="0" algn="l" defTabSz="914400" rtl="0" eaLnBrk="1" fontAlgn="auto" latinLnBrk="0" hangingPunct="1">
+                        <a:lnSpc>
+                          <a:spcPct val="130000"/>
+                        </a:lnSpc>
+                        <a:spcBef>
+                          <a:spcPts val="0"/>
+                        </a:spcBef>
+                        <a:spcAft>
+                          <a:spcPts val="0"/>
+                        </a:spcAft>
+                        <a:buClrTx/>
+                        <a:buSzTx/>
+                        <a:buFontTx/>
+                        <a:buNone/>
+                        <a:tabLst/>
+                        <a:defRPr/>
+                      </a:pPr>
+                      <a:r>
+                        <a:rPr lang="en-US" sz="1200" b="0" kern="1200" baseline="0" smtClean="0">
+                          <a:solidFill>
+                            <a:schemeClr val="tx1"/>
+                          </a:solidFill>
+                          <a:effectLst/>
+                          <a:latin typeface="+mn-lt"/>
+                          <a:ea typeface="+mn-ea"/>
+                          <a:cs typeface="Arial" panose="020B0604020202020204" pitchFamily="34" charset="0"/>
+                        </a:rPr>
+                        <a:t>Core responsibilities of existing components remain unchanged after migration.</a:t>
+                      </a:r>
+                    </a:p>
+                    <a:p>
+                      <a:pPr algn="l" latinLnBrk="0">
+                        <a:lnSpc>
+                          <a:spcPct val="130000"/>
+                        </a:lnSpc>
+                      </a:pPr>
+                      <a:endParaRPr lang="en-US" sz="1200" b="0">
+                        <a:latin typeface="+mn-lt"/>
+                        <a:cs typeface="Arial" panose="020B0604020202020204" pitchFamily="34" charset="0"/>
+                      </a:endParaRPr>
+                    </a:p>
+                  </a:txBody>
+                  <a:tcPr marL="106700" marR="106700" marT="53350" marB="53350">
+                    <a:lnL w="12700" cap="flat" cmpd="sng" algn="ctr">
+                      <a:solidFill>
+                        <a:schemeClr val="tx1"/>
+                      </a:solidFill>
+                      <a:prstDash val="solid"/>
+                      <a:round/>
+                      <a:headEnd type="none" w="med" len="med"/>
+                      <a:tailEnd type="none" w="med" len="med"/>
+                    </a:lnL>
+                    <a:lnR w="12700" cap="flat" cmpd="sng" algn="ctr">
+                      <a:solidFill>
+                        <a:schemeClr val="tx1"/>
+                      </a:solidFill>
+                      <a:prstDash val="solid"/>
+                      <a:round/>
+                      <a:headEnd type="none" w="med" len="med"/>
+                      <a:tailEnd type="none" w="med" len="med"/>
+                    </a:lnR>
+                    <a:lnT w="12700" cap="flat" cmpd="sng" algn="ctr">
+                      <a:solidFill>
+                        <a:schemeClr val="tx1"/>
+                      </a:solidFill>
+                      <a:prstDash val="solid"/>
+                      <a:round/>
+                      <a:headEnd type="none" w="med" len="med"/>
+                      <a:tailEnd type="none" w="med" len="med"/>
+                    </a:lnT>
+                    <a:lnB w="12700" cap="flat" cmpd="sng" algn="ctr">
+                      <a:solidFill>
+                        <a:schemeClr val="tx1"/>
+                      </a:solidFill>
+                      <a:prstDash val="solid"/>
+                      <a:round/>
+                      <a:headEnd type="none" w="med" len="med"/>
+                      <a:tailEnd type="none" w="med" len="med"/>
+                    </a:lnB>
+                  </a:tcPr>
+                </a:tc>
+              </a:tr>
+              <a:tr h="0">
+                <a:tc>
+                  <a:txBody>
+                    <a:bodyPr/>
+                    <a:lstStyle/>
+                    <a:p>
+                      <a:pPr algn="ctr" latinLnBrk="0">
+                        <a:lnSpc>
+                          <a:spcPct val="130000"/>
+                        </a:lnSpc>
+                      </a:pPr>
+                      <a:r>
+                        <a:rPr lang="en-US" sz="1200" b="0" kern="1200" smtClean="0">
+                          <a:solidFill>
+                            <a:schemeClr val="dk1"/>
+                          </a:solidFill>
+                          <a:effectLst/>
+                          <a:latin typeface="+mn-lt"/>
+                          <a:ea typeface="+mn-ea"/>
+                          <a:cs typeface="Arial" panose="020B0604020202020204" pitchFamily="34" charset="0"/>
+                        </a:rPr>
+                        <a:t>QA-04</a:t>
+                      </a:r>
+                    </a:p>
+                    <a:p>
+                      <a:pPr algn="ctr" latinLnBrk="0">
+                        <a:lnSpc>
+                          <a:spcPct val="130000"/>
+                        </a:lnSpc>
+                      </a:pPr>
+                      <a:r>
+                        <a:rPr lang="en-US" sz="1200" b="0" kern="1200" smtClean="0">
+                          <a:solidFill>
+                            <a:schemeClr val="dk1"/>
+                          </a:solidFill>
+                          <a:effectLst/>
+                          <a:latin typeface="+mn-lt"/>
+                          <a:ea typeface="+mn-ea"/>
+                          <a:cs typeface="Arial" panose="020B0604020202020204" pitchFamily="34" charset="0"/>
+                        </a:rPr>
+                        <a:t>Maintainability</a:t>
+                      </a:r>
+                      <a:endParaRPr lang="en-US" sz="1200" b="0" kern="1200">
+                        <a:solidFill>
+                          <a:schemeClr val="dk1"/>
+                        </a:solidFill>
                         <a:effectLst/>
                         <a:latin typeface="+mn-lt"/>
-                        <a:ea typeface="Malgun Gothic" panose="020B0503020000020004" pitchFamily="34" charset="-127"/>
+                        <a:ea typeface="+mn-ea"/>
                         <a:cs typeface="Arial" panose="020B0604020202020204" pitchFamily="34" charset="0"/>
                       </a:endParaRPr>
                     </a:p>
@@ -6301,16 +6656,1150 @@
                     </a:lnB>
                   </a:tcPr>
                 </a:tc>
-                <a:extLst>
-                  <a:ext uri="{0D108BD9-81ED-4DB2-BD59-A6C34878D82A}">
-                    <a16:rowId xmlns:a16="http://schemas.microsoft.com/office/drawing/2014/main" xmlns="" val="10004"/>
-                  </a:ext>
-                </a:extLst>
+                <a:tc>
+                  <a:txBody>
+                    <a:bodyPr/>
+                    <a:lstStyle/>
+                    <a:p>
+                      <a:pPr marL="0" marR="0" algn="l">
+                        <a:lnSpc>
+                          <a:spcPct val="130000"/>
+                        </a:lnSpc>
+                        <a:spcBef>
+                          <a:spcPts val="200"/>
+                        </a:spcBef>
+                        <a:spcAft>
+                          <a:spcPts val="200"/>
+                        </a:spcAft>
+                      </a:pPr>
+                      <a:r>
+                        <a:rPr lang="en-US" sz="1200" b="1" smtClean="0">
+                          <a:solidFill>
+                            <a:schemeClr val="accent2"/>
+                          </a:solidFill>
+                        </a:rPr>
+                        <a:t>Medium</a:t>
+                      </a:r>
+                    </a:p>
+                    <a:p>
+                      <a:pPr marL="0" marR="0" algn="l">
+                        <a:lnSpc>
+                          <a:spcPct val="130000"/>
+                        </a:lnSpc>
+                        <a:spcBef>
+                          <a:spcPts val="200"/>
+                        </a:spcBef>
+                        <a:spcAft>
+                          <a:spcPts val="200"/>
+                        </a:spcAft>
+                      </a:pPr>
+                      <a:r>
+                        <a:rPr lang="en-US" sz="1200" b="0" kern="1200" baseline="0" smtClean="0">
+                          <a:solidFill>
+                            <a:schemeClr val="dk1"/>
+                          </a:solidFill>
+                          <a:effectLst/>
+                          <a:latin typeface="+mn-lt"/>
+                          <a:ea typeface="+mn-ea"/>
+                          <a:cs typeface="Arial" panose="020B0604020202020204" pitchFamily="34" charset="0"/>
+                        </a:rPr>
+                        <a:t>01 additional component is modified (OnBoardClient - implements UDS socket server and priority control) </a:t>
+                      </a:r>
+                      <a:endParaRPr lang="en-US" sz="1200" b="0" kern="1200" baseline="0">
+                        <a:solidFill>
+                          <a:schemeClr val="dk1"/>
+                        </a:solidFill>
+                        <a:effectLst/>
+                        <a:latin typeface="+mn-lt"/>
+                        <a:ea typeface="+mn-ea"/>
+                        <a:cs typeface="Arial" panose="020B0604020202020204" pitchFamily="34" charset="0"/>
+                      </a:endParaRPr>
+                    </a:p>
+                  </a:txBody>
+                  <a:tcPr marL="25400" marR="25400" marT="0" marB="0">
+                    <a:lnL w="12700" cap="flat" cmpd="sng" algn="ctr">
+                      <a:solidFill>
+                        <a:schemeClr val="tx1"/>
+                      </a:solidFill>
+                      <a:prstDash val="solid"/>
+                      <a:round/>
+                      <a:headEnd type="none" w="med" len="med"/>
+                      <a:tailEnd type="none" w="med" len="med"/>
+                    </a:lnL>
+                    <a:lnR w="12700" cap="flat" cmpd="sng" algn="ctr">
+                      <a:solidFill>
+                        <a:schemeClr val="tx1"/>
+                      </a:solidFill>
+                      <a:prstDash val="solid"/>
+                      <a:round/>
+                      <a:headEnd type="none" w="med" len="med"/>
+                      <a:tailEnd type="none" w="med" len="med"/>
+                    </a:lnR>
+                    <a:lnT w="12700" cap="flat" cmpd="sng" algn="ctr">
+                      <a:solidFill>
+                        <a:schemeClr val="tx1"/>
+                      </a:solidFill>
+                      <a:prstDash val="solid"/>
+                      <a:round/>
+                      <a:headEnd type="none" w="med" len="med"/>
+                      <a:tailEnd type="none" w="med" len="med"/>
+                    </a:lnT>
+                    <a:lnB w="12700" cap="flat" cmpd="sng" algn="ctr">
+                      <a:solidFill>
+                        <a:schemeClr val="tx1"/>
+                      </a:solidFill>
+                      <a:prstDash val="solid"/>
+                      <a:round/>
+                      <a:headEnd type="none" w="med" len="med"/>
+                      <a:tailEnd type="none" w="med" len="med"/>
+                    </a:lnB>
+                  </a:tcPr>
+                </a:tc>
+                <a:tc>
+                  <a:txBody>
+                    <a:bodyPr/>
+                    <a:lstStyle/>
+                    <a:p>
+                      <a:pPr marL="0" marR="0" indent="0" algn="l" defTabSz="914400" rtl="0" eaLnBrk="1" fontAlgn="auto" latinLnBrk="0" hangingPunct="1">
+                        <a:lnSpc>
+                          <a:spcPct val="130000"/>
+                        </a:lnSpc>
+                        <a:spcBef>
+                          <a:spcPts val="0"/>
+                        </a:spcBef>
+                        <a:spcAft>
+                          <a:spcPts val="0"/>
+                        </a:spcAft>
+                        <a:buClrTx/>
+                        <a:buSzTx/>
+                        <a:buFontTx/>
+                        <a:buNone/>
+                        <a:tabLst/>
+                        <a:defRPr/>
+                      </a:pPr>
+                      <a:r>
+                        <a:rPr lang="en-US" sz="1200" b="1" smtClean="0">
+                          <a:solidFill>
+                            <a:srgbClr val="FF0000"/>
+                          </a:solidFill>
+                        </a:rPr>
+                        <a:t>Low</a:t>
+                      </a:r>
+                      <a:endParaRPr lang="en-US" sz="1200" b="0" kern="1200" baseline="0" smtClean="0">
+                        <a:solidFill>
+                          <a:schemeClr val="dk1"/>
+                        </a:solidFill>
+                        <a:effectLst/>
+                        <a:latin typeface="+mn-lt"/>
+                        <a:ea typeface="+mn-ea"/>
+                        <a:cs typeface="Arial" panose="020B0604020202020204" pitchFamily="34" charset="0"/>
+                      </a:endParaRPr>
+                    </a:p>
+                    <a:p>
+                      <a:pPr marL="0" marR="0" indent="0" algn="l" defTabSz="914400" rtl="0" eaLnBrk="1" fontAlgn="auto" latinLnBrk="0" hangingPunct="1">
+                        <a:lnSpc>
+                          <a:spcPct val="130000"/>
+                        </a:lnSpc>
+                        <a:spcBef>
+                          <a:spcPts val="0"/>
+                        </a:spcBef>
+                        <a:spcAft>
+                          <a:spcPts val="0"/>
+                        </a:spcAft>
+                        <a:buClrTx/>
+                        <a:buSzTx/>
+                        <a:buFontTx/>
+                        <a:buNone/>
+                        <a:tabLst/>
+                        <a:defRPr/>
+                      </a:pPr>
+                      <a:r>
+                        <a:rPr lang="en-US" sz="1200" b="0" kern="1200" baseline="0" smtClean="0">
+                          <a:solidFill>
+                            <a:schemeClr val="dk1"/>
+                          </a:solidFill>
+                          <a:effectLst/>
+                          <a:latin typeface="+mn-lt"/>
+                          <a:ea typeface="+mn-ea"/>
+                          <a:cs typeface="Arial" panose="020B0604020202020204" pitchFamily="34" charset="0"/>
+                        </a:rPr>
+                        <a:t>10 EP modules (PowerMgr, HttpMgr, …) have to implement cross-container UDS socket communication and fail-safe handling.</a:t>
+                      </a:r>
+                    </a:p>
+                  </a:txBody>
+                  <a:tcPr marL="106700" marR="106700" marT="53350" marB="53350">
+                    <a:lnL w="12700" cap="flat" cmpd="sng" algn="ctr">
+                      <a:solidFill>
+                        <a:schemeClr val="tx1"/>
+                      </a:solidFill>
+                      <a:prstDash val="solid"/>
+                      <a:round/>
+                      <a:headEnd type="none" w="med" len="med"/>
+                      <a:tailEnd type="none" w="med" len="med"/>
+                    </a:lnL>
+                    <a:lnR w="12700" cap="flat" cmpd="sng" algn="ctr">
+                      <a:solidFill>
+                        <a:schemeClr val="tx1"/>
+                      </a:solidFill>
+                      <a:prstDash val="solid"/>
+                      <a:round/>
+                      <a:headEnd type="none" w="med" len="med"/>
+                      <a:tailEnd type="none" w="med" len="med"/>
+                    </a:lnR>
+                    <a:lnT w="12700" cap="flat" cmpd="sng" algn="ctr">
+                      <a:solidFill>
+                        <a:schemeClr val="tx1"/>
+                      </a:solidFill>
+                      <a:prstDash val="solid"/>
+                      <a:round/>
+                      <a:headEnd type="none" w="med" len="med"/>
+                      <a:tailEnd type="none" w="med" len="med"/>
+                    </a:lnT>
+                    <a:lnB w="12700" cap="flat" cmpd="sng" algn="ctr">
+                      <a:solidFill>
+                        <a:schemeClr val="tx1"/>
+                      </a:solidFill>
+                      <a:prstDash val="solid"/>
+                      <a:round/>
+                      <a:headEnd type="none" w="med" len="med"/>
+                      <a:tailEnd type="none" w="med" len="med"/>
+                    </a:lnB>
+                  </a:tcPr>
+                </a:tc>
+                <a:tc>
+                  <a:txBody>
+                    <a:bodyPr/>
+                    <a:lstStyle/>
+                    <a:p>
+                      <a:pPr algn="l" latinLnBrk="0">
+                        <a:lnSpc>
+                          <a:spcPct val="130000"/>
+                        </a:lnSpc>
+                      </a:pPr>
+                      <a:r>
+                        <a:rPr lang="en-US" sz="1200" b="1" smtClean="0">
+                          <a:solidFill>
+                            <a:srgbClr val="00B050"/>
+                          </a:solidFill>
+                        </a:rPr>
+                        <a:t>High</a:t>
+                      </a:r>
+                      <a:endParaRPr lang="en-US" sz="1200" b="0" smtClean="0">
+                        <a:latin typeface="+mn-lt"/>
+                        <a:cs typeface="Arial" panose="020B0604020202020204" pitchFamily="34" charset="0"/>
+                      </a:endParaRPr>
+                    </a:p>
+                    <a:p>
+                      <a:pPr algn="l" latinLnBrk="0">
+                        <a:lnSpc>
+                          <a:spcPct val="130000"/>
+                        </a:lnSpc>
+                      </a:pPr>
+                      <a:r>
+                        <a:rPr lang="en-US" sz="1200" b="0" baseline="0" smtClean="0">
+                          <a:latin typeface="+mn-lt"/>
+                          <a:cs typeface="Arial" panose="020B0604020202020204" pitchFamily="34" charset="0"/>
+                        </a:rPr>
+                        <a:t>No changes required in existing modules. RemoteDiagProxy preserves the current binder interface</a:t>
+                      </a:r>
+                    </a:p>
+                  </a:txBody>
+                  <a:tcPr marL="106700" marR="106700" marT="53350" marB="53350">
+                    <a:lnL w="12700" cap="flat" cmpd="sng" algn="ctr">
+                      <a:solidFill>
+                        <a:schemeClr val="tx1"/>
+                      </a:solidFill>
+                      <a:prstDash val="solid"/>
+                      <a:round/>
+                      <a:headEnd type="none" w="med" len="med"/>
+                      <a:tailEnd type="none" w="med" len="med"/>
+                    </a:lnL>
+                    <a:lnR w="12700" cap="flat" cmpd="sng" algn="ctr">
+                      <a:solidFill>
+                        <a:schemeClr val="tx1"/>
+                      </a:solidFill>
+                      <a:prstDash val="solid"/>
+                      <a:round/>
+                      <a:headEnd type="none" w="med" len="med"/>
+                      <a:tailEnd type="none" w="med" len="med"/>
+                    </a:lnR>
+                    <a:lnT w="12700" cap="flat" cmpd="sng" algn="ctr">
+                      <a:solidFill>
+                        <a:schemeClr val="tx1"/>
+                      </a:solidFill>
+                      <a:prstDash val="solid"/>
+                      <a:round/>
+                      <a:headEnd type="none" w="med" len="med"/>
+                      <a:tailEnd type="none" w="med" len="med"/>
+                    </a:lnT>
+                    <a:lnB w="12700" cap="flat" cmpd="sng" algn="ctr">
+                      <a:solidFill>
+                        <a:schemeClr val="tx1"/>
+                      </a:solidFill>
+                      <a:prstDash val="solid"/>
+                      <a:round/>
+                      <a:headEnd type="none" w="med" len="med"/>
+                      <a:tailEnd type="none" w="med" len="med"/>
+                    </a:lnB>
+                  </a:tcPr>
+                </a:tc>
+              </a:tr>
+              <a:tr h="0">
+                <a:tc>
+                  <a:txBody>
+                    <a:bodyPr/>
+                    <a:lstStyle/>
+                    <a:p>
+                      <a:pPr algn="ctr" latinLnBrk="0">
+                        <a:lnSpc>
+                          <a:spcPct val="130000"/>
+                        </a:lnSpc>
+                      </a:pPr>
+                      <a:r>
+                        <a:rPr lang="en-US" sz="1200" b="0" kern="1200" smtClean="0">
+                          <a:solidFill>
+                            <a:schemeClr val="dk1"/>
+                          </a:solidFill>
+                          <a:effectLst/>
+                          <a:latin typeface="+mn-lt"/>
+                          <a:ea typeface="+mn-ea"/>
+                          <a:cs typeface="Arial" panose="020B0604020202020204" pitchFamily="34" charset="0"/>
+                        </a:rPr>
+                        <a:t>QA-05</a:t>
+                      </a:r>
+                    </a:p>
+                    <a:p>
+                      <a:pPr algn="ctr" latinLnBrk="0">
+                        <a:lnSpc>
+                          <a:spcPct val="130000"/>
+                        </a:lnSpc>
+                      </a:pPr>
+                      <a:r>
+                        <a:rPr lang="en-US" sz="1200" b="0" kern="1200" smtClean="0">
+                          <a:solidFill>
+                            <a:schemeClr val="dk1"/>
+                          </a:solidFill>
+                          <a:effectLst/>
+                          <a:latin typeface="+mn-lt"/>
+                          <a:ea typeface="+mn-ea"/>
+                          <a:cs typeface="Arial" panose="020B0604020202020204" pitchFamily="34" charset="0"/>
+                        </a:rPr>
+                        <a:t>Availability</a:t>
+                      </a:r>
+                      <a:endParaRPr lang="en-US" sz="1200" b="0" kern="1200">
+                        <a:solidFill>
+                          <a:schemeClr val="dk1"/>
+                        </a:solidFill>
+                        <a:effectLst/>
+                        <a:latin typeface="+mn-lt"/>
+                        <a:ea typeface="+mn-ea"/>
+                        <a:cs typeface="Arial" panose="020B0604020202020204" pitchFamily="34" charset="0"/>
+                      </a:endParaRPr>
+                    </a:p>
+                  </a:txBody>
+                  <a:tcPr marL="106700" marR="106700" marT="53350" marB="53350" anchor="ctr">
+                    <a:lnL w="12700" cap="flat" cmpd="sng" algn="ctr">
+                      <a:solidFill>
+                        <a:schemeClr val="tx1"/>
+                      </a:solidFill>
+                      <a:prstDash val="solid"/>
+                      <a:round/>
+                      <a:headEnd type="none" w="med" len="med"/>
+                      <a:tailEnd type="none" w="med" len="med"/>
+                    </a:lnL>
+                    <a:lnR w="12700" cap="flat" cmpd="sng" algn="ctr">
+                      <a:solidFill>
+                        <a:schemeClr val="tx1"/>
+                      </a:solidFill>
+                      <a:prstDash val="solid"/>
+                      <a:round/>
+                      <a:headEnd type="none" w="med" len="med"/>
+                      <a:tailEnd type="none" w="med" len="med"/>
+                    </a:lnR>
+                    <a:lnT w="12700" cap="flat" cmpd="sng" algn="ctr">
+                      <a:solidFill>
+                        <a:schemeClr val="tx1"/>
+                      </a:solidFill>
+                      <a:prstDash val="solid"/>
+                      <a:round/>
+                      <a:headEnd type="none" w="med" len="med"/>
+                      <a:tailEnd type="none" w="med" len="med"/>
+                    </a:lnT>
+                    <a:lnB w="12700" cap="flat" cmpd="sng" algn="ctr">
+                      <a:solidFill>
+                        <a:schemeClr val="tx1"/>
+                      </a:solidFill>
+                      <a:prstDash val="solid"/>
+                      <a:round/>
+                      <a:headEnd type="none" w="med" len="med"/>
+                      <a:tailEnd type="none" w="med" len="med"/>
+                    </a:lnB>
+                  </a:tcPr>
+                </a:tc>
+                <a:tc>
+                  <a:txBody>
+                    <a:bodyPr/>
+                    <a:lstStyle/>
+                    <a:p>
+                      <a:pPr marL="0" marR="0" algn="l">
+                        <a:lnSpc>
+                          <a:spcPct val="130000"/>
+                        </a:lnSpc>
+                        <a:spcBef>
+                          <a:spcPts val="200"/>
+                        </a:spcBef>
+                        <a:spcAft>
+                          <a:spcPts val="200"/>
+                        </a:spcAft>
+                      </a:pPr>
+                      <a:r>
+                        <a:rPr lang="en-US" sz="1200" b="1" smtClean="0">
+                          <a:solidFill>
+                            <a:srgbClr val="00B050"/>
+                          </a:solidFill>
+                        </a:rPr>
+                        <a:t>High</a:t>
+                      </a:r>
+                    </a:p>
+                    <a:p>
+                      <a:pPr marL="0" marR="0" indent="0" algn="l" defTabSz="914400" rtl="0" eaLnBrk="1" fontAlgn="auto" latinLnBrk="0" hangingPunct="1">
+                        <a:lnSpc>
+                          <a:spcPct val="130000"/>
+                        </a:lnSpc>
+                        <a:spcBef>
+                          <a:spcPts val="200"/>
+                        </a:spcBef>
+                        <a:spcAft>
+                          <a:spcPts val="200"/>
+                        </a:spcAft>
+                        <a:buClrTx/>
+                        <a:buSzTx/>
+                        <a:buFontTx/>
+                        <a:buNone/>
+                        <a:tabLst/>
+                        <a:defRPr/>
+                      </a:pPr>
+                      <a:r>
+                        <a:rPr lang="en-US" sz="1200" b="0" kern="1200" baseline="0" smtClean="0">
+                          <a:solidFill>
+                            <a:schemeClr val="dk1"/>
+                          </a:solidFill>
+                          <a:effectLst/>
+                          <a:latin typeface="+mn-lt"/>
+                          <a:ea typeface="+mn-ea"/>
+                          <a:cs typeface="Arial" panose="020B0604020202020204" pitchFamily="34" charset="0"/>
+                        </a:rPr>
+                        <a:t>OEM center and MM ECU communication flows run in separate processes. Failure of one flow does not impact the other.</a:t>
+                      </a:r>
+                      <a:endParaRPr lang="en-US" sz="1200" b="0" kern="1200" baseline="0">
+                        <a:solidFill>
+                          <a:schemeClr val="dk1"/>
+                        </a:solidFill>
+                        <a:effectLst/>
+                        <a:latin typeface="+mn-lt"/>
+                        <a:ea typeface="+mn-ea"/>
+                        <a:cs typeface="Arial" panose="020B0604020202020204" pitchFamily="34" charset="0"/>
+                      </a:endParaRPr>
+                    </a:p>
+                  </a:txBody>
+                  <a:tcPr marL="25400" marR="25400" marT="0" marB="0">
+                    <a:lnL w="12700" cap="flat" cmpd="sng" algn="ctr">
+                      <a:solidFill>
+                        <a:schemeClr val="tx1"/>
+                      </a:solidFill>
+                      <a:prstDash val="solid"/>
+                      <a:round/>
+                      <a:headEnd type="none" w="med" len="med"/>
+                      <a:tailEnd type="none" w="med" len="med"/>
+                    </a:lnL>
+                    <a:lnR w="12700" cap="flat" cmpd="sng" algn="ctr">
+                      <a:solidFill>
+                        <a:schemeClr val="tx1"/>
+                      </a:solidFill>
+                      <a:prstDash val="solid"/>
+                      <a:round/>
+                      <a:headEnd type="none" w="med" len="med"/>
+                      <a:tailEnd type="none" w="med" len="med"/>
+                    </a:lnR>
+                    <a:lnT w="12700" cap="flat" cmpd="sng" algn="ctr">
+                      <a:solidFill>
+                        <a:schemeClr val="tx1"/>
+                      </a:solidFill>
+                      <a:prstDash val="solid"/>
+                      <a:round/>
+                      <a:headEnd type="none" w="med" len="med"/>
+                      <a:tailEnd type="none" w="med" len="med"/>
+                    </a:lnT>
+                    <a:lnB w="12700" cap="flat" cmpd="sng" algn="ctr">
+                      <a:solidFill>
+                        <a:schemeClr val="tx1"/>
+                      </a:solidFill>
+                      <a:prstDash val="solid"/>
+                      <a:round/>
+                      <a:headEnd type="none" w="med" len="med"/>
+                      <a:tailEnd type="none" w="med" len="med"/>
+                    </a:lnB>
+                  </a:tcPr>
+                </a:tc>
+                <a:tc>
+                  <a:txBody>
+                    <a:bodyPr/>
+                    <a:lstStyle/>
+                    <a:p>
+                      <a:pPr marL="0" marR="0" indent="0" algn="l" defTabSz="914400" rtl="0" eaLnBrk="1" fontAlgn="auto" latinLnBrk="0" hangingPunct="1">
+                        <a:lnSpc>
+                          <a:spcPct val="130000"/>
+                        </a:lnSpc>
+                        <a:spcBef>
+                          <a:spcPts val="0"/>
+                        </a:spcBef>
+                        <a:spcAft>
+                          <a:spcPts val="0"/>
+                        </a:spcAft>
+                        <a:buClrTx/>
+                        <a:buSzTx/>
+                        <a:buFontTx/>
+                        <a:buNone/>
+                        <a:tabLst/>
+                        <a:defRPr/>
+                      </a:pPr>
+                      <a:r>
+                        <a:rPr lang="en-US" sz="1200" b="1" smtClean="0">
+                          <a:solidFill>
+                            <a:srgbClr val="FF0000"/>
+                          </a:solidFill>
+                        </a:rPr>
+                        <a:t>Low</a:t>
+                      </a:r>
+                    </a:p>
+                    <a:p>
+                      <a:pPr marL="0" marR="0" indent="0" algn="l" defTabSz="914400" rtl="0" eaLnBrk="1" fontAlgn="auto" latinLnBrk="0" hangingPunct="1">
+                        <a:lnSpc>
+                          <a:spcPct val="130000"/>
+                        </a:lnSpc>
+                        <a:spcBef>
+                          <a:spcPts val="0"/>
+                        </a:spcBef>
+                        <a:spcAft>
+                          <a:spcPts val="0"/>
+                        </a:spcAft>
+                        <a:buClrTx/>
+                        <a:buSzTx/>
+                        <a:buFontTx/>
+                        <a:buNone/>
+                        <a:tabLst/>
+                        <a:defRPr/>
+                      </a:pPr>
+                      <a:r>
+                        <a:rPr lang="en-US" sz="1200" b="0" kern="1200" baseline="0" smtClean="0">
+                          <a:solidFill>
+                            <a:schemeClr val="tx1"/>
+                          </a:solidFill>
+                          <a:effectLst/>
+                          <a:latin typeface="+mn-lt"/>
+                          <a:ea typeface="+mn-ea"/>
+                          <a:cs typeface="Arial" panose="020B0604020202020204" pitchFamily="34" charset="0"/>
+                        </a:rPr>
+                        <a:t>OEM center and MM ECU </a:t>
+                      </a:r>
+                      <a:r>
+                        <a:rPr lang="en-US" sz="1200" b="0" kern="1200" baseline="0" smtClean="0">
+                          <a:solidFill>
+                            <a:schemeClr val="dk1"/>
+                          </a:solidFill>
+                          <a:effectLst/>
+                          <a:latin typeface="+mn-lt"/>
+                          <a:ea typeface="+mn-ea"/>
+                          <a:cs typeface="Arial" panose="020B0604020202020204" pitchFamily="34" charset="0"/>
+                        </a:rPr>
+                        <a:t>communication </a:t>
+                      </a:r>
+                      <a:r>
+                        <a:rPr lang="en-US" sz="1200" b="0" kern="1200" baseline="0" smtClean="0">
+                          <a:solidFill>
+                            <a:schemeClr val="tx1"/>
+                          </a:solidFill>
+                          <a:effectLst/>
+                          <a:latin typeface="+mn-lt"/>
+                          <a:ea typeface="+mn-ea"/>
+                          <a:cs typeface="Arial" panose="020B0604020202020204" pitchFamily="34" charset="0"/>
+                        </a:rPr>
+                        <a:t>flows share the same process. Failure in one flow may impact the other.</a:t>
+                      </a:r>
+                    </a:p>
+                  </a:txBody>
+                  <a:tcPr marL="106700" marR="106700" marT="53350" marB="53350">
+                    <a:lnL w="12700" cap="flat" cmpd="sng" algn="ctr">
+                      <a:solidFill>
+                        <a:schemeClr val="tx1"/>
+                      </a:solidFill>
+                      <a:prstDash val="solid"/>
+                      <a:round/>
+                      <a:headEnd type="none" w="med" len="med"/>
+                      <a:tailEnd type="none" w="med" len="med"/>
+                    </a:lnL>
+                    <a:lnR w="12700" cap="flat" cmpd="sng" algn="ctr">
+                      <a:solidFill>
+                        <a:schemeClr val="tx1"/>
+                      </a:solidFill>
+                      <a:prstDash val="solid"/>
+                      <a:round/>
+                      <a:headEnd type="none" w="med" len="med"/>
+                      <a:tailEnd type="none" w="med" len="med"/>
+                    </a:lnR>
+                    <a:lnT w="12700" cap="flat" cmpd="sng" algn="ctr">
+                      <a:solidFill>
+                        <a:schemeClr val="tx1"/>
+                      </a:solidFill>
+                      <a:prstDash val="solid"/>
+                      <a:round/>
+                      <a:headEnd type="none" w="med" len="med"/>
+                      <a:tailEnd type="none" w="med" len="med"/>
+                    </a:lnT>
+                    <a:lnB w="12700" cap="flat" cmpd="sng" algn="ctr">
+                      <a:solidFill>
+                        <a:schemeClr val="tx1"/>
+                      </a:solidFill>
+                      <a:prstDash val="solid"/>
+                      <a:round/>
+                      <a:headEnd type="none" w="med" len="med"/>
+                      <a:tailEnd type="none" w="med" len="med"/>
+                    </a:lnB>
+                  </a:tcPr>
+                </a:tc>
+                <a:tc>
+                  <a:txBody>
+                    <a:bodyPr/>
+                    <a:lstStyle/>
+                    <a:p>
+                      <a:pPr algn="l" latinLnBrk="0">
+                        <a:lnSpc>
+                          <a:spcPct val="130000"/>
+                        </a:lnSpc>
+                      </a:pPr>
+                      <a:r>
+                        <a:rPr lang="en-US" sz="1200" b="1" smtClean="0">
+                          <a:solidFill>
+                            <a:srgbClr val="FF0000"/>
+                          </a:solidFill>
+                        </a:rPr>
+                        <a:t>Low</a:t>
+                      </a:r>
+                    </a:p>
+                    <a:p>
+                      <a:pPr marL="0" marR="0" indent="0" algn="l" defTabSz="914400" rtl="0" eaLnBrk="1" fontAlgn="auto" latinLnBrk="0" hangingPunct="1">
+                        <a:lnSpc>
+                          <a:spcPct val="130000"/>
+                        </a:lnSpc>
+                        <a:spcBef>
+                          <a:spcPts val="0"/>
+                        </a:spcBef>
+                        <a:spcAft>
+                          <a:spcPts val="0"/>
+                        </a:spcAft>
+                        <a:buClrTx/>
+                        <a:buSzTx/>
+                        <a:buFontTx/>
+                        <a:buNone/>
+                        <a:tabLst/>
+                        <a:defRPr/>
+                      </a:pPr>
+                      <a:r>
+                        <a:rPr lang="en-US" sz="1200" b="0" kern="1200" baseline="0" smtClean="0">
+                          <a:solidFill>
+                            <a:schemeClr val="tx1"/>
+                          </a:solidFill>
+                          <a:effectLst/>
+                          <a:latin typeface="+mn-lt"/>
+                          <a:ea typeface="+mn-ea"/>
+                          <a:cs typeface="Arial" panose="020B0604020202020204" pitchFamily="34" charset="0"/>
+                        </a:rPr>
+                        <a:t>OEM center and MM ECU </a:t>
+                      </a:r>
+                      <a:r>
+                        <a:rPr lang="en-US" sz="1200" b="0" kern="1200" baseline="0" smtClean="0">
+                          <a:solidFill>
+                            <a:schemeClr val="dk1"/>
+                          </a:solidFill>
+                          <a:effectLst/>
+                          <a:latin typeface="+mn-lt"/>
+                          <a:ea typeface="+mn-ea"/>
+                          <a:cs typeface="Arial" panose="020B0604020202020204" pitchFamily="34" charset="0"/>
+                        </a:rPr>
+                        <a:t>communication </a:t>
+                      </a:r>
+                      <a:r>
+                        <a:rPr lang="en-US" sz="1200" b="0" kern="1200" baseline="0" smtClean="0">
+                          <a:solidFill>
+                            <a:schemeClr val="tx1"/>
+                          </a:solidFill>
+                          <a:effectLst/>
+                          <a:latin typeface="+mn-lt"/>
+                          <a:ea typeface="+mn-ea"/>
+                          <a:cs typeface="Arial" panose="020B0604020202020204" pitchFamily="34" charset="0"/>
+                        </a:rPr>
+                        <a:t>flows share the same process. Failure in one flow may impact the other.</a:t>
+                      </a:r>
+                      <a:endParaRPr lang="en-US" sz="1200" b="0">
+                        <a:solidFill>
+                          <a:schemeClr val="tx1"/>
+                        </a:solidFill>
+                        <a:latin typeface="+mn-lt"/>
+                        <a:cs typeface="Arial" panose="020B0604020202020204" pitchFamily="34" charset="0"/>
+                      </a:endParaRPr>
+                    </a:p>
+                  </a:txBody>
+                  <a:tcPr marL="106700" marR="106700" marT="53350" marB="53350">
+                    <a:lnL w="12700" cap="flat" cmpd="sng" algn="ctr">
+                      <a:solidFill>
+                        <a:schemeClr val="tx1"/>
+                      </a:solidFill>
+                      <a:prstDash val="solid"/>
+                      <a:round/>
+                      <a:headEnd type="none" w="med" len="med"/>
+                      <a:tailEnd type="none" w="med" len="med"/>
+                    </a:lnL>
+                    <a:lnR w="12700" cap="flat" cmpd="sng" algn="ctr">
+                      <a:solidFill>
+                        <a:schemeClr val="tx1"/>
+                      </a:solidFill>
+                      <a:prstDash val="solid"/>
+                      <a:round/>
+                      <a:headEnd type="none" w="med" len="med"/>
+                      <a:tailEnd type="none" w="med" len="med"/>
+                    </a:lnR>
+                    <a:lnT w="12700" cap="flat" cmpd="sng" algn="ctr">
+                      <a:solidFill>
+                        <a:schemeClr val="tx1"/>
+                      </a:solidFill>
+                      <a:prstDash val="solid"/>
+                      <a:round/>
+                      <a:headEnd type="none" w="med" len="med"/>
+                      <a:tailEnd type="none" w="med" len="med"/>
+                    </a:lnT>
+                    <a:lnB w="12700" cap="flat" cmpd="sng" algn="ctr">
+                      <a:solidFill>
+                        <a:schemeClr val="tx1"/>
+                      </a:solidFill>
+                      <a:prstDash val="solid"/>
+                      <a:round/>
+                      <a:headEnd type="none" w="med" len="med"/>
+                      <a:tailEnd type="none" w="med" len="med"/>
+                    </a:lnB>
+                  </a:tcPr>
+                </a:tc>
+              </a:tr>
+              <a:tr h="0">
+                <a:tc>
+                  <a:txBody>
+                    <a:bodyPr/>
+                    <a:lstStyle/>
+                    <a:p>
+                      <a:pPr algn="ctr" latinLnBrk="0">
+                        <a:lnSpc>
+                          <a:spcPct val="130000"/>
+                        </a:lnSpc>
+                      </a:pPr>
+                      <a:r>
+                        <a:rPr lang="en-US" sz="1200" b="1" kern="1200" smtClean="0">
+                          <a:solidFill>
+                            <a:schemeClr val="dk1"/>
+                          </a:solidFill>
+                          <a:effectLst/>
+                          <a:latin typeface="+mn-lt"/>
+                          <a:ea typeface="+mn-ea"/>
+                          <a:cs typeface="Arial" panose="020B0604020202020204" pitchFamily="34" charset="0"/>
+                        </a:rPr>
+                        <a:t>Decision</a:t>
+                      </a:r>
+                      <a:endParaRPr lang="en-US" sz="1200" b="1" kern="1200">
+                        <a:solidFill>
+                          <a:schemeClr val="dk1"/>
+                        </a:solidFill>
+                        <a:effectLst/>
+                        <a:latin typeface="+mn-lt"/>
+                        <a:ea typeface="+mn-ea"/>
+                        <a:cs typeface="Arial" panose="020B0604020202020204" pitchFamily="34" charset="0"/>
+                      </a:endParaRPr>
+                    </a:p>
+                  </a:txBody>
+                  <a:tcPr marL="106700" marR="106700" marT="53350" marB="53350" anchor="ctr">
+                    <a:lnL w="12700" cap="flat" cmpd="sng" algn="ctr">
+                      <a:solidFill>
+                        <a:schemeClr val="tx1"/>
+                      </a:solidFill>
+                      <a:prstDash val="solid"/>
+                      <a:round/>
+                      <a:headEnd type="none" w="med" len="med"/>
+                      <a:tailEnd type="none" w="med" len="med"/>
+                    </a:lnL>
+                    <a:lnR w="12700" cap="flat" cmpd="sng" algn="ctr">
+                      <a:solidFill>
+                        <a:schemeClr val="tx1"/>
+                      </a:solidFill>
+                      <a:prstDash val="solid"/>
+                      <a:round/>
+                      <a:headEnd type="none" w="med" len="med"/>
+                      <a:tailEnd type="none" w="med" len="med"/>
+                    </a:lnR>
+                    <a:lnT w="12700" cap="flat" cmpd="sng" algn="ctr">
+                      <a:solidFill>
+                        <a:schemeClr val="tx1"/>
+                      </a:solidFill>
+                      <a:prstDash val="solid"/>
+                      <a:round/>
+                      <a:headEnd type="none" w="med" len="med"/>
+                      <a:tailEnd type="none" w="med" len="med"/>
+                    </a:lnT>
+                    <a:lnB w="12700" cap="flat" cmpd="sng" algn="ctr">
+                      <a:solidFill>
+                        <a:schemeClr val="tx1"/>
+                      </a:solidFill>
+                      <a:prstDash val="solid"/>
+                      <a:round/>
+                      <a:headEnd type="none" w="med" len="med"/>
+                      <a:tailEnd type="none" w="med" len="med"/>
+                    </a:lnB>
+                  </a:tcPr>
+                </a:tc>
+                <a:tc>
+                  <a:txBody>
+                    <a:bodyPr/>
+                    <a:lstStyle/>
+                    <a:p>
+                      <a:pPr marL="0" marR="0" algn="ctr">
+                        <a:lnSpc>
+                          <a:spcPct val="130000"/>
+                        </a:lnSpc>
+                        <a:spcBef>
+                          <a:spcPts val="200"/>
+                        </a:spcBef>
+                        <a:spcAft>
+                          <a:spcPts val="200"/>
+                        </a:spcAft>
+                      </a:pPr>
+                      <a:r>
+                        <a:rPr lang="en-US" sz="1200" b="0" kern="1200" baseline="0" smtClean="0">
+                          <a:solidFill>
+                            <a:schemeClr val="dk1"/>
+                          </a:solidFill>
+                          <a:effectLst/>
+                          <a:latin typeface="+mn-lt"/>
+                          <a:ea typeface="+mn-ea"/>
+                          <a:cs typeface="Arial" panose="020B0604020202020204" pitchFamily="34" charset="0"/>
+                        </a:rPr>
+                        <a:t>Rejected</a:t>
+                      </a:r>
+                      <a:endParaRPr lang="en-US" sz="1200" b="0" kern="1200" baseline="0">
+                        <a:solidFill>
+                          <a:schemeClr val="dk1"/>
+                        </a:solidFill>
+                        <a:effectLst/>
+                        <a:latin typeface="+mn-lt"/>
+                        <a:ea typeface="+mn-ea"/>
+                        <a:cs typeface="Arial" panose="020B0604020202020204" pitchFamily="34" charset="0"/>
+                      </a:endParaRPr>
+                    </a:p>
+                  </a:txBody>
+                  <a:tcPr marL="25400" marR="25400" marT="0" marB="0" anchor="ctr">
+                    <a:lnL w="12700" cap="flat" cmpd="sng" algn="ctr">
+                      <a:solidFill>
+                        <a:schemeClr val="tx1"/>
+                      </a:solidFill>
+                      <a:prstDash val="solid"/>
+                      <a:round/>
+                      <a:headEnd type="none" w="med" len="med"/>
+                      <a:tailEnd type="none" w="med" len="med"/>
+                    </a:lnL>
+                    <a:lnR w="12700" cap="flat" cmpd="sng" algn="ctr">
+                      <a:solidFill>
+                        <a:schemeClr val="tx1"/>
+                      </a:solidFill>
+                      <a:prstDash val="solid"/>
+                      <a:round/>
+                      <a:headEnd type="none" w="med" len="med"/>
+                      <a:tailEnd type="none" w="med" len="med"/>
+                    </a:lnR>
+                    <a:lnT w="12700" cap="flat" cmpd="sng" algn="ctr">
+                      <a:solidFill>
+                        <a:schemeClr val="tx1"/>
+                      </a:solidFill>
+                      <a:prstDash val="solid"/>
+                      <a:round/>
+                      <a:headEnd type="none" w="med" len="med"/>
+                      <a:tailEnd type="none" w="med" len="med"/>
+                    </a:lnT>
+                    <a:lnB w="12700" cap="flat" cmpd="sng" algn="ctr">
+                      <a:solidFill>
+                        <a:schemeClr val="tx1"/>
+                      </a:solidFill>
+                      <a:prstDash val="solid"/>
+                      <a:round/>
+                      <a:headEnd type="none" w="med" len="med"/>
+                      <a:tailEnd type="none" w="med" len="med"/>
+                    </a:lnB>
+                  </a:tcPr>
+                </a:tc>
+                <a:tc>
+                  <a:txBody>
+                    <a:bodyPr/>
+                    <a:lstStyle/>
+                    <a:p>
+                      <a:pPr marL="0" marR="0" indent="0" algn="ctr" defTabSz="914400" rtl="0" eaLnBrk="1" fontAlgn="auto" latinLnBrk="0" hangingPunct="1">
+                        <a:lnSpc>
+                          <a:spcPct val="130000"/>
+                        </a:lnSpc>
+                        <a:spcBef>
+                          <a:spcPts val="0"/>
+                        </a:spcBef>
+                        <a:spcAft>
+                          <a:spcPts val="0"/>
+                        </a:spcAft>
+                        <a:buClrTx/>
+                        <a:buSzTx/>
+                        <a:buFontTx/>
+                        <a:buNone/>
+                        <a:tabLst/>
+                        <a:defRPr/>
+                      </a:pPr>
+                      <a:r>
+                        <a:rPr lang="en-US" sz="1200" b="0" kern="1200" baseline="0" smtClean="0">
+                          <a:solidFill>
+                            <a:schemeClr val="dk1"/>
+                          </a:solidFill>
+                          <a:effectLst/>
+                          <a:latin typeface="+mn-lt"/>
+                          <a:ea typeface="+mn-ea"/>
+                          <a:cs typeface="Arial" panose="020B0604020202020204" pitchFamily="34" charset="0"/>
+                        </a:rPr>
+                        <a:t>Rejected</a:t>
+                      </a:r>
+                    </a:p>
+                  </a:txBody>
+                  <a:tcPr marL="106700" marR="106700" marT="53350" marB="53350" anchor="ctr">
+                    <a:lnL w="12700" cap="flat" cmpd="sng" algn="ctr">
+                      <a:solidFill>
+                        <a:schemeClr val="tx1"/>
+                      </a:solidFill>
+                      <a:prstDash val="solid"/>
+                      <a:round/>
+                      <a:headEnd type="none" w="med" len="med"/>
+                      <a:tailEnd type="none" w="med" len="med"/>
+                    </a:lnL>
+                    <a:lnR w="12700" cap="flat" cmpd="sng" algn="ctr">
+                      <a:solidFill>
+                        <a:schemeClr val="tx1"/>
+                      </a:solidFill>
+                      <a:prstDash val="solid"/>
+                      <a:round/>
+                      <a:headEnd type="none" w="med" len="med"/>
+                      <a:tailEnd type="none" w="med" len="med"/>
+                    </a:lnR>
+                    <a:lnT w="12700" cap="flat" cmpd="sng" algn="ctr">
+                      <a:solidFill>
+                        <a:schemeClr val="tx1"/>
+                      </a:solidFill>
+                      <a:prstDash val="solid"/>
+                      <a:round/>
+                      <a:headEnd type="none" w="med" len="med"/>
+                      <a:tailEnd type="none" w="med" len="med"/>
+                    </a:lnT>
+                    <a:lnB w="12700" cap="flat" cmpd="sng" algn="ctr">
+                      <a:solidFill>
+                        <a:schemeClr val="tx1"/>
+                      </a:solidFill>
+                      <a:prstDash val="solid"/>
+                      <a:round/>
+                      <a:headEnd type="none" w="med" len="med"/>
+                      <a:tailEnd type="none" w="med" len="med"/>
+                    </a:lnB>
+                  </a:tcPr>
+                </a:tc>
+                <a:tc>
+                  <a:txBody>
+                    <a:bodyPr/>
+                    <a:lstStyle/>
+                    <a:p>
+                      <a:pPr algn="ctr" latinLnBrk="0">
+                        <a:lnSpc>
+                          <a:spcPct val="130000"/>
+                        </a:lnSpc>
+                      </a:pPr>
+                      <a:r>
+                        <a:rPr lang="en-US" sz="1200" b="0" smtClean="0">
+                          <a:latin typeface="+mn-lt"/>
+                          <a:cs typeface="Arial" panose="020B0604020202020204" pitchFamily="34" charset="0"/>
+                        </a:rPr>
+                        <a:t>Selected</a:t>
+                      </a:r>
+                      <a:endParaRPr lang="en-US" sz="1200" b="0">
+                        <a:latin typeface="+mn-lt"/>
+                        <a:cs typeface="Arial" panose="020B0604020202020204" pitchFamily="34" charset="0"/>
+                      </a:endParaRPr>
+                    </a:p>
+                  </a:txBody>
+                  <a:tcPr marL="106700" marR="106700" marT="53350" marB="53350" anchor="ctr">
+                    <a:lnL w="12700" cap="flat" cmpd="sng" algn="ctr">
+                      <a:solidFill>
+                        <a:schemeClr val="tx1"/>
+                      </a:solidFill>
+                      <a:prstDash val="solid"/>
+                      <a:round/>
+                      <a:headEnd type="none" w="med" len="med"/>
+                      <a:tailEnd type="none" w="med" len="med"/>
+                    </a:lnL>
+                    <a:lnR w="12700" cap="flat" cmpd="sng" algn="ctr">
+                      <a:solidFill>
+                        <a:schemeClr val="tx1"/>
+                      </a:solidFill>
+                      <a:prstDash val="solid"/>
+                      <a:round/>
+                      <a:headEnd type="none" w="med" len="med"/>
+                      <a:tailEnd type="none" w="med" len="med"/>
+                    </a:lnR>
+                    <a:lnT w="12700" cap="flat" cmpd="sng" algn="ctr">
+                      <a:solidFill>
+                        <a:schemeClr val="tx1"/>
+                      </a:solidFill>
+                      <a:prstDash val="solid"/>
+                      <a:round/>
+                      <a:headEnd type="none" w="med" len="med"/>
+                      <a:tailEnd type="none" w="med" len="med"/>
+                    </a:lnT>
+                    <a:lnB w="12700" cap="flat" cmpd="sng" algn="ctr">
+                      <a:solidFill>
+                        <a:schemeClr val="tx1"/>
+                      </a:solidFill>
+                      <a:prstDash val="solid"/>
+                      <a:round/>
+                      <a:headEnd type="none" w="med" len="med"/>
+                      <a:tailEnd type="none" w="med" len="med"/>
+                    </a:lnB>
+                  </a:tcPr>
+                </a:tc>
               </a:tr>
             </a:tbl>
           </a:graphicData>
         </a:graphic>
       </p:graphicFrame>
+      <p:sp>
+        <p:nvSpPr>
+          <p:cNvPr id="4" name="TextBox 3"/>
+          <p:cNvSpPr txBox="1"/>
+          <p:nvPr/>
+        </p:nvSpPr>
+        <p:spPr>
+          <a:xfrm>
+            <a:off x="8822266" y="6957846"/>
+            <a:ext cx="3369734" cy="923330"/>
+          </a:xfrm>
+          <a:prstGeom prst="rect">
+            <a:avLst/>
+          </a:prstGeom>
+          <a:noFill/>
+          <a:ln>
+            <a:solidFill>
+              <a:schemeClr val="tx1"/>
+            </a:solidFill>
+          </a:ln>
+        </p:spPr>
+        <p:txBody>
+          <a:bodyPr wrap="square" rtlCol="0">
+            <a:spAutoFit/>
+          </a:bodyPr>
+          <a:lstStyle/>
+          <a:p>
+            <a:r>
+              <a:rPr lang="en-US" b="1" smtClean="0">
+                <a:solidFill>
+                  <a:srgbClr val="00B050"/>
+                </a:solidFill>
+              </a:rPr>
+              <a:t>High</a:t>
+            </a:r>
+            <a:r>
+              <a:rPr lang="en-US" smtClean="0"/>
+              <a:t>: Fully satisfy</a:t>
+            </a:r>
+          </a:p>
+          <a:p>
+            <a:r>
+              <a:rPr lang="en-US" b="1" smtClean="0">
+                <a:solidFill>
+                  <a:schemeClr val="accent2"/>
+                </a:solidFill>
+              </a:rPr>
+              <a:t>Medium</a:t>
+            </a:r>
+            <a:r>
+              <a:rPr lang="en-US" smtClean="0"/>
+              <a:t>: Partially satisfy</a:t>
+            </a:r>
+          </a:p>
+          <a:p>
+            <a:r>
+              <a:rPr lang="en-US" b="1" smtClean="0">
+                <a:solidFill>
+                  <a:srgbClr val="FF0000"/>
+                </a:solidFill>
+              </a:rPr>
+              <a:t>Low</a:t>
+            </a:r>
+            <a:r>
+              <a:rPr lang="en-US" smtClean="0"/>
+              <a:t>: Not satisfy</a:t>
+            </a:r>
+            <a:endParaRPr lang="en-US"/>
+          </a:p>
+        </p:txBody>
+      </p:sp>
+      <p:pic>
+        <p:nvPicPr>
+          <p:cNvPr id="9" name="Picture 2" descr="체크 표시 클립 아트. 무료 다운로드. | Creazilla">
+            <a:extLst>
+              <a:ext uri="{FF2B5EF4-FFF2-40B4-BE49-F238E27FC236}">
+                <a16:creationId xmlns:a16="http://schemas.microsoft.com/office/drawing/2014/main" xmlns="" id="{07DB846E-8DD2-9BB2-88FF-8A7E0BD6CA84}"/>
+              </a:ext>
+            </a:extLst>
+          </p:cNvPr>
+          <p:cNvPicPr>
+            <a:picLocks noChangeAspect="1" noChangeArrowheads="1"/>
+          </p:cNvPicPr>
+          <p:nvPr/>
+        </p:nvPicPr>
+        <p:blipFill>
+          <a:blip r:embed="rId3" cstate="print">
+            <a:extLst>
+              <a:ext uri="{28A0092B-C50C-407E-A947-70E740481C1C}">
+                <a14:useLocalDpi xmlns:a14="http://schemas.microsoft.com/office/drawing/2010/main" val="0"/>
+              </a:ext>
+            </a:extLst>
+          </a:blip>
+          <a:srcRect/>
+          <a:stretch>
+            <a:fillRect/>
+          </a:stretch>
+        </p:blipFill>
+        <p:spPr bwMode="auto">
+          <a:xfrm>
+            <a:off x="9776145" y="6042111"/>
+            <a:ext cx="216024" cy="216024"/>
+          </a:xfrm>
+          <a:prstGeom prst="rect">
+            <a:avLst/>
+          </a:prstGeom>
+          <a:noFill/>
+          <a:extLst>
+            <a:ext uri="{909E8E84-426E-40DD-AFC4-6F175D3DCCD1}">
+              <a14:hiddenFill xmlns:a14="http://schemas.microsoft.com/office/drawing/2010/main">
+                <a:solidFill>
+                  <a:srgbClr val="FFFFFF"/>
+                </a:solidFill>
+              </a14:hiddenFill>
+            </a:ext>
+          </a:extLst>
+        </p:spPr>
+      </p:pic>
     </p:spTree>
     <p:extLst>
       <p:ext uri="{BB962C8B-B14F-4D97-AF65-F5344CB8AC3E}">
@@ -6480,7 +7969,10 @@
           <a:bodyPr/>
           <a:lstStyle/>
           <a:p>
-            <a:endParaRPr lang="en-US" dirty="0"/>
+            <a:r>
+              <a:rPr lang="en-US"/>
+              <a:t>Implementation status</a:t>
+            </a:r>
           </a:p>
         </p:txBody>
       </p:sp>
@@ -6496,8 +7988,8 @@
         </p:nvSpPr>
         <p:spPr>
           <a:xfrm>
-            <a:off x="160866" y="2064190"/>
-            <a:ext cx="11887201" cy="4003894"/>
+            <a:off x="160866" y="990600"/>
+            <a:ext cx="11887201" cy="1791677"/>
           </a:xfrm>
         </p:spPr>
         <p:txBody>
@@ -6506,29 +7998,264 @@
           </a:bodyPr>
           <a:lstStyle/>
           <a:p>
-            <a:pPr marL="0" indent="0" algn="ctr">
-              <a:buNone/>
-            </a:pPr>
-            <a:r>
-              <a:rPr lang="en-US" sz="8800" b="1" dirty="0"/>
-              <a:t>Q&amp;A</a:t>
-            </a:r>
-          </a:p>
-          <a:p>
-            <a:pPr marL="0" indent="0" algn="ctr">
-              <a:buNone/>
-            </a:pPr>
-            <a:r>
-              <a:rPr lang="en-US" sz="3600" b="1" dirty="0"/>
-              <a:t>Thank you for listening</a:t>
+            <a:r>
+              <a:rPr lang="en-US" sz="1800">
+                <a:ln>
+                  <a:solidFill>
+                    <a:schemeClr val="accent6">
+                      <a:lumMod val="75000"/>
+                    </a:schemeClr>
+                  </a:solidFill>
+                </a:ln>
+                <a:solidFill>
+                  <a:schemeClr val="accent6"/>
+                </a:solidFill>
+                <a:sym typeface="Wingdings" panose="05000000000000000000" pitchFamily="2" charset="2"/>
+              </a:rPr>
+              <a:t></a:t>
+            </a:r>
+            <a:r>
+              <a:rPr lang="en-US" sz="1800">
+                <a:ln>
+                  <a:solidFill>
+                    <a:schemeClr val="accent6">
+                      <a:lumMod val="75000"/>
+                    </a:schemeClr>
+                  </a:solidFill>
+                </a:ln>
+                <a:sym typeface="Wingdings" panose="05000000000000000000" pitchFamily="2" charset="2"/>
+              </a:rPr>
+              <a:t>  </a:t>
+            </a:r>
+            <a:r>
+              <a:rPr lang="en-US" sz="1800"/>
+              <a:t>Completed</a:t>
+            </a:r>
+          </a:p>
+          <a:p>
+            <a:pPr lvl="1"/>
+            <a:r>
+              <a:rPr lang="en-US" sz="1800"/>
+              <a:t>EP Container setup completed.</a:t>
+            </a:r>
+          </a:p>
+          <a:p>
+            <a:pPr lvl="1"/>
+            <a:r>
+              <a:rPr lang="en-US" sz="1800" err="1"/>
+              <a:t>RemoteDiagProxy</a:t>
+            </a:r>
+            <a:r>
+              <a:rPr lang="en-US" sz="1800"/>
+              <a:t> implementation completed.</a:t>
+            </a:r>
+          </a:p>
+          <a:p>
+            <a:pPr lvl="1"/>
+            <a:r>
+              <a:rPr lang="en-US" sz="1800"/>
+              <a:t>Communication between </a:t>
+            </a:r>
+            <a:r>
+              <a:rPr lang="en-US" sz="1800" err="1"/>
+              <a:t>RemoteDiagProxy</a:t>
+            </a:r>
+            <a:r>
+              <a:rPr lang="en-US" sz="1800"/>
+              <a:t> and </a:t>
+            </a:r>
+            <a:r>
+              <a:rPr lang="en-US" sz="1800" err="1"/>
+              <a:t>RemoteDiag</a:t>
+            </a:r>
+            <a:r>
+              <a:rPr lang="en-US" sz="1800"/>
+              <a:t> established and verified.</a:t>
             </a:r>
           </a:p>
         </p:txBody>
       </p:sp>
+      <p:sp>
+        <p:nvSpPr>
+          <p:cNvPr id="6" name="AutoShape 2" descr="http://jira.lge.com/issue/secure/attachment/15785945/15785945_image-2026-07-29-16-20-32-949.png"/>
+          <p:cNvSpPr>
+            <a:spLocks noChangeAspect="1" noChangeArrowheads="1"/>
+          </p:cNvSpPr>
+          <p:nvPr/>
+        </p:nvSpPr>
+        <p:spPr bwMode="auto">
+          <a:xfrm>
+            <a:off x="155575" y="-144463"/>
+            <a:ext cx="304800" cy="304801"/>
+          </a:xfrm>
+          <a:prstGeom prst="rect">
+            <a:avLst/>
+          </a:prstGeom>
+          <a:noFill/>
+          <a:extLst>
+            <a:ext uri="{909E8E84-426E-40DD-AFC4-6F175D3DCCD1}">
+              <a14:hiddenFill xmlns:a14="http://schemas.microsoft.com/office/drawing/2010/main">
+                <a:solidFill>
+                  <a:srgbClr val="FFFFFF"/>
+                </a:solidFill>
+              </a14:hiddenFill>
+            </a:ext>
+          </a:extLst>
+        </p:spPr>
+        <p:txBody>
+          <a:bodyPr vert="horz" wrap="square" lIns="91440" tIns="45720" rIns="91440" bIns="45720" numCol="1" anchor="t" anchorCtr="0" compatLnSpc="1">
+            <a:prstTxWarp prst="textNoShape">
+              <a:avLst/>
+            </a:prstTxWarp>
+          </a:bodyPr>
+          <a:lstStyle/>
+          <a:p>
+            <a:endParaRPr lang="en-US"/>
+          </a:p>
+        </p:txBody>
+      </p:sp>
+      <p:sp>
+        <p:nvSpPr>
+          <p:cNvPr id="7" name="AutoShape 4" descr="http://jira.lge.com/issue/secure/attachment/15780505/15780505_image-2026-07-29-11-36-43-878.png"/>
+          <p:cNvSpPr>
+            <a:spLocks noChangeAspect="1" noChangeArrowheads="1"/>
+          </p:cNvSpPr>
+          <p:nvPr/>
+        </p:nvSpPr>
+        <p:spPr bwMode="auto">
+          <a:xfrm>
+            <a:off x="63500" y="-136525"/>
+            <a:ext cx="304800" cy="304800"/>
+          </a:xfrm>
+          <a:prstGeom prst="rect">
+            <a:avLst/>
+          </a:prstGeom>
+          <a:noFill/>
+          <a:extLst>
+            <a:ext uri="{909E8E84-426E-40DD-AFC4-6F175D3DCCD1}">
+              <a14:hiddenFill xmlns:a14="http://schemas.microsoft.com/office/drawing/2010/main">
+                <a:solidFill>
+                  <a:srgbClr val="FFFFFF"/>
+                </a:solidFill>
+              </a14:hiddenFill>
+            </a:ext>
+          </a:extLst>
+        </p:spPr>
+        <p:txBody>
+          <a:bodyPr vert="horz" wrap="square" lIns="91440" tIns="45720" rIns="91440" bIns="45720" numCol="1" anchor="t" anchorCtr="0" compatLnSpc="1">
+            <a:prstTxWarp prst="textNoShape">
+              <a:avLst/>
+            </a:prstTxWarp>
+          </a:bodyPr>
+          <a:lstStyle/>
+          <a:p>
+            <a:endParaRPr lang="en-US"/>
+          </a:p>
+        </p:txBody>
+      </p:sp>
+      <p:sp>
+        <p:nvSpPr>
+          <p:cNvPr id="8" name="AutoShape 6" descr="http://jira.lge.com/issue/secure/attachment/15780505/15780505_image-2026-07-29-11-36-43-878.png"/>
+          <p:cNvSpPr>
+            <a:spLocks noChangeAspect="1" noChangeArrowheads="1"/>
+          </p:cNvSpPr>
+          <p:nvPr/>
+        </p:nvSpPr>
+        <p:spPr bwMode="auto">
+          <a:xfrm>
+            <a:off x="307975" y="7937"/>
+            <a:ext cx="304800" cy="304801"/>
+          </a:xfrm>
+          <a:prstGeom prst="rect">
+            <a:avLst/>
+          </a:prstGeom>
+          <a:noFill/>
+          <a:extLst>
+            <a:ext uri="{909E8E84-426E-40DD-AFC4-6F175D3DCCD1}">
+              <a14:hiddenFill xmlns:a14="http://schemas.microsoft.com/office/drawing/2010/main">
+                <a:solidFill>
+                  <a:srgbClr val="FFFFFF"/>
+                </a:solidFill>
+              </a14:hiddenFill>
+            </a:ext>
+          </a:extLst>
+        </p:spPr>
+        <p:txBody>
+          <a:bodyPr vert="horz" wrap="square" lIns="91440" tIns="45720" rIns="91440" bIns="45720" numCol="1" anchor="t" anchorCtr="0" compatLnSpc="1">
+            <a:prstTxWarp prst="textNoShape">
+              <a:avLst/>
+            </a:prstTxWarp>
+          </a:bodyPr>
+          <a:lstStyle/>
+          <a:p>
+            <a:endParaRPr lang="en-US"/>
+          </a:p>
+        </p:txBody>
+      </p:sp>
+      <p:pic>
+        <p:nvPicPr>
+          <p:cNvPr id="9" name="Picture 8"/>
+          <p:cNvPicPr>
+            <a:picLocks noChangeAspect="1"/>
+          </p:cNvPicPr>
+          <p:nvPr/>
+        </p:nvPicPr>
+        <p:blipFill>
+          <a:blip r:embed="rId2">
+            <a:extLst>
+              <a:ext uri="{28A0092B-C50C-407E-A947-70E740481C1C}">
+                <a14:useLocalDpi xmlns:a14="http://schemas.microsoft.com/office/drawing/2010/main" val="0"/>
+              </a:ext>
+            </a:extLst>
+          </a:blip>
+          <a:stretch>
+            <a:fillRect/>
+          </a:stretch>
+        </p:blipFill>
+        <p:spPr>
+          <a:xfrm>
+            <a:off x="63500" y="2288022"/>
+            <a:ext cx="6404121" cy="1914992"/>
+          </a:xfrm>
+          <a:prstGeom prst="rect">
+            <a:avLst/>
+          </a:prstGeom>
+        </p:spPr>
+      </p:pic>
+      <p:pic>
+        <p:nvPicPr>
+          <p:cNvPr id="10" name="Picture 9"/>
+          <p:cNvPicPr>
+            <a:picLocks noChangeAspect="1"/>
+          </p:cNvPicPr>
+          <p:nvPr/>
+        </p:nvPicPr>
+        <p:blipFill>
+          <a:blip r:embed="rId3">
+            <a:extLst>
+              <a:ext uri="{28A0092B-C50C-407E-A947-70E740481C1C}">
+                <a14:useLocalDpi xmlns:a14="http://schemas.microsoft.com/office/drawing/2010/main" val="0"/>
+              </a:ext>
+            </a:extLst>
+          </a:blip>
+          <a:stretch>
+            <a:fillRect/>
+          </a:stretch>
+        </p:blipFill>
+        <p:spPr>
+          <a:xfrm>
+            <a:off x="5170203" y="3978079"/>
+            <a:ext cx="6877864" cy="2879922"/>
+          </a:xfrm>
+          <a:prstGeom prst="rect">
+            <a:avLst/>
+          </a:prstGeom>
+        </p:spPr>
+      </p:pic>
     </p:spTree>
     <p:extLst>
       <p:ext uri="{BB962C8B-B14F-4D97-AF65-F5344CB8AC3E}">
-        <p14:creationId xmlns:p14="http://schemas.microsoft.com/office/powerpoint/2010/main" val="1581111654"/>
+        <p14:creationId xmlns:p14="http://schemas.microsoft.com/office/powerpoint/2010/main" val="3497496250"/>
       </p:ext>
     </p:extLst>
   </p:cSld>
@@ -6574,16 +8301,113 @@
         </p:nvSpPr>
         <p:spPr/>
         <p:txBody>
+          <a:bodyPr/>
+          <a:lstStyle/>
+          <a:p>
+            <a:endParaRPr lang="en-US"/>
+          </a:p>
+        </p:txBody>
+      </p:sp>
+      <p:sp>
+        <p:nvSpPr>
+          <p:cNvPr id="3" name="Content Placeholder 2"/>
+          <p:cNvSpPr>
+            <a:spLocks noGrp="1"/>
+          </p:cNvSpPr>
+          <p:nvPr>
+            <p:ph idx="1"/>
+          </p:nvPr>
+        </p:nvSpPr>
+        <p:spPr>
+          <a:xfrm>
+            <a:off x="160866" y="2064190"/>
+            <a:ext cx="11887201" cy="4003894"/>
+          </a:xfrm>
+        </p:spPr>
+        <p:txBody>
           <a:bodyPr>
             <a:normAutofit/>
           </a:bodyPr>
           <a:lstStyle/>
           <a:p>
-            <a:r>
-              <a:rPr lang="en-US" b="1" dirty="0"/>
+            <a:pPr marL="0" indent="0" algn="ctr">
+              <a:buNone/>
+            </a:pPr>
+            <a:r>
+              <a:rPr lang="en-US" sz="8800" b="1"/>
+              <a:t>Q&amp;A</a:t>
+            </a:r>
+          </a:p>
+          <a:p>
+            <a:pPr marL="0" indent="0" algn="ctr">
+              <a:buNone/>
+            </a:pPr>
+            <a:r>
+              <a:rPr lang="en-US" sz="3600" b="1"/>
+              <a:t>Thank you for listening</a:t>
+            </a:r>
+          </a:p>
+        </p:txBody>
+      </p:sp>
+    </p:spTree>
+    <p:extLst>
+      <p:ext uri="{BB962C8B-B14F-4D97-AF65-F5344CB8AC3E}">
+        <p14:creationId xmlns:p14="http://schemas.microsoft.com/office/powerpoint/2010/main" val="1581111654"/>
+      </p:ext>
+    </p:extLst>
+  </p:cSld>
+  <p:clrMapOvr>
+    <a:masterClrMapping/>
+  </p:clrMapOvr>
+  <p:timing>
+    <p:tnLst>
+      <p:par>
+        <p:cTn id="1" dur="indefinite" restart="never" nodeType="tmRoot"/>
+      </p:par>
+    </p:tnLst>
+  </p:timing>
+</p:sld>
+</file>
+
+<file path=ppt/slides/slide14.xml><?xml version="1.0" encoding="utf-8"?>
+<p:sld xmlns:a="http://schemas.openxmlformats.org/drawingml/2006/main" xmlns:r="http://schemas.openxmlformats.org/officeDocument/2006/relationships" xmlns:p="http://schemas.openxmlformats.org/presentationml/2006/main">
+  <p:cSld>
+    <p:spTree>
+      <p:nvGrpSpPr>
+        <p:cNvPr id="1" name=""/>
+        <p:cNvGrpSpPr/>
+        <p:nvPr/>
+      </p:nvGrpSpPr>
+      <p:grpSpPr>
+        <a:xfrm>
+          <a:off x="0" y="0"/>
+          <a:ext cx="0" cy="0"/>
+          <a:chOff x="0" y="0"/>
+          <a:chExt cx="0" cy="0"/>
+        </a:xfrm>
+      </p:grpSpPr>
+      <p:sp>
+        <p:nvSpPr>
+          <p:cNvPr id="2" name="Title 1"/>
+          <p:cNvSpPr>
+            <a:spLocks noGrp="1"/>
+          </p:cNvSpPr>
+          <p:nvPr>
+            <p:ph type="title"/>
+          </p:nvPr>
+        </p:nvSpPr>
+        <p:spPr/>
+        <p:txBody>
+          <a:bodyPr>
+            <a:normAutofit/>
+          </a:bodyPr>
+          <a:lstStyle/>
+          <a:p>
+            <a:r>
+              <a:rPr lang="en-US" b="1"/>
               <a:t>Alt-C: Compromise scenario</a:t>
             </a:r>
-            <a:endParaRPr lang="en-US" dirty="0"/>
+            <a:endParaRPr lang="en-US"/>
           </a:p>
         </p:txBody>
       </p:sp>
@@ -6726,7 +8550,7 @@
           <a:p>
             <a:pPr algn="ctr"/>
             <a:r>
-              <a:rPr lang="en-US" sz="1600" dirty="0">
+              <a:rPr lang="en-US" sz="1600">
                 <a:solidFill>
                   <a:srgbClr val="7030A0"/>
                 </a:solidFill>
@@ -6872,7 +8696,7 @@
           <a:p>
             <a:pPr algn="ctr"/>
             <a:r>
-              <a:rPr lang="en-US" sz="1600" dirty="0">
+              <a:rPr lang="en-US" sz="1600">
                 <a:solidFill>
                   <a:schemeClr val="accent1">
                     <a:lumMod val="75000"/>
@@ -7022,7 +8846,7 @@
           <a:p>
             <a:pPr algn="ctr"/>
             <a:r>
-              <a:rPr lang="en-US" sz="1600" dirty="0">
+              <a:rPr lang="en-US" sz="1600">
                 <a:solidFill>
                   <a:schemeClr val="accent2">
                     <a:lumMod val="50000"/>
@@ -7094,7 +8918,7 @@
 </p:sld>
 </file>
 
-<file path=ppt/slides/slide14.xml><?xml version="1.0" encoding="utf-8"?>
+<file path=ppt/slides/slide15.xml><?xml version="1.0" encoding="utf-8"?>
 <p:sld xmlns:a="http://schemas.openxmlformats.org/drawingml/2006/main" xmlns:r="http://schemas.openxmlformats.org/officeDocument/2006/relationships" xmlns:p="http://schemas.openxmlformats.org/presentationml/2006/main">
   <p:cSld>
     <p:spTree>
@@ -7127,7 +8951,7 @@
           <a:lstStyle/>
           <a:p>
             <a:r>
-              <a:rPr lang="en-US" dirty="0"/>
+              <a:rPr lang="en-US"/>
               <a:t>Implementation status</a:t>
             </a:r>
           </a:p>
@@ -7156,7 +8980,7 @@
           <a:lstStyle/>
           <a:p>
             <a:r>
-              <a:rPr lang="en-US" sz="1800" dirty="0">
+              <a:rPr lang="en-US" sz="1800">
                 <a:ln>
                   <a:solidFill>
                     <a:schemeClr val="accent6">
@@ -7172,7 +8996,7 @@
               <a:t></a:t>
             </a:r>
             <a:r>
-              <a:rPr lang="en-US" sz="1800" dirty="0">
+              <a:rPr lang="en-US" sz="1800">
                 <a:ln>
                   <a:solidFill>
                     <a:schemeClr val="accent6">
@@ -7185,48 +9009,48 @@
               <a:t>  </a:t>
             </a:r>
             <a:r>
-              <a:rPr lang="en-US" sz="1800" dirty="0"/>
+              <a:rPr lang="en-US" sz="1800"/>
               <a:t>Completed</a:t>
             </a:r>
           </a:p>
           <a:p>
             <a:pPr lvl="1"/>
             <a:r>
-              <a:rPr lang="en-US" sz="1800" dirty="0"/>
+              <a:rPr lang="en-US" sz="1800"/>
               <a:t>EP Container setup completed.</a:t>
             </a:r>
           </a:p>
           <a:p>
             <a:pPr lvl="1"/>
             <a:r>
-              <a:rPr lang="en-US" sz="1800" dirty="0" err="1"/>
+              <a:rPr lang="en-US" sz="1800" err="1"/>
               <a:t>RemoteDiagProxy</a:t>
             </a:r>
             <a:r>
-              <a:rPr lang="en-US" sz="1800" dirty="0"/>
+              <a:rPr lang="en-US" sz="1800"/>
               <a:t> implementation completed.</a:t>
             </a:r>
           </a:p>
           <a:p>
             <a:pPr lvl="1"/>
             <a:r>
-              <a:rPr lang="en-US" sz="1800" dirty="0"/>
+              <a:rPr lang="en-US" sz="1800"/>
               <a:t>Communication between </a:t>
             </a:r>
             <a:r>
-              <a:rPr lang="en-US" sz="1800" dirty="0" err="1"/>
+              <a:rPr lang="en-US" sz="1800" err="1"/>
               <a:t>RemoteDiagProxy</a:t>
             </a:r>
             <a:r>
-              <a:rPr lang="en-US" sz="1800" dirty="0"/>
+              <a:rPr lang="en-US" sz="1800"/>
               <a:t> and </a:t>
             </a:r>
             <a:r>
-              <a:rPr lang="en-US" sz="1800" dirty="0" err="1"/>
+              <a:rPr lang="en-US" sz="1800" err="1"/>
               <a:t>RemoteDiag</a:t>
             </a:r>
             <a:r>
-              <a:rPr lang="en-US" sz="1800" dirty="0"/>
+              <a:rPr lang="en-US" sz="1800"/>
               <a:t> established and verified.</a:t>
             </a:r>
           </a:p>
@@ -7436,7 +9260,7 @@
               <a:buChar char="•"/>
             </a:pPr>
             <a:r>
-              <a:rPr lang="en-US" dirty="0">
+              <a:rPr lang="en-US">
                 <a:solidFill>
                   <a:schemeClr val="accent2">
                     <a:lumMod val="75000"/>
@@ -7447,13 +9271,13 @@
               <a:t></a:t>
             </a:r>
             <a:r>
-              <a:rPr lang="en-US" dirty="0">
+              <a:rPr lang="en-US">
                 <a:sym typeface="Wingdings" panose="05000000000000000000" pitchFamily="2" charset="2"/>
               </a:rPr>
               <a:t> </a:t>
             </a:r>
             <a:r>
-              <a:rPr lang="en-US" dirty="0"/>
+              <a:rPr lang="en-US"/>
               <a:t>Next Step:</a:t>
             </a:r>
           </a:p>
@@ -7463,12 +9287,12 @@
               <a:buChar char="•"/>
             </a:pPr>
             <a:r>
-              <a:rPr lang="en-US" dirty="0"/>
+              <a:rPr lang="en-US"/>
               <a:t>SID Filter implementation &amp; testing</a:t>
             </a:r>
           </a:p>
           <a:p>
-            <a:endParaRPr lang="en-US" dirty="0"/>
+            <a:endParaRPr lang="en-US"/>
           </a:p>
         </p:txBody>
       </p:sp>
@@ -7492,7 +9316,7 @@
 </p:sld>
 </file>
 
-<file path=ppt/slides/slide15.xml><?xml version="1.0" encoding="utf-8"?>
+<file path=ppt/slides/slide16.xml><?xml version="1.0" encoding="utf-8"?>
 <p:sld xmlns:a="http://schemas.openxmlformats.org/drawingml/2006/main" xmlns:r="http://schemas.openxmlformats.org/officeDocument/2006/relationships" xmlns:p="http://schemas.openxmlformats.org/presentationml/2006/main">
   <p:cSld>
     <p:spTree>
@@ -7554,7 +9378,7 @@
               <a:buNone/>
             </a:pPr>
             <a:r>
-              <a:rPr lang="en-US" sz="6600" b="1" dirty="0"/>
+              <a:rPr lang="en-US" sz="6600" b="1"/>
               <a:t>Appendix</a:t>
             </a:r>
           </a:p>
@@ -7573,7 +9397,7 @@
 </p:sld>
 </file>
 
-<file path=ppt/slides/slide16.xml><?xml version="1.0" encoding="utf-8"?>
+<file path=ppt/slides/slide17.xml><?xml version="1.0" encoding="utf-8"?>
 <p:sld xmlns:a="http://schemas.openxmlformats.org/drawingml/2006/main" xmlns:r="http://schemas.openxmlformats.org/officeDocument/2006/relationships" xmlns:p="http://schemas.openxmlformats.org/presentationml/2006/main">
   <p:cSld>
     <p:spTree>
@@ -7595,7 +9419,7 @@
           <p:cNvPr id="2" name="Title 1">
             <a:extLst>
               <a:ext uri="{FF2B5EF4-FFF2-40B4-BE49-F238E27FC236}">
-                <a16:creationId xmlns:a16="http://schemas.microsoft.com/office/drawing/2014/main" xmlns="" id="{65C86E6E-BE59-7A7B-6BE9-16A0A094C3D6}"/>
+                <a16:creationId xmlns="" xmlns:a16="http://schemas.microsoft.com/office/drawing/2014/main" id="{65C86E6E-BE59-7A7B-6BE9-16A0A094C3D6}"/>
               </a:ext>
             </a:extLst>
           </p:cNvPr>
@@ -7612,7 +9436,7 @@
           <a:lstStyle/>
           <a:p>
             <a:r>
-              <a:rPr lang="en-US" dirty="0"/>
+              <a:rPr lang="en-US"/>
               <a:t>Diagnostic filtering requirements</a:t>
             </a:r>
           </a:p>
@@ -7623,7 +9447,7 @@
           <p:cNvPr id="7" name="Content Placeholder 6">
             <a:extLst>
               <a:ext uri="{FF2B5EF4-FFF2-40B4-BE49-F238E27FC236}">
-                <a16:creationId xmlns:a16="http://schemas.microsoft.com/office/drawing/2014/main" xmlns="" id="{AD4A4EC6-9BB8-2849-8D75-05C44DE9A384}"/>
+                <a16:creationId xmlns="" xmlns:a16="http://schemas.microsoft.com/office/drawing/2014/main" id="{AD4A4EC6-9BB8-2849-8D75-05C44DE9A384}"/>
               </a:ext>
             </a:extLst>
           </p:cNvPr>
@@ -7655,7 +9479,7 @@
           <p:cNvPr id="9" name="Picture 8">
             <a:extLst>
               <a:ext uri="{FF2B5EF4-FFF2-40B4-BE49-F238E27FC236}">
-                <a16:creationId xmlns:a16="http://schemas.microsoft.com/office/drawing/2014/main" xmlns="" id="{C985C62C-76E5-84A1-DEF1-FC486F2BF179}"/>
+                <a16:creationId xmlns="" xmlns:a16="http://schemas.microsoft.com/office/drawing/2014/main" id="{C985C62C-76E5-84A1-DEF1-FC486F2BF179}"/>
               </a:ext>
             </a:extLst>
           </p:cNvPr>
@@ -7693,7 +9517,7 @@
 </p:sld>
 </file>
 
-<file path=ppt/slides/slide17.xml><?xml version="1.0" encoding="utf-8"?>
+<file path=ppt/slides/slide18.xml><?xml version="1.0" encoding="utf-8"?>
 <p:sld xmlns:a="http://schemas.openxmlformats.org/drawingml/2006/main" xmlns:r="http://schemas.openxmlformats.org/officeDocument/2006/relationships" xmlns:p="http://schemas.openxmlformats.org/presentationml/2006/main">
   <p:cSld>
     <p:spTree>
@@ -7745,7 +9569,7 @@
           <a:lstStyle/>
           <a:p>
             <a:r>
-              <a:rPr lang="en-US" sz="2000" dirty="0"/>
+              <a:rPr lang="en-US" sz="2000"/>
               <a:t>Current architecture: the entire telematics stack (DCM) runs in a single partition.</a:t>
             </a:r>
           </a:p>
@@ -7788,7 +9612,7 @@
           <a:lstStyle/>
           <a:p>
             <a:r>
-              <a:rPr lang="en-US" dirty="0">
+              <a:rPr lang="en-US">
                 <a:solidFill>
                   <a:schemeClr val="tx1"/>
                 </a:solidFill>
@@ -7814,7 +9638,7 @@
           <a:lstStyle/>
           <a:p>
             <a:r>
-              <a:rPr lang="en-US" dirty="0"/>
+              <a:rPr lang="en-US"/>
               <a:t>Context &amp; Motivation</a:t>
             </a:r>
           </a:p>
@@ -7888,7 +9712,7 @@
               <a:p>
                 <a:pPr algn="ctr"/>
                 <a:r>
-                  <a:rPr lang="en-US" dirty="0">
+                  <a:rPr lang="en-US">
                     <a:solidFill>
                       <a:schemeClr val="tx1"/>
                     </a:solidFill>
@@ -7948,7 +9772,7 @@
               <a:p>
                 <a:pPr algn="ctr"/>
                 <a:r>
-                  <a:rPr lang="en-US" dirty="0">
+                  <a:rPr lang="en-US">
                     <a:solidFill>
                       <a:schemeClr val="bg1"/>
                     </a:solidFill>
@@ -8019,7 +9843,7 @@
                 <a:lstStyle/>
                 <a:p>
                   <a:pPr algn="ctr"/>
-                  <a:endParaRPr lang="en-US" dirty="0">
+                  <a:endParaRPr lang="en-US">
                     <a:solidFill>
                       <a:schemeClr val="tx1">
                         <a:lumMod val="95000"/>
@@ -8078,7 +9902,7 @@
                 <a:p>
                   <a:pPr algn="ctr"/>
                   <a:r>
-                    <a:rPr lang="en-US" dirty="0">
+                    <a:rPr lang="en-US">
                       <a:solidFill>
                         <a:schemeClr val="tx1">
                           <a:lumMod val="95000"/>
@@ -8142,7 +9966,7 @@
               <a:p>
                 <a:pPr algn="ctr"/>
                 <a:r>
-                  <a:rPr lang="en-US" dirty="0">
+                  <a:rPr lang="en-US">
                     <a:solidFill>
                       <a:schemeClr val="tx1">
                         <a:lumMod val="95000"/>
@@ -8206,7 +10030,7 @@
             <a:p>
               <a:pPr algn="ctr"/>
               <a:r>
-                <a:rPr lang="en-US" dirty="0">
+                <a:rPr lang="en-US">
                   <a:solidFill>
                     <a:schemeClr val="tx1">
                       <a:lumMod val="95000"/>
@@ -8258,7 +10082,7 @@
           <a:lstStyle/>
           <a:p>
             <a:r>
-              <a:rPr lang="en-US" sz="2400" dirty="0"/>
+              <a:rPr lang="en-US" sz="2400"/>
               <a:t>New OEM security requirement:</a:t>
             </a:r>
           </a:p>
@@ -8268,15 +10092,15 @@
               <a:buChar char="•"/>
             </a:pPr>
             <a:r>
-              <a:rPr lang="en-US" sz="2000" dirty="0"/>
+              <a:rPr lang="en-US" sz="2000"/>
               <a:t>When Entry Point (EP) Partition is compromised, the damage </a:t>
             </a:r>
             <a:r>
-              <a:rPr lang="en-US" sz="2000" b="1" dirty="0"/>
+              <a:rPr lang="en-US" sz="2000" b="1"/>
               <a:t>must NOT propagate</a:t>
             </a:r>
             <a:r>
-              <a:rPr lang="en-US" sz="2000" dirty="0"/>
+              <a:rPr lang="en-US" sz="2000"/>
               <a:t> to Internal Partition and internal CAN bus.</a:t>
             </a:r>
           </a:p>
@@ -8286,15 +10110,15 @@
               <a:buChar char="•"/>
             </a:pPr>
             <a:r>
-              <a:rPr lang="en-US" sz="2000" dirty="0"/>
+              <a:rPr lang="en-US" sz="2000"/>
               <a:t>Unauthorized diagnostic commands related to reprogramming </a:t>
             </a:r>
             <a:r>
-              <a:rPr lang="en-US" sz="2000" b="1" dirty="0"/>
+              <a:rPr lang="en-US" sz="2000" b="1"/>
               <a:t>must be filtered</a:t>
             </a:r>
             <a:r>
-              <a:rPr lang="en-US" sz="2000" dirty="0"/>
+              <a:rPr lang="en-US" sz="2000"/>
               <a:t>.</a:t>
             </a:r>
           </a:p>
@@ -8303,7 +10127,7 @@
               <a:buFont typeface="Arial" panose="020B0604020202020204" pitchFamily="34" charset="0"/>
               <a:buChar char="•"/>
             </a:pPr>
-            <a:endParaRPr lang="en-US" sz="2400" dirty="0"/>
+            <a:endParaRPr lang="en-US" sz="2400"/>
           </a:p>
         </p:txBody>
       </p:sp>
@@ -8452,7 +10276,7 @@
           <a:lstStyle/>
           <a:p>
             <a:r>
-              <a:rPr lang="en-US" dirty="0"/>
+              <a:rPr lang="en-US"/>
               <a:t>Internal CAN</a:t>
             </a:r>
           </a:p>
@@ -8520,7 +10344,7 @@
           <a:lstStyle/>
           <a:p>
             <a:r>
-              <a:rPr lang="en-US" dirty="0"/>
+              <a:rPr lang="en-US"/>
               <a:t>data flow</a:t>
             </a:r>
           </a:p>
@@ -8549,33 +10373,33 @@
           <a:lstStyle/>
           <a:p>
             <a:r>
-              <a:rPr lang="en-US" b="1" dirty="0"/>
+              <a:rPr lang="en-US" b="1"/>
               <a:t>EP</a:t>
             </a:r>
             <a:r>
-              <a:rPr lang="en-US" dirty="0"/>
+              <a:rPr lang="en-US"/>
               <a:t>: contains externally exposed network components (</a:t>
             </a:r>
             <a:r>
-              <a:rPr lang="en-US" dirty="0" err="1"/>
+              <a:rPr lang="en-US" err="1"/>
               <a:t>ie</a:t>
             </a:r>
             <a:r>
-              <a:rPr lang="en-US" dirty="0"/>
+              <a:rPr lang="en-US"/>
               <a:t>: Cellular/Center, OTA, etc.), OEM Apps and other LGE Apps/Services</a:t>
             </a:r>
           </a:p>
           <a:p>
             <a:r>
-              <a:rPr lang="en-US" b="1" dirty="0"/>
+              <a:rPr lang="en-US" b="1"/>
               <a:t>Internal Partition</a:t>
             </a:r>
             <a:r>
-              <a:rPr lang="en-US" dirty="0"/>
+              <a:rPr lang="en-US"/>
               <a:t>: contains components which has access to in-vehicle CAN bus. This is the </a:t>
             </a:r>
             <a:r>
-              <a:rPr lang="en-US" b="1" dirty="0"/>
+              <a:rPr lang="en-US" b="1"/>
               <a:t>trusted zone</a:t>
             </a:r>
           </a:p>
@@ -8594,7 +10418,7 @@
 </p:sld>
 </file>
 
-<file path=ppt/slides/slide18.xml><?xml version="1.0" encoding="utf-8"?>
+<file path=ppt/slides/slide19.xml><?xml version="1.0" encoding="utf-8"?>
 <p:sld xmlns:a="http://schemas.openxmlformats.org/drawingml/2006/main" xmlns:r="http://schemas.openxmlformats.org/officeDocument/2006/relationships" xmlns:p="http://schemas.openxmlformats.org/presentationml/2006/main">
   <p:cSld>
     <p:spTree>
@@ -8616,7 +10440,7 @@
           <p:cNvPr id="17" name="Group 16">
             <a:extLst>
               <a:ext uri="{FF2B5EF4-FFF2-40B4-BE49-F238E27FC236}">
-                <a16:creationId xmlns:a16="http://schemas.microsoft.com/office/drawing/2014/main" xmlns="" id="{0AFC7E7A-719D-91DA-98A6-ACBCE177BB10}"/>
+                <a16:creationId xmlns="" xmlns:a16="http://schemas.microsoft.com/office/drawing/2014/main" id="{0AFC7E7A-719D-91DA-98A6-ACBCE177BB10}"/>
               </a:ext>
             </a:extLst>
           </p:cNvPr>
@@ -8636,7 +10460,7 @@
             <p:cNvPr id="14" name="Picture 13" descr="A screenshot of a computer&#10;&#10;AI-generated content may be incorrect.">
               <a:extLst>
                 <a:ext uri="{FF2B5EF4-FFF2-40B4-BE49-F238E27FC236}">
-                  <a16:creationId xmlns:a16="http://schemas.microsoft.com/office/drawing/2014/main" xmlns="" id="{688E41AB-DCC1-75A5-9652-8F2D2728C1FB}"/>
+                  <a16:creationId xmlns="" xmlns:a16="http://schemas.microsoft.com/office/drawing/2014/main" id="{688E41AB-DCC1-75A5-9652-8F2D2728C1FB}"/>
                 </a:ext>
               </a:extLst>
             </p:cNvPr>
@@ -8672,7 +10496,7 @@
             <p:cNvPr id="11" name="Graphic 10" descr="Back with solid fill">
               <a:extLst>
                 <a:ext uri="{FF2B5EF4-FFF2-40B4-BE49-F238E27FC236}">
-                  <a16:creationId xmlns:a16="http://schemas.microsoft.com/office/drawing/2014/main" xmlns="" id="{6F16C2C1-0B4C-42CA-1D81-C41554FFC134}"/>
+                  <a16:creationId xmlns="" xmlns:a16="http://schemas.microsoft.com/office/drawing/2014/main" id="{6F16C2C1-0B4C-42CA-1D81-C41554FFC134}"/>
                 </a:ext>
               </a:extLst>
             </p:cNvPr>
@@ -8685,7 +10509,7 @@
             <a:blip r:embed="rId3">
               <a:extLst>
                 <a:ext uri="{96DAC541-7B7A-43D3-8B79-37D633B846F1}">
-                  <asvg:svgBlip xmlns:asvg="http://schemas.microsoft.com/office/drawing/2016/SVG/main" xmlns="" r:embed="rId4"/>
+                  <asvg:svgBlip xmlns="" xmlns:asvg="http://schemas.microsoft.com/office/drawing/2016/SVG/main" r:embed="rId4"/>
                 </a:ext>
               </a:extLst>
             </a:blip>
@@ -8708,7 +10532,7 @@
             <p:cNvPr id="12" name="Graphic 11" descr="Back with solid fill">
               <a:extLst>
                 <a:ext uri="{FF2B5EF4-FFF2-40B4-BE49-F238E27FC236}">
-                  <a16:creationId xmlns:a16="http://schemas.microsoft.com/office/drawing/2014/main" xmlns="" id="{7702869A-0835-C839-D150-627E11EFB94C}"/>
+                  <a16:creationId xmlns="" xmlns:a16="http://schemas.microsoft.com/office/drawing/2014/main" id="{7702869A-0835-C839-D150-627E11EFB94C}"/>
                 </a:ext>
               </a:extLst>
             </p:cNvPr>
@@ -8721,7 +10545,7 @@
             <a:blip r:embed="rId3">
               <a:extLst>
                 <a:ext uri="{96DAC541-7B7A-43D3-8B79-37D633B846F1}">
-                  <asvg:svgBlip xmlns:asvg="http://schemas.microsoft.com/office/drawing/2016/SVG/main" xmlns="" r:embed="rId4"/>
+                  <asvg:svgBlip xmlns="" xmlns:asvg="http://schemas.microsoft.com/office/drawing/2016/SVG/main" r:embed="rId4"/>
                 </a:ext>
               </a:extLst>
             </a:blip>
@@ -8744,7 +10568,7 @@
             <p:cNvPr id="16" name="Graphic 15" descr="Question Mark with solid fill">
               <a:extLst>
                 <a:ext uri="{FF2B5EF4-FFF2-40B4-BE49-F238E27FC236}">
-                  <a16:creationId xmlns:a16="http://schemas.microsoft.com/office/drawing/2014/main" xmlns="" id="{E808654D-9897-D2E3-DEE9-7AB9459F1B75}"/>
+                  <a16:creationId xmlns="" xmlns:a16="http://schemas.microsoft.com/office/drawing/2014/main" id="{E808654D-9897-D2E3-DEE9-7AB9459F1B75}"/>
                 </a:ext>
               </a:extLst>
             </p:cNvPr>
@@ -8757,7 +10581,7 @@
             <a:blip r:embed="rId5">
               <a:extLst>
                 <a:ext uri="{96DAC541-7B7A-43D3-8B79-37D633B846F1}">
-                  <asvg:svgBlip xmlns:asvg="http://schemas.microsoft.com/office/drawing/2016/SVG/main" xmlns="" r:embed="rId6"/>
+                  <asvg:svgBlip xmlns="" xmlns:asvg="http://schemas.microsoft.com/office/drawing/2016/SVG/main" r:embed="rId6"/>
                 </a:ext>
               </a:extLst>
             </a:blip>
@@ -8792,7 +10616,7 @@
           <a:lstStyle/>
           <a:p>
             <a:r>
-              <a:rPr lang="en-US" dirty="0"/>
+              <a:rPr lang="en-US"/>
               <a:t>Problem</a:t>
             </a:r>
           </a:p>
@@ -8816,121 +10640,121 @@
           <a:lstStyle/>
           <a:p>
             <a:r>
-              <a:rPr lang="en-US" sz="1800" dirty="0"/>
+              <a:rPr lang="en-US" sz="1800"/>
               <a:t>To comply with the EP/IP separation, the </a:t>
             </a:r>
             <a:r>
-              <a:rPr lang="en-US" sz="1800" dirty="0" err="1"/>
+              <a:rPr lang="en-US" sz="1800" err="1"/>
               <a:t>RemoteDiag</a:t>
             </a:r>
             <a:r>
-              <a:rPr lang="en-US" sz="1800" dirty="0"/>
+              <a:rPr lang="en-US" sz="1800"/>
               <a:t> </a:t>
             </a:r>
             <a:r>
-              <a:rPr lang="en-US" sz="1800" b="1" dirty="0"/>
+              <a:rPr lang="en-US" sz="1800" b="1"/>
               <a:t>component architecture and communication model</a:t>
             </a:r>
             <a:r>
-              <a:rPr lang="en-US" sz="1800" dirty="0"/>
+              <a:rPr lang="en-US" sz="1800"/>
               <a:t> should be redesigned.</a:t>
             </a:r>
           </a:p>
           <a:p>
             <a:r>
-              <a:rPr lang="en-US" sz="1800" dirty="0"/>
+              <a:rPr lang="en-US" sz="1800"/>
               <a:t>The design should satisfy below points:</a:t>
             </a:r>
           </a:p>
           <a:p>
             <a:pPr lvl="1"/>
             <a:r>
-              <a:rPr lang="en-US" sz="1800" dirty="0"/>
+              <a:rPr lang="en-US" sz="1800"/>
               <a:t>Diagnostic processing (main job of </a:t>
             </a:r>
             <a:r>
-              <a:rPr lang="en-US" sz="1800" dirty="0" err="1"/>
+              <a:rPr lang="en-US" sz="1800" err="1"/>
               <a:t>RemoteDiag</a:t>
             </a:r>
             <a:r>
-              <a:rPr lang="en-US" sz="1800" dirty="0"/>
+              <a:rPr lang="en-US" sz="1800"/>
               <a:t>) </a:t>
             </a:r>
             <a:r>
-              <a:rPr lang="en-US" sz="1800" b="1" dirty="0"/>
+              <a:rPr lang="en-US" sz="1800" b="1"/>
               <a:t>should be preserved</a:t>
             </a:r>
             <a:r>
-              <a:rPr lang="en-US" sz="1800" dirty="0"/>
+              <a:rPr lang="en-US" sz="1800"/>
               <a:t>.</a:t>
             </a:r>
           </a:p>
           <a:p>
             <a:pPr lvl="1"/>
             <a:r>
-              <a:rPr lang="en-US" sz="1800" dirty="0" err="1"/>
+              <a:rPr lang="en-US" sz="1800" err="1"/>
               <a:t>RemoteDiag</a:t>
             </a:r>
             <a:r>
-              <a:rPr lang="en-US" sz="1800" dirty="0"/>
+              <a:rPr lang="en-US" sz="1800"/>
               <a:t> still requires </a:t>
             </a:r>
             <a:r>
-              <a:rPr lang="en-US" sz="1800" b="1" dirty="0"/>
+              <a:rPr lang="en-US" sz="1800" b="1"/>
               <a:t>communicating with other modules in EP container </a:t>
             </a:r>
             <a:r>
-              <a:rPr lang="en-US" sz="1800" dirty="0"/>
+              <a:rPr lang="en-US" sz="1800"/>
               <a:t>(e.g., OEM Center, </a:t>
             </a:r>
             <a:r>
-              <a:rPr lang="en-US" sz="1800" dirty="0" err="1"/>
+              <a:rPr lang="en-US" sz="1800" err="1"/>
               <a:t>CommMgr</a:t>
             </a:r>
             <a:r>
-              <a:rPr lang="en-US" sz="1800" dirty="0"/>
+              <a:rPr lang="en-US" sz="1800"/>
               <a:t>, MQTT, …)</a:t>
             </a:r>
           </a:p>
           <a:p>
             <a:pPr lvl="1"/>
             <a:r>
-              <a:rPr lang="en-US" sz="1800" dirty="0"/>
+              <a:rPr lang="en-US" sz="1800"/>
               <a:t>Changes to existing EP modules should be minimized.</a:t>
             </a:r>
           </a:p>
           <a:p>
             <a:pPr lvl="1"/>
             <a:r>
-              <a:rPr lang="en-US" sz="1800" dirty="0"/>
+              <a:rPr lang="en-US" sz="1800"/>
               <a:t>Fault isolation and security: </a:t>
             </a:r>
           </a:p>
           <a:p>
             <a:pPr lvl="2"/>
             <a:r>
-              <a:rPr lang="en-US" sz="1800" dirty="0" err="1"/>
+              <a:rPr lang="en-US" sz="1800" err="1"/>
               <a:t>RemoteDiag</a:t>
             </a:r>
             <a:r>
-              <a:rPr lang="en-US" sz="1800" dirty="0"/>
+              <a:rPr lang="en-US" sz="1800"/>
               <a:t> should remain operational even if the EP partition is compromised.</a:t>
             </a:r>
           </a:p>
           <a:p>
             <a:pPr lvl="2"/>
             <a:r>
-              <a:rPr lang="en-US" sz="1800" dirty="0"/>
+              <a:rPr lang="en-US" sz="1800"/>
               <a:t>Diagnostic commands related to reprogramming should be filtered (</a:t>
             </a:r>
             <a:r>
-              <a:rPr lang="en-US" sz="1800" dirty="0">
+              <a:rPr lang="en-US" sz="1800">
                 <a:hlinkClick r:id="rId7" action="ppaction://hlinksldjump"/>
               </a:rPr>
               <a:t>refer to Diagnostic Filtering Requirements</a:t>
             </a:r>
             <a:r>
-              <a:rPr lang="en-US" sz="1800" dirty="0"/>
+              <a:rPr lang="en-US" sz="1800"/>
               <a:t>)</a:t>
             </a:r>
           </a:p>
@@ -9002,7 +10826,7 @@
           <a:p>
             <a:pPr algn="ctr"/>
             <a:r>
-              <a:rPr lang="en-US" dirty="0">
+              <a:rPr lang="en-US">
                 <a:solidFill>
                   <a:schemeClr val="tx1"/>
                 </a:solidFill>
@@ -9010,7 +10834,7 @@
               <a:t>Where should </a:t>
             </a:r>
             <a:r>
-              <a:rPr lang="en-US" dirty="0" err="1">
+              <a:rPr lang="en-US" err="1">
                 <a:solidFill>
                   <a:schemeClr val="tx1"/>
                 </a:solidFill>
@@ -9018,7 +10842,7 @@
               <a:t>RemoteDiag</a:t>
             </a:r>
             <a:r>
-              <a:rPr lang="en-US" dirty="0">
+              <a:rPr lang="en-US">
                 <a:solidFill>
                   <a:schemeClr val="tx1"/>
                 </a:solidFill>
@@ -9070,7 +10894,7 @@
           <a:p>
             <a:pPr algn="ctr"/>
             <a:r>
-              <a:rPr lang="en-US" dirty="0">
+              <a:rPr lang="en-US">
                 <a:solidFill>
                   <a:schemeClr val="tx1"/>
                 </a:solidFill>
@@ -9090,532 +10914,6 @@
   <p:clrMapOvr>
     <a:masterClrMapping/>
   </p:clrMapOvr>
-</p:sld>
-</file>
-
-<file path=ppt/slides/slide19.xml><?xml version="1.0" encoding="utf-8"?>
-<p:sld xmlns:a="http://schemas.openxmlformats.org/drawingml/2006/main" xmlns:r="http://schemas.openxmlformats.org/officeDocument/2006/relationships" xmlns:p="http://schemas.openxmlformats.org/presentationml/2006/main">
-  <p:cSld>
-    <p:spTree>
-      <p:nvGrpSpPr>
-        <p:cNvPr id="1" name="">
-          <a:extLst>
-            <a:ext uri="{FF2B5EF4-FFF2-40B4-BE49-F238E27FC236}">
-              <a16:creationId xmlns:a16="http://schemas.microsoft.com/office/drawing/2014/main" xmlns="" id="{E3C2B75C-23E8-D9F9-C4EA-82DD24D63F67}"/>
-            </a:ext>
-          </a:extLst>
-        </p:cNvPr>
-        <p:cNvGrpSpPr/>
-        <p:nvPr/>
-      </p:nvGrpSpPr>
-      <p:grpSpPr>
-        <a:xfrm>
-          <a:off x="0" y="0"/>
-          <a:ext cx="0" cy="0"/>
-          <a:chOff x="0" y="0"/>
-          <a:chExt cx="0" cy="0"/>
-        </a:xfrm>
-      </p:grpSpPr>
-      <p:sp>
-        <p:nvSpPr>
-          <p:cNvPr id="2" name="Title 1">
-            <a:extLst>
-              <a:ext uri="{FF2B5EF4-FFF2-40B4-BE49-F238E27FC236}">
-                <a16:creationId xmlns:a16="http://schemas.microsoft.com/office/drawing/2014/main" xmlns="" id="{56A28504-A0AD-A7E9-3FC5-18DB5EE5712D}"/>
-              </a:ext>
-            </a:extLst>
-          </p:cNvPr>
-          <p:cNvSpPr>
-            <a:spLocks noGrp="1"/>
-          </p:cNvSpPr>
-          <p:nvPr>
-            <p:ph type="title"/>
-          </p:nvPr>
-        </p:nvSpPr>
-        <p:spPr/>
-        <p:txBody>
-          <a:bodyPr/>
-          <a:lstStyle/>
-          <a:p>
-            <a:r>
-              <a:rPr lang="en-US" dirty="0"/>
-              <a:t>Quality Attribute</a:t>
-            </a:r>
-          </a:p>
-        </p:txBody>
-      </p:sp>
-      <p:graphicFrame>
-        <p:nvGraphicFramePr>
-          <p:cNvPr id="7" name="Content Placeholder 6">
-            <a:extLst>
-              <a:ext uri="{FF2B5EF4-FFF2-40B4-BE49-F238E27FC236}">
-                <a16:creationId xmlns:a16="http://schemas.microsoft.com/office/drawing/2014/main" xmlns="" id="{E0D35A5C-C584-C4A0-1B22-6388F2453084}"/>
-              </a:ext>
-            </a:extLst>
-          </p:cNvPr>
-          <p:cNvGraphicFramePr>
-            <a:graphicFrameLocks noGrp="1"/>
-          </p:cNvGraphicFramePr>
-          <p:nvPr>
-            <p:ph idx="1"/>
-          </p:nvPr>
-        </p:nvGraphicFramePr>
-        <p:xfrm>
-          <a:off x="160338" y="990600"/>
-          <a:ext cx="11887199" cy="3737042"/>
-        </p:xfrm>
-        <a:graphic>
-          <a:graphicData uri="http://schemas.openxmlformats.org/drawingml/2006/table">
-            <a:tbl>
-              <a:tblPr firstRow="1" bandRow="1">
-                <a:tableStyleId>{5C22544A-7EE6-4342-B048-85BDC9FD1C3A}</a:tableStyleId>
-              </a:tblPr>
-              <a:tblGrid>
-                <a:gridCol w="1045892">
-                  <a:extLst>
-                    <a:ext uri="{9D8B030D-6E8A-4147-A177-3AD203B41FA5}">
-                      <a16:colId xmlns:a16="http://schemas.microsoft.com/office/drawing/2014/main" xmlns="" val="395587818"/>
-                    </a:ext>
-                  </a:extLst>
-                </a:gridCol>
-                <a:gridCol w="1099225">
-                  <a:extLst>
-                    <a:ext uri="{9D8B030D-6E8A-4147-A177-3AD203B41FA5}">
-                      <a16:colId xmlns:a16="http://schemas.microsoft.com/office/drawing/2014/main" xmlns="" val="20001"/>
-                    </a:ext>
-                  </a:extLst>
-                </a:gridCol>
-                <a:gridCol w="3225644">
-                  <a:extLst>
-                    <a:ext uri="{9D8B030D-6E8A-4147-A177-3AD203B41FA5}">
-                      <a16:colId xmlns:a16="http://schemas.microsoft.com/office/drawing/2014/main" xmlns="" val="2149221010"/>
-                    </a:ext>
-                  </a:extLst>
-                </a:gridCol>
-                <a:gridCol w="2834688">
-                  <a:extLst>
-                    <a:ext uri="{9D8B030D-6E8A-4147-A177-3AD203B41FA5}">
-                      <a16:colId xmlns:a16="http://schemas.microsoft.com/office/drawing/2014/main" xmlns="" val="20003"/>
-                    </a:ext>
-                  </a:extLst>
-                </a:gridCol>
-                <a:gridCol w="3681750">
-                  <a:extLst>
-                    <a:ext uri="{9D8B030D-6E8A-4147-A177-3AD203B41FA5}">
-                      <a16:colId xmlns:a16="http://schemas.microsoft.com/office/drawing/2014/main" xmlns="" val="2936743574"/>
-                    </a:ext>
-                  </a:extLst>
-                </a:gridCol>
-              </a:tblGrid>
-              <a:tr h="403556">
-                <a:tc>
-                  <a:txBody>
-                    <a:bodyPr/>
-                    <a:lstStyle/>
-                    <a:p>
-                      <a:pPr algn="ctr"/>
-                      <a:r>
-                        <a:rPr lang="en-US" dirty="0"/>
-                        <a:t>QA</a:t>
-                      </a:r>
-                    </a:p>
-                  </a:txBody>
-                  <a:tcPr/>
-                </a:tc>
-                <a:tc>
-                  <a:txBody>
-                    <a:bodyPr/>
-                    <a:lstStyle/>
-                    <a:p>
-                      <a:pPr algn="ctr"/>
-                      <a:r>
-                        <a:rPr lang="en-US" dirty="0"/>
-                        <a:t>Priority</a:t>
-                      </a:r>
-                    </a:p>
-                  </a:txBody>
-                  <a:tcPr/>
-                </a:tc>
-                <a:tc>
-                  <a:txBody>
-                    <a:bodyPr/>
-                    <a:lstStyle/>
-                    <a:p>
-                      <a:pPr algn="ctr"/>
-                      <a:r>
-                        <a:rPr lang="en-US" dirty="0"/>
-                        <a:t>Description</a:t>
-                      </a:r>
-                    </a:p>
-                  </a:txBody>
-                  <a:tcPr/>
-                </a:tc>
-                <a:tc>
-                  <a:txBody>
-                    <a:bodyPr/>
-                    <a:lstStyle/>
-                    <a:p>
-                      <a:pPr algn="ctr"/>
-                      <a:r>
-                        <a:rPr lang="en-US" dirty="0"/>
-                        <a:t>Tactics</a:t>
-                      </a:r>
-                    </a:p>
-                  </a:txBody>
-                  <a:tcPr/>
-                </a:tc>
-                <a:tc>
-                  <a:txBody>
-                    <a:bodyPr/>
-                    <a:lstStyle/>
-                    <a:p>
-                      <a:pPr algn="ctr"/>
-                      <a:r>
-                        <a:rPr lang="en-US" dirty="0"/>
-                        <a:t>Measure</a:t>
-                      </a:r>
-                    </a:p>
-                  </a:txBody>
-                  <a:tcPr/>
-                </a:tc>
-                <a:extLst>
-                  <a:ext uri="{0D108BD9-81ED-4DB2-BD59-A6C34878D82A}">
-                    <a16:rowId xmlns:a16="http://schemas.microsoft.com/office/drawing/2014/main" xmlns="" val="1218897030"/>
-                  </a:ext>
-                </a:extLst>
-              </a:tr>
-              <a:tr h="1890634">
-                <a:tc>
-                  <a:txBody>
-                    <a:bodyPr/>
-                    <a:lstStyle/>
-                    <a:p>
-                      <a:pPr>
-                        <a:lnSpc>
-                          <a:spcPct val="150000"/>
-                        </a:lnSpc>
-                      </a:pPr>
-                      <a:r>
-                        <a:rPr lang="en-US" dirty="0"/>
-                        <a:t>Security</a:t>
-                      </a:r>
-                    </a:p>
-                  </a:txBody>
-                  <a:tcPr/>
-                </a:tc>
-                <a:tc>
-                  <a:txBody>
-                    <a:bodyPr/>
-                    <a:lstStyle/>
-                    <a:p>
-                      <a:pPr>
-                        <a:lnSpc>
-                          <a:spcPct val="150000"/>
-                        </a:lnSpc>
-                      </a:pPr>
-                      <a:r>
-                        <a:rPr lang="en-US" dirty="0"/>
-                        <a:t>High</a:t>
-                      </a:r>
-                    </a:p>
-                  </a:txBody>
-                  <a:tcPr/>
-                </a:tc>
-                <a:tc>
-                  <a:txBody>
-                    <a:bodyPr/>
-                    <a:lstStyle/>
-                    <a:p>
-                      <a:pPr>
-                        <a:lnSpc>
-                          <a:spcPct val="150000"/>
-                        </a:lnSpc>
-                      </a:pPr>
-                      <a:r>
-                        <a:rPr lang="en-US" dirty="0"/>
-                        <a:t>The EP partition is compromised and sends reprogramming SIDs to the CAN bus.</a:t>
-                      </a:r>
-                    </a:p>
-                  </a:txBody>
-                  <a:tcPr/>
-                </a:tc>
-                <a:tc>
-                  <a:txBody>
-                    <a:bodyPr/>
-                    <a:lstStyle/>
-                    <a:p>
-                      <a:pPr>
-                        <a:lnSpc>
-                          <a:spcPct val="150000"/>
-                        </a:lnSpc>
-                      </a:pPr>
-                      <a:r>
-                        <a:rPr lang="en-US" dirty="0"/>
-                        <a:t>- Separate Entities/Isolation</a:t>
-                      </a:r>
-                    </a:p>
-                    <a:p>
-                      <a:pPr>
-                        <a:lnSpc>
-                          <a:spcPct val="150000"/>
-                        </a:lnSpc>
-                      </a:pPr>
-                      <a:r>
-                        <a:rPr lang="en-US" dirty="0"/>
-                        <a:t>- Validate</a:t>
-                      </a:r>
-                      <a:r>
-                        <a:rPr lang="en-US" baseline="0" dirty="0"/>
-                        <a:t> Input</a:t>
-                      </a:r>
-                      <a:endParaRPr lang="en-US" dirty="0"/>
-                    </a:p>
-                  </a:txBody>
-                  <a:tcPr/>
-                </a:tc>
-                <a:tc>
-                  <a:txBody>
-                    <a:bodyPr/>
-                    <a:lstStyle/>
-                    <a:p>
-                      <a:pPr>
-                        <a:lnSpc>
-                          <a:spcPct val="150000"/>
-                        </a:lnSpc>
-                      </a:pPr>
-                      <a:r>
-                        <a:rPr lang="en-US" dirty="0"/>
-                        <a:t>- </a:t>
-                      </a:r>
-                      <a:r>
-                        <a:rPr lang="en-US" b="1" dirty="0"/>
-                        <a:t>Zero</a:t>
-                      </a:r>
-                      <a:r>
-                        <a:rPr lang="en-US" dirty="0"/>
-                        <a:t> Reprogramming SIDs (0x10(02), 0x11, 0x28, 0x34, 0x85) reaching the internal CAN (</a:t>
-                      </a:r>
-                      <a:r>
-                        <a:rPr lang="en-US" b="1" dirty="0"/>
-                        <a:t>block 100%</a:t>
-                      </a:r>
-                      <a:r>
-                        <a:rPr lang="en-US" dirty="0"/>
-                        <a:t>).</a:t>
-                      </a:r>
-                    </a:p>
-                  </a:txBody>
-                  <a:tcPr/>
-                </a:tc>
-                <a:extLst>
-                  <a:ext uri="{0D108BD9-81ED-4DB2-BD59-A6C34878D82A}">
-                    <a16:rowId xmlns:a16="http://schemas.microsoft.com/office/drawing/2014/main" xmlns="" val="2232119182"/>
-                  </a:ext>
-                </a:extLst>
-              </a:tr>
-              <a:tr h="1442852">
-                <a:tc>
-                  <a:txBody>
-                    <a:bodyPr/>
-                    <a:lstStyle/>
-                    <a:p>
-                      <a:pPr marL="0" marR="0" lvl="0" indent="0" algn="l" defTabSz="914400" rtl="0" eaLnBrk="1" fontAlgn="auto" latinLnBrk="0" hangingPunct="1">
-                        <a:lnSpc>
-                          <a:spcPct val="150000"/>
-                        </a:lnSpc>
-                        <a:spcBef>
-                          <a:spcPts val="0"/>
-                        </a:spcBef>
-                        <a:spcAft>
-                          <a:spcPts val="0"/>
-                        </a:spcAft>
-                        <a:buClrTx/>
-                        <a:buSzTx/>
-                        <a:buFontTx/>
-                        <a:buNone/>
-                        <a:tabLst/>
-                        <a:defRPr/>
-                      </a:pPr>
-                      <a:r>
-                        <a:rPr lang="en-US" dirty="0"/>
-                        <a:t>Maintainability</a:t>
-                      </a:r>
-                    </a:p>
-                    <a:p>
-                      <a:pPr marL="0" marR="0" lvl="0" indent="0" algn="l" defTabSz="914400" rtl="0" eaLnBrk="1" fontAlgn="auto" latinLnBrk="0" hangingPunct="1">
-                        <a:lnSpc>
-                          <a:spcPct val="150000"/>
-                        </a:lnSpc>
-                        <a:spcBef>
-                          <a:spcPts val="0"/>
-                        </a:spcBef>
-                        <a:spcAft>
-                          <a:spcPts val="0"/>
-                        </a:spcAft>
-                        <a:buClrTx/>
-                        <a:buSzTx/>
-                        <a:buFontTx/>
-                        <a:buNone/>
-                        <a:tabLst/>
-                        <a:defRPr/>
-                      </a:pPr>
-                      <a:endParaRPr lang="en-US" dirty="0"/>
-                    </a:p>
-                  </a:txBody>
-                  <a:tcPr/>
-                </a:tc>
-                <a:tc>
-                  <a:txBody>
-                    <a:bodyPr/>
-                    <a:lstStyle/>
-                    <a:p>
-                      <a:pPr>
-                        <a:lnSpc>
-                          <a:spcPct val="150000"/>
-                        </a:lnSpc>
-                      </a:pPr>
-                      <a:r>
-                        <a:rPr lang="en-US" dirty="0"/>
-                        <a:t>High</a:t>
-                      </a:r>
-                    </a:p>
-                  </a:txBody>
-                  <a:tcPr/>
-                </a:tc>
-                <a:tc>
-                  <a:txBody>
-                    <a:bodyPr/>
-                    <a:lstStyle/>
-                    <a:p>
-                      <a:pPr marL="0" marR="0" indent="0" algn="l" defTabSz="914400" rtl="0" eaLnBrk="1" fontAlgn="auto" latinLnBrk="0" hangingPunct="1">
-                        <a:lnSpc>
-                          <a:spcPct val="150000"/>
-                        </a:lnSpc>
-                        <a:spcBef>
-                          <a:spcPts val="0"/>
-                        </a:spcBef>
-                        <a:spcAft>
-                          <a:spcPts val="0"/>
-                        </a:spcAft>
-                        <a:buClrTx/>
-                        <a:buSzTx/>
-                        <a:buFontTx/>
-                        <a:buNone/>
-                        <a:tabLst/>
-                        <a:defRPr/>
-                      </a:pPr>
-                      <a:r>
-                        <a:rPr lang="en-US" dirty="0"/>
-                        <a:t>Adapting existing software components to the new partition separation layout.</a:t>
-                      </a:r>
-                    </a:p>
-                  </a:txBody>
-                  <a:tcPr/>
-                </a:tc>
-                <a:tc>
-                  <a:txBody>
-                    <a:bodyPr/>
-                    <a:lstStyle/>
-                    <a:p>
-                      <a:pPr marL="0" marR="0" indent="0" algn="l" defTabSz="914400" rtl="0" eaLnBrk="1" fontAlgn="auto" latinLnBrk="0" hangingPunct="1">
-                        <a:lnSpc>
-                          <a:spcPct val="150000"/>
-                        </a:lnSpc>
-                        <a:spcBef>
-                          <a:spcPts val="0"/>
-                        </a:spcBef>
-                        <a:spcAft>
-                          <a:spcPts val="0"/>
-                        </a:spcAft>
-                        <a:buClrTx/>
-                        <a:buSzTx/>
-                        <a:buFontTx/>
-                        <a:buNone/>
-                        <a:tabLst/>
-                        <a:defRPr/>
-                      </a:pPr>
-                      <a:r>
-                        <a:rPr lang="en-US" dirty="0"/>
-                        <a:t>- Reduce</a:t>
-                      </a:r>
-                      <a:r>
-                        <a:rPr lang="en-US" baseline="0" dirty="0"/>
-                        <a:t> coupling (</a:t>
-                      </a:r>
-                      <a:r>
-                        <a:rPr lang="en-US" sz="1800" kern="1200" dirty="0">
-                          <a:solidFill>
-                            <a:schemeClr val="dk1"/>
-                          </a:solidFill>
-                          <a:effectLst/>
-                          <a:latin typeface="+mn-lt"/>
-                          <a:ea typeface="+mn-ea"/>
-                          <a:cs typeface="+mn-cs"/>
-                        </a:rPr>
-                        <a:t>Use an Intermediary)</a:t>
-                      </a:r>
-                      <a:endParaRPr lang="en-US" dirty="0"/>
-                    </a:p>
-                  </a:txBody>
-                  <a:tcPr/>
-                </a:tc>
-                <a:tc>
-                  <a:txBody>
-                    <a:bodyPr/>
-                    <a:lstStyle/>
-                    <a:p>
-                      <a:pPr marL="0" marR="0" indent="0" algn="l" defTabSz="914400" rtl="0" eaLnBrk="1" fontAlgn="auto" latinLnBrk="0" hangingPunct="1">
-                        <a:lnSpc>
-                          <a:spcPct val="150000"/>
-                        </a:lnSpc>
-                        <a:spcBef>
-                          <a:spcPts val="0"/>
-                        </a:spcBef>
-                        <a:spcAft>
-                          <a:spcPts val="0"/>
-                        </a:spcAft>
-                        <a:buClrTx/>
-                        <a:buSzTx/>
-                        <a:buFontTx/>
-                        <a:buNone/>
-                        <a:tabLst/>
-                        <a:defRPr/>
-                      </a:pPr>
-                      <a:r>
-                        <a:rPr lang="en-US" dirty="0"/>
-                        <a:t>- Minimal module changes required to adapt the new partition layout.</a:t>
-                      </a:r>
-                    </a:p>
-                  </a:txBody>
-                  <a:tcPr/>
-                </a:tc>
-                <a:extLst>
-                  <a:ext uri="{0D108BD9-81ED-4DB2-BD59-A6C34878D82A}">
-                    <a16:rowId xmlns:a16="http://schemas.microsoft.com/office/drawing/2014/main" xmlns="" val="2736324139"/>
-                  </a:ext>
-                </a:extLst>
-              </a:tr>
-            </a:tbl>
-          </a:graphicData>
-        </a:graphic>
-      </p:graphicFrame>
-    </p:spTree>
-    <p:extLst>
-      <p:ext uri="{BB962C8B-B14F-4D97-AF65-F5344CB8AC3E}">
-        <p14:creationId xmlns:p14="http://schemas.microsoft.com/office/powerpoint/2010/main" val="596902934"/>
-      </p:ext>
-    </p:extLst>
-  </p:cSld>
-  <p:clrMapOvr>
-    <a:masterClrMapping/>
-  </p:clrMapOvr>
-  <p:timing>
-    <p:tnLst>
-      <p:par>
-        <p:cTn id="1" dur="indefinite" restart="never" nodeType="tmRoot"/>
-      </p:par>
-    </p:tnLst>
-  </p:timing>
 </p:sld>
 </file>
 
@@ -9657,7 +10955,7 @@
           <a:lstStyle/>
           <a:p>
             <a:r>
-              <a:rPr lang="en-US" dirty="0"/>
+              <a:rPr lang="en-US"/>
               <a:t>Content</a:t>
             </a:r>
           </a:p>
@@ -10502,7 +11800,7 @@
                   <a:buNone/>
                 </a:pPr>
                 <a:r>
-                  <a:rPr lang="en-US" sz="2500" b="1" dirty="0">
+                  <a:rPr lang="en-US" sz="2500" b="1">
                     <a:solidFill>
                       <a:schemeClr val="bg1"/>
                     </a:solidFill>
@@ -10536,7 +11834,7 @@
             <a:lstStyle/>
             <a:p>
               <a:r>
-                <a:rPr lang="en-US" sz="2800" dirty="0">
+                <a:rPr lang="en-US" sz="2800">
                   <a:cs typeface="Times New Roman" panose="02020603050405020304" pitchFamily="18" charset="0"/>
                 </a:rPr>
                 <a:t>Problem</a:t>
@@ -11384,7 +12682,7 @@
                   <a:buNone/>
                 </a:pPr>
                 <a:r>
-                  <a:rPr lang="en-US" sz="2500" b="1" dirty="0">
+                  <a:rPr lang="en-US" sz="2500" b="1">
                     <a:solidFill>
                       <a:schemeClr val="bg1"/>
                     </a:solidFill>
@@ -11418,7 +12716,7 @@
             <a:lstStyle/>
             <a:p>
               <a:r>
-                <a:rPr lang="en-US" sz="2800" dirty="0">
+                <a:rPr lang="en-US" sz="2800">
                   <a:cs typeface="Times New Roman" panose="02020603050405020304" pitchFamily="18" charset="0"/>
                 </a:rPr>
                 <a:t>Context &amp; Motivation</a:t>
@@ -12266,7 +13564,7 @@
                   <a:buNone/>
                 </a:pPr>
                 <a:r>
-                  <a:rPr lang="en-US" sz="2500" b="1" dirty="0">
+                  <a:rPr lang="en-US" sz="2500" b="1">
                     <a:solidFill>
                       <a:schemeClr val="bg1"/>
                     </a:solidFill>
@@ -12300,7 +13598,7 @@
             <a:lstStyle/>
             <a:p>
               <a:r>
-                <a:rPr lang="en-US" sz="2800" dirty="0">
+                <a:rPr lang="en-US" sz="2800">
                   <a:cs typeface="Times New Roman" panose="02020603050405020304" pitchFamily="18" charset="0"/>
                 </a:rPr>
                 <a:t>Quality Attribute</a:t>
@@ -13148,7 +14446,7 @@
                   <a:buNone/>
                 </a:pPr>
                 <a:r>
-                  <a:rPr lang="en-US" sz="2500" b="1" dirty="0">
+                  <a:rPr lang="en-US" sz="2500" b="1">
                     <a:solidFill>
                       <a:schemeClr val="bg1"/>
                     </a:solidFill>
@@ -13182,7 +14480,7 @@
             <a:lstStyle/>
             <a:p>
               <a:r>
-                <a:rPr lang="en-US" sz="2800" dirty="0">
+                <a:rPr lang="en-US" sz="2800">
                   <a:cs typeface="Times New Roman" panose="02020603050405020304" pitchFamily="18" charset="0"/>
                 </a:rPr>
                 <a:t>Design Alternative</a:t>
@@ -14030,7 +15328,7 @@
                   <a:buNone/>
                 </a:pPr>
                 <a:r>
-                  <a:rPr lang="en-US" sz="2500" b="1" dirty="0">
+                  <a:rPr lang="en-US" sz="2500" b="1">
                     <a:solidFill>
                       <a:schemeClr val="bg1"/>
                     </a:solidFill>
@@ -14064,7 +15362,7 @@
             <a:lstStyle/>
             <a:p>
               <a:r>
-                <a:rPr lang="en-US" sz="2800" dirty="0">
+                <a:rPr lang="en-US" sz="2800">
                   <a:cs typeface="Times New Roman" panose="02020603050405020304" pitchFamily="18" charset="0"/>
                 </a:rPr>
                 <a:t>Comparison &amp; Decision</a:t>
@@ -14912,7 +16210,7 @@
                   <a:buNone/>
                 </a:pPr>
                 <a:r>
-                  <a:rPr lang="en-US" sz="2500" b="1" dirty="0">
+                  <a:rPr lang="en-US" sz="2500" b="1">
                     <a:solidFill>
                       <a:schemeClr val="bg1"/>
                     </a:solidFill>
@@ -14946,7 +16244,7 @@
             <a:lstStyle/>
             <a:p>
               <a:r>
-                <a:rPr lang="en-US" sz="2800" dirty="0">
+                <a:rPr lang="en-US" sz="2800">
                   <a:cs typeface="Times New Roman" panose="02020603050405020304" pitchFamily="18" charset="0"/>
                 </a:rPr>
                 <a:t>Implementation Status</a:t>
@@ -14980,6 +16278,532 @@
   <p:cSld>
     <p:spTree>
       <p:nvGrpSpPr>
+        <p:cNvPr id="1" name="">
+          <a:extLst>
+            <a:ext uri="{FF2B5EF4-FFF2-40B4-BE49-F238E27FC236}">
+              <a16:creationId xmlns="" xmlns:a16="http://schemas.microsoft.com/office/drawing/2014/main" id="{E3C2B75C-23E8-D9F9-C4EA-82DD24D63F67}"/>
+            </a:ext>
+          </a:extLst>
+        </p:cNvPr>
+        <p:cNvGrpSpPr/>
+        <p:nvPr/>
+      </p:nvGrpSpPr>
+      <p:grpSpPr>
+        <a:xfrm>
+          <a:off x="0" y="0"/>
+          <a:ext cx="0" cy="0"/>
+          <a:chOff x="0" y="0"/>
+          <a:chExt cx="0" cy="0"/>
+        </a:xfrm>
+      </p:grpSpPr>
+      <p:sp>
+        <p:nvSpPr>
+          <p:cNvPr id="2" name="Title 1">
+            <a:extLst>
+              <a:ext uri="{FF2B5EF4-FFF2-40B4-BE49-F238E27FC236}">
+                <a16:creationId xmlns="" xmlns:a16="http://schemas.microsoft.com/office/drawing/2014/main" id="{56A28504-A0AD-A7E9-3FC5-18DB5EE5712D}"/>
+              </a:ext>
+            </a:extLst>
+          </p:cNvPr>
+          <p:cNvSpPr>
+            <a:spLocks noGrp="1"/>
+          </p:cNvSpPr>
+          <p:nvPr>
+            <p:ph type="title"/>
+          </p:nvPr>
+        </p:nvSpPr>
+        <p:spPr/>
+        <p:txBody>
+          <a:bodyPr/>
+          <a:lstStyle/>
+          <a:p>
+            <a:r>
+              <a:rPr lang="en-US"/>
+              <a:t>Quality Attribute</a:t>
+            </a:r>
+          </a:p>
+        </p:txBody>
+      </p:sp>
+      <p:graphicFrame>
+        <p:nvGraphicFramePr>
+          <p:cNvPr id="7" name="Content Placeholder 6">
+            <a:extLst>
+              <a:ext uri="{FF2B5EF4-FFF2-40B4-BE49-F238E27FC236}">
+                <a16:creationId xmlns="" xmlns:a16="http://schemas.microsoft.com/office/drawing/2014/main" id="{E0D35A5C-C584-C4A0-1B22-6388F2453084}"/>
+              </a:ext>
+            </a:extLst>
+          </p:cNvPr>
+          <p:cNvGraphicFramePr>
+            <a:graphicFrameLocks noGrp="1"/>
+          </p:cNvGraphicFramePr>
+          <p:nvPr>
+            <p:ph idx="1"/>
+          </p:nvPr>
+        </p:nvGraphicFramePr>
+        <p:xfrm>
+          <a:off x="160338" y="990600"/>
+          <a:ext cx="11887199" cy="3737042"/>
+        </p:xfrm>
+        <a:graphic>
+          <a:graphicData uri="http://schemas.openxmlformats.org/drawingml/2006/table">
+            <a:tbl>
+              <a:tblPr firstRow="1" bandRow="1">
+                <a:tableStyleId>{5C22544A-7EE6-4342-B048-85BDC9FD1C3A}</a:tableStyleId>
+              </a:tblPr>
+              <a:tblGrid>
+                <a:gridCol w="1045892">
+                  <a:extLst>
+                    <a:ext uri="{9D8B030D-6E8A-4147-A177-3AD203B41FA5}">
+                      <a16:colId xmlns="" xmlns:a16="http://schemas.microsoft.com/office/drawing/2014/main" val="395587818"/>
+                    </a:ext>
+                  </a:extLst>
+                </a:gridCol>
+                <a:gridCol w="1099225">
+                  <a:extLst>
+                    <a:ext uri="{9D8B030D-6E8A-4147-A177-3AD203B41FA5}">
+                      <a16:colId xmlns="" xmlns:a16="http://schemas.microsoft.com/office/drawing/2014/main" val="20001"/>
+                    </a:ext>
+                  </a:extLst>
+                </a:gridCol>
+                <a:gridCol w="3225644">
+                  <a:extLst>
+                    <a:ext uri="{9D8B030D-6E8A-4147-A177-3AD203B41FA5}">
+                      <a16:colId xmlns="" xmlns:a16="http://schemas.microsoft.com/office/drawing/2014/main" val="2149221010"/>
+                    </a:ext>
+                  </a:extLst>
+                </a:gridCol>
+                <a:gridCol w="2834688">
+                  <a:extLst>
+                    <a:ext uri="{9D8B030D-6E8A-4147-A177-3AD203B41FA5}">
+                      <a16:colId xmlns="" xmlns:a16="http://schemas.microsoft.com/office/drawing/2014/main" val="20003"/>
+                    </a:ext>
+                  </a:extLst>
+                </a:gridCol>
+                <a:gridCol w="3681750">
+                  <a:extLst>
+                    <a:ext uri="{9D8B030D-6E8A-4147-A177-3AD203B41FA5}">
+                      <a16:colId xmlns="" xmlns:a16="http://schemas.microsoft.com/office/drawing/2014/main" val="2936743574"/>
+                    </a:ext>
+                  </a:extLst>
+                </a:gridCol>
+              </a:tblGrid>
+              <a:tr h="403556">
+                <a:tc>
+                  <a:txBody>
+                    <a:bodyPr/>
+                    <a:lstStyle/>
+                    <a:p>
+                      <a:pPr algn="ctr"/>
+                      <a:r>
+                        <a:rPr lang="en-US"/>
+                        <a:t>QA</a:t>
+                      </a:r>
+                    </a:p>
+                  </a:txBody>
+                  <a:tcPr/>
+                </a:tc>
+                <a:tc>
+                  <a:txBody>
+                    <a:bodyPr/>
+                    <a:lstStyle/>
+                    <a:p>
+                      <a:pPr algn="ctr"/>
+                      <a:r>
+                        <a:rPr lang="en-US"/>
+                        <a:t>Priority</a:t>
+                      </a:r>
+                    </a:p>
+                  </a:txBody>
+                  <a:tcPr/>
+                </a:tc>
+                <a:tc>
+                  <a:txBody>
+                    <a:bodyPr/>
+                    <a:lstStyle/>
+                    <a:p>
+                      <a:pPr algn="ctr"/>
+                      <a:r>
+                        <a:rPr lang="en-US"/>
+                        <a:t>Description</a:t>
+                      </a:r>
+                    </a:p>
+                  </a:txBody>
+                  <a:tcPr/>
+                </a:tc>
+                <a:tc>
+                  <a:txBody>
+                    <a:bodyPr/>
+                    <a:lstStyle/>
+                    <a:p>
+                      <a:pPr algn="ctr"/>
+                      <a:r>
+                        <a:rPr lang="en-US"/>
+                        <a:t>Tactics</a:t>
+                      </a:r>
+                    </a:p>
+                  </a:txBody>
+                  <a:tcPr/>
+                </a:tc>
+                <a:tc>
+                  <a:txBody>
+                    <a:bodyPr/>
+                    <a:lstStyle/>
+                    <a:p>
+                      <a:pPr algn="ctr"/>
+                      <a:r>
+                        <a:rPr lang="en-US"/>
+                        <a:t>Measure</a:t>
+                      </a:r>
+                    </a:p>
+                  </a:txBody>
+                  <a:tcPr/>
+                </a:tc>
+                <a:extLst>
+                  <a:ext uri="{0D108BD9-81ED-4DB2-BD59-A6C34878D82A}">
+                    <a16:rowId xmlns="" xmlns:a16="http://schemas.microsoft.com/office/drawing/2014/main" val="1218897030"/>
+                  </a:ext>
+                </a:extLst>
+              </a:tr>
+              <a:tr h="1890634">
+                <a:tc>
+                  <a:txBody>
+                    <a:bodyPr/>
+                    <a:lstStyle/>
+                    <a:p>
+                      <a:pPr>
+                        <a:lnSpc>
+                          <a:spcPct val="150000"/>
+                        </a:lnSpc>
+                      </a:pPr>
+                      <a:r>
+                        <a:rPr lang="en-US"/>
+                        <a:t>Security</a:t>
+                      </a:r>
+                    </a:p>
+                  </a:txBody>
+                  <a:tcPr/>
+                </a:tc>
+                <a:tc>
+                  <a:txBody>
+                    <a:bodyPr/>
+                    <a:lstStyle/>
+                    <a:p>
+                      <a:pPr>
+                        <a:lnSpc>
+                          <a:spcPct val="150000"/>
+                        </a:lnSpc>
+                      </a:pPr>
+                      <a:r>
+                        <a:rPr lang="en-US"/>
+                        <a:t>High</a:t>
+                      </a:r>
+                    </a:p>
+                  </a:txBody>
+                  <a:tcPr/>
+                </a:tc>
+                <a:tc>
+                  <a:txBody>
+                    <a:bodyPr/>
+                    <a:lstStyle/>
+                    <a:p>
+                      <a:pPr>
+                        <a:lnSpc>
+                          <a:spcPct val="150000"/>
+                        </a:lnSpc>
+                      </a:pPr>
+                      <a:r>
+                        <a:rPr lang="en-US"/>
+                        <a:t>The EP partition is compromised and sends reprogramming SIDs to the CAN bus.</a:t>
+                      </a:r>
+                    </a:p>
+                  </a:txBody>
+                  <a:tcPr/>
+                </a:tc>
+                <a:tc>
+                  <a:txBody>
+                    <a:bodyPr/>
+                    <a:lstStyle/>
+                    <a:p>
+                      <a:pPr>
+                        <a:lnSpc>
+                          <a:spcPct val="150000"/>
+                        </a:lnSpc>
+                      </a:pPr>
+                      <a:r>
+                        <a:rPr lang="en-US"/>
+                        <a:t>- Separate Entities/Isolation</a:t>
+                      </a:r>
+                    </a:p>
+                    <a:p>
+                      <a:pPr>
+                        <a:lnSpc>
+                          <a:spcPct val="150000"/>
+                        </a:lnSpc>
+                      </a:pPr>
+                      <a:r>
+                        <a:rPr lang="en-US"/>
+                        <a:t>- Validate</a:t>
+                      </a:r>
+                      <a:r>
+                        <a:rPr lang="en-US" baseline="0"/>
+                        <a:t> Input</a:t>
+                      </a:r>
+                      <a:endParaRPr lang="en-US"/>
+                    </a:p>
+                  </a:txBody>
+                  <a:tcPr/>
+                </a:tc>
+                <a:tc>
+                  <a:txBody>
+                    <a:bodyPr/>
+                    <a:lstStyle/>
+                    <a:p>
+                      <a:pPr>
+                        <a:lnSpc>
+                          <a:spcPct val="150000"/>
+                        </a:lnSpc>
+                      </a:pPr>
+                      <a:r>
+                        <a:rPr lang="en-US"/>
+                        <a:t>- </a:t>
+                      </a:r>
+                      <a:r>
+                        <a:rPr lang="en-US" b="1"/>
+                        <a:t>Zero</a:t>
+                      </a:r>
+                      <a:r>
+                        <a:rPr lang="en-US"/>
+                        <a:t> Reprogramming SIDs (0x10(02), 0x11, 0x28, 0x34, 0x85) reaching the internal CAN (</a:t>
+                      </a:r>
+                      <a:r>
+                        <a:rPr lang="en-US" b="1"/>
+                        <a:t>block 100%</a:t>
+                      </a:r>
+                      <a:r>
+                        <a:rPr lang="en-US"/>
+                        <a:t>).</a:t>
+                      </a:r>
+                    </a:p>
+                  </a:txBody>
+                  <a:tcPr/>
+                </a:tc>
+                <a:extLst>
+                  <a:ext uri="{0D108BD9-81ED-4DB2-BD59-A6C34878D82A}">
+                    <a16:rowId xmlns="" xmlns:a16="http://schemas.microsoft.com/office/drawing/2014/main" val="2232119182"/>
+                  </a:ext>
+                </a:extLst>
+              </a:tr>
+              <a:tr h="1442852">
+                <a:tc>
+                  <a:txBody>
+                    <a:bodyPr/>
+                    <a:lstStyle/>
+                    <a:p>
+                      <a:pPr marL="0" marR="0" lvl="0" indent="0" algn="l" defTabSz="914400" rtl="0" eaLnBrk="1" fontAlgn="auto" latinLnBrk="0" hangingPunct="1">
+                        <a:lnSpc>
+                          <a:spcPct val="150000"/>
+                        </a:lnSpc>
+                        <a:spcBef>
+                          <a:spcPts val="0"/>
+                        </a:spcBef>
+                        <a:spcAft>
+                          <a:spcPts val="0"/>
+                        </a:spcAft>
+                        <a:buClrTx/>
+                        <a:buSzTx/>
+                        <a:buFontTx/>
+                        <a:buNone/>
+                        <a:tabLst/>
+                        <a:defRPr/>
+                      </a:pPr>
+                      <a:r>
+                        <a:rPr lang="en-US"/>
+                        <a:t>Maintainability</a:t>
+                      </a:r>
+                    </a:p>
+                    <a:p>
+                      <a:pPr marL="0" marR="0" lvl="0" indent="0" algn="l" defTabSz="914400" rtl="0" eaLnBrk="1" fontAlgn="auto" latinLnBrk="0" hangingPunct="1">
+                        <a:lnSpc>
+                          <a:spcPct val="150000"/>
+                        </a:lnSpc>
+                        <a:spcBef>
+                          <a:spcPts val="0"/>
+                        </a:spcBef>
+                        <a:spcAft>
+                          <a:spcPts val="0"/>
+                        </a:spcAft>
+                        <a:buClrTx/>
+                        <a:buSzTx/>
+                        <a:buFontTx/>
+                        <a:buNone/>
+                        <a:tabLst/>
+                        <a:defRPr/>
+                      </a:pPr>
+                      <a:endParaRPr lang="en-US"/>
+                    </a:p>
+                  </a:txBody>
+                  <a:tcPr/>
+                </a:tc>
+                <a:tc>
+                  <a:txBody>
+                    <a:bodyPr/>
+                    <a:lstStyle/>
+                    <a:p>
+                      <a:pPr>
+                        <a:lnSpc>
+                          <a:spcPct val="150000"/>
+                        </a:lnSpc>
+                      </a:pPr>
+                      <a:r>
+                        <a:rPr lang="en-US"/>
+                        <a:t>High</a:t>
+                      </a:r>
+                    </a:p>
+                  </a:txBody>
+                  <a:tcPr/>
+                </a:tc>
+                <a:tc>
+                  <a:txBody>
+                    <a:bodyPr/>
+                    <a:lstStyle/>
+                    <a:p>
+                      <a:pPr marL="0" marR="0" indent="0" algn="l" defTabSz="914400" rtl="0" eaLnBrk="1" fontAlgn="auto" latinLnBrk="0" hangingPunct="1">
+                        <a:lnSpc>
+                          <a:spcPct val="150000"/>
+                        </a:lnSpc>
+                        <a:spcBef>
+                          <a:spcPts val="0"/>
+                        </a:spcBef>
+                        <a:spcAft>
+                          <a:spcPts val="0"/>
+                        </a:spcAft>
+                        <a:buClrTx/>
+                        <a:buSzTx/>
+                        <a:buFontTx/>
+                        <a:buNone/>
+                        <a:tabLst/>
+                        <a:defRPr/>
+                      </a:pPr>
+                      <a:r>
+                        <a:rPr lang="en-US"/>
+                        <a:t>Adapting existing software components to the new partition separation layout.</a:t>
+                      </a:r>
+                    </a:p>
+                  </a:txBody>
+                  <a:tcPr/>
+                </a:tc>
+                <a:tc>
+                  <a:txBody>
+                    <a:bodyPr/>
+                    <a:lstStyle/>
+                    <a:p>
+                      <a:pPr marL="0" marR="0" indent="0" algn="l" defTabSz="914400" rtl="0" eaLnBrk="1" fontAlgn="auto" latinLnBrk="0" hangingPunct="1">
+                        <a:lnSpc>
+                          <a:spcPct val="150000"/>
+                        </a:lnSpc>
+                        <a:spcBef>
+                          <a:spcPts val="0"/>
+                        </a:spcBef>
+                        <a:spcAft>
+                          <a:spcPts val="0"/>
+                        </a:spcAft>
+                        <a:buClrTx/>
+                        <a:buSzTx/>
+                        <a:buFontTx/>
+                        <a:buNone/>
+                        <a:tabLst/>
+                        <a:defRPr/>
+                      </a:pPr>
+                      <a:r>
+                        <a:rPr lang="en-US"/>
+                        <a:t>- Reduce</a:t>
+                      </a:r>
+                      <a:r>
+                        <a:rPr lang="en-US" baseline="0"/>
+                        <a:t> coupling (</a:t>
+                      </a:r>
+                      <a:r>
+                        <a:rPr lang="en-US" sz="1800" kern="1200">
+                          <a:solidFill>
+                            <a:schemeClr val="dk1"/>
+                          </a:solidFill>
+                          <a:effectLst/>
+                          <a:latin typeface="+mn-lt"/>
+                          <a:ea typeface="+mn-ea"/>
+                          <a:cs typeface="+mn-cs"/>
+                        </a:rPr>
+                        <a:t>Use an Intermediary)</a:t>
+                      </a:r>
+                      <a:endParaRPr lang="en-US"/>
+                    </a:p>
+                  </a:txBody>
+                  <a:tcPr/>
+                </a:tc>
+                <a:tc>
+                  <a:txBody>
+                    <a:bodyPr/>
+                    <a:lstStyle/>
+                    <a:p>
+                      <a:pPr marL="0" marR="0" indent="0" algn="l" defTabSz="914400" rtl="0" eaLnBrk="1" fontAlgn="auto" latinLnBrk="0" hangingPunct="1">
+                        <a:lnSpc>
+                          <a:spcPct val="150000"/>
+                        </a:lnSpc>
+                        <a:spcBef>
+                          <a:spcPts val="0"/>
+                        </a:spcBef>
+                        <a:spcAft>
+                          <a:spcPts val="0"/>
+                        </a:spcAft>
+                        <a:buClrTx/>
+                        <a:buSzTx/>
+                        <a:buFontTx/>
+                        <a:buNone/>
+                        <a:tabLst/>
+                        <a:defRPr/>
+                      </a:pPr>
+                      <a:r>
+                        <a:rPr lang="en-US"/>
+                        <a:t>- Minimal module changes required to adapt the new partition layout.</a:t>
+                      </a:r>
+                    </a:p>
+                  </a:txBody>
+                  <a:tcPr/>
+                </a:tc>
+                <a:extLst>
+                  <a:ext uri="{0D108BD9-81ED-4DB2-BD59-A6C34878D82A}">
+                    <a16:rowId xmlns="" xmlns:a16="http://schemas.microsoft.com/office/drawing/2014/main" val="2736324139"/>
+                  </a:ext>
+                </a:extLst>
+              </a:tr>
+            </a:tbl>
+          </a:graphicData>
+        </a:graphic>
+      </p:graphicFrame>
+    </p:spTree>
+    <p:extLst>
+      <p:ext uri="{BB962C8B-B14F-4D97-AF65-F5344CB8AC3E}">
+        <p14:creationId xmlns:p14="http://schemas.microsoft.com/office/powerpoint/2010/main" val="596902934"/>
+      </p:ext>
+    </p:extLst>
+  </p:cSld>
+  <p:clrMapOvr>
+    <a:masterClrMapping/>
+  </p:clrMapOvr>
+  <p:timing>
+    <p:tnLst>
+      <p:par>
+        <p:cTn id="1" dur="indefinite" restart="never" nodeType="tmRoot"/>
+      </p:par>
+    </p:tnLst>
+  </p:timing>
+</p:sld>
+</file>
+
+<file path=ppt/slides/slide21.xml><?xml version="1.0" encoding="utf-8"?>
+<p:sld xmlns:a="http://schemas.openxmlformats.org/drawingml/2006/main" xmlns:r="http://schemas.openxmlformats.org/officeDocument/2006/relationships" xmlns:p="http://schemas.openxmlformats.org/presentationml/2006/main">
+  <p:cSld>
+    <p:spTree>
+      <p:nvGrpSpPr>
         <p:cNvPr id="1" name=""/>
         <p:cNvGrpSpPr/>
         <p:nvPr/>
@@ -15008,7 +16832,7 @@
           <a:lstStyle/>
           <a:p>
             <a:r>
-              <a:rPr lang="en-US" dirty="0"/>
+              <a:rPr lang="en-US"/>
               <a:t>Design Alternative – Alt-A</a:t>
             </a:r>
           </a:p>
@@ -15037,39 +16861,39 @@
           <a:lstStyle/>
           <a:p>
             <a:r>
-              <a:rPr lang="en-US" sz="1800" dirty="0" err="1"/>
+              <a:rPr lang="en-US" sz="1800" err="1"/>
               <a:t>RemoteDiag</a:t>
             </a:r>
             <a:r>
-              <a:rPr lang="en-US" sz="1800" dirty="0"/>
+              <a:rPr lang="en-US" sz="1800"/>
               <a:t> stays in EP container, the SID Filter is placed in </a:t>
             </a:r>
             <a:r>
-              <a:rPr lang="en-US" sz="1800" dirty="0" err="1"/>
+              <a:rPr lang="en-US" sz="1800" err="1"/>
               <a:t>OnBoardClient</a:t>
             </a:r>
             <a:r>
-              <a:rPr lang="en-US" sz="1800" dirty="0"/>
+              <a:rPr lang="en-US" sz="1800"/>
               <a:t> at IP container.</a:t>
             </a:r>
           </a:p>
           <a:p>
             <a:r>
-              <a:rPr lang="en-US" sz="1800" dirty="0"/>
+              <a:rPr lang="en-US" sz="1800"/>
               <a:t>All diagnostic requests from </a:t>
             </a:r>
             <a:r>
-              <a:rPr lang="en-US" sz="1800" dirty="0" err="1"/>
+              <a:rPr lang="en-US" sz="1800" err="1"/>
               <a:t>RemoteDiag</a:t>
             </a:r>
             <a:r>
-              <a:rPr lang="en-US" sz="1800" dirty="0"/>
+              <a:rPr lang="en-US" sz="1800"/>
               <a:t> pass through this filter before go to internal CAN.</a:t>
             </a:r>
           </a:p>
           <a:p>
             <a:r>
-              <a:rPr lang="en-US" sz="1800" b="1" dirty="0">
+              <a:rPr lang="en-US" sz="1800" b="1">
                 <a:solidFill>
                   <a:schemeClr val="accent6">
                     <a:lumMod val="75000"/>
@@ -15079,59 +16903,59 @@
               <a:t>Pros</a:t>
             </a:r>
             <a:r>
-              <a:rPr lang="en-US" sz="1800" dirty="0"/>
+              <a:rPr lang="en-US" sz="1800"/>
               <a:t>: </a:t>
             </a:r>
           </a:p>
           <a:p>
             <a:pPr lvl="1"/>
             <a:r>
-              <a:rPr lang="en-US" sz="1800" b="1" dirty="0"/>
+              <a:rPr lang="en-US" sz="1800" b="1"/>
               <a:t>Security</a:t>
             </a:r>
             <a:r>
-              <a:rPr lang="en-US" sz="1800" dirty="0"/>
+              <a:rPr lang="en-US" sz="1800"/>
               <a:t>: EP/IP container isolation protects the IP side, and the SID Filter </a:t>
             </a:r>
             <a:r>
-              <a:rPr lang="en-US" sz="1800" b="1" dirty="0"/>
+              <a:rPr lang="en-US" sz="1800" b="1"/>
               <a:t>prevents the specified requests</a:t>
             </a:r>
             <a:r>
-              <a:rPr lang="en-US" sz="1800" dirty="0"/>
+              <a:rPr lang="en-US" sz="1800"/>
               <a:t> from reaching internal CAN.</a:t>
             </a:r>
           </a:p>
           <a:p>
             <a:pPr lvl="1"/>
             <a:r>
-              <a:rPr lang="en-US" sz="1800" b="1" dirty="0"/>
+              <a:rPr lang="en-US" sz="1800" b="1"/>
               <a:t>Maintainability</a:t>
             </a:r>
             <a:r>
-              <a:rPr lang="en-US" sz="1800" dirty="0"/>
+              <a:rPr lang="en-US" sz="1800"/>
               <a:t>: existing EP modules and RDG </a:t>
             </a:r>
             <a:r>
-              <a:rPr lang="en-US" sz="1800" b="1" dirty="0"/>
+              <a:rPr lang="en-US" sz="1800" b="1"/>
               <a:t>keep their current interfaces</a:t>
             </a:r>
             <a:r>
-              <a:rPr lang="en-US" sz="1800" dirty="0"/>
+              <a:rPr lang="en-US" sz="1800"/>
               <a:t>, </a:t>
             </a:r>
             <a:r>
-              <a:rPr lang="en-US" sz="1800" b="1" dirty="0"/>
+              <a:rPr lang="en-US" sz="1800" b="1"/>
               <a:t>minimizing modifications to EP modules</a:t>
             </a:r>
             <a:r>
-              <a:rPr lang="en-US" sz="1800" dirty="0"/>
+              <a:rPr lang="en-US" sz="1800"/>
               <a:t>.</a:t>
             </a:r>
           </a:p>
           <a:p>
             <a:r>
-              <a:rPr lang="en-US" sz="1800" b="1" dirty="0">
+              <a:rPr lang="en-US" sz="1800" b="1">
                 <a:solidFill>
                   <a:schemeClr val="accent2">
                     <a:lumMod val="75000"/>
@@ -15141,38 +16965,38 @@
               <a:t>Trade-off </a:t>
             </a:r>
             <a:r>
-              <a:rPr lang="en-US" sz="1800" dirty="0"/>
+              <a:rPr lang="en-US" sz="1800"/>
               <a:t>:</a:t>
             </a:r>
           </a:p>
           <a:p>
             <a:pPr lvl="1"/>
             <a:r>
-              <a:rPr lang="en-US" sz="1800" b="1" dirty="0"/>
+              <a:rPr lang="en-US" sz="1800" b="1"/>
               <a:t>Security</a:t>
             </a:r>
             <a:r>
-              <a:rPr lang="en-US" sz="1800" dirty="0"/>
+              <a:rPr lang="en-US" sz="1800"/>
               <a:t>: </a:t>
             </a:r>
             <a:r>
-              <a:rPr lang="en-US" sz="1800" dirty="0" err="1"/>
+              <a:rPr lang="en-US" sz="1800" err="1"/>
               <a:t>RemoteDiag</a:t>
             </a:r>
             <a:r>
-              <a:rPr lang="en-US" sz="1800" dirty="0"/>
+              <a:rPr lang="en-US" sz="1800"/>
               <a:t> remains in the EP side. Therefore, container isolation </a:t>
             </a:r>
             <a:r>
-              <a:rPr lang="en-US" sz="1800" b="1" dirty="0"/>
+              <a:rPr lang="en-US" sz="1800" b="1"/>
               <a:t>does not protect </a:t>
             </a:r>
             <a:r>
-              <a:rPr lang="en-US" sz="1800" b="1" dirty="0" err="1"/>
+              <a:rPr lang="en-US" sz="1800" b="1" err="1"/>
               <a:t>RemoteDiag</a:t>
             </a:r>
             <a:r>
-              <a:rPr lang="en-US" sz="1800" dirty="0"/>
+              <a:rPr lang="en-US" sz="1800"/>
               <a:t> if the EP is compromised.</a:t>
             </a:r>
           </a:p>
@@ -15183,7 +17007,7 @@
           <p:cNvPr id="5" name="Picture 4" descr="A diagram of a remote control&#10;&#10;AI-generated content may be incorrect.">
             <a:extLst>
               <a:ext uri="{FF2B5EF4-FFF2-40B4-BE49-F238E27FC236}">
-                <a16:creationId xmlns:a16="http://schemas.microsoft.com/office/drawing/2014/main" xmlns="" id="{E146C554-A4E0-0D89-9EC9-B22462873F20}"/>
+                <a16:creationId xmlns="" xmlns:a16="http://schemas.microsoft.com/office/drawing/2014/main" id="{E146C554-A4E0-0D89-9EC9-B22462873F20}"/>
               </a:ext>
             </a:extLst>
           </p:cNvPr>
@@ -15241,32 +17065,32 @@
               <a:buChar char="•"/>
             </a:pPr>
             <a:r>
-              <a:rPr lang="en-US" b="1" dirty="0"/>
+              <a:rPr lang="en-US" b="1"/>
               <a:t>Maintainability</a:t>
             </a:r>
             <a:r>
-              <a:rPr lang="en-US" dirty="0"/>
+              <a:rPr lang="en-US"/>
               <a:t>: </a:t>
             </a:r>
             <a:r>
-              <a:rPr lang="en-US" dirty="0" err="1"/>
+              <a:rPr lang="en-US" err="1"/>
               <a:t>OnBoardClient</a:t>
             </a:r>
             <a:r>
-              <a:rPr lang="en-US" dirty="0"/>
+              <a:rPr lang="en-US"/>
               <a:t> must be </a:t>
             </a:r>
             <a:r>
-              <a:rPr lang="en-US" b="1" dirty="0"/>
+              <a:rPr lang="en-US" b="1"/>
               <a:t>modified to integrate the SID Filter</a:t>
             </a:r>
             <a:r>
-              <a:rPr lang="en-US" dirty="0"/>
+              <a:rPr lang="en-US"/>
               <a:t>, increasing the code-change scope and maintenance effort.</a:t>
             </a:r>
           </a:p>
           <a:p>
-            <a:endParaRPr lang="en-US" dirty="0"/>
+            <a:endParaRPr lang="en-US"/>
           </a:p>
         </p:txBody>
       </p:sp>
@@ -15290,7 +17114,7 @@
 </p:sld>
 </file>
 
-<file path=ppt/slides/slide21.xml><?xml version="1.0" encoding="utf-8"?>
+<file path=ppt/slides/slide22.xml><?xml version="1.0" encoding="utf-8"?>
 <p:sld xmlns:a="http://schemas.openxmlformats.org/drawingml/2006/main" xmlns:r="http://schemas.openxmlformats.org/officeDocument/2006/relationships" xmlns:p="http://schemas.openxmlformats.org/presentationml/2006/main">
   <p:cSld>
     <p:spTree>
@@ -15323,7 +17147,7 @@
           <a:lstStyle/>
           <a:p>
             <a:r>
-              <a:rPr lang="en-US" dirty="0"/>
+              <a:rPr lang="en-US"/>
               <a:t>Design Alternative – Alt-B</a:t>
             </a:r>
           </a:p>
@@ -15352,37 +17176,37 @@
           <a:lstStyle/>
           <a:p>
             <a:r>
-              <a:rPr lang="en-US" sz="1800" dirty="0"/>
+              <a:rPr lang="en-US" sz="1800"/>
               <a:t>Move the </a:t>
             </a:r>
             <a:r>
-              <a:rPr lang="en-US" sz="1800" b="1" dirty="0"/>
+              <a:rPr lang="en-US" sz="1800" b="1"/>
               <a:t>entire</a:t>
             </a:r>
             <a:r>
-              <a:rPr lang="en-US" sz="1800" dirty="0"/>
+              <a:rPr lang="en-US" sz="1800"/>
               <a:t> </a:t>
             </a:r>
             <a:r>
-              <a:rPr lang="en-US" sz="1800" dirty="0" err="1"/>
+              <a:rPr lang="en-US" sz="1800" err="1"/>
               <a:t>RemoteDiag</a:t>
             </a:r>
             <a:r>
-              <a:rPr lang="en-US" sz="1800" dirty="0"/>
+              <a:rPr lang="en-US" sz="1800"/>
               <a:t> into the IP container. Each EP module communicates with </a:t>
             </a:r>
             <a:r>
-              <a:rPr lang="en-US" sz="1800" dirty="0" err="1"/>
+              <a:rPr lang="en-US" sz="1800" err="1"/>
               <a:t>RemoteDiag</a:t>
             </a:r>
             <a:r>
-              <a:rPr lang="en-US" sz="1800" dirty="0"/>
+              <a:rPr lang="en-US" sz="1800"/>
               <a:t> through an internal-protocol IPC channels.</a:t>
             </a:r>
           </a:p>
           <a:p>
             <a:r>
-              <a:rPr lang="en-US" sz="1800" b="1" dirty="0">
+              <a:rPr lang="en-US" sz="1800" b="1">
                 <a:solidFill>
                   <a:schemeClr val="accent6">
                     <a:lumMod val="75000"/>
@@ -15392,44 +17216,44 @@
               <a:t>Pros</a:t>
             </a:r>
             <a:r>
-              <a:rPr lang="en-US" sz="1800" dirty="0"/>
+              <a:rPr lang="en-US" sz="1800"/>
               <a:t>: </a:t>
             </a:r>
           </a:p>
           <a:p>
             <a:pPr lvl="1"/>
             <a:r>
-              <a:rPr lang="en-US" sz="1800" b="1" dirty="0"/>
+              <a:rPr lang="en-US" sz="1800" b="1"/>
               <a:t>Security</a:t>
             </a:r>
             <a:r>
-              <a:rPr lang="en-US" sz="1800" dirty="0"/>
+              <a:rPr lang="en-US" sz="1800"/>
               <a:t>: The IP container </a:t>
             </a:r>
             <a:r>
-              <a:rPr lang="en-US" sz="1800" b="1" dirty="0"/>
+              <a:rPr lang="en-US" sz="1800" b="1"/>
               <a:t>protects the whole </a:t>
             </a:r>
             <a:r>
-              <a:rPr lang="en-US" sz="1800" b="1" dirty="0" err="1"/>
+              <a:rPr lang="en-US" sz="1800" b="1" err="1"/>
               <a:t>RemoteDiag</a:t>
             </a:r>
             <a:r>
-              <a:rPr lang="en-US" sz="1800" dirty="0"/>
+              <a:rPr lang="en-US" sz="1800"/>
               <a:t>. The SID Filter in </a:t>
             </a:r>
             <a:r>
-              <a:rPr lang="en-US" sz="1800" dirty="0" err="1"/>
+              <a:rPr lang="en-US" sz="1800" err="1"/>
               <a:t>RemoteDiag</a:t>
             </a:r>
             <a:r>
-              <a:rPr lang="en-US" sz="1800" dirty="0"/>
+              <a:rPr lang="en-US" sz="1800"/>
               <a:t> blocks the specified requests before reaching OBC and internal CAN.</a:t>
             </a:r>
           </a:p>
           <a:p>
             <a:r>
-              <a:rPr lang="en-US" sz="1800" b="1" dirty="0">
+              <a:rPr lang="en-US" sz="1800" b="1">
                 <a:solidFill>
                   <a:schemeClr val="accent2">
                     <a:lumMod val="75000"/>
@@ -15439,34 +17263,34 @@
               <a:t>Trade-off</a:t>
             </a:r>
             <a:r>
-              <a:rPr lang="en-US" sz="1800" dirty="0"/>
+              <a:rPr lang="en-US" sz="1800"/>
               <a:t>:</a:t>
             </a:r>
           </a:p>
           <a:p>
             <a:pPr lvl="1"/>
             <a:r>
-              <a:rPr lang="en-US" sz="1800" b="1" dirty="0"/>
+              <a:rPr lang="en-US" sz="1800" b="1"/>
               <a:t>Maintainability</a:t>
             </a:r>
             <a:r>
-              <a:rPr lang="en-US" sz="1800" dirty="0"/>
+              <a:rPr lang="en-US" sz="1800"/>
               <a:t>: Every EP module (10+) </a:t>
             </a:r>
             <a:r>
-              <a:rPr lang="en-US" sz="1800" b="1" dirty="0"/>
+              <a:rPr lang="en-US" sz="1800" b="1"/>
               <a:t>has to be modified </a:t>
             </a:r>
             <a:r>
-              <a:rPr lang="en-US" sz="1800" dirty="0"/>
+              <a:rPr lang="en-US" sz="1800"/>
               <a:t>to implement a new cross-container IPC client, including connection management, reconnection handling and fail-safe logic. Effort </a:t>
             </a:r>
             <a:r>
-              <a:rPr lang="en-US" sz="1800" b="1" dirty="0"/>
+              <a:rPr lang="en-US" sz="1800" b="1"/>
               <a:t>multiplied by N </a:t>
             </a:r>
             <a:r>
-              <a:rPr lang="en-US" sz="1800" dirty="0"/>
+              <a:rPr lang="en-US" sz="1800"/>
               <a:t>number EP modules.</a:t>
             </a:r>
           </a:p>
@@ -15477,7 +17301,7 @@
           <p:cNvPr id="7" name="Picture 6" descr="A diagram of a data flow&#10;&#10;AI-generated content may be incorrect.">
             <a:extLst>
               <a:ext uri="{FF2B5EF4-FFF2-40B4-BE49-F238E27FC236}">
-                <a16:creationId xmlns:a16="http://schemas.microsoft.com/office/drawing/2014/main" xmlns="" id="{D202F5ED-768D-B9A3-4243-16BBE387282B}"/>
+                <a16:creationId xmlns="" xmlns:a16="http://schemas.microsoft.com/office/drawing/2014/main" id="{D202F5ED-768D-B9A3-4243-16BBE387282B}"/>
               </a:ext>
             </a:extLst>
           </p:cNvPr>
@@ -15528,7 +17352,7 @@
 </p:sld>
 </file>
 
-<file path=ppt/slides/slide22.xml><?xml version="1.0" encoding="utf-8"?>
+<file path=ppt/slides/slide23.xml><?xml version="1.0" encoding="utf-8"?>
 <p:sld xmlns:a="http://schemas.openxmlformats.org/drawingml/2006/main" xmlns:r="http://schemas.openxmlformats.org/officeDocument/2006/relationships" xmlns:p="http://schemas.openxmlformats.org/presentationml/2006/main">
   <p:cSld>
     <p:spTree>
@@ -15536,7 +17360,7 @@
         <p:cNvPr id="1" name="">
           <a:extLst>
             <a:ext uri="{FF2B5EF4-FFF2-40B4-BE49-F238E27FC236}">
-              <a16:creationId xmlns:a16="http://schemas.microsoft.com/office/drawing/2014/main" xmlns="" id="{7A3A9F39-394E-5437-993F-29D2F2093B00}"/>
+              <a16:creationId xmlns="" xmlns:a16="http://schemas.microsoft.com/office/drawing/2014/main" id="{7A3A9F39-394E-5437-993F-29D2F2093B00}"/>
             </a:ext>
           </a:extLst>
         </p:cNvPr>
@@ -15556,7 +17380,7 @@
           <p:cNvPr id="2" name="Title 1">
             <a:extLst>
               <a:ext uri="{FF2B5EF4-FFF2-40B4-BE49-F238E27FC236}">
-                <a16:creationId xmlns:a16="http://schemas.microsoft.com/office/drawing/2014/main" xmlns="" id="{554F77EA-2B30-AFDC-1349-3C58C2AB9061}"/>
+                <a16:creationId xmlns="" xmlns:a16="http://schemas.microsoft.com/office/drawing/2014/main" id="{554F77EA-2B30-AFDC-1349-3C58C2AB9061}"/>
               </a:ext>
             </a:extLst>
           </p:cNvPr>
@@ -15573,7 +17397,7 @@
           <a:lstStyle/>
           <a:p>
             <a:r>
-              <a:rPr lang="en-US" dirty="0"/>
+              <a:rPr lang="en-US"/>
               <a:t>Design Alternative – Alt-C</a:t>
             </a:r>
           </a:p>
@@ -15584,7 +17408,7 @@
           <p:cNvPr id="3" name="Content Placeholder 2">
             <a:extLst>
               <a:ext uri="{FF2B5EF4-FFF2-40B4-BE49-F238E27FC236}">
-                <a16:creationId xmlns:a16="http://schemas.microsoft.com/office/drawing/2014/main" xmlns="" id="{64FB7A4A-CF56-C0BD-9AB9-923B2D043291}"/>
+                <a16:creationId xmlns="" xmlns:a16="http://schemas.microsoft.com/office/drawing/2014/main" id="{64FB7A4A-CF56-C0BD-9AB9-923B2D043291}"/>
               </a:ext>
             </a:extLst>
           </p:cNvPr>
@@ -15608,60 +17432,60 @@
           <a:lstStyle/>
           <a:p>
             <a:r>
-              <a:rPr lang="en-US" sz="1800" dirty="0"/>
+              <a:rPr lang="en-US" sz="1800"/>
               <a:t>Move the entire </a:t>
             </a:r>
             <a:r>
-              <a:rPr lang="en-US" sz="1800" dirty="0" err="1"/>
+              <a:rPr lang="en-US" sz="1800" err="1"/>
               <a:t>RemoteDiag</a:t>
             </a:r>
             <a:r>
-              <a:rPr lang="en-US" sz="1800" dirty="0"/>
+              <a:rPr lang="en-US" sz="1800"/>
               <a:t> (RDG) into the IP container. </a:t>
             </a:r>
           </a:p>
           <a:p>
             <a:r>
-              <a:rPr lang="en-US" sz="1800" dirty="0"/>
+              <a:rPr lang="en-US" sz="1800"/>
               <a:t>Introduce a </a:t>
             </a:r>
             <a:r>
-              <a:rPr lang="en-US" sz="1800" b="1" dirty="0"/>
+              <a:rPr lang="en-US" sz="1800" b="1"/>
               <a:t>new </a:t>
             </a:r>
             <a:r>
-              <a:rPr lang="en-US" sz="1800" b="1" dirty="0" err="1"/>
+              <a:rPr lang="en-US" sz="1800" b="1" err="1"/>
               <a:t>RemoteDiagProxy</a:t>
             </a:r>
             <a:r>
-              <a:rPr lang="en-US" sz="1800" b="1" dirty="0"/>
+              <a:rPr lang="en-US" sz="1800" b="1"/>
               <a:t> (RDP) module</a:t>
             </a:r>
             <a:r>
-              <a:rPr lang="en-US" sz="1800" dirty="0"/>
+              <a:rPr lang="en-US" sz="1800"/>
               <a:t> in the EP that acts as a </a:t>
             </a:r>
             <a:r>
-              <a:rPr lang="en-US" sz="1800" b="1" dirty="0"/>
+              <a:rPr lang="en-US" sz="1800" b="1"/>
               <a:t>transparent proxy</a:t>
             </a:r>
             <a:r>
-              <a:rPr lang="en-US" sz="1800" dirty="0"/>
+              <a:rPr lang="en-US" sz="1800"/>
               <a:t>. EP modules continue to interact with RDP using their existing interface, while RDP forwards requests to </a:t>
             </a:r>
             <a:r>
-              <a:rPr lang="en-US" sz="1800" dirty="0" err="1"/>
+              <a:rPr lang="en-US" sz="1800" err="1"/>
               <a:t>RemoteDiag</a:t>
             </a:r>
             <a:r>
-              <a:rPr lang="en-US" sz="1800" dirty="0"/>
+              <a:rPr lang="en-US" sz="1800"/>
               <a:t> via an internal protocol.</a:t>
             </a:r>
-            <a:endParaRPr lang="en-US" sz="1800" b="1" dirty="0"/>
-          </a:p>
-          <a:p>
-            <a:r>
-              <a:rPr lang="en-US" sz="1800" b="1" dirty="0">
+            <a:endParaRPr lang="en-US" sz="1800" b="1"/>
+          </a:p>
+          <a:p>
+            <a:r>
+              <a:rPr lang="en-US" sz="1800" b="1">
                 <a:solidFill>
                   <a:schemeClr val="accent6">
                     <a:lumMod val="75000"/>
@@ -15671,51 +17495,51 @@
               <a:t>Pros</a:t>
             </a:r>
             <a:r>
-              <a:rPr lang="en-US" sz="1800" dirty="0"/>
+              <a:rPr lang="en-US" sz="1800"/>
               <a:t>: </a:t>
             </a:r>
           </a:p>
           <a:p>
             <a:pPr lvl="1"/>
             <a:r>
-              <a:rPr lang="en-US" sz="1800" b="1" dirty="0"/>
+              <a:rPr lang="en-US" sz="1800" b="1"/>
               <a:t>Security</a:t>
             </a:r>
             <a:r>
-              <a:rPr lang="en-US" sz="1800" dirty="0"/>
+              <a:rPr lang="en-US" sz="1800"/>
               <a:t>: The IP container protects the whole RDG. The SID Filter in RDG blocks the specified requests before reaching </a:t>
             </a:r>
             <a:r>
-              <a:rPr lang="en-US" sz="1800" dirty="0" err="1"/>
+              <a:rPr lang="en-US" sz="1800" err="1"/>
               <a:t>OnBoardClient</a:t>
             </a:r>
             <a:r>
-              <a:rPr lang="en-US" sz="1800" dirty="0"/>
+              <a:rPr lang="en-US" sz="1800"/>
               <a:t> and internal CAN.</a:t>
             </a:r>
           </a:p>
           <a:p>
             <a:pPr lvl="1"/>
             <a:r>
-              <a:rPr lang="en-US" sz="1800" b="1" dirty="0"/>
+              <a:rPr lang="en-US" sz="1800" b="1"/>
               <a:t>Maintainability</a:t>
             </a:r>
             <a:r>
-              <a:rPr lang="en-US" sz="1800" dirty="0"/>
+              <a:rPr lang="en-US" sz="1800"/>
               <a:t>: Existing EP modules keep their current source code and Binder interfaces, </a:t>
             </a:r>
             <a:r>
-              <a:rPr lang="en-US" sz="1800" b="1" dirty="0"/>
+              <a:rPr lang="en-US" sz="1800" b="1"/>
               <a:t>minimizing modifications to EP modules</a:t>
             </a:r>
             <a:r>
-              <a:rPr lang="en-US" sz="1800" dirty="0"/>
+              <a:rPr lang="en-US" sz="1800"/>
               <a:t>.</a:t>
             </a:r>
           </a:p>
           <a:p>
             <a:r>
-              <a:rPr lang="en-US" sz="1800" b="1" dirty="0">
+              <a:rPr lang="en-US" sz="1800" b="1">
                 <a:solidFill>
                   <a:schemeClr val="accent2">
                     <a:lumMod val="75000"/>
@@ -15725,18 +17549,18 @@
               <a:t>Trade-off</a:t>
             </a:r>
             <a:r>
-              <a:rPr lang="en-US" sz="1800" dirty="0"/>
+              <a:rPr lang="en-US" sz="1800"/>
               <a:t>: </a:t>
             </a:r>
           </a:p>
           <a:p>
             <a:pPr lvl="1"/>
             <a:r>
-              <a:rPr lang="en-US" sz="1800" b="1" dirty="0"/>
+              <a:rPr lang="en-US" sz="1800" b="1"/>
               <a:t>Maintainability</a:t>
             </a:r>
             <a:r>
-              <a:rPr lang="en-US" sz="1800" dirty="0"/>
+              <a:rPr lang="en-US" sz="1800"/>
               <a:t>: Alt-C introduces new RDP module and cross-container communication that must be implemented and maintained, although existing EP client modules remain unchanged.</a:t>
             </a:r>
           </a:p>
@@ -15747,7 +17571,7 @@
           <p:cNvPr id="5" name="Picture 4" descr="A diagram of a container&#10;&#10;AI-generated content may be incorrect.">
             <a:extLst>
               <a:ext uri="{FF2B5EF4-FFF2-40B4-BE49-F238E27FC236}">
-                <a16:creationId xmlns:a16="http://schemas.microsoft.com/office/drawing/2014/main" xmlns="" id="{F96D85AC-F590-5734-3383-B0AE1B03AFC7}"/>
+                <a16:creationId xmlns="" xmlns:a16="http://schemas.microsoft.com/office/drawing/2014/main" id="{F96D85AC-F590-5734-3383-B0AE1B03AFC7}"/>
               </a:ext>
             </a:extLst>
           </p:cNvPr>
@@ -15820,7 +17644,7 @@
           <p:cNvPr id="14" name="Picture 13">
             <a:extLst>
               <a:ext uri="{FF2B5EF4-FFF2-40B4-BE49-F238E27FC236}">
-                <a16:creationId xmlns:a16="http://schemas.microsoft.com/office/drawing/2014/main" xmlns="" id="{4DC0AA0D-E1FC-D3C4-68EE-7F18C43BE08D}"/>
+                <a16:creationId xmlns="" xmlns:a16="http://schemas.microsoft.com/office/drawing/2014/main" id="{4DC0AA0D-E1FC-D3C4-68EE-7F18C43BE08D}"/>
               </a:ext>
             </a:extLst>
           </p:cNvPr>
@@ -15837,8 +17661,8 @@
         </p:blipFill>
         <p:spPr>
           <a:xfrm>
-            <a:off x="160866" y="1683962"/>
-            <a:ext cx="11736593" cy="3490076"/>
+            <a:off x="384475" y="1666758"/>
+            <a:ext cx="11423050" cy="3667241"/>
           </a:xfrm>
           <a:prstGeom prst="rect">
             <a:avLst/>
@@ -15850,7 +17674,7 @@
           <p:cNvPr id="2" name="Title 1">
             <a:extLst>
               <a:ext uri="{FF2B5EF4-FFF2-40B4-BE49-F238E27FC236}">
-                <a16:creationId xmlns:a16="http://schemas.microsoft.com/office/drawing/2014/main" xmlns="" id="{F11C1235-51B4-A8A0-3A61-9C767F437001}"/>
+                <a16:creationId xmlns="" xmlns:a16="http://schemas.microsoft.com/office/drawing/2014/main" id="{F11C1235-51B4-A8A0-3A61-9C767F437001}"/>
               </a:ext>
             </a:extLst>
           </p:cNvPr>
@@ -15874,7 +17698,7 @@
           <a:lstStyle/>
           <a:p>
             <a:r>
-              <a:rPr lang="en-US" dirty="0"/>
+              <a:rPr lang="en-US"/>
               <a:t>Context &amp; Motivation</a:t>
             </a:r>
           </a:p>
@@ -15885,7 +17709,7 @@
           <p:cNvPr id="7" name="Content Placeholder 6">
             <a:extLst>
               <a:ext uri="{FF2B5EF4-FFF2-40B4-BE49-F238E27FC236}">
-                <a16:creationId xmlns:a16="http://schemas.microsoft.com/office/drawing/2014/main" xmlns="" id="{4A0E7BDD-2CF4-321B-0637-D9AF63CAB0BF}"/>
+                <a16:creationId xmlns="" xmlns:a16="http://schemas.microsoft.com/office/drawing/2014/main" id="{4A0E7BDD-2CF4-321B-0637-D9AF63CAB0BF}"/>
               </a:ext>
             </a:extLst>
           </p:cNvPr>
@@ -15910,7 +17734,7 @@
               <a:buNone/>
             </a:pPr>
             <a:r>
-              <a:rPr lang="en-US" dirty="0"/>
+              <a:rPr lang="en-US"/>
               <a:t>Current architecture</a:t>
             </a:r>
           </a:p>
@@ -15918,10 +17742,10 @@
       </p:sp>
       <p:sp>
         <p:nvSpPr>
-          <p:cNvPr id="11" name="Rectangle 10">
+          <p:cNvPr id="12" name="Freeform 11">
             <a:extLst>
               <a:ext uri="{FF2B5EF4-FFF2-40B4-BE49-F238E27FC236}">
-                <a16:creationId xmlns:a16="http://schemas.microsoft.com/office/drawing/2014/main" xmlns="" id="{6836BF74-18E1-53CF-E711-96BF334B6D6A}"/>
+                <a16:creationId xmlns="" xmlns:a16="http://schemas.microsoft.com/office/drawing/2014/main" id="{6836BF74-18E1-53CF-E711-96BF334B6D6A}"/>
               </a:ext>
             </a:extLst>
           </p:cNvPr>
@@ -15930,12 +17754,87 @@
         </p:nvSpPr>
         <p:spPr>
           <a:xfrm>
-            <a:off x="7679095" y="2777101"/>
-            <a:ext cx="1716366" cy="850019"/>
+            <a:off x="7660044" y="1666757"/>
+            <a:ext cx="4247351" cy="3743443"/>
           </a:xfrm>
-          <a:prstGeom prst="rect">
+          <a:custGeom>
             <a:avLst/>
-          </a:prstGeom>
+            <a:gdLst>
+              <a:gd name="connsiteX0" fmla="*/ 1674457 w 4247351"/>
+              <a:gd name="connsiteY0" fmla="*/ 0 h 3743443"/>
+              <a:gd name="connsiteX1" fmla="*/ 4247351 w 4247351"/>
+              <a:gd name="connsiteY1" fmla="*/ 0 h 3743443"/>
+              <a:gd name="connsiteX2" fmla="*/ 4247351 w 4247351"/>
+              <a:gd name="connsiteY2" fmla="*/ 3743443 h 3743443"/>
+              <a:gd name="connsiteX3" fmla="*/ 1674457 w 4247351"/>
+              <a:gd name="connsiteY3" fmla="*/ 3743443 h 3743443"/>
+              <a:gd name="connsiteX4" fmla="*/ 1674457 w 4247351"/>
+              <a:gd name="connsiteY4" fmla="*/ 3381492 h 3743443"/>
+              <a:gd name="connsiteX5" fmla="*/ 0 w 4247351"/>
+              <a:gd name="connsiteY5" fmla="*/ 3381492 h 3743443"/>
+              <a:gd name="connsiteX6" fmla="*/ 0 w 4247351"/>
+              <a:gd name="connsiteY6" fmla="*/ 1091293 h 3743443"/>
+              <a:gd name="connsiteX7" fmla="*/ 1674457 w 4247351"/>
+              <a:gd name="connsiteY7" fmla="*/ 1091293 h 3743443"/>
+            </a:gdLst>
+            <a:ahLst/>
+            <a:cxnLst>
+              <a:cxn ang="0">
+                <a:pos x="connsiteX0" y="connsiteY0"/>
+              </a:cxn>
+              <a:cxn ang="0">
+                <a:pos x="connsiteX1" y="connsiteY1"/>
+              </a:cxn>
+              <a:cxn ang="0">
+                <a:pos x="connsiteX2" y="connsiteY2"/>
+              </a:cxn>
+              <a:cxn ang="0">
+                <a:pos x="connsiteX3" y="connsiteY3"/>
+              </a:cxn>
+              <a:cxn ang="0">
+                <a:pos x="connsiteX4" y="connsiteY4"/>
+              </a:cxn>
+              <a:cxn ang="0">
+                <a:pos x="connsiteX5" y="connsiteY5"/>
+              </a:cxn>
+              <a:cxn ang="0">
+                <a:pos x="connsiteX6" y="connsiteY6"/>
+              </a:cxn>
+              <a:cxn ang="0">
+                <a:pos x="connsiteX7" y="connsiteY7"/>
+              </a:cxn>
+            </a:cxnLst>
+            <a:rect l="l" t="t" r="r" b="b"/>
+            <a:pathLst>
+              <a:path w="4247351" h="3743443">
+                <a:moveTo>
+                  <a:pt x="1674457" y="0"/>
+                </a:moveTo>
+                <a:lnTo>
+                  <a:pt x="4247351" y="0"/>
+                </a:lnTo>
+                <a:lnTo>
+                  <a:pt x="4247351" y="3743443"/>
+                </a:lnTo>
+                <a:lnTo>
+                  <a:pt x="1674457" y="3743443"/>
+                </a:lnTo>
+                <a:lnTo>
+                  <a:pt x="1674457" y="3381492"/>
+                </a:lnTo>
+                <a:lnTo>
+                  <a:pt x="0" y="3381492"/>
+                </a:lnTo>
+                <a:lnTo>
+                  <a:pt x="0" y="1091293"/>
+                </a:lnTo>
+                <a:lnTo>
+                  <a:pt x="1674457" y="1091293"/>
+                </a:lnTo>
+                <a:close/>
+              </a:path>
+            </a:pathLst>
+          </a:custGeom>
           <a:noFill/>
           <a:ln w="28575">
             <a:solidFill>
@@ -15961,7 +17860,9 @@
           </a:fontRef>
         </p:style>
         <p:txBody>
-          <a:bodyPr rtlCol="0" anchor="ctr"/>
+          <a:bodyPr wrap="square" rtlCol="0" anchor="ctr">
+            <a:noAutofit/>
+          </a:bodyPr>
           <a:lstStyle/>
           <a:p>
             <a:pPr algn="ctr"/>
@@ -16013,7 +17914,7 @@
                                           </p:stCondLst>
                                         </p:cTn>
                                         <p:tgtEl>
-                                          <p:spTgt spid="11"/>
+                                          <p:spTgt spid="12"/>
                                         </p:tgtEl>
                                         <p:attrNameLst>
                                           <p:attrName>style.visibility</p:attrName>
@@ -16025,9 +17926,9 @@
                                     </p:set>
                                     <p:animEffect transition="in" filter="circle(in)">
                                       <p:cBhvr>
-                                        <p:cTn id="7" dur="750"/>
+                                        <p:cTn id="7" dur="1000"/>
                                         <p:tgtEl>
-                                          <p:spTgt spid="11"/>
+                                          <p:spTgt spid="12"/>
                                         </p:tgtEl>
                                       </p:cBhvr>
                                     </p:animEffect>
@@ -16062,7 +17963,7 @@
       </p:par>
     </p:tnLst>
     <p:bldLst>
-      <p:bldP spid="11" grpId="0" animBg="1"/>
+      <p:bldP spid="12" grpId="0" animBg="1"/>
     </p:bldLst>
   </p:timing>
 </p:sld>
@@ -16076,7 +17977,7 @@
         <p:cNvPr id="1" name="">
           <a:extLst>
             <a:ext uri="{FF2B5EF4-FFF2-40B4-BE49-F238E27FC236}">
-              <a16:creationId xmlns:a16="http://schemas.microsoft.com/office/drawing/2014/main" xmlns="" id="{351B5D0F-6087-17A5-72FF-6E022F0858C7}"/>
+              <a16:creationId xmlns="" xmlns:a16="http://schemas.microsoft.com/office/drawing/2014/main" id="{351B5D0F-6087-17A5-72FF-6E022F0858C7}"/>
             </a:ext>
           </a:extLst>
         </p:cNvPr>
@@ -16096,7 +17997,7 @@
           <p:cNvPr id="2" name="Title 1">
             <a:extLst>
               <a:ext uri="{FF2B5EF4-FFF2-40B4-BE49-F238E27FC236}">
-                <a16:creationId xmlns:a16="http://schemas.microsoft.com/office/drawing/2014/main" xmlns="" id="{40D72414-4805-EF13-2567-C5B514B448F3}"/>
+                <a16:creationId xmlns="" xmlns:a16="http://schemas.microsoft.com/office/drawing/2014/main" id="{40D72414-4805-EF13-2567-C5B514B448F3}"/>
               </a:ext>
             </a:extLst>
           </p:cNvPr>
@@ -16113,7 +18014,7 @@
           <a:lstStyle/>
           <a:p>
             <a:r>
-              <a:rPr lang="en-US" dirty="0"/>
+              <a:rPr lang="en-US"/>
               <a:t>Context &amp; Motivation</a:t>
             </a:r>
           </a:p>
@@ -16124,7 +18025,7 @@
           <p:cNvPr id="3" name="Content Placeholder 2">
             <a:extLst>
               <a:ext uri="{FF2B5EF4-FFF2-40B4-BE49-F238E27FC236}">
-                <a16:creationId xmlns:a16="http://schemas.microsoft.com/office/drawing/2014/main" xmlns="" id="{687B8B4F-34AF-C58A-4A12-C27069BE17EB}"/>
+                <a16:creationId xmlns="" xmlns:a16="http://schemas.microsoft.com/office/drawing/2014/main" id="{687B8B4F-34AF-C58A-4A12-C27069BE17EB}"/>
               </a:ext>
             </a:extLst>
           </p:cNvPr>
@@ -16141,16 +18042,16 @@
           <a:lstStyle/>
           <a:p>
             <a:r>
-              <a:rPr lang="en-US" dirty="0" err="1"/>
+              <a:rPr lang="en-US" err="1"/>
               <a:t>RemoteDiag</a:t>
             </a:r>
             <a:r>
-              <a:rPr lang="en-US" dirty="0"/>
+              <a:rPr lang="en-US"/>
               <a:t> module</a:t>
             </a:r>
           </a:p>
           <a:p>
-            <a:endParaRPr lang="en-US" dirty="0"/>
+            <a:endParaRPr lang="en-US"/>
           </a:p>
         </p:txBody>
       </p:sp>
@@ -16159,7 +18060,7 @@
           <p:cNvPr id="6" name="Picture 5">
             <a:extLst>
               <a:ext uri="{FF2B5EF4-FFF2-40B4-BE49-F238E27FC236}">
-                <a16:creationId xmlns:a16="http://schemas.microsoft.com/office/drawing/2014/main" xmlns="" id="{B67FA871-6E94-BC51-E6D0-9534187DD723}"/>
+                <a16:creationId xmlns="" xmlns:a16="http://schemas.microsoft.com/office/drawing/2014/main" id="{B67FA871-6E94-BC51-E6D0-9534187DD723}"/>
               </a:ext>
             </a:extLst>
           </p:cNvPr>
@@ -16189,7 +18090,7 @@
           <p:cNvPr id="7" name="Rectangle 6">
             <a:extLst>
               <a:ext uri="{FF2B5EF4-FFF2-40B4-BE49-F238E27FC236}">
-                <a16:creationId xmlns:a16="http://schemas.microsoft.com/office/drawing/2014/main" xmlns="" id="{D526A082-4997-C65E-6755-539FF2BBC210}"/>
+                <a16:creationId xmlns="" xmlns:a16="http://schemas.microsoft.com/office/drawing/2014/main" id="{D526A082-4997-C65E-6755-539FF2BBC210}"/>
               </a:ext>
             </a:extLst>
           </p:cNvPr>
@@ -16242,7 +18143,7 @@
           <p:cNvPr id="8" name="Rectangle 7">
             <a:extLst>
               <a:ext uri="{FF2B5EF4-FFF2-40B4-BE49-F238E27FC236}">
-                <a16:creationId xmlns:a16="http://schemas.microsoft.com/office/drawing/2014/main" xmlns="" id="{76CAB5DF-BC1B-7CEE-FD78-3FA7AF6E1642}"/>
+                <a16:creationId xmlns="" xmlns:a16="http://schemas.microsoft.com/office/drawing/2014/main" id="{76CAB5DF-BC1B-7CEE-FD78-3FA7AF6E1642}"/>
               </a:ext>
             </a:extLst>
           </p:cNvPr>
@@ -16465,7 +18366,7 @@
           <p:cNvPr id="2" name="Title 1">
             <a:extLst>
               <a:ext uri="{FF2B5EF4-FFF2-40B4-BE49-F238E27FC236}">
-                <a16:creationId xmlns:a16="http://schemas.microsoft.com/office/drawing/2014/main" xmlns="" id="{C3585339-B774-DFDC-4DB4-D02F5083DD3E}"/>
+                <a16:creationId xmlns="" xmlns:a16="http://schemas.microsoft.com/office/drawing/2014/main" id="{C3585339-B774-DFDC-4DB4-D02F5083DD3E}"/>
               </a:ext>
             </a:extLst>
           </p:cNvPr>
@@ -16482,72 +18383,12 @@
           <a:lstStyle/>
           <a:p>
             <a:r>
-              <a:rPr lang="en-US" dirty="0"/>
+              <a:rPr lang="en-US"/>
               <a:t>Problem</a:t>
             </a:r>
           </a:p>
         </p:txBody>
       </p:sp>
-      <p:pic>
-        <p:nvPicPr>
-          <p:cNvPr id="5" name="Picture 4">
-            <a:extLst>
-              <a:ext uri="{FF2B5EF4-FFF2-40B4-BE49-F238E27FC236}">
-                <a16:creationId xmlns:a16="http://schemas.microsoft.com/office/drawing/2014/main" xmlns="" id="{0514A4A9-11E4-2F95-772A-58BE7B6F8B1F}"/>
-              </a:ext>
-            </a:extLst>
-          </p:cNvPr>
-          <p:cNvPicPr>
-            <a:picLocks noChangeAspect="1"/>
-          </p:cNvPicPr>
-          <p:nvPr/>
-        </p:nvPicPr>
-        <p:blipFill>
-          <a:blip r:embed="rId2"/>
-          <a:stretch>
-            <a:fillRect/>
-          </a:stretch>
-        </p:blipFill>
-        <p:spPr>
-          <a:xfrm>
-            <a:off x="2446866" y="3711844"/>
-            <a:ext cx="9601201" cy="3146156"/>
-          </a:xfrm>
-          <a:prstGeom prst="rect">
-            <a:avLst/>
-          </a:prstGeom>
-        </p:spPr>
-      </p:pic>
-      <p:pic>
-        <p:nvPicPr>
-          <p:cNvPr id="9" name="Picture 8">
-            <a:extLst>
-              <a:ext uri="{FF2B5EF4-FFF2-40B4-BE49-F238E27FC236}">
-                <a16:creationId xmlns:a16="http://schemas.microsoft.com/office/drawing/2014/main" xmlns="" id="{4DC0AA0D-E1FC-D3C4-68EE-7F18C43BE08D}"/>
-              </a:ext>
-            </a:extLst>
-          </p:cNvPr>
-          <p:cNvPicPr>
-            <a:picLocks noChangeAspect="1"/>
-          </p:cNvPicPr>
-          <p:nvPr/>
-        </p:nvPicPr>
-        <p:blipFill>
-          <a:blip r:embed="rId3"/>
-          <a:stretch>
-            <a:fillRect/>
-          </a:stretch>
-        </p:blipFill>
-        <p:spPr>
-          <a:xfrm>
-            <a:off x="2961541" y="711361"/>
-            <a:ext cx="9086526" cy="2702033"/>
-          </a:xfrm>
-          <a:prstGeom prst="rect">
-            <a:avLst/>
-          </a:prstGeom>
-        </p:spPr>
-      </p:pic>
       <p:sp>
         <p:nvSpPr>
           <p:cNvPr id="4" name="Content Placeholder 3"/>
@@ -16568,22 +18409,124 @@
           <a:bodyPr/>
           <a:lstStyle/>
           <a:p>
-            <a:endParaRPr lang="en-US" dirty="0"/>
+            <a:endParaRPr lang="en-US"/>
+          </a:p>
+        </p:txBody>
+      </p:sp>
+      <p:pic>
+        <p:nvPicPr>
+          <p:cNvPr id="3" name="Picture 2"/>
+          <p:cNvPicPr>
+            <a:picLocks noChangeAspect="1"/>
+          </p:cNvPicPr>
+          <p:nvPr/>
+        </p:nvPicPr>
+        <p:blipFill>
+          <a:blip r:embed="rId2"/>
+          <a:stretch>
+            <a:fillRect/>
+          </a:stretch>
+        </p:blipFill>
+        <p:spPr>
+          <a:xfrm>
+            <a:off x="81481" y="1046026"/>
+            <a:ext cx="4879818" cy="3776799"/>
+          </a:xfrm>
+          <a:prstGeom prst="rect">
+            <a:avLst/>
+          </a:prstGeom>
+        </p:spPr>
+      </p:pic>
+      <p:pic>
+        <p:nvPicPr>
+          <p:cNvPr id="7" name="Picture 6"/>
+          <p:cNvPicPr>
+            <a:picLocks noChangeAspect="1"/>
+          </p:cNvPicPr>
+          <p:nvPr/>
+        </p:nvPicPr>
+        <p:blipFill>
+          <a:blip r:embed="rId3"/>
+          <a:stretch>
+            <a:fillRect/>
+          </a:stretch>
+        </p:blipFill>
+        <p:spPr>
+          <a:xfrm>
+            <a:off x="5667375" y="944427"/>
+            <a:ext cx="6477001" cy="4180024"/>
+          </a:xfrm>
+          <a:prstGeom prst="rect">
+            <a:avLst/>
+          </a:prstGeom>
+        </p:spPr>
+      </p:pic>
+      <p:pic>
+        <p:nvPicPr>
+          <p:cNvPr id="8" name="Picture 7"/>
+          <p:cNvPicPr>
+            <a:picLocks noChangeAspect="1"/>
+          </p:cNvPicPr>
+          <p:nvPr/>
+        </p:nvPicPr>
+        <p:blipFill>
+          <a:blip r:embed="rId4"/>
+          <a:stretch>
+            <a:fillRect/>
+          </a:stretch>
+        </p:blipFill>
+        <p:spPr>
+          <a:xfrm>
+            <a:off x="81481" y="4921397"/>
+            <a:ext cx="2105025" cy="1860544"/>
+          </a:xfrm>
+          <a:prstGeom prst="rect">
+            <a:avLst/>
+          </a:prstGeom>
+        </p:spPr>
+      </p:pic>
+      <p:sp>
+        <p:nvSpPr>
+          <p:cNvPr id="10" name="TextBox 9"/>
+          <p:cNvSpPr txBox="1"/>
+          <p:nvPr/>
+        </p:nvSpPr>
+        <p:spPr>
+          <a:xfrm>
+            <a:off x="8379901" y="5130661"/>
+            <a:ext cx="1804853" cy="369332"/>
+          </a:xfrm>
+          <a:prstGeom prst="rect">
+            <a:avLst/>
+          </a:prstGeom>
+          <a:noFill/>
+        </p:spPr>
+        <p:txBody>
+          <a:bodyPr wrap="none" rtlCol="0">
+            <a:spAutoFit/>
+          </a:bodyPr>
+          <a:lstStyle/>
+          <a:p>
+            <a:r>
+              <a:rPr lang="en-US" smtClean="0"/>
+              <a:t>New architecture</a:t>
+            </a:r>
+            <a:endParaRPr lang="en-US"/>
           </a:p>
         </p:txBody>
       </p:sp>
       <p:sp>
         <p:nvSpPr>
-          <p:cNvPr id="6" name="Down Arrow 5"/>
+          <p:cNvPr id="11" name="Right Arrow 10"/>
           <p:cNvSpPr/>
           <p:nvPr/>
         </p:nvSpPr>
         <p:spPr>
           <a:xfrm>
-            <a:off x="7493000" y="3422650"/>
-            <a:ext cx="45719" cy="289194"/>
+            <a:off x="4895852" y="2343877"/>
+            <a:ext cx="695324" cy="848583"/>
           </a:xfrm>
-          <a:prstGeom prst="downArrow">
+          <a:prstGeom prst="rightArrow">
             <a:avLst/>
           </a:prstGeom>
         </p:spPr>
@@ -16612,6 +18555,181 @@
           </a:p>
         </p:txBody>
       </p:sp>
+      <p:sp>
+        <p:nvSpPr>
+          <p:cNvPr id="13" name="Right Arrow 12"/>
+          <p:cNvSpPr/>
+          <p:nvPr/>
+        </p:nvSpPr>
+        <p:spPr>
+          <a:xfrm rot="3413073">
+            <a:off x="6003241" y="1465107"/>
+            <a:ext cx="342900" cy="139727"/>
+          </a:xfrm>
+          <a:prstGeom prst="rightArrow">
+            <a:avLst/>
+          </a:prstGeom>
+          <a:solidFill>
+            <a:srgbClr val="FF0000"/>
+          </a:solidFill>
+          <a:ln>
+            <a:solidFill>
+              <a:srgbClr val="FF0000"/>
+            </a:solidFill>
+          </a:ln>
+        </p:spPr>
+        <p:style>
+          <a:lnRef idx="2">
+            <a:schemeClr val="accent1">
+              <a:shade val="50000"/>
+            </a:schemeClr>
+          </a:lnRef>
+          <a:fillRef idx="1">
+            <a:schemeClr val="accent1"/>
+          </a:fillRef>
+          <a:effectRef idx="0">
+            <a:schemeClr val="accent1"/>
+          </a:effectRef>
+          <a:fontRef idx="minor">
+            <a:schemeClr val="lt1"/>
+          </a:fontRef>
+        </p:style>
+        <p:txBody>
+          <a:bodyPr rtlCol="0" anchor="ctr"/>
+          <a:lstStyle/>
+          <a:p>
+            <a:pPr algn="ctr"/>
+            <a:endParaRPr lang="en-US"/>
+          </a:p>
+        </p:txBody>
+      </p:sp>
+      <p:sp>
+        <p:nvSpPr>
+          <p:cNvPr id="14" name="Right Arrow 13"/>
+          <p:cNvSpPr/>
+          <p:nvPr/>
+        </p:nvSpPr>
+        <p:spPr>
+          <a:xfrm rot="3413073">
+            <a:off x="9263061" y="1466554"/>
+            <a:ext cx="342900" cy="139727"/>
+          </a:xfrm>
+          <a:prstGeom prst="rightArrow">
+            <a:avLst/>
+          </a:prstGeom>
+          <a:solidFill>
+            <a:srgbClr val="FF0000"/>
+          </a:solidFill>
+          <a:ln>
+            <a:solidFill>
+              <a:srgbClr val="FF0000"/>
+            </a:solidFill>
+          </a:ln>
+        </p:spPr>
+        <p:style>
+          <a:lnRef idx="2">
+            <a:schemeClr val="accent1">
+              <a:shade val="50000"/>
+            </a:schemeClr>
+          </a:lnRef>
+          <a:fillRef idx="1">
+            <a:schemeClr val="accent1"/>
+          </a:fillRef>
+          <a:effectRef idx="0">
+            <a:schemeClr val="accent1"/>
+          </a:effectRef>
+          <a:fontRef idx="minor">
+            <a:schemeClr val="lt1"/>
+          </a:fontRef>
+        </p:style>
+        <p:txBody>
+          <a:bodyPr rtlCol="0" anchor="ctr"/>
+          <a:lstStyle/>
+          <a:p>
+            <a:pPr algn="ctr"/>
+            <a:endParaRPr lang="en-US"/>
+          </a:p>
+        </p:txBody>
+      </p:sp>
+      <p:cxnSp>
+        <p:nvCxnSpPr>
+          <p:cNvPr id="17" name="Straight Connector 16"/>
+          <p:cNvCxnSpPr/>
+          <p:nvPr/>
+        </p:nvCxnSpPr>
+        <p:spPr>
+          <a:xfrm>
+            <a:off x="5178583" y="525589"/>
+            <a:ext cx="0" cy="5326080"/>
+          </a:xfrm>
+          <a:prstGeom prst="line">
+            <a:avLst/>
+          </a:prstGeom>
+          <a:ln w="19050"/>
+        </p:spPr>
+        <p:style>
+          <a:lnRef idx="1">
+            <a:schemeClr val="accent1"/>
+          </a:lnRef>
+          <a:fillRef idx="0">
+            <a:schemeClr val="accent1"/>
+          </a:fillRef>
+          <a:effectRef idx="0">
+            <a:schemeClr val="accent1"/>
+          </a:effectRef>
+          <a:fontRef idx="minor">
+            <a:schemeClr val="tx1"/>
+          </a:fontRef>
+        </p:style>
+      </p:cxnSp>
+      <p:sp>
+        <p:nvSpPr>
+          <p:cNvPr id="18" name="Right Arrow 17"/>
+          <p:cNvSpPr/>
+          <p:nvPr/>
+        </p:nvSpPr>
+        <p:spPr>
+          <a:xfrm rot="3413073">
+            <a:off x="9442403" y="3651258"/>
+            <a:ext cx="342900" cy="139727"/>
+          </a:xfrm>
+          <a:prstGeom prst="rightArrow">
+            <a:avLst/>
+          </a:prstGeom>
+          <a:solidFill>
+            <a:srgbClr val="FF0000"/>
+          </a:solidFill>
+          <a:ln>
+            <a:solidFill>
+              <a:srgbClr val="FF0000"/>
+            </a:solidFill>
+          </a:ln>
+        </p:spPr>
+        <p:style>
+          <a:lnRef idx="2">
+            <a:schemeClr val="accent1">
+              <a:shade val="50000"/>
+            </a:schemeClr>
+          </a:lnRef>
+          <a:fillRef idx="1">
+            <a:schemeClr val="accent1"/>
+          </a:fillRef>
+          <a:effectRef idx="0">
+            <a:schemeClr val="accent1"/>
+          </a:effectRef>
+          <a:fontRef idx="minor">
+            <a:schemeClr val="lt1"/>
+          </a:fontRef>
+        </p:style>
+        <p:txBody>
+          <a:bodyPr rtlCol="0" anchor="ctr"/>
+          <a:lstStyle/>
+          <a:p>
+            <a:pPr algn="ctr"/>
+            <a:endParaRPr lang="en-US"/>
+          </a:p>
+        </p:txBody>
+      </p:sp>
     </p:spTree>
     <p:extLst>
       <p:ext uri="{BB962C8B-B14F-4D97-AF65-F5344CB8AC3E}">
@@ -16625,9 +18743,160 @@
   <p:timing>
     <p:tnLst>
       <p:par>
-        <p:cTn id="1" dur="indefinite" restart="never" nodeType="tmRoot"/>
+        <p:cTn id="1" dur="indefinite" restart="never" nodeType="tmRoot">
+          <p:childTnLst>
+            <p:seq concurrent="1" nextAc="seek">
+              <p:cTn id="2" dur="indefinite" nodeType="mainSeq">
+                <p:childTnLst>
+                  <p:par>
+                    <p:cTn id="3" fill="hold">
+                      <p:stCondLst>
+                        <p:cond delay="indefinite"/>
+                      </p:stCondLst>
+                      <p:childTnLst>
+                        <p:par>
+                          <p:cTn id="4" fill="hold">
+                            <p:stCondLst>
+                              <p:cond delay="0"/>
+                            </p:stCondLst>
+                            <p:childTnLst>
+                              <p:par>
+                                <p:cTn id="5" presetID="22" presetClass="entr" presetSubtype="4" fill="hold" grpId="0" nodeType="clickEffect">
+                                  <p:stCondLst>
+                                    <p:cond delay="0"/>
+                                  </p:stCondLst>
+                                  <p:childTnLst>
+                                    <p:set>
+                                      <p:cBhvr>
+                                        <p:cTn id="6" dur="1" fill="hold">
+                                          <p:stCondLst>
+                                            <p:cond delay="0"/>
+                                          </p:stCondLst>
+                                        </p:cTn>
+                                        <p:tgtEl>
+                                          <p:spTgt spid="13"/>
+                                        </p:tgtEl>
+                                        <p:attrNameLst>
+                                          <p:attrName>style.visibility</p:attrName>
+                                        </p:attrNameLst>
+                                      </p:cBhvr>
+                                      <p:to>
+                                        <p:strVal val="visible"/>
+                                      </p:to>
+                                    </p:set>
+                                    <p:animEffect transition="in" filter="wipe(down)">
+                                      <p:cBhvr>
+                                        <p:cTn id="7" dur="500"/>
+                                        <p:tgtEl>
+                                          <p:spTgt spid="13"/>
+                                        </p:tgtEl>
+                                      </p:cBhvr>
+                                    </p:animEffect>
+                                  </p:childTnLst>
+                                </p:cTn>
+                              </p:par>
+                              <p:par>
+                                <p:cTn id="8" presetID="22" presetClass="entr" presetSubtype="4" fill="hold" grpId="0" nodeType="withEffect">
+                                  <p:stCondLst>
+                                    <p:cond delay="0"/>
+                                  </p:stCondLst>
+                                  <p:childTnLst>
+                                    <p:set>
+                                      <p:cBhvr>
+                                        <p:cTn id="9" dur="1" fill="hold">
+                                          <p:stCondLst>
+                                            <p:cond delay="0"/>
+                                          </p:stCondLst>
+                                        </p:cTn>
+                                        <p:tgtEl>
+                                          <p:spTgt spid="14"/>
+                                        </p:tgtEl>
+                                        <p:attrNameLst>
+                                          <p:attrName>style.visibility</p:attrName>
+                                        </p:attrNameLst>
+                                      </p:cBhvr>
+                                      <p:to>
+                                        <p:strVal val="visible"/>
+                                      </p:to>
+                                    </p:set>
+                                    <p:animEffect transition="in" filter="wipe(down)">
+                                      <p:cBhvr>
+                                        <p:cTn id="10" dur="500"/>
+                                        <p:tgtEl>
+                                          <p:spTgt spid="14"/>
+                                        </p:tgtEl>
+                                      </p:cBhvr>
+                                    </p:animEffect>
+                                  </p:childTnLst>
+                                </p:cTn>
+                              </p:par>
+                              <p:par>
+                                <p:cTn id="11" presetID="22" presetClass="entr" presetSubtype="4" fill="hold" grpId="0" nodeType="withEffect">
+                                  <p:stCondLst>
+                                    <p:cond delay="0"/>
+                                  </p:stCondLst>
+                                  <p:childTnLst>
+                                    <p:set>
+                                      <p:cBhvr>
+                                        <p:cTn id="12" dur="1" fill="hold">
+                                          <p:stCondLst>
+                                            <p:cond delay="0"/>
+                                          </p:stCondLst>
+                                        </p:cTn>
+                                        <p:tgtEl>
+                                          <p:spTgt spid="18"/>
+                                        </p:tgtEl>
+                                        <p:attrNameLst>
+                                          <p:attrName>style.visibility</p:attrName>
+                                        </p:attrNameLst>
+                                      </p:cBhvr>
+                                      <p:to>
+                                        <p:strVal val="visible"/>
+                                      </p:to>
+                                    </p:set>
+                                    <p:animEffect transition="in" filter="wipe(down)">
+                                      <p:cBhvr>
+                                        <p:cTn id="13" dur="500"/>
+                                        <p:tgtEl>
+                                          <p:spTgt spid="18"/>
+                                        </p:tgtEl>
+                                      </p:cBhvr>
+                                    </p:animEffect>
+                                  </p:childTnLst>
+                                </p:cTn>
+                              </p:par>
+                            </p:childTnLst>
+                          </p:cTn>
+                        </p:par>
+                      </p:childTnLst>
+                    </p:cTn>
+                  </p:par>
+                </p:childTnLst>
+              </p:cTn>
+              <p:prevCondLst>
+                <p:cond evt="onPrev" delay="0">
+                  <p:tgtEl>
+                    <p:sldTgt/>
+                  </p:tgtEl>
+                </p:cond>
+              </p:prevCondLst>
+              <p:nextCondLst>
+                <p:cond evt="onNext" delay="0">
+                  <p:tgtEl>
+                    <p:sldTgt/>
+                  </p:tgtEl>
+                </p:cond>
+              </p:nextCondLst>
+            </p:seq>
+          </p:childTnLst>
+        </p:cTn>
       </p:par>
     </p:tnLst>
+    <p:bldLst>
+      <p:bldP spid="13" grpId="0" animBg="1"/>
+      <p:bldP spid="14" grpId="0" animBg="1"/>
+      <p:bldP spid="18" grpId="0" animBg="1"/>
+    </p:bldLst>
   </p:timing>
 </p:sld>
 </file>
@@ -16665,7 +18934,7 @@
           <a:lstStyle/>
           <a:p>
             <a:r>
-              <a:rPr lang="en-US" dirty="0"/>
+              <a:rPr lang="en-US"/>
               <a:t>Problem</a:t>
             </a:r>
           </a:p>
@@ -16676,7 +18945,7 @@
           <p:cNvPr id="4" name="Content Placeholder 3">
             <a:extLst>
               <a:ext uri="{FF2B5EF4-FFF2-40B4-BE49-F238E27FC236}">
-                <a16:creationId xmlns:a16="http://schemas.microsoft.com/office/drawing/2014/main" xmlns="" id="{E5625E47-EFA5-9C35-32C7-F793664192AF}"/>
+                <a16:creationId xmlns="" xmlns:a16="http://schemas.microsoft.com/office/drawing/2014/main" id="{E5625E47-EFA5-9C35-32C7-F793664192AF}"/>
               </a:ext>
             </a:extLst>
           </p:cNvPr>
@@ -16700,7 +18969,7 @@
           <a:lstStyle/>
           <a:p>
             <a:r>
-              <a:rPr lang="en-US" sz="2200" dirty="0"/>
+              <a:rPr lang="en-US" sz="2200"/>
               <a:t>OEM new functional requirements</a:t>
             </a:r>
           </a:p>
@@ -16711,7 +18980,7 @@
           <p:cNvPr id="10" name="Table 9">
             <a:extLst>
               <a:ext uri="{FF2B5EF4-FFF2-40B4-BE49-F238E27FC236}">
-                <a16:creationId xmlns:a16="http://schemas.microsoft.com/office/drawing/2014/main" xmlns="" id="{658A328F-ADBC-7C5F-15DF-73E4DC21B209}"/>
+                <a16:creationId xmlns="" xmlns:a16="http://schemas.microsoft.com/office/drawing/2014/main" id="{658A328F-ADBC-7C5F-15DF-73E4DC21B209}"/>
               </a:ext>
             </a:extLst>
           </p:cNvPr>
@@ -16728,7 +18997,7 @@
         </p:nvGraphicFramePr>
         <p:xfrm>
           <a:off x="204773" y="1505336"/>
-          <a:ext cx="11782454" cy="1332290"/>
+          <a:ext cx="11782454" cy="1417380"/>
         </p:xfrm>
         <a:graphic>
           <a:graphicData uri="http://schemas.openxmlformats.org/drawingml/2006/table">
@@ -16740,14 +19009,14 @@
                 <a:gridCol w="1298801">
                   <a:extLst>
                     <a:ext uri="{9D8B030D-6E8A-4147-A177-3AD203B41FA5}">
-                      <a16:colId xmlns:a16="http://schemas.microsoft.com/office/drawing/2014/main" xmlns="" val="20000"/>
+                      <a16:colId xmlns="" xmlns:a16="http://schemas.microsoft.com/office/drawing/2014/main" val="20000"/>
                     </a:ext>
                   </a:extLst>
                 </a:gridCol>
                 <a:gridCol w="10483653">
                   <a:extLst>
                     <a:ext uri="{9D8B030D-6E8A-4147-A177-3AD203B41FA5}">
-                      <a16:colId xmlns:a16="http://schemas.microsoft.com/office/drawing/2014/main" xmlns="" val="20001"/>
+                      <a16:colId xmlns="" xmlns:a16="http://schemas.microsoft.com/office/drawing/2014/main" val="20001"/>
                     </a:ext>
                   </a:extLst>
                 </a:gridCol>
@@ -16760,7 +19029,7 @@
                     <a:p>
                       <a:pPr algn="ctr" latinLnBrk="0"/>
                       <a:r>
-                        <a:rPr lang="en-US" sz="1800" dirty="0">
+                        <a:rPr lang="en-US" sz="1800">
                           <a:latin typeface="+mn-lt"/>
                           <a:cs typeface="Arial" panose="020B0604020202020204" pitchFamily="34" charset="0"/>
                         </a:rPr>
@@ -16830,14 +19099,14 @@
                         <a:defRPr/>
                       </a:pPr>
                       <a:r>
-                        <a:rPr lang="en-US" sz="1800" dirty="0">
+                        <a:rPr lang="en-US" sz="1800">
                           <a:effectLst/>
                           <a:latin typeface="+mn-lt"/>
                           <a:cs typeface="Arial" panose="020B0604020202020204" pitchFamily="34" charset="0"/>
                         </a:rPr>
                         <a:t>Description</a:t>
                       </a:r>
-                      <a:endParaRPr lang="en-US" sz="1800" b="1" dirty="0">
+                      <a:endParaRPr lang="en-US" sz="1800" b="1">
                         <a:effectLst/>
                         <a:latin typeface="+mn-lt"/>
                         <a:ea typeface="Malgun Gothic" panose="020B0503020000020004" pitchFamily="34" charset="-127"/>
@@ -16886,7 +19155,7 @@
                 </a:tc>
                 <a:extLst>
                   <a:ext uri="{0D108BD9-81ED-4DB2-BD59-A6C34878D82A}">
-                    <a16:rowId xmlns:a16="http://schemas.microsoft.com/office/drawing/2014/main" xmlns="" val="10000"/>
+                    <a16:rowId xmlns="" xmlns:a16="http://schemas.microsoft.com/office/drawing/2014/main" val="10000"/>
                   </a:ext>
                 </a:extLst>
               </a:tr>
@@ -16902,7 +19171,7 @@
                         </a:lnSpc>
                       </a:pPr>
                       <a:r>
-                        <a:rPr lang="en-US" sz="1800" kern="1200" dirty="0" smtClean="0">
+                        <a:rPr lang="en-US" sz="1800" kern="1200" smtClean="0">
                           <a:solidFill>
                             <a:schemeClr val="dk1"/>
                           </a:solidFill>
@@ -16913,7 +19182,7 @@
                         </a:rPr>
                         <a:t>FR-01</a:t>
                       </a:r>
-                      <a:endParaRPr lang="en-US" sz="1800" kern="1200" dirty="0">
+                      <a:endParaRPr lang="en-US" sz="1800" kern="1200">
                         <a:solidFill>
                           <a:schemeClr val="dk1"/>
                         </a:solidFill>
@@ -16977,7 +19246,7 @@
                         </a:spcAft>
                       </a:pPr>
                       <a:r>
-                        <a:rPr lang="en-US" sz="1800" kern="1200" baseline="0" dirty="0">
+                        <a:rPr lang="en-US" sz="1800" kern="1200" baseline="0">
                           <a:solidFill>
                             <a:schemeClr val="dk1"/>
                           </a:solidFill>
@@ -16989,7 +19258,7 @@
                         <a:t>The system shall </a:t>
                       </a:r>
                       <a:r>
-                        <a:rPr lang="en-US" sz="1800" kern="1200" baseline="0" dirty="0" smtClean="0">
+                        <a:rPr lang="en-US" sz="1800" kern="1200" baseline="0" smtClean="0">
                           <a:solidFill>
                             <a:schemeClr val="dk1"/>
                           </a:solidFill>
@@ -17001,7 +19270,7 @@
                         <a:t>block unauthorized </a:t>
                       </a:r>
                       <a:r>
-                        <a:rPr lang="en-US" sz="1800" kern="1200" baseline="0" dirty="0">
+                        <a:rPr lang="en-US" sz="1800" kern="1200" baseline="0">
                           <a:solidFill>
                             <a:schemeClr val="dk1"/>
                           </a:solidFill>
@@ -17055,7 +19324,7 @@
                 </a:tc>
                 <a:extLst>
                   <a:ext uri="{0D108BD9-81ED-4DB2-BD59-A6C34878D82A}">
-                    <a16:rowId xmlns:a16="http://schemas.microsoft.com/office/drawing/2014/main" xmlns="" val="10001"/>
+                    <a16:rowId xmlns="" xmlns:a16="http://schemas.microsoft.com/office/drawing/2014/main" val="10001"/>
                   </a:ext>
                 </a:extLst>
               </a:tr>
@@ -17083,7 +19352,7 @@
                         <a:defRPr/>
                       </a:pPr>
                       <a:r>
-                        <a:rPr lang="en-US" sz="1800" kern="1200" dirty="0" smtClean="0">
+                        <a:rPr lang="en-US" sz="1800" kern="1200" smtClean="0">
                           <a:solidFill>
                             <a:schemeClr val="dk1"/>
                           </a:solidFill>
@@ -17094,7 +19363,7 @@
                         </a:rPr>
                         <a:t>FR-02</a:t>
                       </a:r>
-                      <a:endParaRPr lang="en-US" sz="1800" kern="1200" dirty="0">
+                      <a:endParaRPr lang="en-US" sz="1800" kern="1200">
                         <a:solidFill>
                           <a:schemeClr val="dk1"/>
                         </a:solidFill>
@@ -17158,7 +19427,7 @@
                         </a:spcAft>
                       </a:pPr>
                       <a:r>
-                        <a:rPr lang="en-US" sz="1800" kern="1200" baseline="0" dirty="0">
+                        <a:rPr lang="en-US" sz="1800" kern="1200" baseline="0">
                           <a:solidFill>
                             <a:schemeClr val="dk1"/>
                           </a:solidFill>
@@ -17170,7 +19439,7 @@
                         <a:t>The system shall route UDS diagnostic messages exchanged with the </a:t>
                       </a:r>
                       <a:r>
-                        <a:rPr lang="en-US" sz="1800" kern="1200" baseline="0" dirty="0" smtClean="0">
+                        <a:rPr lang="en-US" sz="1800" kern="1200" baseline="0" smtClean="0">
                           <a:solidFill>
                             <a:schemeClr val="dk1"/>
                           </a:solidFill>
@@ -17182,7 +19451,7 @@
                         <a:t>MM </a:t>
                       </a:r>
                       <a:r>
-                        <a:rPr lang="en-US" sz="1800" kern="1200" baseline="0" dirty="0">
+                        <a:rPr lang="en-US" sz="1800" kern="1200" baseline="0">
                           <a:solidFill>
                             <a:schemeClr val="dk1"/>
                           </a:solidFill>
@@ -17236,7 +19505,7 @@
                 </a:tc>
                 <a:extLst>
                   <a:ext uri="{0D108BD9-81ED-4DB2-BD59-A6C34878D82A}">
-                    <a16:rowId xmlns:a16="http://schemas.microsoft.com/office/drawing/2014/main" xmlns="" val="10002"/>
+                    <a16:rowId xmlns="" xmlns:a16="http://schemas.microsoft.com/office/drawing/2014/main" val="10002"/>
                   </a:ext>
                 </a:extLst>
               </a:tr>
@@ -17249,7 +19518,7 @@
           <p:cNvPr id="14" name="TextBox 13">
             <a:extLst>
               <a:ext uri="{FF2B5EF4-FFF2-40B4-BE49-F238E27FC236}">
-                <a16:creationId xmlns:a16="http://schemas.microsoft.com/office/drawing/2014/main" xmlns="" id="{2477AED6-8D6F-D505-6D7B-78460A03A2E8}"/>
+                <a16:creationId xmlns="" xmlns:a16="http://schemas.microsoft.com/office/drawing/2014/main" id="{2477AED6-8D6F-D505-6D7B-78460A03A2E8}"/>
               </a:ext>
             </a:extLst>
           </p:cNvPr>
@@ -17258,8 +19527,8 @@
         </p:nvSpPr>
         <p:spPr>
           <a:xfrm>
-            <a:off x="204773" y="5352664"/>
-            <a:ext cx="11843295" cy="646331"/>
+            <a:off x="932506" y="3641559"/>
+            <a:ext cx="11115561" cy="646331"/>
           </a:xfrm>
           <a:prstGeom prst="rect">
             <a:avLst/>
@@ -17273,37 +19542,81 @@
           <a:lstStyle/>
           <a:p>
             <a:r>
-              <a:rPr lang="en-US" dirty="0" err="1"/>
+              <a:rPr lang="en-US" err="1"/>
               <a:t>RemoteDiag’s</a:t>
             </a:r>
             <a:r>
-              <a:rPr lang="en-US" dirty="0"/>
+              <a:rPr lang="en-US"/>
               <a:t> </a:t>
             </a:r>
             <a:r>
-              <a:rPr lang="en-US" b="1" dirty="0"/>
+              <a:rPr lang="en-US" b="1"/>
               <a:t>internal</a:t>
             </a:r>
             <a:r>
-              <a:rPr lang="en-US" dirty="0"/>
+              <a:rPr lang="en-US"/>
               <a:t> </a:t>
             </a:r>
             <a:r>
-              <a:rPr lang="en-US" b="1" dirty="0"/>
+              <a:rPr lang="en-US" b="1"/>
               <a:t>architecture and communication </a:t>
             </a:r>
             <a:r>
-              <a:rPr lang="en-US" dirty="0"/>
-              <a:t>should be redesigned to align with </a:t>
-            </a:r>
-            <a:r>
-              <a:rPr lang="en-US" b="1" dirty="0"/>
-              <a:t>new architecture</a:t>
-            </a:r>
-            <a:r>
-              <a:rPr lang="en-US" dirty="0"/>
-              <a:t> and satisfy above functional requirements.</a:t>
-            </a:r>
+              <a:rPr lang="en-US"/>
+              <a:t>should be </a:t>
+            </a:r>
+            <a:r>
+              <a:rPr lang="en-US" b="1"/>
+              <a:t>redesigned</a:t>
+            </a:r>
+            <a:r>
+              <a:rPr lang="en-US"/>
+              <a:t> to align with new architecture and </a:t>
+            </a:r>
+            <a:r>
+              <a:rPr lang="en-US" b="1"/>
+              <a:t>satisfy above functional requirements.</a:t>
+            </a:r>
+          </a:p>
+        </p:txBody>
+      </p:sp>
+      <p:sp>
+        <p:nvSpPr>
+          <p:cNvPr id="3" name="Right Arrow 2"/>
+          <p:cNvSpPr/>
+          <p:nvPr/>
+        </p:nvSpPr>
+        <p:spPr>
+          <a:xfrm>
+            <a:off x="253495" y="3689626"/>
+            <a:ext cx="679011" cy="550195"/>
+          </a:xfrm>
+          <a:prstGeom prst="rightArrow">
+            <a:avLst/>
+          </a:prstGeom>
+        </p:spPr>
+        <p:style>
+          <a:lnRef idx="2">
+            <a:schemeClr val="accent1">
+              <a:shade val="50000"/>
+            </a:schemeClr>
+          </a:lnRef>
+          <a:fillRef idx="1">
+            <a:schemeClr val="accent1"/>
+          </a:fillRef>
+          <a:effectRef idx="0">
+            <a:schemeClr val="accent1"/>
+          </a:effectRef>
+          <a:fontRef idx="minor">
+            <a:schemeClr val="lt1"/>
+          </a:fontRef>
+        </p:style>
+        <p:txBody>
+          <a:bodyPr rtlCol="0" anchor="ctr"/>
+          <a:lstStyle/>
+          <a:p>
+            <a:pPr algn="ctr"/>
+            <a:endParaRPr lang="en-US"/>
           </a:p>
         </p:txBody>
       </p:sp>
@@ -17418,6 +19731,87 @@
                                   </p:childTnLst>
                                 </p:cTn>
                               </p:par>
+                              <p:par>
+                                <p:cTn id="10" presetID="42" presetClass="entr" presetSubtype="0" fill="hold" grpId="0" nodeType="withEffect">
+                                  <p:stCondLst>
+                                    <p:cond delay="0"/>
+                                  </p:stCondLst>
+                                  <p:childTnLst>
+                                    <p:set>
+                                      <p:cBhvr>
+                                        <p:cTn id="11" dur="1" fill="hold">
+                                          <p:stCondLst>
+                                            <p:cond delay="0"/>
+                                          </p:stCondLst>
+                                        </p:cTn>
+                                        <p:tgtEl>
+                                          <p:spTgt spid="3"/>
+                                        </p:tgtEl>
+                                        <p:attrNameLst>
+                                          <p:attrName>style.visibility</p:attrName>
+                                        </p:attrNameLst>
+                                      </p:cBhvr>
+                                      <p:to>
+                                        <p:strVal val="visible"/>
+                                      </p:to>
+                                    </p:set>
+                                    <p:animEffect transition="in" filter="fade">
+                                      <p:cBhvr>
+                                        <p:cTn id="12" dur="1000"/>
+                                        <p:tgtEl>
+                                          <p:spTgt spid="3"/>
+                                        </p:tgtEl>
+                                      </p:cBhvr>
+                                    </p:animEffect>
+                                    <p:anim calcmode="lin" valueType="num">
+                                      <p:cBhvr>
+                                        <p:cTn id="13" dur="1000" fill="hold"/>
+                                        <p:tgtEl>
+                                          <p:spTgt spid="3"/>
+                                        </p:tgtEl>
+                                        <p:attrNameLst>
+                                          <p:attrName>ppt_x</p:attrName>
+                                        </p:attrNameLst>
+                                      </p:cBhvr>
+                                      <p:tavLst>
+                                        <p:tav tm="0">
+                                          <p:val>
+                                            <p:strVal val="#ppt_x"/>
+                                          </p:val>
+                                        </p:tav>
+                                        <p:tav tm="100000">
+                                          <p:val>
+                                            <p:strVal val="#ppt_x"/>
+                                          </p:val>
+                                        </p:tav>
+                                      </p:tavLst>
+                                    </p:anim>
+                                    <p:anim calcmode="lin" valueType="num">
+                                      <p:cBhvr>
+                                        <p:cTn id="14" dur="1000" fill="hold"/>
+                                        <p:tgtEl>
+                                          <p:spTgt spid="3"/>
+                                        </p:tgtEl>
+                                        <p:attrNameLst>
+                                          <p:attrName>ppt_y</p:attrName>
+                                        </p:attrNameLst>
+                                      </p:cBhvr>
+                                      <p:tavLst>
+                                        <p:tav tm="0">
+                                          <p:val>
+                                            <p:strVal val="#ppt_y+.1"/>
+                                          </p:val>
+                                        </p:tav>
+                                        <p:tav tm="100000">
+                                          <p:val>
+                                            <p:strVal val="#ppt_y"/>
+                                          </p:val>
+                                        </p:tav>
+                                      </p:tavLst>
+                                    </p:anim>
+                                  </p:childTnLst>
+                                </p:cTn>
+                              </p:par>
                             </p:childTnLst>
                           </p:cTn>
                         </p:par>
@@ -17447,6 +19841,7 @@
     </p:tnLst>
     <p:bldLst>
       <p:bldP spid="14" grpId="0"/>
+      <p:bldP spid="3" grpId="0" animBg="1"/>
     </p:bldLst>
   </p:timing>
 </p:sld>
@@ -17460,7 +19855,7 @@
         <p:cNvPr id="1" name="">
           <a:extLst>
             <a:ext uri="{FF2B5EF4-FFF2-40B4-BE49-F238E27FC236}">
-              <a16:creationId xmlns:a16="http://schemas.microsoft.com/office/drawing/2014/main" xmlns="" id="{C0816B88-86B3-799E-3A3E-FA919E3E0922}"/>
+              <a16:creationId xmlns="" xmlns:a16="http://schemas.microsoft.com/office/drawing/2014/main" id="{C0816B88-86B3-799E-3A3E-FA919E3E0922}"/>
             </a:ext>
           </a:extLst>
         </p:cNvPr>
@@ -17480,7 +19875,7 @@
           <p:cNvPr id="2" name="Title 1">
             <a:extLst>
               <a:ext uri="{FF2B5EF4-FFF2-40B4-BE49-F238E27FC236}">
-                <a16:creationId xmlns:a16="http://schemas.microsoft.com/office/drawing/2014/main" xmlns="" id="{C36E5815-73D6-DA66-29AA-3BE061A3E84B}"/>
+                <a16:creationId xmlns="" xmlns:a16="http://schemas.microsoft.com/office/drawing/2014/main" id="{C36E5815-73D6-DA66-29AA-3BE061A3E84B}"/>
               </a:ext>
             </a:extLst>
           </p:cNvPr>
@@ -17497,7 +19892,7 @@
           <a:lstStyle/>
           <a:p>
             <a:r>
-              <a:rPr lang="en-US" dirty="0"/>
+              <a:rPr lang="en-US"/>
               <a:t>Quality Attribute</a:t>
             </a:r>
           </a:p>
@@ -17508,7 +19903,7 @@
           <p:cNvPr id="11" name="Content Placeholder 3">
             <a:extLst>
               <a:ext uri="{FF2B5EF4-FFF2-40B4-BE49-F238E27FC236}">
-                <a16:creationId xmlns:a16="http://schemas.microsoft.com/office/drawing/2014/main" xmlns="" id="{6010EF79-766B-D3A2-10CE-882C40A1E836}"/>
+                <a16:creationId xmlns="" xmlns:a16="http://schemas.microsoft.com/office/drawing/2014/main" id="{6010EF79-766B-D3A2-10CE-882C40A1E836}"/>
               </a:ext>
             </a:extLst>
           </p:cNvPr>
@@ -17695,7 +20090,7 @@
             </a:lvl9pPr>
           </a:lstStyle>
           <a:p>
-            <a:endParaRPr lang="en-US" sz="2200" dirty="0"/>
+            <a:endParaRPr lang="en-US" sz="2200"/>
           </a:p>
         </p:txBody>
       </p:sp>
@@ -17704,7 +20099,7 @@
           <p:cNvPr id="3" name="Table 2">
             <a:extLst>
               <a:ext uri="{FF2B5EF4-FFF2-40B4-BE49-F238E27FC236}">
-                <a16:creationId xmlns:a16="http://schemas.microsoft.com/office/drawing/2014/main" xmlns="" id="{6C8AAA51-C203-CD8B-4B02-DE7401134C21}"/>
+                <a16:creationId xmlns="" xmlns:a16="http://schemas.microsoft.com/office/drawing/2014/main" id="{6C8AAA51-C203-CD8B-4B02-DE7401134C21}"/>
               </a:ext>
             </a:extLst>
           </p:cNvPr>
@@ -17714,14 +20109,14 @@
           <p:nvPr>
             <p:extLst>
               <p:ext uri="{D42A27DB-BD31-4B8C-83A1-F6EECF244321}">
-                <p14:modId xmlns:p14="http://schemas.microsoft.com/office/powerpoint/2010/main" val="4256436114"/>
+                <p14:modId xmlns:p14="http://schemas.microsoft.com/office/powerpoint/2010/main" val="113273878"/>
               </p:ext>
             </p:extLst>
           </p:nvPr>
         </p:nvGraphicFramePr>
         <p:xfrm>
           <a:off x="182820" y="960039"/>
-          <a:ext cx="11826361" cy="4762854"/>
+          <a:ext cx="11826361" cy="4611470"/>
         </p:xfrm>
         <a:graphic>
           <a:graphicData uri="http://schemas.openxmlformats.org/drawingml/2006/table">
@@ -17733,35 +20128,35 @@
                 <a:gridCol w="741105">
                   <a:extLst>
                     <a:ext uri="{9D8B030D-6E8A-4147-A177-3AD203B41FA5}">
-                      <a16:colId xmlns:a16="http://schemas.microsoft.com/office/drawing/2014/main" xmlns="" val="20000"/>
+                      <a16:colId xmlns="" xmlns:a16="http://schemas.microsoft.com/office/drawing/2014/main" val="20000"/>
                     </a:ext>
                   </a:extLst>
                 </a:gridCol>
                 <a:gridCol w="4248150">
                   <a:extLst>
                     <a:ext uri="{9D8B030D-6E8A-4147-A177-3AD203B41FA5}">
-                      <a16:colId xmlns:a16="http://schemas.microsoft.com/office/drawing/2014/main" xmlns="" val="20001"/>
+                      <a16:colId xmlns="" xmlns:a16="http://schemas.microsoft.com/office/drawing/2014/main" val="20001"/>
                     </a:ext>
                   </a:extLst>
                 </a:gridCol>
                 <a:gridCol w="4629150">
                   <a:extLst>
                     <a:ext uri="{9D8B030D-6E8A-4147-A177-3AD203B41FA5}">
-                      <a16:colId xmlns:a16="http://schemas.microsoft.com/office/drawing/2014/main" xmlns="" val="2530683369"/>
+                      <a16:colId xmlns="" xmlns:a16="http://schemas.microsoft.com/office/drawing/2014/main" val="2530683369"/>
                     </a:ext>
                   </a:extLst>
                 </a:gridCol>
                 <a:gridCol w="1295400">
                   <a:extLst>
                     <a:ext uri="{9D8B030D-6E8A-4147-A177-3AD203B41FA5}">
-                      <a16:colId xmlns:a16="http://schemas.microsoft.com/office/drawing/2014/main" xmlns="" val="20002"/>
+                      <a16:colId xmlns="" xmlns:a16="http://schemas.microsoft.com/office/drawing/2014/main" val="20002"/>
                     </a:ext>
                   </a:extLst>
                 </a:gridCol>
                 <a:gridCol w="912556">
                   <a:extLst>
                     <a:ext uri="{9D8B030D-6E8A-4147-A177-3AD203B41FA5}">
-                      <a16:colId xmlns:a16="http://schemas.microsoft.com/office/drawing/2014/main" xmlns="" val="20003"/>
+                      <a16:colId xmlns="" xmlns:a16="http://schemas.microsoft.com/office/drawing/2014/main" val="20003"/>
                     </a:ext>
                   </a:extLst>
                 </a:gridCol>
@@ -17774,7 +20169,7 @@
                     <a:p>
                       <a:pPr algn="l" latinLnBrk="0"/>
                       <a:r>
-                        <a:rPr lang="en-US" sz="1600" b="0" dirty="0">
+                        <a:rPr lang="en-US" sz="1600" b="0">
                           <a:latin typeface="+mn-lt"/>
                           <a:cs typeface="Arial" panose="020B0604020202020204" pitchFamily="34" charset="0"/>
                         </a:rPr>
@@ -17844,7 +20239,7 @@
                         <a:defRPr/>
                       </a:pPr>
                       <a:r>
-                        <a:rPr lang="en-US" sz="1600" b="0" dirty="0">
+                        <a:rPr lang="en-US" sz="1600" b="0">
                           <a:effectLst/>
                           <a:latin typeface="+mn-lt"/>
                           <a:ea typeface="Malgun Gothic" panose="020B0503020000020004" pitchFamily="34" charset="-127"/>
@@ -17916,7 +20311,7 @@
                         <a:defRPr/>
                       </a:pPr>
                       <a:r>
-                        <a:rPr lang="en-US" sz="1600" b="0" dirty="0">
+                        <a:rPr lang="en-US" sz="1600" b="0">
                           <a:effectLst/>
                           <a:latin typeface="+mn-lt"/>
                           <a:ea typeface="Malgun Gothic" panose="020B0503020000020004" pitchFamily="34" charset="-127"/>
@@ -17988,14 +20383,14 @@
                         <a:defRPr/>
                       </a:pPr>
                       <a:r>
-                        <a:rPr lang="en-US" sz="1600" b="0" dirty="0">
+                        <a:rPr lang="en-US" sz="1600" b="0">
                           <a:effectLst/>
                           <a:latin typeface="+mn-lt"/>
                           <a:cs typeface="Arial" panose="020B0604020202020204" pitchFamily="34" charset="0"/>
                         </a:rPr>
                         <a:t>Type</a:t>
                       </a:r>
-                      <a:endParaRPr lang="en-US" sz="1600" b="0" dirty="0">
+                      <a:endParaRPr lang="en-US" sz="1600" b="0">
                         <a:effectLst/>
                         <a:latin typeface="+mn-lt"/>
                         <a:ea typeface="Malgun Gothic" panose="020B0503020000020004" pitchFamily="34" charset="-127"/>
@@ -18065,14 +20460,14 @@
                         <a:defRPr/>
                       </a:pPr>
                       <a:r>
-                        <a:rPr lang="en-US" sz="1600" b="0" dirty="0">
+                        <a:rPr lang="en-US" sz="1600" b="0">
                           <a:effectLst/>
                           <a:latin typeface="+mn-lt"/>
                           <a:cs typeface="Arial" panose="020B0604020202020204" pitchFamily="34" charset="0"/>
                         </a:rPr>
                         <a:t>Priority</a:t>
                       </a:r>
-                      <a:endParaRPr lang="en-US" sz="1600" b="0" dirty="0">
+                      <a:endParaRPr lang="en-US" sz="1600" b="0">
                         <a:effectLst/>
                         <a:latin typeface="+mn-lt"/>
                         <a:ea typeface="Malgun Gothic" panose="020B0503020000020004" pitchFamily="34" charset="-127"/>
@@ -18121,7 +20516,7 @@
                 </a:tc>
                 <a:extLst>
                   <a:ext uri="{0D108BD9-81ED-4DB2-BD59-A6C34878D82A}">
-                    <a16:rowId xmlns:a16="http://schemas.microsoft.com/office/drawing/2014/main" xmlns="" val="10000"/>
+                    <a16:rowId xmlns="" xmlns:a16="http://schemas.microsoft.com/office/drawing/2014/main" val="10000"/>
                   </a:ext>
                 </a:extLst>
               </a:tr>
@@ -18137,7 +20532,7 @@
                         </a:lnSpc>
                       </a:pPr>
                       <a:r>
-                        <a:rPr lang="en-US" sz="1600" b="0" kern="1200" dirty="0" smtClean="0">
+                        <a:rPr lang="en-US" sz="1600" b="0" kern="1200" smtClean="0">
                           <a:solidFill>
                             <a:schemeClr val="dk1"/>
                           </a:solidFill>
@@ -18148,7 +20543,7 @@
                         </a:rPr>
                         <a:t>QA-01</a:t>
                       </a:r>
-                      <a:endParaRPr lang="en-US" sz="1600" b="0" kern="1200" dirty="0">
+                      <a:endParaRPr lang="en-US" sz="1600" b="0" kern="1200">
                         <a:solidFill>
                           <a:schemeClr val="dk1"/>
                         </a:solidFill>
@@ -18215,7 +20610,7 @@
                         </a:spcAft>
                       </a:pPr>
                       <a:r>
-                        <a:rPr lang="en-US" sz="1600" b="0" kern="1200" baseline="0" dirty="0" smtClean="0">
+                        <a:rPr lang="en-US" sz="1600" b="0" kern="1200" baseline="0" smtClean="0">
                           <a:solidFill>
                             <a:schemeClr val="dk1"/>
                           </a:solidFill>
@@ -18226,7 +20621,7 @@
                         </a:rPr>
                         <a:t>A compromised app/service sends reprogramming command to CAN</a:t>
                       </a:r>
-                      <a:endParaRPr lang="en-US" sz="1600" b="0" kern="1200" baseline="0" dirty="0">
+                      <a:endParaRPr lang="en-US" sz="1600" b="0" kern="1200" baseline="0">
                         <a:solidFill>
                           <a:schemeClr val="dk1"/>
                         </a:solidFill>
@@ -18299,14 +20694,14 @@
                         <a:defRPr/>
                       </a:pPr>
                       <a:r>
-                        <a:rPr lang="en-US" sz="1600" b="0" dirty="0"/>
+                        <a:rPr lang="en-US" sz="1600" b="0"/>
                         <a:t>Zero Reprogramming SIDs reaches the internal </a:t>
                       </a:r>
                       <a:r>
-                        <a:rPr lang="en-US" sz="1600" b="0" dirty="0" smtClean="0"/>
+                        <a:rPr lang="en-US" sz="1600" b="0" smtClean="0"/>
                         <a:t>CAN.</a:t>
                       </a:r>
-                      <a:endParaRPr lang="en-US" sz="1600" b="0" dirty="0"/>
+                      <a:endParaRPr lang="en-US" sz="1600" b="0"/>
                     </a:p>
                   </a:txBody>
                   <a:tcPr marL="106700" marR="106700" marT="53350" marB="53350" anchor="ctr">
@@ -18359,14 +20754,14 @@
                         </a:lnSpc>
                       </a:pPr>
                       <a:r>
-                        <a:rPr lang="en-US" sz="1600" b="0" dirty="0">
+                        <a:rPr lang="en-US" sz="1600" b="0">
                           <a:effectLst/>
                           <a:latin typeface="+mn-lt"/>
                           <a:cs typeface="Arial" panose="020B0604020202020204" pitchFamily="34" charset="0"/>
                         </a:rPr>
                         <a:t>Security</a:t>
                       </a:r>
-                      <a:endParaRPr lang="en-US" sz="1600" b="0" dirty="0">
+                      <a:endParaRPr lang="en-US" sz="1600" b="0">
                         <a:latin typeface="+mn-lt"/>
                         <a:cs typeface="Arial" panose="020B0604020202020204" pitchFamily="34" charset="0"/>
                       </a:endParaRPr>
@@ -18422,14 +20817,14 @@
                         </a:lnSpc>
                       </a:pPr>
                       <a:r>
-                        <a:rPr lang="en-US" sz="1600" b="0" dirty="0">
+                        <a:rPr lang="en-US" sz="1600" b="0">
                           <a:effectLst/>
                           <a:latin typeface="+mn-lt"/>
                           <a:cs typeface="Arial" panose="020B0604020202020204" pitchFamily="34" charset="0"/>
                         </a:rPr>
                         <a:t>High</a:t>
                       </a:r>
-                      <a:endParaRPr lang="en-US" sz="1600" b="0" dirty="0">
+                      <a:endParaRPr lang="en-US" sz="1600" b="0">
                         <a:latin typeface="+mn-lt"/>
                         <a:cs typeface="Arial" panose="020B0604020202020204" pitchFamily="34" charset="0"/>
                       </a:endParaRPr>
@@ -18476,7 +20871,7 @@
                 </a:tc>
                 <a:extLst>
                   <a:ext uri="{0D108BD9-81ED-4DB2-BD59-A6C34878D82A}">
-                    <a16:rowId xmlns:a16="http://schemas.microsoft.com/office/drawing/2014/main" xmlns="" val="10001"/>
+                    <a16:rowId xmlns="" xmlns:a16="http://schemas.microsoft.com/office/drawing/2014/main" val="10001"/>
                   </a:ext>
                 </a:extLst>
               </a:tr>
@@ -18504,7 +20899,7 @@
                         <a:defRPr/>
                       </a:pPr>
                       <a:r>
-                        <a:rPr lang="en-US" sz="1600" b="0" kern="1200" dirty="0" smtClean="0">
+                        <a:rPr lang="en-US" sz="1600" b="0" kern="1200" smtClean="0">
                           <a:solidFill>
                             <a:schemeClr val="dk1"/>
                           </a:solidFill>
@@ -18515,7 +20910,7 @@
                         </a:rPr>
                         <a:t>QA-02</a:t>
                       </a:r>
-                      <a:endParaRPr lang="en-US" sz="1600" b="0" kern="1200" dirty="0">
+                      <a:endParaRPr lang="en-US" sz="1600" b="0" kern="1200">
                         <a:solidFill>
                           <a:schemeClr val="dk1"/>
                         </a:solidFill>
@@ -18582,7 +20977,7 @@
                         </a:spcAft>
                       </a:pPr>
                       <a:r>
-                        <a:rPr lang="en-US" sz="1600" b="0" kern="1200" baseline="0" dirty="0">
+                        <a:rPr lang="en-US" sz="1600" b="0" kern="1200" baseline="0">
                           <a:solidFill>
                             <a:schemeClr val="dk1"/>
                           </a:solidFill>
@@ -18594,7 +20989,7 @@
                         <a:t>MM ECU sends a diagnostic </a:t>
                       </a:r>
                       <a:r>
-                        <a:rPr lang="en-US" sz="1600" b="0" kern="1200" baseline="0" dirty="0" smtClean="0">
+                        <a:rPr lang="en-US" sz="1600" b="0" kern="1200" baseline="0" smtClean="0">
                           <a:solidFill>
                             <a:schemeClr val="dk1"/>
                           </a:solidFill>
@@ -18606,7 +21001,7 @@
                         <a:t>request via TCP to </a:t>
                       </a:r>
                       <a:r>
-                        <a:rPr lang="en-US" sz="1600" b="0" kern="1200" baseline="0" dirty="0" err="1" smtClean="0">
+                        <a:rPr lang="en-US" sz="1600" b="0" kern="1200" baseline="0" err="1" smtClean="0">
                           <a:solidFill>
                             <a:schemeClr val="dk1"/>
                           </a:solidFill>
@@ -18617,7 +21012,7 @@
                         </a:rPr>
                         <a:t>RemoteDiag</a:t>
                       </a:r>
-                      <a:endParaRPr lang="en-US" sz="1600" b="0" kern="1200" baseline="0" dirty="0">
+                      <a:endParaRPr lang="en-US" sz="1600" b="0" kern="1200" baseline="0">
                         <a:solidFill>
                           <a:schemeClr val="dk1"/>
                         </a:solidFill>
@@ -18678,27 +21073,27 @@
                         </a:lnSpc>
                       </a:pPr>
                       <a:r>
-                        <a:rPr lang="en-US" sz="1600" b="0" dirty="0">
+                        <a:rPr lang="en-US" sz="1600" b="0">
                           <a:latin typeface="+mn-lt"/>
                           <a:cs typeface="Arial" panose="020B0604020202020204" pitchFamily="34" charset="0"/>
                         </a:rPr>
                         <a:t>Zero diagnostic communication is found in </a:t>
                       </a:r>
                       <a:r>
-                        <a:rPr lang="en-US" sz="1600" b="0" dirty="0" smtClean="0">
+                        <a:rPr lang="en-US" sz="1600" b="0" smtClean="0">
                           <a:latin typeface="+mn-lt"/>
                           <a:cs typeface="Arial" panose="020B0604020202020204" pitchFamily="34" charset="0"/>
                         </a:rPr>
                         <a:t>EP. 100% number of</a:t>
                       </a:r>
                       <a:r>
-                        <a:rPr lang="en-US" sz="1600" b="0" baseline="0" dirty="0" smtClean="0">
+                        <a:rPr lang="en-US" sz="1600" b="0" baseline="0" smtClean="0">
                           <a:latin typeface="+mn-lt"/>
                           <a:cs typeface="Arial" panose="020B0604020202020204" pitchFamily="34" charset="0"/>
                         </a:rPr>
                         <a:t> requests are handled within IP.</a:t>
                       </a:r>
-                      <a:endParaRPr lang="en-US" sz="1600" b="0" dirty="0">
+                      <a:endParaRPr lang="en-US" sz="1600" b="0">
                         <a:latin typeface="+mn-lt"/>
                         <a:cs typeface="Arial" panose="020B0604020202020204" pitchFamily="34" charset="0"/>
                       </a:endParaRPr>
@@ -18754,14 +21149,14 @@
                         </a:lnSpc>
                       </a:pPr>
                       <a:r>
-                        <a:rPr lang="en-US" sz="1600" b="0" dirty="0">
+                        <a:rPr lang="en-US" sz="1600" b="0">
                           <a:effectLst/>
                           <a:latin typeface="+mn-lt"/>
                           <a:cs typeface="Arial" panose="020B0604020202020204" pitchFamily="34" charset="0"/>
                         </a:rPr>
                         <a:t>Security</a:t>
                       </a:r>
-                      <a:endParaRPr lang="en-US" sz="1600" b="0" dirty="0">
+                      <a:endParaRPr lang="en-US" sz="1600" b="0">
                         <a:latin typeface="+mn-lt"/>
                         <a:cs typeface="Arial" panose="020B0604020202020204" pitchFamily="34" charset="0"/>
                       </a:endParaRPr>
@@ -18817,14 +21212,14 @@
                         </a:lnSpc>
                       </a:pPr>
                       <a:r>
-                        <a:rPr lang="en-US" sz="1600" b="0" dirty="0">
+                        <a:rPr lang="en-US" sz="1600" b="0">
                           <a:effectLst/>
                           <a:latin typeface="+mn-lt"/>
                           <a:cs typeface="Arial" panose="020B0604020202020204" pitchFamily="34" charset="0"/>
                         </a:rPr>
                         <a:t>High</a:t>
                       </a:r>
-                      <a:endParaRPr lang="en-US" sz="1600" b="0" dirty="0">
+                      <a:endParaRPr lang="en-US" sz="1600" b="0">
                         <a:latin typeface="+mn-lt"/>
                         <a:cs typeface="Arial" panose="020B0604020202020204" pitchFamily="34" charset="0"/>
                       </a:endParaRPr>
@@ -18871,7 +21266,7 @@
                 </a:tc>
                 <a:extLst>
                   <a:ext uri="{0D108BD9-81ED-4DB2-BD59-A6C34878D82A}">
-                    <a16:rowId xmlns:a16="http://schemas.microsoft.com/office/drawing/2014/main" xmlns="" val="10002"/>
+                    <a16:rowId xmlns="" xmlns:a16="http://schemas.microsoft.com/office/drawing/2014/main" val="10002"/>
                   </a:ext>
                 </a:extLst>
               </a:tr>
@@ -18887,7 +21282,7 @@
                         </a:lnSpc>
                       </a:pPr>
                       <a:r>
-                        <a:rPr lang="en-US" sz="1600" b="0" kern="1200" dirty="0" smtClean="0">
+                        <a:rPr lang="en-US" sz="1600" b="0" kern="1200" smtClean="0">
                           <a:solidFill>
                             <a:schemeClr val="dk1"/>
                           </a:solidFill>
@@ -18898,7 +21293,7 @@
                         </a:rPr>
                         <a:t>QA-03</a:t>
                       </a:r>
-                      <a:endParaRPr lang="en-US" sz="1600" b="0" kern="1200" dirty="0">
+                      <a:endParaRPr lang="en-US" sz="1600" b="0" kern="1200">
                         <a:solidFill>
                           <a:schemeClr val="dk1"/>
                         </a:solidFill>
@@ -18965,7 +21360,7 @@
                         </a:spcAft>
                       </a:pPr>
                       <a:r>
-                        <a:rPr lang="en-US" sz="1600" b="0" kern="1200" baseline="0" dirty="0" smtClean="0">
+                        <a:rPr lang="en-US" sz="1600" b="0" kern="1200" baseline="0" smtClean="0">
                           <a:solidFill>
                             <a:schemeClr val="dk1"/>
                           </a:solidFill>
@@ -18974,9 +21369,45 @@
                           <a:ea typeface="+mn-ea"/>
                           <a:cs typeface="Arial" panose="020B0604020202020204" pitchFamily="34" charset="0"/>
                         </a:rPr>
-                        <a:t>The selected architecture preserves the original core responsibility of each component. No component is required to take responsibilities outside its originally defined role.</a:t>
+                        <a:t>The </a:t>
                       </a:r>
-                      <a:endParaRPr lang="en-US" sz="1600" b="0" kern="1200" baseline="0" dirty="0">
+                      <a:r>
+                        <a:rPr lang="en-US" sz="1600" b="0" kern="1200" baseline="0" smtClean="0">
+                          <a:solidFill>
+                            <a:schemeClr val="dk1"/>
+                          </a:solidFill>
+                          <a:effectLst/>
+                          <a:latin typeface="+mn-lt"/>
+                          <a:ea typeface="+mn-ea"/>
+                          <a:cs typeface="Arial" panose="020B0604020202020204" pitchFamily="34" charset="0"/>
+                        </a:rPr>
+                        <a:t>new design preserves </a:t>
+                      </a:r>
+                      <a:r>
+                        <a:rPr lang="en-US" sz="1600" b="0" kern="1200" baseline="0" smtClean="0">
+                          <a:solidFill>
+                            <a:schemeClr val="dk1"/>
+                          </a:solidFill>
+                          <a:effectLst/>
+                          <a:latin typeface="+mn-lt"/>
+                          <a:ea typeface="+mn-ea"/>
+                          <a:cs typeface="Arial" panose="020B0604020202020204" pitchFamily="34" charset="0"/>
+                        </a:rPr>
+                        <a:t>the original core responsibility of each component</a:t>
+                      </a:r>
+                      <a:r>
+                        <a:rPr lang="en-US" sz="1600" b="0" kern="1200" baseline="0" smtClean="0">
+                          <a:solidFill>
+                            <a:schemeClr val="dk1"/>
+                          </a:solidFill>
+                          <a:effectLst/>
+                          <a:latin typeface="+mn-lt"/>
+                          <a:ea typeface="+mn-ea"/>
+                          <a:cs typeface="Arial" panose="020B0604020202020204" pitchFamily="34" charset="0"/>
+                        </a:rPr>
+                        <a:t>.</a:t>
+                      </a:r>
+                      <a:endParaRPr lang="en-US" sz="1600" b="0" kern="1200" baseline="0">
                         <a:solidFill>
                           <a:schemeClr val="dk1"/>
                         </a:solidFill>
@@ -19049,15 +21480,55 @@
                         <a:defRPr/>
                       </a:pPr>
                       <a:r>
-                        <a:rPr lang="en-US" sz="1600" b="0" dirty="0" smtClean="0">
+                        <a:rPr lang="en-US" sz="1600" b="0" kern="1200" baseline="0" smtClean="0">
+                          <a:solidFill>
+                            <a:schemeClr val="dk1"/>
+                          </a:solidFill>
+                          <a:effectLst/>
+                          <a:latin typeface="+mn-lt"/>
+                          <a:ea typeface="+mn-ea"/>
+                          <a:cs typeface="Arial" panose="020B0604020202020204" pitchFamily="34" charset="0"/>
+                        </a:rPr>
+                        <a:t>No component is required to take responsibilities outside its originally defined role.</a:t>
+                      </a:r>
+                    </a:p>
+                    <a:p>
+                      <a:pPr marL="0" marR="0" indent="0" algn="l" defTabSz="914400" rtl="0" eaLnBrk="1" fontAlgn="auto" latinLnBrk="0" hangingPunct="1">
+                        <a:lnSpc>
+                          <a:spcPct val="150000"/>
+                        </a:lnSpc>
+                        <a:spcBef>
+                          <a:spcPts val="0"/>
+                        </a:spcBef>
+                        <a:spcAft>
+                          <a:spcPts val="0"/>
+                        </a:spcAft>
+                        <a:buClrTx/>
+                        <a:buSzTx/>
+                        <a:buFontTx/>
+                        <a:buNone/>
+                        <a:tabLst/>
+                        <a:defRPr/>
+                      </a:pPr>
+                      <a:r>
+                        <a:rPr lang="en-US" sz="1600" b="0" smtClean="0">
                           <a:effectLst/>
                           <a:latin typeface="+mn-lt"/>
                           <a:ea typeface="Malgun Gothic" panose="020B0503020000020004" pitchFamily="34" charset="-127"/>
                           <a:cs typeface="Arial" panose="020B0604020202020204" pitchFamily="34" charset="0"/>
                         </a:rPr>
-                        <a:t>Number of components requiring extension of core responsibility: 0. Number of additional OEM specification updates caused by responsibility expansion.</a:t>
+                        <a:t>No additional specification </a:t>
                       </a:r>
-                      <a:endParaRPr lang="en-US" sz="1600" b="0" dirty="0">
+                      <a:r>
+                        <a:rPr lang="en-US" sz="1600" b="0" smtClean="0">
+                          <a:effectLst/>
+                          <a:latin typeface="+mn-lt"/>
+                          <a:ea typeface="Malgun Gothic" panose="020B0503020000020004" pitchFamily="34" charset="-127"/>
+                          <a:cs typeface="Arial" panose="020B0604020202020204" pitchFamily="34" charset="0"/>
+                        </a:rPr>
+                        <a:t>updates caused by responsibility expansion.</a:t>
+                      </a:r>
+                      <a:endParaRPr lang="en-US" sz="1600" b="0">
                         <a:effectLst/>
                         <a:latin typeface="+mn-lt"/>
                         <a:ea typeface="Malgun Gothic" panose="020B0503020000020004" pitchFamily="34" charset="-127"/>
@@ -19127,7 +21598,7 @@
                         <a:defRPr/>
                       </a:pPr>
                       <a:r>
-                        <a:rPr lang="en-US" sz="1600" b="0" dirty="0" smtClean="0">
+                        <a:rPr lang="en-US" sz="1600" b="0" smtClean="0">
                           <a:effectLst/>
                           <a:latin typeface="+mn-lt"/>
                           <a:ea typeface="Malgun Gothic" panose="020B0503020000020004" pitchFamily="34" charset="-127"/>
@@ -19135,7 +21606,7 @@
                         </a:rPr>
                         <a:t>Modifiability</a:t>
                       </a:r>
-                      <a:endParaRPr lang="en-US" sz="1600" b="0" dirty="0">
+                      <a:endParaRPr lang="en-US" sz="1600" b="0">
                         <a:effectLst/>
                         <a:latin typeface="+mn-lt"/>
                         <a:ea typeface="Malgun Gothic" panose="020B0503020000020004" pitchFamily="34" charset="-127"/>
@@ -19193,12 +21664,16 @@
                         </a:lnSpc>
                       </a:pPr>
                       <a:r>
-                        <a:rPr lang="en-US" sz="1600" b="0" dirty="0">
+                        <a:rPr lang="en-US" sz="1600" b="0" smtClean="0">
                           <a:latin typeface="+mn-lt"/>
                           <a:cs typeface="Arial" panose="020B0604020202020204" pitchFamily="34" charset="0"/>
                         </a:rPr>
-                        <a:t>Medium</a:t>
+                        <a:t>High</a:t>
                       </a:r>
+                      <a:endParaRPr lang="en-US" sz="1600" b="0">
+                        <a:latin typeface="+mn-lt"/>
+                        <a:cs typeface="Arial" panose="020B0604020202020204" pitchFamily="34" charset="0"/>
+                      </a:endParaRPr>
                     </a:p>
                   </a:txBody>
                   <a:tcPr marL="106700" marR="106700" marT="53350" marB="53350" anchor="ctr">
@@ -19242,7 +21717,7 @@
                 </a:tc>
                 <a:extLst>
                   <a:ext uri="{0D108BD9-81ED-4DB2-BD59-A6C34878D82A}">
-                    <a16:rowId xmlns:a16="http://schemas.microsoft.com/office/drawing/2014/main" xmlns="" val="10003"/>
+                    <a16:rowId xmlns="" xmlns:a16="http://schemas.microsoft.com/office/drawing/2014/main" val="10003"/>
                   </a:ext>
                 </a:extLst>
               </a:tr>
@@ -19258,7 +21733,7 @@
                         </a:lnSpc>
                       </a:pPr>
                       <a:r>
-                        <a:rPr lang="en-US" sz="1600" b="0" kern="1200" dirty="0" smtClean="0">
+                        <a:rPr lang="en-US" sz="1600" b="0" kern="1200" smtClean="0">
                           <a:solidFill>
                             <a:schemeClr val="dk1"/>
                           </a:solidFill>
@@ -19269,7 +21744,7 @@
                         </a:rPr>
                         <a:t>QA-04</a:t>
                       </a:r>
-                      <a:endParaRPr lang="en-US" sz="1600" b="0" kern="1200" dirty="0">
+                      <a:endParaRPr lang="en-US" sz="1600" b="0" kern="1200">
                         <a:solidFill>
                           <a:schemeClr val="dk1"/>
                         </a:solidFill>
@@ -19336,7 +21811,7 @@
                         </a:spcAft>
                       </a:pPr>
                       <a:r>
-                        <a:rPr lang="en-US" sz="1600" b="0" kern="1200" baseline="0" dirty="0">
+                        <a:rPr lang="en-US" sz="1600" b="0" kern="1200" baseline="0">
                           <a:solidFill>
                             <a:schemeClr val="dk1"/>
                           </a:solidFill>
@@ -19345,7 +21820,31 @@
                           <a:ea typeface="+mn-ea"/>
                           <a:cs typeface="Arial" panose="020B0604020202020204" pitchFamily="34" charset="0"/>
                         </a:rPr>
-                        <a:t>Existing software components require minimal changes.</a:t>
+                        <a:t>Existing software </a:t>
+                      </a:r>
+                      <a:r>
+                        <a:rPr lang="en-US" sz="1600" b="0" kern="1200" baseline="0" smtClean="0">
+                          <a:solidFill>
+                            <a:schemeClr val="dk1"/>
+                          </a:solidFill>
+                          <a:effectLst/>
+                          <a:latin typeface="+mn-lt"/>
+                          <a:ea typeface="+mn-ea"/>
+                          <a:cs typeface="Arial" panose="020B0604020202020204" pitchFamily="34" charset="0"/>
+                        </a:rPr>
+                        <a:t>components (other than RemoteDiag) </a:t>
+                      </a:r>
+                      <a:r>
+                        <a:rPr lang="en-US" sz="1600" b="0" kern="1200" baseline="0">
+                          <a:solidFill>
+                            <a:schemeClr val="dk1"/>
+                          </a:solidFill>
+                          <a:effectLst/>
+                          <a:latin typeface="+mn-lt"/>
+                          <a:ea typeface="+mn-ea"/>
+                          <a:cs typeface="Arial" panose="020B0604020202020204" pitchFamily="34" charset="0"/>
+                        </a:rPr>
+                        <a:t>require minimal changes.</a:t>
                       </a:r>
                     </a:p>
                   </a:txBody>
@@ -19411,7 +21910,7 @@
                         <a:defRPr/>
                       </a:pPr>
                       <a:r>
-                        <a:rPr lang="en-US" sz="1600" b="0" dirty="0">
+                        <a:rPr lang="en-US" sz="1600" b="0">
                           <a:effectLst/>
                           <a:latin typeface="+mn-lt"/>
                           <a:ea typeface="Malgun Gothic" panose="020B0503020000020004" pitchFamily="34" charset="-127"/>
@@ -19420,7 +21919,7 @@
                         <a:t>Number of </a:t>
                       </a:r>
                       <a:r>
-                        <a:rPr lang="en-US" sz="1600" b="0" dirty="0" smtClean="0">
+                        <a:rPr lang="en-US" sz="1600" b="0" smtClean="0">
                           <a:effectLst/>
                           <a:latin typeface="+mn-lt"/>
                           <a:ea typeface="Malgun Gothic" panose="020B0503020000020004" pitchFamily="34" charset="-127"/>
@@ -19429,7 +21928,7 @@
                         <a:t>component</a:t>
                       </a:r>
                       <a:r>
-                        <a:rPr lang="en-US" sz="1600" b="0" baseline="0" dirty="0" smtClean="0">
+                        <a:rPr lang="en-US" sz="1600" b="0" baseline="0" smtClean="0">
                           <a:effectLst/>
                           <a:latin typeface="+mn-lt"/>
                           <a:ea typeface="Malgun Gothic" panose="020B0503020000020004" pitchFamily="34" charset="-127"/>
@@ -19437,7 +21936,7 @@
                         </a:rPr>
                         <a:t> which needs to modify to align with new design </a:t>
                       </a:r>
-                      <a:endParaRPr lang="en-US" sz="1600" b="0" dirty="0">
+                      <a:endParaRPr lang="en-US" sz="1600" b="0">
                         <a:effectLst/>
                         <a:latin typeface="+mn-lt"/>
                         <a:ea typeface="Malgun Gothic" panose="020B0503020000020004" pitchFamily="34" charset="-127"/>
@@ -19507,7 +22006,7 @@
                         <a:defRPr/>
                       </a:pPr>
                       <a:r>
-                        <a:rPr lang="en-US" sz="1600" b="0" dirty="0">
+                        <a:rPr lang="en-US" sz="1600" b="0">
                           <a:effectLst/>
                           <a:latin typeface="+mn-lt"/>
                           <a:ea typeface="Malgun Gothic" panose="020B0503020000020004" pitchFamily="34" charset="-127"/>
@@ -19567,7 +22066,7 @@
                         </a:lnSpc>
                       </a:pPr>
                       <a:r>
-                        <a:rPr lang="en-US" sz="1600" b="0" dirty="0">
+                        <a:rPr lang="en-US" sz="1600" b="0">
                           <a:latin typeface="+mn-lt"/>
                           <a:cs typeface="Arial" panose="020B0604020202020204" pitchFamily="34" charset="0"/>
                         </a:rPr>
@@ -19616,7 +22115,7 @@
                 </a:tc>
                 <a:extLst>
                   <a:ext uri="{0D108BD9-81ED-4DB2-BD59-A6C34878D82A}">
-                    <a16:rowId xmlns:a16="http://schemas.microsoft.com/office/drawing/2014/main" xmlns="" val="10004"/>
+                    <a16:rowId xmlns="" xmlns:a16="http://schemas.microsoft.com/office/drawing/2014/main" val="10004"/>
                   </a:ext>
                 </a:extLst>
               </a:tr>
@@ -19632,7 +22131,7 @@
                         </a:lnSpc>
                       </a:pPr>
                       <a:r>
-                        <a:rPr lang="en-US" sz="1600" b="0" kern="1200" dirty="0" smtClean="0">
+                        <a:rPr lang="en-US" sz="1600" b="0" kern="1200" smtClean="0">
                           <a:solidFill>
                             <a:schemeClr val="dk1"/>
                           </a:solidFill>
@@ -19643,7 +22142,7 @@
                         </a:rPr>
                         <a:t>QA-05</a:t>
                       </a:r>
-                      <a:endParaRPr lang="en-US" sz="1600" b="0" kern="1200" dirty="0">
+                      <a:endParaRPr lang="en-US" sz="1600" b="0" kern="1200">
                         <a:solidFill>
                           <a:schemeClr val="dk1"/>
                         </a:solidFill>
@@ -19710,7 +22209,7 @@
                         </a:spcAft>
                       </a:pPr>
                       <a:r>
-                        <a:rPr lang="en-US" sz="1600" b="0" kern="1200" baseline="0" dirty="0" smtClean="0">
+                        <a:rPr lang="en-US" sz="1600" b="0" kern="1200" baseline="0" smtClean="0">
                           <a:solidFill>
                             <a:schemeClr val="dk1"/>
                           </a:solidFill>
@@ -19721,7 +22220,7 @@
                         </a:rPr>
                         <a:t>Failure in OEM Center flow or MM ECU flow</a:t>
                       </a:r>
-                      <a:endParaRPr lang="en-US" sz="1600" b="0" kern="1200" baseline="0" dirty="0">
+                      <a:endParaRPr lang="en-US" sz="1600" b="0" kern="1200" baseline="0">
                         <a:solidFill>
                           <a:schemeClr val="dk1"/>
                         </a:solidFill>
@@ -19794,7 +22293,7 @@
                         <a:defRPr/>
                       </a:pPr>
                       <a:r>
-                        <a:rPr lang="en-US" sz="1600" b="0" dirty="0" smtClean="0">
+                        <a:rPr lang="en-US" sz="1600" b="0" smtClean="0">
                           <a:effectLst/>
                           <a:latin typeface="+mn-lt"/>
                           <a:ea typeface="Malgun Gothic" panose="020B0503020000020004" pitchFamily="34" charset="-127"/>
@@ -19803,7 +22302,7 @@
                         <a:t>The other</a:t>
                       </a:r>
                       <a:r>
-                        <a:rPr lang="en-US" sz="1600" b="0" baseline="0" dirty="0" smtClean="0">
+                        <a:rPr lang="en-US" sz="1600" b="0" baseline="0" smtClean="0">
                           <a:effectLst/>
                           <a:latin typeface="+mn-lt"/>
                           <a:ea typeface="Malgun Gothic" panose="020B0503020000020004" pitchFamily="34" charset="-127"/>
@@ -19812,7 +22311,7 @@
                         <a:t> </a:t>
                       </a:r>
                       <a:r>
-                        <a:rPr lang="en-US" sz="1600" b="0" dirty="0" smtClean="0">
+                        <a:rPr lang="en-US" sz="1600" b="0" smtClean="0">
                           <a:effectLst/>
                           <a:latin typeface="+mn-lt"/>
                           <a:ea typeface="Malgun Gothic" panose="020B0503020000020004" pitchFamily="34" charset="-127"/>
@@ -19820,7 +22319,7 @@
                         </a:rPr>
                         <a:t>flow remains operational</a:t>
                       </a:r>
-                      <a:endParaRPr lang="en-US" sz="1600" b="0" dirty="0">
+                      <a:endParaRPr lang="en-US" sz="1600" b="0">
                         <a:effectLst/>
                         <a:latin typeface="+mn-lt"/>
                         <a:ea typeface="Malgun Gothic" panose="020B0503020000020004" pitchFamily="34" charset="-127"/>
@@ -19890,7 +22389,7 @@
                         <a:defRPr/>
                       </a:pPr>
                       <a:r>
-                        <a:rPr lang="en-US" sz="1600" b="0" dirty="0" smtClean="0">
+                        <a:rPr lang="en-US" sz="1600" b="0" smtClean="0">
                           <a:effectLst/>
                           <a:latin typeface="+mn-lt"/>
                           <a:ea typeface="Malgun Gothic" panose="020B0503020000020004" pitchFamily="34" charset="-127"/>
@@ -19898,7 +22397,7 @@
                         </a:rPr>
                         <a:t>Availability</a:t>
                       </a:r>
-                      <a:endParaRPr lang="en-US" sz="1600" b="0" dirty="0">
+                      <a:endParaRPr lang="en-US" sz="1600" b="0">
                         <a:effectLst/>
                         <a:latin typeface="+mn-lt"/>
                         <a:ea typeface="Malgun Gothic" panose="020B0503020000020004" pitchFamily="34" charset="-127"/>
@@ -19956,13 +22455,13 @@
                         </a:lnSpc>
                       </a:pPr>
                       <a:r>
-                        <a:rPr lang="en-US" sz="1600" b="0" dirty="0" smtClean="0">
+                        <a:rPr lang="en-US" sz="1600" b="0" smtClean="0">
                           <a:latin typeface="+mn-lt"/>
                           <a:cs typeface="Arial" panose="020B0604020202020204" pitchFamily="34" charset="0"/>
                         </a:rPr>
                         <a:t>Low</a:t>
                       </a:r>
-                      <a:endParaRPr lang="en-US" sz="1600" b="0" dirty="0">
+                      <a:endParaRPr lang="en-US" sz="1600" b="0">
                         <a:latin typeface="+mn-lt"/>
                         <a:cs typeface="Arial" panose="020B0604020202020204" pitchFamily="34" charset="0"/>
                       </a:endParaRPr>
@@ -20065,24 +22564,24 @@
           <a:lstStyle/>
           <a:p>
             <a:r>
-              <a:rPr lang="en-US" dirty="0"/>
+              <a:rPr lang="en-US"/>
               <a:t>Design Alternative </a:t>
             </a:r>
             <a:r>
-              <a:rPr lang="en-US" dirty="0" smtClean="0"/>
+              <a:rPr lang="en-US" smtClean="0"/>
               <a:t>– Alt-A: Split </a:t>
             </a:r>
             <a:r>
-              <a:rPr lang="en-US" dirty="0" err="1" smtClean="0"/>
+              <a:rPr lang="en-US" err="1" smtClean="0"/>
               <a:t>RemoteDiag</a:t>
             </a:r>
-            <a:endParaRPr lang="en-US" dirty="0"/>
+            <a:endParaRPr lang="en-US"/>
           </a:p>
         </p:txBody>
       </p:sp>
       <p:pic>
         <p:nvPicPr>
-          <p:cNvPr id="9" name="Picture 8"/>
+          <p:cNvPr id="6" name="Picture 5"/>
           <p:cNvPicPr>
             <a:picLocks noChangeAspect="1"/>
           </p:cNvPicPr>
@@ -20096,8 +22595,32 @@
         </p:blipFill>
         <p:spPr>
           <a:xfrm>
-            <a:off x="160865" y="1231900"/>
-            <a:ext cx="11916835" cy="5363355"/>
+            <a:off x="160866" y="862011"/>
+            <a:ext cx="9300004" cy="5314287"/>
+          </a:xfrm>
+          <a:prstGeom prst="rect">
+            <a:avLst/>
+          </a:prstGeom>
+        </p:spPr>
+      </p:pic>
+      <p:pic>
+        <p:nvPicPr>
+          <p:cNvPr id="7" name="Picture 6"/>
+          <p:cNvPicPr>
+            <a:picLocks noChangeAspect="1"/>
+          </p:cNvPicPr>
+          <p:nvPr/>
+        </p:nvPicPr>
+        <p:blipFill>
+          <a:blip r:embed="rId3"/>
+          <a:stretch>
+            <a:fillRect/>
+          </a:stretch>
+        </p:blipFill>
+        <p:spPr>
+          <a:xfrm>
+            <a:off x="9495078" y="3060071"/>
+            <a:ext cx="2615445" cy="2319522"/>
           </a:xfrm>
           <a:prstGeom prst="rect">
             <a:avLst/>
@@ -20141,30 +22664,6 @@
           <a:chExt cx="0" cy="0"/>
         </a:xfrm>
       </p:grpSpPr>
-      <p:pic>
-        <p:nvPicPr>
-          <p:cNvPr id="11" name="Picture 10"/>
-          <p:cNvPicPr>
-            <a:picLocks noChangeAspect="1"/>
-          </p:cNvPicPr>
-          <p:nvPr/>
-        </p:nvPicPr>
-        <p:blipFill>
-          <a:blip r:embed="rId3"/>
-          <a:stretch>
-            <a:fillRect/>
-          </a:stretch>
-        </p:blipFill>
-        <p:spPr>
-          <a:xfrm>
-            <a:off x="160866" y="1245572"/>
-            <a:ext cx="11827933" cy="5496314"/>
-          </a:xfrm>
-          <a:prstGeom prst="rect">
-            <a:avLst/>
-          </a:prstGeom>
-        </p:spPr>
-      </p:pic>
       <p:sp>
         <p:nvSpPr>
           <p:cNvPr id="2" name="Title 1"/>
@@ -20181,21 +22680,45 @@
           <a:lstStyle/>
           <a:p>
             <a:r>
-              <a:rPr lang="en-US" dirty="0"/>
+              <a:rPr lang="en-US"/>
               <a:t>Design Alternative – </a:t>
             </a:r>
             <a:r>
-              <a:rPr lang="en-US" dirty="0" smtClean="0"/>
+              <a:rPr lang="en-US" smtClean="0"/>
               <a:t>Alt-B: Move </a:t>
             </a:r>
             <a:r>
-              <a:rPr lang="en-US" dirty="0" err="1" smtClean="0"/>
+              <a:rPr lang="en-US" err="1" smtClean="0"/>
               <a:t>RemoteDiag</a:t>
             </a:r>
-            <a:endParaRPr lang="en-US" dirty="0"/>
+            <a:endParaRPr lang="en-US"/>
           </a:p>
         </p:txBody>
       </p:sp>
+      <p:pic>
+        <p:nvPicPr>
+          <p:cNvPr id="3" name="Picture 2"/>
+          <p:cNvPicPr>
+            <a:picLocks noChangeAspect="1"/>
+          </p:cNvPicPr>
+          <p:nvPr/>
+        </p:nvPicPr>
+        <p:blipFill>
+          <a:blip r:embed="rId3"/>
+          <a:stretch>
+            <a:fillRect/>
+          </a:stretch>
+        </p:blipFill>
+        <p:spPr>
+          <a:xfrm>
+            <a:off x="160867" y="862010"/>
+            <a:ext cx="11913376" cy="5424489"/>
+          </a:xfrm>
+          <a:prstGeom prst="rect">
+            <a:avLst/>
+          </a:prstGeom>
+        </p:spPr>
+      </p:pic>
     </p:spTree>
     <p:extLst>
       <p:ext uri="{BB962C8B-B14F-4D97-AF65-F5344CB8AC3E}">

--- a/design/FE_phi.vu_Design of Secure Remote Diag on Container Separation Architecture_3rd.pptx
+++ b/design/FE_phi.vu_Design of Secure Remote Diag on Container Separation Architecture_3rd.pptx
@@ -5,32 +5,26 @@
     <p:sldMasterId id="2147483648" r:id="rId1"/>
   </p:sldMasterIdLst>
   <p:notesMasterIdLst>
-    <p:notesMasterId r:id="rId25"/>
+    <p:notesMasterId r:id="rId19"/>
   </p:notesMasterIdLst>
   <p:sldIdLst>
     <p:sldId id="256" r:id="rId2"/>
     <p:sldId id="257" r:id="rId3"/>
     <p:sldId id="280" r:id="rId4"/>
-    <p:sldId id="284" r:id="rId5"/>
-    <p:sldId id="281" r:id="rId6"/>
-    <p:sldId id="262" r:id="rId7"/>
-    <p:sldId id="283" r:id="rId8"/>
-    <p:sldId id="269" r:id="rId9"/>
-    <p:sldId id="271" r:id="rId10"/>
-    <p:sldId id="287" r:id="rId11"/>
-    <p:sldId id="279" r:id="rId12"/>
-    <p:sldId id="288" r:id="rId13"/>
+    <p:sldId id="289" r:id="rId5"/>
+    <p:sldId id="262" r:id="rId6"/>
+    <p:sldId id="283" r:id="rId7"/>
+    <p:sldId id="269" r:id="rId8"/>
+    <p:sldId id="271" r:id="rId9"/>
+    <p:sldId id="287" r:id="rId10"/>
+    <p:sldId id="279" r:id="rId11"/>
+    <p:sldId id="288" r:id="rId12"/>
+    <p:sldId id="291" r:id="rId13"/>
     <p:sldId id="274" r:id="rId14"/>
     <p:sldId id="273" r:id="rId15"/>
-    <p:sldId id="278" r:id="rId16"/>
-    <p:sldId id="277" r:id="rId17"/>
-    <p:sldId id="276" r:id="rId18"/>
-    <p:sldId id="258" r:id="rId19"/>
-    <p:sldId id="259" r:id="rId20"/>
-    <p:sldId id="282" r:id="rId21"/>
-    <p:sldId id="285" r:id="rId22"/>
-    <p:sldId id="286" r:id="rId23"/>
-    <p:sldId id="272" r:id="rId24"/>
+    <p:sldId id="277" r:id="rId16"/>
+    <p:sldId id="276" r:id="rId17"/>
+    <p:sldId id="290" r:id="rId18"/>
   </p:sldIdLst>
   <p:sldSz cx="12192000" cy="6858000"/>
   <p:notesSz cx="6858000" cy="9144000"/>
@@ -131,7 +125,18 @@
   </p:defaultTextStyle>
   <p:extLst>
     <p:ext uri="{EFAFB233-063F-42B5-8137-9DF3F51BA10A}">
-      <p15:sldGuideLst xmlns:p15="http://schemas.microsoft.com/office/powerpoint/2012/main"/>
+      <p15:sldGuideLst xmlns:p15="http://schemas.microsoft.com/office/powerpoint/2012/main">
+        <p15:guide id="1" orient="horz" pos="2160" userDrawn="1">
+          <p15:clr>
+            <a:srgbClr val="A4A3A4"/>
+          </p15:clr>
+        </p15:guide>
+        <p15:guide id="2" pos="3840" userDrawn="1">
+          <p15:clr>
+            <a:srgbClr val="A4A3A4"/>
+          </p15:clr>
+        </p15:guide>
+      </p15:sldGuideLst>
     </p:ext>
   </p:extLst>
 </p:presentation>
@@ -219,7 +224,7 @@
           <a:p>
             <a:fld id="{341C17E2-92C1-406A-80C1-BA1B838099E9}" type="datetimeFigureOut">
               <a:rPr lang="en-US" smtClean="0"/>
-              <a:t>9/24/2026</a:t>
+              <a:t>9/28/2026</a:t>
             </a:fld>
             <a:endParaRPr lang="en-US"/>
           </a:p>
@@ -541,90 +546,6 @@
             <a:spLocks noGrp="1"/>
           </p:cNvSpPr>
           <p:nvPr>
-            <p:ph type="sldNum" sz="quarter" idx="10"/>
-          </p:nvPr>
-        </p:nvSpPr>
-        <p:spPr/>
-        <p:txBody>
-          <a:bodyPr/>
-          <a:lstStyle/>
-          <a:p>
-            <a:fld id="{EF277405-33BD-42BD-B604-93760E4185DC}" type="slidenum">
-              <a:rPr lang="en-US" smtClean="0"/>
-              <a:t>4</a:t>
-            </a:fld>
-            <a:endParaRPr lang="en-US"/>
-          </a:p>
-        </p:txBody>
-      </p:sp>
-    </p:spTree>
-    <p:extLst>
-      <p:ext uri="{BB962C8B-B14F-4D97-AF65-F5344CB8AC3E}">
-        <p14:creationId xmlns:p14="http://schemas.microsoft.com/office/powerpoint/2010/main" val="3449884008"/>
-      </p:ext>
-    </p:extLst>
-  </p:cSld>
-  <p:clrMapOvr>
-    <a:masterClrMapping/>
-  </p:clrMapOvr>
-</p:notes>
-</file>
-
-<file path=ppt/notesSlides/notesSlide2.xml><?xml version="1.0" encoding="utf-8"?>
-<p:notes xmlns:a="http://schemas.openxmlformats.org/drawingml/2006/main" xmlns:r="http://schemas.openxmlformats.org/officeDocument/2006/relationships" xmlns:p="http://schemas.openxmlformats.org/presentationml/2006/main">
-  <p:cSld>
-    <p:spTree>
-      <p:nvGrpSpPr>
-        <p:cNvPr id="1" name=""/>
-        <p:cNvGrpSpPr/>
-        <p:nvPr/>
-      </p:nvGrpSpPr>
-      <p:grpSpPr>
-        <a:xfrm>
-          <a:off x="0" y="0"/>
-          <a:ext cx="0" cy="0"/>
-          <a:chOff x="0" y="0"/>
-          <a:chExt cx="0" cy="0"/>
-        </a:xfrm>
-      </p:grpSpPr>
-      <p:sp>
-        <p:nvSpPr>
-          <p:cNvPr id="2" name="Slide Image Placeholder 1"/>
-          <p:cNvSpPr>
-            <a:spLocks noGrp="1" noRot="1" noChangeAspect="1"/>
-          </p:cNvSpPr>
-          <p:nvPr>
-            <p:ph type="sldImg"/>
-          </p:nvPr>
-        </p:nvSpPr>
-        <p:spPr/>
-      </p:sp>
-      <p:sp>
-        <p:nvSpPr>
-          <p:cNvPr id="3" name="Notes Placeholder 2"/>
-          <p:cNvSpPr>
-            <a:spLocks noGrp="1"/>
-          </p:cNvSpPr>
-          <p:nvPr>
-            <p:ph type="body" idx="1"/>
-          </p:nvPr>
-        </p:nvSpPr>
-        <p:spPr/>
-        <p:txBody>
-          <a:bodyPr/>
-          <a:lstStyle/>
-          <a:p>
-            <a:endParaRPr lang="en-US"/>
-          </a:p>
-        </p:txBody>
-      </p:sp>
-      <p:sp>
-        <p:nvSpPr>
-          <p:cNvPr id="4" name="Slide Number Placeholder 3"/>
-          <p:cNvSpPr>
-            <a:spLocks noGrp="1"/>
-          </p:cNvSpPr>
-          <p:nvPr>
             <p:ph type="sldNum" sz="quarter" idx="5"/>
           </p:nvPr>
         </p:nvSpPr>
@@ -635,7 +556,7 @@
           <a:p>
             <a:fld id="{EF277405-33BD-42BD-B604-93760E4185DC}" type="slidenum">
               <a:rPr lang="en-US" smtClean="0"/>
-              <a:t>7</a:t>
+              <a:t>6</a:t>
             </a:fld>
             <a:endParaRPr lang="en-US"/>
           </a:p>
@@ -654,7 +575,7 @@
 </p:notes>
 </file>
 
-<file path=ppt/notesSlides/notesSlide3.xml><?xml version="1.0" encoding="utf-8"?>
+<file path=ppt/notesSlides/notesSlide2.xml><?xml version="1.0" encoding="utf-8"?>
 <p:notes xmlns:a="http://schemas.openxmlformats.org/drawingml/2006/main" xmlns:r="http://schemas.openxmlformats.org/officeDocument/2006/relationships" xmlns:p="http://schemas.openxmlformats.org/presentationml/2006/main">
   <p:cSld>
     <p:spTree>
@@ -761,6 +682,90 @@
           <a:p>
             <a:fld id="{EF277405-33BD-42BD-B604-93760E4185DC}" type="slidenum">
               <a:rPr lang="en-US" smtClean="0"/>
+              <a:t>8</a:t>
+            </a:fld>
+            <a:endParaRPr lang="en-US"/>
+          </a:p>
+        </p:txBody>
+      </p:sp>
+    </p:spTree>
+    <p:extLst>
+      <p:ext uri="{BB962C8B-B14F-4D97-AF65-F5344CB8AC3E}">
+        <p14:creationId xmlns:p14="http://schemas.microsoft.com/office/powerpoint/2010/main" val="3809231641"/>
+      </p:ext>
+    </p:extLst>
+  </p:cSld>
+  <p:clrMapOvr>
+    <a:masterClrMapping/>
+  </p:clrMapOvr>
+</p:notes>
+</file>
+
+<file path=ppt/notesSlides/notesSlide3.xml><?xml version="1.0" encoding="utf-8"?>
+<p:notes xmlns:a="http://schemas.openxmlformats.org/drawingml/2006/main" xmlns:r="http://schemas.openxmlformats.org/officeDocument/2006/relationships" xmlns:p="http://schemas.openxmlformats.org/presentationml/2006/main">
+  <p:cSld>
+    <p:spTree>
+      <p:nvGrpSpPr>
+        <p:cNvPr id="1" name=""/>
+        <p:cNvGrpSpPr/>
+        <p:nvPr/>
+      </p:nvGrpSpPr>
+      <p:grpSpPr>
+        <a:xfrm>
+          <a:off x="0" y="0"/>
+          <a:ext cx="0" cy="0"/>
+          <a:chOff x="0" y="0"/>
+          <a:chExt cx="0" cy="0"/>
+        </a:xfrm>
+      </p:grpSpPr>
+      <p:sp>
+        <p:nvSpPr>
+          <p:cNvPr id="2" name="Slide Image Placeholder 1"/>
+          <p:cNvSpPr>
+            <a:spLocks noGrp="1" noRot="1" noChangeAspect="1"/>
+          </p:cNvSpPr>
+          <p:nvPr>
+            <p:ph type="sldImg"/>
+          </p:nvPr>
+        </p:nvSpPr>
+        <p:spPr/>
+      </p:sp>
+      <p:sp>
+        <p:nvSpPr>
+          <p:cNvPr id="3" name="Notes Placeholder 2"/>
+          <p:cNvSpPr>
+            <a:spLocks noGrp="1"/>
+          </p:cNvSpPr>
+          <p:nvPr>
+            <p:ph type="body" idx="1"/>
+          </p:nvPr>
+        </p:nvSpPr>
+        <p:spPr/>
+        <p:txBody>
+          <a:bodyPr/>
+          <a:lstStyle/>
+          <a:p>
+            <a:endParaRPr lang="en-US"/>
+          </a:p>
+        </p:txBody>
+      </p:sp>
+      <p:sp>
+        <p:nvSpPr>
+          <p:cNvPr id="4" name="Slide Number Placeholder 3"/>
+          <p:cNvSpPr>
+            <a:spLocks noGrp="1"/>
+          </p:cNvSpPr>
+          <p:nvPr>
+            <p:ph type="sldNum" sz="quarter" idx="10"/>
+          </p:nvPr>
+        </p:nvSpPr>
+        <p:spPr/>
+        <p:txBody>
+          <a:bodyPr/>
+          <a:lstStyle/>
+          <a:p>
+            <a:fld id="{EF277405-33BD-42BD-B604-93760E4185DC}" type="slidenum">
+              <a:rPr lang="en-US" smtClean="0"/>
               <a:t>9</a:t>
             </a:fld>
             <a:endParaRPr lang="en-US"/>
@@ -770,7 +775,7 @@
     </p:spTree>
     <p:extLst>
       <p:ext uri="{BB962C8B-B14F-4D97-AF65-F5344CB8AC3E}">
-        <p14:creationId xmlns:p14="http://schemas.microsoft.com/office/powerpoint/2010/main" val="3809231641"/>
+        <p14:creationId xmlns:p14="http://schemas.microsoft.com/office/powerpoint/2010/main" val="3467681225"/>
       </p:ext>
     </p:extLst>
   </p:cSld>
@@ -845,7 +850,7 @@
           <a:p>
             <a:fld id="{EF277405-33BD-42BD-B604-93760E4185DC}" type="slidenum">
               <a:rPr lang="en-US" smtClean="0"/>
-              <a:t>11</a:t>
+              <a:t>10</a:t>
             </a:fld>
             <a:endParaRPr lang="en-US"/>
           </a:p>
@@ -855,216 +860,6 @@
     <p:extLst>
       <p:ext uri="{BB962C8B-B14F-4D97-AF65-F5344CB8AC3E}">
         <p14:creationId xmlns:p14="http://schemas.microsoft.com/office/powerpoint/2010/main" val="194177539"/>
-      </p:ext>
-    </p:extLst>
-  </p:cSld>
-  <p:clrMapOvr>
-    <a:masterClrMapping/>
-  </p:clrMapOvr>
-</p:notes>
-</file>
-
-<file path=ppt/notesSlides/notesSlide5.xml><?xml version="1.0" encoding="utf-8"?>
-<p:notes xmlns:a="http://schemas.openxmlformats.org/drawingml/2006/main" xmlns:r="http://schemas.openxmlformats.org/officeDocument/2006/relationships" xmlns:p="http://schemas.openxmlformats.org/presentationml/2006/main">
-  <p:cSld>
-    <p:spTree>
-      <p:nvGrpSpPr>
-        <p:cNvPr id="1" name=""/>
-        <p:cNvGrpSpPr/>
-        <p:nvPr/>
-      </p:nvGrpSpPr>
-      <p:grpSpPr>
-        <a:xfrm>
-          <a:off x="0" y="0"/>
-          <a:ext cx="0" cy="0"/>
-          <a:chOff x="0" y="0"/>
-          <a:chExt cx="0" cy="0"/>
-        </a:xfrm>
-      </p:grpSpPr>
-      <p:sp>
-        <p:nvSpPr>
-          <p:cNvPr id="2" name="Slide Image Placeholder 1"/>
-          <p:cNvSpPr>
-            <a:spLocks noGrp="1" noRot="1" noChangeAspect="1"/>
-          </p:cNvSpPr>
-          <p:nvPr>
-            <p:ph type="sldImg"/>
-          </p:nvPr>
-        </p:nvSpPr>
-        <p:spPr/>
-      </p:sp>
-      <p:sp>
-        <p:nvSpPr>
-          <p:cNvPr id="3" name="Notes Placeholder 2"/>
-          <p:cNvSpPr>
-            <a:spLocks noGrp="1"/>
-          </p:cNvSpPr>
-          <p:nvPr>
-            <p:ph type="body" idx="1"/>
-          </p:nvPr>
-        </p:nvSpPr>
-        <p:spPr/>
-        <p:txBody>
-          <a:bodyPr/>
-          <a:lstStyle/>
-          <a:p>
-            <a:endParaRPr lang="en-US"/>
-          </a:p>
-        </p:txBody>
-      </p:sp>
-      <p:sp>
-        <p:nvSpPr>
-          <p:cNvPr id="4" name="Slide Number Placeholder 3"/>
-          <p:cNvSpPr>
-            <a:spLocks noGrp="1"/>
-          </p:cNvSpPr>
-          <p:nvPr>
-            <p:ph type="sldNum" sz="quarter" idx="10"/>
-          </p:nvPr>
-        </p:nvSpPr>
-        <p:spPr/>
-        <p:txBody>
-          <a:bodyPr/>
-          <a:lstStyle/>
-          <a:p>
-            <a:fld id="{EF277405-33BD-42BD-B604-93760E4185DC}" type="slidenum">
-              <a:rPr lang="en-US" smtClean="0"/>
-              <a:t>18</a:t>
-            </a:fld>
-            <a:endParaRPr lang="en-US"/>
-          </a:p>
-        </p:txBody>
-      </p:sp>
-    </p:spTree>
-    <p:extLst>
-      <p:ext uri="{BB962C8B-B14F-4D97-AF65-F5344CB8AC3E}">
-        <p14:creationId xmlns:p14="http://schemas.microsoft.com/office/powerpoint/2010/main" val="357080838"/>
-      </p:ext>
-    </p:extLst>
-  </p:cSld>
-  <p:clrMapOvr>
-    <a:masterClrMapping/>
-  </p:clrMapOvr>
-</p:notes>
-</file>
-
-<file path=ppt/notesSlides/notesSlide6.xml><?xml version="1.0" encoding="utf-8"?>
-<p:notes xmlns:a="http://schemas.openxmlformats.org/drawingml/2006/main" xmlns:r="http://schemas.openxmlformats.org/officeDocument/2006/relationships" xmlns:p="http://schemas.openxmlformats.org/presentationml/2006/main">
-  <p:cSld>
-    <p:spTree>
-      <p:nvGrpSpPr>
-        <p:cNvPr id="1" name=""/>
-        <p:cNvGrpSpPr/>
-        <p:nvPr/>
-      </p:nvGrpSpPr>
-      <p:grpSpPr>
-        <a:xfrm>
-          <a:off x="0" y="0"/>
-          <a:ext cx="0" cy="0"/>
-          <a:chOff x="0" y="0"/>
-          <a:chExt cx="0" cy="0"/>
-        </a:xfrm>
-      </p:grpSpPr>
-      <p:sp>
-        <p:nvSpPr>
-          <p:cNvPr id="2" name="Slide Image Placeholder 1"/>
-          <p:cNvSpPr>
-            <a:spLocks noGrp="1" noRot="1" noChangeAspect="1"/>
-          </p:cNvSpPr>
-          <p:nvPr>
-            <p:ph type="sldImg"/>
-          </p:nvPr>
-        </p:nvSpPr>
-        <p:spPr/>
-      </p:sp>
-      <p:sp>
-        <p:nvSpPr>
-          <p:cNvPr id="3" name="Notes Placeholder 2"/>
-          <p:cNvSpPr>
-            <a:spLocks noGrp="1"/>
-          </p:cNvSpPr>
-          <p:nvPr>
-            <p:ph type="body" idx="1"/>
-          </p:nvPr>
-        </p:nvSpPr>
-        <p:spPr/>
-        <p:txBody>
-          <a:bodyPr/>
-          <a:lstStyle/>
-          <a:p>
-            <a:pPr fontAlgn="t"/>
-            <a:r>
-              <a:rPr lang="en-US" sz="1200" b="1" i="0" kern="1200">
-                <a:solidFill>
-                  <a:schemeClr val="tx1"/>
-                </a:solidFill>
-                <a:effectLst/>
-                <a:latin typeface="+mn-lt"/>
-                <a:ea typeface="+mn-ea"/>
-                <a:cs typeface="+mn-cs"/>
-              </a:rPr>
-              <a:t>Trade-offs</a:t>
-            </a:r>
-          </a:p>
-          <a:p>
-            <a:pPr fontAlgn="t"/>
-            <a:r>
-              <a:rPr lang="en-US" sz="1200" b="1" i="0" kern="1200">
-                <a:solidFill>
-                  <a:schemeClr val="tx1"/>
-                </a:solidFill>
-                <a:effectLst/>
-                <a:latin typeface="+mn-lt"/>
-                <a:ea typeface="+mn-ea"/>
-                <a:cs typeface="+mn-cs"/>
-              </a:rPr>
-              <a:t>Maintainability:</a:t>
-            </a:r>
-            <a:r>
-              <a:rPr lang="en-US" sz="1200" b="0" i="0" kern="1200">
-                <a:solidFill>
-                  <a:schemeClr val="tx1"/>
-                </a:solidFill>
-                <a:effectLst/>
-                <a:latin typeface="+mn-lt"/>
-                <a:ea typeface="+mn-ea"/>
-                <a:cs typeface="+mn-cs"/>
-              </a:rPr>
-              <a:t> All EP modules require cross-container IPC support, increasing implementation effort and code-change scope.</a:t>
-            </a:r>
-          </a:p>
-          <a:p>
-            <a:endParaRPr lang="en-US"/>
-          </a:p>
-        </p:txBody>
-      </p:sp>
-      <p:sp>
-        <p:nvSpPr>
-          <p:cNvPr id="4" name="Slide Number Placeholder 3"/>
-          <p:cNvSpPr>
-            <a:spLocks noGrp="1"/>
-          </p:cNvSpPr>
-          <p:nvPr>
-            <p:ph type="sldNum" sz="quarter" idx="10"/>
-          </p:nvPr>
-        </p:nvSpPr>
-        <p:spPr/>
-        <p:txBody>
-          <a:bodyPr/>
-          <a:lstStyle/>
-          <a:p>
-            <a:fld id="{EF277405-33BD-42BD-B604-93760E4185DC}" type="slidenum">
-              <a:rPr lang="en-US" smtClean="0"/>
-              <a:t>22</a:t>
-            </a:fld>
-            <a:endParaRPr lang="en-US"/>
-          </a:p>
-        </p:txBody>
-      </p:sp>
-    </p:spTree>
-    <p:extLst>
-      <p:ext uri="{BB962C8B-B14F-4D97-AF65-F5344CB8AC3E}">
-        <p14:creationId xmlns:p14="http://schemas.microsoft.com/office/powerpoint/2010/main" val="1152848818"/>
       </p:ext>
     </p:extLst>
   </p:cSld>
@@ -1203,7 +998,7 @@
           <a:p>
             <a:fld id="{B934B22C-8C05-4817-830F-8B9F9DEAE546}" type="datetimeFigureOut">
               <a:rPr lang="en-US" smtClean="0"/>
-              <a:t>9/24/2026</a:t>
+              <a:t>9/28/2026</a:t>
             </a:fld>
             <a:endParaRPr lang="en-US"/>
           </a:p>
@@ -1371,7 +1166,7 @@
           <a:p>
             <a:fld id="{B934B22C-8C05-4817-830F-8B9F9DEAE546}" type="datetimeFigureOut">
               <a:rPr lang="en-US" smtClean="0"/>
-              <a:t>9/24/2026</a:t>
+              <a:t>9/28/2026</a:t>
             </a:fld>
             <a:endParaRPr lang="en-US"/>
           </a:p>
@@ -1549,7 +1344,7 @@
           <a:p>
             <a:fld id="{B934B22C-8C05-4817-830F-8B9F9DEAE546}" type="datetimeFigureOut">
               <a:rPr lang="en-US" smtClean="0"/>
-              <a:t>9/24/2026</a:t>
+              <a:t>9/28/2026</a:t>
             </a:fld>
             <a:endParaRPr lang="en-US"/>
           </a:p>
@@ -1743,7 +1538,7 @@
           <a:p>
             <a:fld id="{B934B22C-8C05-4817-830F-8B9F9DEAE546}" type="datetimeFigureOut">
               <a:rPr lang="en-US" smtClean="0"/>
-              <a:t>9/24/2026</a:t>
+              <a:t>9/28/2026</a:t>
             </a:fld>
             <a:endParaRPr lang="en-US"/>
           </a:p>
@@ -1796,7 +1591,7 @@
           <p:cNvPr id="7" name="그림 5" descr="백색바탕.png">
             <a:extLst>
               <a:ext uri="{FF2B5EF4-FFF2-40B4-BE49-F238E27FC236}">
-                <a16:creationId xmlns="" xmlns:a16="http://schemas.microsoft.com/office/drawing/2014/main" id="{28873918-42A2-05FA-4A84-F17869DE34CF}"/>
+                <a16:creationId xmlns:a16="http://schemas.microsoft.com/office/drawing/2014/main" xmlns="" id="{28873918-42A2-05FA-4A84-F17869DE34CF}"/>
               </a:ext>
             </a:extLst>
           </p:cNvPr>
@@ -2048,7 +1843,7 @@
           <a:p>
             <a:fld id="{B934B22C-8C05-4817-830F-8B9F9DEAE546}" type="datetimeFigureOut">
               <a:rPr lang="en-US" smtClean="0"/>
-              <a:t>9/24/2026</a:t>
+              <a:t>9/28/2026</a:t>
             </a:fld>
             <a:endParaRPr lang="en-US"/>
           </a:p>
@@ -2277,7 +2072,7 @@
           <a:p>
             <a:fld id="{B934B22C-8C05-4817-830F-8B9F9DEAE546}" type="datetimeFigureOut">
               <a:rPr lang="en-US" smtClean="0"/>
-              <a:t>9/24/2026</a:t>
+              <a:t>9/28/2026</a:t>
             </a:fld>
             <a:endParaRPr lang="en-US"/>
           </a:p>
@@ -2641,7 +2436,7 @@
           <a:p>
             <a:fld id="{B934B22C-8C05-4817-830F-8B9F9DEAE546}" type="datetimeFigureOut">
               <a:rPr lang="en-US" smtClean="0"/>
-              <a:t>9/24/2026</a:t>
+              <a:t>9/28/2026</a:t>
             </a:fld>
             <a:endParaRPr lang="en-US"/>
           </a:p>
@@ -2758,7 +2553,7 @@
           <a:p>
             <a:fld id="{B934B22C-8C05-4817-830F-8B9F9DEAE546}" type="datetimeFigureOut">
               <a:rPr lang="en-US" smtClean="0"/>
-              <a:t>9/24/2026</a:t>
+              <a:t>9/28/2026</a:t>
             </a:fld>
             <a:endParaRPr lang="en-US"/>
           </a:p>
@@ -2853,7 +2648,7 @@
           <a:p>
             <a:fld id="{B934B22C-8C05-4817-830F-8B9F9DEAE546}" type="datetimeFigureOut">
               <a:rPr lang="en-US" smtClean="0"/>
-              <a:t>9/24/2026</a:t>
+              <a:t>9/28/2026</a:t>
             </a:fld>
             <a:endParaRPr lang="en-US"/>
           </a:p>
@@ -3128,7 +2923,7 @@
           <a:p>
             <a:fld id="{B934B22C-8C05-4817-830F-8B9F9DEAE546}" type="datetimeFigureOut">
               <a:rPr lang="en-US" smtClean="0"/>
-              <a:t>9/24/2026</a:t>
+              <a:t>9/28/2026</a:t>
             </a:fld>
             <a:endParaRPr lang="en-US"/>
           </a:p>
@@ -3380,7 +3175,7 @@
           <a:p>
             <a:fld id="{B934B22C-8C05-4817-830F-8B9F9DEAE546}" type="datetimeFigureOut">
               <a:rPr lang="en-US" smtClean="0"/>
-              <a:t>9/24/2026</a:t>
+              <a:t>9/28/2026</a:t>
             </a:fld>
             <a:endParaRPr lang="en-US"/>
           </a:p>
@@ -3591,7 +3386,7 @@
           <a:p>
             <a:fld id="{B934B22C-8C05-4817-830F-8B9F9DEAE546}" type="datetimeFigureOut">
               <a:rPr lang="en-US" smtClean="0"/>
-              <a:t>9/24/2026</a:t>
+              <a:t>9/28/2026</a:t>
             </a:fld>
             <a:endParaRPr lang="en-US"/>
           </a:p>
@@ -3680,7 +3475,7 @@
           <p:cNvPr id="8" name="TextBox 7">
             <a:extLst>
               <a:ext uri="{FF2B5EF4-FFF2-40B4-BE49-F238E27FC236}">
-                <a16:creationId xmlns="" xmlns:a16="http://schemas.microsoft.com/office/drawing/2014/main" id="{7DC87BF5-B759-FAAB-FE6D-F0E5F640800D}"/>
+                <a16:creationId xmlns:a16="http://schemas.microsoft.com/office/drawing/2014/main" xmlns="" id="{7DC87BF5-B759-FAAB-FE6D-F0E5F640800D}"/>
               </a:ext>
             </a:extLst>
           </p:cNvPr>
@@ -3688,7 +3483,7 @@
           <p:nvPr userDrawn="1">
             <p:extLst>
               <p:ext uri="{1162E1C5-73C7-4A58-AE30-91384D911F3F}">
-                <p184:classification xmlns="" xmlns:p184="http://schemas.microsoft.com/office/powerpoint/2018/4/main" val="hdr"/>
+                <p184:classification xmlns:p184="http://schemas.microsoft.com/office/powerpoint/2018/4/main" xmlns="" val="hdr"/>
               </p:ext>
             </p:extLst>
           </p:nvPr>
@@ -4150,154 +3945,6 @@
   <p:cSld>
     <p:spTree>
       <p:nvGrpSpPr>
-        <p:cNvPr id="1" name="">
-          <a:extLst>
-            <a:ext uri="{FF2B5EF4-FFF2-40B4-BE49-F238E27FC236}">
-              <a16:creationId xmlns="" xmlns:a16="http://schemas.microsoft.com/office/drawing/2014/main" id="{7A3A9F39-394E-5437-993F-29D2F2093B00}"/>
-            </a:ext>
-          </a:extLst>
-        </p:cNvPr>
-        <p:cNvGrpSpPr/>
-        <p:nvPr/>
-      </p:nvGrpSpPr>
-      <p:grpSpPr>
-        <a:xfrm>
-          <a:off x="0" y="0"/>
-          <a:ext cx="0" cy="0"/>
-          <a:chOff x="0" y="0"/>
-          <a:chExt cx="0" cy="0"/>
-        </a:xfrm>
-      </p:grpSpPr>
-      <p:sp>
-        <p:nvSpPr>
-          <p:cNvPr id="2" name="Title 1">
-            <a:extLst>
-              <a:ext uri="{FF2B5EF4-FFF2-40B4-BE49-F238E27FC236}">
-                <a16:creationId xmlns="" xmlns:a16="http://schemas.microsoft.com/office/drawing/2014/main" id="{554F77EA-2B30-AFDC-1349-3C58C2AB9061}"/>
-              </a:ext>
-            </a:extLst>
-          </p:cNvPr>
-          <p:cNvSpPr>
-            <a:spLocks noGrp="1"/>
-          </p:cNvSpPr>
-          <p:nvPr>
-            <p:ph type="title"/>
-          </p:nvPr>
-        </p:nvSpPr>
-        <p:spPr/>
-        <p:txBody>
-          <a:bodyPr/>
-          <a:lstStyle/>
-          <a:p>
-            <a:r>
-              <a:rPr lang="en-US"/>
-              <a:t>Design Alternative – </a:t>
-            </a:r>
-            <a:r>
-              <a:rPr lang="en-US" smtClean="0"/>
-              <a:t>Alt-C</a:t>
-            </a:r>
-            <a:r>
-              <a:rPr lang="en-US"/>
-              <a:t>: Move </a:t>
-            </a:r>
-            <a:r>
-              <a:rPr lang="en-US" err="1" smtClean="0"/>
-              <a:t>RemoteDiag</a:t>
-            </a:r>
-            <a:r>
-              <a:rPr lang="en-US" smtClean="0"/>
-              <a:t> + </a:t>
-            </a:r>
-            <a:r>
-              <a:rPr lang="en-US" smtClean="0"/>
-              <a:t>Proxy</a:t>
-            </a:r>
-            <a:endParaRPr lang="en-US"/>
-          </a:p>
-        </p:txBody>
-      </p:sp>
-      <p:sp>
-        <p:nvSpPr>
-          <p:cNvPr id="3" name="Content Placeholder 2">
-            <a:extLst>
-              <a:ext uri="{FF2B5EF4-FFF2-40B4-BE49-F238E27FC236}">
-                <a16:creationId xmlns="" xmlns:a16="http://schemas.microsoft.com/office/drawing/2014/main" id="{64FB7A4A-CF56-C0BD-9AB9-923B2D043291}"/>
-              </a:ext>
-            </a:extLst>
-          </p:cNvPr>
-          <p:cNvSpPr>
-            <a:spLocks noGrp="1"/>
-          </p:cNvSpPr>
-          <p:nvPr>
-            <p:ph idx="1"/>
-          </p:nvPr>
-        </p:nvSpPr>
-        <p:spPr>
-          <a:xfrm>
-            <a:off x="160867" y="990600"/>
-            <a:ext cx="6817903" cy="5278168"/>
-          </a:xfrm>
-        </p:spPr>
-        <p:txBody>
-          <a:bodyPr>
-            <a:normAutofit/>
-          </a:bodyPr>
-          <a:lstStyle/>
-          <a:p>
-            <a:endParaRPr lang="en-US" sz="1800"/>
-          </a:p>
-        </p:txBody>
-      </p:sp>
-      <p:pic>
-        <p:nvPicPr>
-          <p:cNvPr id="4" name="Picture 3"/>
-          <p:cNvPicPr>
-            <a:picLocks noChangeAspect="1"/>
-          </p:cNvPicPr>
-          <p:nvPr/>
-        </p:nvPicPr>
-        <p:blipFill>
-          <a:blip r:embed="rId2"/>
-          <a:stretch>
-            <a:fillRect/>
-          </a:stretch>
-        </p:blipFill>
-        <p:spPr>
-          <a:xfrm>
-            <a:off x="70046" y="990600"/>
-            <a:ext cx="12007654" cy="5335153"/>
-          </a:xfrm>
-          <a:prstGeom prst="rect">
-            <a:avLst/>
-          </a:prstGeom>
-        </p:spPr>
-      </p:pic>
-    </p:spTree>
-    <p:extLst>
-      <p:ext uri="{BB962C8B-B14F-4D97-AF65-F5344CB8AC3E}">
-        <p14:creationId xmlns:p14="http://schemas.microsoft.com/office/powerpoint/2010/main" val="4181377362"/>
-      </p:ext>
-    </p:extLst>
-  </p:cSld>
-  <p:clrMapOvr>
-    <a:masterClrMapping/>
-  </p:clrMapOvr>
-  <p:timing>
-    <p:tnLst>
-      <p:par>
-        <p:cTn id="1" dur="indefinite" restart="never" nodeType="tmRoot"/>
-      </p:par>
-    </p:tnLst>
-  </p:timing>
-</p:sld>
-</file>
-
-<file path=ppt/slides/slide11.xml><?xml version="1.0" encoding="utf-8"?>
-<p:sld xmlns:a="http://schemas.openxmlformats.org/drawingml/2006/main" xmlns:r="http://schemas.openxmlformats.org/officeDocument/2006/relationships" xmlns:p="http://schemas.openxmlformats.org/presentationml/2006/main">
-  <p:cSld>
-    <p:spTree>
-      <p:nvGrpSpPr>
         <p:cNvPr id="1" name=""/>
         <p:cNvGrpSpPr/>
         <p:nvPr/>
@@ -4368,28 +4015,28 @@
                 <a:gridCol w="1630147">
                   <a:extLst>
                     <a:ext uri="{9D8B030D-6E8A-4147-A177-3AD203B41FA5}">
-                      <a16:colId xmlns="" xmlns:a16="http://schemas.microsoft.com/office/drawing/2014/main" val="20000"/>
+                      <a16:colId xmlns:a16="http://schemas.microsoft.com/office/drawing/2014/main" xmlns="" val="20000"/>
                     </a:ext>
                   </a:extLst>
                 </a:gridCol>
                 <a:gridCol w="3619436">
                   <a:extLst>
                     <a:ext uri="{9D8B030D-6E8A-4147-A177-3AD203B41FA5}">
-                      <a16:colId xmlns="" xmlns:a16="http://schemas.microsoft.com/office/drawing/2014/main" val="20001"/>
+                      <a16:colId xmlns:a16="http://schemas.microsoft.com/office/drawing/2014/main" xmlns="" val="20001"/>
                     </a:ext>
                   </a:extLst>
                 </a:gridCol>
                 <a:gridCol w="3279774">
                   <a:extLst>
                     <a:ext uri="{9D8B030D-6E8A-4147-A177-3AD203B41FA5}">
-                      <a16:colId xmlns="" xmlns:a16="http://schemas.microsoft.com/office/drawing/2014/main" val="20002"/>
+                      <a16:colId xmlns:a16="http://schemas.microsoft.com/office/drawing/2014/main" xmlns="" val="20002"/>
                     </a:ext>
                   </a:extLst>
                 </a:gridCol>
                 <a:gridCol w="3490332">
                   <a:extLst>
                     <a:ext uri="{9D8B030D-6E8A-4147-A177-3AD203B41FA5}">
-                      <a16:colId xmlns="" xmlns:a16="http://schemas.microsoft.com/office/drawing/2014/main" val="20003"/>
+                      <a16:colId xmlns:a16="http://schemas.microsoft.com/office/drawing/2014/main" xmlns="" val="20003"/>
                     </a:ext>
                   </a:extLst>
                 </a:gridCol>
@@ -4474,7 +4121,7 @@
                 </a:tc>
                 <a:extLst>
                   <a:ext uri="{0D108BD9-81ED-4DB2-BD59-A6C34878D82A}">
-                    <a16:rowId xmlns="" xmlns:a16="http://schemas.microsoft.com/office/drawing/2014/main" val="10000"/>
+                    <a16:rowId xmlns:a16="http://schemas.microsoft.com/office/drawing/2014/main" xmlns="" val="10000"/>
                   </a:ext>
                 </a:extLst>
               </a:tr>
@@ -4646,7 +4293,7 @@
                 </a:tc>
                 <a:extLst>
                   <a:ext uri="{0D108BD9-81ED-4DB2-BD59-A6C34878D82A}">
-                    <a16:rowId xmlns="" xmlns:a16="http://schemas.microsoft.com/office/drawing/2014/main" val="10001"/>
+                    <a16:rowId xmlns:a16="http://schemas.microsoft.com/office/drawing/2014/main" xmlns="" val="10001"/>
                   </a:ext>
                 </a:extLst>
               </a:tr>
@@ -4890,7 +4537,7 @@
                 </a:tc>
                 <a:extLst>
                   <a:ext uri="{0D108BD9-81ED-4DB2-BD59-A6C34878D82A}">
-                    <a16:rowId xmlns="" xmlns:a16="http://schemas.microsoft.com/office/drawing/2014/main" val="2845297163"/>
+                    <a16:rowId xmlns:a16="http://schemas.microsoft.com/office/drawing/2014/main" xmlns="" val="2845297163"/>
                   </a:ext>
                 </a:extLst>
               </a:tr>
@@ -4906,8 +4553,8 @@
         </p:nvSpPr>
         <p:spPr>
           <a:xfrm>
-            <a:off x="160866" y="6258135"/>
-            <a:ext cx="11871189" cy="430887"/>
+            <a:off x="160866" y="5932081"/>
+            <a:ext cx="3439584" cy="492443"/>
           </a:xfrm>
           <a:prstGeom prst="rect">
             <a:avLst/>
@@ -4925,11 +4572,11 @@
               <a:buChar char="ü"/>
             </a:pPr>
             <a:r>
-              <a:rPr lang="en-US" sz="2200" b="1"/>
+              <a:rPr lang="en-US" sz="2600" b="1"/>
               <a:t>Final decision: </a:t>
             </a:r>
             <a:r>
-              <a:rPr lang="en-US" sz="2200" b="1">
+              <a:rPr lang="en-US" sz="2600" b="1">
                 <a:solidFill>
                   <a:srgbClr val="00B050"/>
                 </a:solidFill>
@@ -4944,7 +4591,7 @@
           <p:cNvPr id="7" name="Table 6">
             <a:extLst>
               <a:ext uri="{FF2B5EF4-FFF2-40B4-BE49-F238E27FC236}">
-                <a16:creationId xmlns="" xmlns:a16="http://schemas.microsoft.com/office/drawing/2014/main" id="{6C8AAA51-C203-CD8B-4B02-DE7401134C21}"/>
+                <a16:creationId xmlns:a16="http://schemas.microsoft.com/office/drawing/2014/main" xmlns="" id="{6C8AAA51-C203-CD8B-4B02-DE7401134C21}"/>
               </a:ext>
             </a:extLst>
           </p:cNvPr>
@@ -4954,14 +4601,14 @@
           <p:nvPr>
             <p:extLst>
               <p:ext uri="{D42A27DB-BD31-4B8C-83A1-F6EECF244321}">
-                <p14:modId xmlns:p14="http://schemas.microsoft.com/office/powerpoint/2010/main" val="1319929839"/>
+                <p14:modId xmlns:p14="http://schemas.microsoft.com/office/powerpoint/2010/main" val="1223815471"/>
               </p:ext>
             </p:extLst>
           </p:nvPr>
         </p:nvGraphicFramePr>
         <p:xfrm>
           <a:off x="72428" y="616718"/>
-          <a:ext cx="12050161" cy="5471280"/>
+          <a:ext cx="12050161" cy="5029320"/>
         </p:xfrm>
         <a:graphic>
           <a:graphicData uri="http://schemas.openxmlformats.org/drawingml/2006/table">
@@ -4973,28 +4620,28 @@
                 <a:gridCol w="1149790">
                   <a:extLst>
                     <a:ext uri="{9D8B030D-6E8A-4147-A177-3AD203B41FA5}">
-                      <a16:colId xmlns="" xmlns:a16="http://schemas.microsoft.com/office/drawing/2014/main" val="20000"/>
+                      <a16:colId xmlns:a16="http://schemas.microsoft.com/office/drawing/2014/main" xmlns="" val="20000"/>
                     </a:ext>
                   </a:extLst>
                 </a:gridCol>
                 <a:gridCol w="3633457">
                   <a:extLst>
                     <a:ext uri="{9D8B030D-6E8A-4147-A177-3AD203B41FA5}">
-                      <a16:colId xmlns="" xmlns:a16="http://schemas.microsoft.com/office/drawing/2014/main" val="20001"/>
+                      <a16:colId xmlns:a16="http://schemas.microsoft.com/office/drawing/2014/main" xmlns="" val="20001"/>
                     </a:ext>
                   </a:extLst>
                 </a:gridCol>
                 <a:gridCol w="3781331">
                   <a:extLst>
                     <a:ext uri="{9D8B030D-6E8A-4147-A177-3AD203B41FA5}">
-                      <a16:colId xmlns="" xmlns:a16="http://schemas.microsoft.com/office/drawing/2014/main" val="2530683369"/>
+                      <a16:colId xmlns:a16="http://schemas.microsoft.com/office/drawing/2014/main" xmlns="" val="2530683369"/>
                     </a:ext>
                   </a:extLst>
                 </a:gridCol>
                 <a:gridCol w="3485583">
                   <a:extLst>
                     <a:ext uri="{9D8B030D-6E8A-4147-A177-3AD203B41FA5}">
-                      <a16:colId xmlns="" xmlns:a16="http://schemas.microsoft.com/office/drawing/2014/main" val="20002"/>
+                      <a16:colId xmlns:a16="http://schemas.microsoft.com/office/drawing/2014/main" xmlns="" val="20002"/>
                     </a:ext>
                   </a:extLst>
                 </a:gridCol>
@@ -5282,15 +4929,7 @@
                           <a:latin typeface="+mn-lt"/>
                           <a:cs typeface="Arial" panose="020B0604020202020204" pitchFamily="34" charset="0"/>
                         </a:rPr>
-                        <a:t> + </a:t>
-                      </a:r>
-                      <a:r>
-                        <a:rPr lang="en-US" sz="1200" b="0" smtClean="0">
-                          <a:effectLst/>
-                          <a:latin typeface="+mn-lt"/>
-                          <a:cs typeface="Arial" panose="020B0604020202020204" pitchFamily="34" charset="0"/>
-                        </a:rPr>
-                        <a:t>Proxy</a:t>
+                        <a:t> + Proxy</a:t>
                       </a:r>
                       <a:endParaRPr lang="en-US" sz="1200" b="0">
                         <a:effectLst/>
@@ -5341,7 +4980,7 @@
                 </a:tc>
                 <a:extLst>
                   <a:ext uri="{0D108BD9-81ED-4DB2-BD59-A6C34878D82A}">
-                    <a16:rowId xmlns="" xmlns:a16="http://schemas.microsoft.com/office/drawing/2014/main" val="10000"/>
+                    <a16:rowId xmlns:a16="http://schemas.microsoft.com/office/drawing/2014/main" xmlns="" val="10000"/>
                   </a:ext>
                 </a:extLst>
               </a:tr>
@@ -5353,7 +4992,7 @@
                     <a:p>
                       <a:pPr algn="ctr" latinLnBrk="0">
                         <a:lnSpc>
-                          <a:spcPct val="130000"/>
+                          <a:spcPct val="110000"/>
                         </a:lnSpc>
                       </a:pPr>
                       <a:r>
@@ -5372,7 +5011,7 @@
                     <a:p>
                       <a:pPr algn="ctr" latinLnBrk="0">
                         <a:lnSpc>
-                          <a:spcPct val="130000"/>
+                          <a:spcPct val="110000"/>
                         </a:lnSpc>
                       </a:pPr>
                       <a:r>
@@ -5398,7 +5037,7 @@
                       </a:endParaRPr>
                     </a:p>
                   </a:txBody>
-                  <a:tcPr marL="106700" marR="106700" marT="53350" marB="53350">
+                  <a:tcPr marL="106700" marR="106700" marT="53350" marB="53350" anchor="ctr">
                     <a:lnL w="12700" cap="flat" cmpd="sng" algn="ctr">
                       <a:solidFill>
                         <a:schemeClr val="tx1"/>
@@ -5444,7 +5083,7 @@
                     <a:p>
                       <a:pPr marL="0" marR="0" indent="0" algn="l">
                         <a:lnSpc>
-                          <a:spcPct val="130000"/>
+                          <a:spcPct val="110000"/>
                         </a:lnSpc>
                         <a:spcBef>
                           <a:spcPts val="200"/>
@@ -5456,14 +5095,14 @@
                         <a:buNone/>
                       </a:pPr>
                       <a:r>
-                        <a:rPr lang="en-US" sz="1200" b="1" smtClean="0">
+                        <a:rPr lang="en-US" sz="1300" b="1" smtClean="0">
                           <a:solidFill>
                             <a:srgbClr val="00B050"/>
                           </a:solidFill>
                         </a:rPr>
                         <a:t>High</a:t>
                       </a:r>
-                      <a:endParaRPr lang="en-US" sz="1200" b="0" smtClean="0">
+                      <a:endParaRPr lang="en-US" sz="1300" b="0" smtClean="0">
                         <a:solidFill>
                           <a:schemeClr val="tx1"/>
                         </a:solidFill>
@@ -5472,7 +5111,7 @@
                     <a:p>
                       <a:pPr marL="0" marR="0" indent="0" algn="l">
                         <a:lnSpc>
-                          <a:spcPct val="130000"/>
+                          <a:spcPct val="110000"/>
                         </a:lnSpc>
                         <a:spcBef>
                           <a:spcPts val="200"/>
@@ -5484,7 +5123,7 @@
                         <a:buNone/>
                       </a:pPr>
                       <a:r>
-                        <a:rPr lang="en-US" sz="1200" b="0" smtClean="0">
+                        <a:rPr lang="en-US" sz="1300" b="0" smtClean="0">
                           <a:solidFill>
                             <a:schemeClr val="tx1"/>
                           </a:solidFill>
@@ -5492,14 +5131,30 @@
                         <a:t>Unauthorized diagnostic commands are</a:t>
                       </a:r>
                       <a:r>
-                        <a:rPr lang="en-US" sz="1200" b="0" baseline="0" smtClean="0">
+                        <a:rPr lang="en-US" sz="1300" b="0" baseline="0" smtClean="0">
                           <a:solidFill>
                             <a:schemeClr val="tx1"/>
                           </a:solidFill>
                         </a:rPr>
-                        <a:t> filtered.</a:t>
+                        <a:t> </a:t>
                       </a:r>
-                      <a:endParaRPr lang="en-US" sz="1200" b="0" smtClean="0">
+                      <a:r>
+                        <a:rPr lang="en-US" sz="1300" b="1" baseline="0" smtClean="0">
+                          <a:solidFill>
+                            <a:schemeClr val="tx1"/>
+                          </a:solidFill>
+                        </a:rPr>
+                        <a:t>filtered</a:t>
+                      </a:r>
+                      <a:r>
+                        <a:rPr lang="en-US" sz="1300" b="0" baseline="0" smtClean="0">
+                          <a:solidFill>
+                            <a:schemeClr val="tx1"/>
+                          </a:solidFill>
+                        </a:rPr>
+                        <a:t>.</a:t>
+                      </a:r>
+                      <a:endParaRPr lang="en-US" sz="1300" b="0" smtClean="0">
                         <a:solidFill>
                           <a:schemeClr val="tx1"/>
                         </a:solidFill>
@@ -5552,7 +5207,7 @@
                     <a:p>
                       <a:pPr marL="0" marR="0" lvl="0" indent="0" algn="l" defTabSz="914400" rtl="0" eaLnBrk="1" fontAlgn="auto" latinLnBrk="0" hangingPunct="1">
                         <a:lnSpc>
-                          <a:spcPct val="130000"/>
+                          <a:spcPct val="110000"/>
                         </a:lnSpc>
                         <a:spcBef>
                           <a:spcPts val="0"/>
@@ -5568,14 +5223,14 @@
                         <a:defRPr/>
                       </a:pPr>
                       <a:r>
-                        <a:rPr lang="en-US" sz="1200" b="1" smtClean="0">
+                        <a:rPr lang="en-US" sz="1300" b="1" smtClean="0">
                           <a:solidFill>
                             <a:srgbClr val="00B050"/>
                           </a:solidFill>
                         </a:rPr>
                         <a:t>High</a:t>
                       </a:r>
-                      <a:endParaRPr lang="en-US" sz="1200" b="0" smtClean="0">
+                      <a:endParaRPr lang="en-US" sz="1300" b="0" smtClean="0">
                         <a:solidFill>
                           <a:schemeClr val="tx1"/>
                         </a:solidFill>
@@ -5584,7 +5239,7 @@
                     <a:p>
                       <a:pPr marL="0" marR="0" lvl="0" indent="0" algn="l" defTabSz="914400" rtl="0" eaLnBrk="1" fontAlgn="auto" latinLnBrk="0" hangingPunct="1">
                         <a:lnSpc>
-                          <a:spcPct val="130000"/>
+                          <a:spcPct val="110000"/>
                         </a:lnSpc>
                         <a:spcBef>
                           <a:spcPts val="0"/>
@@ -5600,12 +5255,28 @@
                         <a:defRPr/>
                       </a:pPr>
                       <a:r>
-                        <a:rPr lang="en-US" sz="1200" b="0" smtClean="0">
+                        <a:rPr lang="en-US" sz="1300" b="0" smtClean="0">
                           <a:solidFill>
                             <a:schemeClr val="tx1"/>
                           </a:solidFill>
                         </a:rPr>
-                        <a:t>Unauthorized diagnostic commands are filtered.</a:t>
+                        <a:t>Unauthorized diagnostic commands are </a:t>
+                      </a:r>
+                      <a:r>
+                        <a:rPr lang="en-US" sz="1300" b="1" smtClean="0">
+                          <a:solidFill>
+                            <a:schemeClr val="tx1"/>
+                          </a:solidFill>
+                        </a:rPr>
+                        <a:t>filtered</a:t>
+                      </a:r>
+                      <a:r>
+                        <a:rPr lang="en-US" sz="1300" b="0" smtClean="0">
+                          <a:solidFill>
+                            <a:schemeClr val="tx1"/>
+                          </a:solidFill>
+                        </a:rPr>
+                        <a:t>.</a:t>
                       </a:r>
                     </a:p>
                   </a:txBody>
@@ -5655,7 +5326,7 @@
                     <a:p>
                       <a:pPr marL="0" marR="0" indent="0" algn="l" defTabSz="914400" rtl="0" eaLnBrk="1" fontAlgn="auto" latinLnBrk="0" hangingPunct="1">
                         <a:lnSpc>
-                          <a:spcPct val="130000"/>
+                          <a:spcPct val="110000"/>
                         </a:lnSpc>
                         <a:spcBef>
                           <a:spcPts val="0"/>
@@ -5671,14 +5342,14 @@
                         <a:defRPr/>
                       </a:pPr>
                       <a:r>
-                        <a:rPr lang="en-US" sz="1200" b="1" smtClean="0">
+                        <a:rPr lang="en-US" sz="1300" b="1" smtClean="0">
                           <a:solidFill>
                             <a:srgbClr val="00B050"/>
                           </a:solidFill>
                         </a:rPr>
                         <a:t>High</a:t>
                       </a:r>
-                      <a:endParaRPr lang="en-US" sz="1200" b="0" smtClean="0">
+                      <a:endParaRPr lang="en-US" sz="1300" b="0" smtClean="0">
                         <a:solidFill>
                           <a:schemeClr val="tx1"/>
                         </a:solidFill>
@@ -5687,7 +5358,7 @@
                     <a:p>
                       <a:pPr marL="0" marR="0" indent="0" algn="l" defTabSz="914400" rtl="0" eaLnBrk="1" fontAlgn="auto" latinLnBrk="0" hangingPunct="1">
                         <a:lnSpc>
-                          <a:spcPct val="130000"/>
+                          <a:spcPct val="110000"/>
                         </a:lnSpc>
                         <a:spcBef>
                           <a:spcPts val="0"/>
@@ -5703,12 +5374,28 @@
                         <a:defRPr/>
                       </a:pPr>
                       <a:r>
-                        <a:rPr lang="en-US" sz="1200" b="0" smtClean="0">
+                        <a:rPr lang="en-US" sz="1300" b="0" smtClean="0">
                           <a:solidFill>
                             <a:schemeClr val="tx1"/>
                           </a:solidFill>
                         </a:rPr>
-                        <a:t>Unauthorized diagnostic commands are filtered.</a:t>
+                        <a:t>Unauthorized diagnostic commands are </a:t>
+                      </a:r>
+                      <a:r>
+                        <a:rPr lang="en-US" sz="1300" b="1" smtClean="0">
+                          <a:solidFill>
+                            <a:schemeClr val="tx1"/>
+                          </a:solidFill>
+                        </a:rPr>
+                        <a:t>filtered</a:t>
+                      </a:r>
+                      <a:r>
+                        <a:rPr lang="en-US" sz="1300" b="0" smtClean="0">
+                          <a:solidFill>
+                            <a:schemeClr val="tx1"/>
+                          </a:solidFill>
+                        </a:rPr>
+                        <a:t>.</a:t>
                       </a:r>
                     </a:p>
                   </a:txBody>
@@ -5753,7 +5440,7 @@
                 </a:tc>
                 <a:extLst>
                   <a:ext uri="{0D108BD9-81ED-4DB2-BD59-A6C34878D82A}">
-                    <a16:rowId xmlns="" xmlns:a16="http://schemas.microsoft.com/office/drawing/2014/main" val="10001"/>
+                    <a16:rowId xmlns:a16="http://schemas.microsoft.com/office/drawing/2014/main" xmlns="" val="10001"/>
                   </a:ext>
                 </a:extLst>
               </a:tr>
@@ -5765,7 +5452,7 @@
                     <a:p>
                       <a:pPr algn="ctr" latinLnBrk="0">
                         <a:lnSpc>
-                          <a:spcPct val="130000"/>
+                          <a:spcPct val="110000"/>
                         </a:lnSpc>
                       </a:pPr>
                       <a:r>
@@ -5784,7 +5471,7 @@
                     <a:p>
                       <a:pPr algn="ctr" latinLnBrk="0">
                         <a:lnSpc>
-                          <a:spcPct val="130000"/>
+                          <a:spcPct val="110000"/>
                         </a:lnSpc>
                       </a:pPr>
                       <a:r>
@@ -5810,7 +5497,7 @@
                       </a:endParaRPr>
                     </a:p>
                   </a:txBody>
-                  <a:tcPr marL="106700" marR="106700" marT="53350" marB="53350">
+                  <a:tcPr marL="106700" marR="106700" marT="53350" marB="53350" anchor="ctr">
                     <a:lnL w="12700" cap="flat" cmpd="sng" algn="ctr">
                       <a:solidFill>
                         <a:schemeClr val="tx1"/>
@@ -5856,7 +5543,7 @@
                     <a:p>
                       <a:pPr marL="0" marR="0" indent="0" algn="l">
                         <a:lnSpc>
-                          <a:spcPct val="130000"/>
+                          <a:spcPct val="110000"/>
                         </a:lnSpc>
                         <a:spcBef>
                           <a:spcPts val="200"/>
@@ -5868,14 +5555,14 @@
                         <a:buNone/>
                       </a:pPr>
                       <a:r>
-                        <a:rPr lang="en-US" sz="1200" b="1" smtClean="0">
+                        <a:rPr lang="en-US" sz="1300" b="1" smtClean="0">
                           <a:solidFill>
                             <a:srgbClr val="00B050"/>
                           </a:solidFill>
                         </a:rPr>
                         <a:t>High</a:t>
                       </a:r>
-                      <a:endParaRPr lang="en-US" sz="1200" b="0" kern="1200" baseline="0" smtClean="0">
+                      <a:endParaRPr lang="en-US" sz="1300" b="0" kern="1200" baseline="0" smtClean="0">
                         <a:solidFill>
                           <a:schemeClr val="dk1"/>
                         </a:solidFill>
@@ -5888,7 +5575,7 @@
                     <a:p>
                       <a:pPr marL="0" marR="0" indent="0" algn="l">
                         <a:lnSpc>
-                          <a:spcPct val="130000"/>
+                          <a:spcPct val="110000"/>
                         </a:lnSpc>
                         <a:spcBef>
                           <a:spcPts val="200"/>
@@ -5900,7 +5587,7 @@
                         <a:buNone/>
                       </a:pPr>
                       <a:r>
-                        <a:rPr lang="en-US" sz="1200" b="0" kern="1200" baseline="0" smtClean="0">
+                        <a:rPr lang="en-US" sz="1300" b="0" kern="1200" baseline="0" smtClean="0">
                           <a:solidFill>
                             <a:schemeClr val="dk1"/>
                           </a:solidFill>
@@ -5909,9 +5596,33 @@
                           <a:ea typeface="+mn-ea"/>
                           <a:cs typeface="Arial" panose="020B0604020202020204" pitchFamily="34" charset="0"/>
                         </a:rPr>
-                        <a:t>MM ECU diagnostic traffic remains within the EP container.</a:t>
+                        <a:t>MM ECU diagnostic traffic remains </a:t>
                       </a:r>
-                      <a:endParaRPr lang="en-US" sz="1200" b="0" kern="1200" baseline="0">
+                      <a:r>
+                        <a:rPr lang="en-US" sz="1300" b="1" kern="1200" baseline="0" smtClean="0">
+                          <a:solidFill>
+                            <a:schemeClr val="dk1"/>
+                          </a:solidFill>
+                          <a:effectLst/>
+                          <a:latin typeface="+mn-lt"/>
+                          <a:ea typeface="+mn-ea"/>
+                          <a:cs typeface="Arial" panose="020B0604020202020204" pitchFamily="34" charset="0"/>
+                        </a:rPr>
+                        <a:t>within the EP container</a:t>
+                      </a:r>
+                      <a:r>
+                        <a:rPr lang="en-US" sz="1300" b="0" kern="1200" baseline="0" smtClean="0">
+                          <a:solidFill>
+                            <a:schemeClr val="dk1"/>
+                          </a:solidFill>
+                          <a:effectLst/>
+                          <a:latin typeface="+mn-lt"/>
+                          <a:ea typeface="+mn-ea"/>
+                          <a:cs typeface="Arial" panose="020B0604020202020204" pitchFamily="34" charset="0"/>
+                        </a:rPr>
+                        <a:t>.</a:t>
+                      </a:r>
+                      <a:endParaRPr lang="en-US" sz="1300" b="0" kern="1200" baseline="0">
                         <a:solidFill>
                           <a:schemeClr val="dk1"/>
                         </a:solidFill>
@@ -5968,11 +5679,11 @@
                     <a:p>
                       <a:pPr algn="l" latinLnBrk="0">
                         <a:lnSpc>
-                          <a:spcPct val="130000"/>
+                          <a:spcPct val="110000"/>
                         </a:lnSpc>
                       </a:pPr>
                       <a:r>
-                        <a:rPr lang="en-US" sz="1200" b="1" smtClean="0">
+                        <a:rPr lang="en-US" sz="1300" b="1" smtClean="0">
                           <a:solidFill>
                             <a:srgbClr val="00B050"/>
                           </a:solidFill>
@@ -5983,7 +5694,7 @@
                     <a:p>
                       <a:pPr marL="0" marR="0" indent="0" algn="l">
                         <a:lnSpc>
-                          <a:spcPct val="130000"/>
+                          <a:spcPct val="110000"/>
                         </a:lnSpc>
                         <a:spcBef>
                           <a:spcPts val="200"/>
@@ -5995,7 +5706,7 @@
                         <a:buNone/>
                       </a:pPr>
                       <a:r>
-                        <a:rPr lang="en-US" sz="1200" b="0" kern="1200" baseline="0" smtClean="0">
+                        <a:rPr lang="en-US" sz="1300" b="0" kern="1200" baseline="0" smtClean="0">
                           <a:solidFill>
                             <a:schemeClr val="dk1"/>
                           </a:solidFill>
@@ -6004,9 +5715,33 @@
                           <a:ea typeface="+mn-ea"/>
                           <a:cs typeface="Arial" panose="020B0604020202020204" pitchFamily="34" charset="0"/>
                         </a:rPr>
-                        <a:t>MM ECU diagnostic traffic remains within the EP container.</a:t>
+                        <a:t>MM ECU diagnostic traffic remains </a:t>
                       </a:r>
-                      <a:endParaRPr lang="en-US" sz="1200" b="0" kern="1200" baseline="0">
+                      <a:r>
+                        <a:rPr lang="en-US" sz="1300" b="1" kern="1200" baseline="0" smtClean="0">
+                          <a:solidFill>
+                            <a:schemeClr val="dk1"/>
+                          </a:solidFill>
+                          <a:effectLst/>
+                          <a:latin typeface="+mn-lt"/>
+                          <a:ea typeface="+mn-ea"/>
+                          <a:cs typeface="Arial" panose="020B0604020202020204" pitchFamily="34" charset="0"/>
+                        </a:rPr>
+                        <a:t>within the EP container</a:t>
+                      </a:r>
+                      <a:r>
+                        <a:rPr lang="en-US" sz="1300" b="0" kern="1200" baseline="0" smtClean="0">
+                          <a:solidFill>
+                            <a:schemeClr val="dk1"/>
+                          </a:solidFill>
+                          <a:effectLst/>
+                          <a:latin typeface="+mn-lt"/>
+                          <a:ea typeface="+mn-ea"/>
+                          <a:cs typeface="Arial" panose="020B0604020202020204" pitchFamily="34" charset="0"/>
+                        </a:rPr>
+                        <a:t>.</a:t>
+                      </a:r>
+                      <a:endParaRPr lang="en-US" sz="1300" b="0" kern="1200" baseline="0">
                         <a:solidFill>
                           <a:schemeClr val="dk1"/>
                         </a:solidFill>
@@ -6063,11 +5798,11 @@
                     <a:p>
                       <a:pPr algn="l" latinLnBrk="0">
                         <a:lnSpc>
-                          <a:spcPct val="130000"/>
+                          <a:spcPct val="110000"/>
                         </a:lnSpc>
                       </a:pPr>
                       <a:r>
-                        <a:rPr lang="en-US" sz="1200" b="1" smtClean="0">
+                        <a:rPr lang="en-US" sz="1300" b="1" smtClean="0">
                           <a:solidFill>
                             <a:srgbClr val="00B050"/>
                           </a:solidFill>
@@ -6078,7 +5813,7 @@
                     <a:p>
                       <a:pPr marL="0" marR="0" indent="0" algn="l">
                         <a:lnSpc>
-                          <a:spcPct val="130000"/>
+                          <a:spcPct val="110000"/>
                         </a:lnSpc>
                         <a:spcBef>
                           <a:spcPts val="200"/>
@@ -6090,7 +5825,7 @@
                         <a:buNone/>
                       </a:pPr>
                       <a:r>
-                        <a:rPr lang="en-US" sz="1200" b="0" kern="1200" baseline="0" smtClean="0">
+                        <a:rPr lang="en-US" sz="1300" b="0" kern="1200" baseline="0" smtClean="0">
                           <a:solidFill>
                             <a:schemeClr val="dk1"/>
                           </a:solidFill>
@@ -6099,9 +5834,21 @@
                           <a:ea typeface="+mn-ea"/>
                           <a:cs typeface="Arial" panose="020B0604020202020204" pitchFamily="34" charset="0"/>
                         </a:rPr>
-                        <a:t>MM ECU diagnostic traffic remains within the EP container.</a:t>
+                        <a:t>MM ECU diagnostic traffic remains </a:t>
                       </a:r>
-                      <a:endParaRPr lang="en-US" sz="1200" b="0" kern="1200" baseline="0">
+                      <a:r>
+                        <a:rPr lang="en-US" sz="1300" b="1" kern="1200" baseline="0" smtClean="0">
+                          <a:solidFill>
+                            <a:schemeClr val="dk1"/>
+                          </a:solidFill>
+                          <a:effectLst/>
+                          <a:latin typeface="+mn-lt"/>
+                          <a:ea typeface="+mn-ea"/>
+                          <a:cs typeface="Arial" panose="020B0604020202020204" pitchFamily="34" charset="0"/>
+                        </a:rPr>
+                        <a:t>within the EP container.</a:t>
+                      </a:r>
+                      <a:endParaRPr lang="en-US" sz="1300" b="1" kern="1200" baseline="0">
                         <a:solidFill>
                           <a:schemeClr val="dk1"/>
                         </a:solidFill>
@@ -6153,7 +5900,7 @@
                 </a:tc>
                 <a:extLst>
                   <a:ext uri="{0D108BD9-81ED-4DB2-BD59-A6C34878D82A}">
-                    <a16:rowId xmlns="" xmlns:a16="http://schemas.microsoft.com/office/drawing/2014/main" val="10002"/>
+                    <a16:rowId xmlns:a16="http://schemas.microsoft.com/office/drawing/2014/main" xmlns="" val="10002"/>
                   </a:ext>
                 </a:extLst>
               </a:tr>
@@ -6165,7 +5912,7 @@
                     <a:p>
                       <a:pPr algn="ctr" latinLnBrk="0">
                         <a:lnSpc>
-                          <a:spcPct val="130000"/>
+                          <a:spcPct val="110000"/>
                         </a:lnSpc>
                       </a:pPr>
                       <a:r>
@@ -6184,7 +5931,7 @@
                     <a:p>
                       <a:pPr algn="ctr" latinLnBrk="0">
                         <a:lnSpc>
-                          <a:spcPct val="130000"/>
+                          <a:spcPct val="110000"/>
                         </a:lnSpc>
                       </a:pPr>
                       <a:r>
@@ -6256,7 +6003,7 @@
                     <a:p>
                       <a:pPr marL="0" marR="0" algn="l">
                         <a:lnSpc>
-                          <a:spcPct val="130000"/>
+                          <a:spcPct val="110000"/>
                         </a:lnSpc>
                         <a:spcBef>
                           <a:spcPts val="200"/>
@@ -6266,14 +6013,14 @@
                         </a:spcAft>
                       </a:pPr>
                       <a:r>
-                        <a:rPr lang="en-US" sz="1200" b="1" smtClean="0">
+                        <a:rPr lang="en-US" sz="1300" b="1" smtClean="0">
                           <a:solidFill>
                             <a:srgbClr val="FF0000"/>
                           </a:solidFill>
                         </a:rPr>
                         <a:t>Low</a:t>
                       </a:r>
-                      <a:endParaRPr lang="en-US" sz="1200" b="1" kern="1200" baseline="0" smtClean="0">
+                      <a:endParaRPr lang="en-US" sz="1300" b="1" kern="1200" baseline="0" smtClean="0">
                         <a:solidFill>
                           <a:schemeClr val="dk1"/>
                         </a:solidFill>
@@ -6286,7 +6033,7 @@
                     <a:p>
                       <a:pPr marL="0" marR="0" algn="l">
                         <a:lnSpc>
-                          <a:spcPct val="130000"/>
+                          <a:spcPct val="110000"/>
                         </a:lnSpc>
                         <a:spcBef>
                           <a:spcPts val="200"/>
@@ -6296,7 +6043,7 @@
                         </a:spcAft>
                       </a:pPr>
                       <a:r>
-                        <a:rPr lang="en-US" sz="1200" b="0" kern="1200" baseline="0" smtClean="0">
+                        <a:rPr lang="en-US" sz="1300" b="0" kern="1200" baseline="0" smtClean="0">
                           <a:solidFill>
                             <a:schemeClr val="dk1"/>
                           </a:solidFill>
@@ -6305,8 +6052,77 @@
                           <a:ea typeface="+mn-ea"/>
                           <a:cs typeface="Arial" panose="020B0604020202020204" pitchFamily="34" charset="0"/>
                         </a:rPr>
-                        <a:t>Responsibilities of RemoteDiag and OnBoardClient change (diagnostic priority control moves to OnBoardClient), requiring updates to requirements and specifications..</a:t>
+                        <a:t>Responsibilities of RemoteDiag and OnBoardClient change (</a:t>
                       </a:r>
+                      <a:r>
+                        <a:rPr lang="en-US" sz="1300" b="1" kern="1200" baseline="0" smtClean="0">
+                          <a:solidFill>
+                            <a:schemeClr val="dk1"/>
+                          </a:solidFill>
+                          <a:effectLst/>
+                          <a:latin typeface="+mn-lt"/>
+                          <a:ea typeface="+mn-ea"/>
+                          <a:cs typeface="Arial" panose="020B0604020202020204" pitchFamily="34" charset="0"/>
+                        </a:rPr>
+                        <a:t>diagnostic priority control</a:t>
+                      </a:r>
+                      <a:r>
+                        <a:rPr lang="en-US" sz="1300" b="0" kern="1200" baseline="0" smtClean="0">
+                          <a:solidFill>
+                            <a:schemeClr val="dk1"/>
+                          </a:solidFill>
+                          <a:effectLst/>
+                          <a:latin typeface="+mn-lt"/>
+                          <a:ea typeface="+mn-ea"/>
+                          <a:cs typeface="Arial" panose="020B0604020202020204" pitchFamily="34" charset="0"/>
+                        </a:rPr>
+                        <a:t> moves to </a:t>
+                      </a:r>
+                      <a:r>
+                        <a:rPr lang="en-US" sz="1300" b="0" kern="1200" baseline="0" smtClean="0">
+                          <a:solidFill>
+                            <a:schemeClr val="dk1"/>
+                          </a:solidFill>
+                          <a:effectLst/>
+                          <a:latin typeface="+mn-lt"/>
+                          <a:ea typeface="+mn-ea"/>
+                          <a:cs typeface="Arial" panose="020B0604020202020204" pitchFamily="34" charset="0"/>
+                        </a:rPr>
+                        <a:t>and </a:t>
+                      </a:r>
+                      <a:r>
+                        <a:rPr lang="en-US" sz="1300" b="0" kern="1200" baseline="0" smtClean="0">
+                          <a:solidFill>
+                            <a:schemeClr val="dk1"/>
+                          </a:solidFill>
+                          <a:effectLst/>
+                          <a:latin typeface="+mn-lt"/>
+                          <a:ea typeface="+mn-ea"/>
+                          <a:cs typeface="Arial" panose="020B0604020202020204" pitchFamily="34" charset="0"/>
+                        </a:rPr>
+                        <a:t>specifications</a:t>
+                      </a:r>
+                      <a:r>
+                        <a:rPr lang="en-US" sz="1300" b="0" kern="1200" baseline="0" smtClean="0">
+                          <a:solidFill>
+                            <a:schemeClr val="dk1"/>
+                          </a:solidFill>
+                          <a:effectLst/>
+                          <a:latin typeface="+mn-lt"/>
+                          <a:ea typeface="+mn-ea"/>
+                          <a:cs typeface="Arial" panose="020B0604020202020204" pitchFamily="34" charset="0"/>
+                        </a:rPr>
+                        <a:t>.. OnBoardClient), requiring updates to requirements </a:t>
+                      </a:r>
+                      <a:endParaRPr lang="en-US" sz="1300" b="0" kern="1200" baseline="0" smtClean="0">
+                        <a:solidFill>
+                          <a:schemeClr val="dk1"/>
+                        </a:solidFill>
+                        <a:effectLst/>
+                        <a:latin typeface="+mn-lt"/>
+                        <a:ea typeface="+mn-ea"/>
+                        <a:cs typeface="Arial" panose="020B0604020202020204" pitchFamily="34" charset="0"/>
+                      </a:endParaRPr>
                     </a:p>
                   </a:txBody>
                   <a:tcPr marL="25400" marR="25400" marT="0" marB="0">
@@ -6355,7 +6171,7 @@
                     <a:p>
                       <a:pPr marL="0" marR="0" indent="0" algn="l" defTabSz="914400" rtl="0" eaLnBrk="1" fontAlgn="auto" latinLnBrk="0" hangingPunct="1">
                         <a:lnSpc>
-                          <a:spcPct val="130000"/>
+                          <a:spcPct val="110000"/>
                         </a:lnSpc>
                         <a:spcBef>
                           <a:spcPts val="0"/>
@@ -6371,7 +6187,7 @@
                         <a:defRPr/>
                       </a:pPr>
                       <a:r>
-                        <a:rPr lang="en-US" sz="1200" b="1" smtClean="0">
+                        <a:rPr lang="en-US" sz="1300" b="1" smtClean="0">
                           <a:solidFill>
                             <a:srgbClr val="00B050"/>
                           </a:solidFill>
@@ -6382,7 +6198,7 @@
                     <a:p>
                       <a:pPr marL="0" marR="0" indent="0" algn="l" defTabSz="914400" rtl="0" eaLnBrk="1" fontAlgn="auto" latinLnBrk="0" hangingPunct="1">
                         <a:lnSpc>
-                          <a:spcPct val="130000"/>
+                          <a:spcPct val="110000"/>
                         </a:lnSpc>
                         <a:spcBef>
                           <a:spcPts val="0"/>
@@ -6398,7 +6214,7 @@
                         <a:defRPr/>
                       </a:pPr>
                       <a:r>
-                        <a:rPr lang="en-US" sz="1200" b="0" kern="1200" baseline="0" smtClean="0">
+                        <a:rPr lang="en-US" sz="1300" b="0" kern="1200" baseline="0" smtClean="0">
                           <a:solidFill>
                             <a:schemeClr val="tx1"/>
                           </a:solidFill>
@@ -6457,7 +6273,7 @@
                     <a:p>
                       <a:pPr marL="0" marR="0" indent="0" algn="l" defTabSz="914400" rtl="0" eaLnBrk="1" fontAlgn="auto" latinLnBrk="0" hangingPunct="1">
                         <a:lnSpc>
-                          <a:spcPct val="130000"/>
+                          <a:spcPct val="110000"/>
                         </a:lnSpc>
                         <a:spcBef>
                           <a:spcPts val="0"/>
@@ -6473,7 +6289,7 @@
                         <a:defRPr/>
                       </a:pPr>
                       <a:r>
-                        <a:rPr lang="en-US" sz="1200" b="1" smtClean="0">
+                        <a:rPr lang="en-US" sz="1300" b="1" smtClean="0">
                           <a:solidFill>
                             <a:srgbClr val="00B050"/>
                           </a:solidFill>
@@ -6484,7 +6300,7 @@
                     <a:p>
                       <a:pPr marL="0" marR="0" indent="0" algn="l" defTabSz="914400" rtl="0" eaLnBrk="1" fontAlgn="auto" latinLnBrk="0" hangingPunct="1">
                         <a:lnSpc>
-                          <a:spcPct val="130000"/>
+                          <a:spcPct val="110000"/>
                         </a:lnSpc>
                         <a:spcBef>
                           <a:spcPts val="0"/>
@@ -6500,7 +6316,7 @@
                         <a:defRPr/>
                       </a:pPr>
                       <a:r>
-                        <a:rPr lang="en-US" sz="1200" b="0" kern="1200" baseline="0" smtClean="0">
+                        <a:rPr lang="en-US" sz="1300" b="0" kern="1200" baseline="0" smtClean="0">
                           <a:solidFill>
                             <a:schemeClr val="tx1"/>
                           </a:solidFill>
@@ -6515,10 +6331,10 @@
                     <a:p>
                       <a:pPr algn="l" latinLnBrk="0">
                         <a:lnSpc>
-                          <a:spcPct val="130000"/>
+                          <a:spcPct val="110000"/>
                         </a:lnSpc>
                       </a:pPr>
-                      <a:endParaRPr lang="en-US" sz="1200" b="0">
+                      <a:endParaRPr lang="en-US" sz="1300" b="0">
                         <a:latin typeface="+mn-lt"/>
                         <a:cs typeface="Arial" panose="020B0604020202020204" pitchFamily="34" charset="0"/>
                       </a:endParaRPr>
@@ -6572,7 +6388,7 @@
                     <a:p>
                       <a:pPr algn="ctr" latinLnBrk="0">
                         <a:lnSpc>
-                          <a:spcPct val="130000"/>
+                          <a:spcPct val="110000"/>
                         </a:lnSpc>
                       </a:pPr>
                       <a:r>
@@ -6591,7 +6407,7 @@
                     <a:p>
                       <a:pPr algn="ctr" latinLnBrk="0">
                         <a:lnSpc>
-                          <a:spcPct val="130000"/>
+                          <a:spcPct val="110000"/>
                         </a:lnSpc>
                       </a:pPr>
                       <a:r>
@@ -6663,7 +6479,7 @@
                     <a:p>
                       <a:pPr marL="0" marR="0" algn="l">
                         <a:lnSpc>
-                          <a:spcPct val="130000"/>
+                          <a:spcPct val="110000"/>
                         </a:lnSpc>
                         <a:spcBef>
                           <a:spcPts val="200"/>
@@ -6673,7 +6489,7 @@
                         </a:spcAft>
                       </a:pPr>
                       <a:r>
-                        <a:rPr lang="en-US" sz="1200" b="1" smtClean="0">
+                        <a:rPr lang="en-US" sz="1300" b="1" smtClean="0">
                           <a:solidFill>
                             <a:schemeClr val="accent2"/>
                           </a:solidFill>
@@ -6684,7 +6500,7 @@
                     <a:p>
                       <a:pPr marL="0" marR="0" algn="l">
                         <a:lnSpc>
-                          <a:spcPct val="130000"/>
+                          <a:spcPct val="110000"/>
                         </a:lnSpc>
                         <a:spcBef>
                           <a:spcPts val="200"/>
@@ -6694,7 +6510,7 @@
                         </a:spcAft>
                       </a:pPr>
                       <a:r>
-                        <a:rPr lang="en-US" sz="1200" b="0" kern="1200" baseline="0" smtClean="0">
+                        <a:rPr lang="en-US" sz="1300" b="1" kern="1200" baseline="0" smtClean="0">
                           <a:solidFill>
                             <a:schemeClr val="dk1"/>
                           </a:solidFill>
@@ -6703,9 +6519,21 @@
                           <a:ea typeface="+mn-ea"/>
                           <a:cs typeface="Arial" panose="020B0604020202020204" pitchFamily="34" charset="0"/>
                         </a:rPr>
-                        <a:t>01 additional component is modified (OnBoardClient - implements UDS socket server and priority control) </a:t>
+                        <a:t>01 additional component is modified </a:t>
                       </a:r>
-                      <a:endParaRPr lang="en-US" sz="1200" b="0" kern="1200" baseline="0">
+                      <a:r>
+                        <a:rPr lang="en-US" sz="1300" b="0" kern="1200" baseline="0" smtClean="0">
+                          <a:solidFill>
+                            <a:schemeClr val="dk1"/>
+                          </a:solidFill>
+                          <a:effectLst/>
+                          <a:latin typeface="+mn-lt"/>
+                          <a:ea typeface="+mn-ea"/>
+                          <a:cs typeface="Arial" panose="020B0604020202020204" pitchFamily="34" charset="0"/>
+                        </a:rPr>
+                        <a:t>(OnBoardClient - implements UDS socket server and priority control) </a:t>
+                      </a:r>
+                      <a:endParaRPr lang="en-US" sz="1300" b="0" kern="1200" baseline="0">
                         <a:solidFill>
                           <a:schemeClr val="dk1"/>
                         </a:solidFill>
@@ -6762,7 +6590,7 @@
                     <a:p>
                       <a:pPr marL="0" marR="0" indent="0" algn="l" defTabSz="914400" rtl="0" eaLnBrk="1" fontAlgn="auto" latinLnBrk="0" hangingPunct="1">
                         <a:lnSpc>
-                          <a:spcPct val="130000"/>
+                          <a:spcPct val="110000"/>
                         </a:lnSpc>
                         <a:spcBef>
                           <a:spcPts val="0"/>
@@ -6778,14 +6606,14 @@
                         <a:defRPr/>
                       </a:pPr>
                       <a:r>
-                        <a:rPr lang="en-US" sz="1200" b="1" smtClean="0">
+                        <a:rPr lang="en-US" sz="1300" b="1" smtClean="0">
                           <a:solidFill>
                             <a:srgbClr val="FF0000"/>
                           </a:solidFill>
                         </a:rPr>
                         <a:t>Low</a:t>
                       </a:r>
-                      <a:endParaRPr lang="en-US" sz="1200" b="0" kern="1200" baseline="0" smtClean="0">
+                      <a:endParaRPr lang="en-US" sz="1300" b="0" kern="1200" baseline="0" smtClean="0">
                         <a:solidFill>
                           <a:schemeClr val="dk1"/>
                         </a:solidFill>
@@ -6798,7 +6626,7 @@
                     <a:p>
                       <a:pPr marL="0" marR="0" indent="0" algn="l" defTabSz="914400" rtl="0" eaLnBrk="1" fontAlgn="auto" latinLnBrk="0" hangingPunct="1">
                         <a:lnSpc>
-                          <a:spcPct val="130000"/>
+                          <a:spcPct val="110000"/>
                         </a:lnSpc>
                         <a:spcBef>
                           <a:spcPts val="0"/>
@@ -6814,7 +6642,7 @@
                         <a:defRPr/>
                       </a:pPr>
                       <a:r>
-                        <a:rPr lang="en-US" sz="1200" b="0" kern="1200" baseline="0" smtClean="0">
+                        <a:rPr lang="en-US" sz="1300" b="1" kern="1200" baseline="0" smtClean="0">
                           <a:solidFill>
                             <a:schemeClr val="dk1"/>
                           </a:solidFill>
@@ -6823,7 +6651,19 @@
                           <a:ea typeface="+mn-ea"/>
                           <a:cs typeface="Arial" panose="020B0604020202020204" pitchFamily="34" charset="0"/>
                         </a:rPr>
-                        <a:t>10 EP modules (PowerMgr, HttpMgr, …) have to implement cross-container UDS socket communication and fail-safe handling.</a:t>
+                        <a:t>10 EP modules</a:t>
+                      </a:r>
+                      <a:r>
+                        <a:rPr lang="en-US" sz="1300" b="0" kern="1200" baseline="0" smtClean="0">
+                          <a:solidFill>
+                            <a:schemeClr val="dk1"/>
+                          </a:solidFill>
+                          <a:effectLst/>
+                          <a:latin typeface="+mn-lt"/>
+                          <a:ea typeface="+mn-ea"/>
+                          <a:cs typeface="Arial" panose="020B0604020202020204" pitchFamily="34" charset="0"/>
+                        </a:rPr>
+                        <a:t> (PowerMgr, HttpMgr, …) have to implement cross-container UDS socket communication and fail-safe handling.</a:t>
                       </a:r>
                     </a:p>
                   </a:txBody>
@@ -6873,18 +6713,18 @@
                     <a:p>
                       <a:pPr algn="l" latinLnBrk="0">
                         <a:lnSpc>
-                          <a:spcPct val="130000"/>
+                          <a:spcPct val="110000"/>
                         </a:lnSpc>
                       </a:pPr>
                       <a:r>
-                        <a:rPr lang="en-US" sz="1200" b="1" smtClean="0">
+                        <a:rPr lang="en-US" sz="1300" b="1" smtClean="0">
                           <a:solidFill>
                             <a:srgbClr val="00B050"/>
                           </a:solidFill>
                         </a:rPr>
                         <a:t>High</a:t>
                       </a:r>
-                      <a:endParaRPr lang="en-US" sz="1200" b="0" smtClean="0">
+                      <a:endParaRPr lang="en-US" sz="1300" b="0" smtClean="0">
                         <a:latin typeface="+mn-lt"/>
                         <a:cs typeface="Arial" panose="020B0604020202020204" pitchFamily="34" charset="0"/>
                       </a:endParaRPr>
@@ -6892,15 +6732,22 @@
                     <a:p>
                       <a:pPr algn="l" latinLnBrk="0">
                         <a:lnSpc>
-                          <a:spcPct val="130000"/>
+                          <a:spcPct val="110000"/>
                         </a:lnSpc>
                       </a:pPr>
                       <a:r>
-                        <a:rPr lang="en-US" sz="1200" b="0" baseline="0" smtClean="0">
+                        <a:rPr lang="en-US" sz="1300" b="1" baseline="0" smtClean="0">
                           <a:latin typeface="+mn-lt"/>
                           <a:cs typeface="Arial" panose="020B0604020202020204" pitchFamily="34" charset="0"/>
                         </a:rPr>
-                        <a:t>No changes required in existing modules. RemoteDiagProxy preserves the current binder interface</a:t>
+                        <a:t>No changes </a:t>
+                      </a:r>
+                      <a:r>
+                        <a:rPr lang="en-US" sz="1300" b="0" baseline="0" smtClean="0">
+                          <a:latin typeface="+mn-lt"/>
+                          <a:cs typeface="Arial" panose="020B0604020202020204" pitchFamily="34" charset="0"/>
+                        </a:rPr>
+                        <a:t>required in existing modules. RemoteDiagProxy preserves the current binder interface</a:t>
                       </a:r>
                     </a:p>
                   </a:txBody>
@@ -6952,7 +6799,7 @@
                     <a:p>
                       <a:pPr algn="ctr" latinLnBrk="0">
                         <a:lnSpc>
-                          <a:spcPct val="130000"/>
+                          <a:spcPct val="110000"/>
                         </a:lnSpc>
                       </a:pPr>
                       <a:r>
@@ -6971,7 +6818,7 @@
                     <a:p>
                       <a:pPr algn="ctr" latinLnBrk="0">
                         <a:lnSpc>
-                          <a:spcPct val="130000"/>
+                          <a:spcPct val="110000"/>
                         </a:lnSpc>
                       </a:pPr>
                       <a:r>
@@ -7043,7 +6890,7 @@
                     <a:p>
                       <a:pPr marL="0" marR="0" algn="l">
                         <a:lnSpc>
-                          <a:spcPct val="130000"/>
+                          <a:spcPct val="110000"/>
                         </a:lnSpc>
                         <a:spcBef>
                           <a:spcPts val="200"/>
@@ -7053,7 +6900,7 @@
                         </a:spcAft>
                       </a:pPr>
                       <a:r>
-                        <a:rPr lang="en-US" sz="1200" b="1" smtClean="0">
+                        <a:rPr lang="en-US" sz="1300" b="1" smtClean="0">
                           <a:solidFill>
                             <a:srgbClr val="00B050"/>
                           </a:solidFill>
@@ -7064,7 +6911,7 @@
                     <a:p>
                       <a:pPr marL="0" marR="0" indent="0" algn="l" defTabSz="914400" rtl="0" eaLnBrk="1" fontAlgn="auto" latinLnBrk="0" hangingPunct="1">
                         <a:lnSpc>
-                          <a:spcPct val="130000"/>
+                          <a:spcPct val="110000"/>
                         </a:lnSpc>
                         <a:spcBef>
                           <a:spcPts val="200"/>
@@ -7080,7 +6927,7 @@
                         <a:defRPr/>
                       </a:pPr>
                       <a:r>
-                        <a:rPr lang="en-US" sz="1200" b="0" kern="1200" baseline="0" smtClean="0">
+                        <a:rPr lang="en-US" sz="1300" b="0" kern="1200" baseline="0" smtClean="0">
                           <a:solidFill>
                             <a:schemeClr val="dk1"/>
                           </a:solidFill>
@@ -7091,7 +6938,7 @@
                         </a:rPr>
                         <a:t>OEM center and MM ECU communication flows run in separate processes. Failure of one flow does not impact the other.</a:t>
                       </a:r>
-                      <a:endParaRPr lang="en-US" sz="1200" b="0" kern="1200" baseline="0">
+                      <a:endParaRPr lang="en-US" sz="1300" b="0" kern="1200" baseline="0">
                         <a:solidFill>
                           <a:schemeClr val="dk1"/>
                         </a:solidFill>
@@ -7148,7 +6995,7 @@
                     <a:p>
                       <a:pPr marL="0" marR="0" indent="0" algn="l" defTabSz="914400" rtl="0" eaLnBrk="1" fontAlgn="auto" latinLnBrk="0" hangingPunct="1">
                         <a:lnSpc>
-                          <a:spcPct val="130000"/>
+                          <a:spcPct val="110000"/>
                         </a:lnSpc>
                         <a:spcBef>
                           <a:spcPts val="0"/>
@@ -7164,7 +7011,7 @@
                         <a:defRPr/>
                       </a:pPr>
                       <a:r>
-                        <a:rPr lang="en-US" sz="1200" b="1" smtClean="0">
+                        <a:rPr lang="en-US" sz="1300" b="1" smtClean="0">
                           <a:solidFill>
                             <a:srgbClr val="FF0000"/>
                           </a:solidFill>
@@ -7175,7 +7022,7 @@
                     <a:p>
                       <a:pPr marL="0" marR="0" indent="0" algn="l" defTabSz="914400" rtl="0" eaLnBrk="1" fontAlgn="auto" latinLnBrk="0" hangingPunct="1">
                         <a:lnSpc>
-                          <a:spcPct val="130000"/>
+                          <a:spcPct val="110000"/>
                         </a:lnSpc>
                         <a:spcBef>
                           <a:spcPts val="0"/>
@@ -7191,7 +7038,7 @@
                         <a:defRPr/>
                       </a:pPr>
                       <a:r>
-                        <a:rPr lang="en-US" sz="1200" b="0" kern="1200" baseline="0" smtClean="0">
+                        <a:rPr lang="en-US" sz="1300" b="0" kern="1200" baseline="0" smtClean="0">
                           <a:solidFill>
                             <a:schemeClr val="tx1"/>
                           </a:solidFill>
@@ -7203,7 +7050,7 @@
                         <a:t>OEM center and MM ECU </a:t>
                       </a:r>
                       <a:r>
-                        <a:rPr lang="en-US" sz="1200" b="0" kern="1200" baseline="0" smtClean="0">
+                        <a:rPr lang="en-US" sz="1300" b="0" kern="1200" baseline="0" smtClean="0">
                           <a:solidFill>
                             <a:schemeClr val="dk1"/>
                           </a:solidFill>
@@ -7215,7 +7062,7 @@
                         <a:t>communication </a:t>
                       </a:r>
                       <a:r>
-                        <a:rPr lang="en-US" sz="1200" b="0" kern="1200" baseline="0" smtClean="0">
+                        <a:rPr lang="en-US" sz="1300" b="0" kern="1200" baseline="0" smtClean="0">
                           <a:solidFill>
                             <a:schemeClr val="tx1"/>
                           </a:solidFill>
@@ -7274,11 +7121,11 @@
                     <a:p>
                       <a:pPr algn="l" latinLnBrk="0">
                         <a:lnSpc>
-                          <a:spcPct val="130000"/>
+                          <a:spcPct val="110000"/>
                         </a:lnSpc>
                       </a:pPr>
                       <a:r>
-                        <a:rPr lang="en-US" sz="1200" b="1" smtClean="0">
+                        <a:rPr lang="en-US" sz="1300" b="1" smtClean="0">
                           <a:solidFill>
                             <a:srgbClr val="FF0000"/>
                           </a:solidFill>
@@ -7289,7 +7136,7 @@
                     <a:p>
                       <a:pPr marL="0" marR="0" indent="0" algn="l" defTabSz="914400" rtl="0" eaLnBrk="1" fontAlgn="auto" latinLnBrk="0" hangingPunct="1">
                         <a:lnSpc>
-                          <a:spcPct val="130000"/>
+                          <a:spcPct val="110000"/>
                         </a:lnSpc>
                         <a:spcBef>
                           <a:spcPts val="0"/>
@@ -7305,7 +7152,7 @@
                         <a:defRPr/>
                       </a:pPr>
                       <a:r>
-                        <a:rPr lang="en-US" sz="1200" b="0" kern="1200" baseline="0" smtClean="0">
+                        <a:rPr lang="en-US" sz="1300" b="0" kern="1200" baseline="0" smtClean="0">
                           <a:solidFill>
                             <a:schemeClr val="tx1"/>
                           </a:solidFill>
@@ -7317,7 +7164,7 @@
                         <a:t>OEM center and MM ECU </a:t>
                       </a:r>
                       <a:r>
-                        <a:rPr lang="en-US" sz="1200" b="0" kern="1200" baseline="0" smtClean="0">
+                        <a:rPr lang="en-US" sz="1300" b="0" kern="1200" baseline="0" smtClean="0">
                           <a:solidFill>
                             <a:schemeClr val="dk1"/>
                           </a:solidFill>
@@ -7329,7 +7176,7 @@
                         <a:t>communication </a:t>
                       </a:r>
                       <a:r>
-                        <a:rPr lang="en-US" sz="1200" b="0" kern="1200" baseline="0" smtClean="0">
+                        <a:rPr lang="en-US" sz="1300" b="0" kern="1200" baseline="0" smtClean="0">
                           <a:solidFill>
                             <a:schemeClr val="tx1"/>
                           </a:solidFill>
@@ -7340,7 +7187,7 @@
                         </a:rPr>
                         <a:t>flows share the same process. Failure in one flow may impact the other.</a:t>
                       </a:r>
-                      <a:endParaRPr lang="en-US" sz="1200" b="0">
+                      <a:endParaRPr lang="en-US" sz="1300" b="0">
                         <a:solidFill>
                           <a:schemeClr val="tx1"/>
                         </a:solidFill>
@@ -7397,11 +7244,11 @@
                     <a:p>
                       <a:pPr algn="ctr" latinLnBrk="0">
                         <a:lnSpc>
-                          <a:spcPct val="130000"/>
+                          <a:spcPct val="110000"/>
                         </a:lnSpc>
                       </a:pPr>
                       <a:r>
-                        <a:rPr lang="en-US" sz="1200" b="1" kern="1200" smtClean="0">
+                        <a:rPr lang="en-US" sz="1300" b="1" kern="1200" smtClean="0">
                           <a:solidFill>
                             <a:schemeClr val="dk1"/>
                           </a:solidFill>
@@ -7412,7 +7259,7 @@
                         </a:rPr>
                         <a:t>Decision</a:t>
                       </a:r>
-                      <a:endParaRPr lang="en-US" sz="1200" b="1" kern="1200">
+                      <a:endParaRPr lang="en-US" sz="1300" b="1" kern="1200">
                         <a:solidFill>
                           <a:schemeClr val="dk1"/>
                         </a:solidFill>
@@ -7469,7 +7316,7 @@
                     <a:p>
                       <a:pPr marL="0" marR="0" algn="ctr">
                         <a:lnSpc>
-                          <a:spcPct val="130000"/>
+                          <a:spcPct val="110000"/>
                         </a:lnSpc>
                         <a:spcBef>
                           <a:spcPts val="200"/>
@@ -7479,7 +7326,7 @@
                         </a:spcAft>
                       </a:pPr>
                       <a:r>
-                        <a:rPr lang="en-US" sz="1200" b="0" kern="1200" baseline="0" smtClean="0">
+                        <a:rPr lang="en-US" sz="1300" b="0" kern="1200" baseline="0" smtClean="0">
                           <a:solidFill>
                             <a:schemeClr val="dk1"/>
                           </a:solidFill>
@@ -7490,7 +7337,7 @@
                         </a:rPr>
                         <a:t>Rejected</a:t>
                       </a:r>
-                      <a:endParaRPr lang="en-US" sz="1200" b="0" kern="1200" baseline="0">
+                      <a:endParaRPr lang="en-US" sz="1300" b="0" kern="1200" baseline="0">
                         <a:solidFill>
                           <a:schemeClr val="dk1"/>
                         </a:solidFill>
@@ -7547,7 +7394,7 @@
                     <a:p>
                       <a:pPr marL="0" marR="0" indent="0" algn="ctr" defTabSz="914400" rtl="0" eaLnBrk="1" fontAlgn="auto" latinLnBrk="0" hangingPunct="1">
                         <a:lnSpc>
-                          <a:spcPct val="130000"/>
+                          <a:spcPct val="110000"/>
                         </a:lnSpc>
                         <a:spcBef>
                           <a:spcPts val="0"/>
@@ -7563,7 +7410,7 @@
                         <a:defRPr/>
                       </a:pPr>
                       <a:r>
-                        <a:rPr lang="en-US" sz="1200" b="0" kern="1200" baseline="0" smtClean="0">
+                        <a:rPr lang="en-US" sz="1300" b="0" kern="1200" baseline="0" smtClean="0">
                           <a:solidFill>
                             <a:schemeClr val="dk1"/>
                           </a:solidFill>
@@ -7622,17 +7469,17 @@
                     <a:p>
                       <a:pPr algn="ctr" latinLnBrk="0">
                         <a:lnSpc>
-                          <a:spcPct val="130000"/>
+                          <a:spcPct val="110000"/>
                         </a:lnSpc>
                       </a:pPr>
                       <a:r>
-                        <a:rPr lang="en-US" sz="1200" b="0" smtClean="0">
+                        <a:rPr lang="en-US" sz="1300" b="0" smtClean="0">
                           <a:latin typeface="+mn-lt"/>
                           <a:cs typeface="Arial" panose="020B0604020202020204" pitchFamily="34" charset="0"/>
                         </a:rPr>
                         <a:t>Selected</a:t>
                       </a:r>
-                      <a:endParaRPr lang="en-US" sz="1200" b="0">
+                      <a:endParaRPr lang="en-US" sz="1300" b="0">
                         <a:latin typeface="+mn-lt"/>
                         <a:cs typeface="Arial" panose="020B0604020202020204" pitchFamily="34" charset="0"/>
                       </a:endParaRPr>
@@ -7690,8 +7537,8 @@
         </p:nvSpPr>
         <p:spPr>
           <a:xfrm>
-            <a:off x="8822266" y="6957846"/>
-            <a:ext cx="3369734" cy="923330"/>
+            <a:off x="10138020" y="5808971"/>
+            <a:ext cx="1981877" cy="738664"/>
           </a:xfrm>
           <a:prstGeom prst="rect">
             <a:avLst/>
@@ -7710,7 +7557,7 @@
           <a:lstStyle/>
           <a:p>
             <a:r>
-              <a:rPr lang="en-US" b="1" smtClean="0">
+              <a:rPr lang="en-US" sz="1400" b="1" smtClean="0">
                 <a:solidFill>
                   <a:srgbClr val="00B050"/>
                 </a:solidFill>
@@ -7718,13 +7565,13 @@
               <a:t>High</a:t>
             </a:r>
             <a:r>
-              <a:rPr lang="en-US" smtClean="0"/>
+              <a:rPr lang="en-US" sz="1400" smtClean="0"/>
               <a:t>: Fully satisfy</a:t>
             </a:r>
           </a:p>
           <a:p>
             <a:r>
-              <a:rPr lang="en-US" b="1" smtClean="0">
+              <a:rPr lang="en-US" sz="1400" b="1" smtClean="0">
                 <a:solidFill>
                   <a:schemeClr val="accent2"/>
                 </a:solidFill>
@@ -7732,13 +7579,13 @@
               <a:t>Medium</a:t>
             </a:r>
             <a:r>
-              <a:rPr lang="en-US" smtClean="0"/>
+              <a:rPr lang="en-US" sz="1400" smtClean="0"/>
               <a:t>: Partially satisfy</a:t>
             </a:r>
           </a:p>
           <a:p>
             <a:r>
-              <a:rPr lang="en-US" b="1" smtClean="0">
+              <a:rPr lang="en-US" sz="1400" b="1" smtClean="0">
                 <a:solidFill>
                   <a:srgbClr val="FF0000"/>
                 </a:solidFill>
@@ -7746,10 +7593,10 @@
               <a:t>Low</a:t>
             </a:r>
             <a:r>
-              <a:rPr lang="en-US" smtClean="0"/>
+              <a:rPr lang="en-US" sz="1400" smtClean="0"/>
               <a:t>: Not satisfy</a:t>
             </a:r>
-            <a:endParaRPr lang="en-US"/>
+            <a:endParaRPr lang="en-US" sz="1400"/>
           </a:p>
         </p:txBody>
       </p:sp>
@@ -7758,7 +7605,7 @@
           <p:cNvPr id="9" name="Picture 2" descr="체크 표시 클립 아트. 무료 다운로드. | Creazilla">
             <a:extLst>
               <a:ext uri="{FF2B5EF4-FFF2-40B4-BE49-F238E27FC236}">
-                <a16:creationId xmlns:a16="http://schemas.microsoft.com/office/drawing/2014/main" xmlns="" id="{07DB846E-8DD2-9BB2-88FF-8A7E0BD6CA84}"/>
+                <a16:creationId xmlns="" xmlns:a16="http://schemas.microsoft.com/office/drawing/2014/main" id="{07DB846E-8DD2-9BB2-88FF-8A7E0BD6CA84}"/>
               </a:ext>
             </a:extLst>
           </p:cNvPr>
@@ -7782,7 +7629,7 @@
         </p:blipFill>
         <p:spPr bwMode="auto">
           <a:xfrm>
-            <a:off x="9776145" y="6042111"/>
+            <a:off x="9814245" y="5392287"/>
             <a:ext cx="216024" cy="216024"/>
           </a:xfrm>
           <a:prstGeom prst="rect">
@@ -7813,126 +7660,163 @@
   <p:timing>
     <p:tnLst>
       <p:par>
-        <p:cTn id="1" dur="indefinite" restart="never" nodeType="tmRoot">
-          <p:childTnLst>
-            <p:seq concurrent="1" nextAc="seek">
-              <p:cTn id="2" dur="indefinite" nodeType="mainSeq">
-                <p:childTnLst>
-                  <p:par>
-                    <p:cTn id="3" fill="hold">
-                      <p:stCondLst>
-                        <p:cond delay="indefinite"/>
-                      </p:stCondLst>
-                      <p:childTnLst>
-                        <p:par>
-                          <p:cTn id="4" fill="hold">
-                            <p:stCondLst>
-                              <p:cond delay="0"/>
-                            </p:stCondLst>
-                            <p:childTnLst>
-                              <p:par>
-                                <p:cTn id="5" presetID="2" presetClass="entr" presetSubtype="4" fill="hold" grpId="0" nodeType="clickEffect">
-                                  <p:stCondLst>
-                                    <p:cond delay="0"/>
-                                  </p:stCondLst>
-                                  <p:childTnLst>
-                                    <p:set>
-                                      <p:cBhvr>
-                                        <p:cTn id="6" dur="1" fill="hold">
-                                          <p:stCondLst>
-                                            <p:cond delay="0"/>
-                                          </p:stCondLst>
-                                        </p:cTn>
-                                        <p:tgtEl>
-                                          <p:spTgt spid="5"/>
-                                        </p:tgtEl>
-                                        <p:attrNameLst>
-                                          <p:attrName>style.visibility</p:attrName>
-                                        </p:attrNameLst>
-                                      </p:cBhvr>
-                                      <p:to>
-                                        <p:strVal val="visible"/>
-                                      </p:to>
-                                    </p:set>
-                                    <p:anim calcmode="lin" valueType="num">
-                                      <p:cBhvr additive="base">
-                                        <p:cTn id="7" dur="500" fill="hold"/>
-                                        <p:tgtEl>
-                                          <p:spTgt spid="5"/>
-                                        </p:tgtEl>
-                                        <p:attrNameLst>
-                                          <p:attrName>ppt_x</p:attrName>
-                                        </p:attrNameLst>
-                                      </p:cBhvr>
-                                      <p:tavLst>
-                                        <p:tav tm="0">
-                                          <p:val>
-                                            <p:strVal val="#ppt_x"/>
-                                          </p:val>
-                                        </p:tav>
-                                        <p:tav tm="100000">
-                                          <p:val>
-                                            <p:strVal val="#ppt_x"/>
-                                          </p:val>
-                                        </p:tav>
-                                      </p:tavLst>
-                                    </p:anim>
-                                    <p:anim calcmode="lin" valueType="num">
-                                      <p:cBhvr additive="base">
-                                        <p:cTn id="8" dur="500" fill="hold"/>
-                                        <p:tgtEl>
-                                          <p:spTgt spid="5"/>
-                                        </p:tgtEl>
-                                        <p:attrNameLst>
-                                          <p:attrName>ppt_y</p:attrName>
-                                        </p:attrNameLst>
-                                      </p:cBhvr>
-                                      <p:tavLst>
-                                        <p:tav tm="0">
-                                          <p:val>
-                                            <p:strVal val="1+#ppt_h/2"/>
-                                          </p:val>
-                                        </p:tav>
-                                        <p:tav tm="100000">
-                                          <p:val>
-                                            <p:strVal val="#ppt_y"/>
-                                          </p:val>
-                                        </p:tav>
-                                      </p:tavLst>
-                                    </p:anim>
-                                  </p:childTnLst>
-                                </p:cTn>
-                              </p:par>
-                            </p:childTnLst>
-                          </p:cTn>
-                        </p:par>
-                      </p:childTnLst>
-                    </p:cTn>
-                  </p:par>
-                </p:childTnLst>
-              </p:cTn>
-              <p:prevCondLst>
-                <p:cond evt="onPrev" delay="0">
-                  <p:tgtEl>
-                    <p:sldTgt/>
-                  </p:tgtEl>
-                </p:cond>
-              </p:prevCondLst>
-              <p:nextCondLst>
-                <p:cond evt="onNext" delay="0">
-                  <p:tgtEl>
-                    <p:sldTgt/>
-                  </p:tgtEl>
-                </p:cond>
-              </p:nextCondLst>
-            </p:seq>
-          </p:childTnLst>
-        </p:cTn>
+        <p:cTn id="1" dur="indefinite" restart="never" nodeType="tmRoot"/>
       </p:par>
     </p:tnLst>
-    <p:bldLst>
-      <p:bldP spid="5" grpId="0"/>
-    </p:bldLst>
+  </p:timing>
+</p:sld>
+</file>
+
+<file path=ppt/slides/slide11.xml><?xml version="1.0" encoding="utf-8"?>
+<p:sld xmlns:a="http://schemas.openxmlformats.org/drawingml/2006/main" xmlns:r="http://schemas.openxmlformats.org/officeDocument/2006/relationships" xmlns:p="http://schemas.openxmlformats.org/presentationml/2006/main">
+  <p:cSld>
+    <p:spTree>
+      <p:nvGrpSpPr>
+        <p:cNvPr id="1" name=""/>
+        <p:cNvGrpSpPr/>
+        <p:nvPr/>
+      </p:nvGrpSpPr>
+      <p:grpSpPr>
+        <a:xfrm>
+          <a:off x="0" y="0"/>
+          <a:ext cx="0" cy="0"/>
+          <a:chOff x="0" y="0"/>
+          <a:chExt cx="0" cy="0"/>
+        </a:xfrm>
+      </p:grpSpPr>
+      <p:sp>
+        <p:nvSpPr>
+          <p:cNvPr id="2" name="Title 1"/>
+          <p:cNvSpPr>
+            <a:spLocks noGrp="1"/>
+          </p:cNvSpPr>
+          <p:nvPr>
+            <p:ph type="title"/>
+          </p:nvPr>
+        </p:nvSpPr>
+        <p:spPr/>
+        <p:txBody>
+          <a:bodyPr/>
+          <a:lstStyle/>
+          <a:p>
+            <a:r>
+              <a:rPr lang="en-US" smtClean="0"/>
+              <a:t>Implementation and Verification</a:t>
+            </a:r>
+            <a:endParaRPr lang="en-US"/>
+          </a:p>
+        </p:txBody>
+      </p:sp>
+      <p:pic>
+        <p:nvPicPr>
+          <p:cNvPr id="11" name="Picture 10"/>
+          <p:cNvPicPr>
+            <a:picLocks noChangeAspect="1"/>
+          </p:cNvPicPr>
+          <p:nvPr/>
+        </p:nvPicPr>
+        <p:blipFill>
+          <a:blip r:embed="rId2">
+            <a:extLst>
+              <a:ext uri="{28A0092B-C50C-407E-A947-70E740481C1C}">
+                <a14:useLocalDpi xmlns:a14="http://schemas.microsoft.com/office/drawing/2010/main" val="0"/>
+              </a:ext>
+            </a:extLst>
+          </a:blip>
+          <a:stretch>
+            <a:fillRect/>
+          </a:stretch>
+        </p:blipFill>
+        <p:spPr>
+          <a:xfrm>
+            <a:off x="646641" y="1693307"/>
+            <a:ext cx="10269609" cy="2392918"/>
+          </a:xfrm>
+          <a:prstGeom prst="rect">
+            <a:avLst/>
+          </a:prstGeom>
+        </p:spPr>
+      </p:pic>
+      <p:sp>
+        <p:nvSpPr>
+          <p:cNvPr id="12" name="TextBox 11"/>
+          <p:cNvSpPr txBox="1"/>
+          <p:nvPr/>
+        </p:nvSpPr>
+        <p:spPr>
+          <a:xfrm>
+            <a:off x="160866" y="1190625"/>
+            <a:ext cx="8010142" cy="369332"/>
+          </a:xfrm>
+          <a:prstGeom prst="rect">
+            <a:avLst/>
+          </a:prstGeom>
+          <a:noFill/>
+        </p:spPr>
+        <p:txBody>
+          <a:bodyPr wrap="none" rtlCol="0">
+            <a:spAutoFit/>
+          </a:bodyPr>
+          <a:lstStyle/>
+          <a:p>
+            <a:pPr marL="285750" indent="-285750">
+              <a:buFont typeface="Arial" panose="020B0604020202020204" pitchFamily="34" charset="0"/>
+              <a:buChar char="•"/>
+            </a:pPr>
+            <a:r>
+              <a:rPr lang="en-US" smtClean="0"/>
+              <a:t>RemoteDiagProxy communication with EP-side components (Telephony, Mqtt, …)</a:t>
+            </a:r>
+            <a:endParaRPr lang="en-US"/>
+          </a:p>
+        </p:txBody>
+      </p:sp>
+      <p:pic>
+        <p:nvPicPr>
+          <p:cNvPr id="15" name="Picture 14"/>
+          <p:cNvPicPr>
+            <a:picLocks noChangeAspect="1"/>
+          </p:cNvPicPr>
+          <p:nvPr/>
+        </p:nvPicPr>
+        <p:blipFill>
+          <a:blip r:embed="rId3">
+            <a:extLst>
+              <a:ext uri="{28A0092B-C50C-407E-A947-70E740481C1C}">
+                <a14:useLocalDpi xmlns:a14="http://schemas.microsoft.com/office/drawing/2010/main" val="0"/>
+              </a:ext>
+            </a:extLst>
+          </a:blip>
+          <a:stretch>
+            <a:fillRect/>
+          </a:stretch>
+        </p:blipFill>
+        <p:spPr>
+          <a:xfrm>
+            <a:off x="646640" y="4219575"/>
+            <a:ext cx="10269609" cy="1927903"/>
+          </a:xfrm>
+          <a:prstGeom prst="rect">
+            <a:avLst/>
+          </a:prstGeom>
+        </p:spPr>
+      </p:pic>
+    </p:spTree>
+    <p:extLst>
+      <p:ext uri="{BB962C8B-B14F-4D97-AF65-F5344CB8AC3E}">
+        <p14:creationId xmlns:p14="http://schemas.microsoft.com/office/powerpoint/2010/main" val="3497496250"/>
+      </p:ext>
+    </p:extLst>
+  </p:cSld>
+  <p:clrMapOvr>
+    <a:masterClrMapping/>
+  </p:clrMapOvr>
+  <p:timing>
+    <p:tnLst>
+      <p:par>
+        <p:cTn id="1" dur="indefinite" restart="never" nodeType="tmRoot"/>
+      </p:par>
+    </p:tnLst>
   </p:timing>
 </p:sld>
 </file>
@@ -7970,231 +7854,50 @@
           <a:lstStyle/>
           <a:p>
             <a:r>
-              <a:rPr lang="en-US"/>
-              <a:t>Implementation status</a:t>
+              <a:rPr lang="en-US" smtClean="0"/>
+              <a:t>Implementation and Verification</a:t>
             </a:r>
-          </a:p>
-        </p:txBody>
-      </p:sp>
-      <p:sp>
-        <p:nvSpPr>
-          <p:cNvPr id="3" name="Content Placeholder 2"/>
-          <p:cNvSpPr>
-            <a:spLocks noGrp="1"/>
-          </p:cNvSpPr>
-          <p:nvPr>
-            <p:ph idx="1"/>
-          </p:nvPr>
-        </p:nvSpPr>
-        <p:spPr>
-          <a:xfrm>
-            <a:off x="160866" y="990600"/>
-            <a:ext cx="11887201" cy="1791677"/>
-          </a:xfrm>
-        </p:spPr>
-        <p:txBody>
-          <a:bodyPr>
-            <a:normAutofit/>
-          </a:bodyPr>
-          <a:lstStyle/>
-          <a:p>
-            <a:r>
-              <a:rPr lang="en-US" sz="1800">
-                <a:ln>
-                  <a:solidFill>
-                    <a:schemeClr val="accent6">
-                      <a:lumMod val="75000"/>
-                    </a:schemeClr>
-                  </a:solidFill>
-                </a:ln>
-                <a:solidFill>
-                  <a:schemeClr val="accent6"/>
-                </a:solidFill>
-                <a:sym typeface="Wingdings" panose="05000000000000000000" pitchFamily="2" charset="2"/>
-              </a:rPr>
-              <a:t></a:t>
-            </a:r>
-            <a:r>
-              <a:rPr lang="en-US" sz="1800">
-                <a:ln>
-                  <a:solidFill>
-                    <a:schemeClr val="accent6">
-                      <a:lumMod val="75000"/>
-                    </a:schemeClr>
-                  </a:solidFill>
-                </a:ln>
-                <a:sym typeface="Wingdings" panose="05000000000000000000" pitchFamily="2" charset="2"/>
-              </a:rPr>
-              <a:t>  </a:t>
-            </a:r>
-            <a:r>
-              <a:rPr lang="en-US" sz="1800"/>
-              <a:t>Completed</a:t>
-            </a:r>
-          </a:p>
-          <a:p>
-            <a:pPr lvl="1"/>
-            <a:r>
-              <a:rPr lang="en-US" sz="1800"/>
-              <a:t>EP Container setup completed.</a:t>
-            </a:r>
-          </a:p>
-          <a:p>
-            <a:pPr lvl="1"/>
-            <a:r>
-              <a:rPr lang="en-US" sz="1800" err="1"/>
-              <a:t>RemoteDiagProxy</a:t>
-            </a:r>
-            <a:r>
-              <a:rPr lang="en-US" sz="1800"/>
-              <a:t> implementation completed.</a:t>
-            </a:r>
-          </a:p>
-          <a:p>
-            <a:pPr lvl="1"/>
-            <a:r>
-              <a:rPr lang="en-US" sz="1800"/>
-              <a:t>Communication between </a:t>
-            </a:r>
-            <a:r>
-              <a:rPr lang="en-US" sz="1800" err="1"/>
-              <a:t>RemoteDiagProxy</a:t>
-            </a:r>
-            <a:r>
-              <a:rPr lang="en-US" sz="1800"/>
-              <a:t> and </a:t>
-            </a:r>
-            <a:r>
-              <a:rPr lang="en-US" sz="1800" err="1"/>
-              <a:t>RemoteDiag</a:t>
-            </a:r>
-            <a:r>
-              <a:rPr lang="en-US" sz="1800"/>
-              <a:t> established and verified.</a:t>
-            </a:r>
-          </a:p>
-        </p:txBody>
-      </p:sp>
-      <p:sp>
-        <p:nvSpPr>
-          <p:cNvPr id="6" name="AutoShape 2" descr="http://jira.lge.com/issue/secure/attachment/15785945/15785945_image-2026-07-29-16-20-32-949.png"/>
-          <p:cNvSpPr>
-            <a:spLocks noChangeAspect="1" noChangeArrowheads="1"/>
-          </p:cNvSpPr>
-          <p:nvPr/>
-        </p:nvSpPr>
-        <p:spPr bwMode="auto">
-          <a:xfrm>
-            <a:off x="155575" y="-144463"/>
-            <a:ext cx="304800" cy="304801"/>
-          </a:xfrm>
-          <a:prstGeom prst="rect">
-            <a:avLst/>
-          </a:prstGeom>
-          <a:noFill/>
-          <a:extLst>
-            <a:ext uri="{909E8E84-426E-40DD-AFC4-6F175D3DCCD1}">
-              <a14:hiddenFill xmlns:a14="http://schemas.microsoft.com/office/drawing/2010/main">
-                <a:solidFill>
-                  <a:srgbClr val="FFFFFF"/>
-                </a:solidFill>
-              </a14:hiddenFill>
-            </a:ext>
-          </a:extLst>
-        </p:spPr>
-        <p:txBody>
-          <a:bodyPr vert="horz" wrap="square" lIns="91440" tIns="45720" rIns="91440" bIns="45720" numCol="1" anchor="t" anchorCtr="0" compatLnSpc="1">
-            <a:prstTxWarp prst="textNoShape">
-              <a:avLst/>
-            </a:prstTxWarp>
-          </a:bodyPr>
-          <a:lstStyle/>
-          <a:p>
             <a:endParaRPr lang="en-US"/>
           </a:p>
         </p:txBody>
       </p:sp>
       <p:sp>
         <p:nvSpPr>
-          <p:cNvPr id="7" name="AutoShape 4" descr="http://jira.lge.com/issue/secure/attachment/15780505/15780505_image-2026-07-29-11-36-43-878.png"/>
-          <p:cNvSpPr>
-            <a:spLocks noChangeAspect="1" noChangeArrowheads="1"/>
-          </p:cNvSpPr>
+          <p:cNvPr id="12" name="TextBox 11"/>
+          <p:cNvSpPr txBox="1"/>
           <p:nvPr/>
         </p:nvSpPr>
-        <p:spPr bwMode="auto">
+        <p:spPr>
           <a:xfrm>
-            <a:off x="63500" y="-136525"/>
-            <a:ext cx="304800" cy="304800"/>
+            <a:off x="160866" y="1190625"/>
+            <a:ext cx="5258171" cy="369332"/>
           </a:xfrm>
           <a:prstGeom prst="rect">
             <a:avLst/>
           </a:prstGeom>
           <a:noFill/>
-          <a:extLst>
-            <a:ext uri="{909E8E84-426E-40DD-AFC4-6F175D3DCCD1}">
-              <a14:hiddenFill xmlns:a14="http://schemas.microsoft.com/office/drawing/2010/main">
-                <a:solidFill>
-                  <a:srgbClr val="FFFFFF"/>
-                </a:solidFill>
-              </a14:hiddenFill>
-            </a:ext>
-          </a:extLst>
         </p:spPr>
         <p:txBody>
-          <a:bodyPr vert="horz" wrap="square" lIns="91440" tIns="45720" rIns="91440" bIns="45720" numCol="1" anchor="t" anchorCtr="0" compatLnSpc="1">
-            <a:prstTxWarp prst="textNoShape">
-              <a:avLst/>
-            </a:prstTxWarp>
+          <a:bodyPr wrap="none" rtlCol="0">
+            <a:spAutoFit/>
           </a:bodyPr>
           <a:lstStyle/>
           <a:p>
-            <a:endParaRPr lang="en-US"/>
-          </a:p>
-        </p:txBody>
-      </p:sp>
-      <p:sp>
-        <p:nvSpPr>
-          <p:cNvPr id="8" name="AutoShape 6" descr="http://jira.lge.com/issue/secure/attachment/15780505/15780505_image-2026-07-29-11-36-43-878.png"/>
-          <p:cNvSpPr>
-            <a:spLocks noChangeAspect="1" noChangeArrowheads="1"/>
-          </p:cNvSpPr>
-          <p:nvPr/>
-        </p:nvSpPr>
-        <p:spPr bwMode="auto">
-          <a:xfrm>
-            <a:off x="307975" y="7937"/>
-            <a:ext cx="304800" cy="304801"/>
-          </a:xfrm>
-          <a:prstGeom prst="rect">
-            <a:avLst/>
-          </a:prstGeom>
-          <a:noFill/>
-          <a:extLst>
-            <a:ext uri="{909E8E84-426E-40DD-AFC4-6F175D3DCCD1}">
-              <a14:hiddenFill xmlns:a14="http://schemas.microsoft.com/office/drawing/2010/main">
-                <a:solidFill>
-                  <a:srgbClr val="FFFFFF"/>
-                </a:solidFill>
-              </a14:hiddenFill>
-            </a:ext>
-          </a:extLst>
-        </p:spPr>
-        <p:txBody>
-          <a:bodyPr vert="horz" wrap="square" lIns="91440" tIns="45720" rIns="91440" bIns="45720" numCol="1" anchor="t" anchorCtr="0" compatLnSpc="1">
-            <a:prstTxWarp prst="textNoShape">
-              <a:avLst/>
-            </a:prstTxWarp>
-          </a:bodyPr>
-          <a:lstStyle/>
-          <a:p>
+            <a:pPr marL="285750" indent="-285750">
+              <a:buFont typeface="Arial" panose="020B0604020202020204" pitchFamily="34" charset="0"/>
+              <a:buChar char="•"/>
+            </a:pPr>
+            <a:r>
+              <a:rPr lang="en-US" smtClean="0"/>
+              <a:t>RemoteDiagProxy and RemoteDiag communication</a:t>
+            </a:r>
             <a:endParaRPr lang="en-US"/>
           </a:p>
         </p:txBody>
       </p:sp>
       <p:pic>
         <p:nvPicPr>
-          <p:cNvPr id="9" name="Picture 8"/>
+          <p:cNvPr id="3" name="Picture 2"/>
           <p:cNvPicPr>
             <a:picLocks noChangeAspect="1"/>
           </p:cNvPicPr>
@@ -8214,38 +7917,8 @@
         </p:blipFill>
         <p:spPr>
           <a:xfrm>
-            <a:off x="63500" y="2288022"/>
-            <a:ext cx="6404121" cy="1914992"/>
-          </a:xfrm>
-          <a:prstGeom prst="rect">
-            <a:avLst/>
-          </a:prstGeom>
-        </p:spPr>
-      </p:pic>
-      <p:pic>
-        <p:nvPicPr>
-          <p:cNvPr id="10" name="Picture 9"/>
-          <p:cNvPicPr>
-            <a:picLocks noChangeAspect="1"/>
-          </p:cNvPicPr>
-          <p:nvPr/>
-        </p:nvPicPr>
-        <p:blipFill>
-          <a:blip r:embed="rId3">
-            <a:extLst>
-              <a:ext uri="{28A0092B-C50C-407E-A947-70E740481C1C}">
-                <a14:useLocalDpi xmlns:a14="http://schemas.microsoft.com/office/drawing/2010/main" val="0"/>
-              </a:ext>
-            </a:extLst>
-          </a:blip>
-          <a:stretch>
-            <a:fillRect/>
-          </a:stretch>
-        </p:blipFill>
-        <p:spPr>
-          <a:xfrm>
-            <a:off x="5170203" y="3978079"/>
-            <a:ext cx="6877864" cy="2879922"/>
+            <a:off x="404031" y="1559957"/>
+            <a:ext cx="11193437" cy="4686954"/>
           </a:xfrm>
           <a:prstGeom prst="rect">
             <a:avLst/>
@@ -8255,7 +7928,7 @@
     </p:spTree>
     <p:extLst>
       <p:ext uri="{BB962C8B-B14F-4D97-AF65-F5344CB8AC3E}">
-        <p14:creationId xmlns:p14="http://schemas.microsoft.com/office/powerpoint/2010/main" val="3497496250"/>
+        <p14:creationId xmlns:p14="http://schemas.microsoft.com/office/powerpoint/2010/main" val="4060446855"/>
       </p:ext>
     </p:extLst>
   </p:cSld>
@@ -8950,404 +8623,6 @@
           <a:bodyPr/>
           <a:lstStyle/>
           <a:p>
-            <a:r>
-              <a:rPr lang="en-US"/>
-              <a:t>Implementation status</a:t>
-            </a:r>
-          </a:p>
-        </p:txBody>
-      </p:sp>
-      <p:sp>
-        <p:nvSpPr>
-          <p:cNvPr id="3" name="Content Placeholder 2"/>
-          <p:cNvSpPr>
-            <a:spLocks noGrp="1"/>
-          </p:cNvSpPr>
-          <p:nvPr>
-            <p:ph idx="1"/>
-          </p:nvPr>
-        </p:nvSpPr>
-        <p:spPr>
-          <a:xfrm>
-            <a:off x="160866" y="990600"/>
-            <a:ext cx="11887201" cy="1791677"/>
-          </a:xfrm>
-        </p:spPr>
-        <p:txBody>
-          <a:bodyPr>
-            <a:normAutofit/>
-          </a:bodyPr>
-          <a:lstStyle/>
-          <a:p>
-            <a:r>
-              <a:rPr lang="en-US" sz="1800">
-                <a:ln>
-                  <a:solidFill>
-                    <a:schemeClr val="accent6">
-                      <a:lumMod val="75000"/>
-                    </a:schemeClr>
-                  </a:solidFill>
-                </a:ln>
-                <a:solidFill>
-                  <a:schemeClr val="accent6"/>
-                </a:solidFill>
-                <a:sym typeface="Wingdings" panose="05000000000000000000" pitchFamily="2" charset="2"/>
-              </a:rPr>
-              <a:t></a:t>
-            </a:r>
-            <a:r>
-              <a:rPr lang="en-US" sz="1800">
-                <a:ln>
-                  <a:solidFill>
-                    <a:schemeClr val="accent6">
-                      <a:lumMod val="75000"/>
-                    </a:schemeClr>
-                  </a:solidFill>
-                </a:ln>
-                <a:sym typeface="Wingdings" panose="05000000000000000000" pitchFamily="2" charset="2"/>
-              </a:rPr>
-              <a:t>  </a:t>
-            </a:r>
-            <a:r>
-              <a:rPr lang="en-US" sz="1800"/>
-              <a:t>Completed</a:t>
-            </a:r>
-          </a:p>
-          <a:p>
-            <a:pPr lvl="1"/>
-            <a:r>
-              <a:rPr lang="en-US" sz="1800"/>
-              <a:t>EP Container setup completed.</a:t>
-            </a:r>
-          </a:p>
-          <a:p>
-            <a:pPr lvl="1"/>
-            <a:r>
-              <a:rPr lang="en-US" sz="1800" err="1"/>
-              <a:t>RemoteDiagProxy</a:t>
-            </a:r>
-            <a:r>
-              <a:rPr lang="en-US" sz="1800"/>
-              <a:t> implementation completed.</a:t>
-            </a:r>
-          </a:p>
-          <a:p>
-            <a:pPr lvl="1"/>
-            <a:r>
-              <a:rPr lang="en-US" sz="1800"/>
-              <a:t>Communication between </a:t>
-            </a:r>
-            <a:r>
-              <a:rPr lang="en-US" sz="1800" err="1"/>
-              <a:t>RemoteDiagProxy</a:t>
-            </a:r>
-            <a:r>
-              <a:rPr lang="en-US" sz="1800"/>
-              <a:t> and </a:t>
-            </a:r>
-            <a:r>
-              <a:rPr lang="en-US" sz="1800" err="1"/>
-              <a:t>RemoteDiag</a:t>
-            </a:r>
-            <a:r>
-              <a:rPr lang="en-US" sz="1800"/>
-              <a:t> established and verified.</a:t>
-            </a:r>
-          </a:p>
-        </p:txBody>
-      </p:sp>
-      <p:sp>
-        <p:nvSpPr>
-          <p:cNvPr id="6" name="AutoShape 2" descr="http://jira.lge.com/issue/secure/attachment/15785945/15785945_image-2026-07-29-16-20-32-949.png"/>
-          <p:cNvSpPr>
-            <a:spLocks noChangeAspect="1" noChangeArrowheads="1"/>
-          </p:cNvSpPr>
-          <p:nvPr/>
-        </p:nvSpPr>
-        <p:spPr bwMode="auto">
-          <a:xfrm>
-            <a:off x="155575" y="-144463"/>
-            <a:ext cx="304800" cy="304801"/>
-          </a:xfrm>
-          <a:prstGeom prst="rect">
-            <a:avLst/>
-          </a:prstGeom>
-          <a:noFill/>
-          <a:extLst>
-            <a:ext uri="{909E8E84-426E-40DD-AFC4-6F175D3DCCD1}">
-              <a14:hiddenFill xmlns:a14="http://schemas.microsoft.com/office/drawing/2010/main">
-                <a:solidFill>
-                  <a:srgbClr val="FFFFFF"/>
-                </a:solidFill>
-              </a14:hiddenFill>
-            </a:ext>
-          </a:extLst>
-        </p:spPr>
-        <p:txBody>
-          <a:bodyPr vert="horz" wrap="square" lIns="91440" tIns="45720" rIns="91440" bIns="45720" numCol="1" anchor="t" anchorCtr="0" compatLnSpc="1">
-            <a:prstTxWarp prst="textNoShape">
-              <a:avLst/>
-            </a:prstTxWarp>
-          </a:bodyPr>
-          <a:lstStyle/>
-          <a:p>
-            <a:endParaRPr lang="en-US"/>
-          </a:p>
-        </p:txBody>
-      </p:sp>
-      <p:sp>
-        <p:nvSpPr>
-          <p:cNvPr id="7" name="AutoShape 4" descr="http://jira.lge.com/issue/secure/attachment/15780505/15780505_image-2026-07-29-11-36-43-878.png"/>
-          <p:cNvSpPr>
-            <a:spLocks noChangeAspect="1" noChangeArrowheads="1"/>
-          </p:cNvSpPr>
-          <p:nvPr/>
-        </p:nvSpPr>
-        <p:spPr bwMode="auto">
-          <a:xfrm>
-            <a:off x="63500" y="-136525"/>
-            <a:ext cx="304800" cy="304800"/>
-          </a:xfrm>
-          <a:prstGeom prst="rect">
-            <a:avLst/>
-          </a:prstGeom>
-          <a:noFill/>
-          <a:extLst>
-            <a:ext uri="{909E8E84-426E-40DD-AFC4-6F175D3DCCD1}">
-              <a14:hiddenFill xmlns:a14="http://schemas.microsoft.com/office/drawing/2010/main">
-                <a:solidFill>
-                  <a:srgbClr val="FFFFFF"/>
-                </a:solidFill>
-              </a14:hiddenFill>
-            </a:ext>
-          </a:extLst>
-        </p:spPr>
-        <p:txBody>
-          <a:bodyPr vert="horz" wrap="square" lIns="91440" tIns="45720" rIns="91440" bIns="45720" numCol="1" anchor="t" anchorCtr="0" compatLnSpc="1">
-            <a:prstTxWarp prst="textNoShape">
-              <a:avLst/>
-            </a:prstTxWarp>
-          </a:bodyPr>
-          <a:lstStyle/>
-          <a:p>
-            <a:endParaRPr lang="en-US"/>
-          </a:p>
-        </p:txBody>
-      </p:sp>
-      <p:sp>
-        <p:nvSpPr>
-          <p:cNvPr id="8" name="AutoShape 6" descr="http://jira.lge.com/issue/secure/attachment/15780505/15780505_image-2026-07-29-11-36-43-878.png"/>
-          <p:cNvSpPr>
-            <a:spLocks noChangeAspect="1" noChangeArrowheads="1"/>
-          </p:cNvSpPr>
-          <p:nvPr/>
-        </p:nvSpPr>
-        <p:spPr bwMode="auto">
-          <a:xfrm>
-            <a:off x="307975" y="7937"/>
-            <a:ext cx="304800" cy="304801"/>
-          </a:xfrm>
-          <a:prstGeom prst="rect">
-            <a:avLst/>
-          </a:prstGeom>
-          <a:noFill/>
-          <a:extLst>
-            <a:ext uri="{909E8E84-426E-40DD-AFC4-6F175D3DCCD1}">
-              <a14:hiddenFill xmlns:a14="http://schemas.microsoft.com/office/drawing/2010/main">
-                <a:solidFill>
-                  <a:srgbClr val="FFFFFF"/>
-                </a:solidFill>
-              </a14:hiddenFill>
-            </a:ext>
-          </a:extLst>
-        </p:spPr>
-        <p:txBody>
-          <a:bodyPr vert="horz" wrap="square" lIns="91440" tIns="45720" rIns="91440" bIns="45720" numCol="1" anchor="t" anchorCtr="0" compatLnSpc="1">
-            <a:prstTxWarp prst="textNoShape">
-              <a:avLst/>
-            </a:prstTxWarp>
-          </a:bodyPr>
-          <a:lstStyle/>
-          <a:p>
-            <a:endParaRPr lang="en-US"/>
-          </a:p>
-        </p:txBody>
-      </p:sp>
-      <p:pic>
-        <p:nvPicPr>
-          <p:cNvPr id="9" name="Picture 8"/>
-          <p:cNvPicPr>
-            <a:picLocks noChangeAspect="1"/>
-          </p:cNvPicPr>
-          <p:nvPr/>
-        </p:nvPicPr>
-        <p:blipFill>
-          <a:blip r:embed="rId2">
-            <a:extLst>
-              <a:ext uri="{28A0092B-C50C-407E-A947-70E740481C1C}">
-                <a14:useLocalDpi xmlns:a14="http://schemas.microsoft.com/office/drawing/2010/main" val="0"/>
-              </a:ext>
-            </a:extLst>
-          </a:blip>
-          <a:stretch>
-            <a:fillRect/>
-          </a:stretch>
-        </p:blipFill>
-        <p:spPr>
-          <a:xfrm>
-            <a:off x="63500" y="2288022"/>
-            <a:ext cx="6404121" cy="1914992"/>
-          </a:xfrm>
-          <a:prstGeom prst="rect">
-            <a:avLst/>
-          </a:prstGeom>
-        </p:spPr>
-      </p:pic>
-      <p:pic>
-        <p:nvPicPr>
-          <p:cNvPr id="10" name="Picture 9"/>
-          <p:cNvPicPr>
-            <a:picLocks noChangeAspect="1"/>
-          </p:cNvPicPr>
-          <p:nvPr/>
-        </p:nvPicPr>
-        <p:blipFill>
-          <a:blip r:embed="rId3">
-            <a:extLst>
-              <a:ext uri="{28A0092B-C50C-407E-A947-70E740481C1C}">
-                <a14:useLocalDpi xmlns:a14="http://schemas.microsoft.com/office/drawing/2010/main" val="0"/>
-              </a:ext>
-            </a:extLst>
-          </a:blip>
-          <a:stretch>
-            <a:fillRect/>
-          </a:stretch>
-        </p:blipFill>
-        <p:spPr>
-          <a:xfrm>
-            <a:off x="5170203" y="3978079"/>
-            <a:ext cx="6877864" cy="2879922"/>
-          </a:xfrm>
-          <a:prstGeom prst="rect">
-            <a:avLst/>
-          </a:prstGeom>
-        </p:spPr>
-      </p:pic>
-      <p:sp>
-        <p:nvSpPr>
-          <p:cNvPr id="4" name="TextBox 3"/>
-          <p:cNvSpPr txBox="1"/>
-          <p:nvPr/>
-        </p:nvSpPr>
-        <p:spPr>
-          <a:xfrm>
-            <a:off x="368300" y="5455138"/>
-            <a:ext cx="4232056" cy="923330"/>
-          </a:xfrm>
-          <a:prstGeom prst="rect">
-            <a:avLst/>
-          </a:prstGeom>
-          <a:noFill/>
-        </p:spPr>
-        <p:txBody>
-          <a:bodyPr wrap="none" rtlCol="0">
-            <a:spAutoFit/>
-          </a:bodyPr>
-          <a:lstStyle/>
-          <a:p>
-            <a:pPr marL="285750" indent="-285750">
-              <a:buFont typeface="Arial" panose="020B0604020202020204" pitchFamily="34" charset="0"/>
-              <a:buChar char="•"/>
-            </a:pPr>
-            <a:r>
-              <a:rPr lang="en-US">
-                <a:solidFill>
-                  <a:schemeClr val="accent2">
-                    <a:lumMod val="75000"/>
-                  </a:schemeClr>
-                </a:solidFill>
-                <a:sym typeface="Wingdings" panose="05000000000000000000" pitchFamily="2" charset="2"/>
-              </a:rPr>
-              <a:t></a:t>
-            </a:r>
-            <a:r>
-              <a:rPr lang="en-US">
-                <a:sym typeface="Wingdings" panose="05000000000000000000" pitchFamily="2" charset="2"/>
-              </a:rPr>
-              <a:t> </a:t>
-            </a:r>
-            <a:r>
-              <a:rPr lang="en-US"/>
-              <a:t>Next Step:</a:t>
-            </a:r>
-          </a:p>
-          <a:p>
-            <a:pPr marL="742950" lvl="1" indent="-285750">
-              <a:buFont typeface="Arial" panose="020B0604020202020204" pitchFamily="34" charset="0"/>
-              <a:buChar char="•"/>
-            </a:pPr>
-            <a:r>
-              <a:rPr lang="en-US"/>
-              <a:t>SID Filter implementation &amp; testing</a:t>
-            </a:r>
-          </a:p>
-          <a:p>
-            <a:endParaRPr lang="en-US"/>
-          </a:p>
-        </p:txBody>
-      </p:sp>
-    </p:spTree>
-    <p:extLst>
-      <p:ext uri="{BB962C8B-B14F-4D97-AF65-F5344CB8AC3E}">
-        <p14:creationId xmlns:p14="http://schemas.microsoft.com/office/powerpoint/2010/main" val="3157677138"/>
-      </p:ext>
-    </p:extLst>
-  </p:cSld>
-  <p:clrMapOvr>
-    <a:masterClrMapping/>
-  </p:clrMapOvr>
-  <p:timing>
-    <p:tnLst>
-      <p:par>
-        <p:cTn id="1" dur="indefinite" restart="never" nodeType="tmRoot"/>
-      </p:par>
-    </p:tnLst>
-  </p:timing>
-</p:sld>
-</file>
-
-<file path=ppt/slides/slide16.xml><?xml version="1.0" encoding="utf-8"?>
-<p:sld xmlns:a="http://schemas.openxmlformats.org/drawingml/2006/main" xmlns:r="http://schemas.openxmlformats.org/officeDocument/2006/relationships" xmlns:p="http://schemas.openxmlformats.org/presentationml/2006/main">
-  <p:cSld>
-    <p:spTree>
-      <p:nvGrpSpPr>
-        <p:cNvPr id="1" name=""/>
-        <p:cNvGrpSpPr/>
-        <p:nvPr/>
-      </p:nvGrpSpPr>
-      <p:grpSpPr>
-        <a:xfrm>
-          <a:off x="0" y="0"/>
-          <a:ext cx="0" cy="0"/>
-          <a:chOff x="0" y="0"/>
-          <a:chExt cx="0" cy="0"/>
-        </a:xfrm>
-      </p:grpSpPr>
-      <p:sp>
-        <p:nvSpPr>
-          <p:cNvPr id="2" name="Title 1"/>
-          <p:cNvSpPr>
-            <a:spLocks noGrp="1"/>
-          </p:cNvSpPr>
-          <p:nvPr>
-            <p:ph type="title"/>
-          </p:nvPr>
-        </p:nvSpPr>
-        <p:spPr/>
-        <p:txBody>
-          <a:bodyPr/>
-          <a:lstStyle/>
-          <a:p>
             <a:endParaRPr lang="en-US"/>
           </a:p>
         </p:txBody>
@@ -9394,10 +8669,17 @@
   <p:clrMapOvr>
     <a:masterClrMapping/>
   </p:clrMapOvr>
+  <p:timing>
+    <p:tnLst>
+      <p:par>
+        <p:cTn id="1" dur="indefinite" restart="never" nodeType="tmRoot"/>
+      </p:par>
+    </p:tnLst>
+  </p:timing>
 </p:sld>
 </file>
 
-<file path=ppt/slides/slide17.xml><?xml version="1.0" encoding="utf-8"?>
+<file path=ppt/slides/slide16.xml><?xml version="1.0" encoding="utf-8"?>
 <p:sld xmlns:a="http://schemas.openxmlformats.org/drawingml/2006/main" xmlns:r="http://schemas.openxmlformats.org/officeDocument/2006/relationships" xmlns:p="http://schemas.openxmlformats.org/presentationml/2006/main">
   <p:cSld>
     <p:spTree>
@@ -9419,7 +8701,7 @@
           <p:cNvPr id="2" name="Title 1">
             <a:extLst>
               <a:ext uri="{FF2B5EF4-FFF2-40B4-BE49-F238E27FC236}">
-                <a16:creationId xmlns="" xmlns:a16="http://schemas.microsoft.com/office/drawing/2014/main" id="{65C86E6E-BE59-7A7B-6BE9-16A0A094C3D6}"/>
+                <a16:creationId xmlns:a16="http://schemas.microsoft.com/office/drawing/2014/main" xmlns="" id="{65C86E6E-BE59-7A7B-6BE9-16A0A094C3D6}"/>
               </a:ext>
             </a:extLst>
           </p:cNvPr>
@@ -9447,7 +8729,7 @@
           <p:cNvPr id="7" name="Content Placeholder 6">
             <a:extLst>
               <a:ext uri="{FF2B5EF4-FFF2-40B4-BE49-F238E27FC236}">
-                <a16:creationId xmlns="" xmlns:a16="http://schemas.microsoft.com/office/drawing/2014/main" id="{AD4A4EC6-9BB8-2849-8D75-05C44DE9A384}"/>
+                <a16:creationId xmlns:a16="http://schemas.microsoft.com/office/drawing/2014/main" xmlns="" id="{AD4A4EC6-9BB8-2849-8D75-05C44DE9A384}"/>
               </a:ext>
             </a:extLst>
           </p:cNvPr>
@@ -9479,7 +8761,7 @@
           <p:cNvPr id="9" name="Picture 8">
             <a:extLst>
               <a:ext uri="{FF2B5EF4-FFF2-40B4-BE49-F238E27FC236}">
-                <a16:creationId xmlns="" xmlns:a16="http://schemas.microsoft.com/office/drawing/2014/main" id="{C985C62C-76E5-84A1-DEF1-FC486F2BF179}"/>
+                <a16:creationId xmlns:a16="http://schemas.microsoft.com/office/drawing/2014/main" xmlns="" id="{C985C62C-76E5-84A1-DEF1-FC486F2BF179}"/>
               </a:ext>
             </a:extLst>
           </p:cNvPr>
@@ -9514,10 +8796,17 @@
   <p:clrMapOvr>
     <a:masterClrMapping/>
   </p:clrMapOvr>
+  <p:timing>
+    <p:tnLst>
+      <p:par>
+        <p:cTn id="1" dur="indefinite" restart="never" nodeType="tmRoot"/>
+      </p:par>
+    </p:tnLst>
+  </p:timing>
 </p:sld>
 </file>
 
-<file path=ppt/slides/slide18.xml><?xml version="1.0" encoding="utf-8"?>
+<file path=ppt/slides/slide17.xml><?xml version="1.0" encoding="utf-8"?>
 <p:sld xmlns:a="http://schemas.openxmlformats.org/drawingml/2006/main" xmlns:r="http://schemas.openxmlformats.org/officeDocument/2006/relationships" xmlns:p="http://schemas.openxmlformats.org/presentationml/2006/main">
   <p:cSld>
     <p:spTree>
@@ -9536,94 +8825,6 @@
       </p:grpSpPr>
       <p:sp>
         <p:nvSpPr>
-          <p:cNvPr id="4" name="Shape 3"/>
-          <p:cNvSpPr/>
-          <p:nvPr/>
-        </p:nvSpPr>
-        <p:spPr>
-          <a:xfrm>
-            <a:off x="160867" y="990600"/>
-            <a:ext cx="3608245" cy="5740400"/>
-          </a:xfrm>
-          <a:prstGeom prst="roundRect">
-            <a:avLst>
-              <a:gd name="adj" fmla="val 1639"/>
-            </a:avLst>
-          </a:prstGeom>
-          <a:solidFill>
-            <a:srgbClr val="FDE9D7">
-              <a:alpha val="92000"/>
-            </a:srgbClr>
-          </a:solidFill>
-          <a:ln w="15240">
-            <a:solidFill>
-              <a:srgbClr val="B85C1B">
-                <a:alpha val="80000"/>
-              </a:srgbClr>
-            </a:solidFill>
-            <a:prstDash val="solid"/>
-          </a:ln>
-        </p:spPr>
-        <p:txBody>
-          <a:bodyPr/>
-          <a:lstStyle/>
-          <a:p>
-            <a:r>
-              <a:rPr lang="en-US" sz="2000"/>
-              <a:t>Current architecture: the entire telematics stack (DCM) runs in a single partition.</a:t>
-            </a:r>
-          </a:p>
-        </p:txBody>
-      </p:sp>
-      <p:sp>
-        <p:nvSpPr>
-          <p:cNvPr id="34" name="Rectangle 33"/>
-          <p:cNvSpPr/>
-          <p:nvPr/>
-        </p:nvSpPr>
-        <p:spPr>
-          <a:xfrm>
-            <a:off x="434156" y="2218098"/>
-            <a:ext cx="3045023" cy="3573101"/>
-          </a:xfrm>
-          <a:prstGeom prst="rect">
-            <a:avLst/>
-          </a:prstGeom>
-          <a:noFill/>
-        </p:spPr>
-        <p:style>
-          <a:lnRef idx="2">
-            <a:schemeClr val="accent1">
-              <a:shade val="50000"/>
-            </a:schemeClr>
-          </a:lnRef>
-          <a:fillRef idx="1">
-            <a:schemeClr val="accent1"/>
-          </a:fillRef>
-          <a:effectRef idx="0">
-            <a:schemeClr val="accent1"/>
-          </a:effectRef>
-          <a:fontRef idx="minor">
-            <a:schemeClr val="lt1"/>
-          </a:fontRef>
-        </p:style>
-        <p:txBody>
-          <a:bodyPr rtlCol="0" anchor="t" anchorCtr="0"/>
-          <a:lstStyle/>
-          <a:p>
-            <a:r>
-              <a:rPr lang="en-US">
-                <a:solidFill>
-                  <a:schemeClr val="tx1"/>
-                </a:solidFill>
-              </a:rPr>
-              <a:t>ECU model</a:t>
-            </a:r>
-          </a:p>
-        </p:txBody>
-      </p:sp>
-      <p:sp>
-        <p:nvSpPr>
           <p:cNvPr id="2" name="Title 1"/>
           <p:cNvSpPr>
             <a:spLocks noGrp="1"/>
@@ -9637,994 +8838,13 @@
           <a:bodyPr/>
           <a:lstStyle/>
           <a:p>
-            <a:r>
-              <a:rPr lang="en-US"/>
-              <a:t>Context &amp; Motivation</a:t>
-            </a:r>
-          </a:p>
-        </p:txBody>
-      </p:sp>
-      <p:grpSp>
-        <p:nvGrpSpPr>
-          <p:cNvPr id="6" name="Group 5"/>
-          <p:cNvGrpSpPr/>
-          <p:nvPr/>
-        </p:nvGrpSpPr>
-        <p:grpSpPr>
-          <a:xfrm>
-            <a:off x="580422" y="2756069"/>
-            <a:ext cx="2724660" cy="2920832"/>
-            <a:chOff x="384810" y="2872581"/>
-            <a:chExt cx="2567940" cy="2088355"/>
-          </a:xfrm>
-        </p:grpSpPr>
-        <p:grpSp>
-          <p:nvGrpSpPr>
-            <p:cNvPr id="5" name="Group 4"/>
-            <p:cNvGrpSpPr/>
-            <p:nvPr/>
-          </p:nvGrpSpPr>
-          <p:grpSpPr>
-            <a:xfrm>
-              <a:off x="384810" y="2872581"/>
-              <a:ext cx="2567940" cy="1788319"/>
-              <a:chOff x="403860" y="1881981"/>
-              <a:chExt cx="2567940" cy="1788319"/>
-            </a:xfrm>
-          </p:grpSpPr>
-          <p:sp>
-            <p:nvSpPr>
-              <p:cNvPr id="13" name="Rectangle 12"/>
-              <p:cNvSpPr/>
-              <p:nvPr/>
-            </p:nvSpPr>
-            <p:spPr>
-              <a:xfrm>
-                <a:off x="403860" y="1881981"/>
-                <a:ext cx="2567940" cy="1788319"/>
-              </a:xfrm>
-              <a:prstGeom prst="rect">
-                <a:avLst/>
-              </a:prstGeom>
-              <a:solidFill>
-                <a:srgbClr val="FFFFE0"/>
-              </a:solidFill>
-            </p:spPr>
-            <p:style>
-              <a:lnRef idx="2">
-                <a:schemeClr val="accent1">
-                  <a:shade val="50000"/>
-                </a:schemeClr>
-              </a:lnRef>
-              <a:fillRef idx="1">
-                <a:schemeClr val="accent1"/>
-              </a:fillRef>
-              <a:effectRef idx="0">
-                <a:schemeClr val="accent1"/>
-              </a:effectRef>
-              <a:fontRef idx="minor">
-                <a:schemeClr val="lt1"/>
-              </a:fontRef>
-            </p:style>
-            <p:txBody>
-              <a:bodyPr rtlCol="0" anchor="t" anchorCtr="0"/>
-              <a:lstStyle/>
-              <a:p>
-                <a:pPr algn="ctr"/>
-                <a:r>
-                  <a:rPr lang="en-US">
-                    <a:solidFill>
-                      <a:schemeClr val="tx1"/>
-                    </a:solidFill>
-                  </a:rPr>
-                  <a:t>DCM</a:t>
-                </a:r>
-              </a:p>
-            </p:txBody>
-          </p:sp>
-          <p:sp>
-            <p:nvSpPr>
-              <p:cNvPr id="8" name="Rectangle 7"/>
-              <p:cNvSpPr/>
-              <p:nvPr/>
-            </p:nvSpPr>
-            <p:spPr>
-              <a:xfrm>
-                <a:off x="490167" y="2265207"/>
-                <a:ext cx="2405432" cy="319085"/>
-              </a:xfrm>
-              <a:prstGeom prst="rect">
-                <a:avLst/>
-              </a:prstGeom>
-              <a:solidFill>
-                <a:schemeClr val="accent6">
-                  <a:lumMod val="75000"/>
-                </a:schemeClr>
-              </a:solidFill>
-              <a:ln w="12700">
-                <a:solidFill>
-                  <a:schemeClr val="tx1">
-                    <a:lumMod val="95000"/>
-                    <a:lumOff val="5000"/>
-                  </a:schemeClr>
-                </a:solidFill>
-              </a:ln>
-            </p:spPr>
-            <p:style>
-              <a:lnRef idx="2">
-                <a:schemeClr val="accent1">
-                  <a:shade val="50000"/>
-                </a:schemeClr>
-              </a:lnRef>
-              <a:fillRef idx="1">
-                <a:schemeClr val="accent1"/>
-              </a:fillRef>
-              <a:effectRef idx="0">
-                <a:schemeClr val="accent1"/>
-              </a:effectRef>
-              <a:fontRef idx="minor">
-                <a:schemeClr val="lt1"/>
-              </a:fontRef>
-            </p:style>
-            <p:txBody>
-              <a:bodyPr rtlCol="0" anchor="ctr" anchorCtr="0"/>
-              <a:lstStyle/>
-              <a:p>
-                <a:pPr algn="ctr"/>
-                <a:r>
-                  <a:rPr lang="en-US">
-                    <a:solidFill>
-                      <a:schemeClr val="bg1"/>
-                    </a:solidFill>
-                  </a:rPr>
-                  <a:t>OEM Apps</a:t>
-                </a:r>
-              </a:p>
-            </p:txBody>
-          </p:sp>
-          <p:grpSp>
-            <p:nvGrpSpPr>
-              <p:cNvPr id="9" name="Group 8"/>
-              <p:cNvGrpSpPr/>
-              <p:nvPr/>
-            </p:nvGrpSpPr>
-            <p:grpSpPr>
-              <a:xfrm>
-                <a:off x="490167" y="2712881"/>
-                <a:ext cx="2405432" cy="382110"/>
-                <a:chOff x="2191543" y="3101340"/>
-                <a:chExt cx="2260857" cy="382110"/>
-              </a:xfrm>
-            </p:grpSpPr>
-            <p:sp>
-              <p:nvSpPr>
-                <p:cNvPr id="10" name="Rectangle 9"/>
-                <p:cNvSpPr/>
-                <p:nvPr/>
-              </p:nvSpPr>
-              <p:spPr>
-                <a:xfrm>
-                  <a:off x="2220230" y="3129915"/>
-                  <a:ext cx="2232170" cy="353535"/>
-                </a:xfrm>
-                <a:prstGeom prst="rect">
-                  <a:avLst/>
-                </a:prstGeom>
-                <a:solidFill>
-                  <a:srgbClr val="C2F0FF"/>
-                </a:solidFill>
-                <a:ln w="12700">
-                  <a:solidFill>
-                    <a:schemeClr val="tx1">
-                      <a:lumMod val="95000"/>
-                      <a:lumOff val="5000"/>
-                    </a:schemeClr>
-                  </a:solidFill>
-                </a:ln>
-              </p:spPr>
-              <p:style>
-                <a:lnRef idx="2">
-                  <a:schemeClr val="accent1">
-                    <a:shade val="50000"/>
-                  </a:schemeClr>
-                </a:lnRef>
-                <a:fillRef idx="1">
-                  <a:schemeClr val="accent1"/>
-                </a:fillRef>
-                <a:effectRef idx="0">
-                  <a:schemeClr val="accent1"/>
-                </a:effectRef>
-                <a:fontRef idx="minor">
-                  <a:schemeClr val="lt1"/>
-                </a:fontRef>
-              </p:style>
-              <p:txBody>
-                <a:bodyPr rtlCol="0" anchor="ctr" anchorCtr="0"/>
-                <a:lstStyle/>
-                <a:p>
-                  <a:pPr algn="ctr"/>
-                  <a:endParaRPr lang="en-US">
-                    <a:solidFill>
-                      <a:schemeClr val="tx1">
-                        <a:lumMod val="95000"/>
-                        <a:lumOff val="5000"/>
-                      </a:schemeClr>
-                    </a:solidFill>
-                  </a:endParaRPr>
-                </a:p>
-              </p:txBody>
-            </p:sp>
-            <p:sp>
-              <p:nvSpPr>
-                <p:cNvPr id="11" name="Rectangle 10"/>
-                <p:cNvSpPr/>
-                <p:nvPr/>
-              </p:nvSpPr>
-              <p:spPr>
-                <a:xfrm>
-                  <a:off x="2191543" y="3101340"/>
-                  <a:ext cx="2232170" cy="354643"/>
-                </a:xfrm>
-                <a:prstGeom prst="rect">
-                  <a:avLst/>
-                </a:prstGeom>
-                <a:solidFill>
-                  <a:srgbClr val="C2F0FF"/>
-                </a:solidFill>
-                <a:ln w="12700">
-                  <a:solidFill>
-                    <a:schemeClr val="tx1">
-                      <a:lumMod val="95000"/>
-                      <a:lumOff val="5000"/>
-                    </a:schemeClr>
-                  </a:solidFill>
-                </a:ln>
-              </p:spPr>
-              <p:style>
-                <a:lnRef idx="2">
-                  <a:schemeClr val="accent1">
-                    <a:shade val="50000"/>
-                  </a:schemeClr>
-                </a:lnRef>
-                <a:fillRef idx="1">
-                  <a:schemeClr val="accent1"/>
-                </a:fillRef>
-                <a:effectRef idx="0">
-                  <a:schemeClr val="accent1"/>
-                </a:effectRef>
-                <a:fontRef idx="minor">
-                  <a:schemeClr val="lt1"/>
-                </a:fontRef>
-              </p:style>
-              <p:txBody>
-                <a:bodyPr rtlCol="0" anchor="ctr" anchorCtr="0"/>
-                <a:lstStyle/>
-                <a:p>
-                  <a:pPr algn="ctr"/>
-                  <a:r>
-                    <a:rPr lang="en-US">
-                      <a:solidFill>
-                        <a:schemeClr val="tx1">
-                          <a:lumMod val="95000"/>
-                          <a:lumOff val="5000"/>
-                        </a:schemeClr>
-                      </a:solidFill>
-                    </a:rPr>
-                    <a:t>LGE Apps/Services</a:t>
-                  </a:r>
-                </a:p>
-              </p:txBody>
-            </p:sp>
-          </p:grpSp>
-          <p:sp>
-            <p:nvSpPr>
-              <p:cNvPr id="15" name="Rectangle 14"/>
-              <p:cNvSpPr/>
-              <p:nvPr/>
-            </p:nvSpPr>
-            <p:spPr>
-              <a:xfrm>
-                <a:off x="490167" y="3223580"/>
-                <a:ext cx="2405432" cy="326069"/>
-              </a:xfrm>
-              <a:prstGeom prst="rect">
-                <a:avLst/>
-              </a:prstGeom>
-              <a:solidFill>
-                <a:schemeClr val="bg2">
-                  <a:lumMod val="75000"/>
-                </a:schemeClr>
-              </a:solidFill>
-              <a:ln w="12700">
-                <a:solidFill>
-                  <a:schemeClr val="tx1">
-                    <a:lumMod val="95000"/>
-                    <a:lumOff val="5000"/>
-                  </a:schemeClr>
-                </a:solidFill>
-              </a:ln>
-            </p:spPr>
-            <p:style>
-              <a:lnRef idx="2">
-                <a:schemeClr val="accent1">
-                  <a:shade val="50000"/>
-                </a:schemeClr>
-              </a:lnRef>
-              <a:fillRef idx="1">
-                <a:schemeClr val="accent1"/>
-              </a:fillRef>
-              <a:effectRef idx="0">
-                <a:schemeClr val="accent1"/>
-              </a:effectRef>
-              <a:fontRef idx="minor">
-                <a:schemeClr val="lt1"/>
-              </a:fontRef>
-            </p:style>
-            <p:txBody>
-              <a:bodyPr rtlCol="0" anchor="ctr" anchorCtr="0"/>
-              <a:lstStyle/>
-              <a:p>
-                <a:pPr algn="ctr"/>
-                <a:r>
-                  <a:rPr lang="en-US">
-                    <a:solidFill>
-                      <a:schemeClr val="tx1">
-                        <a:lumMod val="95000"/>
-                        <a:lumOff val="5000"/>
-                      </a:schemeClr>
-                    </a:solidFill>
-                  </a:rPr>
-                  <a:t>Linux Kernel/Driver</a:t>
-                </a:r>
-              </a:p>
-            </p:txBody>
-          </p:sp>
-        </p:grpSp>
-        <p:sp>
-          <p:nvSpPr>
-            <p:cNvPr id="19" name="Rectangle 18"/>
-            <p:cNvSpPr/>
-            <p:nvPr/>
-          </p:nvSpPr>
-          <p:spPr>
-            <a:xfrm>
-              <a:off x="384810" y="4720259"/>
-              <a:ext cx="2567940" cy="240677"/>
-            </a:xfrm>
-            <a:prstGeom prst="rect">
-              <a:avLst/>
-            </a:prstGeom>
-            <a:solidFill>
-              <a:schemeClr val="bg2">
-                <a:lumMod val="75000"/>
-              </a:schemeClr>
-            </a:solidFill>
-            <a:ln w="12700">
-              <a:solidFill>
-                <a:schemeClr val="tx1">
-                  <a:lumMod val="95000"/>
-                  <a:lumOff val="5000"/>
-                </a:schemeClr>
-              </a:solidFill>
-            </a:ln>
-          </p:spPr>
-          <p:style>
-            <a:lnRef idx="2">
-              <a:schemeClr val="accent1">
-                <a:shade val="50000"/>
-              </a:schemeClr>
-            </a:lnRef>
-            <a:fillRef idx="1">
-              <a:schemeClr val="accent1"/>
-            </a:fillRef>
-            <a:effectRef idx="0">
-              <a:schemeClr val="accent1"/>
-            </a:effectRef>
-            <a:fontRef idx="minor">
-              <a:schemeClr val="lt1"/>
-            </a:fontRef>
-          </p:style>
-          <p:txBody>
-            <a:bodyPr rtlCol="0" anchor="ctr" anchorCtr="0"/>
-            <a:lstStyle/>
-            <a:p>
-              <a:pPr algn="ctr"/>
-              <a:r>
-                <a:rPr lang="en-US">
-                  <a:solidFill>
-                    <a:schemeClr val="tx1">
-                      <a:lumMod val="95000"/>
-                      <a:lumOff val="5000"/>
-                    </a:schemeClr>
-                  </a:solidFill>
-                </a:rPr>
-                <a:t>MCU</a:t>
-              </a:r>
-            </a:p>
-          </p:txBody>
-        </p:sp>
-      </p:grpSp>
-      <p:sp>
-        <p:nvSpPr>
-          <p:cNvPr id="22" name="Shape 3"/>
-          <p:cNvSpPr/>
-          <p:nvPr/>
-        </p:nvSpPr>
-        <p:spPr>
-          <a:xfrm>
-            <a:off x="3943431" y="990600"/>
-            <a:ext cx="8115217" cy="5740400"/>
-          </a:xfrm>
-          <a:prstGeom prst="roundRect">
-            <a:avLst>
-              <a:gd name="adj" fmla="val 1639"/>
-            </a:avLst>
-          </a:prstGeom>
-          <a:solidFill>
-            <a:schemeClr val="accent6">
-              <a:lumMod val="20000"/>
-              <a:lumOff val="80000"/>
-              <a:alpha val="92000"/>
-            </a:schemeClr>
-          </a:solidFill>
-          <a:ln w="15240">
-            <a:solidFill>
-              <a:schemeClr val="accent6">
-                <a:lumMod val="75000"/>
-                <a:alpha val="80000"/>
-              </a:schemeClr>
-            </a:solidFill>
-            <a:prstDash val="solid"/>
-          </a:ln>
-        </p:spPr>
-        <p:txBody>
-          <a:bodyPr/>
-          <a:lstStyle/>
-          <a:p>
-            <a:r>
-              <a:rPr lang="en-US" sz="2400"/>
-              <a:t>New OEM security requirement:</a:t>
-            </a:r>
-          </a:p>
-          <a:p>
-            <a:pPr marL="285750" indent="-285750">
-              <a:buFont typeface="Arial" panose="020B0604020202020204" pitchFamily="34" charset="0"/>
-              <a:buChar char="•"/>
-            </a:pPr>
-            <a:r>
-              <a:rPr lang="en-US" sz="2000"/>
-              <a:t>When Entry Point (EP) Partition is compromised, the damage </a:t>
-            </a:r>
-            <a:r>
-              <a:rPr lang="en-US" sz="2000" b="1"/>
-              <a:t>must NOT propagate</a:t>
-            </a:r>
-            <a:r>
-              <a:rPr lang="en-US" sz="2000"/>
-              <a:t> to Internal Partition and internal CAN bus.</a:t>
-            </a:r>
-          </a:p>
-          <a:p>
-            <a:pPr marL="285750" indent="-285750">
-              <a:buFont typeface="Arial" panose="020B0604020202020204" pitchFamily="34" charset="0"/>
-              <a:buChar char="•"/>
-            </a:pPr>
-            <a:r>
-              <a:rPr lang="en-US" sz="2000"/>
-              <a:t>Unauthorized diagnostic commands related to reprogramming </a:t>
-            </a:r>
-            <a:r>
-              <a:rPr lang="en-US" sz="2000" b="1"/>
-              <a:t>must be filtered</a:t>
-            </a:r>
-            <a:r>
-              <a:rPr lang="en-US" sz="2000"/>
-              <a:t>.</a:t>
-            </a:r>
-          </a:p>
-          <a:p>
-            <a:pPr marL="742950" lvl="1" indent="-285750">
-              <a:buFont typeface="Arial" panose="020B0604020202020204" pitchFamily="34" charset="0"/>
-              <a:buChar char="•"/>
-            </a:pPr>
-            <a:endParaRPr lang="en-US" sz="2400"/>
-          </a:p>
-        </p:txBody>
-      </p:sp>
-      <p:pic>
-        <p:nvPicPr>
-          <p:cNvPr id="23" name="Picture 22"/>
-          <p:cNvPicPr>
-            <a:picLocks noChangeAspect="1"/>
-          </p:cNvPicPr>
-          <p:nvPr/>
-        </p:nvPicPr>
-        <p:blipFill>
-          <a:blip r:embed="rId3"/>
-          <a:stretch>
-            <a:fillRect/>
-          </a:stretch>
-        </p:blipFill>
-        <p:spPr>
-          <a:xfrm>
-            <a:off x="4064623" y="3485584"/>
-            <a:ext cx="3654200" cy="3147995"/>
-          </a:xfrm>
-          <a:prstGeom prst="rect">
-            <a:avLst/>
-          </a:prstGeom>
-        </p:spPr>
-      </p:pic>
-      <p:pic>
-        <p:nvPicPr>
-          <p:cNvPr id="24" name="Picture 23"/>
-          <p:cNvPicPr>
-            <a:picLocks noChangeAspect="1"/>
-          </p:cNvPicPr>
-          <p:nvPr/>
-        </p:nvPicPr>
-        <p:blipFill>
-          <a:blip r:embed="rId4"/>
-          <a:stretch>
-            <a:fillRect/>
-          </a:stretch>
-        </p:blipFill>
-        <p:spPr>
-          <a:xfrm>
-            <a:off x="7893142" y="4819649"/>
-            <a:ext cx="2572697" cy="1813930"/>
-          </a:xfrm>
-          <a:prstGeom prst="rect">
-            <a:avLst/>
-          </a:prstGeom>
-        </p:spPr>
-      </p:pic>
-      <p:cxnSp>
-        <p:nvCxnSpPr>
-          <p:cNvPr id="37" name="Straight Connector 36"/>
-          <p:cNvCxnSpPr/>
-          <p:nvPr/>
-        </p:nvCxnSpPr>
-        <p:spPr>
-          <a:xfrm>
-            <a:off x="912452" y="6298684"/>
-            <a:ext cx="2000250" cy="0"/>
-          </a:xfrm>
-          <a:prstGeom prst="line">
-            <a:avLst/>
-          </a:prstGeom>
-          <a:ln w="19050">
-            <a:solidFill>
-              <a:schemeClr val="bg2">
-                <a:lumMod val="50000"/>
-              </a:schemeClr>
-            </a:solidFill>
-          </a:ln>
-        </p:spPr>
-        <p:style>
-          <a:lnRef idx="1">
-            <a:schemeClr val="accent1"/>
-          </a:lnRef>
-          <a:fillRef idx="0">
-            <a:schemeClr val="accent1"/>
-          </a:fillRef>
-          <a:effectRef idx="0">
-            <a:schemeClr val="accent1"/>
-          </a:effectRef>
-          <a:fontRef idx="minor">
-            <a:schemeClr val="tx1"/>
-          </a:fontRef>
-        </p:style>
-      </p:cxnSp>
-      <p:cxnSp>
-        <p:nvCxnSpPr>
-          <p:cNvPr id="38" name="Straight Connector 37"/>
-          <p:cNvCxnSpPr/>
-          <p:nvPr/>
-        </p:nvCxnSpPr>
-        <p:spPr>
-          <a:xfrm>
-            <a:off x="1064851" y="6365359"/>
-            <a:ext cx="2000250" cy="0"/>
-          </a:xfrm>
-          <a:prstGeom prst="line">
-            <a:avLst/>
-          </a:prstGeom>
-          <a:ln w="19050">
-            <a:solidFill>
-              <a:schemeClr val="bg2">
-                <a:lumMod val="50000"/>
-              </a:schemeClr>
-            </a:solidFill>
-          </a:ln>
-        </p:spPr>
-        <p:style>
-          <a:lnRef idx="1">
-            <a:schemeClr val="accent1"/>
-          </a:lnRef>
-          <a:fillRef idx="0">
-            <a:schemeClr val="accent1"/>
-          </a:fillRef>
-          <a:effectRef idx="0">
-            <a:schemeClr val="accent1"/>
-          </a:effectRef>
-          <a:fontRef idx="minor">
-            <a:schemeClr val="tx1"/>
-          </a:fontRef>
-        </p:style>
-      </p:cxnSp>
-      <p:sp>
-        <p:nvSpPr>
-          <p:cNvPr id="39" name="TextBox 38"/>
-          <p:cNvSpPr txBox="1"/>
-          <p:nvPr/>
-        </p:nvSpPr>
-        <p:spPr>
-          <a:xfrm>
-            <a:off x="1569676" y="6313012"/>
-            <a:ext cx="1495425" cy="369332"/>
-          </a:xfrm>
-          <a:prstGeom prst="rect">
-            <a:avLst/>
-          </a:prstGeom>
-          <a:noFill/>
-        </p:spPr>
-        <p:txBody>
-          <a:bodyPr wrap="square" rtlCol="0">
-            <a:spAutoFit/>
-          </a:bodyPr>
-          <a:lstStyle/>
-          <a:p>
-            <a:r>
-              <a:rPr lang="en-US"/>
-              <a:t>Internal CAN</a:t>
-            </a:r>
-          </a:p>
-        </p:txBody>
-      </p:sp>
-      <p:cxnSp>
-        <p:nvCxnSpPr>
-          <p:cNvPr id="40" name="Straight Arrow Connector 39"/>
-          <p:cNvCxnSpPr/>
-          <p:nvPr/>
-        </p:nvCxnSpPr>
-        <p:spPr>
-          <a:xfrm>
-            <a:off x="1848939" y="5791200"/>
-            <a:ext cx="0" cy="507484"/>
-          </a:xfrm>
-          <a:prstGeom prst="straightConnector1">
-            <a:avLst/>
-          </a:prstGeom>
-          <a:ln w="19050">
-            <a:solidFill>
-              <a:schemeClr val="bg2">
-                <a:lumMod val="50000"/>
-              </a:schemeClr>
-            </a:solidFill>
-            <a:headEnd type="triangle"/>
-            <a:tailEnd type="triangle"/>
-          </a:ln>
-        </p:spPr>
-        <p:style>
-          <a:lnRef idx="1">
-            <a:schemeClr val="accent1"/>
-          </a:lnRef>
-          <a:fillRef idx="0">
-            <a:schemeClr val="accent1"/>
-          </a:fillRef>
-          <a:effectRef idx="0">
-            <a:schemeClr val="accent1"/>
-          </a:effectRef>
-          <a:fontRef idx="minor">
-            <a:schemeClr val="tx1"/>
-          </a:fontRef>
-        </p:style>
-      </p:cxnSp>
-      <p:sp>
-        <p:nvSpPr>
-          <p:cNvPr id="43" name="TextBox 42"/>
-          <p:cNvSpPr txBox="1"/>
-          <p:nvPr/>
-        </p:nvSpPr>
-        <p:spPr>
-          <a:xfrm>
-            <a:off x="1809657" y="5844957"/>
-            <a:ext cx="1495425" cy="369332"/>
-          </a:xfrm>
-          <a:prstGeom prst="rect">
-            <a:avLst/>
-          </a:prstGeom>
-          <a:noFill/>
-        </p:spPr>
-        <p:txBody>
-          <a:bodyPr wrap="square" rtlCol="0">
-            <a:spAutoFit/>
-          </a:bodyPr>
-          <a:lstStyle/>
-          <a:p>
-            <a:r>
-              <a:rPr lang="en-US"/>
-              <a:t>data flow</a:t>
-            </a:r>
+            <a:endParaRPr lang="en-US"/>
           </a:p>
         </p:txBody>
       </p:sp>
       <p:sp>
         <p:nvSpPr>
-          <p:cNvPr id="45" name="TextBox 44"/>
-          <p:cNvSpPr txBox="1"/>
-          <p:nvPr/>
-        </p:nvSpPr>
-        <p:spPr>
-          <a:xfrm>
-            <a:off x="7840016" y="2756068"/>
-            <a:ext cx="4300682" cy="1754326"/>
-          </a:xfrm>
-          <a:prstGeom prst="rect">
-            <a:avLst/>
-          </a:prstGeom>
-          <a:noFill/>
-        </p:spPr>
-        <p:txBody>
-          <a:bodyPr wrap="square" rtlCol="0">
-            <a:spAutoFit/>
-          </a:bodyPr>
-          <a:lstStyle/>
-          <a:p>
-            <a:r>
-              <a:rPr lang="en-US" b="1"/>
-              <a:t>EP</a:t>
-            </a:r>
-            <a:r>
-              <a:rPr lang="en-US"/>
-              <a:t>: contains externally exposed network components (</a:t>
-            </a:r>
-            <a:r>
-              <a:rPr lang="en-US" err="1"/>
-              <a:t>ie</a:t>
-            </a:r>
-            <a:r>
-              <a:rPr lang="en-US"/>
-              <a:t>: Cellular/Center, OTA, etc.), OEM Apps and other LGE Apps/Services</a:t>
-            </a:r>
-          </a:p>
-          <a:p>
-            <a:r>
-              <a:rPr lang="en-US" b="1"/>
-              <a:t>Internal Partition</a:t>
-            </a:r>
-            <a:r>
-              <a:rPr lang="en-US"/>
-              <a:t>: contains components which has access to in-vehicle CAN bus. This is the </a:t>
-            </a:r>
-            <a:r>
-              <a:rPr lang="en-US" b="1"/>
-              <a:t>trusted zone</a:t>
-            </a:r>
-          </a:p>
-        </p:txBody>
-      </p:sp>
-    </p:spTree>
-    <p:extLst>
-      <p:ext uri="{BB962C8B-B14F-4D97-AF65-F5344CB8AC3E}">
-        <p14:creationId xmlns:p14="http://schemas.microsoft.com/office/powerpoint/2010/main" val="3834437788"/>
-      </p:ext>
-    </p:extLst>
-  </p:cSld>
-  <p:clrMapOvr>
-    <a:masterClrMapping/>
-  </p:clrMapOvr>
-</p:sld>
-</file>
-
-<file path=ppt/slides/slide19.xml><?xml version="1.0" encoding="utf-8"?>
-<p:sld xmlns:a="http://schemas.openxmlformats.org/drawingml/2006/main" xmlns:r="http://schemas.openxmlformats.org/officeDocument/2006/relationships" xmlns:p="http://schemas.openxmlformats.org/presentationml/2006/main">
-  <p:cSld>
-    <p:spTree>
-      <p:nvGrpSpPr>
-        <p:cNvPr id="1" name=""/>
-        <p:cNvGrpSpPr/>
-        <p:nvPr/>
-      </p:nvGrpSpPr>
-      <p:grpSpPr>
-        <a:xfrm>
-          <a:off x="0" y="0"/>
-          <a:ext cx="0" cy="0"/>
-          <a:chOff x="0" y="0"/>
-          <a:chExt cx="0" cy="0"/>
-        </a:xfrm>
-      </p:grpSpPr>
-      <p:grpSp>
-        <p:nvGrpSpPr>
-          <p:cNvPr id="17" name="Group 16">
-            <a:extLst>
-              <a:ext uri="{FF2B5EF4-FFF2-40B4-BE49-F238E27FC236}">
-                <a16:creationId xmlns="" xmlns:a16="http://schemas.microsoft.com/office/drawing/2014/main" id="{0AFC7E7A-719D-91DA-98A6-ACBCE177BB10}"/>
-              </a:ext>
-            </a:extLst>
-          </p:cNvPr>
-          <p:cNvGrpSpPr/>
-          <p:nvPr/>
-        </p:nvGrpSpPr>
-        <p:grpSpPr>
-          <a:xfrm>
-            <a:off x="1189964" y="4947188"/>
-            <a:ext cx="2145223" cy="1721644"/>
-            <a:chOff x="689896" y="4947188"/>
-            <a:chExt cx="2145223" cy="1721644"/>
-          </a:xfrm>
-        </p:grpSpPr>
-        <p:pic>
-          <p:nvPicPr>
-            <p:cNvPr id="14" name="Picture 13" descr="A screenshot of a computer&#10;&#10;AI-generated content may be incorrect.">
-              <a:extLst>
-                <a:ext uri="{FF2B5EF4-FFF2-40B4-BE49-F238E27FC236}">
-                  <a16:creationId xmlns="" xmlns:a16="http://schemas.microsoft.com/office/drawing/2014/main" id="{688E41AB-DCC1-75A5-9652-8F2D2728C1FB}"/>
-                </a:ext>
-              </a:extLst>
-            </p:cNvPr>
-            <p:cNvPicPr>
-              <a:picLocks noChangeAspect="1"/>
-            </p:cNvPicPr>
-            <p:nvPr/>
-          </p:nvPicPr>
-          <p:blipFill>
-            <a:blip r:embed="rId2" cstate="print">
-              <a:extLst>
-                <a:ext uri="{28A0092B-C50C-407E-A947-70E740481C1C}">
-                  <a14:useLocalDpi xmlns:a14="http://schemas.microsoft.com/office/drawing/2010/main" val="0"/>
-                </a:ext>
-              </a:extLst>
-            </a:blip>
-            <a:stretch>
-              <a:fillRect/>
-            </a:stretch>
-          </p:blipFill>
-          <p:spPr>
-            <a:xfrm>
-              <a:off x="689896" y="4947188"/>
-              <a:ext cx="2145223" cy="1721644"/>
-            </a:xfrm>
-            <a:prstGeom prst="rect">
-              <a:avLst/>
-            </a:prstGeom>
-          </p:spPr>
-        </p:pic>
-        <p:pic>
-          <p:nvPicPr>
-            <p:cNvPr id="11" name="Graphic 10" descr="Back with solid fill">
-              <a:extLst>
-                <a:ext uri="{FF2B5EF4-FFF2-40B4-BE49-F238E27FC236}">
-                  <a16:creationId xmlns="" xmlns:a16="http://schemas.microsoft.com/office/drawing/2014/main" id="{6F16C2C1-0B4C-42CA-1D81-C41554FFC134}"/>
-                </a:ext>
-              </a:extLst>
-            </p:cNvPr>
-            <p:cNvPicPr>
-              <a:picLocks noChangeAspect="1"/>
-            </p:cNvPicPr>
-            <p:nvPr/>
-          </p:nvPicPr>
-          <p:blipFill>
-            <a:blip r:embed="rId3">
-              <a:extLst>
-                <a:ext uri="{96DAC541-7B7A-43D3-8B79-37D633B846F1}">
-                  <asvg:svgBlip xmlns="" xmlns:asvg="http://schemas.microsoft.com/office/drawing/2016/SVG/main" r:embed="rId4"/>
-                </a:ext>
-              </a:extLst>
-            </a:blip>
-            <a:stretch>
-              <a:fillRect/>
-            </a:stretch>
-          </p:blipFill>
-          <p:spPr>
-            <a:xfrm rot="16620864">
-              <a:off x="789173" y="5458529"/>
-              <a:ext cx="914400" cy="570200"/>
-            </a:xfrm>
-            <a:prstGeom prst="rect">
-              <a:avLst/>
-            </a:prstGeom>
-          </p:spPr>
-        </p:pic>
-        <p:pic>
-          <p:nvPicPr>
-            <p:cNvPr id="12" name="Graphic 11" descr="Back with solid fill">
-              <a:extLst>
-                <a:ext uri="{FF2B5EF4-FFF2-40B4-BE49-F238E27FC236}">
-                  <a16:creationId xmlns="" xmlns:a16="http://schemas.microsoft.com/office/drawing/2014/main" id="{7702869A-0835-C839-D150-627E11EFB94C}"/>
-                </a:ext>
-              </a:extLst>
-            </p:cNvPr>
-            <p:cNvPicPr>
-              <a:picLocks noChangeAspect="1"/>
-            </p:cNvPicPr>
-            <p:nvPr/>
-          </p:nvPicPr>
-          <p:blipFill>
-            <a:blip r:embed="rId3">
-              <a:extLst>
-                <a:ext uri="{96DAC541-7B7A-43D3-8B79-37D633B846F1}">
-                  <asvg:svgBlip xmlns="" xmlns:asvg="http://schemas.microsoft.com/office/drawing/2016/SVG/main" r:embed="rId4"/>
-                </a:ext>
-              </a:extLst>
-            </a:blip>
-            <a:stretch>
-              <a:fillRect/>
-            </a:stretch>
-          </p:blipFill>
-          <p:spPr>
-            <a:xfrm rot="4979136" flipH="1">
-              <a:off x="1856746" y="5421601"/>
-              <a:ext cx="914400" cy="592012"/>
-            </a:xfrm>
-            <a:prstGeom prst="rect">
-              <a:avLst/>
-            </a:prstGeom>
-          </p:spPr>
-        </p:pic>
-        <p:pic>
-          <p:nvPicPr>
-            <p:cNvPr id="16" name="Graphic 15" descr="Question Mark with solid fill">
-              <a:extLst>
-                <a:ext uri="{FF2B5EF4-FFF2-40B4-BE49-F238E27FC236}">
-                  <a16:creationId xmlns="" xmlns:a16="http://schemas.microsoft.com/office/drawing/2014/main" id="{E808654D-9897-D2E3-DEE9-7AB9459F1B75}"/>
-                </a:ext>
-              </a:extLst>
-            </p:cNvPr>
-            <p:cNvPicPr>
-              <a:picLocks noChangeAspect="1"/>
-            </p:cNvPicPr>
-            <p:nvPr/>
-          </p:nvPicPr>
-          <p:blipFill>
-            <a:blip r:embed="rId5">
-              <a:extLst>
-                <a:ext uri="{96DAC541-7B7A-43D3-8B79-37D633B846F1}">
-                  <asvg:svgBlip xmlns="" xmlns:asvg="http://schemas.microsoft.com/office/drawing/2016/SVG/main" r:embed="rId6"/>
-                </a:ext>
-              </a:extLst>
-            </a:blip>
-            <a:stretch>
-              <a:fillRect/>
-            </a:stretch>
-          </p:blipFill>
-          <p:spPr>
-            <a:xfrm>
-              <a:off x="1430187" y="5679280"/>
-              <a:ext cx="614363" cy="614363"/>
-            </a:xfrm>
-            <a:prstGeom prst="rect">
-              <a:avLst/>
-            </a:prstGeom>
-          </p:spPr>
-        </p:pic>
-      </p:grpSp>
-      <p:sp>
-        <p:nvSpPr>
-          <p:cNvPr id="2" name="Title 1"/>
-          <p:cNvSpPr>
-            <a:spLocks noGrp="1"/>
-          </p:cNvSpPr>
-          <p:nvPr>
-            <p:ph type="title"/>
-          </p:nvPr>
-        </p:nvSpPr>
-        <p:spPr/>
-        <p:txBody>
-          <a:bodyPr/>
-          <a:lstStyle/>
-          <a:p>
-            <a:r>
-              <a:rPr lang="en-US"/>
-              <a:t>Problem</a:t>
-            </a:r>
-          </a:p>
-        </p:txBody>
-      </p:sp>
-      <p:sp>
-        <p:nvSpPr>
-          <p:cNvPr id="3" name="Content Placeholder 2"/>
+          <p:cNvPr id="6" name="Content Placeholder 5"/>
           <p:cNvSpPr>
             <a:spLocks noGrp="1"/>
           </p:cNvSpPr>
@@ -10634,286 +8854,30 @@
         </p:nvSpPr>
         <p:spPr/>
         <p:txBody>
-          <a:bodyPr>
-            <a:normAutofit/>
-          </a:bodyPr>
+          <a:bodyPr/>
           <a:lstStyle/>
           <a:p>
-            <a:r>
-              <a:rPr lang="en-US" sz="1800"/>
-              <a:t>To comply with the EP/IP separation, the </a:t>
-            </a:r>
-            <a:r>
-              <a:rPr lang="en-US" sz="1800" err="1"/>
-              <a:t>RemoteDiag</a:t>
-            </a:r>
-            <a:r>
-              <a:rPr lang="en-US" sz="1800"/>
-              <a:t> </a:t>
-            </a:r>
-            <a:r>
-              <a:rPr lang="en-US" sz="1800" b="1"/>
-              <a:t>component architecture and communication model</a:t>
-            </a:r>
-            <a:r>
-              <a:rPr lang="en-US" sz="1800"/>
-              <a:t> should be redesigned.</a:t>
-            </a:r>
-          </a:p>
-          <a:p>
-            <a:r>
-              <a:rPr lang="en-US" sz="1800"/>
-              <a:t>The design should satisfy below points:</a:t>
-            </a:r>
-          </a:p>
-          <a:p>
-            <a:pPr lvl="1"/>
-            <a:r>
-              <a:rPr lang="en-US" sz="1800"/>
-              <a:t>Diagnostic processing (main job of </a:t>
-            </a:r>
-            <a:r>
-              <a:rPr lang="en-US" sz="1800" err="1"/>
-              <a:t>RemoteDiag</a:t>
-            </a:r>
-            <a:r>
-              <a:rPr lang="en-US" sz="1800"/>
-              <a:t>) </a:t>
-            </a:r>
-            <a:r>
-              <a:rPr lang="en-US" sz="1800" b="1"/>
-              <a:t>should be preserved</a:t>
-            </a:r>
-            <a:r>
-              <a:rPr lang="en-US" sz="1800"/>
-              <a:t>.</a:t>
-            </a:r>
-          </a:p>
-          <a:p>
-            <a:pPr lvl="1"/>
-            <a:r>
-              <a:rPr lang="en-US" sz="1800" err="1"/>
-              <a:t>RemoteDiag</a:t>
-            </a:r>
-            <a:r>
-              <a:rPr lang="en-US" sz="1800"/>
-              <a:t> still requires </a:t>
-            </a:r>
-            <a:r>
-              <a:rPr lang="en-US" sz="1800" b="1"/>
-              <a:t>communicating with other modules in EP container </a:t>
-            </a:r>
-            <a:r>
-              <a:rPr lang="en-US" sz="1800"/>
-              <a:t>(e.g., OEM Center, </a:t>
-            </a:r>
-            <a:r>
-              <a:rPr lang="en-US" sz="1800" err="1"/>
-              <a:t>CommMgr</a:t>
-            </a:r>
-            <a:r>
-              <a:rPr lang="en-US" sz="1800"/>
-              <a:t>, MQTT, …)</a:t>
-            </a:r>
-          </a:p>
-          <a:p>
-            <a:pPr lvl="1"/>
-            <a:r>
-              <a:rPr lang="en-US" sz="1800"/>
-              <a:t>Changes to existing EP modules should be minimized.</a:t>
-            </a:r>
-          </a:p>
-          <a:p>
-            <a:pPr lvl="1"/>
-            <a:r>
-              <a:rPr lang="en-US" sz="1800"/>
-              <a:t>Fault isolation and security: </a:t>
-            </a:r>
-          </a:p>
-          <a:p>
-            <a:pPr lvl="2"/>
-            <a:r>
-              <a:rPr lang="en-US" sz="1800" err="1"/>
-              <a:t>RemoteDiag</a:t>
-            </a:r>
-            <a:r>
-              <a:rPr lang="en-US" sz="1800"/>
-              <a:t> should remain operational even if the EP partition is compromised.</a:t>
-            </a:r>
-          </a:p>
-          <a:p>
-            <a:pPr lvl="2"/>
-            <a:r>
-              <a:rPr lang="en-US" sz="1800"/>
-              <a:t>Diagnostic commands related to reprogramming should be filtered (</a:t>
-            </a:r>
-            <a:r>
-              <a:rPr lang="en-US" sz="1800">
-                <a:hlinkClick r:id="rId7" action="ppaction://hlinksldjump"/>
-              </a:rPr>
-              <a:t>refer to Diagnostic Filtering Requirements</a:t>
-            </a:r>
-            <a:r>
-              <a:rPr lang="en-US" sz="1800"/>
-              <a:t>)</a:t>
-            </a:r>
-          </a:p>
-        </p:txBody>
-      </p:sp>
-      <p:pic>
-        <p:nvPicPr>
-          <p:cNvPr id="4" name="Picture 3"/>
-          <p:cNvPicPr>
-            <a:picLocks noChangeAspect="1"/>
-          </p:cNvPicPr>
-          <p:nvPr/>
-        </p:nvPicPr>
-        <p:blipFill>
-          <a:blip r:embed="rId8"/>
-          <a:stretch>
-            <a:fillRect/>
-          </a:stretch>
-        </p:blipFill>
-        <p:spPr>
-          <a:xfrm>
-            <a:off x="6317872" y="5582527"/>
-            <a:ext cx="973391" cy="1086305"/>
-          </a:xfrm>
-          <a:prstGeom prst="rect">
-            <a:avLst/>
-          </a:prstGeom>
-        </p:spPr>
-      </p:pic>
-      <p:sp>
-        <p:nvSpPr>
-          <p:cNvPr id="5" name="Cloud Callout 4"/>
-          <p:cNvSpPr/>
-          <p:nvPr/>
-        </p:nvSpPr>
-        <p:spPr>
-          <a:xfrm flipH="1">
-            <a:off x="2066250" y="3880488"/>
-            <a:ext cx="3515016" cy="1326086"/>
-          </a:xfrm>
-          <a:prstGeom prst="cloudCallout">
-            <a:avLst>
-              <a:gd name="adj1" fmla="val -72436"/>
-              <a:gd name="adj2" fmla="val 78810"/>
-            </a:avLst>
-          </a:prstGeom>
-          <a:noFill/>
-          <a:ln w="19050"/>
-        </p:spPr>
-        <p:style>
-          <a:lnRef idx="2">
-            <a:schemeClr val="accent1">
-              <a:shade val="50000"/>
-            </a:schemeClr>
-          </a:lnRef>
-          <a:fillRef idx="1">
-            <a:schemeClr val="accent1"/>
-          </a:fillRef>
-          <a:effectRef idx="0">
-            <a:schemeClr val="accent1"/>
-          </a:effectRef>
-          <a:fontRef idx="minor">
-            <a:schemeClr val="lt1"/>
-          </a:fontRef>
-        </p:style>
-        <p:txBody>
-          <a:bodyPr rtlCol="0" anchor="ctr"/>
-          <a:lstStyle/>
-          <a:p>
-            <a:pPr algn="ctr"/>
-            <a:r>
-              <a:rPr lang="en-US">
-                <a:solidFill>
-                  <a:schemeClr val="tx1"/>
-                </a:solidFill>
-              </a:rPr>
-              <a:t>Where should </a:t>
-            </a:r>
-            <a:r>
-              <a:rPr lang="en-US" err="1">
-                <a:solidFill>
-                  <a:schemeClr val="tx1"/>
-                </a:solidFill>
-              </a:rPr>
-              <a:t>RemoteDiag</a:t>
-            </a:r>
-            <a:r>
-              <a:rPr lang="en-US">
-                <a:solidFill>
-                  <a:schemeClr val="tx1"/>
-                </a:solidFill>
-              </a:rPr>
-              <a:t> be placed (EP or IP)? </a:t>
-            </a:r>
-          </a:p>
-        </p:txBody>
-      </p:sp>
-      <p:sp>
-        <p:nvSpPr>
-          <p:cNvPr id="7" name="Cloud Callout 6"/>
-          <p:cNvSpPr/>
-          <p:nvPr/>
-        </p:nvSpPr>
-        <p:spPr>
-          <a:xfrm>
-            <a:off x="7486650" y="4256440"/>
-            <a:ext cx="4257675" cy="1326087"/>
-          </a:xfrm>
-          <a:prstGeom prst="cloudCallout">
-            <a:avLst>
-              <a:gd name="adj1" fmla="val -58109"/>
-              <a:gd name="adj2" fmla="val 52352"/>
-            </a:avLst>
-          </a:prstGeom>
-          <a:noFill/>
-          <a:ln w="19050"/>
-        </p:spPr>
-        <p:style>
-          <a:lnRef idx="2">
-            <a:schemeClr val="accent1">
-              <a:shade val="50000"/>
-            </a:schemeClr>
-          </a:lnRef>
-          <a:fillRef idx="1">
-            <a:schemeClr val="accent1"/>
-          </a:fillRef>
-          <a:effectRef idx="0">
-            <a:schemeClr val="accent1"/>
-          </a:effectRef>
-          <a:fontRef idx="minor">
-            <a:schemeClr val="lt1"/>
-          </a:fontRef>
-        </p:style>
-        <p:txBody>
-          <a:bodyPr rtlCol="0" anchor="ctr"/>
-          <a:lstStyle/>
-          <a:p>
-            <a:pPr algn="ctr"/>
-            <a:r>
-              <a:rPr lang="en-US">
-                <a:solidFill>
-                  <a:schemeClr val="tx1"/>
-                </a:solidFill>
-              </a:rPr>
-              <a:t>What should the communication model be?</a:t>
-            </a:r>
+            <a:endParaRPr lang="en-US"/>
           </a:p>
         </p:txBody>
       </p:sp>
     </p:spTree>
     <p:extLst>
       <p:ext uri="{BB962C8B-B14F-4D97-AF65-F5344CB8AC3E}">
-        <p14:creationId xmlns:p14="http://schemas.microsoft.com/office/powerpoint/2010/main" val="2288849423"/>
+        <p14:creationId xmlns:p14="http://schemas.microsoft.com/office/powerpoint/2010/main" val="3214387470"/>
       </p:ext>
     </p:extLst>
   </p:cSld>
   <p:clrMapOvr>
     <a:masterClrMapping/>
   </p:clrMapOvr>
+  <p:timing>
+    <p:tnLst>
+      <p:par>
+        <p:cTn id="1" dur="indefinite" restart="never" nodeType="tmRoot"/>
+      </p:par>
+    </p:tnLst>
+  </p:timing>
 </p:sld>
 </file>
 
@@ -12716,11 +10680,18 @@
             <a:lstStyle/>
             <a:p>
               <a:r>
-                <a:rPr lang="en-US" sz="2800">
+                <a:rPr lang="en-US" sz="2800" smtClean="0">
                   <a:cs typeface="Times New Roman" panose="02020603050405020304" pitchFamily="18" charset="0"/>
                 </a:rPr>
-                <a:t>Context &amp; Motivation</a:t>
+                <a:t>Context </a:t>
               </a:r>
+              <a:r>
+                <a:rPr lang="en-US" sz="2800"/>
+                <a:t>&amp; Motivation</a:t>
+              </a:r>
+              <a:endParaRPr lang="en-US" sz="2800">
+                <a:cs typeface="Times New Roman" panose="02020603050405020304" pitchFamily="18" charset="0"/>
+              </a:endParaRPr>
             </a:p>
           </p:txBody>
         </p:sp>
@@ -16247,8 +14218,17 @@
                 <a:rPr lang="en-US" sz="2800">
                   <a:cs typeface="Times New Roman" panose="02020603050405020304" pitchFamily="18" charset="0"/>
                 </a:rPr>
-                <a:t>Implementation Status</a:t>
+                <a:t>Implementation </a:t>
               </a:r>
+              <a:r>
+                <a:rPr lang="en-US" sz="2800" smtClean="0">
+                  <a:cs typeface="Times New Roman" panose="02020603050405020304" pitchFamily="18" charset="0"/>
+                </a:rPr>
+                <a:t>&amp; Verification</a:t>
+              </a:r>
+              <a:endParaRPr lang="en-US" sz="2800">
+                <a:cs typeface="Times New Roman" panose="02020603050405020304" pitchFamily="18" charset="0"/>
+              </a:endParaRPr>
             </a:p>
           </p:txBody>
         </p:sp>
@@ -16257,1355 +14237,6 @@
     <p:extLst>
       <p:ext uri="{BB962C8B-B14F-4D97-AF65-F5344CB8AC3E}">
         <p14:creationId xmlns:p14="http://schemas.microsoft.com/office/powerpoint/2010/main" val="239574499"/>
-      </p:ext>
-    </p:extLst>
-  </p:cSld>
-  <p:clrMapOvr>
-    <a:masterClrMapping/>
-  </p:clrMapOvr>
-  <p:timing>
-    <p:tnLst>
-      <p:par>
-        <p:cTn id="1" dur="indefinite" restart="never" nodeType="tmRoot"/>
-      </p:par>
-    </p:tnLst>
-  </p:timing>
-</p:sld>
-</file>
-
-<file path=ppt/slides/slide20.xml><?xml version="1.0" encoding="utf-8"?>
-<p:sld xmlns:a="http://schemas.openxmlformats.org/drawingml/2006/main" xmlns:r="http://schemas.openxmlformats.org/officeDocument/2006/relationships" xmlns:p="http://schemas.openxmlformats.org/presentationml/2006/main">
-  <p:cSld>
-    <p:spTree>
-      <p:nvGrpSpPr>
-        <p:cNvPr id="1" name="">
-          <a:extLst>
-            <a:ext uri="{FF2B5EF4-FFF2-40B4-BE49-F238E27FC236}">
-              <a16:creationId xmlns="" xmlns:a16="http://schemas.microsoft.com/office/drawing/2014/main" id="{E3C2B75C-23E8-D9F9-C4EA-82DD24D63F67}"/>
-            </a:ext>
-          </a:extLst>
-        </p:cNvPr>
-        <p:cNvGrpSpPr/>
-        <p:nvPr/>
-      </p:nvGrpSpPr>
-      <p:grpSpPr>
-        <a:xfrm>
-          <a:off x="0" y="0"/>
-          <a:ext cx="0" cy="0"/>
-          <a:chOff x="0" y="0"/>
-          <a:chExt cx="0" cy="0"/>
-        </a:xfrm>
-      </p:grpSpPr>
-      <p:sp>
-        <p:nvSpPr>
-          <p:cNvPr id="2" name="Title 1">
-            <a:extLst>
-              <a:ext uri="{FF2B5EF4-FFF2-40B4-BE49-F238E27FC236}">
-                <a16:creationId xmlns="" xmlns:a16="http://schemas.microsoft.com/office/drawing/2014/main" id="{56A28504-A0AD-A7E9-3FC5-18DB5EE5712D}"/>
-              </a:ext>
-            </a:extLst>
-          </p:cNvPr>
-          <p:cNvSpPr>
-            <a:spLocks noGrp="1"/>
-          </p:cNvSpPr>
-          <p:nvPr>
-            <p:ph type="title"/>
-          </p:nvPr>
-        </p:nvSpPr>
-        <p:spPr/>
-        <p:txBody>
-          <a:bodyPr/>
-          <a:lstStyle/>
-          <a:p>
-            <a:r>
-              <a:rPr lang="en-US"/>
-              <a:t>Quality Attribute</a:t>
-            </a:r>
-          </a:p>
-        </p:txBody>
-      </p:sp>
-      <p:graphicFrame>
-        <p:nvGraphicFramePr>
-          <p:cNvPr id="7" name="Content Placeholder 6">
-            <a:extLst>
-              <a:ext uri="{FF2B5EF4-FFF2-40B4-BE49-F238E27FC236}">
-                <a16:creationId xmlns="" xmlns:a16="http://schemas.microsoft.com/office/drawing/2014/main" id="{E0D35A5C-C584-C4A0-1B22-6388F2453084}"/>
-              </a:ext>
-            </a:extLst>
-          </p:cNvPr>
-          <p:cNvGraphicFramePr>
-            <a:graphicFrameLocks noGrp="1"/>
-          </p:cNvGraphicFramePr>
-          <p:nvPr>
-            <p:ph idx="1"/>
-          </p:nvPr>
-        </p:nvGraphicFramePr>
-        <p:xfrm>
-          <a:off x="160338" y="990600"/>
-          <a:ext cx="11887199" cy="3737042"/>
-        </p:xfrm>
-        <a:graphic>
-          <a:graphicData uri="http://schemas.openxmlformats.org/drawingml/2006/table">
-            <a:tbl>
-              <a:tblPr firstRow="1" bandRow="1">
-                <a:tableStyleId>{5C22544A-7EE6-4342-B048-85BDC9FD1C3A}</a:tableStyleId>
-              </a:tblPr>
-              <a:tblGrid>
-                <a:gridCol w="1045892">
-                  <a:extLst>
-                    <a:ext uri="{9D8B030D-6E8A-4147-A177-3AD203B41FA5}">
-                      <a16:colId xmlns="" xmlns:a16="http://schemas.microsoft.com/office/drawing/2014/main" val="395587818"/>
-                    </a:ext>
-                  </a:extLst>
-                </a:gridCol>
-                <a:gridCol w="1099225">
-                  <a:extLst>
-                    <a:ext uri="{9D8B030D-6E8A-4147-A177-3AD203B41FA5}">
-                      <a16:colId xmlns="" xmlns:a16="http://schemas.microsoft.com/office/drawing/2014/main" val="20001"/>
-                    </a:ext>
-                  </a:extLst>
-                </a:gridCol>
-                <a:gridCol w="3225644">
-                  <a:extLst>
-                    <a:ext uri="{9D8B030D-6E8A-4147-A177-3AD203B41FA5}">
-                      <a16:colId xmlns="" xmlns:a16="http://schemas.microsoft.com/office/drawing/2014/main" val="2149221010"/>
-                    </a:ext>
-                  </a:extLst>
-                </a:gridCol>
-                <a:gridCol w="2834688">
-                  <a:extLst>
-                    <a:ext uri="{9D8B030D-6E8A-4147-A177-3AD203B41FA5}">
-                      <a16:colId xmlns="" xmlns:a16="http://schemas.microsoft.com/office/drawing/2014/main" val="20003"/>
-                    </a:ext>
-                  </a:extLst>
-                </a:gridCol>
-                <a:gridCol w="3681750">
-                  <a:extLst>
-                    <a:ext uri="{9D8B030D-6E8A-4147-A177-3AD203B41FA5}">
-                      <a16:colId xmlns="" xmlns:a16="http://schemas.microsoft.com/office/drawing/2014/main" val="2936743574"/>
-                    </a:ext>
-                  </a:extLst>
-                </a:gridCol>
-              </a:tblGrid>
-              <a:tr h="403556">
-                <a:tc>
-                  <a:txBody>
-                    <a:bodyPr/>
-                    <a:lstStyle/>
-                    <a:p>
-                      <a:pPr algn="ctr"/>
-                      <a:r>
-                        <a:rPr lang="en-US"/>
-                        <a:t>QA</a:t>
-                      </a:r>
-                    </a:p>
-                  </a:txBody>
-                  <a:tcPr/>
-                </a:tc>
-                <a:tc>
-                  <a:txBody>
-                    <a:bodyPr/>
-                    <a:lstStyle/>
-                    <a:p>
-                      <a:pPr algn="ctr"/>
-                      <a:r>
-                        <a:rPr lang="en-US"/>
-                        <a:t>Priority</a:t>
-                      </a:r>
-                    </a:p>
-                  </a:txBody>
-                  <a:tcPr/>
-                </a:tc>
-                <a:tc>
-                  <a:txBody>
-                    <a:bodyPr/>
-                    <a:lstStyle/>
-                    <a:p>
-                      <a:pPr algn="ctr"/>
-                      <a:r>
-                        <a:rPr lang="en-US"/>
-                        <a:t>Description</a:t>
-                      </a:r>
-                    </a:p>
-                  </a:txBody>
-                  <a:tcPr/>
-                </a:tc>
-                <a:tc>
-                  <a:txBody>
-                    <a:bodyPr/>
-                    <a:lstStyle/>
-                    <a:p>
-                      <a:pPr algn="ctr"/>
-                      <a:r>
-                        <a:rPr lang="en-US"/>
-                        <a:t>Tactics</a:t>
-                      </a:r>
-                    </a:p>
-                  </a:txBody>
-                  <a:tcPr/>
-                </a:tc>
-                <a:tc>
-                  <a:txBody>
-                    <a:bodyPr/>
-                    <a:lstStyle/>
-                    <a:p>
-                      <a:pPr algn="ctr"/>
-                      <a:r>
-                        <a:rPr lang="en-US"/>
-                        <a:t>Measure</a:t>
-                      </a:r>
-                    </a:p>
-                  </a:txBody>
-                  <a:tcPr/>
-                </a:tc>
-                <a:extLst>
-                  <a:ext uri="{0D108BD9-81ED-4DB2-BD59-A6C34878D82A}">
-                    <a16:rowId xmlns="" xmlns:a16="http://schemas.microsoft.com/office/drawing/2014/main" val="1218897030"/>
-                  </a:ext>
-                </a:extLst>
-              </a:tr>
-              <a:tr h="1890634">
-                <a:tc>
-                  <a:txBody>
-                    <a:bodyPr/>
-                    <a:lstStyle/>
-                    <a:p>
-                      <a:pPr>
-                        <a:lnSpc>
-                          <a:spcPct val="150000"/>
-                        </a:lnSpc>
-                      </a:pPr>
-                      <a:r>
-                        <a:rPr lang="en-US"/>
-                        <a:t>Security</a:t>
-                      </a:r>
-                    </a:p>
-                  </a:txBody>
-                  <a:tcPr/>
-                </a:tc>
-                <a:tc>
-                  <a:txBody>
-                    <a:bodyPr/>
-                    <a:lstStyle/>
-                    <a:p>
-                      <a:pPr>
-                        <a:lnSpc>
-                          <a:spcPct val="150000"/>
-                        </a:lnSpc>
-                      </a:pPr>
-                      <a:r>
-                        <a:rPr lang="en-US"/>
-                        <a:t>High</a:t>
-                      </a:r>
-                    </a:p>
-                  </a:txBody>
-                  <a:tcPr/>
-                </a:tc>
-                <a:tc>
-                  <a:txBody>
-                    <a:bodyPr/>
-                    <a:lstStyle/>
-                    <a:p>
-                      <a:pPr>
-                        <a:lnSpc>
-                          <a:spcPct val="150000"/>
-                        </a:lnSpc>
-                      </a:pPr>
-                      <a:r>
-                        <a:rPr lang="en-US"/>
-                        <a:t>The EP partition is compromised and sends reprogramming SIDs to the CAN bus.</a:t>
-                      </a:r>
-                    </a:p>
-                  </a:txBody>
-                  <a:tcPr/>
-                </a:tc>
-                <a:tc>
-                  <a:txBody>
-                    <a:bodyPr/>
-                    <a:lstStyle/>
-                    <a:p>
-                      <a:pPr>
-                        <a:lnSpc>
-                          <a:spcPct val="150000"/>
-                        </a:lnSpc>
-                      </a:pPr>
-                      <a:r>
-                        <a:rPr lang="en-US"/>
-                        <a:t>- Separate Entities/Isolation</a:t>
-                      </a:r>
-                    </a:p>
-                    <a:p>
-                      <a:pPr>
-                        <a:lnSpc>
-                          <a:spcPct val="150000"/>
-                        </a:lnSpc>
-                      </a:pPr>
-                      <a:r>
-                        <a:rPr lang="en-US"/>
-                        <a:t>- Validate</a:t>
-                      </a:r>
-                      <a:r>
-                        <a:rPr lang="en-US" baseline="0"/>
-                        <a:t> Input</a:t>
-                      </a:r>
-                      <a:endParaRPr lang="en-US"/>
-                    </a:p>
-                  </a:txBody>
-                  <a:tcPr/>
-                </a:tc>
-                <a:tc>
-                  <a:txBody>
-                    <a:bodyPr/>
-                    <a:lstStyle/>
-                    <a:p>
-                      <a:pPr>
-                        <a:lnSpc>
-                          <a:spcPct val="150000"/>
-                        </a:lnSpc>
-                      </a:pPr>
-                      <a:r>
-                        <a:rPr lang="en-US"/>
-                        <a:t>- </a:t>
-                      </a:r>
-                      <a:r>
-                        <a:rPr lang="en-US" b="1"/>
-                        <a:t>Zero</a:t>
-                      </a:r>
-                      <a:r>
-                        <a:rPr lang="en-US"/>
-                        <a:t> Reprogramming SIDs (0x10(02), 0x11, 0x28, 0x34, 0x85) reaching the internal CAN (</a:t>
-                      </a:r>
-                      <a:r>
-                        <a:rPr lang="en-US" b="1"/>
-                        <a:t>block 100%</a:t>
-                      </a:r>
-                      <a:r>
-                        <a:rPr lang="en-US"/>
-                        <a:t>).</a:t>
-                      </a:r>
-                    </a:p>
-                  </a:txBody>
-                  <a:tcPr/>
-                </a:tc>
-                <a:extLst>
-                  <a:ext uri="{0D108BD9-81ED-4DB2-BD59-A6C34878D82A}">
-                    <a16:rowId xmlns="" xmlns:a16="http://schemas.microsoft.com/office/drawing/2014/main" val="2232119182"/>
-                  </a:ext>
-                </a:extLst>
-              </a:tr>
-              <a:tr h="1442852">
-                <a:tc>
-                  <a:txBody>
-                    <a:bodyPr/>
-                    <a:lstStyle/>
-                    <a:p>
-                      <a:pPr marL="0" marR="0" lvl="0" indent="0" algn="l" defTabSz="914400" rtl="0" eaLnBrk="1" fontAlgn="auto" latinLnBrk="0" hangingPunct="1">
-                        <a:lnSpc>
-                          <a:spcPct val="150000"/>
-                        </a:lnSpc>
-                        <a:spcBef>
-                          <a:spcPts val="0"/>
-                        </a:spcBef>
-                        <a:spcAft>
-                          <a:spcPts val="0"/>
-                        </a:spcAft>
-                        <a:buClrTx/>
-                        <a:buSzTx/>
-                        <a:buFontTx/>
-                        <a:buNone/>
-                        <a:tabLst/>
-                        <a:defRPr/>
-                      </a:pPr>
-                      <a:r>
-                        <a:rPr lang="en-US"/>
-                        <a:t>Maintainability</a:t>
-                      </a:r>
-                    </a:p>
-                    <a:p>
-                      <a:pPr marL="0" marR="0" lvl="0" indent="0" algn="l" defTabSz="914400" rtl="0" eaLnBrk="1" fontAlgn="auto" latinLnBrk="0" hangingPunct="1">
-                        <a:lnSpc>
-                          <a:spcPct val="150000"/>
-                        </a:lnSpc>
-                        <a:spcBef>
-                          <a:spcPts val="0"/>
-                        </a:spcBef>
-                        <a:spcAft>
-                          <a:spcPts val="0"/>
-                        </a:spcAft>
-                        <a:buClrTx/>
-                        <a:buSzTx/>
-                        <a:buFontTx/>
-                        <a:buNone/>
-                        <a:tabLst/>
-                        <a:defRPr/>
-                      </a:pPr>
-                      <a:endParaRPr lang="en-US"/>
-                    </a:p>
-                  </a:txBody>
-                  <a:tcPr/>
-                </a:tc>
-                <a:tc>
-                  <a:txBody>
-                    <a:bodyPr/>
-                    <a:lstStyle/>
-                    <a:p>
-                      <a:pPr>
-                        <a:lnSpc>
-                          <a:spcPct val="150000"/>
-                        </a:lnSpc>
-                      </a:pPr>
-                      <a:r>
-                        <a:rPr lang="en-US"/>
-                        <a:t>High</a:t>
-                      </a:r>
-                    </a:p>
-                  </a:txBody>
-                  <a:tcPr/>
-                </a:tc>
-                <a:tc>
-                  <a:txBody>
-                    <a:bodyPr/>
-                    <a:lstStyle/>
-                    <a:p>
-                      <a:pPr marL="0" marR="0" indent="0" algn="l" defTabSz="914400" rtl="0" eaLnBrk="1" fontAlgn="auto" latinLnBrk="0" hangingPunct="1">
-                        <a:lnSpc>
-                          <a:spcPct val="150000"/>
-                        </a:lnSpc>
-                        <a:spcBef>
-                          <a:spcPts val="0"/>
-                        </a:spcBef>
-                        <a:spcAft>
-                          <a:spcPts val="0"/>
-                        </a:spcAft>
-                        <a:buClrTx/>
-                        <a:buSzTx/>
-                        <a:buFontTx/>
-                        <a:buNone/>
-                        <a:tabLst/>
-                        <a:defRPr/>
-                      </a:pPr>
-                      <a:r>
-                        <a:rPr lang="en-US"/>
-                        <a:t>Adapting existing software components to the new partition separation layout.</a:t>
-                      </a:r>
-                    </a:p>
-                  </a:txBody>
-                  <a:tcPr/>
-                </a:tc>
-                <a:tc>
-                  <a:txBody>
-                    <a:bodyPr/>
-                    <a:lstStyle/>
-                    <a:p>
-                      <a:pPr marL="0" marR="0" indent="0" algn="l" defTabSz="914400" rtl="0" eaLnBrk="1" fontAlgn="auto" latinLnBrk="0" hangingPunct="1">
-                        <a:lnSpc>
-                          <a:spcPct val="150000"/>
-                        </a:lnSpc>
-                        <a:spcBef>
-                          <a:spcPts val="0"/>
-                        </a:spcBef>
-                        <a:spcAft>
-                          <a:spcPts val="0"/>
-                        </a:spcAft>
-                        <a:buClrTx/>
-                        <a:buSzTx/>
-                        <a:buFontTx/>
-                        <a:buNone/>
-                        <a:tabLst/>
-                        <a:defRPr/>
-                      </a:pPr>
-                      <a:r>
-                        <a:rPr lang="en-US"/>
-                        <a:t>- Reduce</a:t>
-                      </a:r>
-                      <a:r>
-                        <a:rPr lang="en-US" baseline="0"/>
-                        <a:t> coupling (</a:t>
-                      </a:r>
-                      <a:r>
-                        <a:rPr lang="en-US" sz="1800" kern="1200">
-                          <a:solidFill>
-                            <a:schemeClr val="dk1"/>
-                          </a:solidFill>
-                          <a:effectLst/>
-                          <a:latin typeface="+mn-lt"/>
-                          <a:ea typeface="+mn-ea"/>
-                          <a:cs typeface="+mn-cs"/>
-                        </a:rPr>
-                        <a:t>Use an Intermediary)</a:t>
-                      </a:r>
-                      <a:endParaRPr lang="en-US"/>
-                    </a:p>
-                  </a:txBody>
-                  <a:tcPr/>
-                </a:tc>
-                <a:tc>
-                  <a:txBody>
-                    <a:bodyPr/>
-                    <a:lstStyle/>
-                    <a:p>
-                      <a:pPr marL="0" marR="0" indent="0" algn="l" defTabSz="914400" rtl="0" eaLnBrk="1" fontAlgn="auto" latinLnBrk="0" hangingPunct="1">
-                        <a:lnSpc>
-                          <a:spcPct val="150000"/>
-                        </a:lnSpc>
-                        <a:spcBef>
-                          <a:spcPts val="0"/>
-                        </a:spcBef>
-                        <a:spcAft>
-                          <a:spcPts val="0"/>
-                        </a:spcAft>
-                        <a:buClrTx/>
-                        <a:buSzTx/>
-                        <a:buFontTx/>
-                        <a:buNone/>
-                        <a:tabLst/>
-                        <a:defRPr/>
-                      </a:pPr>
-                      <a:r>
-                        <a:rPr lang="en-US"/>
-                        <a:t>- Minimal module changes required to adapt the new partition layout.</a:t>
-                      </a:r>
-                    </a:p>
-                  </a:txBody>
-                  <a:tcPr/>
-                </a:tc>
-                <a:extLst>
-                  <a:ext uri="{0D108BD9-81ED-4DB2-BD59-A6C34878D82A}">
-                    <a16:rowId xmlns="" xmlns:a16="http://schemas.microsoft.com/office/drawing/2014/main" val="2736324139"/>
-                  </a:ext>
-                </a:extLst>
-              </a:tr>
-            </a:tbl>
-          </a:graphicData>
-        </a:graphic>
-      </p:graphicFrame>
-    </p:spTree>
-    <p:extLst>
-      <p:ext uri="{BB962C8B-B14F-4D97-AF65-F5344CB8AC3E}">
-        <p14:creationId xmlns:p14="http://schemas.microsoft.com/office/powerpoint/2010/main" val="596902934"/>
-      </p:ext>
-    </p:extLst>
-  </p:cSld>
-  <p:clrMapOvr>
-    <a:masterClrMapping/>
-  </p:clrMapOvr>
-  <p:timing>
-    <p:tnLst>
-      <p:par>
-        <p:cTn id="1" dur="indefinite" restart="never" nodeType="tmRoot"/>
-      </p:par>
-    </p:tnLst>
-  </p:timing>
-</p:sld>
-</file>
-
-<file path=ppt/slides/slide21.xml><?xml version="1.0" encoding="utf-8"?>
-<p:sld xmlns:a="http://schemas.openxmlformats.org/drawingml/2006/main" xmlns:r="http://schemas.openxmlformats.org/officeDocument/2006/relationships" xmlns:p="http://schemas.openxmlformats.org/presentationml/2006/main">
-  <p:cSld>
-    <p:spTree>
-      <p:nvGrpSpPr>
-        <p:cNvPr id="1" name=""/>
-        <p:cNvGrpSpPr/>
-        <p:nvPr/>
-      </p:nvGrpSpPr>
-      <p:grpSpPr>
-        <a:xfrm>
-          <a:off x="0" y="0"/>
-          <a:ext cx="0" cy="0"/>
-          <a:chOff x="0" y="0"/>
-          <a:chExt cx="0" cy="0"/>
-        </a:xfrm>
-      </p:grpSpPr>
-      <p:sp>
-        <p:nvSpPr>
-          <p:cNvPr id="2" name="Title 1"/>
-          <p:cNvSpPr>
-            <a:spLocks noGrp="1"/>
-          </p:cNvSpPr>
-          <p:nvPr>
-            <p:ph type="title"/>
-          </p:nvPr>
-        </p:nvSpPr>
-        <p:spPr/>
-        <p:txBody>
-          <a:bodyPr/>
-          <a:lstStyle/>
-          <a:p>
-            <a:r>
-              <a:rPr lang="en-US"/>
-              <a:t>Design Alternative – Alt-A</a:t>
-            </a:r>
-          </a:p>
-        </p:txBody>
-      </p:sp>
-      <p:sp>
-        <p:nvSpPr>
-          <p:cNvPr id="3" name="Content Placeholder 2"/>
-          <p:cNvSpPr>
-            <a:spLocks noGrp="1"/>
-          </p:cNvSpPr>
-          <p:nvPr>
-            <p:ph idx="1"/>
-          </p:nvPr>
-        </p:nvSpPr>
-        <p:spPr>
-          <a:xfrm>
-            <a:off x="160867" y="990600"/>
-            <a:ext cx="11864356" cy="3581400"/>
-          </a:xfrm>
-        </p:spPr>
-        <p:txBody>
-          <a:bodyPr>
-            <a:normAutofit/>
-          </a:bodyPr>
-          <a:lstStyle/>
-          <a:p>
-            <a:r>
-              <a:rPr lang="en-US" sz="1800" err="1"/>
-              <a:t>RemoteDiag</a:t>
-            </a:r>
-            <a:r>
-              <a:rPr lang="en-US" sz="1800"/>
-              <a:t> stays in EP container, the SID Filter is placed in </a:t>
-            </a:r>
-            <a:r>
-              <a:rPr lang="en-US" sz="1800" err="1"/>
-              <a:t>OnBoardClient</a:t>
-            </a:r>
-            <a:r>
-              <a:rPr lang="en-US" sz="1800"/>
-              <a:t> at IP container.</a:t>
-            </a:r>
-          </a:p>
-          <a:p>
-            <a:r>
-              <a:rPr lang="en-US" sz="1800"/>
-              <a:t>All diagnostic requests from </a:t>
-            </a:r>
-            <a:r>
-              <a:rPr lang="en-US" sz="1800" err="1"/>
-              <a:t>RemoteDiag</a:t>
-            </a:r>
-            <a:r>
-              <a:rPr lang="en-US" sz="1800"/>
-              <a:t> pass through this filter before go to internal CAN.</a:t>
-            </a:r>
-          </a:p>
-          <a:p>
-            <a:r>
-              <a:rPr lang="en-US" sz="1800" b="1">
-                <a:solidFill>
-                  <a:schemeClr val="accent6">
-                    <a:lumMod val="75000"/>
-                  </a:schemeClr>
-                </a:solidFill>
-              </a:rPr>
-              <a:t>Pros</a:t>
-            </a:r>
-            <a:r>
-              <a:rPr lang="en-US" sz="1800"/>
-              <a:t>: </a:t>
-            </a:r>
-          </a:p>
-          <a:p>
-            <a:pPr lvl="1"/>
-            <a:r>
-              <a:rPr lang="en-US" sz="1800" b="1"/>
-              <a:t>Security</a:t>
-            </a:r>
-            <a:r>
-              <a:rPr lang="en-US" sz="1800"/>
-              <a:t>: EP/IP container isolation protects the IP side, and the SID Filter </a:t>
-            </a:r>
-            <a:r>
-              <a:rPr lang="en-US" sz="1800" b="1"/>
-              <a:t>prevents the specified requests</a:t>
-            </a:r>
-            <a:r>
-              <a:rPr lang="en-US" sz="1800"/>
-              <a:t> from reaching internal CAN.</a:t>
-            </a:r>
-          </a:p>
-          <a:p>
-            <a:pPr lvl="1"/>
-            <a:r>
-              <a:rPr lang="en-US" sz="1800" b="1"/>
-              <a:t>Maintainability</a:t>
-            </a:r>
-            <a:r>
-              <a:rPr lang="en-US" sz="1800"/>
-              <a:t>: existing EP modules and RDG </a:t>
-            </a:r>
-            <a:r>
-              <a:rPr lang="en-US" sz="1800" b="1"/>
-              <a:t>keep their current interfaces</a:t>
-            </a:r>
-            <a:r>
-              <a:rPr lang="en-US" sz="1800"/>
-              <a:t>, </a:t>
-            </a:r>
-            <a:r>
-              <a:rPr lang="en-US" sz="1800" b="1"/>
-              <a:t>minimizing modifications to EP modules</a:t>
-            </a:r>
-            <a:r>
-              <a:rPr lang="en-US" sz="1800"/>
-              <a:t>.</a:t>
-            </a:r>
-          </a:p>
-          <a:p>
-            <a:r>
-              <a:rPr lang="en-US" sz="1800" b="1">
-                <a:solidFill>
-                  <a:schemeClr val="accent2">
-                    <a:lumMod val="75000"/>
-                  </a:schemeClr>
-                </a:solidFill>
-              </a:rPr>
-              <a:t>Trade-off </a:t>
-            </a:r>
-            <a:r>
-              <a:rPr lang="en-US" sz="1800"/>
-              <a:t>:</a:t>
-            </a:r>
-          </a:p>
-          <a:p>
-            <a:pPr lvl="1"/>
-            <a:r>
-              <a:rPr lang="en-US" sz="1800" b="1"/>
-              <a:t>Security</a:t>
-            </a:r>
-            <a:r>
-              <a:rPr lang="en-US" sz="1800"/>
-              <a:t>: </a:t>
-            </a:r>
-            <a:r>
-              <a:rPr lang="en-US" sz="1800" err="1"/>
-              <a:t>RemoteDiag</a:t>
-            </a:r>
-            <a:r>
-              <a:rPr lang="en-US" sz="1800"/>
-              <a:t> remains in the EP side. Therefore, container isolation </a:t>
-            </a:r>
-            <a:r>
-              <a:rPr lang="en-US" sz="1800" b="1"/>
-              <a:t>does not protect </a:t>
-            </a:r>
-            <a:r>
-              <a:rPr lang="en-US" sz="1800" b="1" err="1"/>
-              <a:t>RemoteDiag</a:t>
-            </a:r>
-            <a:r>
-              <a:rPr lang="en-US" sz="1800"/>
-              <a:t> if the EP is compromised.</a:t>
-            </a:r>
-          </a:p>
-        </p:txBody>
-      </p:sp>
-      <p:pic>
-        <p:nvPicPr>
-          <p:cNvPr id="5" name="Picture 4" descr="A diagram of a remote control&#10;&#10;AI-generated content may be incorrect.">
-            <a:extLst>
-              <a:ext uri="{FF2B5EF4-FFF2-40B4-BE49-F238E27FC236}">
-                <a16:creationId xmlns="" xmlns:a16="http://schemas.microsoft.com/office/drawing/2014/main" id="{E146C554-A4E0-0D89-9EC9-B22462873F20}"/>
-              </a:ext>
-            </a:extLst>
-          </p:cNvPr>
-          <p:cNvPicPr>
-            <a:picLocks noChangeAspect="1"/>
-          </p:cNvPicPr>
-          <p:nvPr/>
-        </p:nvPicPr>
-        <p:blipFill>
-          <a:blip r:embed="rId2">
-            <a:extLst>
-              <a:ext uri="{28A0092B-C50C-407E-A947-70E740481C1C}">
-                <a14:useLocalDpi xmlns:a14="http://schemas.microsoft.com/office/drawing/2010/main" val="0"/>
-              </a:ext>
-            </a:extLst>
-          </a:blip>
-          <a:stretch>
-            <a:fillRect/>
-          </a:stretch>
-        </p:blipFill>
-        <p:spPr>
-          <a:xfrm>
-            <a:off x="5988946" y="4040550"/>
-            <a:ext cx="6101360" cy="2447804"/>
-          </a:xfrm>
-          <a:prstGeom prst="rect">
-            <a:avLst/>
-          </a:prstGeom>
-        </p:spPr>
-      </p:pic>
-      <p:sp>
-        <p:nvSpPr>
-          <p:cNvPr id="4" name="TextBox 3"/>
-          <p:cNvSpPr txBox="1"/>
-          <p:nvPr/>
-        </p:nvSpPr>
-        <p:spPr>
-          <a:xfrm>
-            <a:off x="622780" y="3845992"/>
-            <a:ext cx="5297254" cy="1200329"/>
-          </a:xfrm>
-          <a:prstGeom prst="rect">
-            <a:avLst/>
-          </a:prstGeom>
-          <a:noFill/>
-        </p:spPr>
-        <p:txBody>
-          <a:bodyPr wrap="square" rtlCol="0">
-            <a:spAutoFit/>
-          </a:bodyPr>
-          <a:lstStyle/>
-          <a:p>
-            <a:pPr marL="227013" lvl="1" indent="-227013">
-              <a:buFont typeface="Arial" panose="020B0604020202020204" pitchFamily="34" charset="0"/>
-              <a:buChar char="•"/>
-            </a:pPr>
-            <a:r>
-              <a:rPr lang="en-US" b="1"/>
-              <a:t>Maintainability</a:t>
-            </a:r>
-            <a:r>
-              <a:rPr lang="en-US"/>
-              <a:t>: </a:t>
-            </a:r>
-            <a:r>
-              <a:rPr lang="en-US" err="1"/>
-              <a:t>OnBoardClient</a:t>
-            </a:r>
-            <a:r>
-              <a:rPr lang="en-US"/>
-              <a:t> must be </a:t>
-            </a:r>
-            <a:r>
-              <a:rPr lang="en-US" b="1"/>
-              <a:t>modified to integrate the SID Filter</a:t>
-            </a:r>
-            <a:r>
-              <a:rPr lang="en-US"/>
-              <a:t>, increasing the code-change scope and maintenance effort.</a:t>
-            </a:r>
-          </a:p>
-          <a:p>
-            <a:endParaRPr lang="en-US"/>
-          </a:p>
-        </p:txBody>
-      </p:sp>
-    </p:spTree>
-    <p:extLst>
-      <p:ext uri="{BB962C8B-B14F-4D97-AF65-F5344CB8AC3E}">
-        <p14:creationId xmlns:p14="http://schemas.microsoft.com/office/powerpoint/2010/main" val="1459955716"/>
-      </p:ext>
-    </p:extLst>
-  </p:cSld>
-  <p:clrMapOvr>
-    <a:masterClrMapping/>
-  </p:clrMapOvr>
-  <p:timing>
-    <p:tnLst>
-      <p:par>
-        <p:cTn id="1" dur="indefinite" restart="never" nodeType="tmRoot"/>
-      </p:par>
-    </p:tnLst>
-  </p:timing>
-</p:sld>
-</file>
-
-<file path=ppt/slides/slide22.xml><?xml version="1.0" encoding="utf-8"?>
-<p:sld xmlns:a="http://schemas.openxmlformats.org/drawingml/2006/main" xmlns:r="http://schemas.openxmlformats.org/officeDocument/2006/relationships" xmlns:p="http://schemas.openxmlformats.org/presentationml/2006/main">
-  <p:cSld>
-    <p:spTree>
-      <p:nvGrpSpPr>
-        <p:cNvPr id="1" name=""/>
-        <p:cNvGrpSpPr/>
-        <p:nvPr/>
-      </p:nvGrpSpPr>
-      <p:grpSpPr>
-        <a:xfrm>
-          <a:off x="0" y="0"/>
-          <a:ext cx="0" cy="0"/>
-          <a:chOff x="0" y="0"/>
-          <a:chExt cx="0" cy="0"/>
-        </a:xfrm>
-      </p:grpSpPr>
-      <p:sp>
-        <p:nvSpPr>
-          <p:cNvPr id="2" name="Title 1"/>
-          <p:cNvSpPr>
-            <a:spLocks noGrp="1"/>
-          </p:cNvSpPr>
-          <p:nvPr>
-            <p:ph type="title"/>
-          </p:nvPr>
-        </p:nvSpPr>
-        <p:spPr/>
-        <p:txBody>
-          <a:bodyPr/>
-          <a:lstStyle/>
-          <a:p>
-            <a:r>
-              <a:rPr lang="en-US"/>
-              <a:t>Design Alternative – Alt-B</a:t>
-            </a:r>
-          </a:p>
-        </p:txBody>
-      </p:sp>
-      <p:sp>
-        <p:nvSpPr>
-          <p:cNvPr id="3" name="Content Placeholder 2"/>
-          <p:cNvSpPr>
-            <a:spLocks noGrp="1"/>
-          </p:cNvSpPr>
-          <p:nvPr>
-            <p:ph idx="1"/>
-          </p:nvPr>
-        </p:nvSpPr>
-        <p:spPr>
-          <a:xfrm>
-            <a:off x="160866" y="990600"/>
-            <a:ext cx="6569872" cy="5278168"/>
-          </a:xfrm>
-        </p:spPr>
-        <p:txBody>
-          <a:bodyPr>
-            <a:normAutofit/>
-          </a:bodyPr>
-          <a:lstStyle/>
-          <a:p>
-            <a:r>
-              <a:rPr lang="en-US" sz="1800"/>
-              <a:t>Move the </a:t>
-            </a:r>
-            <a:r>
-              <a:rPr lang="en-US" sz="1800" b="1"/>
-              <a:t>entire</a:t>
-            </a:r>
-            <a:r>
-              <a:rPr lang="en-US" sz="1800"/>
-              <a:t> </a:t>
-            </a:r>
-            <a:r>
-              <a:rPr lang="en-US" sz="1800" err="1"/>
-              <a:t>RemoteDiag</a:t>
-            </a:r>
-            <a:r>
-              <a:rPr lang="en-US" sz="1800"/>
-              <a:t> into the IP container. Each EP module communicates with </a:t>
-            </a:r>
-            <a:r>
-              <a:rPr lang="en-US" sz="1800" err="1"/>
-              <a:t>RemoteDiag</a:t>
-            </a:r>
-            <a:r>
-              <a:rPr lang="en-US" sz="1800"/>
-              <a:t> through an internal-protocol IPC channels.</a:t>
-            </a:r>
-          </a:p>
-          <a:p>
-            <a:r>
-              <a:rPr lang="en-US" sz="1800" b="1">
-                <a:solidFill>
-                  <a:schemeClr val="accent6">
-                    <a:lumMod val="75000"/>
-                  </a:schemeClr>
-                </a:solidFill>
-              </a:rPr>
-              <a:t>Pros</a:t>
-            </a:r>
-            <a:r>
-              <a:rPr lang="en-US" sz="1800"/>
-              <a:t>: </a:t>
-            </a:r>
-          </a:p>
-          <a:p>
-            <a:pPr lvl="1"/>
-            <a:r>
-              <a:rPr lang="en-US" sz="1800" b="1"/>
-              <a:t>Security</a:t>
-            </a:r>
-            <a:r>
-              <a:rPr lang="en-US" sz="1800"/>
-              <a:t>: The IP container </a:t>
-            </a:r>
-            <a:r>
-              <a:rPr lang="en-US" sz="1800" b="1"/>
-              <a:t>protects the whole </a:t>
-            </a:r>
-            <a:r>
-              <a:rPr lang="en-US" sz="1800" b="1" err="1"/>
-              <a:t>RemoteDiag</a:t>
-            </a:r>
-            <a:r>
-              <a:rPr lang="en-US" sz="1800"/>
-              <a:t>. The SID Filter in </a:t>
-            </a:r>
-            <a:r>
-              <a:rPr lang="en-US" sz="1800" err="1"/>
-              <a:t>RemoteDiag</a:t>
-            </a:r>
-            <a:r>
-              <a:rPr lang="en-US" sz="1800"/>
-              <a:t> blocks the specified requests before reaching OBC and internal CAN.</a:t>
-            </a:r>
-          </a:p>
-          <a:p>
-            <a:r>
-              <a:rPr lang="en-US" sz="1800" b="1">
-                <a:solidFill>
-                  <a:schemeClr val="accent2">
-                    <a:lumMod val="75000"/>
-                  </a:schemeClr>
-                </a:solidFill>
-              </a:rPr>
-              <a:t>Trade-off</a:t>
-            </a:r>
-            <a:r>
-              <a:rPr lang="en-US" sz="1800"/>
-              <a:t>:</a:t>
-            </a:r>
-          </a:p>
-          <a:p>
-            <a:pPr lvl="1"/>
-            <a:r>
-              <a:rPr lang="en-US" sz="1800" b="1"/>
-              <a:t>Maintainability</a:t>
-            </a:r>
-            <a:r>
-              <a:rPr lang="en-US" sz="1800"/>
-              <a:t>: Every EP module (10+) </a:t>
-            </a:r>
-            <a:r>
-              <a:rPr lang="en-US" sz="1800" b="1"/>
-              <a:t>has to be modified </a:t>
-            </a:r>
-            <a:r>
-              <a:rPr lang="en-US" sz="1800"/>
-              <a:t>to implement a new cross-container IPC client, including connection management, reconnection handling and fail-safe logic. Effort </a:t>
-            </a:r>
-            <a:r>
-              <a:rPr lang="en-US" sz="1800" b="1"/>
-              <a:t>multiplied by N </a:t>
-            </a:r>
-            <a:r>
-              <a:rPr lang="en-US" sz="1800"/>
-              <a:t>number EP modules.</a:t>
-            </a:r>
-          </a:p>
-        </p:txBody>
-      </p:sp>
-      <p:pic>
-        <p:nvPicPr>
-          <p:cNvPr id="7" name="Picture 6" descr="A diagram of a data flow&#10;&#10;AI-generated content may be incorrect.">
-            <a:extLst>
-              <a:ext uri="{FF2B5EF4-FFF2-40B4-BE49-F238E27FC236}">
-                <a16:creationId xmlns="" xmlns:a16="http://schemas.microsoft.com/office/drawing/2014/main" id="{D202F5ED-768D-B9A3-4243-16BBE387282B}"/>
-              </a:ext>
-            </a:extLst>
-          </p:cNvPr>
-          <p:cNvPicPr>
-            <a:picLocks noChangeAspect="1"/>
-          </p:cNvPicPr>
-          <p:nvPr/>
-        </p:nvPicPr>
-        <p:blipFill>
-          <a:blip r:embed="rId3">
-            <a:extLst>
-              <a:ext uri="{28A0092B-C50C-407E-A947-70E740481C1C}">
-                <a14:useLocalDpi xmlns:a14="http://schemas.microsoft.com/office/drawing/2010/main" val="0"/>
-              </a:ext>
-            </a:extLst>
-          </a:blip>
-          <a:stretch>
-            <a:fillRect/>
-          </a:stretch>
-        </p:blipFill>
-        <p:spPr>
-          <a:xfrm>
-            <a:off x="6878665" y="990601"/>
-            <a:ext cx="5239441" cy="4071594"/>
-          </a:xfrm>
-          <a:prstGeom prst="rect">
-            <a:avLst/>
-          </a:prstGeom>
-        </p:spPr>
-      </p:pic>
-    </p:spTree>
-    <p:extLst>
-      <p:ext uri="{BB962C8B-B14F-4D97-AF65-F5344CB8AC3E}">
-        <p14:creationId xmlns:p14="http://schemas.microsoft.com/office/powerpoint/2010/main" val="448138064"/>
-      </p:ext>
-    </p:extLst>
-  </p:cSld>
-  <p:clrMapOvr>
-    <a:masterClrMapping/>
-  </p:clrMapOvr>
-  <p:timing>
-    <p:tnLst>
-      <p:par>
-        <p:cTn id="1" dur="indefinite" restart="never" nodeType="tmRoot"/>
-      </p:par>
-    </p:tnLst>
-  </p:timing>
-</p:sld>
-</file>
-
-<file path=ppt/slides/slide23.xml><?xml version="1.0" encoding="utf-8"?>
-<p:sld xmlns:a="http://schemas.openxmlformats.org/drawingml/2006/main" xmlns:r="http://schemas.openxmlformats.org/officeDocument/2006/relationships" xmlns:p="http://schemas.openxmlformats.org/presentationml/2006/main">
-  <p:cSld>
-    <p:spTree>
-      <p:nvGrpSpPr>
-        <p:cNvPr id="1" name="">
-          <a:extLst>
-            <a:ext uri="{FF2B5EF4-FFF2-40B4-BE49-F238E27FC236}">
-              <a16:creationId xmlns="" xmlns:a16="http://schemas.microsoft.com/office/drawing/2014/main" id="{7A3A9F39-394E-5437-993F-29D2F2093B00}"/>
-            </a:ext>
-          </a:extLst>
-        </p:cNvPr>
-        <p:cNvGrpSpPr/>
-        <p:nvPr/>
-      </p:nvGrpSpPr>
-      <p:grpSpPr>
-        <a:xfrm>
-          <a:off x="0" y="0"/>
-          <a:ext cx="0" cy="0"/>
-          <a:chOff x="0" y="0"/>
-          <a:chExt cx="0" cy="0"/>
-        </a:xfrm>
-      </p:grpSpPr>
-      <p:sp>
-        <p:nvSpPr>
-          <p:cNvPr id="2" name="Title 1">
-            <a:extLst>
-              <a:ext uri="{FF2B5EF4-FFF2-40B4-BE49-F238E27FC236}">
-                <a16:creationId xmlns="" xmlns:a16="http://schemas.microsoft.com/office/drawing/2014/main" id="{554F77EA-2B30-AFDC-1349-3C58C2AB9061}"/>
-              </a:ext>
-            </a:extLst>
-          </p:cNvPr>
-          <p:cNvSpPr>
-            <a:spLocks noGrp="1"/>
-          </p:cNvSpPr>
-          <p:nvPr>
-            <p:ph type="title"/>
-          </p:nvPr>
-        </p:nvSpPr>
-        <p:spPr/>
-        <p:txBody>
-          <a:bodyPr/>
-          <a:lstStyle/>
-          <a:p>
-            <a:r>
-              <a:rPr lang="en-US"/>
-              <a:t>Design Alternative – Alt-C</a:t>
-            </a:r>
-          </a:p>
-        </p:txBody>
-      </p:sp>
-      <p:sp>
-        <p:nvSpPr>
-          <p:cNvPr id="3" name="Content Placeholder 2">
-            <a:extLst>
-              <a:ext uri="{FF2B5EF4-FFF2-40B4-BE49-F238E27FC236}">
-                <a16:creationId xmlns="" xmlns:a16="http://schemas.microsoft.com/office/drawing/2014/main" id="{64FB7A4A-CF56-C0BD-9AB9-923B2D043291}"/>
-              </a:ext>
-            </a:extLst>
-          </p:cNvPr>
-          <p:cNvSpPr>
-            <a:spLocks noGrp="1"/>
-          </p:cNvSpPr>
-          <p:nvPr>
-            <p:ph idx="1"/>
-          </p:nvPr>
-        </p:nvSpPr>
-        <p:spPr>
-          <a:xfrm>
-            <a:off x="160867" y="990600"/>
-            <a:ext cx="6817903" cy="5278168"/>
-          </a:xfrm>
-        </p:spPr>
-        <p:txBody>
-          <a:bodyPr>
-            <a:normAutofit/>
-          </a:bodyPr>
-          <a:lstStyle/>
-          <a:p>
-            <a:r>
-              <a:rPr lang="en-US" sz="1800"/>
-              <a:t>Move the entire </a:t>
-            </a:r>
-            <a:r>
-              <a:rPr lang="en-US" sz="1800" err="1"/>
-              <a:t>RemoteDiag</a:t>
-            </a:r>
-            <a:r>
-              <a:rPr lang="en-US" sz="1800"/>
-              <a:t> (RDG) into the IP container. </a:t>
-            </a:r>
-          </a:p>
-          <a:p>
-            <a:r>
-              <a:rPr lang="en-US" sz="1800"/>
-              <a:t>Introduce a </a:t>
-            </a:r>
-            <a:r>
-              <a:rPr lang="en-US" sz="1800" b="1"/>
-              <a:t>new </a:t>
-            </a:r>
-            <a:r>
-              <a:rPr lang="en-US" sz="1800" b="1" err="1"/>
-              <a:t>RemoteDiagProxy</a:t>
-            </a:r>
-            <a:r>
-              <a:rPr lang="en-US" sz="1800" b="1"/>
-              <a:t> (RDP) module</a:t>
-            </a:r>
-            <a:r>
-              <a:rPr lang="en-US" sz="1800"/>
-              <a:t> in the EP that acts as a </a:t>
-            </a:r>
-            <a:r>
-              <a:rPr lang="en-US" sz="1800" b="1"/>
-              <a:t>transparent proxy</a:t>
-            </a:r>
-            <a:r>
-              <a:rPr lang="en-US" sz="1800"/>
-              <a:t>. EP modules continue to interact with RDP using their existing interface, while RDP forwards requests to </a:t>
-            </a:r>
-            <a:r>
-              <a:rPr lang="en-US" sz="1800" err="1"/>
-              <a:t>RemoteDiag</a:t>
-            </a:r>
-            <a:r>
-              <a:rPr lang="en-US" sz="1800"/>
-              <a:t> via an internal protocol.</a:t>
-            </a:r>
-            <a:endParaRPr lang="en-US" sz="1800" b="1"/>
-          </a:p>
-          <a:p>
-            <a:r>
-              <a:rPr lang="en-US" sz="1800" b="1">
-                <a:solidFill>
-                  <a:schemeClr val="accent6">
-                    <a:lumMod val="75000"/>
-                  </a:schemeClr>
-                </a:solidFill>
-              </a:rPr>
-              <a:t>Pros</a:t>
-            </a:r>
-            <a:r>
-              <a:rPr lang="en-US" sz="1800"/>
-              <a:t>: </a:t>
-            </a:r>
-          </a:p>
-          <a:p>
-            <a:pPr lvl="1"/>
-            <a:r>
-              <a:rPr lang="en-US" sz="1800" b="1"/>
-              <a:t>Security</a:t>
-            </a:r>
-            <a:r>
-              <a:rPr lang="en-US" sz="1800"/>
-              <a:t>: The IP container protects the whole RDG. The SID Filter in RDG blocks the specified requests before reaching </a:t>
-            </a:r>
-            <a:r>
-              <a:rPr lang="en-US" sz="1800" err="1"/>
-              <a:t>OnBoardClient</a:t>
-            </a:r>
-            <a:r>
-              <a:rPr lang="en-US" sz="1800"/>
-              <a:t> and internal CAN.</a:t>
-            </a:r>
-          </a:p>
-          <a:p>
-            <a:pPr lvl="1"/>
-            <a:r>
-              <a:rPr lang="en-US" sz="1800" b="1"/>
-              <a:t>Maintainability</a:t>
-            </a:r>
-            <a:r>
-              <a:rPr lang="en-US" sz="1800"/>
-              <a:t>: Existing EP modules keep their current source code and Binder interfaces, </a:t>
-            </a:r>
-            <a:r>
-              <a:rPr lang="en-US" sz="1800" b="1"/>
-              <a:t>minimizing modifications to EP modules</a:t>
-            </a:r>
-            <a:r>
-              <a:rPr lang="en-US" sz="1800"/>
-              <a:t>.</a:t>
-            </a:r>
-          </a:p>
-          <a:p>
-            <a:r>
-              <a:rPr lang="en-US" sz="1800" b="1">
-                <a:solidFill>
-                  <a:schemeClr val="accent2">
-                    <a:lumMod val="75000"/>
-                  </a:schemeClr>
-                </a:solidFill>
-              </a:rPr>
-              <a:t>Trade-off</a:t>
-            </a:r>
-            <a:r>
-              <a:rPr lang="en-US" sz="1800"/>
-              <a:t>: </a:t>
-            </a:r>
-          </a:p>
-          <a:p>
-            <a:pPr lvl="1"/>
-            <a:r>
-              <a:rPr lang="en-US" sz="1800" b="1"/>
-              <a:t>Maintainability</a:t>
-            </a:r>
-            <a:r>
-              <a:rPr lang="en-US" sz="1800"/>
-              <a:t>: Alt-C introduces new RDP module and cross-container communication that must be implemented and maintained, although existing EP client modules remain unchanged.</a:t>
-            </a:r>
-          </a:p>
-        </p:txBody>
-      </p:sp>
-      <p:pic>
-        <p:nvPicPr>
-          <p:cNvPr id="5" name="Picture 4" descr="A diagram of a container&#10;&#10;AI-generated content may be incorrect.">
-            <a:extLst>
-              <a:ext uri="{FF2B5EF4-FFF2-40B4-BE49-F238E27FC236}">
-                <a16:creationId xmlns="" xmlns:a16="http://schemas.microsoft.com/office/drawing/2014/main" id="{F96D85AC-F590-5734-3383-B0AE1B03AFC7}"/>
-              </a:ext>
-            </a:extLst>
-          </p:cNvPr>
-          <p:cNvPicPr>
-            <a:picLocks noChangeAspect="1"/>
-          </p:cNvPicPr>
-          <p:nvPr/>
-        </p:nvPicPr>
-        <p:blipFill>
-          <a:blip r:embed="rId2">
-            <a:extLst>
-              <a:ext uri="{28A0092B-C50C-407E-A947-70E740481C1C}">
-                <a14:useLocalDpi xmlns:a14="http://schemas.microsoft.com/office/drawing/2010/main" val="0"/>
-              </a:ext>
-            </a:extLst>
-          </a:blip>
-          <a:stretch>
-            <a:fillRect/>
-          </a:stretch>
-        </p:blipFill>
-        <p:spPr>
-          <a:xfrm>
-            <a:off x="7181385" y="1339969"/>
-            <a:ext cx="4845814" cy="3749615"/>
-          </a:xfrm>
-          <a:prstGeom prst="rect">
-            <a:avLst/>
-          </a:prstGeom>
-        </p:spPr>
-      </p:pic>
-    </p:spTree>
-    <p:extLst>
-      <p:ext uri="{BB962C8B-B14F-4D97-AF65-F5344CB8AC3E}">
-        <p14:creationId xmlns:p14="http://schemas.microsoft.com/office/powerpoint/2010/main" val="157993224"/>
       </p:ext>
     </p:extLst>
   </p:cSld>
@@ -17639,42 +14270,42 @@
           <a:chExt cx="0" cy="0"/>
         </a:xfrm>
       </p:grpSpPr>
-      <p:pic>
-        <p:nvPicPr>
-          <p:cNvPr id="14" name="Picture 13">
-            <a:extLst>
-              <a:ext uri="{FF2B5EF4-FFF2-40B4-BE49-F238E27FC236}">
-                <a16:creationId xmlns="" xmlns:a16="http://schemas.microsoft.com/office/drawing/2014/main" id="{4DC0AA0D-E1FC-D3C4-68EE-7F18C43BE08D}"/>
-              </a:ext>
-            </a:extLst>
-          </p:cNvPr>
-          <p:cNvPicPr>
-            <a:picLocks noChangeAspect="1"/>
-          </p:cNvPicPr>
+      <p:cxnSp>
+        <p:nvCxnSpPr>
+          <p:cNvPr id="16" name="Straight Connector 15"/>
+          <p:cNvCxnSpPr/>
           <p:nvPr/>
-        </p:nvPicPr>
-        <p:blipFill>
-          <a:blip r:embed="rId2"/>
-          <a:stretch>
-            <a:fillRect/>
-          </a:stretch>
-        </p:blipFill>
+        </p:nvCxnSpPr>
         <p:spPr>
           <a:xfrm>
-            <a:off x="384475" y="1666758"/>
-            <a:ext cx="11423050" cy="3667241"/>
+            <a:off x="5635782" y="2872148"/>
+            <a:ext cx="0" cy="3985852"/>
           </a:xfrm>
-          <a:prstGeom prst="rect">
+          <a:prstGeom prst="line">
             <a:avLst/>
           </a:prstGeom>
         </p:spPr>
-      </p:pic>
+        <p:style>
+          <a:lnRef idx="1">
+            <a:schemeClr val="accent1"/>
+          </a:lnRef>
+          <a:fillRef idx="0">
+            <a:schemeClr val="accent1"/>
+          </a:fillRef>
+          <a:effectRef idx="0">
+            <a:schemeClr val="accent1"/>
+          </a:effectRef>
+          <a:fontRef idx="minor">
+            <a:schemeClr val="tx1"/>
+          </a:fontRef>
+        </p:style>
+      </p:cxnSp>
       <p:sp>
         <p:nvSpPr>
           <p:cNvPr id="2" name="Title 1">
             <a:extLst>
               <a:ext uri="{FF2B5EF4-FFF2-40B4-BE49-F238E27FC236}">
-                <a16:creationId xmlns="" xmlns:a16="http://schemas.microsoft.com/office/drawing/2014/main" id="{F11C1235-51B4-A8A0-3A61-9C767F437001}"/>
+                <a16:creationId xmlns:a16="http://schemas.microsoft.com/office/drawing/2014/main" xmlns="" id="{F11C1235-51B4-A8A0-3A61-9C767F437001}"/>
               </a:ext>
             </a:extLst>
           </p:cNvPr>
@@ -17698,9 +14329,10 @@
           <a:lstStyle/>
           <a:p>
             <a:r>
-              <a:rPr lang="en-US"/>
+              <a:rPr lang="en-US" smtClean="0"/>
               <a:t>Context &amp; Motivation</a:t>
             </a:r>
+            <a:endParaRPr lang="en-US"/>
           </a:p>
         </p:txBody>
       </p:sp>
@@ -17709,7 +14341,7 @@
           <p:cNvPr id="7" name="Content Placeholder 6">
             <a:extLst>
               <a:ext uri="{FF2B5EF4-FFF2-40B4-BE49-F238E27FC236}">
-                <a16:creationId xmlns="" xmlns:a16="http://schemas.microsoft.com/office/drawing/2014/main" id="{4A0E7BDD-2CF4-321B-0637-D9AF63CAB0BF}"/>
+                <a16:creationId xmlns:a16="http://schemas.microsoft.com/office/drawing/2014/main" xmlns="" id="{4A0E7BDD-2CF4-321B-0637-D9AF63CAB0BF}"/>
               </a:ext>
             </a:extLst>
           </p:cNvPr>
@@ -17722,694 +14354,59 @@
         </p:nvSpPr>
         <p:spPr>
           <a:xfrm>
-            <a:off x="4410636" y="1175800"/>
-            <a:ext cx="3237053" cy="490959"/>
+            <a:off x="160866" y="896130"/>
+            <a:ext cx="11916834" cy="1756536"/>
           </a:xfrm>
         </p:spPr>
         <p:txBody>
-          <a:bodyPr/>
-          <a:lstStyle/>
-          <a:p>
-            <a:pPr marL="0" indent="0">
-              <a:buNone/>
-            </a:pPr>
-            <a:r>
-              <a:rPr lang="en-US"/>
-              <a:t>Current architecture</a:t>
-            </a:r>
-          </a:p>
-        </p:txBody>
-      </p:sp>
-      <p:sp>
-        <p:nvSpPr>
-          <p:cNvPr id="12" name="Freeform 11">
-            <a:extLst>
-              <a:ext uri="{FF2B5EF4-FFF2-40B4-BE49-F238E27FC236}">
-                <a16:creationId xmlns="" xmlns:a16="http://schemas.microsoft.com/office/drawing/2014/main" id="{6836BF74-18E1-53CF-E711-96BF334B6D6A}"/>
-              </a:ext>
-            </a:extLst>
-          </p:cNvPr>
-          <p:cNvSpPr/>
-          <p:nvPr/>
-        </p:nvSpPr>
-        <p:spPr>
-          <a:xfrm>
-            <a:off x="7660044" y="1666757"/>
-            <a:ext cx="4247351" cy="3743443"/>
-          </a:xfrm>
-          <a:custGeom>
-            <a:avLst/>
-            <a:gdLst>
-              <a:gd name="connsiteX0" fmla="*/ 1674457 w 4247351"/>
-              <a:gd name="connsiteY0" fmla="*/ 0 h 3743443"/>
-              <a:gd name="connsiteX1" fmla="*/ 4247351 w 4247351"/>
-              <a:gd name="connsiteY1" fmla="*/ 0 h 3743443"/>
-              <a:gd name="connsiteX2" fmla="*/ 4247351 w 4247351"/>
-              <a:gd name="connsiteY2" fmla="*/ 3743443 h 3743443"/>
-              <a:gd name="connsiteX3" fmla="*/ 1674457 w 4247351"/>
-              <a:gd name="connsiteY3" fmla="*/ 3743443 h 3743443"/>
-              <a:gd name="connsiteX4" fmla="*/ 1674457 w 4247351"/>
-              <a:gd name="connsiteY4" fmla="*/ 3381492 h 3743443"/>
-              <a:gd name="connsiteX5" fmla="*/ 0 w 4247351"/>
-              <a:gd name="connsiteY5" fmla="*/ 3381492 h 3743443"/>
-              <a:gd name="connsiteX6" fmla="*/ 0 w 4247351"/>
-              <a:gd name="connsiteY6" fmla="*/ 1091293 h 3743443"/>
-              <a:gd name="connsiteX7" fmla="*/ 1674457 w 4247351"/>
-              <a:gd name="connsiteY7" fmla="*/ 1091293 h 3743443"/>
-            </a:gdLst>
-            <a:ahLst/>
-            <a:cxnLst>
-              <a:cxn ang="0">
-                <a:pos x="connsiteX0" y="connsiteY0"/>
-              </a:cxn>
-              <a:cxn ang="0">
-                <a:pos x="connsiteX1" y="connsiteY1"/>
-              </a:cxn>
-              <a:cxn ang="0">
-                <a:pos x="connsiteX2" y="connsiteY2"/>
-              </a:cxn>
-              <a:cxn ang="0">
-                <a:pos x="connsiteX3" y="connsiteY3"/>
-              </a:cxn>
-              <a:cxn ang="0">
-                <a:pos x="connsiteX4" y="connsiteY4"/>
-              </a:cxn>
-              <a:cxn ang="0">
-                <a:pos x="connsiteX5" y="connsiteY5"/>
-              </a:cxn>
-              <a:cxn ang="0">
-                <a:pos x="connsiteX6" y="connsiteY6"/>
-              </a:cxn>
-              <a:cxn ang="0">
-                <a:pos x="connsiteX7" y="connsiteY7"/>
-              </a:cxn>
-            </a:cxnLst>
-            <a:rect l="l" t="t" r="r" b="b"/>
-            <a:pathLst>
-              <a:path w="4247351" h="3743443">
-                <a:moveTo>
-                  <a:pt x="1674457" y="0"/>
-                </a:moveTo>
-                <a:lnTo>
-                  <a:pt x="4247351" y="0"/>
-                </a:lnTo>
-                <a:lnTo>
-                  <a:pt x="4247351" y="3743443"/>
-                </a:lnTo>
-                <a:lnTo>
-                  <a:pt x="1674457" y="3743443"/>
-                </a:lnTo>
-                <a:lnTo>
-                  <a:pt x="1674457" y="3381492"/>
-                </a:lnTo>
-                <a:lnTo>
-                  <a:pt x="0" y="3381492"/>
-                </a:lnTo>
-                <a:lnTo>
-                  <a:pt x="0" y="1091293"/>
-                </a:lnTo>
-                <a:lnTo>
-                  <a:pt x="1674457" y="1091293"/>
-                </a:lnTo>
-                <a:close/>
-              </a:path>
-            </a:pathLst>
-          </a:custGeom>
-          <a:noFill/>
-          <a:ln w="28575">
-            <a:solidFill>
-              <a:srgbClr val="FF0000"/>
-            </a:solidFill>
-            <a:prstDash val="sysDash"/>
-          </a:ln>
-        </p:spPr>
-        <p:style>
-          <a:lnRef idx="2">
-            <a:schemeClr val="accent1">
-              <a:shade val="15000"/>
-            </a:schemeClr>
-          </a:lnRef>
-          <a:fillRef idx="1">
-            <a:schemeClr val="accent1"/>
-          </a:fillRef>
-          <a:effectRef idx="0">
-            <a:schemeClr val="accent1"/>
-          </a:effectRef>
-          <a:fontRef idx="minor">
-            <a:schemeClr val="lt1"/>
-          </a:fontRef>
-        </p:style>
-        <p:txBody>
-          <a:bodyPr wrap="square" rtlCol="0" anchor="ctr">
+          <a:bodyPr>
             <a:noAutofit/>
           </a:bodyPr>
           <a:lstStyle/>
           <a:p>
-            <a:pPr algn="ctr"/>
-            <a:endParaRPr lang="en-US"/>
-          </a:p>
-        </p:txBody>
-      </p:sp>
-    </p:spTree>
-    <p:extLst>
-      <p:ext uri="{BB962C8B-B14F-4D97-AF65-F5344CB8AC3E}">
-        <p14:creationId xmlns:p14="http://schemas.microsoft.com/office/powerpoint/2010/main" val="2276347710"/>
-      </p:ext>
-    </p:extLst>
-  </p:cSld>
-  <p:clrMapOvr>
-    <a:masterClrMapping/>
-  </p:clrMapOvr>
-  <p:timing>
-    <p:tnLst>
-      <p:par>
-        <p:cTn id="1" dur="indefinite" restart="never" nodeType="tmRoot">
-          <p:childTnLst>
-            <p:seq concurrent="1" nextAc="seek">
-              <p:cTn id="2" dur="indefinite" nodeType="mainSeq">
-                <p:childTnLst>
-                  <p:par>
-                    <p:cTn id="3" fill="hold">
-                      <p:stCondLst>
-                        <p:cond delay="indefinite"/>
-                      </p:stCondLst>
-                      <p:childTnLst>
-                        <p:par>
-                          <p:cTn id="4" fill="hold">
-                            <p:stCondLst>
-                              <p:cond delay="0"/>
-                            </p:stCondLst>
-                            <p:childTnLst>
-                              <p:par>
-                                <p:cTn id="5" presetID="6" presetClass="entr" presetSubtype="16" fill="hold" grpId="0" nodeType="clickEffect">
-                                  <p:stCondLst>
-                                    <p:cond delay="0"/>
-                                  </p:stCondLst>
-                                  <p:childTnLst>
-                                    <p:set>
-                                      <p:cBhvr>
-                                        <p:cTn id="6" dur="1" fill="hold">
-                                          <p:stCondLst>
-                                            <p:cond delay="0"/>
-                                          </p:stCondLst>
-                                        </p:cTn>
-                                        <p:tgtEl>
-                                          <p:spTgt spid="12"/>
-                                        </p:tgtEl>
-                                        <p:attrNameLst>
-                                          <p:attrName>style.visibility</p:attrName>
-                                        </p:attrNameLst>
-                                      </p:cBhvr>
-                                      <p:to>
-                                        <p:strVal val="visible"/>
-                                      </p:to>
-                                    </p:set>
-                                    <p:animEffect transition="in" filter="circle(in)">
-                                      <p:cBhvr>
-                                        <p:cTn id="7" dur="1000"/>
-                                        <p:tgtEl>
-                                          <p:spTgt spid="12"/>
-                                        </p:tgtEl>
-                                      </p:cBhvr>
-                                    </p:animEffect>
-                                  </p:childTnLst>
-                                </p:cTn>
-                              </p:par>
-                            </p:childTnLst>
-                          </p:cTn>
-                        </p:par>
-                      </p:childTnLst>
-                    </p:cTn>
-                  </p:par>
-                </p:childTnLst>
-              </p:cTn>
-              <p:prevCondLst>
-                <p:cond evt="onPrev" delay="0">
-                  <p:tgtEl>
-                    <p:sldTgt/>
-                  </p:tgtEl>
-                </p:cond>
-              </p:prevCondLst>
-              <p:nextCondLst>
-                <p:cond evt="onNext" delay="0">
-                  <p:tgtEl>
-                    <p:sldTgt/>
-                  </p:tgtEl>
-                </p:cond>
-              </p:nextCondLst>
-            </p:seq>
-          </p:childTnLst>
-        </p:cTn>
-      </p:par>
-    </p:tnLst>
-    <p:bldLst>
-      <p:bldP spid="12" grpId="0" animBg="1"/>
-    </p:bldLst>
-  </p:timing>
-</p:sld>
-</file>
-
-<file path=ppt/slides/slide4.xml><?xml version="1.0" encoding="utf-8"?>
-<p:sld xmlns:a="http://schemas.openxmlformats.org/drawingml/2006/main" xmlns:r="http://schemas.openxmlformats.org/officeDocument/2006/relationships" xmlns:p="http://schemas.openxmlformats.org/presentationml/2006/main">
-  <p:cSld>
-    <p:spTree>
-      <p:nvGrpSpPr>
-        <p:cNvPr id="1" name="">
-          <a:extLst>
-            <a:ext uri="{FF2B5EF4-FFF2-40B4-BE49-F238E27FC236}">
-              <a16:creationId xmlns="" xmlns:a16="http://schemas.microsoft.com/office/drawing/2014/main" id="{351B5D0F-6087-17A5-72FF-6E022F0858C7}"/>
-            </a:ext>
-          </a:extLst>
-        </p:cNvPr>
-        <p:cNvGrpSpPr/>
-        <p:nvPr/>
-      </p:nvGrpSpPr>
-      <p:grpSpPr>
-        <a:xfrm>
-          <a:off x="0" y="0"/>
-          <a:ext cx="0" cy="0"/>
-          <a:chOff x="0" y="0"/>
-          <a:chExt cx="0" cy="0"/>
-        </a:xfrm>
-      </p:grpSpPr>
-      <p:sp>
-        <p:nvSpPr>
-          <p:cNvPr id="2" name="Title 1">
-            <a:extLst>
-              <a:ext uri="{FF2B5EF4-FFF2-40B4-BE49-F238E27FC236}">
-                <a16:creationId xmlns="" xmlns:a16="http://schemas.microsoft.com/office/drawing/2014/main" id="{40D72414-4805-EF13-2567-C5B514B448F3}"/>
-              </a:ext>
-            </a:extLst>
-          </p:cNvPr>
-          <p:cNvSpPr>
-            <a:spLocks noGrp="1"/>
-          </p:cNvSpPr>
-          <p:nvPr>
-            <p:ph type="title"/>
-          </p:nvPr>
-        </p:nvSpPr>
-        <p:spPr/>
-        <p:txBody>
-          <a:bodyPr/>
-          <a:lstStyle/>
-          <a:p>
             <a:r>
-              <a:rPr lang="en-US"/>
-              <a:t>Context &amp; Motivation</a:t>
-            </a:r>
-          </a:p>
-        </p:txBody>
-      </p:sp>
-      <p:sp>
-        <p:nvSpPr>
-          <p:cNvPr id="3" name="Content Placeholder 2">
-            <a:extLst>
-              <a:ext uri="{FF2B5EF4-FFF2-40B4-BE49-F238E27FC236}">
-                <a16:creationId xmlns="" xmlns:a16="http://schemas.microsoft.com/office/drawing/2014/main" id="{687B8B4F-34AF-C58A-4A12-C27069BE17EB}"/>
-              </a:ext>
-            </a:extLst>
-          </p:cNvPr>
-          <p:cNvSpPr>
-            <a:spLocks noGrp="1"/>
-          </p:cNvSpPr>
-          <p:nvPr>
-            <p:ph idx="1"/>
-          </p:nvPr>
-        </p:nvSpPr>
-        <p:spPr/>
-        <p:txBody>
-          <a:bodyPr/>
-          <a:lstStyle/>
-          <a:p>
-            <a:r>
-              <a:rPr lang="en-US" err="1"/>
-              <a:t>RemoteDiag</a:t>
-            </a:r>
-            <a:r>
-              <a:rPr lang="en-US"/>
-              <a:t> module</a:t>
+              <a:rPr lang="en-US" sz="1800" smtClean="0"/>
+              <a:t>Currently, Toyota telematics stack (DCM) runs in a single partition</a:t>
             </a:r>
           </a:p>
           <a:p>
-            <a:endParaRPr lang="en-US"/>
-          </a:p>
-        </p:txBody>
-      </p:sp>
-      <p:pic>
-        <p:nvPicPr>
-          <p:cNvPr id="6" name="Picture 5">
-            <a:extLst>
-              <a:ext uri="{FF2B5EF4-FFF2-40B4-BE49-F238E27FC236}">
-                <a16:creationId xmlns="" xmlns:a16="http://schemas.microsoft.com/office/drawing/2014/main" id="{B67FA871-6E94-BC51-E6D0-9534187DD723}"/>
-              </a:ext>
-            </a:extLst>
-          </p:cNvPr>
-          <p:cNvPicPr>
-            <a:picLocks noChangeAspect="1"/>
-          </p:cNvPicPr>
-          <p:nvPr/>
-        </p:nvPicPr>
-        <p:blipFill>
-          <a:blip r:embed="rId3"/>
-          <a:stretch>
-            <a:fillRect/>
-          </a:stretch>
-        </p:blipFill>
-        <p:spPr>
-          <a:xfrm>
-            <a:off x="1054358" y="1472116"/>
-            <a:ext cx="10895559" cy="5196716"/>
-          </a:xfrm>
-          <a:prstGeom prst="rect">
-            <a:avLst/>
-          </a:prstGeom>
-        </p:spPr>
-      </p:pic>
-      <p:sp>
-        <p:nvSpPr>
-          <p:cNvPr id="7" name="Rectangle 6">
-            <a:extLst>
-              <a:ext uri="{FF2B5EF4-FFF2-40B4-BE49-F238E27FC236}">
-                <a16:creationId xmlns="" xmlns:a16="http://schemas.microsoft.com/office/drawing/2014/main" id="{D526A082-4997-C65E-6755-539FF2BBC210}"/>
-              </a:ext>
-            </a:extLst>
-          </p:cNvPr>
-          <p:cNvSpPr/>
-          <p:nvPr/>
-        </p:nvSpPr>
-        <p:spPr>
-          <a:xfrm>
-            <a:off x="2200274" y="1872226"/>
-            <a:ext cx="485775" cy="4261874"/>
-          </a:xfrm>
-          <a:prstGeom prst="rect">
-            <a:avLst/>
-          </a:prstGeom>
-          <a:noFill/>
-          <a:ln w="28575">
-            <a:solidFill>
-              <a:srgbClr val="FF0000"/>
-            </a:solidFill>
-            <a:prstDash val="sysDash"/>
-          </a:ln>
-        </p:spPr>
-        <p:style>
-          <a:lnRef idx="2">
-            <a:schemeClr val="accent1">
-              <a:shade val="15000"/>
-            </a:schemeClr>
-          </a:lnRef>
-          <a:fillRef idx="1">
-            <a:schemeClr val="accent1"/>
-          </a:fillRef>
-          <a:effectRef idx="0">
-            <a:schemeClr val="accent1"/>
-          </a:effectRef>
-          <a:fontRef idx="minor">
-            <a:schemeClr val="lt1"/>
-          </a:fontRef>
-        </p:style>
-        <p:txBody>
-          <a:bodyPr rtlCol="0" anchor="ctr"/>
-          <a:lstStyle/>
-          <a:p>
-            <a:pPr algn="ctr"/>
-            <a:endParaRPr lang="en-US"/>
-          </a:p>
-        </p:txBody>
-      </p:sp>
-      <p:sp>
-        <p:nvSpPr>
-          <p:cNvPr id="8" name="Rectangle 7">
-            <a:extLst>
-              <a:ext uri="{FF2B5EF4-FFF2-40B4-BE49-F238E27FC236}">
-                <a16:creationId xmlns="" xmlns:a16="http://schemas.microsoft.com/office/drawing/2014/main" id="{76CAB5DF-BC1B-7CEE-FD78-3FA7AF6E1642}"/>
-              </a:ext>
-            </a:extLst>
-          </p:cNvPr>
-          <p:cNvSpPr/>
-          <p:nvPr/>
-        </p:nvSpPr>
-        <p:spPr>
-          <a:xfrm>
-            <a:off x="8715374" y="2933700"/>
-            <a:ext cx="3315760" cy="3200399"/>
-          </a:xfrm>
-          <a:prstGeom prst="rect">
-            <a:avLst/>
-          </a:prstGeom>
-          <a:noFill/>
-          <a:ln w="28575">
-            <a:solidFill>
-              <a:srgbClr val="FF0000"/>
-            </a:solidFill>
-            <a:prstDash val="sysDash"/>
-          </a:ln>
-        </p:spPr>
-        <p:style>
-          <a:lnRef idx="2">
-            <a:schemeClr val="accent1">
-              <a:shade val="15000"/>
-            </a:schemeClr>
-          </a:lnRef>
-          <a:fillRef idx="1">
-            <a:schemeClr val="accent1"/>
-          </a:fillRef>
-          <a:effectRef idx="0">
-            <a:schemeClr val="accent1"/>
-          </a:effectRef>
-          <a:fontRef idx="minor">
-            <a:schemeClr val="lt1"/>
-          </a:fontRef>
-        </p:style>
-        <p:txBody>
-          <a:bodyPr rtlCol="0" anchor="ctr"/>
-          <a:lstStyle/>
-          <a:p>
-            <a:pPr algn="ctr"/>
-            <a:endParaRPr lang="en-US"/>
-          </a:p>
-        </p:txBody>
-      </p:sp>
-    </p:spTree>
-    <p:extLst>
-      <p:ext uri="{BB962C8B-B14F-4D97-AF65-F5344CB8AC3E}">
-        <p14:creationId xmlns:p14="http://schemas.microsoft.com/office/powerpoint/2010/main" val="3767822548"/>
-      </p:ext>
-    </p:extLst>
-  </p:cSld>
-  <p:clrMapOvr>
-    <a:masterClrMapping/>
-  </p:clrMapOvr>
-  <p:timing>
-    <p:tnLst>
-      <p:par>
-        <p:cTn id="1" dur="indefinite" restart="never" nodeType="tmRoot">
-          <p:childTnLst>
-            <p:seq concurrent="1" nextAc="seek">
-              <p:cTn id="2" dur="indefinite" nodeType="mainSeq">
-                <p:childTnLst>
-                  <p:par>
-                    <p:cTn id="3" fill="hold">
-                      <p:stCondLst>
-                        <p:cond delay="indefinite"/>
-                      </p:stCondLst>
-                      <p:childTnLst>
-                        <p:par>
-                          <p:cTn id="4" fill="hold">
-                            <p:stCondLst>
-                              <p:cond delay="0"/>
-                            </p:stCondLst>
-                            <p:childTnLst>
-                              <p:par>
-                                <p:cTn id="5" presetID="6" presetClass="entr" presetSubtype="16" fill="hold" grpId="0" nodeType="clickEffect">
-                                  <p:stCondLst>
-                                    <p:cond delay="0"/>
-                                  </p:stCondLst>
-                                  <p:childTnLst>
-                                    <p:set>
-                                      <p:cBhvr>
-                                        <p:cTn id="6" dur="1" fill="hold">
-                                          <p:stCondLst>
-                                            <p:cond delay="0"/>
-                                          </p:stCondLst>
-                                        </p:cTn>
-                                        <p:tgtEl>
-                                          <p:spTgt spid="7"/>
-                                        </p:tgtEl>
-                                        <p:attrNameLst>
-                                          <p:attrName>style.visibility</p:attrName>
-                                        </p:attrNameLst>
-                                      </p:cBhvr>
-                                      <p:to>
-                                        <p:strVal val="visible"/>
-                                      </p:to>
-                                    </p:set>
-                                    <p:animEffect transition="in" filter="circle(in)">
-                                      <p:cBhvr>
-                                        <p:cTn id="7" dur="750"/>
-                                        <p:tgtEl>
-                                          <p:spTgt spid="7"/>
-                                        </p:tgtEl>
-                                      </p:cBhvr>
-                                    </p:animEffect>
-                                  </p:childTnLst>
-                                </p:cTn>
-                              </p:par>
-                            </p:childTnLst>
-                          </p:cTn>
-                        </p:par>
-                      </p:childTnLst>
-                    </p:cTn>
-                  </p:par>
-                  <p:par>
-                    <p:cTn id="8" fill="hold">
-                      <p:stCondLst>
-                        <p:cond delay="indefinite"/>
-                      </p:stCondLst>
-                      <p:childTnLst>
-                        <p:par>
-                          <p:cTn id="9" fill="hold">
-                            <p:stCondLst>
-                              <p:cond delay="0"/>
-                            </p:stCondLst>
-                            <p:childTnLst>
-                              <p:par>
-                                <p:cTn id="10" presetID="6" presetClass="entr" presetSubtype="16" fill="hold" grpId="0" nodeType="clickEffect">
-                                  <p:stCondLst>
-                                    <p:cond delay="0"/>
-                                  </p:stCondLst>
-                                  <p:childTnLst>
-                                    <p:set>
-                                      <p:cBhvr>
-                                        <p:cTn id="11" dur="1" fill="hold">
-                                          <p:stCondLst>
-                                            <p:cond delay="0"/>
-                                          </p:stCondLst>
-                                        </p:cTn>
-                                        <p:tgtEl>
-                                          <p:spTgt spid="8"/>
-                                        </p:tgtEl>
-                                        <p:attrNameLst>
-                                          <p:attrName>style.visibility</p:attrName>
-                                        </p:attrNameLst>
-                                      </p:cBhvr>
-                                      <p:to>
-                                        <p:strVal val="visible"/>
-                                      </p:to>
-                                    </p:set>
-                                    <p:animEffect transition="in" filter="circle(in)">
-                                      <p:cBhvr>
-                                        <p:cTn id="12" dur="750"/>
-                                        <p:tgtEl>
-                                          <p:spTgt spid="8"/>
-                                        </p:tgtEl>
-                                      </p:cBhvr>
-                                    </p:animEffect>
-                                  </p:childTnLst>
-                                </p:cTn>
-                              </p:par>
-                            </p:childTnLst>
-                          </p:cTn>
-                        </p:par>
-                      </p:childTnLst>
-                    </p:cTn>
-                  </p:par>
-                </p:childTnLst>
-              </p:cTn>
-              <p:prevCondLst>
-                <p:cond evt="onPrev" delay="0">
-                  <p:tgtEl>
-                    <p:sldTgt/>
-                  </p:tgtEl>
-                </p:cond>
-              </p:prevCondLst>
-              <p:nextCondLst>
-                <p:cond evt="onNext" delay="0">
-                  <p:tgtEl>
-                    <p:sldTgt/>
-                  </p:tgtEl>
-                </p:cond>
-              </p:nextCondLst>
-            </p:seq>
-          </p:childTnLst>
-        </p:cTn>
-      </p:par>
-    </p:tnLst>
-    <p:bldLst>
-      <p:bldP spid="7" grpId="0" animBg="1"/>
-      <p:bldP spid="8" grpId="0" animBg="1"/>
-    </p:bldLst>
-  </p:timing>
-</p:sld>
-</file>
-
-<file path=ppt/slides/slide5.xml><?xml version="1.0" encoding="utf-8"?>
-<p:sld xmlns:a="http://schemas.openxmlformats.org/drawingml/2006/main" xmlns:r="http://schemas.openxmlformats.org/officeDocument/2006/relationships" xmlns:p="http://schemas.openxmlformats.org/presentationml/2006/main">
-  <p:cSld>
-    <p:spTree>
-      <p:nvGrpSpPr>
-        <p:cNvPr id="1" name=""/>
-        <p:cNvGrpSpPr/>
-        <p:nvPr/>
-      </p:nvGrpSpPr>
-      <p:grpSpPr>
-        <a:xfrm>
-          <a:off x="0" y="0"/>
-          <a:ext cx="0" cy="0"/>
-          <a:chOff x="0" y="0"/>
-          <a:chExt cx="0" cy="0"/>
-        </a:xfrm>
-      </p:grpSpPr>
-      <p:sp>
-        <p:nvSpPr>
-          <p:cNvPr id="2" name="Title 1">
-            <a:extLst>
-              <a:ext uri="{FF2B5EF4-FFF2-40B4-BE49-F238E27FC236}">
-                <a16:creationId xmlns="" xmlns:a16="http://schemas.microsoft.com/office/drawing/2014/main" id="{C3585339-B774-DFDC-4DB4-D02F5083DD3E}"/>
-              </a:ext>
-            </a:extLst>
-          </p:cNvPr>
-          <p:cNvSpPr>
-            <a:spLocks noGrp="1"/>
-          </p:cNvSpPr>
-          <p:nvPr>
-            <p:ph type="title"/>
-          </p:nvPr>
-        </p:nvSpPr>
-        <p:spPr/>
-        <p:txBody>
-          <a:bodyPr/>
-          <a:lstStyle/>
-          <a:p>
             <a:r>
-              <a:rPr lang="en-US"/>
-              <a:t>Problem</a:t>
+              <a:rPr lang="en-US" sz="1800" b="1" smtClean="0"/>
+              <a:t>System architecture change</a:t>
+            </a:r>
+            <a:r>
+              <a:rPr lang="en-US" sz="1800" smtClean="0"/>
+              <a:t>: </a:t>
             </a:r>
           </a:p>
-        </p:txBody>
-      </p:sp>
-      <p:sp>
-        <p:nvSpPr>
-          <p:cNvPr id="4" name="Content Placeholder 3"/>
-          <p:cNvSpPr>
-            <a:spLocks noGrp="1"/>
-          </p:cNvSpPr>
-          <p:nvPr>
-            <p:ph idx="1"/>
-          </p:nvPr>
-        </p:nvSpPr>
-        <p:spPr>
-          <a:xfrm>
-            <a:off x="160866" y="7454900"/>
-            <a:ext cx="11887201" cy="5278168"/>
-          </a:xfrm>
-        </p:spPr>
-        <p:txBody>
-          <a:bodyPr/>
-          <a:lstStyle/>
           <a:p>
-            <a:endParaRPr lang="en-US"/>
+            <a:pPr lvl="1"/>
+            <a:r>
+              <a:rPr lang="en-US" sz="1800" smtClean="0"/>
+              <a:t>DCM is separated into 2 containers: </a:t>
+            </a:r>
+          </a:p>
+          <a:p>
+            <a:pPr lvl="2"/>
+            <a:r>
+              <a:rPr lang="en-US" sz="1800" b="1" smtClean="0"/>
+              <a:t>EP container</a:t>
+            </a:r>
+            <a:r>
+              <a:rPr lang="en-US" sz="1800" smtClean="0"/>
+              <a:t>: externally exposed network components</a:t>
+            </a:r>
+          </a:p>
+          <a:p>
+            <a:pPr lvl="2"/>
+            <a:r>
+              <a:rPr lang="en-US" sz="1800" b="1" smtClean="0"/>
+              <a:t>IP container</a:t>
+            </a:r>
+            <a:r>
+              <a:rPr lang="en-US" sz="1800" smtClean="0"/>
+              <a:t>: components which have access to CAN bus.</a:t>
+            </a:r>
           </a:p>
         </p:txBody>
       </p:sp>
@@ -18429,8 +14426,8 @@
         </p:blipFill>
         <p:spPr>
           <a:xfrm>
-            <a:off x="81481" y="1046026"/>
-            <a:ext cx="4879818" cy="3776799"/>
+            <a:off x="0" y="2872955"/>
+            <a:ext cx="5359652" cy="3423267"/>
           </a:xfrm>
           <a:prstGeom prst="rect">
             <a:avLst/>
@@ -18439,7 +14436,7 @@
       </p:pic>
       <p:pic>
         <p:nvPicPr>
-          <p:cNvPr id="7" name="Picture 6"/>
+          <p:cNvPr id="4" name="Picture 3"/>
           <p:cNvPicPr>
             <a:picLocks noChangeAspect="1"/>
           </p:cNvPicPr>
@@ -18453,32 +14450,8 @@
         </p:blipFill>
         <p:spPr>
           <a:xfrm>
-            <a:off x="5667375" y="944427"/>
-            <a:ext cx="6477001" cy="4180024"/>
-          </a:xfrm>
-          <a:prstGeom prst="rect">
-            <a:avLst/>
-          </a:prstGeom>
-        </p:spPr>
-      </p:pic>
-      <p:pic>
-        <p:nvPicPr>
-          <p:cNvPr id="8" name="Picture 7"/>
-          <p:cNvPicPr>
-            <a:picLocks noChangeAspect="1"/>
-          </p:cNvPicPr>
-          <p:nvPr/>
-        </p:nvPicPr>
-        <p:blipFill>
-          <a:blip r:embed="rId4"/>
-          <a:stretch>
-            <a:fillRect/>
-          </a:stretch>
-        </p:blipFill>
-        <p:spPr>
-          <a:xfrm>
-            <a:off x="81481" y="4921397"/>
-            <a:ext cx="2105025" cy="1860544"/>
+            <a:off x="5911913" y="2872148"/>
+            <a:ext cx="6165787" cy="3502033"/>
           </a:xfrm>
           <a:prstGeom prst="rect">
             <a:avLst/>
@@ -18487,48 +14460,24 @@
       </p:pic>
       <p:sp>
         <p:nvSpPr>
-          <p:cNvPr id="10" name="TextBox 9"/>
-          <p:cNvSpPr txBox="1"/>
-          <p:nvPr/>
-        </p:nvSpPr>
-        <p:spPr>
-          <a:xfrm>
-            <a:off x="8379901" y="5130661"/>
-            <a:ext cx="1804853" cy="369332"/>
-          </a:xfrm>
-          <a:prstGeom prst="rect">
-            <a:avLst/>
-          </a:prstGeom>
-          <a:noFill/>
-        </p:spPr>
-        <p:txBody>
-          <a:bodyPr wrap="none" rtlCol="0">
-            <a:spAutoFit/>
-          </a:bodyPr>
-          <a:lstStyle/>
-          <a:p>
-            <a:r>
-              <a:rPr lang="en-US" smtClean="0"/>
-              <a:t>New architecture</a:t>
-            </a:r>
-            <a:endParaRPr lang="en-US"/>
-          </a:p>
-        </p:txBody>
-      </p:sp>
-      <p:sp>
-        <p:nvSpPr>
-          <p:cNvPr id="11" name="Right Arrow 10"/>
+          <p:cNvPr id="8" name="Right Arrow 7"/>
           <p:cNvSpPr/>
           <p:nvPr/>
         </p:nvSpPr>
         <p:spPr>
           <a:xfrm>
-            <a:off x="4895852" y="2343877"/>
-            <a:ext cx="695324" cy="848583"/>
+            <a:off x="5388393" y="6296222"/>
+            <a:ext cx="494779" cy="490589"/>
           </a:xfrm>
           <a:prstGeom prst="rightArrow">
             <a:avLst/>
           </a:prstGeom>
+          <a:solidFill>
+            <a:schemeClr val="accent4">
+              <a:lumMod val="60000"/>
+              <a:lumOff val="40000"/>
+            </a:schemeClr>
+          </a:solidFill>
         </p:spPr>
         <p:style>
           <a:lnRef idx="2">
@@ -18557,183 +14506,92 @@
       </p:sp>
       <p:sp>
         <p:nvSpPr>
-          <p:cNvPr id="13" name="Right Arrow 12"/>
-          <p:cNvSpPr/>
+          <p:cNvPr id="10" name="TextBox 9"/>
+          <p:cNvSpPr txBox="1"/>
           <p:nvPr/>
         </p:nvSpPr>
         <p:spPr>
-          <a:xfrm rot="3413073">
-            <a:off x="6003241" y="1465107"/>
-            <a:ext cx="342900" cy="139727"/>
+          <a:xfrm>
+            <a:off x="1233987" y="6374182"/>
+            <a:ext cx="2793009" cy="369332"/>
           </a:xfrm>
-          <a:prstGeom prst="rightArrow">
+          <a:prstGeom prst="rect">
             <a:avLst/>
           </a:prstGeom>
-          <a:solidFill>
-            <a:srgbClr val="FF0000"/>
-          </a:solidFill>
-          <a:ln>
-            <a:solidFill>
-              <a:srgbClr val="FF0000"/>
-            </a:solidFill>
-          </a:ln>
+          <a:noFill/>
         </p:spPr>
-        <p:style>
-          <a:lnRef idx="2">
-            <a:schemeClr val="accent1">
-              <a:shade val="50000"/>
-            </a:schemeClr>
-          </a:lnRef>
-          <a:fillRef idx="1">
-            <a:schemeClr val="accent1"/>
-          </a:fillRef>
-          <a:effectRef idx="0">
-            <a:schemeClr val="accent1"/>
-          </a:effectRef>
-          <a:fontRef idx="minor">
-            <a:schemeClr val="lt1"/>
-          </a:fontRef>
-        </p:style>
         <p:txBody>
-          <a:bodyPr rtlCol="0" anchor="ctr"/>
+          <a:bodyPr wrap="none" rtlCol="0">
+            <a:spAutoFit/>
+          </a:bodyPr>
           <a:lstStyle/>
           <a:p>
-            <a:pPr algn="ctr"/>
+            <a:r>
+              <a:rPr lang="en-US" smtClean="0"/>
+              <a:t>Current system architecture</a:t>
+            </a:r>
             <a:endParaRPr lang="en-US"/>
           </a:p>
         </p:txBody>
       </p:sp>
       <p:sp>
         <p:nvSpPr>
-          <p:cNvPr id="14" name="Right Arrow 13"/>
-          <p:cNvSpPr/>
+          <p:cNvPr id="13" name="TextBox 12"/>
+          <p:cNvSpPr txBox="1"/>
           <p:nvPr/>
         </p:nvSpPr>
         <p:spPr>
-          <a:xfrm rot="3413073">
-            <a:off x="9263061" y="1466554"/>
-            <a:ext cx="342900" cy="139727"/>
+          <a:xfrm>
+            <a:off x="7059510" y="6336364"/>
+            <a:ext cx="3969548" cy="369332"/>
           </a:xfrm>
-          <a:prstGeom prst="rightArrow">
+          <a:prstGeom prst="rect">
             <a:avLst/>
           </a:prstGeom>
-          <a:solidFill>
-            <a:srgbClr val="FF0000"/>
-          </a:solidFill>
-          <a:ln>
-            <a:solidFill>
-              <a:srgbClr val="FF0000"/>
-            </a:solidFill>
-          </a:ln>
+          <a:noFill/>
         </p:spPr>
-        <p:style>
-          <a:lnRef idx="2">
-            <a:schemeClr val="accent1">
-              <a:shade val="50000"/>
-            </a:schemeClr>
-          </a:lnRef>
-          <a:fillRef idx="1">
-            <a:schemeClr val="accent1"/>
-          </a:fillRef>
-          <a:effectRef idx="0">
-            <a:schemeClr val="accent1"/>
-          </a:effectRef>
-          <a:fontRef idx="minor">
-            <a:schemeClr val="lt1"/>
-          </a:fontRef>
-        </p:style>
         <p:txBody>
-          <a:bodyPr rtlCol="0" anchor="ctr"/>
+          <a:bodyPr wrap="none" rtlCol="0">
+            <a:spAutoFit/>
+          </a:bodyPr>
           <a:lstStyle/>
           <a:p>
-            <a:pPr algn="ctr"/>
+            <a:r>
+              <a:rPr lang="en-US" smtClean="0"/>
+              <a:t>New system architecture (containerized)</a:t>
+            </a:r>
             <a:endParaRPr lang="en-US"/>
           </a:p>
         </p:txBody>
       </p:sp>
-      <p:cxnSp>
-        <p:nvCxnSpPr>
-          <p:cNvPr id="17" name="Straight Connector 16"/>
-          <p:cNvCxnSpPr/>
+      <p:pic>
+        <p:nvPicPr>
+          <p:cNvPr id="11" name="Picture 10"/>
+          <p:cNvPicPr>
+            <a:picLocks noChangeAspect="1"/>
+          </p:cNvPicPr>
           <p:nvPr/>
-        </p:nvCxnSpPr>
+        </p:nvPicPr>
+        <p:blipFill>
+          <a:blip r:embed="rId4"/>
+          <a:stretch>
+            <a:fillRect/>
+          </a:stretch>
+        </p:blipFill>
         <p:spPr>
           <a:xfrm>
-            <a:off x="5178583" y="525589"/>
-            <a:ext cx="0" cy="5326080"/>
+            <a:off x="10106025" y="803448"/>
+            <a:ext cx="2085975" cy="1941900"/>
           </a:xfrm>
-          <a:prstGeom prst="line">
+          <a:prstGeom prst="rect">
             <a:avLst/>
           </a:prstGeom>
-          <a:ln w="19050"/>
         </p:spPr>
-        <p:style>
-          <a:lnRef idx="1">
-            <a:schemeClr val="accent1"/>
-          </a:lnRef>
-          <a:fillRef idx="0">
-            <a:schemeClr val="accent1"/>
-          </a:fillRef>
-          <a:effectRef idx="0">
-            <a:schemeClr val="accent1"/>
-          </a:effectRef>
-          <a:fontRef idx="minor">
-            <a:schemeClr val="tx1"/>
-          </a:fontRef>
-        </p:style>
-      </p:cxnSp>
-      <p:sp>
-        <p:nvSpPr>
-          <p:cNvPr id="18" name="Right Arrow 17"/>
-          <p:cNvSpPr/>
-          <p:nvPr/>
-        </p:nvSpPr>
-        <p:spPr>
-          <a:xfrm rot="3413073">
-            <a:off x="9442403" y="3651258"/>
-            <a:ext cx="342900" cy="139727"/>
-          </a:xfrm>
-          <a:prstGeom prst="rightArrow">
-            <a:avLst/>
-          </a:prstGeom>
-          <a:solidFill>
-            <a:srgbClr val="FF0000"/>
-          </a:solidFill>
-          <a:ln>
-            <a:solidFill>
-              <a:srgbClr val="FF0000"/>
-            </a:solidFill>
-          </a:ln>
-        </p:spPr>
-        <p:style>
-          <a:lnRef idx="2">
-            <a:schemeClr val="accent1">
-              <a:shade val="50000"/>
-            </a:schemeClr>
-          </a:lnRef>
-          <a:fillRef idx="1">
-            <a:schemeClr val="accent1"/>
-          </a:fillRef>
-          <a:effectRef idx="0">
-            <a:schemeClr val="accent1"/>
-          </a:effectRef>
-          <a:fontRef idx="minor">
-            <a:schemeClr val="lt1"/>
-          </a:fontRef>
-        </p:style>
-        <p:txBody>
-          <a:bodyPr rtlCol="0" anchor="ctr"/>
-          <a:lstStyle/>
-          <a:p>
-            <a:pPr algn="ctr"/>
-            <a:endParaRPr lang="en-US"/>
-          </a:p>
-        </p:txBody>
-      </p:sp>
+      </p:pic>
     </p:spTree>
     <p:extLst>
       <p:ext uri="{BB962C8B-B14F-4D97-AF65-F5344CB8AC3E}">
-        <p14:creationId xmlns:p14="http://schemas.microsoft.com/office/powerpoint/2010/main" val="211083432"/>
+        <p14:creationId xmlns:p14="http://schemas.microsoft.com/office/powerpoint/2010/main" val="2276347710"/>
       </p:ext>
     </p:extLst>
   </p:cSld>
@@ -18743,165 +14601,393 @@
   <p:timing>
     <p:tnLst>
       <p:par>
-        <p:cTn id="1" dur="indefinite" restart="never" nodeType="tmRoot">
-          <p:childTnLst>
-            <p:seq concurrent="1" nextAc="seek">
-              <p:cTn id="2" dur="indefinite" nodeType="mainSeq">
-                <p:childTnLst>
-                  <p:par>
-                    <p:cTn id="3" fill="hold">
-                      <p:stCondLst>
-                        <p:cond delay="indefinite"/>
-                      </p:stCondLst>
-                      <p:childTnLst>
-                        <p:par>
-                          <p:cTn id="4" fill="hold">
-                            <p:stCondLst>
-                              <p:cond delay="0"/>
-                            </p:stCondLst>
-                            <p:childTnLst>
-                              <p:par>
-                                <p:cTn id="5" presetID="22" presetClass="entr" presetSubtype="4" fill="hold" grpId="0" nodeType="clickEffect">
-                                  <p:stCondLst>
-                                    <p:cond delay="0"/>
-                                  </p:stCondLst>
-                                  <p:childTnLst>
-                                    <p:set>
-                                      <p:cBhvr>
-                                        <p:cTn id="6" dur="1" fill="hold">
-                                          <p:stCondLst>
-                                            <p:cond delay="0"/>
-                                          </p:stCondLst>
-                                        </p:cTn>
-                                        <p:tgtEl>
-                                          <p:spTgt spid="13"/>
-                                        </p:tgtEl>
-                                        <p:attrNameLst>
-                                          <p:attrName>style.visibility</p:attrName>
-                                        </p:attrNameLst>
-                                      </p:cBhvr>
-                                      <p:to>
-                                        <p:strVal val="visible"/>
-                                      </p:to>
-                                    </p:set>
-                                    <p:animEffect transition="in" filter="wipe(down)">
-                                      <p:cBhvr>
-                                        <p:cTn id="7" dur="500"/>
-                                        <p:tgtEl>
-                                          <p:spTgt spid="13"/>
-                                        </p:tgtEl>
-                                      </p:cBhvr>
-                                    </p:animEffect>
-                                  </p:childTnLst>
-                                </p:cTn>
-                              </p:par>
-                              <p:par>
-                                <p:cTn id="8" presetID="22" presetClass="entr" presetSubtype="4" fill="hold" grpId="0" nodeType="withEffect">
-                                  <p:stCondLst>
-                                    <p:cond delay="0"/>
-                                  </p:stCondLst>
-                                  <p:childTnLst>
-                                    <p:set>
-                                      <p:cBhvr>
-                                        <p:cTn id="9" dur="1" fill="hold">
-                                          <p:stCondLst>
-                                            <p:cond delay="0"/>
-                                          </p:stCondLst>
-                                        </p:cTn>
-                                        <p:tgtEl>
-                                          <p:spTgt spid="14"/>
-                                        </p:tgtEl>
-                                        <p:attrNameLst>
-                                          <p:attrName>style.visibility</p:attrName>
-                                        </p:attrNameLst>
-                                      </p:cBhvr>
-                                      <p:to>
-                                        <p:strVal val="visible"/>
-                                      </p:to>
-                                    </p:set>
-                                    <p:animEffect transition="in" filter="wipe(down)">
-                                      <p:cBhvr>
-                                        <p:cTn id="10" dur="500"/>
-                                        <p:tgtEl>
-                                          <p:spTgt spid="14"/>
-                                        </p:tgtEl>
-                                      </p:cBhvr>
-                                    </p:animEffect>
-                                  </p:childTnLst>
-                                </p:cTn>
-                              </p:par>
-                              <p:par>
-                                <p:cTn id="11" presetID="22" presetClass="entr" presetSubtype="4" fill="hold" grpId="0" nodeType="withEffect">
-                                  <p:stCondLst>
-                                    <p:cond delay="0"/>
-                                  </p:stCondLst>
-                                  <p:childTnLst>
-                                    <p:set>
-                                      <p:cBhvr>
-                                        <p:cTn id="12" dur="1" fill="hold">
-                                          <p:stCondLst>
-                                            <p:cond delay="0"/>
-                                          </p:stCondLst>
-                                        </p:cTn>
-                                        <p:tgtEl>
-                                          <p:spTgt spid="18"/>
-                                        </p:tgtEl>
-                                        <p:attrNameLst>
-                                          <p:attrName>style.visibility</p:attrName>
-                                        </p:attrNameLst>
-                                      </p:cBhvr>
-                                      <p:to>
-                                        <p:strVal val="visible"/>
-                                      </p:to>
-                                    </p:set>
-                                    <p:animEffect transition="in" filter="wipe(down)">
-                                      <p:cBhvr>
-                                        <p:cTn id="13" dur="500"/>
-                                        <p:tgtEl>
-                                          <p:spTgt spid="18"/>
-                                        </p:tgtEl>
-                                      </p:cBhvr>
-                                    </p:animEffect>
-                                  </p:childTnLst>
-                                </p:cTn>
-                              </p:par>
-                            </p:childTnLst>
-                          </p:cTn>
-                        </p:par>
-                      </p:childTnLst>
-                    </p:cTn>
-                  </p:par>
-                </p:childTnLst>
-              </p:cTn>
-              <p:prevCondLst>
-                <p:cond evt="onPrev" delay="0">
-                  <p:tgtEl>
-                    <p:sldTgt/>
-                  </p:tgtEl>
-                </p:cond>
-              </p:prevCondLst>
-              <p:nextCondLst>
-                <p:cond evt="onNext" delay="0">
-                  <p:tgtEl>
-                    <p:sldTgt/>
-                  </p:tgtEl>
-                </p:cond>
-              </p:nextCondLst>
-            </p:seq>
-          </p:childTnLst>
-        </p:cTn>
+        <p:cTn id="1" dur="indefinite" restart="never" nodeType="tmRoot"/>
       </p:par>
     </p:tnLst>
-    <p:bldLst>
-      <p:bldP spid="13" grpId="0" animBg="1"/>
-      <p:bldP spid="14" grpId="0" animBg="1"/>
-      <p:bldP spid="18" grpId="0" animBg="1"/>
-    </p:bldLst>
   </p:timing>
 </p:sld>
 </file>
 
-<file path=ppt/slides/slide6.xml><?xml version="1.0" encoding="utf-8"?>
+<file path=ppt/slides/slide4.xml><?xml version="1.0" encoding="utf-8"?>
+<p:sld xmlns:a="http://schemas.openxmlformats.org/drawingml/2006/main" xmlns:r="http://schemas.openxmlformats.org/officeDocument/2006/relationships" xmlns:p="http://schemas.openxmlformats.org/presentationml/2006/main">
+  <p:cSld>
+    <p:spTree>
+      <p:nvGrpSpPr>
+        <p:cNvPr id="1" name=""/>
+        <p:cNvGrpSpPr/>
+        <p:nvPr/>
+      </p:nvGrpSpPr>
+      <p:grpSpPr>
+        <a:xfrm>
+          <a:off x="0" y="0"/>
+          <a:ext cx="0" cy="0"/>
+          <a:chOff x="0" y="0"/>
+          <a:chExt cx="0" cy="0"/>
+        </a:xfrm>
+      </p:grpSpPr>
+      <p:sp>
+        <p:nvSpPr>
+          <p:cNvPr id="12" name="TextBox 11"/>
+          <p:cNvSpPr txBox="1"/>
+          <p:nvPr/>
+        </p:nvSpPr>
+        <p:spPr>
+          <a:xfrm>
+            <a:off x="0" y="862011"/>
+            <a:ext cx="12122058" cy="2062103"/>
+          </a:xfrm>
+          <a:prstGeom prst="rect">
+            <a:avLst/>
+          </a:prstGeom>
+          <a:noFill/>
+        </p:spPr>
+        <p:txBody>
+          <a:bodyPr wrap="square" rtlCol="0">
+            <a:spAutoFit/>
+          </a:bodyPr>
+          <a:lstStyle/>
+          <a:p>
+            <a:pPr marL="285750" indent="-285750">
+              <a:buFont typeface="Arial" panose="020B0604020202020204" pitchFamily="34" charset="0"/>
+              <a:buChar char="•"/>
+            </a:pPr>
+            <a:r>
+              <a:rPr lang="en-US" sz="1600" b="1" smtClean="0"/>
+              <a:t>RemoteDiag</a:t>
+            </a:r>
+            <a:r>
+              <a:rPr lang="en-US" sz="1600" smtClean="0"/>
+              <a:t>: a module processes diagnostic for each ECU and uploads diagnostic data to OEM Server</a:t>
+            </a:r>
+          </a:p>
+          <a:p>
+            <a:pPr marL="285750" indent="-285750">
+              <a:buFont typeface="Arial" panose="020B0604020202020204" pitchFamily="34" charset="0"/>
+              <a:buChar char="•"/>
+            </a:pPr>
+            <a:r>
+              <a:rPr lang="en-US" sz="1600" smtClean="0"/>
+              <a:t>RemoteDiag has 2 communication paths:</a:t>
+            </a:r>
+          </a:p>
+          <a:p>
+            <a:pPr marL="742950" lvl="1" indent="-285750">
+              <a:buFont typeface="Arial" panose="020B0604020202020204" pitchFamily="34" charset="0"/>
+              <a:buChar char="•"/>
+            </a:pPr>
+            <a:r>
+              <a:rPr lang="en-US" sz="1600" smtClean="0"/>
+              <a:t>with </a:t>
+            </a:r>
+            <a:r>
+              <a:rPr lang="en-US" sz="1600" b="1" smtClean="0"/>
+              <a:t>OEM Server</a:t>
+            </a:r>
+            <a:r>
+              <a:rPr lang="en-US" sz="1600" smtClean="0"/>
+              <a:t>: performs direct diagnostic commands</a:t>
+            </a:r>
+          </a:p>
+          <a:p>
+            <a:pPr marL="742950" lvl="1" indent="-285750">
+              <a:buFont typeface="Arial" panose="020B0604020202020204" pitchFamily="34" charset="0"/>
+              <a:buChar char="•"/>
+            </a:pPr>
+            <a:r>
+              <a:rPr lang="en-US" sz="1600" smtClean="0"/>
+              <a:t>with </a:t>
+            </a:r>
+            <a:r>
+              <a:rPr lang="en-US" sz="1600" b="1" smtClean="0"/>
+              <a:t>MM ecu</a:t>
+            </a:r>
+            <a:r>
+              <a:rPr lang="en-US" sz="1600" smtClean="0"/>
+              <a:t>: OTA diagnostic update</a:t>
+            </a:r>
+          </a:p>
+          <a:p>
+            <a:pPr marL="742950" lvl="1" indent="-285750">
+              <a:buFont typeface="Arial" panose="020B0604020202020204" pitchFamily="34" charset="0"/>
+              <a:buChar char="•"/>
+            </a:pPr>
+            <a:endParaRPr lang="en-US" sz="1600" smtClean="0"/>
+          </a:p>
+          <a:p>
+            <a:pPr marL="285750" indent="-285750">
+              <a:buFont typeface="Arial" panose="020B0604020202020204" pitchFamily="34" charset="0"/>
+              <a:buChar char="•"/>
+            </a:pPr>
+            <a:r>
+              <a:rPr lang="en-US" sz="1600" b="1" smtClean="0"/>
+              <a:t>Risk: RemoteDiag </a:t>
+            </a:r>
+            <a:r>
+              <a:rPr lang="en-US" sz="1600" b="1"/>
+              <a:t>&lt;-&gt; MM path </a:t>
+            </a:r>
+            <a:r>
+              <a:rPr lang="en-US" sz="1600"/>
+              <a:t>routes in EP which </a:t>
+            </a:r>
+            <a:r>
+              <a:rPr lang="en-US" sz="1600"/>
+              <a:t>is </a:t>
+            </a:r>
+            <a:r>
+              <a:rPr lang="en-US" sz="1600" smtClean="0"/>
+              <a:t>insecure</a:t>
+            </a:r>
+            <a:endParaRPr lang="en-US" sz="1600"/>
+          </a:p>
+          <a:p>
+            <a:pPr marL="285750" indent="-285750">
+              <a:buFont typeface="Arial" panose="020B0604020202020204" pitchFamily="34" charset="0"/>
+              <a:buChar char="•"/>
+            </a:pPr>
+            <a:r>
+              <a:rPr lang="en-US" sz="1600"/>
+              <a:t>OEM requests that </a:t>
+            </a:r>
+            <a:r>
+              <a:rPr lang="en-US" sz="1600" b="1"/>
+              <a:t>unauthorized reprogramming requests should </a:t>
+            </a:r>
+            <a:r>
+              <a:rPr lang="en-US" sz="1600" b="1"/>
+              <a:t>be </a:t>
+            </a:r>
+            <a:r>
+              <a:rPr lang="en-US" sz="1600" b="1" smtClean="0"/>
+              <a:t>filtered.</a:t>
+            </a:r>
+            <a:endParaRPr lang="en-US" sz="1600" b="1"/>
+          </a:p>
+          <a:p>
+            <a:endParaRPr lang="en-US" sz="1600" smtClean="0"/>
+          </a:p>
+        </p:txBody>
+      </p:sp>
+      <p:sp>
+        <p:nvSpPr>
+          <p:cNvPr id="2" name="Title 1">
+            <a:extLst>
+              <a:ext uri="{FF2B5EF4-FFF2-40B4-BE49-F238E27FC236}">
+                <a16:creationId xmlns:a16="http://schemas.microsoft.com/office/drawing/2014/main" xmlns="" id="{C3585339-B774-DFDC-4DB4-D02F5083DD3E}"/>
+              </a:ext>
+            </a:extLst>
+          </p:cNvPr>
+          <p:cNvSpPr>
+            <a:spLocks noGrp="1"/>
+          </p:cNvSpPr>
+          <p:nvPr>
+            <p:ph type="title"/>
+          </p:nvPr>
+        </p:nvSpPr>
+        <p:spPr/>
+        <p:txBody>
+          <a:bodyPr/>
+          <a:lstStyle/>
+          <a:p>
+            <a:r>
+              <a:rPr lang="en-US"/>
+              <a:t>Problem</a:t>
+            </a:r>
+          </a:p>
+        </p:txBody>
+      </p:sp>
+      <p:pic>
+        <p:nvPicPr>
+          <p:cNvPr id="5" name="Picture 4"/>
+          <p:cNvPicPr>
+            <a:picLocks noChangeAspect="1"/>
+          </p:cNvPicPr>
+          <p:nvPr/>
+        </p:nvPicPr>
+        <p:blipFill>
+          <a:blip r:embed="rId2"/>
+          <a:stretch>
+            <a:fillRect/>
+          </a:stretch>
+        </p:blipFill>
+        <p:spPr>
+          <a:xfrm>
+            <a:off x="4443225" y="2594782"/>
+            <a:ext cx="7726458" cy="4158444"/>
+          </a:xfrm>
+          <a:prstGeom prst="rect">
+            <a:avLst/>
+          </a:prstGeom>
+        </p:spPr>
+      </p:pic>
+      <p:grpSp>
+        <p:nvGrpSpPr>
+          <p:cNvPr id="21" name="Group 20"/>
+          <p:cNvGrpSpPr/>
+          <p:nvPr/>
+        </p:nvGrpSpPr>
+        <p:grpSpPr>
+          <a:xfrm>
+            <a:off x="0" y="3782508"/>
+            <a:ext cx="4370798" cy="923330"/>
+            <a:chOff x="-3835" y="4675267"/>
+            <a:chExt cx="4602197" cy="923330"/>
+          </a:xfrm>
+        </p:grpSpPr>
+        <p:sp>
+          <p:nvSpPr>
+            <p:cNvPr id="15" name="TextBox 14">
+              <a:extLst>
+                <a:ext uri="{FF2B5EF4-FFF2-40B4-BE49-F238E27FC236}">
+                  <a16:creationId xmlns:a16="http://schemas.microsoft.com/office/drawing/2014/main" xmlns="" id="{2477AED6-8D6F-D505-6D7B-78460A03A2E8}"/>
+                </a:ext>
+              </a:extLst>
+            </p:cNvPr>
+            <p:cNvSpPr txBox="1"/>
+            <p:nvPr/>
+          </p:nvSpPr>
+          <p:spPr>
+            <a:xfrm>
+              <a:off x="526483" y="4675267"/>
+              <a:ext cx="4071879" cy="923330"/>
+            </a:xfrm>
+            <a:prstGeom prst="rect">
+              <a:avLst/>
+            </a:prstGeom>
+            <a:noFill/>
+          </p:spPr>
+          <p:txBody>
+            <a:bodyPr wrap="square" rtlCol="0">
+              <a:spAutoFit/>
+            </a:bodyPr>
+            <a:lstStyle/>
+            <a:p>
+              <a:r>
+                <a:rPr lang="en-US" err="1"/>
+                <a:t>RemoteDiag’s</a:t>
+              </a:r>
+              <a:r>
+                <a:rPr lang="en-US"/>
+                <a:t> </a:t>
+              </a:r>
+              <a:r>
+                <a:rPr lang="en-US" b="1"/>
+                <a:t>internal</a:t>
+              </a:r>
+              <a:r>
+                <a:rPr lang="en-US"/>
+                <a:t> </a:t>
+              </a:r>
+              <a:r>
+                <a:rPr lang="en-US" b="1"/>
+                <a:t>architecture and communication </a:t>
+              </a:r>
+              <a:r>
+                <a:rPr lang="en-US"/>
+                <a:t>should be </a:t>
+              </a:r>
+              <a:r>
+                <a:rPr lang="en-US" b="1"/>
+                <a:t>redesigned</a:t>
+              </a:r>
+              <a:r>
+                <a:rPr lang="en-US"/>
+                <a:t> to align with new </a:t>
+              </a:r>
+              <a:r>
+                <a:rPr lang="en-US" smtClean="0"/>
+                <a:t>architecture</a:t>
+              </a:r>
+              <a:endParaRPr lang="en-US" b="1"/>
+            </a:p>
+          </p:txBody>
+        </p:sp>
+        <p:sp>
+          <p:nvSpPr>
+            <p:cNvPr id="16" name="Right Arrow 15"/>
+            <p:cNvSpPr/>
+            <p:nvPr/>
+          </p:nvSpPr>
+          <p:spPr>
+            <a:xfrm>
+              <a:off x="-3835" y="4861835"/>
+              <a:ext cx="530318" cy="550195"/>
+            </a:xfrm>
+            <a:prstGeom prst="rightArrow">
+              <a:avLst/>
+            </a:prstGeom>
+          </p:spPr>
+          <p:style>
+            <a:lnRef idx="2">
+              <a:schemeClr val="accent1">
+                <a:shade val="50000"/>
+              </a:schemeClr>
+            </a:lnRef>
+            <a:fillRef idx="1">
+              <a:schemeClr val="accent1"/>
+            </a:fillRef>
+            <a:effectRef idx="0">
+              <a:schemeClr val="accent1"/>
+            </a:effectRef>
+            <a:fontRef idx="minor">
+              <a:schemeClr val="lt1"/>
+            </a:fontRef>
+          </p:style>
+          <p:txBody>
+            <a:bodyPr rtlCol="0" anchor="ctr"/>
+            <a:lstStyle/>
+            <a:p>
+              <a:pPr algn="ctr"/>
+              <a:endParaRPr lang="en-US"/>
+            </a:p>
+          </p:txBody>
+        </p:sp>
+      </p:grpSp>
+      <p:pic>
+        <p:nvPicPr>
+          <p:cNvPr id="9" name="Picture 8"/>
+          <p:cNvPicPr>
+            <a:picLocks noChangeAspect="1"/>
+          </p:cNvPicPr>
+          <p:nvPr/>
+        </p:nvPicPr>
+        <p:blipFill>
+          <a:blip r:embed="rId3"/>
+          <a:stretch>
+            <a:fillRect/>
+          </a:stretch>
+        </p:blipFill>
+        <p:spPr>
+          <a:xfrm>
+            <a:off x="9850170" y="924518"/>
+            <a:ext cx="2271888" cy="1645856"/>
+          </a:xfrm>
+          <a:prstGeom prst="rect">
+            <a:avLst/>
+          </a:prstGeom>
+        </p:spPr>
+      </p:pic>
+    </p:spTree>
+    <p:extLst>
+      <p:ext uri="{BB962C8B-B14F-4D97-AF65-F5344CB8AC3E}">
+        <p14:creationId xmlns:p14="http://schemas.microsoft.com/office/powerpoint/2010/main" val="3559794018"/>
+      </p:ext>
+    </p:extLst>
+  </p:cSld>
+  <p:clrMapOvr>
+    <a:masterClrMapping/>
+  </p:clrMapOvr>
+  <p:timing>
+    <p:tnLst>
+      <p:par>
+        <p:cTn id="1" dur="indefinite" restart="never" nodeType="tmRoot"/>
+      </p:par>
+    </p:tnLst>
+  </p:timing>
+</p:sld>
+</file>
+
+<file path=ppt/slides/slide5.xml><?xml version="1.0" encoding="utf-8"?>
 <p:sld xmlns:a="http://schemas.openxmlformats.org/drawingml/2006/main" xmlns:r="http://schemas.openxmlformats.org/officeDocument/2006/relationships" xmlns:p="http://schemas.openxmlformats.org/presentationml/2006/main">
   <p:cSld>
     <p:spTree>
@@ -18945,7 +15031,7 @@
           <p:cNvPr id="4" name="Content Placeholder 3">
             <a:extLst>
               <a:ext uri="{FF2B5EF4-FFF2-40B4-BE49-F238E27FC236}">
-                <a16:creationId xmlns="" xmlns:a16="http://schemas.microsoft.com/office/drawing/2014/main" id="{E5625E47-EFA5-9C35-32C7-F793664192AF}"/>
+                <a16:creationId xmlns:a16="http://schemas.microsoft.com/office/drawing/2014/main" xmlns="" id="{E5625E47-EFA5-9C35-32C7-F793664192AF}"/>
               </a:ext>
             </a:extLst>
           </p:cNvPr>
@@ -18969,9 +15055,10 @@
           <a:lstStyle/>
           <a:p>
             <a:r>
-              <a:rPr lang="en-US" sz="2200"/>
-              <a:t>OEM new functional requirements</a:t>
+              <a:rPr lang="en-US" sz="2200" smtClean="0"/>
+              <a:t>Functional requirements</a:t>
             </a:r>
+            <a:endParaRPr lang="en-US" sz="2200"/>
           </a:p>
         </p:txBody>
       </p:sp>
@@ -18980,7 +15067,7 @@
           <p:cNvPr id="10" name="Table 9">
             <a:extLst>
               <a:ext uri="{FF2B5EF4-FFF2-40B4-BE49-F238E27FC236}">
-                <a16:creationId xmlns="" xmlns:a16="http://schemas.microsoft.com/office/drawing/2014/main" id="{658A328F-ADBC-7C5F-15DF-73E4DC21B209}"/>
+                <a16:creationId xmlns:a16="http://schemas.microsoft.com/office/drawing/2014/main" xmlns="" id="{658A328F-ADBC-7C5F-15DF-73E4DC21B209}"/>
               </a:ext>
             </a:extLst>
           </p:cNvPr>
@@ -19009,14 +15096,14 @@
                 <a:gridCol w="1298801">
                   <a:extLst>
                     <a:ext uri="{9D8B030D-6E8A-4147-A177-3AD203B41FA5}">
-                      <a16:colId xmlns="" xmlns:a16="http://schemas.microsoft.com/office/drawing/2014/main" val="20000"/>
+                      <a16:colId xmlns:a16="http://schemas.microsoft.com/office/drawing/2014/main" xmlns="" val="20000"/>
                     </a:ext>
                   </a:extLst>
                 </a:gridCol>
                 <a:gridCol w="10483653">
                   <a:extLst>
                     <a:ext uri="{9D8B030D-6E8A-4147-A177-3AD203B41FA5}">
-                      <a16:colId xmlns="" xmlns:a16="http://schemas.microsoft.com/office/drawing/2014/main" val="20001"/>
+                      <a16:colId xmlns:a16="http://schemas.microsoft.com/office/drawing/2014/main" xmlns="" val="20001"/>
                     </a:ext>
                   </a:extLst>
                 </a:gridCol>
@@ -19155,7 +15242,7 @@
                 </a:tc>
                 <a:extLst>
                   <a:ext uri="{0D108BD9-81ED-4DB2-BD59-A6C34878D82A}">
-                    <a16:rowId xmlns="" xmlns:a16="http://schemas.microsoft.com/office/drawing/2014/main" val="10000"/>
+                    <a16:rowId xmlns:a16="http://schemas.microsoft.com/office/drawing/2014/main" xmlns="" val="10000"/>
                   </a:ext>
                 </a:extLst>
               </a:tr>
@@ -19324,7 +15411,7 @@
                 </a:tc>
                 <a:extLst>
                   <a:ext uri="{0D108BD9-81ED-4DB2-BD59-A6C34878D82A}">
-                    <a16:rowId xmlns="" xmlns:a16="http://schemas.microsoft.com/office/drawing/2014/main" val="10001"/>
+                    <a16:rowId xmlns:a16="http://schemas.microsoft.com/office/drawing/2014/main" xmlns="" val="10001"/>
                   </a:ext>
                 </a:extLst>
               </a:tr>
@@ -19505,7 +15592,7 @@
                 </a:tc>
                 <a:extLst>
                   <a:ext uri="{0D108BD9-81ED-4DB2-BD59-A6C34878D82A}">
-                    <a16:rowId xmlns="" xmlns:a16="http://schemas.microsoft.com/office/drawing/2014/main" val="10002"/>
+                    <a16:rowId xmlns:a16="http://schemas.microsoft.com/office/drawing/2014/main" xmlns="" val="10002"/>
                   </a:ext>
                 </a:extLst>
               </a:tr>
@@ -19513,113 +15600,6 @@
           </a:graphicData>
         </a:graphic>
       </p:graphicFrame>
-      <p:sp>
-        <p:nvSpPr>
-          <p:cNvPr id="14" name="TextBox 13">
-            <a:extLst>
-              <a:ext uri="{FF2B5EF4-FFF2-40B4-BE49-F238E27FC236}">
-                <a16:creationId xmlns="" xmlns:a16="http://schemas.microsoft.com/office/drawing/2014/main" id="{2477AED6-8D6F-D505-6D7B-78460A03A2E8}"/>
-              </a:ext>
-            </a:extLst>
-          </p:cNvPr>
-          <p:cNvSpPr txBox="1"/>
-          <p:nvPr/>
-        </p:nvSpPr>
-        <p:spPr>
-          <a:xfrm>
-            <a:off x="932506" y="3641559"/>
-            <a:ext cx="11115561" cy="646331"/>
-          </a:xfrm>
-          <a:prstGeom prst="rect">
-            <a:avLst/>
-          </a:prstGeom>
-          <a:noFill/>
-        </p:spPr>
-        <p:txBody>
-          <a:bodyPr wrap="square" rtlCol="0">
-            <a:spAutoFit/>
-          </a:bodyPr>
-          <a:lstStyle/>
-          <a:p>
-            <a:r>
-              <a:rPr lang="en-US" err="1"/>
-              <a:t>RemoteDiag’s</a:t>
-            </a:r>
-            <a:r>
-              <a:rPr lang="en-US"/>
-              <a:t> </a:t>
-            </a:r>
-            <a:r>
-              <a:rPr lang="en-US" b="1"/>
-              <a:t>internal</a:t>
-            </a:r>
-            <a:r>
-              <a:rPr lang="en-US"/>
-              <a:t> </a:t>
-            </a:r>
-            <a:r>
-              <a:rPr lang="en-US" b="1"/>
-              <a:t>architecture and communication </a:t>
-            </a:r>
-            <a:r>
-              <a:rPr lang="en-US"/>
-              <a:t>should be </a:t>
-            </a:r>
-            <a:r>
-              <a:rPr lang="en-US" b="1"/>
-              <a:t>redesigned</a:t>
-            </a:r>
-            <a:r>
-              <a:rPr lang="en-US"/>
-              <a:t> to align with new architecture and </a:t>
-            </a:r>
-            <a:r>
-              <a:rPr lang="en-US" b="1"/>
-              <a:t>satisfy above functional requirements.</a:t>
-            </a:r>
-          </a:p>
-        </p:txBody>
-      </p:sp>
-      <p:sp>
-        <p:nvSpPr>
-          <p:cNvPr id="3" name="Right Arrow 2"/>
-          <p:cNvSpPr/>
-          <p:nvPr/>
-        </p:nvSpPr>
-        <p:spPr>
-          <a:xfrm>
-            <a:off x="253495" y="3689626"/>
-            <a:ext cx="679011" cy="550195"/>
-          </a:xfrm>
-          <a:prstGeom prst="rightArrow">
-            <a:avLst/>
-          </a:prstGeom>
-        </p:spPr>
-        <p:style>
-          <a:lnRef idx="2">
-            <a:schemeClr val="accent1">
-              <a:shade val="50000"/>
-            </a:schemeClr>
-          </a:lnRef>
-          <a:fillRef idx="1">
-            <a:schemeClr val="accent1"/>
-          </a:fillRef>
-          <a:effectRef idx="0">
-            <a:schemeClr val="accent1"/>
-          </a:effectRef>
-          <a:fontRef idx="minor">
-            <a:schemeClr val="lt1"/>
-          </a:fontRef>
-        </p:style>
-        <p:txBody>
-          <a:bodyPr rtlCol="0" anchor="ctr"/>
-          <a:lstStyle/>
-          <a:p>
-            <a:pPr algn="ctr"/>
-            <a:endParaRPr lang="en-US"/>
-          </a:p>
-        </p:txBody>
-      </p:sp>
     </p:spTree>
     <p:extLst>
       <p:ext uri="{BB962C8B-B14F-4D97-AF65-F5344CB8AC3E}">
@@ -19633,221 +15613,14 @@
   <p:timing>
     <p:tnLst>
       <p:par>
-        <p:cTn id="1" dur="indefinite" restart="never" nodeType="tmRoot">
-          <p:childTnLst>
-            <p:seq concurrent="1" nextAc="seek">
-              <p:cTn id="2" dur="indefinite" nodeType="mainSeq">
-                <p:childTnLst>
-                  <p:par>
-                    <p:cTn id="3" fill="hold">
-                      <p:stCondLst>
-                        <p:cond delay="indefinite"/>
-                      </p:stCondLst>
-                      <p:childTnLst>
-                        <p:par>
-                          <p:cTn id="4" fill="hold">
-                            <p:stCondLst>
-                              <p:cond delay="0"/>
-                            </p:stCondLst>
-                            <p:childTnLst>
-                              <p:par>
-                                <p:cTn id="5" presetID="42" presetClass="entr" presetSubtype="0" fill="hold" grpId="0" nodeType="clickEffect">
-                                  <p:stCondLst>
-                                    <p:cond delay="0"/>
-                                  </p:stCondLst>
-                                  <p:childTnLst>
-                                    <p:set>
-                                      <p:cBhvr>
-                                        <p:cTn id="6" dur="1" fill="hold">
-                                          <p:stCondLst>
-                                            <p:cond delay="0"/>
-                                          </p:stCondLst>
-                                        </p:cTn>
-                                        <p:tgtEl>
-                                          <p:spTgt spid="14"/>
-                                        </p:tgtEl>
-                                        <p:attrNameLst>
-                                          <p:attrName>style.visibility</p:attrName>
-                                        </p:attrNameLst>
-                                      </p:cBhvr>
-                                      <p:to>
-                                        <p:strVal val="visible"/>
-                                      </p:to>
-                                    </p:set>
-                                    <p:animEffect transition="in" filter="fade">
-                                      <p:cBhvr>
-                                        <p:cTn id="7" dur="1000"/>
-                                        <p:tgtEl>
-                                          <p:spTgt spid="14"/>
-                                        </p:tgtEl>
-                                      </p:cBhvr>
-                                    </p:animEffect>
-                                    <p:anim calcmode="lin" valueType="num">
-                                      <p:cBhvr>
-                                        <p:cTn id="8" dur="1000" fill="hold"/>
-                                        <p:tgtEl>
-                                          <p:spTgt spid="14"/>
-                                        </p:tgtEl>
-                                        <p:attrNameLst>
-                                          <p:attrName>ppt_x</p:attrName>
-                                        </p:attrNameLst>
-                                      </p:cBhvr>
-                                      <p:tavLst>
-                                        <p:tav tm="0">
-                                          <p:val>
-                                            <p:strVal val="#ppt_x"/>
-                                          </p:val>
-                                        </p:tav>
-                                        <p:tav tm="100000">
-                                          <p:val>
-                                            <p:strVal val="#ppt_x"/>
-                                          </p:val>
-                                        </p:tav>
-                                      </p:tavLst>
-                                    </p:anim>
-                                    <p:anim calcmode="lin" valueType="num">
-                                      <p:cBhvr>
-                                        <p:cTn id="9" dur="1000" fill="hold"/>
-                                        <p:tgtEl>
-                                          <p:spTgt spid="14"/>
-                                        </p:tgtEl>
-                                        <p:attrNameLst>
-                                          <p:attrName>ppt_y</p:attrName>
-                                        </p:attrNameLst>
-                                      </p:cBhvr>
-                                      <p:tavLst>
-                                        <p:tav tm="0">
-                                          <p:val>
-                                            <p:strVal val="#ppt_y+.1"/>
-                                          </p:val>
-                                        </p:tav>
-                                        <p:tav tm="100000">
-                                          <p:val>
-                                            <p:strVal val="#ppt_y"/>
-                                          </p:val>
-                                        </p:tav>
-                                      </p:tavLst>
-                                    </p:anim>
-                                  </p:childTnLst>
-                                </p:cTn>
-                              </p:par>
-                              <p:par>
-                                <p:cTn id="10" presetID="42" presetClass="entr" presetSubtype="0" fill="hold" grpId="0" nodeType="withEffect">
-                                  <p:stCondLst>
-                                    <p:cond delay="0"/>
-                                  </p:stCondLst>
-                                  <p:childTnLst>
-                                    <p:set>
-                                      <p:cBhvr>
-                                        <p:cTn id="11" dur="1" fill="hold">
-                                          <p:stCondLst>
-                                            <p:cond delay="0"/>
-                                          </p:stCondLst>
-                                        </p:cTn>
-                                        <p:tgtEl>
-                                          <p:spTgt spid="3"/>
-                                        </p:tgtEl>
-                                        <p:attrNameLst>
-                                          <p:attrName>style.visibility</p:attrName>
-                                        </p:attrNameLst>
-                                      </p:cBhvr>
-                                      <p:to>
-                                        <p:strVal val="visible"/>
-                                      </p:to>
-                                    </p:set>
-                                    <p:animEffect transition="in" filter="fade">
-                                      <p:cBhvr>
-                                        <p:cTn id="12" dur="1000"/>
-                                        <p:tgtEl>
-                                          <p:spTgt spid="3"/>
-                                        </p:tgtEl>
-                                      </p:cBhvr>
-                                    </p:animEffect>
-                                    <p:anim calcmode="lin" valueType="num">
-                                      <p:cBhvr>
-                                        <p:cTn id="13" dur="1000" fill="hold"/>
-                                        <p:tgtEl>
-                                          <p:spTgt spid="3"/>
-                                        </p:tgtEl>
-                                        <p:attrNameLst>
-                                          <p:attrName>ppt_x</p:attrName>
-                                        </p:attrNameLst>
-                                      </p:cBhvr>
-                                      <p:tavLst>
-                                        <p:tav tm="0">
-                                          <p:val>
-                                            <p:strVal val="#ppt_x"/>
-                                          </p:val>
-                                        </p:tav>
-                                        <p:tav tm="100000">
-                                          <p:val>
-                                            <p:strVal val="#ppt_x"/>
-                                          </p:val>
-                                        </p:tav>
-                                      </p:tavLst>
-                                    </p:anim>
-                                    <p:anim calcmode="lin" valueType="num">
-                                      <p:cBhvr>
-                                        <p:cTn id="14" dur="1000" fill="hold"/>
-                                        <p:tgtEl>
-                                          <p:spTgt spid="3"/>
-                                        </p:tgtEl>
-                                        <p:attrNameLst>
-                                          <p:attrName>ppt_y</p:attrName>
-                                        </p:attrNameLst>
-                                      </p:cBhvr>
-                                      <p:tavLst>
-                                        <p:tav tm="0">
-                                          <p:val>
-                                            <p:strVal val="#ppt_y+.1"/>
-                                          </p:val>
-                                        </p:tav>
-                                        <p:tav tm="100000">
-                                          <p:val>
-                                            <p:strVal val="#ppt_y"/>
-                                          </p:val>
-                                        </p:tav>
-                                      </p:tavLst>
-                                    </p:anim>
-                                  </p:childTnLst>
-                                </p:cTn>
-                              </p:par>
-                            </p:childTnLst>
-                          </p:cTn>
-                        </p:par>
-                      </p:childTnLst>
-                    </p:cTn>
-                  </p:par>
-                </p:childTnLst>
-              </p:cTn>
-              <p:prevCondLst>
-                <p:cond evt="onPrev" delay="0">
-                  <p:tgtEl>
-                    <p:sldTgt/>
-                  </p:tgtEl>
-                </p:cond>
-              </p:prevCondLst>
-              <p:nextCondLst>
-                <p:cond evt="onNext" delay="0">
-                  <p:tgtEl>
-                    <p:sldTgt/>
-                  </p:tgtEl>
-                </p:cond>
-              </p:nextCondLst>
-            </p:seq>
-          </p:childTnLst>
-        </p:cTn>
+        <p:cTn id="1" dur="indefinite" restart="never" nodeType="tmRoot"/>
       </p:par>
     </p:tnLst>
-    <p:bldLst>
-      <p:bldP spid="14" grpId="0"/>
-      <p:bldP spid="3" grpId="0" animBg="1"/>
-    </p:bldLst>
   </p:timing>
 </p:sld>
 </file>
 
-<file path=ppt/slides/slide7.xml><?xml version="1.0" encoding="utf-8"?>
+<file path=ppt/slides/slide6.xml><?xml version="1.0" encoding="utf-8"?>
 <p:sld xmlns:a="http://schemas.openxmlformats.org/drawingml/2006/main" xmlns:r="http://schemas.openxmlformats.org/officeDocument/2006/relationships" xmlns:p="http://schemas.openxmlformats.org/presentationml/2006/main">
   <p:cSld>
     <p:spTree>
@@ -19855,7 +15628,7 @@
         <p:cNvPr id="1" name="">
           <a:extLst>
             <a:ext uri="{FF2B5EF4-FFF2-40B4-BE49-F238E27FC236}">
-              <a16:creationId xmlns="" xmlns:a16="http://schemas.microsoft.com/office/drawing/2014/main" id="{C0816B88-86B3-799E-3A3E-FA919E3E0922}"/>
+              <a16:creationId xmlns:a16="http://schemas.microsoft.com/office/drawing/2014/main" xmlns="" id="{C0816B88-86B3-799E-3A3E-FA919E3E0922}"/>
             </a:ext>
           </a:extLst>
         </p:cNvPr>
@@ -19875,7 +15648,7 @@
           <p:cNvPr id="2" name="Title 1">
             <a:extLst>
               <a:ext uri="{FF2B5EF4-FFF2-40B4-BE49-F238E27FC236}">
-                <a16:creationId xmlns="" xmlns:a16="http://schemas.microsoft.com/office/drawing/2014/main" id="{C36E5815-73D6-DA66-29AA-3BE061A3E84B}"/>
+                <a16:creationId xmlns:a16="http://schemas.microsoft.com/office/drawing/2014/main" xmlns="" id="{C36E5815-73D6-DA66-29AA-3BE061A3E84B}"/>
               </a:ext>
             </a:extLst>
           </p:cNvPr>
@@ -19903,7 +15676,7 @@
           <p:cNvPr id="11" name="Content Placeholder 3">
             <a:extLst>
               <a:ext uri="{FF2B5EF4-FFF2-40B4-BE49-F238E27FC236}">
-                <a16:creationId xmlns="" xmlns:a16="http://schemas.microsoft.com/office/drawing/2014/main" id="{6010EF79-766B-D3A2-10CE-882C40A1E836}"/>
+                <a16:creationId xmlns:a16="http://schemas.microsoft.com/office/drawing/2014/main" xmlns="" id="{6010EF79-766B-D3A2-10CE-882C40A1E836}"/>
               </a:ext>
             </a:extLst>
           </p:cNvPr>
@@ -20099,7 +15872,7 @@
           <p:cNvPr id="3" name="Table 2">
             <a:extLst>
               <a:ext uri="{FF2B5EF4-FFF2-40B4-BE49-F238E27FC236}">
-                <a16:creationId xmlns="" xmlns:a16="http://schemas.microsoft.com/office/drawing/2014/main" id="{6C8AAA51-C203-CD8B-4B02-DE7401134C21}"/>
+                <a16:creationId xmlns:a16="http://schemas.microsoft.com/office/drawing/2014/main" xmlns="" id="{6C8AAA51-C203-CD8B-4B02-DE7401134C21}"/>
               </a:ext>
             </a:extLst>
           </p:cNvPr>
@@ -20116,7 +15889,7 @@
         </p:nvGraphicFramePr>
         <p:xfrm>
           <a:off x="182820" y="960039"/>
-          <a:ext cx="11826361" cy="4611470"/>
+          <a:ext cx="11826361" cy="4800700"/>
         </p:xfrm>
         <a:graphic>
           <a:graphicData uri="http://schemas.openxmlformats.org/drawingml/2006/table">
@@ -20128,35 +15901,35 @@
                 <a:gridCol w="741105">
                   <a:extLst>
                     <a:ext uri="{9D8B030D-6E8A-4147-A177-3AD203B41FA5}">
-                      <a16:colId xmlns="" xmlns:a16="http://schemas.microsoft.com/office/drawing/2014/main" val="20000"/>
+                      <a16:colId xmlns:a16="http://schemas.microsoft.com/office/drawing/2014/main" xmlns="" val="20000"/>
                     </a:ext>
                   </a:extLst>
                 </a:gridCol>
                 <a:gridCol w="4248150">
                   <a:extLst>
                     <a:ext uri="{9D8B030D-6E8A-4147-A177-3AD203B41FA5}">
-                      <a16:colId xmlns="" xmlns:a16="http://schemas.microsoft.com/office/drawing/2014/main" val="20001"/>
+                      <a16:colId xmlns:a16="http://schemas.microsoft.com/office/drawing/2014/main" xmlns="" val="20001"/>
                     </a:ext>
                   </a:extLst>
                 </a:gridCol>
                 <a:gridCol w="4629150">
                   <a:extLst>
                     <a:ext uri="{9D8B030D-6E8A-4147-A177-3AD203B41FA5}">
-                      <a16:colId xmlns="" xmlns:a16="http://schemas.microsoft.com/office/drawing/2014/main" val="2530683369"/>
+                      <a16:colId xmlns:a16="http://schemas.microsoft.com/office/drawing/2014/main" xmlns="" val="2530683369"/>
                     </a:ext>
                   </a:extLst>
                 </a:gridCol>
                 <a:gridCol w="1295400">
                   <a:extLst>
                     <a:ext uri="{9D8B030D-6E8A-4147-A177-3AD203B41FA5}">
-                      <a16:colId xmlns="" xmlns:a16="http://schemas.microsoft.com/office/drawing/2014/main" val="20002"/>
+                      <a16:colId xmlns:a16="http://schemas.microsoft.com/office/drawing/2014/main" xmlns="" val="20002"/>
                     </a:ext>
                   </a:extLst>
                 </a:gridCol>
                 <a:gridCol w="912556">
                   <a:extLst>
                     <a:ext uri="{9D8B030D-6E8A-4147-A177-3AD203B41FA5}">
-                      <a16:colId xmlns="" xmlns:a16="http://schemas.microsoft.com/office/drawing/2014/main" val="20003"/>
+                      <a16:colId xmlns:a16="http://schemas.microsoft.com/office/drawing/2014/main" xmlns="" val="20003"/>
                     </a:ext>
                   </a:extLst>
                 </a:gridCol>
@@ -20516,7 +16289,7 @@
                 </a:tc>
                 <a:extLst>
                   <a:ext uri="{0D108BD9-81ED-4DB2-BD59-A6C34878D82A}">
-                    <a16:rowId xmlns="" xmlns:a16="http://schemas.microsoft.com/office/drawing/2014/main" val="10000"/>
+                    <a16:rowId xmlns:a16="http://schemas.microsoft.com/office/drawing/2014/main" xmlns="" val="10000"/>
                   </a:ext>
                 </a:extLst>
               </a:tr>
@@ -20871,7 +16644,7 @@
                 </a:tc>
                 <a:extLst>
                   <a:ext uri="{0D108BD9-81ED-4DB2-BD59-A6C34878D82A}">
-                    <a16:rowId xmlns="" xmlns:a16="http://schemas.microsoft.com/office/drawing/2014/main" val="10001"/>
+                    <a16:rowId xmlns:a16="http://schemas.microsoft.com/office/drawing/2014/main" xmlns="" val="10001"/>
                   </a:ext>
                 </a:extLst>
               </a:tr>
@@ -21266,7 +17039,7 @@
                 </a:tc>
                 <a:extLst>
                   <a:ext uri="{0D108BD9-81ED-4DB2-BD59-A6C34878D82A}">
-                    <a16:rowId xmlns="" xmlns:a16="http://schemas.microsoft.com/office/drawing/2014/main" val="10002"/>
+                    <a16:rowId xmlns:a16="http://schemas.microsoft.com/office/drawing/2014/main" xmlns="" val="10002"/>
                   </a:ext>
                 </a:extLst>
               </a:tr>
@@ -21369,43 +17142,7 @@
                           <a:ea typeface="+mn-ea"/>
                           <a:cs typeface="Arial" panose="020B0604020202020204" pitchFamily="34" charset="0"/>
                         </a:rPr>
-                        <a:t>The </a:t>
-                      </a:r>
-                      <a:r>
-                        <a:rPr lang="en-US" sz="1600" b="0" kern="1200" baseline="0" smtClean="0">
-                          <a:solidFill>
-                            <a:schemeClr val="dk1"/>
-                          </a:solidFill>
-                          <a:effectLst/>
-                          <a:latin typeface="+mn-lt"/>
-                          <a:ea typeface="+mn-ea"/>
-                          <a:cs typeface="Arial" panose="020B0604020202020204" pitchFamily="34" charset="0"/>
-                        </a:rPr>
-                        <a:t>new design preserves </a:t>
-                      </a:r>
-                      <a:r>
-                        <a:rPr lang="en-US" sz="1600" b="0" kern="1200" baseline="0" smtClean="0">
-                          <a:solidFill>
-                            <a:schemeClr val="dk1"/>
-                          </a:solidFill>
-                          <a:effectLst/>
-                          <a:latin typeface="+mn-lt"/>
-                          <a:ea typeface="+mn-ea"/>
-                          <a:cs typeface="Arial" panose="020B0604020202020204" pitchFamily="34" charset="0"/>
-                        </a:rPr>
-                        <a:t>the original core responsibility of each component</a:t>
-                      </a:r>
-                      <a:r>
-                        <a:rPr lang="en-US" sz="1600" b="0" kern="1200" baseline="0" smtClean="0">
-                          <a:solidFill>
-                            <a:schemeClr val="dk1"/>
-                          </a:solidFill>
-                          <a:effectLst/>
-                          <a:latin typeface="+mn-lt"/>
-                          <a:ea typeface="+mn-ea"/>
-                          <a:cs typeface="Arial" panose="020B0604020202020204" pitchFamily="34" charset="0"/>
-                        </a:rPr>
-                        <a:t>.</a:t>
+                        <a:t>The new design preserves the original core responsibility of each component.</a:t>
                       </a:r>
                       <a:endParaRPr lang="en-US" sz="1600" b="0" kern="1200" baseline="0">
                         <a:solidFill>
@@ -21517,16 +17254,7 @@
                           <a:ea typeface="Malgun Gothic" panose="020B0503020000020004" pitchFamily="34" charset="-127"/>
                           <a:cs typeface="Arial" panose="020B0604020202020204" pitchFamily="34" charset="0"/>
                         </a:rPr>
-                        <a:t>No additional specification </a:t>
-                      </a:r>
-                      <a:r>
-                        <a:rPr lang="en-US" sz="1600" b="0" smtClean="0">
-                          <a:effectLst/>
-                          <a:latin typeface="+mn-lt"/>
-                          <a:ea typeface="Malgun Gothic" panose="020B0503020000020004" pitchFamily="34" charset="-127"/>
-                          <a:cs typeface="Arial" panose="020B0604020202020204" pitchFamily="34" charset="0"/>
-                        </a:rPr>
-                        <a:t>updates caused by responsibility expansion.</a:t>
+                        <a:t>No additional specification updates caused by responsibility expansion.</a:t>
                       </a:r>
                       <a:endParaRPr lang="en-US" sz="1600" b="0">
                         <a:effectLst/>
@@ -21717,7 +17445,7 @@
                 </a:tc>
                 <a:extLst>
                   <a:ext uri="{0D108BD9-81ED-4DB2-BD59-A6C34878D82A}">
-                    <a16:rowId xmlns="" xmlns:a16="http://schemas.microsoft.com/office/drawing/2014/main" val="10003"/>
+                    <a16:rowId xmlns:a16="http://schemas.microsoft.com/office/drawing/2014/main" xmlns="" val="10003"/>
                   </a:ext>
                 </a:extLst>
               </a:tr>
@@ -22115,7 +17843,7 @@
                 </a:tc>
                 <a:extLst>
                   <a:ext uri="{0D108BD9-81ED-4DB2-BD59-A6C34878D82A}">
-                    <a16:rowId xmlns="" xmlns:a16="http://schemas.microsoft.com/office/drawing/2014/main" val="10004"/>
+                    <a16:rowId xmlns:a16="http://schemas.microsoft.com/office/drawing/2014/main" xmlns="" val="10004"/>
                   </a:ext>
                 </a:extLst>
               </a:tr>
@@ -22531,7 +18259,7 @@
 </p:sld>
 </file>
 
-<file path=ppt/slides/slide8.xml><?xml version="1.0" encoding="utf-8"?>
+<file path=ppt/slides/slide7.xml><?xml version="1.0" encoding="utf-8"?>
 <p:sld xmlns:a="http://schemas.openxmlformats.org/drawingml/2006/main" xmlns:r="http://schemas.openxmlformats.org/officeDocument/2006/relationships" xmlns:p="http://schemas.openxmlformats.org/presentationml/2006/main">
   <p:cSld>
     <p:spTree>
@@ -22548,6 +18276,119 @@
           <a:chExt cx="0" cy="0"/>
         </a:xfrm>
       </p:grpSpPr>
+      <p:sp>
+        <p:nvSpPr>
+          <p:cNvPr id="5" name="TextBox 4"/>
+          <p:cNvSpPr txBox="1"/>
+          <p:nvPr/>
+        </p:nvSpPr>
+        <p:spPr>
+          <a:xfrm>
+            <a:off x="160866" y="862011"/>
+            <a:ext cx="11834976" cy="1532727"/>
+          </a:xfrm>
+          <a:prstGeom prst="rect">
+            <a:avLst/>
+          </a:prstGeom>
+          <a:noFill/>
+        </p:spPr>
+        <p:txBody>
+          <a:bodyPr wrap="square" rtlCol="0">
+            <a:spAutoFit/>
+          </a:bodyPr>
+          <a:lstStyle/>
+          <a:p>
+            <a:pPr marL="285750" indent="-285750">
+              <a:lnSpc>
+                <a:spcPct val="130000"/>
+              </a:lnSpc>
+              <a:buFont typeface="Arial" panose="020B0604020202020204" pitchFamily="34" charset="0"/>
+              <a:buChar char="•"/>
+            </a:pPr>
+            <a:r>
+              <a:rPr lang="en-US" smtClean="0"/>
+              <a:t>Split RemoteDiag responsibilities into </a:t>
+            </a:r>
+            <a:r>
+              <a:rPr lang="en-US" b="1" smtClean="0"/>
+              <a:t>2</a:t>
+            </a:r>
+            <a:r>
+              <a:rPr lang="en-US" smtClean="0"/>
+              <a:t> apps: </a:t>
+            </a:r>
+          </a:p>
+          <a:p>
+            <a:pPr marL="742950" lvl="1" indent="-285750">
+              <a:lnSpc>
+                <a:spcPct val="130000"/>
+              </a:lnSpc>
+              <a:buFont typeface="Wingdings" panose="05000000000000000000" pitchFamily="2" charset="2"/>
+              <a:buChar char="§"/>
+            </a:pPr>
+            <a:r>
+              <a:rPr lang="en-US" b="1" smtClean="0"/>
+              <a:t>RemoteDiag (EP):</a:t>
+            </a:r>
+            <a:r>
+              <a:rPr lang="en-US" smtClean="0"/>
+              <a:t> handles diag messages from OEM server.</a:t>
+            </a:r>
+            <a:endParaRPr lang="en-US" b="1"/>
+          </a:p>
+          <a:p>
+            <a:pPr marL="742950" lvl="1" indent="-285750">
+              <a:lnSpc>
+                <a:spcPct val="130000"/>
+              </a:lnSpc>
+              <a:buFont typeface="Wingdings" panose="05000000000000000000" pitchFamily="2" charset="2"/>
+              <a:buChar char="§"/>
+            </a:pPr>
+            <a:r>
+              <a:rPr lang="en-US" b="1" smtClean="0"/>
+              <a:t>RemoteOTA (IP):</a:t>
+            </a:r>
+            <a:r>
+              <a:rPr lang="en-US" smtClean="0"/>
+              <a:t> handles OTA diag message flows from MM ECU.</a:t>
+            </a:r>
+          </a:p>
+          <a:p>
+            <a:pPr marL="285750" indent="-285750">
+              <a:lnSpc>
+                <a:spcPct val="130000"/>
+              </a:lnSpc>
+              <a:buFont typeface="Arial" panose="020B0604020202020204" pitchFamily="34" charset="0"/>
+              <a:buChar char="•"/>
+            </a:pPr>
+            <a:r>
+              <a:rPr lang="en-US" smtClean="0"/>
+              <a:t>OnBoardClient is responsible for </a:t>
+            </a:r>
+            <a:r>
+              <a:rPr lang="en-US" b="1" smtClean="0"/>
+              <a:t>reprogramming message </a:t>
+            </a:r>
+            <a:r>
+              <a:rPr lang="en-US" b="1"/>
+              <a:t>filtering</a:t>
+            </a:r>
+            <a:r>
+              <a:rPr lang="en-US" smtClean="0"/>
+              <a:t> and </a:t>
+            </a:r>
+            <a:r>
+              <a:rPr lang="en-US" b="1" smtClean="0"/>
+              <a:t>diagnostic  priority control</a:t>
+            </a:r>
+            <a:r>
+              <a:rPr lang="en-US" smtClean="0"/>
+              <a:t>.</a:t>
+            </a:r>
+            <a:endParaRPr lang="en-US" sz="1600"/>
+          </a:p>
+        </p:txBody>
+      </p:sp>
       <p:sp>
         <p:nvSpPr>
           <p:cNvPr id="2" name="Title 1"/>
@@ -22581,7 +18422,7 @@
       </p:sp>
       <p:pic>
         <p:nvPicPr>
-          <p:cNvPr id="6" name="Picture 5"/>
+          <p:cNvPr id="4" name="Picture 3"/>
           <p:cNvPicPr>
             <a:picLocks noChangeAspect="1"/>
           </p:cNvPicPr>
@@ -22595,8 +18436,8 @@
         </p:blipFill>
         <p:spPr>
           <a:xfrm>
-            <a:off x="160866" y="862011"/>
-            <a:ext cx="9300004" cy="5314287"/>
+            <a:off x="3209925" y="2399168"/>
+            <a:ext cx="8785917" cy="4367400"/>
           </a:xfrm>
           <a:prstGeom prst="rect">
             <a:avLst/>
@@ -22605,7 +18446,7 @@
       </p:pic>
       <p:pic>
         <p:nvPicPr>
-          <p:cNvPr id="7" name="Picture 6"/>
+          <p:cNvPr id="8" name="Picture 7"/>
           <p:cNvPicPr>
             <a:picLocks noChangeAspect="1"/>
           </p:cNvPicPr>
@@ -22619,14 +18460,44 @@
         </p:blipFill>
         <p:spPr>
           <a:xfrm>
-            <a:off x="9495078" y="3060071"/>
-            <a:ext cx="2615445" cy="2319522"/>
+            <a:off x="600387" y="5078097"/>
+            <a:ext cx="2196413" cy="1688471"/>
           </a:xfrm>
           <a:prstGeom prst="rect">
             <a:avLst/>
           </a:prstGeom>
         </p:spPr>
       </p:pic>
+      <p:sp>
+        <p:nvSpPr>
+          <p:cNvPr id="9" name="TextBox 8"/>
+          <p:cNvSpPr txBox="1"/>
+          <p:nvPr/>
+        </p:nvSpPr>
+        <p:spPr>
+          <a:xfrm>
+            <a:off x="6898742" y="6315754"/>
+            <a:ext cx="651140" cy="369332"/>
+          </a:xfrm>
+          <a:prstGeom prst="rect">
+            <a:avLst/>
+          </a:prstGeom>
+          <a:noFill/>
+        </p:spPr>
+        <p:txBody>
+          <a:bodyPr wrap="none" rtlCol="0">
+            <a:spAutoFit/>
+          </a:bodyPr>
+          <a:lstStyle/>
+          <a:p>
+            <a:r>
+              <a:rPr lang="en-US" smtClean="0"/>
+              <a:t>Alt-A</a:t>
+            </a:r>
+            <a:endParaRPr lang="en-US"/>
+          </a:p>
+        </p:txBody>
+      </p:sp>
     </p:spTree>
     <p:extLst>
       <p:ext uri="{BB962C8B-B14F-4D97-AF65-F5344CB8AC3E}">
@@ -22647,7 +18518,7 @@
 </p:sld>
 </file>
 
-<file path=ppt/slides/slide9.xml><?xml version="1.0" encoding="utf-8"?>
+<file path=ppt/slides/slide8.xml><?xml version="1.0" encoding="utf-8"?>
 <p:sld xmlns:a="http://schemas.openxmlformats.org/drawingml/2006/main" xmlns:r="http://schemas.openxmlformats.org/officeDocument/2006/relationships" xmlns:p="http://schemas.openxmlformats.org/presentationml/2006/main">
   <p:cSld>
     <p:spTree>
@@ -22697,7 +18568,7 @@
       </p:sp>
       <p:pic>
         <p:nvPicPr>
-          <p:cNvPr id="3" name="Picture 2"/>
+          <p:cNvPr id="5" name="Picture 4"/>
           <p:cNvPicPr>
             <a:picLocks noChangeAspect="1"/>
           </p:cNvPicPr>
@@ -22711,8 +18582,400 @@
         </p:blipFill>
         <p:spPr>
           <a:xfrm>
-            <a:off x="160867" y="862010"/>
-            <a:ext cx="11913376" cy="5424489"/>
+            <a:off x="600387" y="5078097"/>
+            <a:ext cx="2196413" cy="1688471"/>
+          </a:xfrm>
+          <a:prstGeom prst="rect">
+            <a:avLst/>
+          </a:prstGeom>
+        </p:spPr>
+      </p:pic>
+      <p:sp>
+        <p:nvSpPr>
+          <p:cNvPr id="6" name="TextBox 5"/>
+          <p:cNvSpPr txBox="1"/>
+          <p:nvPr/>
+        </p:nvSpPr>
+        <p:spPr>
+          <a:xfrm>
+            <a:off x="160866" y="862011"/>
+            <a:ext cx="11958710" cy="1615827"/>
+          </a:xfrm>
+          <a:prstGeom prst="rect">
+            <a:avLst/>
+          </a:prstGeom>
+          <a:noFill/>
+        </p:spPr>
+        <p:txBody>
+          <a:bodyPr wrap="square" rtlCol="0">
+            <a:spAutoFit/>
+          </a:bodyPr>
+          <a:lstStyle/>
+          <a:p>
+            <a:pPr marL="227013" indent="-227013">
+              <a:lnSpc>
+                <a:spcPct val="110000"/>
+              </a:lnSpc>
+              <a:buFont typeface="Arial" panose="020B0604020202020204" pitchFamily="34" charset="0"/>
+              <a:buChar char="•"/>
+            </a:pPr>
+            <a:r>
+              <a:rPr lang="en-US" smtClean="0"/>
+              <a:t>Move RemoteDiag into the IP container.</a:t>
+            </a:r>
+          </a:p>
+          <a:p>
+            <a:pPr marL="227013" indent="-227013">
+              <a:lnSpc>
+                <a:spcPct val="110000"/>
+              </a:lnSpc>
+              <a:buFont typeface="Arial" panose="020B0604020202020204" pitchFamily="34" charset="0"/>
+              <a:buChar char="•"/>
+            </a:pPr>
+            <a:r>
+              <a:rPr lang="en-US" smtClean="0"/>
+              <a:t>To maintain communication with OEM server and other EP-side component, </a:t>
+            </a:r>
+            <a:r>
+              <a:rPr lang="en-US" b="1" smtClean="0"/>
+              <a:t>establish UDS socket connections to each module</a:t>
+            </a:r>
+            <a:endParaRPr lang="en-US" smtClean="0"/>
+          </a:p>
+          <a:p>
+            <a:pPr marL="227013" indent="-227013">
+              <a:lnSpc>
+                <a:spcPct val="110000"/>
+              </a:lnSpc>
+              <a:buFont typeface="Arial" panose="020B0604020202020204" pitchFamily="34" charset="0"/>
+              <a:buChar char="•"/>
+            </a:pPr>
+            <a:endParaRPr lang="en-US" smtClean="0"/>
+          </a:p>
+          <a:p>
+            <a:pPr marL="227013" indent="-227013">
+              <a:lnSpc>
+                <a:spcPct val="110000"/>
+              </a:lnSpc>
+              <a:buFont typeface="Arial" panose="020B0604020202020204" pitchFamily="34" charset="0"/>
+              <a:buChar char="•"/>
+            </a:pPr>
+            <a:endParaRPr lang="en-US"/>
+          </a:p>
+        </p:txBody>
+      </p:sp>
+      <p:pic>
+        <p:nvPicPr>
+          <p:cNvPr id="7" name="Picture 6"/>
+          <p:cNvPicPr>
+            <a:picLocks noChangeAspect="1"/>
+          </p:cNvPicPr>
+          <p:nvPr/>
+        </p:nvPicPr>
+        <p:blipFill>
+          <a:blip r:embed="rId4"/>
+          <a:stretch>
+            <a:fillRect/>
+          </a:stretch>
+        </p:blipFill>
+        <p:spPr>
+          <a:xfrm>
+            <a:off x="3305175" y="1847523"/>
+            <a:ext cx="8814401" cy="4919045"/>
+          </a:xfrm>
+          <a:prstGeom prst="rect">
+            <a:avLst/>
+          </a:prstGeom>
+        </p:spPr>
+      </p:pic>
+      <p:sp>
+        <p:nvSpPr>
+          <p:cNvPr id="8" name="TextBox 7"/>
+          <p:cNvSpPr txBox="1"/>
+          <p:nvPr/>
+        </p:nvSpPr>
+        <p:spPr>
+          <a:xfrm>
+            <a:off x="6953062" y="6189006"/>
+            <a:ext cx="643125" cy="369332"/>
+          </a:xfrm>
+          <a:prstGeom prst="rect">
+            <a:avLst/>
+          </a:prstGeom>
+          <a:noFill/>
+        </p:spPr>
+        <p:txBody>
+          <a:bodyPr wrap="none" rtlCol="0">
+            <a:spAutoFit/>
+          </a:bodyPr>
+          <a:lstStyle/>
+          <a:p>
+            <a:r>
+              <a:rPr lang="en-US" smtClean="0"/>
+              <a:t>Alt-B</a:t>
+            </a:r>
+            <a:endParaRPr lang="en-US"/>
+          </a:p>
+        </p:txBody>
+      </p:sp>
+    </p:spTree>
+    <p:extLst>
+      <p:ext uri="{BB962C8B-B14F-4D97-AF65-F5344CB8AC3E}">
+        <p14:creationId xmlns:p14="http://schemas.microsoft.com/office/powerpoint/2010/main" val="681369838"/>
+      </p:ext>
+    </p:extLst>
+  </p:cSld>
+  <p:clrMapOvr>
+    <a:masterClrMapping/>
+  </p:clrMapOvr>
+  <p:timing>
+    <p:tnLst>
+      <p:par>
+        <p:cTn id="1" dur="indefinite" restart="never" nodeType="tmRoot"/>
+      </p:par>
+    </p:tnLst>
+  </p:timing>
+</p:sld>
+</file>
+
+<file path=ppt/slides/slide9.xml><?xml version="1.0" encoding="utf-8"?>
+<p:sld xmlns:a="http://schemas.openxmlformats.org/drawingml/2006/main" xmlns:r="http://schemas.openxmlformats.org/officeDocument/2006/relationships" xmlns:p="http://schemas.openxmlformats.org/presentationml/2006/main">
+  <p:cSld>
+    <p:spTree>
+      <p:nvGrpSpPr>
+        <p:cNvPr id="1" name="">
+          <a:extLst>
+            <a:ext uri="{FF2B5EF4-FFF2-40B4-BE49-F238E27FC236}">
+              <a16:creationId xmlns:a16="http://schemas.microsoft.com/office/drawing/2014/main" xmlns="" id="{7A3A9F39-394E-5437-993F-29D2F2093B00}"/>
+            </a:ext>
+          </a:extLst>
+        </p:cNvPr>
+        <p:cNvGrpSpPr/>
+        <p:nvPr/>
+      </p:nvGrpSpPr>
+      <p:grpSpPr>
+        <a:xfrm>
+          <a:off x="0" y="0"/>
+          <a:ext cx="0" cy="0"/>
+          <a:chOff x="0" y="0"/>
+          <a:chExt cx="0" cy="0"/>
+        </a:xfrm>
+      </p:grpSpPr>
+      <p:pic>
+        <p:nvPicPr>
+          <p:cNvPr id="7" name="Picture 6"/>
+          <p:cNvPicPr>
+            <a:picLocks noChangeAspect="1"/>
+          </p:cNvPicPr>
+          <p:nvPr/>
+        </p:nvPicPr>
+        <p:blipFill>
+          <a:blip r:embed="rId3"/>
+          <a:stretch>
+            <a:fillRect/>
+          </a:stretch>
+        </p:blipFill>
+        <p:spPr>
+          <a:xfrm>
+            <a:off x="3314700" y="2354870"/>
+            <a:ext cx="8678897" cy="4350305"/>
+          </a:xfrm>
+          <a:prstGeom prst="rect">
+            <a:avLst/>
+          </a:prstGeom>
+        </p:spPr>
+      </p:pic>
+      <p:sp>
+        <p:nvSpPr>
+          <p:cNvPr id="2" name="Title 1">
+            <a:extLst>
+              <a:ext uri="{FF2B5EF4-FFF2-40B4-BE49-F238E27FC236}">
+                <a16:creationId xmlns:a16="http://schemas.microsoft.com/office/drawing/2014/main" xmlns="" id="{554F77EA-2B30-AFDC-1349-3C58C2AB9061}"/>
+              </a:ext>
+            </a:extLst>
+          </p:cNvPr>
+          <p:cNvSpPr>
+            <a:spLocks noGrp="1"/>
+          </p:cNvSpPr>
+          <p:nvPr>
+            <p:ph type="title"/>
+          </p:nvPr>
+        </p:nvSpPr>
+        <p:spPr/>
+        <p:txBody>
+          <a:bodyPr/>
+          <a:lstStyle/>
+          <a:p>
+            <a:r>
+              <a:rPr lang="en-US"/>
+              <a:t>Design Alternative – </a:t>
+            </a:r>
+            <a:r>
+              <a:rPr lang="en-US" smtClean="0"/>
+              <a:t>Alt-C</a:t>
+            </a:r>
+            <a:r>
+              <a:rPr lang="en-US"/>
+              <a:t>: Move </a:t>
+            </a:r>
+            <a:r>
+              <a:rPr lang="en-US" err="1" smtClean="0"/>
+              <a:t>RemoteDiag</a:t>
+            </a:r>
+            <a:r>
+              <a:rPr lang="en-US" smtClean="0"/>
+              <a:t> + Proxy</a:t>
+            </a:r>
+            <a:endParaRPr lang="en-US"/>
+          </a:p>
+        </p:txBody>
+      </p:sp>
+      <p:sp>
+        <p:nvSpPr>
+          <p:cNvPr id="3" name="Content Placeholder 2">
+            <a:extLst>
+              <a:ext uri="{FF2B5EF4-FFF2-40B4-BE49-F238E27FC236}">
+                <a16:creationId xmlns:a16="http://schemas.microsoft.com/office/drawing/2014/main" xmlns="" id="{64FB7A4A-CF56-C0BD-9AB9-923B2D043291}"/>
+              </a:ext>
+            </a:extLst>
+          </p:cNvPr>
+          <p:cNvSpPr>
+            <a:spLocks noGrp="1"/>
+          </p:cNvSpPr>
+          <p:nvPr>
+            <p:ph idx="1"/>
+          </p:nvPr>
+        </p:nvSpPr>
+        <p:spPr>
+          <a:xfrm>
+            <a:off x="160867" y="990599"/>
+            <a:ext cx="11825921" cy="1219201"/>
+          </a:xfrm>
+        </p:spPr>
+        <p:txBody>
+          <a:bodyPr>
+            <a:normAutofit fontScale="92500" lnSpcReduction="20000"/>
+          </a:bodyPr>
+          <a:lstStyle/>
+          <a:p>
+            <a:r>
+              <a:rPr lang="en-US" sz="1800"/>
+              <a:t>Move RemoteDiag into the IP container.</a:t>
+            </a:r>
+          </a:p>
+          <a:p>
+            <a:r>
+              <a:rPr lang="en-US" sz="1800"/>
+              <a:t>Introduce a </a:t>
+            </a:r>
+            <a:r>
+              <a:rPr lang="en-US" sz="1800" b="1"/>
+              <a:t>new RemoteDiagProxy (RDP) module</a:t>
+            </a:r>
+            <a:r>
+              <a:rPr lang="en-US" sz="1800"/>
+              <a:t> in the EP that acts as a </a:t>
+            </a:r>
+            <a:r>
+              <a:rPr lang="en-US" sz="1800" b="1"/>
+              <a:t>transparent proxy</a:t>
+            </a:r>
+            <a:r>
+              <a:rPr lang="en-US" sz="1800"/>
+              <a:t>. </a:t>
+            </a:r>
+            <a:endParaRPr lang="en-US" sz="1800" smtClean="0"/>
+          </a:p>
+          <a:p>
+            <a:r>
+              <a:rPr lang="en-US" sz="1800" smtClean="0"/>
+              <a:t>EP </a:t>
+            </a:r>
+            <a:r>
+              <a:rPr lang="en-US" sz="1800"/>
+              <a:t>modules continue to interact with RDP using their </a:t>
+            </a:r>
+            <a:r>
+              <a:rPr lang="en-US" sz="1800"/>
+              <a:t>existing </a:t>
+            </a:r>
+            <a:r>
+              <a:rPr lang="en-US" sz="1800" smtClean="0"/>
+              <a:t>interface</a:t>
+            </a:r>
+          </a:p>
+          <a:p>
+            <a:r>
+              <a:rPr lang="en-US" sz="1800" smtClean="0"/>
+              <a:t>RDP </a:t>
+            </a:r>
+            <a:r>
+              <a:rPr lang="en-US" sz="1800"/>
+              <a:t>forwards requests to </a:t>
+            </a:r>
+            <a:r>
+              <a:rPr lang="en-US" sz="1800"/>
+              <a:t>RemoteDiag </a:t>
+            </a:r>
+            <a:r>
+              <a:rPr lang="en-US" sz="1800" smtClean="0"/>
+              <a:t>via UDS socket channel.</a:t>
+            </a:r>
+            <a:endParaRPr lang="en-US" sz="1800" b="1"/>
+          </a:p>
+          <a:p>
+            <a:endParaRPr lang="en-US" sz="1800"/>
+          </a:p>
+        </p:txBody>
+      </p:sp>
+      <p:sp>
+        <p:nvSpPr>
+          <p:cNvPr id="6" name="TextBox 5"/>
+          <p:cNvSpPr txBox="1"/>
+          <p:nvPr/>
+        </p:nvSpPr>
+        <p:spPr>
+          <a:xfrm>
+            <a:off x="6781612" y="6335843"/>
+            <a:ext cx="643125" cy="369332"/>
+          </a:xfrm>
+          <a:prstGeom prst="rect">
+            <a:avLst/>
+          </a:prstGeom>
+          <a:noFill/>
+        </p:spPr>
+        <p:txBody>
+          <a:bodyPr wrap="none" rtlCol="0">
+            <a:spAutoFit/>
+          </a:bodyPr>
+          <a:lstStyle/>
+          <a:p>
+            <a:r>
+              <a:rPr lang="en-US" smtClean="0"/>
+              <a:t>Alt-C</a:t>
+            </a:r>
+            <a:endParaRPr lang="en-US"/>
+          </a:p>
+        </p:txBody>
+      </p:sp>
+      <p:pic>
+        <p:nvPicPr>
+          <p:cNvPr id="8" name="Picture 7"/>
+          <p:cNvPicPr>
+            <a:picLocks noChangeAspect="1"/>
+          </p:cNvPicPr>
+          <p:nvPr/>
+        </p:nvPicPr>
+        <p:blipFill>
+          <a:blip r:embed="rId4"/>
+          <a:stretch>
+            <a:fillRect/>
+          </a:stretch>
+        </p:blipFill>
+        <p:spPr>
+          <a:xfrm>
+            <a:off x="600075" y="5083804"/>
+            <a:ext cx="2196413" cy="1688471"/>
           </a:xfrm>
           <a:prstGeom prst="rect">
             <a:avLst/>
@@ -22722,7 +18985,7 @@
     </p:spTree>
     <p:extLst>
       <p:ext uri="{BB962C8B-B14F-4D97-AF65-F5344CB8AC3E}">
-        <p14:creationId xmlns:p14="http://schemas.microsoft.com/office/powerpoint/2010/main" val="681369838"/>
+        <p14:creationId xmlns:p14="http://schemas.microsoft.com/office/powerpoint/2010/main" val="4181377362"/>
       </p:ext>
     </p:extLst>
   </p:cSld>

--- a/design/FE_phi.vu_Design of Secure Remote Diag on Container Separation Architecture_3rd.pptx
+++ b/design/FE_phi.vu_Design of Secure Remote Diag on Container Separation Architecture_3rd.pptx
@@ -21,10 +21,10 @@
     <p:sldId id="288" r:id="rId12"/>
     <p:sldId id="291" r:id="rId13"/>
     <p:sldId id="274" r:id="rId14"/>
-    <p:sldId id="273" r:id="rId15"/>
-    <p:sldId id="277" r:id="rId16"/>
-    <p:sldId id="276" r:id="rId17"/>
-    <p:sldId id="290" r:id="rId18"/>
+    <p:sldId id="277" r:id="rId15"/>
+    <p:sldId id="276" r:id="rId16"/>
+    <p:sldId id="293" r:id="rId17"/>
+    <p:sldId id="292" r:id="rId18"/>
   </p:sldIdLst>
   <p:sldSz cx="12192000" cy="6858000"/>
   <p:notesSz cx="6858000" cy="9144000"/>
@@ -1591,7 +1591,7 @@
           <p:cNvPr id="7" name="그림 5" descr="백색바탕.png">
             <a:extLst>
               <a:ext uri="{FF2B5EF4-FFF2-40B4-BE49-F238E27FC236}">
-                <a16:creationId xmlns:a16="http://schemas.microsoft.com/office/drawing/2014/main" xmlns="" id="{28873918-42A2-05FA-4A84-F17869DE34CF}"/>
+                <a16:creationId xmlns:a16="http://schemas.microsoft.com/office/drawing/2014/main" id="{28873918-42A2-05FA-4A84-F17869DE34CF}"/>
               </a:ext>
             </a:extLst>
           </p:cNvPr>
@@ -3475,7 +3475,7 @@
           <p:cNvPr id="8" name="TextBox 7">
             <a:extLst>
               <a:ext uri="{FF2B5EF4-FFF2-40B4-BE49-F238E27FC236}">
-                <a16:creationId xmlns:a16="http://schemas.microsoft.com/office/drawing/2014/main" xmlns="" id="{7DC87BF5-B759-FAAB-FE6D-F0E5F640800D}"/>
+                <a16:creationId xmlns:a16="http://schemas.microsoft.com/office/drawing/2014/main" id="{7DC87BF5-B759-FAAB-FE6D-F0E5F640800D}"/>
               </a:ext>
             </a:extLst>
           </p:cNvPr>
@@ -3483,7 +3483,7 @@
           <p:nvPr userDrawn="1">
             <p:extLst>
               <p:ext uri="{1162E1C5-73C7-4A58-AE30-91384D911F3F}">
-                <p184:classification xmlns:p184="http://schemas.microsoft.com/office/powerpoint/2018/4/main" xmlns="" val="hdr"/>
+                <p184:classification xmlns:p184="http://schemas.microsoft.com/office/powerpoint/2018/4/main" val="hdr"/>
               </p:ext>
             </p:extLst>
           </p:nvPr>
@@ -3930,13 +3930,6 @@
   <p:clrMapOvr>
     <a:masterClrMapping/>
   </p:clrMapOvr>
-  <p:timing>
-    <p:tnLst>
-      <p:par>
-        <p:cTn id="1" dur="indefinite" restart="never" nodeType="tmRoot"/>
-      </p:par>
-    </p:tnLst>
-  </p:timing>
 </p:sld>
 </file>
 
@@ -4015,28 +4008,28 @@
                 <a:gridCol w="1630147">
                   <a:extLst>
                     <a:ext uri="{9D8B030D-6E8A-4147-A177-3AD203B41FA5}">
-                      <a16:colId xmlns:a16="http://schemas.microsoft.com/office/drawing/2014/main" xmlns="" val="20000"/>
+                      <a16:colId xmlns:a16="http://schemas.microsoft.com/office/drawing/2014/main" val="20000"/>
                     </a:ext>
                   </a:extLst>
                 </a:gridCol>
                 <a:gridCol w="3619436">
                   <a:extLst>
                     <a:ext uri="{9D8B030D-6E8A-4147-A177-3AD203B41FA5}">
-                      <a16:colId xmlns:a16="http://schemas.microsoft.com/office/drawing/2014/main" xmlns="" val="20001"/>
+                      <a16:colId xmlns:a16="http://schemas.microsoft.com/office/drawing/2014/main" val="20001"/>
                     </a:ext>
                   </a:extLst>
                 </a:gridCol>
                 <a:gridCol w="3279774">
                   <a:extLst>
                     <a:ext uri="{9D8B030D-6E8A-4147-A177-3AD203B41FA5}">
-                      <a16:colId xmlns:a16="http://schemas.microsoft.com/office/drawing/2014/main" xmlns="" val="20002"/>
+                      <a16:colId xmlns:a16="http://schemas.microsoft.com/office/drawing/2014/main" val="20002"/>
                     </a:ext>
                   </a:extLst>
                 </a:gridCol>
                 <a:gridCol w="3490332">
                   <a:extLst>
                     <a:ext uri="{9D8B030D-6E8A-4147-A177-3AD203B41FA5}">
-                      <a16:colId xmlns:a16="http://schemas.microsoft.com/office/drawing/2014/main" xmlns="" val="20003"/>
+                      <a16:colId xmlns:a16="http://schemas.microsoft.com/office/drawing/2014/main" val="20003"/>
                     </a:ext>
                   </a:extLst>
                 </a:gridCol>
@@ -4121,7 +4114,7 @@
                 </a:tc>
                 <a:extLst>
                   <a:ext uri="{0D108BD9-81ED-4DB2-BD59-A6C34878D82A}">
-                    <a16:rowId xmlns:a16="http://schemas.microsoft.com/office/drawing/2014/main" xmlns="" val="10000"/>
+                    <a16:rowId xmlns:a16="http://schemas.microsoft.com/office/drawing/2014/main" val="10000"/>
                   </a:ext>
                 </a:extLst>
               </a:tr>
@@ -4293,7 +4286,7 @@
                 </a:tc>
                 <a:extLst>
                   <a:ext uri="{0D108BD9-81ED-4DB2-BD59-A6C34878D82A}">
-                    <a16:rowId xmlns:a16="http://schemas.microsoft.com/office/drawing/2014/main" xmlns="" val="10001"/>
+                    <a16:rowId xmlns:a16="http://schemas.microsoft.com/office/drawing/2014/main" val="10001"/>
                   </a:ext>
                 </a:extLst>
               </a:tr>
@@ -4537,7 +4530,7 @@
                 </a:tc>
                 <a:extLst>
                   <a:ext uri="{0D108BD9-81ED-4DB2-BD59-A6C34878D82A}">
-                    <a16:rowId xmlns:a16="http://schemas.microsoft.com/office/drawing/2014/main" xmlns="" val="2845297163"/>
+                    <a16:rowId xmlns:a16="http://schemas.microsoft.com/office/drawing/2014/main" val="2845297163"/>
                   </a:ext>
                 </a:extLst>
               </a:tr>
@@ -4591,7 +4584,7 @@
           <p:cNvPr id="7" name="Table 6">
             <a:extLst>
               <a:ext uri="{FF2B5EF4-FFF2-40B4-BE49-F238E27FC236}">
-                <a16:creationId xmlns:a16="http://schemas.microsoft.com/office/drawing/2014/main" xmlns="" id="{6C8AAA51-C203-CD8B-4B02-DE7401134C21}"/>
+                <a16:creationId xmlns:a16="http://schemas.microsoft.com/office/drawing/2014/main" id="{6C8AAA51-C203-CD8B-4B02-DE7401134C21}"/>
               </a:ext>
             </a:extLst>
           </p:cNvPr>
@@ -4608,7 +4601,7 @@
         </p:nvGraphicFramePr>
         <p:xfrm>
           <a:off x="72428" y="616718"/>
-          <a:ext cx="12050161" cy="5029320"/>
+          <a:ext cx="12050161" cy="5010143"/>
         </p:xfrm>
         <a:graphic>
           <a:graphicData uri="http://schemas.openxmlformats.org/drawingml/2006/table">
@@ -4620,28 +4613,28 @@
                 <a:gridCol w="1149790">
                   <a:extLst>
                     <a:ext uri="{9D8B030D-6E8A-4147-A177-3AD203B41FA5}">
-                      <a16:colId xmlns:a16="http://schemas.microsoft.com/office/drawing/2014/main" xmlns="" val="20000"/>
+                      <a16:colId xmlns:a16="http://schemas.microsoft.com/office/drawing/2014/main" val="20000"/>
                     </a:ext>
                   </a:extLst>
                 </a:gridCol>
                 <a:gridCol w="3633457">
                   <a:extLst>
                     <a:ext uri="{9D8B030D-6E8A-4147-A177-3AD203B41FA5}">
-                      <a16:colId xmlns:a16="http://schemas.microsoft.com/office/drawing/2014/main" xmlns="" val="20001"/>
+                      <a16:colId xmlns:a16="http://schemas.microsoft.com/office/drawing/2014/main" val="20001"/>
                     </a:ext>
                   </a:extLst>
                 </a:gridCol>
                 <a:gridCol w="3781331">
                   <a:extLst>
                     <a:ext uri="{9D8B030D-6E8A-4147-A177-3AD203B41FA5}">
-                      <a16:colId xmlns:a16="http://schemas.microsoft.com/office/drawing/2014/main" xmlns="" val="2530683369"/>
+                      <a16:colId xmlns:a16="http://schemas.microsoft.com/office/drawing/2014/main" val="2530683369"/>
                     </a:ext>
                   </a:extLst>
                 </a:gridCol>
                 <a:gridCol w="3485583">
                   <a:extLst>
                     <a:ext uri="{9D8B030D-6E8A-4147-A177-3AD203B41FA5}">
-                      <a16:colId xmlns:a16="http://schemas.microsoft.com/office/drawing/2014/main" xmlns="" val="20002"/>
+                      <a16:colId xmlns:a16="http://schemas.microsoft.com/office/drawing/2014/main" val="20002"/>
                     </a:ext>
                   </a:extLst>
                 </a:gridCol>
@@ -4725,7 +4718,7 @@
                         <a:defRPr/>
                       </a:pPr>
                       <a:r>
-                        <a:rPr lang="en-US" sz="1200" b="0" smtClean="0">
+                        <a:rPr lang="en-US" sz="1200" b="0">
                           <a:effectLst/>
                           <a:latin typeface="+mn-lt"/>
                           <a:ea typeface="Malgun Gothic" panose="020B0503020000020004" pitchFamily="34" charset="-127"/>
@@ -4734,7 +4727,7 @@
                         <a:t>Alt-A</a:t>
                       </a:r>
                       <a:r>
-                        <a:rPr lang="en-US" sz="1200" b="0" baseline="0" smtClean="0">
+                        <a:rPr lang="en-US" sz="1200" b="0" baseline="0">
                           <a:effectLst/>
                           <a:latin typeface="+mn-lt"/>
                           <a:ea typeface="Malgun Gothic" panose="020B0503020000020004" pitchFamily="34" charset="-127"/>
@@ -4743,7 +4736,7 @@
                         <a:t> – Split </a:t>
                       </a:r>
                       <a:r>
-                        <a:rPr lang="en-US" sz="1200" b="0" baseline="0" err="1" smtClean="0">
+                        <a:rPr lang="en-US" sz="1200" b="0" baseline="0" err="1">
                           <a:effectLst/>
                           <a:latin typeface="+mn-lt"/>
                           <a:ea typeface="Malgun Gothic" panose="020B0503020000020004" pitchFamily="34" charset="-127"/>
@@ -4821,7 +4814,7 @@
                         <a:defRPr/>
                       </a:pPr>
                       <a:r>
-                        <a:rPr lang="en-US" sz="1200" b="0" smtClean="0">
+                        <a:rPr lang="en-US" sz="1200" b="0">
                           <a:effectLst/>
                           <a:latin typeface="+mn-lt"/>
                           <a:ea typeface="Malgun Gothic" panose="020B0503020000020004" pitchFamily="34" charset="-127"/>
@@ -4830,7 +4823,7 @@
                         <a:t>Alt-B: Move </a:t>
                       </a:r>
                       <a:r>
-                        <a:rPr lang="en-US" sz="1200" b="0" err="1" smtClean="0">
+                        <a:rPr lang="en-US" sz="1200" b="0" err="1">
                           <a:effectLst/>
                           <a:latin typeface="+mn-lt"/>
                           <a:ea typeface="Malgun Gothic" panose="020B0503020000020004" pitchFamily="34" charset="-127"/>
@@ -4908,7 +4901,7 @@
                         <a:defRPr/>
                       </a:pPr>
                       <a:r>
-                        <a:rPr lang="en-US" sz="1200" b="0" smtClean="0">
+                        <a:rPr lang="en-US" sz="1200" b="0">
                           <a:effectLst/>
                           <a:latin typeface="+mn-lt"/>
                           <a:cs typeface="Arial" panose="020B0604020202020204" pitchFamily="34" charset="0"/>
@@ -4916,7 +4909,7 @@
                         <a:t>Alt-C: Move </a:t>
                       </a:r>
                       <a:r>
-                        <a:rPr lang="en-US" sz="1200" b="0" err="1" smtClean="0">
+                        <a:rPr lang="en-US" sz="1200" b="0" err="1">
                           <a:effectLst/>
                           <a:latin typeface="+mn-lt"/>
                           <a:cs typeface="Arial" panose="020B0604020202020204" pitchFamily="34" charset="0"/>
@@ -4924,7 +4917,7 @@
                         <a:t>RemoteDiag</a:t>
                       </a:r>
                       <a:r>
-                        <a:rPr lang="en-US" sz="1200" b="0" smtClean="0">
+                        <a:rPr lang="en-US" sz="1200" b="0">
                           <a:effectLst/>
                           <a:latin typeface="+mn-lt"/>
                           <a:cs typeface="Arial" panose="020B0604020202020204" pitchFamily="34" charset="0"/>
@@ -4980,7 +4973,7 @@
                 </a:tc>
                 <a:extLst>
                   <a:ext uri="{0D108BD9-81ED-4DB2-BD59-A6C34878D82A}">
-                    <a16:rowId xmlns:a16="http://schemas.microsoft.com/office/drawing/2014/main" xmlns="" val="10000"/>
+                    <a16:rowId xmlns:a16="http://schemas.microsoft.com/office/drawing/2014/main" val="10000"/>
                   </a:ext>
                 </a:extLst>
               </a:tr>
@@ -4996,7 +4989,7 @@
                         </a:lnSpc>
                       </a:pPr>
                       <a:r>
-                        <a:rPr lang="en-US" sz="1200" b="0" kern="1200" smtClean="0">
+                        <a:rPr lang="en-US" sz="1200" b="0" kern="1200">
                           <a:solidFill>
                             <a:schemeClr val="dk1"/>
                           </a:solidFill>
@@ -5015,7 +5008,7 @@
                         </a:lnSpc>
                       </a:pPr>
                       <a:r>
-                        <a:rPr lang="en-US" sz="1200" b="0" kern="1200" smtClean="0">
+                        <a:rPr lang="en-US" sz="1200" b="0" kern="1200">
                           <a:solidFill>
                             <a:schemeClr val="dk1"/>
                           </a:solidFill>
@@ -5026,15 +5019,6 @@
                         </a:rPr>
                         <a:t>Security</a:t>
                       </a:r>
-                      <a:endParaRPr lang="en-US" sz="1200" b="0" kern="1200">
-                        <a:solidFill>
-                          <a:schemeClr val="dk1"/>
-                        </a:solidFill>
-                        <a:effectLst/>
-                        <a:latin typeface="+mn-lt"/>
-                        <a:ea typeface="+mn-ea"/>
-                        <a:cs typeface="Arial" panose="020B0604020202020204" pitchFamily="34" charset="0"/>
-                      </a:endParaRPr>
                     </a:p>
                   </a:txBody>
                   <a:tcPr marL="106700" marR="106700" marT="53350" marB="53350" anchor="ctr">
@@ -5095,14 +5079,14 @@
                         <a:buNone/>
                       </a:pPr>
                       <a:r>
-                        <a:rPr lang="en-US" sz="1300" b="1" smtClean="0">
+                        <a:rPr lang="en-US" sz="1300" b="1">
                           <a:solidFill>
                             <a:srgbClr val="00B050"/>
                           </a:solidFill>
                         </a:rPr>
                         <a:t>High</a:t>
                       </a:r>
-                      <a:endParaRPr lang="en-US" sz="1300" b="0" smtClean="0">
+                      <a:endParaRPr lang="en-US" sz="1300" b="0">
                         <a:solidFill>
                           <a:schemeClr val="tx1"/>
                         </a:solidFill>
@@ -5123,7 +5107,7 @@
                         <a:buNone/>
                       </a:pPr>
                       <a:r>
-                        <a:rPr lang="en-US" sz="1300" b="0" smtClean="0">
+                        <a:rPr lang="en-US" sz="1300" b="0">
                           <a:solidFill>
                             <a:schemeClr val="tx1"/>
                           </a:solidFill>
@@ -5131,7 +5115,7 @@
                         <a:t>Unauthorized diagnostic commands are</a:t>
                       </a:r>
                       <a:r>
-                        <a:rPr lang="en-US" sz="1300" b="0" baseline="0" smtClean="0">
+                        <a:rPr lang="en-US" sz="1300" b="0" baseline="0">
                           <a:solidFill>
                             <a:schemeClr val="tx1"/>
                           </a:solidFill>
@@ -5139,7 +5123,7 @@
                         <a:t> </a:t>
                       </a:r>
                       <a:r>
-                        <a:rPr lang="en-US" sz="1300" b="1" baseline="0" smtClean="0">
+                        <a:rPr lang="en-US" sz="1300" b="1" baseline="0">
                           <a:solidFill>
                             <a:schemeClr val="tx1"/>
                           </a:solidFill>
@@ -5147,14 +5131,14 @@
                         <a:t>filtered</a:t>
                       </a:r>
                       <a:r>
-                        <a:rPr lang="en-US" sz="1300" b="0" baseline="0" smtClean="0">
+                        <a:rPr lang="en-US" sz="1300" b="0" baseline="0">
                           <a:solidFill>
                             <a:schemeClr val="tx1"/>
                           </a:solidFill>
                         </a:rPr>
                         <a:t>.</a:t>
                       </a:r>
-                      <a:endParaRPr lang="en-US" sz="1300" b="0" smtClean="0">
+                      <a:endParaRPr lang="en-US" sz="1300" b="0">
                         <a:solidFill>
                           <a:schemeClr val="tx1"/>
                         </a:solidFill>
@@ -5223,14 +5207,14 @@
                         <a:defRPr/>
                       </a:pPr>
                       <a:r>
-                        <a:rPr lang="en-US" sz="1300" b="1" smtClean="0">
+                        <a:rPr lang="en-US" sz="1300" b="1">
                           <a:solidFill>
                             <a:srgbClr val="00B050"/>
                           </a:solidFill>
                         </a:rPr>
                         <a:t>High</a:t>
                       </a:r>
-                      <a:endParaRPr lang="en-US" sz="1300" b="0" smtClean="0">
+                      <a:endParaRPr lang="en-US" sz="1300" b="0">
                         <a:solidFill>
                           <a:schemeClr val="tx1"/>
                         </a:solidFill>
@@ -5255,7 +5239,7 @@
                         <a:defRPr/>
                       </a:pPr>
                       <a:r>
-                        <a:rPr lang="en-US" sz="1300" b="0" smtClean="0">
+                        <a:rPr lang="en-US" sz="1300" b="0">
                           <a:solidFill>
                             <a:schemeClr val="tx1"/>
                           </a:solidFill>
@@ -5263,7 +5247,7 @@
                         <a:t>Unauthorized diagnostic commands are </a:t>
                       </a:r>
                       <a:r>
-                        <a:rPr lang="en-US" sz="1300" b="1" smtClean="0">
+                        <a:rPr lang="en-US" sz="1300" b="1">
                           <a:solidFill>
                             <a:schemeClr val="tx1"/>
                           </a:solidFill>
@@ -5271,7 +5255,7 @@
                         <a:t>filtered</a:t>
                       </a:r>
                       <a:r>
-                        <a:rPr lang="en-US" sz="1300" b="0" smtClean="0">
+                        <a:rPr lang="en-US" sz="1300" b="0">
                           <a:solidFill>
                             <a:schemeClr val="tx1"/>
                           </a:solidFill>
@@ -5342,14 +5326,14 @@
                         <a:defRPr/>
                       </a:pPr>
                       <a:r>
-                        <a:rPr lang="en-US" sz="1300" b="1" smtClean="0">
+                        <a:rPr lang="en-US" sz="1300" b="1">
                           <a:solidFill>
                             <a:srgbClr val="00B050"/>
                           </a:solidFill>
                         </a:rPr>
                         <a:t>High</a:t>
                       </a:r>
-                      <a:endParaRPr lang="en-US" sz="1300" b="0" smtClean="0">
+                      <a:endParaRPr lang="en-US" sz="1300" b="0">
                         <a:solidFill>
                           <a:schemeClr val="tx1"/>
                         </a:solidFill>
@@ -5374,7 +5358,7 @@
                         <a:defRPr/>
                       </a:pPr>
                       <a:r>
-                        <a:rPr lang="en-US" sz="1300" b="0" smtClean="0">
+                        <a:rPr lang="en-US" sz="1300" b="0">
                           <a:solidFill>
                             <a:schemeClr val="tx1"/>
                           </a:solidFill>
@@ -5382,7 +5366,7 @@
                         <a:t>Unauthorized diagnostic commands are </a:t>
                       </a:r>
                       <a:r>
-                        <a:rPr lang="en-US" sz="1300" b="1" smtClean="0">
+                        <a:rPr lang="en-US" sz="1300" b="1">
                           <a:solidFill>
                             <a:schemeClr val="tx1"/>
                           </a:solidFill>
@@ -5390,7 +5374,7 @@
                         <a:t>filtered</a:t>
                       </a:r>
                       <a:r>
-                        <a:rPr lang="en-US" sz="1300" b="0" smtClean="0">
+                        <a:rPr lang="en-US" sz="1300" b="0">
                           <a:solidFill>
                             <a:schemeClr val="tx1"/>
                           </a:solidFill>
@@ -5440,7 +5424,7 @@
                 </a:tc>
                 <a:extLst>
                   <a:ext uri="{0D108BD9-81ED-4DB2-BD59-A6C34878D82A}">
-                    <a16:rowId xmlns:a16="http://schemas.microsoft.com/office/drawing/2014/main" xmlns="" val="10001"/>
+                    <a16:rowId xmlns:a16="http://schemas.microsoft.com/office/drawing/2014/main" val="10001"/>
                   </a:ext>
                 </a:extLst>
               </a:tr>
@@ -5456,7 +5440,7 @@
                         </a:lnSpc>
                       </a:pPr>
                       <a:r>
-                        <a:rPr lang="en-US" sz="1200" b="0" kern="1200" smtClean="0">
+                        <a:rPr lang="en-US" sz="1200" b="0" kern="1200">
                           <a:solidFill>
                             <a:schemeClr val="dk1"/>
                           </a:solidFill>
@@ -5475,7 +5459,7 @@
                         </a:lnSpc>
                       </a:pPr>
                       <a:r>
-                        <a:rPr lang="en-US" sz="1200" b="0" kern="1200" smtClean="0">
+                        <a:rPr lang="en-US" sz="1200" b="0" kern="1200">
                           <a:solidFill>
                             <a:schemeClr val="dk1"/>
                           </a:solidFill>
@@ -5486,15 +5470,6 @@
                         </a:rPr>
                         <a:t>Security</a:t>
                       </a:r>
-                      <a:endParaRPr lang="en-US" sz="1200" b="0" kern="1200">
-                        <a:solidFill>
-                          <a:schemeClr val="dk1"/>
-                        </a:solidFill>
-                        <a:effectLst/>
-                        <a:latin typeface="+mn-lt"/>
-                        <a:ea typeface="+mn-ea"/>
-                        <a:cs typeface="Arial" panose="020B0604020202020204" pitchFamily="34" charset="0"/>
-                      </a:endParaRPr>
                     </a:p>
                   </a:txBody>
                   <a:tcPr marL="106700" marR="106700" marT="53350" marB="53350" anchor="ctr">
@@ -5555,14 +5530,14 @@
                         <a:buNone/>
                       </a:pPr>
                       <a:r>
-                        <a:rPr lang="en-US" sz="1300" b="1" smtClean="0">
+                        <a:rPr lang="en-US" sz="1300" b="1">
                           <a:solidFill>
                             <a:srgbClr val="00B050"/>
                           </a:solidFill>
                         </a:rPr>
                         <a:t>High</a:t>
                       </a:r>
-                      <a:endParaRPr lang="en-US" sz="1300" b="0" kern="1200" baseline="0" smtClean="0">
+                      <a:endParaRPr lang="en-US" sz="1300" b="0" kern="1200" baseline="0">
                         <a:solidFill>
                           <a:schemeClr val="dk1"/>
                         </a:solidFill>
@@ -5587,7 +5562,7 @@
                         <a:buNone/>
                       </a:pPr>
                       <a:r>
-                        <a:rPr lang="en-US" sz="1300" b="0" kern="1200" baseline="0" smtClean="0">
+                        <a:rPr lang="en-US" sz="1300" b="0" kern="1200" baseline="0">
                           <a:solidFill>
                             <a:schemeClr val="dk1"/>
                           </a:solidFill>
@@ -5599,7 +5574,7 @@
                         <a:t>MM ECU diagnostic traffic remains </a:t>
                       </a:r>
                       <a:r>
-                        <a:rPr lang="en-US" sz="1300" b="1" kern="1200" baseline="0" smtClean="0">
+                        <a:rPr lang="en-US" sz="1300" b="1" kern="1200" baseline="0">
                           <a:solidFill>
                             <a:schemeClr val="dk1"/>
                           </a:solidFill>
@@ -5611,7 +5586,7 @@
                         <a:t>within the EP container</a:t>
                       </a:r>
                       <a:r>
-                        <a:rPr lang="en-US" sz="1300" b="0" kern="1200" baseline="0" smtClean="0">
+                        <a:rPr lang="en-US" sz="1300" b="0" kern="1200" baseline="0">
                           <a:solidFill>
                             <a:schemeClr val="dk1"/>
                           </a:solidFill>
@@ -5622,15 +5597,6 @@
                         </a:rPr>
                         <a:t>.</a:t>
                       </a:r>
-                      <a:endParaRPr lang="en-US" sz="1300" b="0" kern="1200" baseline="0">
-                        <a:solidFill>
-                          <a:schemeClr val="dk1"/>
-                        </a:solidFill>
-                        <a:effectLst/>
-                        <a:latin typeface="+mn-lt"/>
-                        <a:ea typeface="+mn-ea"/>
-                        <a:cs typeface="Arial" panose="020B0604020202020204" pitchFamily="34" charset="0"/>
-                      </a:endParaRPr>
                     </a:p>
                   </a:txBody>
                   <a:tcPr marL="25400" marR="25400" marT="0" marB="0">
@@ -5683,7 +5649,7 @@
                         </a:lnSpc>
                       </a:pPr>
                       <a:r>
-                        <a:rPr lang="en-US" sz="1300" b="1" smtClean="0">
+                        <a:rPr lang="en-US" sz="1300" b="1">
                           <a:solidFill>
                             <a:srgbClr val="00B050"/>
                           </a:solidFill>
@@ -5706,7 +5672,7 @@
                         <a:buNone/>
                       </a:pPr>
                       <a:r>
-                        <a:rPr lang="en-US" sz="1300" b="0" kern="1200" baseline="0" smtClean="0">
+                        <a:rPr lang="en-US" sz="1300" b="0" kern="1200" baseline="0">
                           <a:solidFill>
                             <a:schemeClr val="dk1"/>
                           </a:solidFill>
@@ -5718,7 +5684,7 @@
                         <a:t>MM ECU diagnostic traffic remains </a:t>
                       </a:r>
                       <a:r>
-                        <a:rPr lang="en-US" sz="1300" b="1" kern="1200" baseline="0" smtClean="0">
+                        <a:rPr lang="en-US" sz="1300" b="1" kern="1200" baseline="0">
                           <a:solidFill>
                             <a:schemeClr val="dk1"/>
                           </a:solidFill>
@@ -5730,7 +5696,7 @@
                         <a:t>within the EP container</a:t>
                       </a:r>
                       <a:r>
-                        <a:rPr lang="en-US" sz="1300" b="0" kern="1200" baseline="0" smtClean="0">
+                        <a:rPr lang="en-US" sz="1300" b="0" kern="1200" baseline="0">
                           <a:solidFill>
                             <a:schemeClr val="dk1"/>
                           </a:solidFill>
@@ -5741,15 +5707,6 @@
                         </a:rPr>
                         <a:t>.</a:t>
                       </a:r>
-                      <a:endParaRPr lang="en-US" sz="1300" b="0" kern="1200" baseline="0">
-                        <a:solidFill>
-                          <a:schemeClr val="dk1"/>
-                        </a:solidFill>
-                        <a:effectLst/>
-                        <a:latin typeface="+mn-lt"/>
-                        <a:ea typeface="+mn-ea"/>
-                        <a:cs typeface="Arial" panose="020B0604020202020204" pitchFamily="34" charset="0"/>
-                      </a:endParaRPr>
                     </a:p>
                   </a:txBody>
                   <a:tcPr marL="106700" marR="106700" marT="53350" marB="53350">
@@ -5802,7 +5759,7 @@
                         </a:lnSpc>
                       </a:pPr>
                       <a:r>
-                        <a:rPr lang="en-US" sz="1300" b="1" smtClean="0">
+                        <a:rPr lang="en-US" sz="1300" b="1">
                           <a:solidFill>
                             <a:srgbClr val="00B050"/>
                           </a:solidFill>
@@ -5825,7 +5782,7 @@
                         <a:buNone/>
                       </a:pPr>
                       <a:r>
-                        <a:rPr lang="en-US" sz="1300" b="0" kern="1200" baseline="0" smtClean="0">
+                        <a:rPr lang="en-US" sz="1300" b="0" kern="1200" baseline="0">
                           <a:solidFill>
                             <a:schemeClr val="dk1"/>
                           </a:solidFill>
@@ -5837,7 +5794,7 @@
                         <a:t>MM ECU diagnostic traffic remains </a:t>
                       </a:r>
                       <a:r>
-                        <a:rPr lang="en-US" sz="1300" b="1" kern="1200" baseline="0" smtClean="0">
+                        <a:rPr lang="en-US" sz="1300" b="1" kern="1200" baseline="0">
                           <a:solidFill>
                             <a:schemeClr val="dk1"/>
                           </a:solidFill>
@@ -5848,15 +5805,6 @@
                         </a:rPr>
                         <a:t>within the EP container.</a:t>
                       </a:r>
-                      <a:endParaRPr lang="en-US" sz="1300" b="1" kern="1200" baseline="0">
-                        <a:solidFill>
-                          <a:schemeClr val="dk1"/>
-                        </a:solidFill>
-                        <a:effectLst/>
-                        <a:latin typeface="+mn-lt"/>
-                        <a:ea typeface="+mn-ea"/>
-                        <a:cs typeface="Arial" panose="020B0604020202020204" pitchFamily="34" charset="0"/>
-                      </a:endParaRPr>
                     </a:p>
                   </a:txBody>
                   <a:tcPr marL="106700" marR="106700" marT="53350" marB="53350">
@@ -5900,7 +5848,7 @@
                 </a:tc>
                 <a:extLst>
                   <a:ext uri="{0D108BD9-81ED-4DB2-BD59-A6C34878D82A}">
-                    <a16:rowId xmlns:a16="http://schemas.microsoft.com/office/drawing/2014/main" xmlns="" val="10002"/>
+                    <a16:rowId xmlns:a16="http://schemas.microsoft.com/office/drawing/2014/main" val="10002"/>
                   </a:ext>
                 </a:extLst>
               </a:tr>
@@ -5916,7 +5864,7 @@
                         </a:lnSpc>
                       </a:pPr>
                       <a:r>
-                        <a:rPr lang="en-US" sz="1200" b="0" kern="1200" smtClean="0">
+                        <a:rPr lang="en-US" sz="1200" b="0" kern="1200">
                           <a:solidFill>
                             <a:schemeClr val="dk1"/>
                           </a:solidFill>
@@ -5935,7 +5883,7 @@
                         </a:lnSpc>
                       </a:pPr>
                       <a:r>
-                        <a:rPr lang="en-US" sz="1200" b="0" kern="1200" smtClean="0">
+                        <a:rPr lang="en-US" sz="1200" b="0" kern="1200">
                           <a:solidFill>
                             <a:schemeClr val="dk1"/>
                           </a:solidFill>
@@ -5946,15 +5894,6 @@
                         </a:rPr>
                         <a:t>Modifiability</a:t>
                       </a:r>
-                      <a:endParaRPr lang="en-US" sz="1200" b="0" kern="1200">
-                        <a:solidFill>
-                          <a:schemeClr val="dk1"/>
-                        </a:solidFill>
-                        <a:effectLst/>
-                        <a:latin typeface="+mn-lt"/>
-                        <a:ea typeface="+mn-ea"/>
-                        <a:cs typeface="Arial" panose="020B0604020202020204" pitchFamily="34" charset="0"/>
-                      </a:endParaRPr>
                     </a:p>
                   </a:txBody>
                   <a:tcPr marL="106700" marR="106700" marT="53350" marB="53350" anchor="ctr">
@@ -6013,14 +5952,14 @@
                         </a:spcAft>
                       </a:pPr>
                       <a:r>
-                        <a:rPr lang="en-US" sz="1300" b="1" smtClean="0">
+                        <a:rPr lang="en-US" sz="1300" b="1">
                           <a:solidFill>
                             <a:srgbClr val="FF0000"/>
                           </a:solidFill>
                         </a:rPr>
                         <a:t>Low</a:t>
                       </a:r>
-                      <a:endParaRPr lang="en-US" sz="1300" b="1" kern="1200" baseline="0" smtClean="0">
+                      <a:endParaRPr lang="en-US" sz="1300" b="1" kern="1200" baseline="0">
                         <a:solidFill>
                           <a:schemeClr val="dk1"/>
                         </a:solidFill>
@@ -6043,7 +5982,7 @@
                         </a:spcAft>
                       </a:pPr>
                       <a:r>
-                        <a:rPr lang="en-US" sz="1300" b="0" kern="1200" baseline="0" smtClean="0">
+                        <a:rPr lang="en-US" sz="1300" b="0" kern="1200" baseline="0">
                           <a:solidFill>
                             <a:schemeClr val="dk1"/>
                           </a:solidFill>
@@ -6055,7 +5994,7 @@
                         <a:t>Responsibilities of RemoteDiag and OnBoardClient change (</a:t>
                       </a:r>
                       <a:r>
-                        <a:rPr lang="en-US" sz="1300" b="1" kern="1200" baseline="0" smtClean="0">
+                        <a:rPr lang="en-US" sz="1300" b="1" kern="1200" baseline="0">
                           <a:solidFill>
                             <a:schemeClr val="dk1"/>
                           </a:solidFill>
@@ -6067,7 +6006,7 @@
                         <a:t>diagnostic priority control</a:t>
                       </a:r>
                       <a:r>
-                        <a:rPr lang="en-US" sz="1300" b="0" kern="1200" baseline="0" smtClean="0">
+                        <a:rPr lang="en-US" sz="1300" b="0" kern="1200" baseline="0">
                           <a:solidFill>
                             <a:schemeClr val="dk1"/>
                           </a:solidFill>
@@ -6076,53 +6015,8 @@
                           <a:ea typeface="+mn-ea"/>
                           <a:cs typeface="Arial" panose="020B0604020202020204" pitchFamily="34" charset="0"/>
                         </a:rPr>
-                        <a:t> moves to </a:t>
+                        <a:t> moves to and specifications.. OnBoardClient), requiring updates to requirements </a:t>
                       </a:r>
-                      <a:r>
-                        <a:rPr lang="en-US" sz="1300" b="0" kern="1200" baseline="0" smtClean="0">
-                          <a:solidFill>
-                            <a:schemeClr val="dk1"/>
-                          </a:solidFill>
-                          <a:effectLst/>
-                          <a:latin typeface="+mn-lt"/>
-                          <a:ea typeface="+mn-ea"/>
-                          <a:cs typeface="Arial" panose="020B0604020202020204" pitchFamily="34" charset="0"/>
-                        </a:rPr>
-                        <a:t>and </a:t>
-                      </a:r>
-                      <a:r>
-                        <a:rPr lang="en-US" sz="1300" b="0" kern="1200" baseline="0" smtClean="0">
-                          <a:solidFill>
-                            <a:schemeClr val="dk1"/>
-                          </a:solidFill>
-                          <a:effectLst/>
-                          <a:latin typeface="+mn-lt"/>
-                          <a:ea typeface="+mn-ea"/>
-                          <a:cs typeface="Arial" panose="020B0604020202020204" pitchFamily="34" charset="0"/>
-                        </a:rPr>
-                        <a:t>specifications</a:t>
-                      </a:r>
-                      <a:r>
-                        <a:rPr lang="en-US" sz="1300" b="0" kern="1200" baseline="0" smtClean="0">
-                          <a:solidFill>
-                            <a:schemeClr val="dk1"/>
-                          </a:solidFill>
-                          <a:effectLst/>
-                          <a:latin typeface="+mn-lt"/>
-                          <a:ea typeface="+mn-ea"/>
-                          <a:cs typeface="Arial" panose="020B0604020202020204" pitchFamily="34" charset="0"/>
-                        </a:rPr>
-                        <a:t>.. OnBoardClient), requiring updates to requirements </a:t>
-                      </a:r>
-                      <a:endParaRPr lang="en-US" sz="1300" b="0" kern="1200" baseline="0" smtClean="0">
-                        <a:solidFill>
-                          <a:schemeClr val="dk1"/>
-                        </a:solidFill>
-                        <a:effectLst/>
-                        <a:latin typeface="+mn-lt"/>
-                        <a:ea typeface="+mn-ea"/>
-                        <a:cs typeface="Arial" panose="020B0604020202020204" pitchFamily="34" charset="0"/>
-                      </a:endParaRPr>
                     </a:p>
                   </a:txBody>
                   <a:tcPr marL="25400" marR="25400" marT="0" marB="0">
@@ -6187,7 +6081,7 @@
                         <a:defRPr/>
                       </a:pPr>
                       <a:r>
-                        <a:rPr lang="en-US" sz="1300" b="1" smtClean="0">
+                        <a:rPr lang="en-US" sz="1300" b="1">
                           <a:solidFill>
                             <a:srgbClr val="00B050"/>
                           </a:solidFill>
@@ -6214,7 +6108,7 @@
                         <a:defRPr/>
                       </a:pPr>
                       <a:r>
-                        <a:rPr lang="en-US" sz="1300" b="0" kern="1200" baseline="0" smtClean="0">
+                        <a:rPr lang="en-US" sz="1300" b="0" kern="1200" baseline="0">
                           <a:solidFill>
                             <a:schemeClr val="tx1"/>
                           </a:solidFill>
@@ -6289,7 +6183,7 @@
                         <a:defRPr/>
                       </a:pPr>
                       <a:r>
-                        <a:rPr lang="en-US" sz="1300" b="1" smtClean="0">
+                        <a:rPr lang="en-US" sz="1300" b="1">
                           <a:solidFill>
                             <a:srgbClr val="00B050"/>
                           </a:solidFill>
@@ -6316,7 +6210,7 @@
                         <a:defRPr/>
                       </a:pPr>
                       <a:r>
-                        <a:rPr lang="en-US" sz="1300" b="0" kern="1200" baseline="0" smtClean="0">
+                        <a:rPr lang="en-US" sz="1300" b="0" kern="1200" baseline="0">
                           <a:solidFill>
                             <a:schemeClr val="tx1"/>
                           </a:solidFill>
@@ -6379,6 +6273,11 @@
                     </a:lnB>
                   </a:tcPr>
                 </a:tc>
+                <a:extLst>
+                  <a:ext uri="{0D108BD9-81ED-4DB2-BD59-A6C34878D82A}">
+                    <a16:rowId xmlns:a16="http://schemas.microsoft.com/office/drawing/2014/main" val="10003"/>
+                  </a:ext>
+                </a:extLst>
               </a:tr>
               <a:tr h="0">
                 <a:tc>
@@ -6392,7 +6291,7 @@
                         </a:lnSpc>
                       </a:pPr>
                       <a:r>
-                        <a:rPr lang="en-US" sz="1200" b="0" kern="1200" smtClean="0">
+                        <a:rPr lang="en-US" sz="1200" b="0" kern="1200">
                           <a:solidFill>
                             <a:schemeClr val="dk1"/>
                           </a:solidFill>
@@ -6411,7 +6310,7 @@
                         </a:lnSpc>
                       </a:pPr>
                       <a:r>
-                        <a:rPr lang="en-US" sz="1200" b="0" kern="1200" smtClean="0">
+                        <a:rPr lang="en-US" sz="1200" b="0" kern="1200">
                           <a:solidFill>
                             <a:schemeClr val="dk1"/>
                           </a:solidFill>
@@ -6422,15 +6321,6 @@
                         </a:rPr>
                         <a:t>Maintainability</a:t>
                       </a:r>
-                      <a:endParaRPr lang="en-US" sz="1200" b="0" kern="1200">
-                        <a:solidFill>
-                          <a:schemeClr val="dk1"/>
-                        </a:solidFill>
-                        <a:effectLst/>
-                        <a:latin typeface="+mn-lt"/>
-                        <a:ea typeface="+mn-ea"/>
-                        <a:cs typeface="Arial" panose="020B0604020202020204" pitchFamily="34" charset="0"/>
-                      </a:endParaRPr>
                     </a:p>
                   </a:txBody>
                   <a:tcPr marL="106700" marR="106700" marT="53350" marB="53350" anchor="ctr">
@@ -6489,7 +6379,7 @@
                         </a:spcAft>
                       </a:pPr>
                       <a:r>
-                        <a:rPr lang="en-US" sz="1300" b="1" smtClean="0">
+                        <a:rPr lang="en-US" sz="1300" b="1">
                           <a:solidFill>
                             <a:schemeClr val="accent2"/>
                           </a:solidFill>
@@ -6510,7 +6400,7 @@
                         </a:spcAft>
                       </a:pPr>
                       <a:r>
-                        <a:rPr lang="en-US" sz="1300" b="1" kern="1200" baseline="0" smtClean="0">
+                        <a:rPr lang="en-US" sz="1300" b="1" kern="1200" baseline="0">
                           <a:solidFill>
                             <a:schemeClr val="dk1"/>
                           </a:solidFill>
@@ -6522,7 +6412,7 @@
                         <a:t>01 additional component is modified </a:t>
                       </a:r>
                       <a:r>
-                        <a:rPr lang="en-US" sz="1300" b="0" kern="1200" baseline="0" smtClean="0">
+                        <a:rPr lang="en-US" sz="1300" b="0" kern="1200" baseline="0">
                           <a:solidFill>
                             <a:schemeClr val="dk1"/>
                           </a:solidFill>
@@ -6533,15 +6423,6 @@
                         </a:rPr>
                         <a:t>(OnBoardClient - implements UDS socket server and priority control) </a:t>
                       </a:r>
-                      <a:endParaRPr lang="en-US" sz="1300" b="0" kern="1200" baseline="0">
-                        <a:solidFill>
-                          <a:schemeClr val="dk1"/>
-                        </a:solidFill>
-                        <a:effectLst/>
-                        <a:latin typeface="+mn-lt"/>
-                        <a:ea typeface="+mn-ea"/>
-                        <a:cs typeface="Arial" panose="020B0604020202020204" pitchFamily="34" charset="0"/>
-                      </a:endParaRPr>
                     </a:p>
                   </a:txBody>
                   <a:tcPr marL="25400" marR="25400" marT="0" marB="0">
@@ -6606,14 +6487,14 @@
                         <a:defRPr/>
                       </a:pPr>
                       <a:r>
-                        <a:rPr lang="en-US" sz="1300" b="1" smtClean="0">
+                        <a:rPr lang="en-US" sz="1300" b="1">
                           <a:solidFill>
                             <a:srgbClr val="FF0000"/>
                           </a:solidFill>
                         </a:rPr>
                         <a:t>Low</a:t>
                       </a:r>
-                      <a:endParaRPr lang="en-US" sz="1300" b="0" kern="1200" baseline="0" smtClean="0">
+                      <a:endParaRPr lang="en-US" sz="1300" b="0" kern="1200" baseline="0">
                         <a:solidFill>
                           <a:schemeClr val="dk1"/>
                         </a:solidFill>
@@ -6642,7 +6523,7 @@
                         <a:defRPr/>
                       </a:pPr>
                       <a:r>
-                        <a:rPr lang="en-US" sz="1300" b="1" kern="1200" baseline="0" smtClean="0">
+                        <a:rPr lang="en-US" sz="1300" b="1" kern="1200" baseline="0">
                           <a:solidFill>
                             <a:schemeClr val="dk1"/>
                           </a:solidFill>
@@ -6654,7 +6535,7 @@
                         <a:t>10 EP modules</a:t>
                       </a:r>
                       <a:r>
-                        <a:rPr lang="en-US" sz="1300" b="0" kern="1200" baseline="0" smtClean="0">
+                        <a:rPr lang="en-US" sz="1300" b="0" kern="1200" baseline="0">
                           <a:solidFill>
                             <a:schemeClr val="dk1"/>
                           </a:solidFill>
@@ -6717,14 +6598,14 @@
                         </a:lnSpc>
                       </a:pPr>
                       <a:r>
-                        <a:rPr lang="en-US" sz="1300" b="1" smtClean="0">
+                        <a:rPr lang="en-US" sz="1300" b="1">
                           <a:solidFill>
                             <a:srgbClr val="00B050"/>
                           </a:solidFill>
                         </a:rPr>
                         <a:t>High</a:t>
                       </a:r>
-                      <a:endParaRPr lang="en-US" sz="1300" b="0" smtClean="0">
+                      <a:endParaRPr lang="en-US" sz="1300" b="0">
                         <a:latin typeface="+mn-lt"/>
                         <a:cs typeface="Arial" panose="020B0604020202020204" pitchFamily="34" charset="0"/>
                       </a:endParaRPr>
@@ -6736,14 +6617,14 @@
                         </a:lnSpc>
                       </a:pPr>
                       <a:r>
-                        <a:rPr lang="en-US" sz="1300" b="1" baseline="0" smtClean="0">
+                        <a:rPr lang="en-US" sz="1300" b="1" baseline="0">
                           <a:latin typeface="+mn-lt"/>
                           <a:cs typeface="Arial" panose="020B0604020202020204" pitchFamily="34" charset="0"/>
                         </a:rPr>
                         <a:t>No changes </a:t>
                       </a:r>
                       <a:r>
-                        <a:rPr lang="en-US" sz="1300" b="0" baseline="0" smtClean="0">
+                        <a:rPr lang="en-US" sz="1300" b="0" baseline="0">
                           <a:latin typeface="+mn-lt"/>
                           <a:cs typeface="Arial" panose="020B0604020202020204" pitchFamily="34" charset="0"/>
                         </a:rPr>
@@ -6790,6 +6671,11 @@
                     </a:lnB>
                   </a:tcPr>
                 </a:tc>
+                <a:extLst>
+                  <a:ext uri="{0D108BD9-81ED-4DB2-BD59-A6C34878D82A}">
+                    <a16:rowId xmlns:a16="http://schemas.microsoft.com/office/drawing/2014/main" val="10004"/>
+                  </a:ext>
+                </a:extLst>
               </a:tr>
               <a:tr h="0">
                 <a:tc>
@@ -6803,7 +6689,7 @@
                         </a:lnSpc>
                       </a:pPr>
                       <a:r>
-                        <a:rPr lang="en-US" sz="1200" b="0" kern="1200" smtClean="0">
+                        <a:rPr lang="en-US" sz="1200" b="0" kern="1200">
                           <a:solidFill>
                             <a:schemeClr val="dk1"/>
                           </a:solidFill>
@@ -6822,7 +6708,7 @@
                         </a:lnSpc>
                       </a:pPr>
                       <a:r>
-                        <a:rPr lang="en-US" sz="1200" b="0" kern="1200" smtClean="0">
+                        <a:rPr lang="en-US" sz="1200" b="0" kern="1200">
                           <a:solidFill>
                             <a:schemeClr val="dk1"/>
                           </a:solidFill>
@@ -6833,15 +6719,6 @@
                         </a:rPr>
                         <a:t>Availability</a:t>
                       </a:r>
-                      <a:endParaRPr lang="en-US" sz="1200" b="0" kern="1200">
-                        <a:solidFill>
-                          <a:schemeClr val="dk1"/>
-                        </a:solidFill>
-                        <a:effectLst/>
-                        <a:latin typeface="+mn-lt"/>
-                        <a:ea typeface="+mn-ea"/>
-                        <a:cs typeface="Arial" panose="020B0604020202020204" pitchFamily="34" charset="0"/>
-                      </a:endParaRPr>
                     </a:p>
                   </a:txBody>
                   <a:tcPr marL="106700" marR="106700" marT="53350" marB="53350" anchor="ctr">
@@ -6900,7 +6777,7 @@
                         </a:spcAft>
                       </a:pPr>
                       <a:r>
-                        <a:rPr lang="en-US" sz="1300" b="1" smtClean="0">
+                        <a:rPr lang="en-US" sz="1300" b="1">
                           <a:solidFill>
                             <a:srgbClr val="00B050"/>
                           </a:solidFill>
@@ -6927,7 +6804,7 @@
                         <a:defRPr/>
                       </a:pPr>
                       <a:r>
-                        <a:rPr lang="en-US" sz="1300" b="0" kern="1200" baseline="0" smtClean="0">
+                        <a:rPr lang="en-US" sz="1300" b="0" kern="1200" baseline="0">
                           <a:solidFill>
                             <a:schemeClr val="dk1"/>
                           </a:solidFill>
@@ -6938,15 +6815,6 @@
                         </a:rPr>
                         <a:t>OEM center and MM ECU communication flows run in separate processes. Failure of one flow does not impact the other.</a:t>
                       </a:r>
-                      <a:endParaRPr lang="en-US" sz="1300" b="0" kern="1200" baseline="0">
-                        <a:solidFill>
-                          <a:schemeClr val="dk1"/>
-                        </a:solidFill>
-                        <a:effectLst/>
-                        <a:latin typeface="+mn-lt"/>
-                        <a:ea typeface="+mn-ea"/>
-                        <a:cs typeface="Arial" panose="020B0604020202020204" pitchFamily="34" charset="0"/>
-                      </a:endParaRPr>
                     </a:p>
                   </a:txBody>
                   <a:tcPr marL="25400" marR="25400" marT="0" marB="0">
@@ -7011,7 +6879,7 @@
                         <a:defRPr/>
                       </a:pPr>
                       <a:r>
-                        <a:rPr lang="en-US" sz="1300" b="1" smtClean="0">
+                        <a:rPr lang="en-US" sz="1300" b="1">
                           <a:solidFill>
                             <a:srgbClr val="FF0000"/>
                           </a:solidFill>
@@ -7038,7 +6906,7 @@
                         <a:defRPr/>
                       </a:pPr>
                       <a:r>
-                        <a:rPr lang="en-US" sz="1300" b="0" kern="1200" baseline="0" smtClean="0">
+                        <a:rPr lang="en-US" sz="1300" b="0" kern="1200" baseline="0">
                           <a:solidFill>
                             <a:schemeClr val="tx1"/>
                           </a:solidFill>
@@ -7050,7 +6918,7 @@
                         <a:t>OEM center and MM ECU </a:t>
                       </a:r>
                       <a:r>
-                        <a:rPr lang="en-US" sz="1300" b="0" kern="1200" baseline="0" smtClean="0">
+                        <a:rPr lang="en-US" sz="1300" b="0" kern="1200" baseline="0">
                           <a:solidFill>
                             <a:schemeClr val="dk1"/>
                           </a:solidFill>
@@ -7062,7 +6930,7 @@
                         <a:t>communication </a:t>
                       </a:r>
                       <a:r>
-                        <a:rPr lang="en-US" sz="1300" b="0" kern="1200" baseline="0" smtClean="0">
+                        <a:rPr lang="en-US" sz="1300" b="0" kern="1200" baseline="0">
                           <a:solidFill>
                             <a:schemeClr val="tx1"/>
                           </a:solidFill>
@@ -7125,7 +6993,7 @@
                         </a:lnSpc>
                       </a:pPr>
                       <a:r>
-                        <a:rPr lang="en-US" sz="1300" b="1" smtClean="0">
+                        <a:rPr lang="en-US" sz="1300" b="1">
                           <a:solidFill>
                             <a:srgbClr val="FF0000"/>
                           </a:solidFill>
@@ -7152,7 +7020,7 @@
                         <a:defRPr/>
                       </a:pPr>
                       <a:r>
-                        <a:rPr lang="en-US" sz="1300" b="0" kern="1200" baseline="0" smtClean="0">
+                        <a:rPr lang="en-US" sz="1300" b="0" kern="1200" baseline="0">
                           <a:solidFill>
                             <a:schemeClr val="tx1"/>
                           </a:solidFill>
@@ -7164,7 +7032,7 @@
                         <a:t>OEM center and MM ECU </a:t>
                       </a:r>
                       <a:r>
-                        <a:rPr lang="en-US" sz="1300" b="0" kern="1200" baseline="0" smtClean="0">
+                        <a:rPr lang="en-US" sz="1300" b="0" kern="1200" baseline="0">
                           <a:solidFill>
                             <a:schemeClr val="dk1"/>
                           </a:solidFill>
@@ -7176,7 +7044,7 @@
                         <a:t>communication </a:t>
                       </a:r>
                       <a:r>
-                        <a:rPr lang="en-US" sz="1300" b="0" kern="1200" baseline="0" smtClean="0">
+                        <a:rPr lang="en-US" sz="1300" b="0" kern="1200" baseline="0">
                           <a:solidFill>
                             <a:schemeClr val="tx1"/>
                           </a:solidFill>
@@ -7235,6 +7103,11 @@
                     </a:lnB>
                   </a:tcPr>
                 </a:tc>
+                <a:extLst>
+                  <a:ext uri="{0D108BD9-81ED-4DB2-BD59-A6C34878D82A}">
+                    <a16:rowId xmlns:a16="http://schemas.microsoft.com/office/drawing/2014/main" val="10005"/>
+                  </a:ext>
+                </a:extLst>
               </a:tr>
               <a:tr h="0">
                 <a:tc>
@@ -7248,7 +7121,7 @@
                         </a:lnSpc>
                       </a:pPr>
                       <a:r>
-                        <a:rPr lang="en-US" sz="1300" b="1" kern="1200" smtClean="0">
+                        <a:rPr lang="en-US" sz="1300" b="1" kern="1200">
                           <a:solidFill>
                             <a:schemeClr val="dk1"/>
                           </a:solidFill>
@@ -7259,15 +7132,6 @@
                         </a:rPr>
                         <a:t>Decision</a:t>
                       </a:r>
-                      <a:endParaRPr lang="en-US" sz="1300" b="1" kern="1200">
-                        <a:solidFill>
-                          <a:schemeClr val="dk1"/>
-                        </a:solidFill>
-                        <a:effectLst/>
-                        <a:latin typeface="+mn-lt"/>
-                        <a:ea typeface="+mn-ea"/>
-                        <a:cs typeface="Arial" panose="020B0604020202020204" pitchFamily="34" charset="0"/>
-                      </a:endParaRPr>
                     </a:p>
                   </a:txBody>
                   <a:tcPr marL="106700" marR="106700" marT="53350" marB="53350" anchor="ctr">
@@ -7326,7 +7190,7 @@
                         </a:spcAft>
                       </a:pPr>
                       <a:r>
-                        <a:rPr lang="en-US" sz="1300" b="0" kern="1200" baseline="0" smtClean="0">
+                        <a:rPr lang="en-US" sz="1300" b="0" kern="1200" baseline="0">
                           <a:solidFill>
                             <a:schemeClr val="dk1"/>
                           </a:solidFill>
@@ -7337,15 +7201,6 @@
                         </a:rPr>
                         <a:t>Rejected</a:t>
                       </a:r>
-                      <a:endParaRPr lang="en-US" sz="1300" b="0" kern="1200" baseline="0">
-                        <a:solidFill>
-                          <a:schemeClr val="dk1"/>
-                        </a:solidFill>
-                        <a:effectLst/>
-                        <a:latin typeface="+mn-lt"/>
-                        <a:ea typeface="+mn-ea"/>
-                        <a:cs typeface="Arial" panose="020B0604020202020204" pitchFamily="34" charset="0"/>
-                      </a:endParaRPr>
                     </a:p>
                   </a:txBody>
                   <a:tcPr marL="25400" marR="25400" marT="0" marB="0" anchor="ctr">
@@ -7410,7 +7265,7 @@
                         <a:defRPr/>
                       </a:pPr>
                       <a:r>
-                        <a:rPr lang="en-US" sz="1300" b="0" kern="1200" baseline="0" smtClean="0">
+                        <a:rPr lang="en-US" sz="1300" b="0" kern="1200" baseline="0">
                           <a:solidFill>
                             <a:schemeClr val="dk1"/>
                           </a:solidFill>
@@ -7473,16 +7328,12 @@
                         </a:lnSpc>
                       </a:pPr>
                       <a:r>
-                        <a:rPr lang="en-US" sz="1300" b="0" smtClean="0">
+                        <a:rPr lang="en-US" sz="1300" b="0">
                           <a:latin typeface="+mn-lt"/>
                           <a:cs typeface="Arial" panose="020B0604020202020204" pitchFamily="34" charset="0"/>
                         </a:rPr>
                         <a:t>Selected</a:t>
                       </a:r>
-                      <a:endParaRPr lang="en-US" sz="1300" b="0">
-                        <a:latin typeface="+mn-lt"/>
-                        <a:cs typeface="Arial" panose="020B0604020202020204" pitchFamily="34" charset="0"/>
-                      </a:endParaRPr>
                     </a:p>
                   </a:txBody>
                   <a:tcPr marL="106700" marR="106700" marT="53350" marB="53350" anchor="ctr">
@@ -7524,6 +7375,11 @@
                     </a:lnB>
                   </a:tcPr>
                 </a:tc>
+                <a:extLst>
+                  <a:ext uri="{0D108BD9-81ED-4DB2-BD59-A6C34878D82A}">
+                    <a16:rowId xmlns:a16="http://schemas.microsoft.com/office/drawing/2014/main" val="10006"/>
+                  </a:ext>
+                </a:extLst>
               </a:tr>
             </a:tbl>
           </a:graphicData>
@@ -7557,7 +7413,7 @@
           <a:lstStyle/>
           <a:p>
             <a:r>
-              <a:rPr lang="en-US" sz="1400" b="1" smtClean="0">
+              <a:rPr lang="en-US" sz="1400" b="1">
                 <a:solidFill>
                   <a:srgbClr val="00B050"/>
                 </a:solidFill>
@@ -7565,13 +7421,13 @@
               <a:t>High</a:t>
             </a:r>
             <a:r>
-              <a:rPr lang="en-US" sz="1400" smtClean="0"/>
+              <a:rPr lang="en-US" sz="1400"/>
               <a:t>: Fully satisfy</a:t>
             </a:r>
           </a:p>
           <a:p>
             <a:r>
-              <a:rPr lang="en-US" sz="1400" b="1" smtClean="0">
+              <a:rPr lang="en-US" sz="1400" b="1">
                 <a:solidFill>
                   <a:schemeClr val="accent2"/>
                 </a:solidFill>
@@ -7579,13 +7435,13 @@
               <a:t>Medium</a:t>
             </a:r>
             <a:r>
-              <a:rPr lang="en-US" sz="1400" smtClean="0"/>
+              <a:rPr lang="en-US" sz="1400"/>
               <a:t>: Partially satisfy</a:t>
             </a:r>
           </a:p>
           <a:p>
             <a:r>
-              <a:rPr lang="en-US" sz="1400" b="1" smtClean="0">
+              <a:rPr lang="en-US" sz="1400" b="1">
                 <a:solidFill>
                   <a:srgbClr val="FF0000"/>
                 </a:solidFill>
@@ -7593,10 +7449,9 @@
               <a:t>Low</a:t>
             </a:r>
             <a:r>
-              <a:rPr lang="en-US" sz="1400" smtClean="0"/>
+              <a:rPr lang="en-US" sz="1400"/>
               <a:t>: Not satisfy</a:t>
             </a:r>
-            <a:endParaRPr lang="en-US" sz="1400"/>
           </a:p>
         </p:txBody>
       </p:sp>
@@ -7605,7 +7460,7 @@
           <p:cNvPr id="9" name="Picture 2" descr="체크 표시 클립 아트. 무료 다운로드. | Creazilla">
             <a:extLst>
               <a:ext uri="{FF2B5EF4-FFF2-40B4-BE49-F238E27FC236}">
-                <a16:creationId xmlns="" xmlns:a16="http://schemas.microsoft.com/office/drawing/2014/main" id="{07DB846E-8DD2-9BB2-88FF-8A7E0BD6CA84}"/>
+                <a16:creationId xmlns:a16="http://schemas.microsoft.com/office/drawing/2014/main" id="{07DB846E-8DD2-9BB2-88FF-8A7E0BD6CA84}"/>
               </a:ext>
             </a:extLst>
           </p:cNvPr>
@@ -7657,13 +7512,6 @@
   <p:clrMapOvr>
     <a:masterClrMapping/>
   </p:clrMapOvr>
-  <p:timing>
-    <p:tnLst>
-      <p:par>
-        <p:cTn id="1" dur="indefinite" restart="never" nodeType="tmRoot"/>
-      </p:par>
-    </p:tnLst>
-  </p:timing>
 </p:sld>
 </file>
 
@@ -7700,10 +7548,9 @@
           <a:lstStyle/>
           <a:p>
             <a:r>
-              <a:rPr lang="en-US" smtClean="0"/>
+              <a:rPr lang="en-US"/>
               <a:t>Implementation and Verification</a:t>
             </a:r>
-            <a:endParaRPr lang="en-US"/>
           </a:p>
         </p:txBody>
       </p:sp>
@@ -7764,10 +7611,9 @@
               <a:buChar char="•"/>
             </a:pPr>
             <a:r>
-              <a:rPr lang="en-US" smtClean="0"/>
+              <a:rPr lang="en-US"/>
               <a:t>RemoteDiagProxy communication with EP-side components (Telephony, Mqtt, …)</a:t>
             </a:r>
-            <a:endParaRPr lang="en-US"/>
           </a:p>
         </p:txBody>
       </p:sp>
@@ -7811,13 +7657,6 @@
   <p:clrMapOvr>
     <a:masterClrMapping/>
   </p:clrMapOvr>
-  <p:timing>
-    <p:tnLst>
-      <p:par>
-        <p:cTn id="1" dur="indefinite" restart="never" nodeType="tmRoot"/>
-      </p:par>
-    </p:tnLst>
-  </p:timing>
 </p:sld>
 </file>
 
@@ -7854,10 +7693,9 @@
           <a:lstStyle/>
           <a:p>
             <a:r>
-              <a:rPr lang="en-US" smtClean="0"/>
+              <a:rPr lang="en-US"/>
               <a:t>Implementation and Verification</a:t>
             </a:r>
-            <a:endParaRPr lang="en-US"/>
           </a:p>
         </p:txBody>
       </p:sp>
@@ -7888,10 +7726,9 @@
               <a:buChar char="•"/>
             </a:pPr>
             <a:r>
-              <a:rPr lang="en-US" smtClean="0"/>
+              <a:rPr lang="en-US"/>
               <a:t>RemoteDiagProxy and RemoteDiag communication</a:t>
             </a:r>
-            <a:endParaRPr lang="en-US"/>
           </a:p>
         </p:txBody>
       </p:sp>
@@ -7935,13 +7772,6 @@
   <p:clrMapOvr>
     <a:masterClrMapping/>
   </p:clrMapOvr>
-  <p:timing>
-    <p:tnLst>
-      <p:par>
-        <p:cTn id="1" dur="indefinite" restart="never" nodeType="tmRoot"/>
-      </p:par>
-    </p:tnLst>
-  </p:timing>
 </p:sld>
 </file>
 
@@ -8032,566 +7862,10 @@
   <p:clrMapOvr>
     <a:masterClrMapping/>
   </p:clrMapOvr>
-  <p:timing>
-    <p:tnLst>
-      <p:par>
-        <p:cTn id="1" dur="indefinite" restart="never" nodeType="tmRoot"/>
-      </p:par>
-    </p:tnLst>
-  </p:timing>
 </p:sld>
 </file>
 
 <file path=ppt/slides/slide14.xml><?xml version="1.0" encoding="utf-8"?>
-<p:sld xmlns:a="http://schemas.openxmlformats.org/drawingml/2006/main" xmlns:r="http://schemas.openxmlformats.org/officeDocument/2006/relationships" xmlns:p="http://schemas.openxmlformats.org/presentationml/2006/main">
-  <p:cSld>
-    <p:spTree>
-      <p:nvGrpSpPr>
-        <p:cNvPr id="1" name=""/>
-        <p:cNvGrpSpPr/>
-        <p:nvPr/>
-      </p:nvGrpSpPr>
-      <p:grpSpPr>
-        <a:xfrm>
-          <a:off x="0" y="0"/>
-          <a:ext cx="0" cy="0"/>
-          <a:chOff x="0" y="0"/>
-          <a:chExt cx="0" cy="0"/>
-        </a:xfrm>
-      </p:grpSpPr>
-      <p:sp>
-        <p:nvSpPr>
-          <p:cNvPr id="2" name="Title 1"/>
-          <p:cNvSpPr>
-            <a:spLocks noGrp="1"/>
-          </p:cNvSpPr>
-          <p:nvPr>
-            <p:ph type="title"/>
-          </p:nvPr>
-        </p:nvSpPr>
-        <p:spPr/>
-        <p:txBody>
-          <a:bodyPr>
-            <a:normAutofit/>
-          </a:bodyPr>
-          <a:lstStyle/>
-          <a:p>
-            <a:r>
-              <a:rPr lang="en-US" b="1"/>
-              <a:t>Alt-C: Compromise scenario</a:t>
-            </a:r>
-            <a:endParaRPr lang="en-US"/>
-          </a:p>
-        </p:txBody>
-      </p:sp>
-      <p:grpSp>
-        <p:nvGrpSpPr>
-          <p:cNvPr id="9" name="Group 8"/>
-          <p:cNvGrpSpPr/>
-          <p:nvPr/>
-        </p:nvGrpSpPr>
-        <p:grpSpPr>
-          <a:xfrm>
-            <a:off x="2111827" y="862011"/>
-            <a:ext cx="6662058" cy="5734051"/>
-            <a:chOff x="3298371" y="862011"/>
-            <a:chExt cx="6662058" cy="5734051"/>
-          </a:xfrm>
-        </p:grpSpPr>
-        <p:pic>
-          <p:nvPicPr>
-            <p:cNvPr id="7" name="Picture 6"/>
-            <p:cNvPicPr>
-              <a:picLocks noChangeAspect="1"/>
-            </p:cNvPicPr>
-            <p:nvPr/>
-          </p:nvPicPr>
-          <p:blipFill>
-            <a:blip r:embed="rId2">
-              <a:extLst>
-                <a:ext uri="{28A0092B-C50C-407E-A947-70E740481C1C}">
-                  <a14:useLocalDpi xmlns:a14="http://schemas.microsoft.com/office/drawing/2010/main" val="0"/>
-                </a:ext>
-              </a:extLst>
-            </a:blip>
-            <a:stretch>
-              <a:fillRect/>
-            </a:stretch>
-          </p:blipFill>
-          <p:spPr>
-            <a:xfrm>
-              <a:off x="3298371" y="862011"/>
-              <a:ext cx="6527333" cy="5734051"/>
-            </a:xfrm>
-            <a:prstGeom prst="rect">
-              <a:avLst/>
-            </a:prstGeom>
-          </p:spPr>
-        </p:pic>
-        <p:sp>
-          <p:nvSpPr>
-            <p:cNvPr id="6" name="Rectangle 5"/>
-            <p:cNvSpPr/>
-            <p:nvPr/>
-          </p:nvSpPr>
-          <p:spPr>
-            <a:xfrm>
-              <a:off x="5943600" y="3169364"/>
-              <a:ext cx="4016829" cy="2240836"/>
-            </a:xfrm>
-            <a:prstGeom prst="rect">
-              <a:avLst/>
-            </a:prstGeom>
-            <a:noFill/>
-            <a:ln w="19050">
-              <a:solidFill>
-                <a:srgbClr val="7030A0"/>
-              </a:solidFill>
-              <a:prstDash val="dash"/>
-            </a:ln>
-          </p:spPr>
-          <p:style>
-            <a:lnRef idx="2">
-              <a:schemeClr val="accent1">
-                <a:shade val="50000"/>
-              </a:schemeClr>
-            </a:lnRef>
-            <a:fillRef idx="1">
-              <a:schemeClr val="accent1"/>
-            </a:fillRef>
-            <a:effectRef idx="0">
-              <a:schemeClr val="accent1"/>
-            </a:effectRef>
-            <a:fontRef idx="minor">
-              <a:schemeClr val="lt1"/>
-            </a:fontRef>
-          </p:style>
-          <p:txBody>
-            <a:bodyPr rtlCol="0" anchor="ctr"/>
-            <a:lstStyle/>
-            <a:p>
-              <a:pPr algn="ctr"/>
-              <a:endParaRPr lang="en-US">
-                <a:solidFill>
-                  <a:srgbClr val="FF0000"/>
-                </a:solidFill>
-              </a:endParaRPr>
-            </a:p>
-          </p:txBody>
-        </p:sp>
-      </p:grpSp>
-      <p:sp>
-        <p:nvSpPr>
-          <p:cNvPr id="8" name="Rectangle 7"/>
-          <p:cNvSpPr/>
-          <p:nvPr/>
-        </p:nvSpPr>
-        <p:spPr>
-          <a:xfrm>
-            <a:off x="9155628" y="4034373"/>
-            <a:ext cx="2017953" cy="510818"/>
-          </a:xfrm>
-          <a:prstGeom prst="rect">
-            <a:avLst/>
-          </a:prstGeom>
-          <a:noFill/>
-          <a:ln w="19050">
-            <a:solidFill>
-              <a:srgbClr val="7030A0"/>
-            </a:solidFill>
-          </a:ln>
-        </p:spPr>
-        <p:style>
-          <a:lnRef idx="2">
-            <a:schemeClr val="accent1">
-              <a:shade val="50000"/>
-            </a:schemeClr>
-          </a:lnRef>
-          <a:fillRef idx="1">
-            <a:schemeClr val="accent1"/>
-          </a:fillRef>
-          <a:effectRef idx="0">
-            <a:schemeClr val="accent1"/>
-          </a:effectRef>
-          <a:fontRef idx="minor">
-            <a:schemeClr val="lt1"/>
-          </a:fontRef>
-        </p:style>
-        <p:txBody>
-          <a:bodyPr rtlCol="0" anchor="ctr"/>
-          <a:lstStyle/>
-          <a:p>
-            <a:pPr algn="ctr"/>
-            <a:r>
-              <a:rPr lang="en-US" sz="1600">
-                <a:solidFill>
-                  <a:srgbClr val="7030A0"/>
-                </a:solidFill>
-              </a:rPr>
-              <a:t>Tactic: Validate Input</a:t>
-            </a:r>
-          </a:p>
-        </p:txBody>
-      </p:sp>
-      <p:cxnSp>
-        <p:nvCxnSpPr>
-          <p:cNvPr id="11" name="Straight Arrow Connector 10"/>
-          <p:cNvCxnSpPr>
-            <a:endCxn id="8" idx="1"/>
-          </p:cNvCxnSpPr>
-          <p:nvPr/>
-        </p:nvCxnSpPr>
-        <p:spPr>
-          <a:xfrm>
-            <a:off x="8773885" y="4289782"/>
-            <a:ext cx="381743" cy="0"/>
-          </a:xfrm>
-          <a:prstGeom prst="straightConnector1">
-            <a:avLst/>
-          </a:prstGeom>
-          <a:ln w="28575">
-            <a:solidFill>
-              <a:srgbClr val="7030A0"/>
-            </a:solidFill>
-            <a:tailEnd type="triangle"/>
-          </a:ln>
-        </p:spPr>
-        <p:style>
-          <a:lnRef idx="1">
-            <a:schemeClr val="accent1"/>
-          </a:lnRef>
-          <a:fillRef idx="0">
-            <a:schemeClr val="accent1"/>
-          </a:fillRef>
-          <a:effectRef idx="0">
-            <a:schemeClr val="accent1"/>
-          </a:effectRef>
-          <a:fontRef idx="minor">
-            <a:schemeClr val="tx1"/>
-          </a:fontRef>
-        </p:style>
-      </p:cxnSp>
-      <p:sp>
-        <p:nvSpPr>
-          <p:cNvPr id="12" name="Rectangle 11"/>
-          <p:cNvSpPr/>
-          <p:nvPr/>
-        </p:nvSpPr>
-        <p:spPr>
-          <a:xfrm>
-            <a:off x="3156857" y="780999"/>
-            <a:ext cx="2971800" cy="5946371"/>
-          </a:xfrm>
-          <a:prstGeom prst="rect">
-            <a:avLst/>
-          </a:prstGeom>
-          <a:noFill/>
-          <a:ln w="19050">
-            <a:solidFill>
-              <a:schemeClr val="accent1">
-                <a:lumMod val="75000"/>
-              </a:schemeClr>
-            </a:solidFill>
-            <a:prstDash val="dash"/>
-          </a:ln>
-        </p:spPr>
-        <p:style>
-          <a:lnRef idx="2">
-            <a:schemeClr val="accent1">
-              <a:shade val="50000"/>
-            </a:schemeClr>
-          </a:lnRef>
-          <a:fillRef idx="1">
-            <a:schemeClr val="accent1"/>
-          </a:fillRef>
-          <a:effectRef idx="0">
-            <a:schemeClr val="accent1"/>
-          </a:effectRef>
-          <a:fontRef idx="minor">
-            <a:schemeClr val="lt1"/>
-          </a:fontRef>
-        </p:style>
-        <p:txBody>
-          <a:bodyPr rtlCol="0" anchor="ctr"/>
-          <a:lstStyle/>
-          <a:p>
-            <a:pPr algn="ctr"/>
-            <a:endParaRPr lang="en-US">
-              <a:solidFill>
-                <a:srgbClr val="FF0000"/>
-              </a:solidFill>
-            </a:endParaRPr>
-          </a:p>
-        </p:txBody>
-      </p:sp>
-      <p:sp>
-        <p:nvSpPr>
-          <p:cNvPr id="13" name="Rectangle 12"/>
-          <p:cNvSpPr/>
-          <p:nvPr/>
-        </p:nvSpPr>
-        <p:spPr>
-          <a:xfrm>
-            <a:off x="8834124" y="6216552"/>
-            <a:ext cx="3207148" cy="510818"/>
-          </a:xfrm>
-          <a:prstGeom prst="rect">
-            <a:avLst/>
-          </a:prstGeom>
-          <a:noFill/>
-          <a:ln w="19050">
-            <a:solidFill>
-              <a:schemeClr val="accent1">
-                <a:lumMod val="75000"/>
-              </a:schemeClr>
-            </a:solidFill>
-          </a:ln>
-        </p:spPr>
-        <p:style>
-          <a:lnRef idx="2">
-            <a:schemeClr val="accent1">
-              <a:shade val="50000"/>
-            </a:schemeClr>
-          </a:lnRef>
-          <a:fillRef idx="1">
-            <a:schemeClr val="accent1"/>
-          </a:fillRef>
-          <a:effectRef idx="0">
-            <a:schemeClr val="accent1"/>
-          </a:effectRef>
-          <a:fontRef idx="minor">
-            <a:schemeClr val="lt1"/>
-          </a:fontRef>
-        </p:style>
-        <p:txBody>
-          <a:bodyPr rtlCol="0" anchor="ctr"/>
-          <a:lstStyle/>
-          <a:p>
-            <a:pPr algn="ctr"/>
-            <a:r>
-              <a:rPr lang="en-US" sz="1600">
-                <a:solidFill>
-                  <a:schemeClr val="accent1">
-                    <a:lumMod val="75000"/>
-                  </a:schemeClr>
-                </a:solidFill>
-              </a:rPr>
-              <a:t>Tactic: Separate Entities/Isolation</a:t>
-            </a:r>
-          </a:p>
-        </p:txBody>
-      </p:sp>
-      <p:cxnSp>
-        <p:nvCxnSpPr>
-          <p:cNvPr id="14" name="Straight Arrow Connector 13"/>
-          <p:cNvCxnSpPr>
-            <a:endCxn id="13" idx="1"/>
-          </p:cNvCxnSpPr>
-          <p:nvPr/>
-        </p:nvCxnSpPr>
-        <p:spPr>
-          <a:xfrm>
-            <a:off x="6128657" y="6471961"/>
-            <a:ext cx="2705467" cy="0"/>
-          </a:xfrm>
-          <a:prstGeom prst="straightConnector1">
-            <a:avLst/>
-          </a:prstGeom>
-          <a:ln w="28575">
-            <a:solidFill>
-              <a:schemeClr val="accent1">
-                <a:lumMod val="75000"/>
-              </a:schemeClr>
-            </a:solidFill>
-            <a:tailEnd type="triangle"/>
-          </a:ln>
-        </p:spPr>
-        <p:style>
-          <a:lnRef idx="1">
-            <a:schemeClr val="accent1"/>
-          </a:lnRef>
-          <a:fillRef idx="0">
-            <a:schemeClr val="accent1"/>
-          </a:fillRef>
-          <a:effectRef idx="0">
-            <a:schemeClr val="accent1"/>
-          </a:effectRef>
-          <a:fontRef idx="minor">
-            <a:schemeClr val="tx1"/>
-          </a:fontRef>
-        </p:style>
-      </p:cxnSp>
-      <p:sp>
-        <p:nvSpPr>
-          <p:cNvPr id="26" name="Rectangle 25"/>
-          <p:cNvSpPr/>
-          <p:nvPr/>
-        </p:nvSpPr>
-        <p:spPr>
-          <a:xfrm>
-            <a:off x="3298371" y="862011"/>
-            <a:ext cx="1556657" cy="797430"/>
-          </a:xfrm>
-          <a:prstGeom prst="rect">
-            <a:avLst/>
-          </a:prstGeom>
-          <a:noFill/>
-          <a:ln w="19050">
-            <a:solidFill>
-              <a:schemeClr val="accent2">
-                <a:lumMod val="50000"/>
-              </a:schemeClr>
-            </a:solidFill>
-            <a:prstDash val="dash"/>
-          </a:ln>
-        </p:spPr>
-        <p:style>
-          <a:lnRef idx="2">
-            <a:schemeClr val="accent1">
-              <a:shade val="50000"/>
-            </a:schemeClr>
-          </a:lnRef>
-          <a:fillRef idx="1">
-            <a:schemeClr val="accent1"/>
-          </a:fillRef>
-          <a:effectRef idx="0">
-            <a:schemeClr val="accent1"/>
-          </a:effectRef>
-          <a:fontRef idx="minor">
-            <a:schemeClr val="lt1"/>
-          </a:fontRef>
-        </p:style>
-        <p:txBody>
-          <a:bodyPr rtlCol="0" anchor="ctr"/>
-          <a:lstStyle/>
-          <a:p>
-            <a:pPr algn="ctr"/>
-            <a:endParaRPr lang="en-US">
-              <a:solidFill>
-                <a:srgbClr val="FF0000"/>
-              </a:solidFill>
-            </a:endParaRPr>
-          </a:p>
-        </p:txBody>
-      </p:sp>
-      <p:sp>
-        <p:nvSpPr>
-          <p:cNvPr id="27" name="Rectangle 26"/>
-          <p:cNvSpPr/>
-          <p:nvPr/>
-        </p:nvSpPr>
-        <p:spPr>
-          <a:xfrm>
-            <a:off x="7094875" y="351193"/>
-            <a:ext cx="2589315" cy="510818"/>
-          </a:xfrm>
-          <a:prstGeom prst="rect">
-            <a:avLst/>
-          </a:prstGeom>
-          <a:noFill/>
-          <a:ln w="19050">
-            <a:solidFill>
-              <a:schemeClr val="accent2">
-                <a:lumMod val="50000"/>
-              </a:schemeClr>
-            </a:solidFill>
-          </a:ln>
-        </p:spPr>
-        <p:style>
-          <a:lnRef idx="2">
-            <a:schemeClr val="accent1">
-              <a:shade val="50000"/>
-            </a:schemeClr>
-          </a:lnRef>
-          <a:fillRef idx="1">
-            <a:schemeClr val="accent1"/>
-          </a:fillRef>
-          <a:effectRef idx="0">
-            <a:schemeClr val="accent1"/>
-          </a:effectRef>
-          <a:fontRef idx="minor">
-            <a:schemeClr val="lt1"/>
-          </a:fontRef>
-        </p:style>
-        <p:txBody>
-          <a:bodyPr rtlCol="0" anchor="ctr"/>
-          <a:lstStyle/>
-          <a:p>
-            <a:pPr algn="ctr"/>
-            <a:r>
-              <a:rPr lang="en-US" sz="1600">
-                <a:solidFill>
-                  <a:schemeClr val="accent2">
-                    <a:lumMod val="50000"/>
-                  </a:schemeClr>
-                </a:solidFill>
-              </a:rPr>
-              <a:t>Tactic: Use an Intermediary</a:t>
-            </a:r>
-          </a:p>
-        </p:txBody>
-      </p:sp>
-      <p:cxnSp>
-        <p:nvCxnSpPr>
-          <p:cNvPr id="29" name="Straight Arrow Connector 28"/>
-          <p:cNvCxnSpPr/>
-          <p:nvPr/>
-        </p:nvCxnSpPr>
-        <p:spPr>
-          <a:xfrm flipV="1">
-            <a:off x="4855028" y="614263"/>
-            <a:ext cx="2239847" cy="503157"/>
-          </a:xfrm>
-          <a:prstGeom prst="bentConnector3">
-            <a:avLst>
-              <a:gd name="adj1" fmla="val 5774"/>
-            </a:avLst>
-          </a:prstGeom>
-          <a:ln w="28575">
-            <a:solidFill>
-              <a:schemeClr val="accent2">
-                <a:lumMod val="50000"/>
-              </a:schemeClr>
-            </a:solidFill>
-            <a:tailEnd type="triangle"/>
-          </a:ln>
-        </p:spPr>
-        <p:style>
-          <a:lnRef idx="1">
-            <a:schemeClr val="accent1"/>
-          </a:lnRef>
-          <a:fillRef idx="0">
-            <a:schemeClr val="accent1"/>
-          </a:fillRef>
-          <a:effectRef idx="0">
-            <a:schemeClr val="accent1"/>
-          </a:effectRef>
-          <a:fontRef idx="minor">
-            <a:schemeClr val="tx1"/>
-          </a:fontRef>
-        </p:style>
-      </p:cxnSp>
-    </p:spTree>
-    <p:extLst>
-      <p:ext uri="{BB962C8B-B14F-4D97-AF65-F5344CB8AC3E}">
-        <p14:creationId xmlns:p14="http://schemas.microsoft.com/office/powerpoint/2010/main" val="1391207678"/>
-      </p:ext>
-    </p:extLst>
-  </p:cSld>
-  <p:clrMapOvr>
-    <a:masterClrMapping/>
-  </p:clrMapOvr>
-  <p:timing>
-    <p:tnLst>
-      <p:par>
-        <p:cTn id="1" dur="indefinite" restart="never" nodeType="tmRoot"/>
-      </p:par>
-    </p:tnLst>
-  </p:timing>
-</p:sld>
-</file>
-
-<file path=ppt/slides/slide15.xml><?xml version="1.0" encoding="utf-8"?>
 <p:sld xmlns:a="http://schemas.openxmlformats.org/drawingml/2006/main" xmlns:r="http://schemas.openxmlformats.org/officeDocument/2006/relationships" xmlns:p="http://schemas.openxmlformats.org/presentationml/2006/main">
   <p:cSld>
     <p:spTree>
@@ -8669,17 +7943,10 @@
   <p:clrMapOvr>
     <a:masterClrMapping/>
   </p:clrMapOvr>
-  <p:timing>
-    <p:tnLst>
-      <p:par>
-        <p:cTn id="1" dur="indefinite" restart="never" nodeType="tmRoot"/>
-      </p:par>
-    </p:tnLst>
-  </p:timing>
 </p:sld>
 </file>
 
-<file path=ppt/slides/slide16.xml><?xml version="1.0" encoding="utf-8"?>
+<file path=ppt/slides/slide15.xml><?xml version="1.0" encoding="utf-8"?>
 <p:sld xmlns:a="http://schemas.openxmlformats.org/drawingml/2006/main" xmlns:r="http://schemas.openxmlformats.org/officeDocument/2006/relationships" xmlns:p="http://schemas.openxmlformats.org/presentationml/2006/main">
   <p:cSld>
     <p:spTree>
@@ -8701,7 +7968,7 @@
           <p:cNvPr id="2" name="Title 1">
             <a:extLst>
               <a:ext uri="{FF2B5EF4-FFF2-40B4-BE49-F238E27FC236}">
-                <a16:creationId xmlns:a16="http://schemas.microsoft.com/office/drawing/2014/main" xmlns="" id="{65C86E6E-BE59-7A7B-6BE9-16A0A094C3D6}"/>
+                <a16:creationId xmlns:a16="http://schemas.microsoft.com/office/drawing/2014/main" id="{65C86E6E-BE59-7A7B-6BE9-16A0A094C3D6}"/>
               </a:ext>
             </a:extLst>
           </p:cNvPr>
@@ -8729,7 +7996,7 @@
           <p:cNvPr id="7" name="Content Placeholder 6">
             <a:extLst>
               <a:ext uri="{FF2B5EF4-FFF2-40B4-BE49-F238E27FC236}">
-                <a16:creationId xmlns:a16="http://schemas.microsoft.com/office/drawing/2014/main" xmlns="" id="{AD4A4EC6-9BB8-2849-8D75-05C44DE9A384}"/>
+                <a16:creationId xmlns:a16="http://schemas.microsoft.com/office/drawing/2014/main" id="{AD4A4EC6-9BB8-2849-8D75-05C44DE9A384}"/>
               </a:ext>
             </a:extLst>
           </p:cNvPr>
@@ -8761,7 +8028,7 @@
           <p:cNvPr id="9" name="Picture 8">
             <a:extLst>
               <a:ext uri="{FF2B5EF4-FFF2-40B4-BE49-F238E27FC236}">
-                <a16:creationId xmlns:a16="http://schemas.microsoft.com/office/drawing/2014/main" xmlns="" id="{C985C62C-76E5-84A1-DEF1-FC486F2BF179}"/>
+                <a16:creationId xmlns:a16="http://schemas.microsoft.com/office/drawing/2014/main" id="{C985C62C-76E5-84A1-DEF1-FC486F2BF179}"/>
               </a:ext>
             </a:extLst>
           </p:cNvPr>
@@ -8796,13 +8063,102 @@
   <p:clrMapOvr>
     <a:masterClrMapping/>
   </p:clrMapOvr>
-  <p:timing>
-    <p:tnLst>
-      <p:par>
-        <p:cTn id="1" dur="indefinite" restart="never" nodeType="tmRoot"/>
-      </p:par>
-    </p:tnLst>
-  </p:timing>
+</p:sld>
+</file>
+
+<file path=ppt/slides/slide16.xml><?xml version="1.0" encoding="utf-8"?>
+<p:sld xmlns:a="http://schemas.openxmlformats.org/drawingml/2006/main" xmlns:r="http://schemas.openxmlformats.org/officeDocument/2006/relationships" xmlns:p="http://schemas.openxmlformats.org/presentationml/2006/main">
+  <p:cSld>
+    <p:spTree>
+      <p:nvGrpSpPr>
+        <p:cNvPr id="1" name=""/>
+        <p:cNvGrpSpPr/>
+        <p:nvPr/>
+      </p:nvGrpSpPr>
+      <p:grpSpPr>
+        <a:xfrm>
+          <a:off x="0" y="0"/>
+          <a:ext cx="0" cy="0"/>
+          <a:chOff x="0" y="0"/>
+          <a:chExt cx="0" cy="0"/>
+        </a:xfrm>
+      </p:grpSpPr>
+      <p:sp>
+        <p:nvSpPr>
+          <p:cNvPr id="2" name="Title 1">
+            <a:extLst>
+              <a:ext uri="{FF2B5EF4-FFF2-40B4-BE49-F238E27FC236}">
+                <a16:creationId xmlns:a16="http://schemas.microsoft.com/office/drawing/2014/main" id="{B643E24B-1160-F6BA-5A0C-DB3B3DD9CD8A}"/>
+              </a:ext>
+            </a:extLst>
+          </p:cNvPr>
+          <p:cNvSpPr>
+            <a:spLocks noGrp="1"/>
+          </p:cNvSpPr>
+          <p:nvPr>
+            <p:ph type="title"/>
+          </p:nvPr>
+        </p:nvSpPr>
+        <p:spPr/>
+        <p:txBody>
+          <a:bodyPr/>
+          <a:lstStyle/>
+          <a:p>
+            <a:r>
+              <a:rPr lang="en-US" dirty="0"/>
+              <a:t>Filter scenario</a:t>
+            </a:r>
+          </a:p>
+        </p:txBody>
+      </p:sp>
+      <p:pic>
+        <p:nvPicPr>
+          <p:cNvPr id="5" name="Content Placeholder 4">
+            <a:extLst>
+              <a:ext uri="{FF2B5EF4-FFF2-40B4-BE49-F238E27FC236}">
+                <a16:creationId xmlns:a16="http://schemas.microsoft.com/office/drawing/2014/main" id="{3D875D97-63D9-E3DF-760D-4A57DB7A20FB}"/>
+              </a:ext>
+            </a:extLst>
+          </p:cNvPr>
+          <p:cNvPicPr>
+            <a:picLocks noGrp="1" noChangeAspect="1"/>
+          </p:cNvPicPr>
+          <p:nvPr>
+            <p:ph idx="1"/>
+          </p:nvPr>
+        </p:nvPicPr>
+        <p:blipFill>
+          <a:blip r:embed="rId2">
+            <a:extLst>
+              <a:ext uri="{28A0092B-C50C-407E-A947-70E740481C1C}">
+                <a14:useLocalDpi xmlns:a14="http://schemas.microsoft.com/office/drawing/2010/main" val="0"/>
+              </a:ext>
+            </a:extLst>
+          </a:blip>
+          <a:stretch>
+            <a:fillRect/>
+          </a:stretch>
+        </p:blipFill>
+        <p:spPr>
+          <a:xfrm>
+            <a:off x="627596" y="930861"/>
+            <a:ext cx="10936808" cy="5613841"/>
+          </a:xfrm>
+          <a:prstGeom prst="rect">
+            <a:avLst/>
+          </a:prstGeom>
+        </p:spPr>
+      </p:pic>
+    </p:spTree>
+    <p:extLst>
+      <p:ext uri="{BB962C8B-B14F-4D97-AF65-F5344CB8AC3E}">
+        <p14:creationId xmlns:p14="http://schemas.microsoft.com/office/powerpoint/2010/main" val="807167957"/>
+      </p:ext>
+    </p:extLst>
+  </p:cSld>
+  <p:clrMapOvr>
+    <a:masterClrMapping/>
+  </p:clrMapOvr>
 </p:sld>
 </file>
 
@@ -8825,7 +8181,13 @@
       </p:grpSpPr>
       <p:sp>
         <p:nvSpPr>
-          <p:cNvPr id="2" name="Title 1"/>
+          <p:cNvPr id="2" name="Title 1">
+            <a:extLst>
+              <a:ext uri="{FF2B5EF4-FFF2-40B4-BE49-F238E27FC236}">
+                <a16:creationId xmlns:a16="http://schemas.microsoft.com/office/drawing/2014/main" id="{4CA99A5D-DD39-1919-FD58-65B06FAFDE0F}"/>
+              </a:ext>
+            </a:extLst>
+          </p:cNvPr>
           <p:cNvSpPr>
             <a:spLocks noGrp="1"/>
           </p:cNvSpPr>
@@ -8838,46 +8200,69 @@
           <a:bodyPr/>
           <a:lstStyle/>
           <a:p>
-            <a:endParaRPr lang="en-US"/>
+            <a:r>
+              <a:rPr lang="en-US" dirty="0"/>
+              <a:t>Forward API call from proxy to </a:t>
+            </a:r>
+            <a:r>
+              <a:rPr lang="en-US" dirty="0" err="1"/>
+              <a:t>remotediag</a:t>
+            </a:r>
+            <a:r>
+              <a:rPr lang="en-US" dirty="0"/>
+              <a:t> </a:t>
+            </a:r>
           </a:p>
         </p:txBody>
       </p:sp>
-      <p:sp>
-        <p:nvSpPr>
-          <p:cNvPr id="6" name="Content Placeholder 5"/>
-          <p:cNvSpPr>
-            <a:spLocks noGrp="1"/>
-          </p:cNvSpPr>
+      <p:pic>
+        <p:nvPicPr>
+          <p:cNvPr id="5" name="Content Placeholder 4">
+            <a:extLst>
+              <a:ext uri="{FF2B5EF4-FFF2-40B4-BE49-F238E27FC236}">
+                <a16:creationId xmlns:a16="http://schemas.microsoft.com/office/drawing/2014/main" id="{20EC3E71-48BE-FEC7-88E8-47DB96F90E14}"/>
+              </a:ext>
+            </a:extLst>
+          </p:cNvPr>
+          <p:cNvPicPr>
+            <a:picLocks noGrp="1" noChangeAspect="1"/>
+          </p:cNvPicPr>
           <p:nvPr>
             <p:ph idx="1"/>
           </p:nvPr>
-        </p:nvSpPr>
-        <p:spPr/>
-        <p:txBody>
-          <a:bodyPr/>
-          <a:lstStyle/>
-          <a:p>
-            <a:endParaRPr lang="en-US"/>
-          </a:p>
-        </p:txBody>
-      </p:sp>
+        </p:nvPicPr>
+        <p:blipFill>
+          <a:blip r:embed="rId2">
+            <a:extLst>
+              <a:ext uri="{28A0092B-C50C-407E-A947-70E740481C1C}">
+                <a14:useLocalDpi xmlns:a14="http://schemas.microsoft.com/office/drawing/2010/main" val="0"/>
+              </a:ext>
+            </a:extLst>
+          </a:blip>
+          <a:stretch>
+            <a:fillRect/>
+          </a:stretch>
+        </p:blipFill>
+        <p:spPr>
+          <a:xfrm>
+            <a:off x="20172" y="1043549"/>
+            <a:ext cx="12163910" cy="5360052"/>
+          </a:xfrm>
+          <a:prstGeom prst="rect">
+            <a:avLst/>
+          </a:prstGeom>
+        </p:spPr>
+      </p:pic>
     </p:spTree>
     <p:extLst>
       <p:ext uri="{BB962C8B-B14F-4D97-AF65-F5344CB8AC3E}">
-        <p14:creationId xmlns:p14="http://schemas.microsoft.com/office/powerpoint/2010/main" val="3214387470"/>
+        <p14:creationId xmlns:p14="http://schemas.microsoft.com/office/powerpoint/2010/main" val="1015164566"/>
       </p:ext>
     </p:extLst>
   </p:cSld>
   <p:clrMapOvr>
     <a:masterClrMapping/>
   </p:clrMapOvr>
-  <p:timing>
-    <p:tnLst>
-      <p:par>
-        <p:cTn id="1" dur="indefinite" restart="never" nodeType="tmRoot"/>
-      </p:par>
-    </p:tnLst>
-  </p:timing>
 </p:sld>
 </file>
 
@@ -10680,7 +10065,7 @@
             <a:lstStyle/>
             <a:p>
               <a:r>
-                <a:rPr lang="en-US" sz="2800" smtClean="0">
+                <a:rPr lang="en-US" sz="2800">
                   <a:cs typeface="Times New Roman" panose="02020603050405020304" pitchFamily="18" charset="0"/>
                 </a:rPr>
                 <a:t>Context </a:t>
@@ -14218,17 +13603,8 @@
                 <a:rPr lang="en-US" sz="2800">
                   <a:cs typeface="Times New Roman" panose="02020603050405020304" pitchFamily="18" charset="0"/>
                 </a:rPr>
-                <a:t>Implementation </a:t>
+                <a:t>Implementation &amp; Verification</a:t>
               </a:r>
-              <a:r>
-                <a:rPr lang="en-US" sz="2800" smtClean="0">
-                  <a:cs typeface="Times New Roman" panose="02020603050405020304" pitchFamily="18" charset="0"/>
-                </a:rPr>
-                <a:t>&amp; Verification</a:t>
-              </a:r>
-              <a:endParaRPr lang="en-US" sz="2800">
-                <a:cs typeface="Times New Roman" panose="02020603050405020304" pitchFamily="18" charset="0"/>
-              </a:endParaRPr>
             </a:p>
           </p:txBody>
         </p:sp>
@@ -14243,13 +13619,6 @@
   <p:clrMapOvr>
     <a:masterClrMapping/>
   </p:clrMapOvr>
-  <p:timing>
-    <p:tnLst>
-      <p:par>
-        <p:cTn id="1" dur="indefinite" restart="never" nodeType="tmRoot"/>
-      </p:par>
-    </p:tnLst>
-  </p:timing>
 </p:sld>
 </file>
 
@@ -14305,7 +13674,7 @@
           <p:cNvPr id="2" name="Title 1">
             <a:extLst>
               <a:ext uri="{FF2B5EF4-FFF2-40B4-BE49-F238E27FC236}">
-                <a16:creationId xmlns:a16="http://schemas.microsoft.com/office/drawing/2014/main" xmlns="" id="{F11C1235-51B4-A8A0-3A61-9C767F437001}"/>
+                <a16:creationId xmlns:a16="http://schemas.microsoft.com/office/drawing/2014/main" id="{F11C1235-51B4-A8A0-3A61-9C767F437001}"/>
               </a:ext>
             </a:extLst>
           </p:cNvPr>
@@ -14329,10 +13698,9 @@
           <a:lstStyle/>
           <a:p>
             <a:r>
-              <a:rPr lang="en-US" smtClean="0"/>
+              <a:rPr lang="en-US"/>
               <a:t>Context &amp; Motivation</a:t>
             </a:r>
-            <a:endParaRPr lang="en-US"/>
           </a:p>
         </p:txBody>
       </p:sp>
@@ -14341,7 +13709,7 @@
           <p:cNvPr id="7" name="Content Placeholder 6">
             <a:extLst>
               <a:ext uri="{FF2B5EF4-FFF2-40B4-BE49-F238E27FC236}">
-                <a16:creationId xmlns:a16="http://schemas.microsoft.com/office/drawing/2014/main" xmlns="" id="{4A0E7BDD-2CF4-321B-0637-D9AF63CAB0BF}"/>
+                <a16:creationId xmlns:a16="http://schemas.microsoft.com/office/drawing/2014/main" id="{4A0E7BDD-2CF4-321B-0637-D9AF63CAB0BF}"/>
               </a:ext>
             </a:extLst>
           </p:cNvPr>
@@ -14365,46 +13733,46 @@
           <a:lstStyle/>
           <a:p>
             <a:r>
-              <a:rPr lang="en-US" sz="1800" smtClean="0"/>
+              <a:rPr lang="en-US" sz="1800"/>
               <a:t>Currently, Toyota telematics stack (DCM) runs in a single partition</a:t>
             </a:r>
           </a:p>
           <a:p>
             <a:r>
-              <a:rPr lang="en-US" sz="1800" b="1" smtClean="0"/>
+              <a:rPr lang="en-US" sz="1800" b="1"/>
               <a:t>System architecture change</a:t>
             </a:r>
             <a:r>
-              <a:rPr lang="en-US" sz="1800" smtClean="0"/>
+              <a:rPr lang="en-US" sz="1800"/>
               <a:t>: </a:t>
             </a:r>
           </a:p>
           <a:p>
             <a:pPr lvl="1"/>
             <a:r>
-              <a:rPr lang="en-US" sz="1800" smtClean="0"/>
+              <a:rPr lang="en-US" sz="1800"/>
               <a:t>DCM is separated into 2 containers: </a:t>
             </a:r>
           </a:p>
           <a:p>
             <a:pPr lvl="2"/>
             <a:r>
-              <a:rPr lang="en-US" sz="1800" b="1" smtClean="0"/>
+              <a:rPr lang="en-US" sz="1800" b="1"/>
               <a:t>EP container</a:t>
             </a:r>
             <a:r>
-              <a:rPr lang="en-US" sz="1800" smtClean="0"/>
+              <a:rPr lang="en-US" sz="1800"/>
               <a:t>: externally exposed network components</a:t>
             </a:r>
           </a:p>
           <a:p>
             <a:pPr lvl="2"/>
             <a:r>
-              <a:rPr lang="en-US" sz="1800" b="1" smtClean="0"/>
+              <a:rPr lang="en-US" sz="1800" b="1"/>
               <a:t>IP container</a:t>
             </a:r>
             <a:r>
-              <a:rPr lang="en-US" sz="1800" smtClean="0"/>
+              <a:rPr lang="en-US" sz="1800"/>
               <a:t>: components which have access to CAN bus.</a:t>
             </a:r>
           </a:p>
@@ -14527,10 +13895,9 @@
           <a:lstStyle/>
           <a:p>
             <a:r>
-              <a:rPr lang="en-US" smtClean="0"/>
+              <a:rPr lang="en-US"/>
               <a:t>Current system architecture</a:t>
             </a:r>
-            <a:endParaRPr lang="en-US"/>
           </a:p>
         </p:txBody>
       </p:sp>
@@ -14557,10 +13924,9 @@
           <a:lstStyle/>
           <a:p>
             <a:r>
-              <a:rPr lang="en-US" smtClean="0"/>
+              <a:rPr lang="en-US"/>
               <a:t>New system architecture (containerized)</a:t>
             </a:r>
-            <a:endParaRPr lang="en-US"/>
           </a:p>
         </p:txBody>
       </p:sp>
@@ -14598,13 +13964,6 @@
   <p:clrMapOvr>
     <a:masterClrMapping/>
   </p:clrMapOvr>
-  <p:timing>
-    <p:tnLst>
-      <p:par>
-        <p:cTn id="1" dur="indefinite" restart="never" nodeType="tmRoot"/>
-      </p:par>
-    </p:tnLst>
-  </p:timing>
 </p:sld>
 </file>
 
@@ -14652,11 +14011,11 @@
               <a:buChar char="•"/>
             </a:pPr>
             <a:r>
-              <a:rPr lang="en-US" sz="1600" b="1" smtClean="0"/>
+              <a:rPr lang="en-US" sz="1600" b="1"/>
               <a:t>RemoteDiag</a:t>
             </a:r>
             <a:r>
-              <a:rPr lang="en-US" sz="1600" smtClean="0"/>
+              <a:rPr lang="en-US" sz="1600"/>
               <a:t>: a module processes diagnostic for each ECU and uploads diagnostic data to OEM Server</a:t>
             </a:r>
           </a:p>
@@ -14666,7 +14025,7 @@
               <a:buChar char="•"/>
             </a:pPr>
             <a:r>
-              <a:rPr lang="en-US" sz="1600" smtClean="0"/>
+              <a:rPr lang="en-US" sz="1600"/>
               <a:t>RemoteDiag has 2 communication paths:</a:t>
             </a:r>
           </a:p>
@@ -14676,15 +14035,15 @@
               <a:buChar char="•"/>
             </a:pPr>
             <a:r>
-              <a:rPr lang="en-US" sz="1600" smtClean="0"/>
+              <a:rPr lang="en-US" sz="1600"/>
               <a:t>with </a:t>
             </a:r>
             <a:r>
-              <a:rPr lang="en-US" sz="1600" b="1" smtClean="0"/>
+              <a:rPr lang="en-US" sz="1600" b="1"/>
               <a:t>OEM Server</a:t>
             </a:r>
             <a:r>
-              <a:rPr lang="en-US" sz="1600" smtClean="0"/>
+              <a:rPr lang="en-US" sz="1600"/>
               <a:t>: performs direct diagnostic commands</a:t>
             </a:r>
           </a:p>
@@ -14694,15 +14053,15 @@
               <a:buChar char="•"/>
             </a:pPr>
             <a:r>
-              <a:rPr lang="en-US" sz="1600" smtClean="0"/>
+              <a:rPr lang="en-US" sz="1600"/>
               <a:t>with </a:t>
             </a:r>
             <a:r>
-              <a:rPr lang="en-US" sz="1600" b="1" smtClean="0"/>
+              <a:rPr lang="en-US" sz="1600" b="1"/>
               <a:t>MM ecu</a:t>
             </a:r>
             <a:r>
-              <a:rPr lang="en-US" sz="1600" smtClean="0"/>
+              <a:rPr lang="en-US" sz="1600"/>
               <a:t>: OTA diagnostic update</a:t>
             </a:r>
           </a:p>
@@ -14711,7 +14070,7 @@
               <a:buFont typeface="Arial" panose="020B0604020202020204" pitchFamily="34" charset="0"/>
               <a:buChar char="•"/>
             </a:pPr>
-            <a:endParaRPr lang="en-US" sz="1600" smtClean="0"/>
+            <a:endParaRPr lang="en-US" sz="1600"/>
           </a:p>
           <a:p>
             <a:pPr marL="285750" indent="-285750">
@@ -14719,26 +14078,13 @@
               <a:buChar char="•"/>
             </a:pPr>
             <a:r>
-              <a:rPr lang="en-US" sz="1600" b="1" smtClean="0"/>
-              <a:t>Risk: RemoteDiag </a:t>
-            </a:r>
-            <a:r>
               <a:rPr lang="en-US" sz="1600" b="1"/>
-              <a:t>&lt;-&gt; MM path </a:t>
+              <a:t>Risk: RemoteDiag &lt;-&gt; MM path </a:t>
             </a:r>
             <a:r>
               <a:rPr lang="en-US" sz="1600"/>
-              <a:t>routes in EP which </a:t>
+              <a:t>routes in EP which is insecure</a:t>
             </a:r>
-            <a:r>
-              <a:rPr lang="en-US" sz="1600"/>
-              <a:t>is </a:t>
-            </a:r>
-            <a:r>
-              <a:rPr lang="en-US" sz="1600" smtClean="0"/>
-              <a:t>insecure</a:t>
-            </a:r>
-            <a:endParaRPr lang="en-US" sz="1600"/>
           </a:p>
           <a:p>
             <a:pPr marL="285750" indent="-285750">
@@ -14751,20 +14097,11 @@
             </a:r>
             <a:r>
               <a:rPr lang="en-US" sz="1600" b="1"/>
-              <a:t>unauthorized reprogramming requests should </a:t>
+              <a:t>unauthorized reprogramming requests should be filtered.</a:t>
             </a:r>
-            <a:r>
-              <a:rPr lang="en-US" sz="1600" b="1"/>
-              <a:t>be </a:t>
-            </a:r>
-            <a:r>
-              <a:rPr lang="en-US" sz="1600" b="1" smtClean="0"/>
-              <a:t>filtered.</a:t>
-            </a:r>
-            <a:endParaRPr lang="en-US" sz="1600" b="1"/>
           </a:p>
           <a:p>
-            <a:endParaRPr lang="en-US" sz="1600" smtClean="0"/>
+            <a:endParaRPr lang="en-US" sz="1600"/>
           </a:p>
         </p:txBody>
       </p:sp>
@@ -14773,7 +14110,7 @@
           <p:cNvPr id="2" name="Title 1">
             <a:extLst>
               <a:ext uri="{FF2B5EF4-FFF2-40B4-BE49-F238E27FC236}">
-                <a16:creationId xmlns:a16="http://schemas.microsoft.com/office/drawing/2014/main" xmlns="" id="{C3585339-B774-DFDC-4DB4-D02F5083DD3E}"/>
+                <a16:creationId xmlns:a16="http://schemas.microsoft.com/office/drawing/2014/main" id="{C3585339-B774-DFDC-4DB4-D02F5083DD3E}"/>
               </a:ext>
             </a:extLst>
           </p:cNvPr>
@@ -14828,10 +14165,10 @@
         </p:nvGrpSpPr>
         <p:grpSpPr>
           <a:xfrm>
-            <a:off x="0" y="3782508"/>
-            <a:ext cx="4370798" cy="923330"/>
-            <a:chOff x="-3835" y="4675267"/>
-            <a:chExt cx="4602197" cy="923330"/>
+            <a:off x="26896" y="3782508"/>
+            <a:ext cx="4390970" cy="923330"/>
+            <a:chOff x="24485" y="4675267"/>
+            <a:chExt cx="4623437" cy="923330"/>
           </a:xfrm>
         </p:grpSpPr>
         <p:sp>
@@ -14839,7 +14176,7 @@
             <p:cNvPr id="15" name="TextBox 14">
               <a:extLst>
                 <a:ext uri="{FF2B5EF4-FFF2-40B4-BE49-F238E27FC236}">
-                  <a16:creationId xmlns:a16="http://schemas.microsoft.com/office/drawing/2014/main" xmlns="" id="{2477AED6-8D6F-D505-6D7B-78460A03A2E8}"/>
+                  <a16:creationId xmlns:a16="http://schemas.microsoft.com/office/drawing/2014/main" id="{2477AED6-8D6F-D505-6D7B-78460A03A2E8}"/>
                 </a:ext>
               </a:extLst>
             </p:cNvPr>
@@ -14848,7 +14185,7 @@
           </p:nvSpPr>
           <p:spPr>
             <a:xfrm>
-              <a:off x="526483" y="4675267"/>
+              <a:off x="576043" y="4675267"/>
               <a:ext cx="4071879" cy="923330"/>
             </a:xfrm>
             <a:prstGeom prst="rect">
@@ -14863,42 +14200,38 @@
             <a:lstStyle/>
             <a:p>
               <a:r>
-                <a:rPr lang="en-US" err="1"/>
+                <a:rPr lang="en-US" dirty="0" err="1"/>
                 <a:t>RemoteDiag’s</a:t>
               </a:r>
               <a:r>
-                <a:rPr lang="en-US"/>
+                <a:rPr lang="en-US" dirty="0"/>
                 <a:t> </a:t>
               </a:r>
               <a:r>
-                <a:rPr lang="en-US" b="1"/>
+                <a:rPr lang="en-US" b="1" dirty="0"/>
                 <a:t>internal</a:t>
               </a:r>
               <a:r>
-                <a:rPr lang="en-US"/>
+                <a:rPr lang="en-US" dirty="0"/>
                 <a:t> </a:t>
               </a:r>
               <a:r>
-                <a:rPr lang="en-US" b="1"/>
+                <a:rPr lang="en-US" b="1" dirty="0"/>
                 <a:t>architecture and communication </a:t>
               </a:r>
               <a:r>
-                <a:rPr lang="en-US"/>
+                <a:rPr lang="en-US" dirty="0"/>
                 <a:t>should be </a:t>
               </a:r>
               <a:r>
-                <a:rPr lang="en-US" b="1"/>
+                <a:rPr lang="en-US" b="1" dirty="0"/>
                 <a:t>redesigned</a:t>
               </a:r>
               <a:r>
-                <a:rPr lang="en-US"/>
-                <a:t> to align with new </a:t>
+                <a:rPr lang="en-US" dirty="0"/>
+                <a:t> to align with new architecture</a:t>
               </a:r>
-              <a:r>
-                <a:rPr lang="en-US" smtClean="0"/>
-                <a:t>architecture</a:t>
-              </a:r>
-              <a:endParaRPr lang="en-US" b="1"/>
+              <a:endParaRPr lang="en-US" b="1" dirty="0"/>
             </a:p>
           </p:txBody>
         </p:sp>
@@ -14910,7 +14243,7 @@
           </p:nvSpPr>
           <p:spPr>
             <a:xfrm>
-              <a:off x="-3835" y="4861835"/>
+              <a:off x="24485" y="4861835"/>
               <a:ext cx="530318" cy="550195"/>
             </a:xfrm>
             <a:prstGeom prst="rightArrow">
@@ -14977,13 +14310,6 @@
   <p:clrMapOvr>
     <a:masterClrMapping/>
   </p:clrMapOvr>
-  <p:timing>
-    <p:tnLst>
-      <p:par>
-        <p:cTn id="1" dur="indefinite" restart="never" nodeType="tmRoot"/>
-      </p:par>
-    </p:tnLst>
-  </p:timing>
 </p:sld>
 </file>
 
@@ -15031,7 +14357,7 @@
           <p:cNvPr id="4" name="Content Placeholder 3">
             <a:extLst>
               <a:ext uri="{FF2B5EF4-FFF2-40B4-BE49-F238E27FC236}">
-                <a16:creationId xmlns:a16="http://schemas.microsoft.com/office/drawing/2014/main" xmlns="" id="{E5625E47-EFA5-9C35-32C7-F793664192AF}"/>
+                <a16:creationId xmlns:a16="http://schemas.microsoft.com/office/drawing/2014/main" id="{E5625E47-EFA5-9C35-32C7-F793664192AF}"/>
               </a:ext>
             </a:extLst>
           </p:cNvPr>
@@ -15055,10 +14381,9 @@
           <a:lstStyle/>
           <a:p>
             <a:r>
-              <a:rPr lang="en-US" sz="2200" smtClean="0"/>
+              <a:rPr lang="en-US" sz="2200"/>
               <a:t>Functional requirements</a:t>
             </a:r>
-            <a:endParaRPr lang="en-US" sz="2200"/>
           </a:p>
         </p:txBody>
       </p:sp>
@@ -15067,7 +14392,7 @@
           <p:cNvPr id="10" name="Table 9">
             <a:extLst>
               <a:ext uri="{FF2B5EF4-FFF2-40B4-BE49-F238E27FC236}">
-                <a16:creationId xmlns:a16="http://schemas.microsoft.com/office/drawing/2014/main" xmlns="" id="{658A328F-ADBC-7C5F-15DF-73E4DC21B209}"/>
+                <a16:creationId xmlns:a16="http://schemas.microsoft.com/office/drawing/2014/main" id="{658A328F-ADBC-7C5F-15DF-73E4DC21B209}"/>
               </a:ext>
             </a:extLst>
           </p:cNvPr>
@@ -15084,7 +14409,7 @@
         </p:nvGraphicFramePr>
         <p:xfrm>
           <a:off x="204773" y="1505336"/>
-          <a:ext cx="11782454" cy="1417380"/>
+          <a:ext cx="11782454" cy="1332290"/>
         </p:xfrm>
         <a:graphic>
           <a:graphicData uri="http://schemas.openxmlformats.org/drawingml/2006/table">
@@ -15096,14 +14421,14 @@
                 <a:gridCol w="1298801">
                   <a:extLst>
                     <a:ext uri="{9D8B030D-6E8A-4147-A177-3AD203B41FA5}">
-                      <a16:colId xmlns:a16="http://schemas.microsoft.com/office/drawing/2014/main" xmlns="" val="20000"/>
+                      <a16:colId xmlns:a16="http://schemas.microsoft.com/office/drawing/2014/main" val="20000"/>
                     </a:ext>
                   </a:extLst>
                 </a:gridCol>
                 <a:gridCol w="10483653">
                   <a:extLst>
                     <a:ext uri="{9D8B030D-6E8A-4147-A177-3AD203B41FA5}">
-                      <a16:colId xmlns:a16="http://schemas.microsoft.com/office/drawing/2014/main" xmlns="" val="20001"/>
+                      <a16:colId xmlns:a16="http://schemas.microsoft.com/office/drawing/2014/main" val="20001"/>
                     </a:ext>
                   </a:extLst>
                 </a:gridCol>
@@ -15242,7 +14567,7 @@
                 </a:tc>
                 <a:extLst>
                   <a:ext uri="{0D108BD9-81ED-4DB2-BD59-A6C34878D82A}">
-                    <a16:rowId xmlns:a16="http://schemas.microsoft.com/office/drawing/2014/main" xmlns="" val="10000"/>
+                    <a16:rowId xmlns:a16="http://schemas.microsoft.com/office/drawing/2014/main" val="10000"/>
                   </a:ext>
                 </a:extLst>
               </a:tr>
@@ -15258,7 +14583,7 @@
                         </a:lnSpc>
                       </a:pPr>
                       <a:r>
-                        <a:rPr lang="en-US" sz="1800" kern="1200" smtClean="0">
+                        <a:rPr lang="en-US" sz="1800" kern="1200">
                           <a:solidFill>
                             <a:schemeClr val="dk1"/>
                           </a:solidFill>
@@ -15269,15 +14594,6 @@
                         </a:rPr>
                         <a:t>FR-01</a:t>
                       </a:r>
-                      <a:endParaRPr lang="en-US" sz="1800" kern="1200">
-                        <a:solidFill>
-                          <a:schemeClr val="dk1"/>
-                        </a:solidFill>
-                        <a:effectLst/>
-                        <a:latin typeface="+mn-lt"/>
-                        <a:ea typeface="+mn-ea"/>
-                        <a:cs typeface="Arial" panose="020B0604020202020204" pitchFamily="34" charset="0"/>
-                      </a:endParaRPr>
                     </a:p>
                   </a:txBody>
                   <a:tcPr marL="106700" marR="106700" marT="53350" marB="53350">
@@ -15342,31 +14658,7 @@
                           <a:ea typeface="+mn-ea"/>
                           <a:cs typeface="Arial" panose="020B0604020202020204" pitchFamily="34" charset="0"/>
                         </a:rPr>
-                        <a:t>The system shall </a:t>
-                      </a:r>
-                      <a:r>
-                        <a:rPr lang="en-US" sz="1800" kern="1200" baseline="0" smtClean="0">
-                          <a:solidFill>
-                            <a:schemeClr val="dk1"/>
-                          </a:solidFill>
-                          <a:effectLst/>
-                          <a:latin typeface="+mn-lt"/>
-                          <a:ea typeface="+mn-ea"/>
-                          <a:cs typeface="Arial" panose="020B0604020202020204" pitchFamily="34" charset="0"/>
-                        </a:rPr>
-                        <a:t>block unauthorized </a:t>
-                      </a:r>
-                      <a:r>
-                        <a:rPr lang="en-US" sz="1800" kern="1200" baseline="0">
-                          <a:solidFill>
-                            <a:schemeClr val="dk1"/>
-                          </a:solidFill>
-                          <a:effectLst/>
-                          <a:latin typeface="+mn-lt"/>
-                          <a:ea typeface="+mn-ea"/>
-                          <a:cs typeface="Arial" panose="020B0604020202020204" pitchFamily="34" charset="0"/>
-                        </a:rPr>
-                        <a:t>diagnostic commands related to ECU reprogramming.</a:t>
+                        <a:t>The system shall block unauthorized diagnostic commands related to ECU reprogramming.</a:t>
                       </a:r>
                     </a:p>
                   </a:txBody>
@@ -15411,7 +14703,7 @@
                 </a:tc>
                 <a:extLst>
                   <a:ext uri="{0D108BD9-81ED-4DB2-BD59-A6C34878D82A}">
-                    <a16:rowId xmlns:a16="http://schemas.microsoft.com/office/drawing/2014/main" xmlns="" val="10001"/>
+                    <a16:rowId xmlns:a16="http://schemas.microsoft.com/office/drawing/2014/main" val="10001"/>
                   </a:ext>
                 </a:extLst>
               </a:tr>
@@ -15439,7 +14731,7 @@
                         <a:defRPr/>
                       </a:pPr>
                       <a:r>
-                        <a:rPr lang="en-US" sz="1800" kern="1200" smtClean="0">
+                        <a:rPr lang="en-US" sz="1800" kern="1200">
                           <a:solidFill>
                             <a:schemeClr val="dk1"/>
                           </a:solidFill>
@@ -15450,15 +14742,6 @@
                         </a:rPr>
                         <a:t>FR-02</a:t>
                       </a:r>
-                      <a:endParaRPr lang="en-US" sz="1800" kern="1200">
-                        <a:solidFill>
-                          <a:schemeClr val="dk1"/>
-                        </a:solidFill>
-                        <a:effectLst/>
-                        <a:latin typeface="+mn-lt"/>
-                        <a:ea typeface="+mn-ea"/>
-                        <a:cs typeface="Arial" panose="020B0604020202020204" pitchFamily="34" charset="0"/>
-                      </a:endParaRPr>
                     </a:p>
                   </a:txBody>
                   <a:tcPr marL="106700" marR="106700" marT="53350" marB="53350">
@@ -15523,31 +14806,7 @@
                           <a:ea typeface="+mn-ea"/>
                           <a:cs typeface="Arial" panose="020B0604020202020204" pitchFamily="34" charset="0"/>
                         </a:rPr>
-                        <a:t>The system shall route UDS diagnostic messages exchanged with the </a:t>
-                      </a:r>
-                      <a:r>
-                        <a:rPr lang="en-US" sz="1800" kern="1200" baseline="0" smtClean="0">
-                          <a:solidFill>
-                            <a:schemeClr val="dk1"/>
-                          </a:solidFill>
-                          <a:effectLst/>
-                          <a:latin typeface="+mn-lt"/>
-                          <a:ea typeface="+mn-ea"/>
-                          <a:cs typeface="Arial" panose="020B0604020202020204" pitchFamily="34" charset="0"/>
-                        </a:rPr>
-                        <a:t>MM </a:t>
-                      </a:r>
-                      <a:r>
-                        <a:rPr lang="en-US" sz="1800" kern="1200" baseline="0">
-                          <a:solidFill>
-                            <a:schemeClr val="dk1"/>
-                          </a:solidFill>
-                          <a:effectLst/>
-                          <a:latin typeface="+mn-lt"/>
-                          <a:ea typeface="+mn-ea"/>
-                          <a:cs typeface="Arial" panose="020B0604020202020204" pitchFamily="34" charset="0"/>
-                        </a:rPr>
-                        <a:t>ECU entirely within the IP.</a:t>
+                        <a:t>The system shall route UDS diagnostic messages exchanged with the MM ECU entirely within the IP.</a:t>
                       </a:r>
                     </a:p>
                   </a:txBody>
@@ -15592,7 +14851,7 @@
                 </a:tc>
                 <a:extLst>
                   <a:ext uri="{0D108BD9-81ED-4DB2-BD59-A6C34878D82A}">
-                    <a16:rowId xmlns:a16="http://schemas.microsoft.com/office/drawing/2014/main" xmlns="" val="10002"/>
+                    <a16:rowId xmlns:a16="http://schemas.microsoft.com/office/drawing/2014/main" val="10002"/>
                   </a:ext>
                 </a:extLst>
               </a:tr>
@@ -15610,13 +14869,6 @@
   <p:clrMapOvr>
     <a:masterClrMapping/>
   </p:clrMapOvr>
-  <p:timing>
-    <p:tnLst>
-      <p:par>
-        <p:cTn id="1" dur="indefinite" restart="never" nodeType="tmRoot"/>
-      </p:par>
-    </p:tnLst>
-  </p:timing>
 </p:sld>
 </file>
 
@@ -15628,7 +14880,7 @@
         <p:cNvPr id="1" name="">
           <a:extLst>
             <a:ext uri="{FF2B5EF4-FFF2-40B4-BE49-F238E27FC236}">
-              <a16:creationId xmlns:a16="http://schemas.microsoft.com/office/drawing/2014/main" xmlns="" id="{C0816B88-86B3-799E-3A3E-FA919E3E0922}"/>
+              <a16:creationId xmlns:a16="http://schemas.microsoft.com/office/drawing/2014/main" id="{C0816B88-86B3-799E-3A3E-FA919E3E0922}"/>
             </a:ext>
           </a:extLst>
         </p:cNvPr>
@@ -15648,7 +14900,7 @@
           <p:cNvPr id="2" name="Title 1">
             <a:extLst>
               <a:ext uri="{FF2B5EF4-FFF2-40B4-BE49-F238E27FC236}">
-                <a16:creationId xmlns:a16="http://schemas.microsoft.com/office/drawing/2014/main" xmlns="" id="{C36E5815-73D6-DA66-29AA-3BE061A3E84B}"/>
+                <a16:creationId xmlns:a16="http://schemas.microsoft.com/office/drawing/2014/main" id="{C36E5815-73D6-DA66-29AA-3BE061A3E84B}"/>
               </a:ext>
             </a:extLst>
           </p:cNvPr>
@@ -15676,7 +14928,7 @@
           <p:cNvPr id="11" name="Content Placeholder 3">
             <a:extLst>
               <a:ext uri="{FF2B5EF4-FFF2-40B4-BE49-F238E27FC236}">
-                <a16:creationId xmlns:a16="http://schemas.microsoft.com/office/drawing/2014/main" xmlns="" id="{6010EF79-766B-D3A2-10CE-882C40A1E836}"/>
+                <a16:creationId xmlns:a16="http://schemas.microsoft.com/office/drawing/2014/main" id="{6010EF79-766B-D3A2-10CE-882C40A1E836}"/>
               </a:ext>
             </a:extLst>
           </p:cNvPr>
@@ -15872,7 +15124,7 @@
           <p:cNvPr id="3" name="Table 2">
             <a:extLst>
               <a:ext uri="{FF2B5EF4-FFF2-40B4-BE49-F238E27FC236}">
-                <a16:creationId xmlns:a16="http://schemas.microsoft.com/office/drawing/2014/main" xmlns="" id="{6C8AAA51-C203-CD8B-4B02-DE7401134C21}"/>
+                <a16:creationId xmlns:a16="http://schemas.microsoft.com/office/drawing/2014/main" id="{6C8AAA51-C203-CD8B-4B02-DE7401134C21}"/>
               </a:ext>
             </a:extLst>
           </p:cNvPr>
@@ -15889,7 +15141,7 @@
         </p:nvGraphicFramePr>
         <p:xfrm>
           <a:off x="182820" y="960039"/>
-          <a:ext cx="11826361" cy="4800700"/>
+          <a:ext cx="11826361" cy="4611470"/>
         </p:xfrm>
         <a:graphic>
           <a:graphicData uri="http://schemas.openxmlformats.org/drawingml/2006/table">
@@ -15901,35 +15153,35 @@
                 <a:gridCol w="741105">
                   <a:extLst>
                     <a:ext uri="{9D8B030D-6E8A-4147-A177-3AD203B41FA5}">
-                      <a16:colId xmlns:a16="http://schemas.microsoft.com/office/drawing/2014/main" xmlns="" val="20000"/>
+                      <a16:colId xmlns:a16="http://schemas.microsoft.com/office/drawing/2014/main" val="20000"/>
                     </a:ext>
                   </a:extLst>
                 </a:gridCol>
                 <a:gridCol w="4248150">
                   <a:extLst>
                     <a:ext uri="{9D8B030D-6E8A-4147-A177-3AD203B41FA5}">
-                      <a16:colId xmlns:a16="http://schemas.microsoft.com/office/drawing/2014/main" xmlns="" val="20001"/>
+                      <a16:colId xmlns:a16="http://schemas.microsoft.com/office/drawing/2014/main" val="20001"/>
                     </a:ext>
                   </a:extLst>
                 </a:gridCol>
                 <a:gridCol w="4629150">
                   <a:extLst>
                     <a:ext uri="{9D8B030D-6E8A-4147-A177-3AD203B41FA5}">
-                      <a16:colId xmlns:a16="http://schemas.microsoft.com/office/drawing/2014/main" xmlns="" val="2530683369"/>
+                      <a16:colId xmlns:a16="http://schemas.microsoft.com/office/drawing/2014/main" val="2530683369"/>
                     </a:ext>
                   </a:extLst>
                 </a:gridCol>
                 <a:gridCol w="1295400">
                   <a:extLst>
                     <a:ext uri="{9D8B030D-6E8A-4147-A177-3AD203B41FA5}">
-                      <a16:colId xmlns:a16="http://schemas.microsoft.com/office/drawing/2014/main" xmlns="" val="20002"/>
+                      <a16:colId xmlns:a16="http://schemas.microsoft.com/office/drawing/2014/main" val="20002"/>
                     </a:ext>
                   </a:extLst>
                 </a:gridCol>
                 <a:gridCol w="912556">
                   <a:extLst>
                     <a:ext uri="{9D8B030D-6E8A-4147-A177-3AD203B41FA5}">
-                      <a16:colId xmlns:a16="http://schemas.microsoft.com/office/drawing/2014/main" xmlns="" val="20003"/>
+                      <a16:colId xmlns:a16="http://schemas.microsoft.com/office/drawing/2014/main" val="20003"/>
                     </a:ext>
                   </a:extLst>
                 </a:gridCol>
@@ -16289,7 +15541,7 @@
                 </a:tc>
                 <a:extLst>
                   <a:ext uri="{0D108BD9-81ED-4DB2-BD59-A6C34878D82A}">
-                    <a16:rowId xmlns:a16="http://schemas.microsoft.com/office/drawing/2014/main" xmlns="" val="10000"/>
+                    <a16:rowId xmlns:a16="http://schemas.microsoft.com/office/drawing/2014/main" val="10000"/>
                   </a:ext>
                 </a:extLst>
               </a:tr>
@@ -16305,7 +15557,7 @@
                         </a:lnSpc>
                       </a:pPr>
                       <a:r>
-                        <a:rPr lang="en-US" sz="1600" b="0" kern="1200" smtClean="0">
+                        <a:rPr lang="en-US" sz="1600" b="0" kern="1200">
                           <a:solidFill>
                             <a:schemeClr val="dk1"/>
                           </a:solidFill>
@@ -16316,15 +15568,6 @@
                         </a:rPr>
                         <a:t>QA-01</a:t>
                       </a:r>
-                      <a:endParaRPr lang="en-US" sz="1600" b="0" kern="1200">
-                        <a:solidFill>
-                          <a:schemeClr val="dk1"/>
-                        </a:solidFill>
-                        <a:effectLst/>
-                        <a:latin typeface="+mn-lt"/>
-                        <a:ea typeface="+mn-ea"/>
-                        <a:cs typeface="Arial" panose="020B0604020202020204" pitchFamily="34" charset="0"/>
-                      </a:endParaRPr>
                     </a:p>
                   </a:txBody>
                   <a:tcPr marL="106700" marR="106700" marT="53350" marB="53350" anchor="ctr">
@@ -16383,7 +15626,7 @@
                         </a:spcAft>
                       </a:pPr>
                       <a:r>
-                        <a:rPr lang="en-US" sz="1600" b="0" kern="1200" baseline="0" smtClean="0">
+                        <a:rPr lang="en-US" sz="1600" b="0" kern="1200" baseline="0">
                           <a:solidFill>
                             <a:schemeClr val="dk1"/>
                           </a:solidFill>
@@ -16394,15 +15637,6 @@
                         </a:rPr>
                         <a:t>A compromised app/service sends reprogramming command to CAN</a:t>
                       </a:r>
-                      <a:endParaRPr lang="en-US" sz="1600" b="0" kern="1200" baseline="0">
-                        <a:solidFill>
-                          <a:schemeClr val="dk1"/>
-                        </a:solidFill>
-                        <a:effectLst/>
-                        <a:latin typeface="+mn-lt"/>
-                        <a:ea typeface="+mn-ea"/>
-                        <a:cs typeface="Arial" panose="020B0604020202020204" pitchFamily="34" charset="0"/>
-                      </a:endParaRPr>
                     </a:p>
                   </a:txBody>
                   <a:tcPr marL="25400" marR="25400" marT="0" marB="0" anchor="ctr">
@@ -16468,13 +15702,8 @@
                       </a:pPr>
                       <a:r>
                         <a:rPr lang="en-US" sz="1600" b="0"/>
-                        <a:t>Zero Reprogramming SIDs reaches the internal </a:t>
+                        <a:t>Zero Reprogramming SIDs reaches the internal CAN.</a:t>
                       </a:r>
-                      <a:r>
-                        <a:rPr lang="en-US" sz="1600" b="0" smtClean="0"/>
-                        <a:t>CAN.</a:t>
-                      </a:r>
-                      <a:endParaRPr lang="en-US" sz="1600" b="0"/>
                     </a:p>
                   </a:txBody>
                   <a:tcPr marL="106700" marR="106700" marT="53350" marB="53350" anchor="ctr">
@@ -16644,7 +15873,7 @@
                 </a:tc>
                 <a:extLst>
                   <a:ext uri="{0D108BD9-81ED-4DB2-BD59-A6C34878D82A}">
-                    <a16:rowId xmlns:a16="http://schemas.microsoft.com/office/drawing/2014/main" xmlns="" val="10001"/>
+                    <a16:rowId xmlns:a16="http://schemas.microsoft.com/office/drawing/2014/main" val="10001"/>
                   </a:ext>
                 </a:extLst>
               </a:tr>
@@ -16672,7 +15901,7 @@
                         <a:defRPr/>
                       </a:pPr>
                       <a:r>
-                        <a:rPr lang="en-US" sz="1600" b="0" kern="1200" smtClean="0">
+                        <a:rPr lang="en-US" sz="1600" b="0" kern="1200">
                           <a:solidFill>
                             <a:schemeClr val="dk1"/>
                           </a:solidFill>
@@ -16683,15 +15912,6 @@
                         </a:rPr>
                         <a:t>QA-02</a:t>
                       </a:r>
-                      <a:endParaRPr lang="en-US" sz="1600" b="0" kern="1200">
-                        <a:solidFill>
-                          <a:schemeClr val="dk1"/>
-                        </a:solidFill>
-                        <a:effectLst/>
-                        <a:latin typeface="+mn-lt"/>
-                        <a:ea typeface="+mn-ea"/>
-                        <a:cs typeface="Arial" panose="020B0604020202020204" pitchFamily="34" charset="0"/>
-                      </a:endParaRPr>
                     </a:p>
                   </a:txBody>
                   <a:tcPr marL="106700" marR="106700" marT="53350" marB="53350" anchor="ctr">
@@ -16759,22 +15979,10 @@
                           <a:ea typeface="+mn-ea"/>
                           <a:cs typeface="Arial" panose="020B0604020202020204" pitchFamily="34" charset="0"/>
                         </a:rPr>
-                        <a:t>MM ECU sends a diagnostic </a:t>
+                        <a:t>MM ECU sends a diagnostic request via TCP to </a:t>
                       </a:r>
                       <a:r>
-                        <a:rPr lang="en-US" sz="1600" b="0" kern="1200" baseline="0" smtClean="0">
-                          <a:solidFill>
-                            <a:schemeClr val="dk1"/>
-                          </a:solidFill>
-                          <a:effectLst/>
-                          <a:latin typeface="+mn-lt"/>
-                          <a:ea typeface="+mn-ea"/>
-                          <a:cs typeface="Arial" panose="020B0604020202020204" pitchFamily="34" charset="0"/>
-                        </a:rPr>
-                        <a:t>request via TCP to </a:t>
-                      </a:r>
-                      <a:r>
-                        <a:rPr lang="en-US" sz="1600" b="0" kern="1200" baseline="0" err="1" smtClean="0">
+                        <a:rPr lang="en-US" sz="1600" b="0" kern="1200" baseline="0" err="1">
                           <a:solidFill>
                             <a:schemeClr val="dk1"/>
                           </a:solidFill>
@@ -16850,17 +16058,10 @@
                           <a:latin typeface="+mn-lt"/>
                           <a:cs typeface="Arial" panose="020B0604020202020204" pitchFamily="34" charset="0"/>
                         </a:rPr>
-                        <a:t>Zero diagnostic communication is found in </a:t>
+                        <a:t>Zero diagnostic communication is found in EP. 100% number of</a:t>
                       </a:r>
                       <a:r>
-                        <a:rPr lang="en-US" sz="1600" b="0" smtClean="0">
-                          <a:latin typeface="+mn-lt"/>
-                          <a:cs typeface="Arial" panose="020B0604020202020204" pitchFamily="34" charset="0"/>
-                        </a:rPr>
-                        <a:t>EP. 100% number of</a:t>
-                      </a:r>
-                      <a:r>
-                        <a:rPr lang="en-US" sz="1600" b="0" baseline="0" smtClean="0">
+                        <a:rPr lang="en-US" sz="1600" b="0" baseline="0">
                           <a:latin typeface="+mn-lt"/>
                           <a:cs typeface="Arial" panose="020B0604020202020204" pitchFamily="34" charset="0"/>
                         </a:rPr>
@@ -17039,7 +16240,7 @@
                 </a:tc>
                 <a:extLst>
                   <a:ext uri="{0D108BD9-81ED-4DB2-BD59-A6C34878D82A}">
-                    <a16:rowId xmlns:a16="http://schemas.microsoft.com/office/drawing/2014/main" xmlns="" val="10002"/>
+                    <a16:rowId xmlns:a16="http://schemas.microsoft.com/office/drawing/2014/main" val="10002"/>
                   </a:ext>
                 </a:extLst>
               </a:tr>
@@ -17055,7 +16256,7 @@
                         </a:lnSpc>
                       </a:pPr>
                       <a:r>
-                        <a:rPr lang="en-US" sz="1600" b="0" kern="1200" smtClean="0">
+                        <a:rPr lang="en-US" sz="1600" b="0" kern="1200">
                           <a:solidFill>
                             <a:schemeClr val="dk1"/>
                           </a:solidFill>
@@ -17066,15 +16267,6 @@
                         </a:rPr>
                         <a:t>QA-03</a:t>
                       </a:r>
-                      <a:endParaRPr lang="en-US" sz="1600" b="0" kern="1200">
-                        <a:solidFill>
-                          <a:schemeClr val="dk1"/>
-                        </a:solidFill>
-                        <a:effectLst/>
-                        <a:latin typeface="+mn-lt"/>
-                        <a:ea typeface="+mn-ea"/>
-                        <a:cs typeface="Arial" panose="020B0604020202020204" pitchFamily="34" charset="0"/>
-                      </a:endParaRPr>
                     </a:p>
                   </a:txBody>
                   <a:tcPr marL="106700" marR="106700" marT="53350" marB="53350" anchor="ctr">
@@ -17133,7 +16325,7 @@
                         </a:spcAft>
                       </a:pPr>
                       <a:r>
-                        <a:rPr lang="en-US" sz="1600" b="0" kern="1200" baseline="0" smtClean="0">
+                        <a:rPr lang="en-US" sz="1600" b="0" kern="1200" baseline="0">
                           <a:solidFill>
                             <a:schemeClr val="dk1"/>
                           </a:solidFill>
@@ -17144,15 +16336,6 @@
                         </a:rPr>
                         <a:t>The new design preserves the original core responsibility of each component.</a:t>
                       </a:r>
-                      <a:endParaRPr lang="en-US" sz="1600" b="0" kern="1200" baseline="0">
-                        <a:solidFill>
-                          <a:schemeClr val="dk1"/>
-                        </a:solidFill>
-                        <a:effectLst/>
-                        <a:latin typeface="+mn-lt"/>
-                        <a:ea typeface="+mn-ea"/>
-                        <a:cs typeface="Arial" panose="020B0604020202020204" pitchFamily="34" charset="0"/>
-                      </a:endParaRPr>
                     </a:p>
                   </a:txBody>
                   <a:tcPr marL="25400" marR="25400" marT="0" marB="0" anchor="ctr">
@@ -17217,7 +16400,7 @@
                         <a:defRPr/>
                       </a:pPr>
                       <a:r>
-                        <a:rPr lang="en-US" sz="1600" b="0" kern="1200" baseline="0" smtClean="0">
+                        <a:rPr lang="en-US" sz="1600" b="0" kern="1200" baseline="0">
                           <a:solidFill>
                             <a:schemeClr val="dk1"/>
                           </a:solidFill>
@@ -17248,7 +16431,7 @@
                         <a:defRPr/>
                       </a:pPr>
                       <a:r>
-                        <a:rPr lang="en-US" sz="1600" b="0" smtClean="0">
+                        <a:rPr lang="en-US" sz="1600" b="0">
                           <a:effectLst/>
                           <a:latin typeface="+mn-lt"/>
                           <a:ea typeface="Malgun Gothic" panose="020B0503020000020004" pitchFamily="34" charset="-127"/>
@@ -17256,420 +16439,6 @@
                         </a:rPr>
                         <a:t>No additional specification updates caused by responsibility expansion.</a:t>
                       </a:r>
-                      <a:endParaRPr lang="en-US" sz="1600" b="0">
-                        <a:effectLst/>
-                        <a:latin typeface="+mn-lt"/>
-                        <a:ea typeface="Malgun Gothic" panose="020B0503020000020004" pitchFamily="34" charset="-127"/>
-                        <a:cs typeface="Arial" panose="020B0604020202020204" pitchFamily="34" charset="0"/>
-                      </a:endParaRPr>
-                    </a:p>
-                  </a:txBody>
-                  <a:tcPr marL="106700" marR="106700" marT="53350" marB="53350" anchor="ctr">
-                    <a:lnL w="12700" cap="flat" cmpd="sng" algn="ctr">
-                      <a:solidFill>
-                        <a:schemeClr val="tx1"/>
-                      </a:solidFill>
-                      <a:prstDash val="solid"/>
-                      <a:round/>
-                      <a:headEnd type="none" w="med" len="med"/>
-                      <a:tailEnd type="none" w="med" len="med"/>
-                    </a:lnL>
-                    <a:lnR w="12700" cap="flat" cmpd="sng" algn="ctr">
-                      <a:solidFill>
-                        <a:schemeClr val="tx1"/>
-                      </a:solidFill>
-                      <a:prstDash val="solid"/>
-                      <a:round/>
-                      <a:headEnd type="none" w="med" len="med"/>
-                      <a:tailEnd type="none" w="med" len="med"/>
-                    </a:lnR>
-                    <a:lnT w="12700" cap="flat" cmpd="sng" algn="ctr">
-                      <a:solidFill>
-                        <a:schemeClr val="tx1"/>
-                      </a:solidFill>
-                      <a:prstDash val="solid"/>
-                      <a:round/>
-                      <a:headEnd type="none" w="med" len="med"/>
-                      <a:tailEnd type="none" w="med" len="med"/>
-                    </a:lnT>
-                    <a:lnB w="12700" cap="flat" cmpd="sng" algn="ctr">
-                      <a:solidFill>
-                        <a:schemeClr val="tx1"/>
-                      </a:solidFill>
-                      <a:prstDash val="solid"/>
-                      <a:round/>
-                      <a:headEnd type="none" w="med" len="med"/>
-                      <a:tailEnd type="none" w="med" len="med"/>
-                    </a:lnB>
-                  </a:tcPr>
-                </a:tc>
-                <a:tc>
-                  <a:txBody>
-                    <a:bodyPr/>
-                    <a:lstStyle/>
-                    <a:p>
-                      <a:pPr marL="0" marR="0" indent="0" algn="l" defTabSz="914400" rtl="0" eaLnBrk="1" fontAlgn="auto" latinLnBrk="0" hangingPunct="1">
-                        <a:lnSpc>
-                          <a:spcPct val="150000"/>
-                        </a:lnSpc>
-                        <a:spcBef>
-                          <a:spcPts val="0"/>
-                        </a:spcBef>
-                        <a:spcAft>
-                          <a:spcPts val="0"/>
-                        </a:spcAft>
-                        <a:buClrTx/>
-                        <a:buSzTx/>
-                        <a:buFontTx/>
-                        <a:buNone/>
-                        <a:tabLst/>
-                        <a:defRPr/>
-                      </a:pPr>
-                      <a:r>
-                        <a:rPr lang="en-US" sz="1600" b="0" smtClean="0">
-                          <a:effectLst/>
-                          <a:latin typeface="+mn-lt"/>
-                          <a:ea typeface="Malgun Gothic" panose="020B0503020000020004" pitchFamily="34" charset="-127"/>
-                          <a:cs typeface="Arial" panose="020B0604020202020204" pitchFamily="34" charset="0"/>
-                        </a:rPr>
-                        <a:t>Modifiability</a:t>
-                      </a:r>
-                      <a:endParaRPr lang="en-US" sz="1600" b="0">
-                        <a:effectLst/>
-                        <a:latin typeface="+mn-lt"/>
-                        <a:ea typeface="Malgun Gothic" panose="020B0503020000020004" pitchFamily="34" charset="-127"/>
-                        <a:cs typeface="Arial" panose="020B0604020202020204" pitchFamily="34" charset="0"/>
-                      </a:endParaRPr>
-                    </a:p>
-                  </a:txBody>
-                  <a:tcPr marL="106700" marR="106700" marT="53350" marB="53350" anchor="ctr">
-                    <a:lnL w="12700" cap="flat" cmpd="sng" algn="ctr">
-                      <a:solidFill>
-                        <a:schemeClr val="tx1"/>
-                      </a:solidFill>
-                      <a:prstDash val="solid"/>
-                      <a:round/>
-                      <a:headEnd type="none" w="med" len="med"/>
-                      <a:tailEnd type="none" w="med" len="med"/>
-                    </a:lnL>
-                    <a:lnR w="12700" cap="flat" cmpd="sng" algn="ctr">
-                      <a:solidFill>
-                        <a:schemeClr val="tx1"/>
-                      </a:solidFill>
-                      <a:prstDash val="solid"/>
-                      <a:round/>
-                      <a:headEnd type="none" w="med" len="med"/>
-                      <a:tailEnd type="none" w="med" len="med"/>
-                    </a:lnR>
-                    <a:lnT w="12700" cap="flat" cmpd="sng" algn="ctr">
-                      <a:solidFill>
-                        <a:schemeClr val="tx1"/>
-                      </a:solidFill>
-                      <a:prstDash val="solid"/>
-                      <a:round/>
-                      <a:headEnd type="none" w="med" len="med"/>
-                      <a:tailEnd type="none" w="med" len="med"/>
-                    </a:lnT>
-                    <a:lnB w="12700" cap="flat" cmpd="sng" algn="ctr">
-                      <a:solidFill>
-                        <a:schemeClr val="tx1"/>
-                      </a:solidFill>
-                      <a:prstDash val="solid"/>
-                      <a:round/>
-                      <a:headEnd type="none" w="med" len="med"/>
-                      <a:tailEnd type="none" w="med" len="med"/>
-                    </a:lnB>
-                  </a:tcPr>
-                </a:tc>
-                <a:tc>
-                  <a:txBody>
-                    <a:bodyPr/>
-                    <a:lstStyle/>
-                    <a:p>
-                      <a:pPr algn="l" latinLnBrk="0">
-                        <a:lnSpc>
-                          <a:spcPct val="150000"/>
-                        </a:lnSpc>
-                      </a:pPr>
-                      <a:r>
-                        <a:rPr lang="en-US" sz="1600" b="0" smtClean="0">
-                          <a:latin typeface="+mn-lt"/>
-                          <a:cs typeface="Arial" panose="020B0604020202020204" pitchFamily="34" charset="0"/>
-                        </a:rPr>
-                        <a:t>High</a:t>
-                      </a:r>
-                      <a:endParaRPr lang="en-US" sz="1600" b="0">
-                        <a:latin typeface="+mn-lt"/>
-                        <a:cs typeface="Arial" panose="020B0604020202020204" pitchFamily="34" charset="0"/>
-                      </a:endParaRPr>
-                    </a:p>
-                  </a:txBody>
-                  <a:tcPr marL="106700" marR="106700" marT="53350" marB="53350" anchor="ctr">
-                    <a:lnL w="12700" cap="flat" cmpd="sng" algn="ctr">
-                      <a:solidFill>
-                        <a:schemeClr val="tx1"/>
-                      </a:solidFill>
-                      <a:prstDash val="solid"/>
-                      <a:round/>
-                      <a:headEnd type="none" w="med" len="med"/>
-                      <a:tailEnd type="none" w="med" len="med"/>
-                    </a:lnL>
-                    <a:lnR w="12700" cap="flat" cmpd="sng" algn="ctr">
-                      <a:solidFill>
-                        <a:schemeClr val="tx1"/>
-                      </a:solidFill>
-                      <a:prstDash val="solid"/>
-                      <a:round/>
-                      <a:headEnd type="none" w="med" len="med"/>
-                      <a:tailEnd type="none" w="med" len="med"/>
-                    </a:lnR>
-                    <a:lnT w="12700" cap="flat" cmpd="sng" algn="ctr">
-                      <a:solidFill>
-                        <a:schemeClr val="tx1"/>
-                      </a:solidFill>
-                      <a:prstDash val="solid"/>
-                      <a:round/>
-                      <a:headEnd type="none" w="med" len="med"/>
-                      <a:tailEnd type="none" w="med" len="med"/>
-                    </a:lnT>
-                    <a:lnB w="12700" cap="flat" cmpd="sng" algn="ctr">
-                      <a:solidFill>
-                        <a:schemeClr val="tx1"/>
-                      </a:solidFill>
-                      <a:prstDash val="solid"/>
-                      <a:round/>
-                      <a:headEnd type="none" w="med" len="med"/>
-                      <a:tailEnd type="none" w="med" len="med"/>
-                    </a:lnB>
-                  </a:tcPr>
-                </a:tc>
-                <a:extLst>
-                  <a:ext uri="{0D108BD9-81ED-4DB2-BD59-A6C34878D82A}">
-                    <a16:rowId xmlns:a16="http://schemas.microsoft.com/office/drawing/2014/main" xmlns="" val="10003"/>
-                  </a:ext>
-                </a:extLst>
-              </a:tr>
-              <a:tr h="0">
-                <a:tc>
-                  <a:txBody>
-                    <a:bodyPr/>
-                    <a:lstStyle/>
-                    <a:p>
-                      <a:pPr algn="l" latinLnBrk="0">
-                        <a:lnSpc>
-                          <a:spcPct val="150000"/>
-                        </a:lnSpc>
-                      </a:pPr>
-                      <a:r>
-                        <a:rPr lang="en-US" sz="1600" b="0" kern="1200" smtClean="0">
-                          <a:solidFill>
-                            <a:schemeClr val="dk1"/>
-                          </a:solidFill>
-                          <a:effectLst/>
-                          <a:latin typeface="+mn-lt"/>
-                          <a:ea typeface="+mn-ea"/>
-                          <a:cs typeface="Arial" panose="020B0604020202020204" pitchFamily="34" charset="0"/>
-                        </a:rPr>
-                        <a:t>QA-04</a:t>
-                      </a:r>
-                      <a:endParaRPr lang="en-US" sz="1600" b="0" kern="1200">
-                        <a:solidFill>
-                          <a:schemeClr val="dk1"/>
-                        </a:solidFill>
-                        <a:effectLst/>
-                        <a:latin typeface="+mn-lt"/>
-                        <a:ea typeface="+mn-ea"/>
-                        <a:cs typeface="Arial" panose="020B0604020202020204" pitchFamily="34" charset="0"/>
-                      </a:endParaRPr>
-                    </a:p>
-                  </a:txBody>
-                  <a:tcPr marL="106700" marR="106700" marT="53350" marB="53350" anchor="ctr">
-                    <a:lnL w="12700" cap="flat" cmpd="sng" algn="ctr">
-                      <a:solidFill>
-                        <a:schemeClr val="tx1"/>
-                      </a:solidFill>
-                      <a:prstDash val="solid"/>
-                      <a:round/>
-                      <a:headEnd type="none" w="med" len="med"/>
-                      <a:tailEnd type="none" w="med" len="med"/>
-                    </a:lnL>
-                    <a:lnR w="12700" cap="flat" cmpd="sng" algn="ctr">
-                      <a:solidFill>
-                        <a:schemeClr val="tx1"/>
-                      </a:solidFill>
-                      <a:prstDash val="solid"/>
-                      <a:round/>
-                      <a:headEnd type="none" w="med" len="med"/>
-                      <a:tailEnd type="none" w="med" len="med"/>
-                    </a:lnR>
-                    <a:lnT w="12700" cap="flat" cmpd="sng" algn="ctr">
-                      <a:solidFill>
-                        <a:schemeClr val="tx1"/>
-                      </a:solidFill>
-                      <a:prstDash val="solid"/>
-                      <a:round/>
-                      <a:headEnd type="none" w="med" len="med"/>
-                      <a:tailEnd type="none" w="med" len="med"/>
-                    </a:lnT>
-                    <a:lnB w="12700" cap="flat" cmpd="sng" algn="ctr">
-                      <a:solidFill>
-                        <a:schemeClr val="tx1"/>
-                      </a:solidFill>
-                      <a:prstDash val="solid"/>
-                      <a:round/>
-                      <a:headEnd type="none" w="med" len="med"/>
-                      <a:tailEnd type="none" w="med" len="med"/>
-                    </a:lnB>
-                  </a:tcPr>
-                </a:tc>
-                <a:tc>
-                  <a:txBody>
-                    <a:bodyPr/>
-                    <a:lstStyle/>
-                    <a:p>
-                      <a:pPr marL="0" marR="0" algn="l">
-                        <a:lnSpc>
-                          <a:spcPct val="150000"/>
-                        </a:lnSpc>
-                        <a:spcBef>
-                          <a:spcPts val="200"/>
-                        </a:spcBef>
-                        <a:spcAft>
-                          <a:spcPts val="200"/>
-                        </a:spcAft>
-                      </a:pPr>
-                      <a:r>
-                        <a:rPr lang="en-US" sz="1600" b="0" kern="1200" baseline="0">
-                          <a:solidFill>
-                            <a:schemeClr val="dk1"/>
-                          </a:solidFill>
-                          <a:effectLst/>
-                          <a:latin typeface="+mn-lt"/>
-                          <a:ea typeface="+mn-ea"/>
-                          <a:cs typeface="Arial" panose="020B0604020202020204" pitchFamily="34" charset="0"/>
-                        </a:rPr>
-                        <a:t>Existing software </a:t>
-                      </a:r>
-                      <a:r>
-                        <a:rPr lang="en-US" sz="1600" b="0" kern="1200" baseline="0" smtClean="0">
-                          <a:solidFill>
-                            <a:schemeClr val="dk1"/>
-                          </a:solidFill>
-                          <a:effectLst/>
-                          <a:latin typeface="+mn-lt"/>
-                          <a:ea typeface="+mn-ea"/>
-                          <a:cs typeface="Arial" panose="020B0604020202020204" pitchFamily="34" charset="0"/>
-                        </a:rPr>
-                        <a:t>components (other than RemoteDiag) </a:t>
-                      </a:r>
-                      <a:r>
-                        <a:rPr lang="en-US" sz="1600" b="0" kern="1200" baseline="0">
-                          <a:solidFill>
-                            <a:schemeClr val="dk1"/>
-                          </a:solidFill>
-                          <a:effectLst/>
-                          <a:latin typeface="+mn-lt"/>
-                          <a:ea typeface="+mn-ea"/>
-                          <a:cs typeface="Arial" panose="020B0604020202020204" pitchFamily="34" charset="0"/>
-                        </a:rPr>
-                        <a:t>require minimal changes.</a:t>
-                      </a:r>
-                    </a:p>
-                  </a:txBody>
-                  <a:tcPr marL="25400" marR="25400" marT="0" marB="0" anchor="ctr">
-                    <a:lnL w="12700" cap="flat" cmpd="sng" algn="ctr">
-                      <a:solidFill>
-                        <a:schemeClr val="tx1"/>
-                      </a:solidFill>
-                      <a:prstDash val="solid"/>
-                      <a:round/>
-                      <a:headEnd type="none" w="med" len="med"/>
-                      <a:tailEnd type="none" w="med" len="med"/>
-                    </a:lnL>
-                    <a:lnR w="12700" cap="flat" cmpd="sng" algn="ctr">
-                      <a:solidFill>
-                        <a:schemeClr val="tx1"/>
-                      </a:solidFill>
-                      <a:prstDash val="solid"/>
-                      <a:round/>
-                      <a:headEnd type="none" w="med" len="med"/>
-                      <a:tailEnd type="none" w="med" len="med"/>
-                    </a:lnR>
-                    <a:lnT w="12700" cap="flat" cmpd="sng" algn="ctr">
-                      <a:solidFill>
-                        <a:schemeClr val="tx1"/>
-                      </a:solidFill>
-                      <a:prstDash val="solid"/>
-                      <a:round/>
-                      <a:headEnd type="none" w="med" len="med"/>
-                      <a:tailEnd type="none" w="med" len="med"/>
-                    </a:lnT>
-                    <a:lnB w="12700" cap="flat" cmpd="sng" algn="ctr">
-                      <a:solidFill>
-                        <a:schemeClr val="tx1"/>
-                      </a:solidFill>
-                      <a:prstDash val="solid"/>
-                      <a:round/>
-                      <a:headEnd type="none" w="med" len="med"/>
-                      <a:tailEnd type="none" w="med" len="med"/>
-                    </a:lnB>
-                  </a:tcPr>
-                </a:tc>
-                <a:tc>
-                  <a:txBody>
-                    <a:bodyPr/>
-                    <a:lstStyle/>
-                    <a:p>
-                      <a:pPr marL="0" marR="0" indent="0" algn="l" defTabSz="914400" rtl="0" eaLnBrk="1" fontAlgn="auto" latinLnBrk="0" hangingPunct="1">
-                        <a:lnSpc>
-                          <a:spcPct val="150000"/>
-                        </a:lnSpc>
-                        <a:spcBef>
-                          <a:spcPts val="0"/>
-                        </a:spcBef>
-                        <a:spcAft>
-                          <a:spcPts val="0"/>
-                        </a:spcAft>
-                        <a:buClrTx/>
-                        <a:buSzTx/>
-                        <a:buFontTx/>
-                        <a:buNone/>
-                        <a:tabLst/>
-                        <a:defRPr/>
-                      </a:pPr>
-                      <a:r>
-                        <a:rPr lang="en-US" sz="1600" b="0">
-                          <a:effectLst/>
-                          <a:latin typeface="+mn-lt"/>
-                          <a:ea typeface="Malgun Gothic" panose="020B0503020000020004" pitchFamily="34" charset="-127"/>
-                          <a:cs typeface="Arial" panose="020B0604020202020204" pitchFamily="34" charset="0"/>
-                        </a:rPr>
-                        <a:t>Number of </a:t>
-                      </a:r>
-                      <a:r>
-                        <a:rPr lang="en-US" sz="1600" b="0" smtClean="0">
-                          <a:effectLst/>
-                          <a:latin typeface="+mn-lt"/>
-                          <a:ea typeface="Malgun Gothic" panose="020B0503020000020004" pitchFamily="34" charset="-127"/>
-                          <a:cs typeface="Arial" panose="020B0604020202020204" pitchFamily="34" charset="0"/>
-                        </a:rPr>
-                        <a:t>component</a:t>
-                      </a:r>
-                      <a:r>
-                        <a:rPr lang="en-US" sz="1600" b="0" baseline="0" smtClean="0">
-                          <a:effectLst/>
-                          <a:latin typeface="+mn-lt"/>
-                          <a:ea typeface="Malgun Gothic" panose="020B0503020000020004" pitchFamily="34" charset="-127"/>
-                          <a:cs typeface="Arial" panose="020B0604020202020204" pitchFamily="34" charset="0"/>
-                        </a:rPr>
-                        <a:t> which needs to modify to align with new design </a:t>
-                      </a:r>
-                      <a:endParaRPr lang="en-US" sz="1600" b="0">
-                        <a:effectLst/>
-                        <a:latin typeface="+mn-lt"/>
-                        <a:ea typeface="Malgun Gothic" panose="020B0503020000020004" pitchFamily="34" charset="-127"/>
-                        <a:cs typeface="Arial" panose="020B0604020202020204" pitchFamily="34" charset="0"/>
-                      </a:endParaRPr>
                     </a:p>
                   </a:txBody>
                   <a:tcPr marL="106700" marR="106700" marT="53350" marB="53350" anchor="ctr">
@@ -17798,7 +16567,7 @@
                           <a:latin typeface="+mn-lt"/>
                           <a:cs typeface="Arial" panose="020B0604020202020204" pitchFamily="34" charset="0"/>
                         </a:rPr>
-                        <a:t>Medium</a:t>
+                        <a:t>High</a:t>
                       </a:r>
                     </a:p>
                   </a:txBody>
@@ -17843,7 +16612,7 @@
                 </a:tc>
                 <a:extLst>
                   <a:ext uri="{0D108BD9-81ED-4DB2-BD59-A6C34878D82A}">
-                    <a16:rowId xmlns:a16="http://schemas.microsoft.com/office/drawing/2014/main" xmlns="" val="10004"/>
+                    <a16:rowId xmlns:a16="http://schemas.microsoft.com/office/drawing/2014/main" val="10003"/>
                   </a:ext>
                 </a:extLst>
               </a:tr>
@@ -17859,7 +16628,7 @@
                         </a:lnSpc>
                       </a:pPr>
                       <a:r>
-                        <a:rPr lang="en-US" sz="1600" b="0" kern="1200" smtClean="0">
+                        <a:rPr lang="en-US" sz="1600" b="0" kern="1200">
                           <a:solidFill>
                             <a:schemeClr val="dk1"/>
                           </a:solidFill>
@@ -17868,17 +16637,8 @@
                           <a:ea typeface="+mn-ea"/>
                           <a:cs typeface="Arial" panose="020B0604020202020204" pitchFamily="34" charset="0"/>
                         </a:rPr>
-                        <a:t>QA-05</a:t>
+                        <a:t>QA-04</a:t>
                       </a:r>
-                      <a:endParaRPr lang="en-US" sz="1600" b="0" kern="1200">
-                        <a:solidFill>
-                          <a:schemeClr val="dk1"/>
-                        </a:solidFill>
-                        <a:effectLst/>
-                        <a:latin typeface="+mn-lt"/>
-                        <a:ea typeface="+mn-ea"/>
-                        <a:cs typeface="Arial" panose="020B0604020202020204" pitchFamily="34" charset="0"/>
-                      </a:endParaRPr>
                     </a:p>
                   </a:txBody>
                   <a:tcPr marL="106700" marR="106700" marT="53350" marB="53350" anchor="ctr">
@@ -17937,7 +16697,7 @@
                         </a:spcAft>
                       </a:pPr>
                       <a:r>
-                        <a:rPr lang="en-US" sz="1600" b="0" kern="1200" baseline="0" smtClean="0">
+                        <a:rPr lang="en-US" sz="1600" b="0" kern="1200" baseline="0">
                           <a:solidFill>
                             <a:schemeClr val="dk1"/>
                           </a:solidFill>
@@ -17946,17 +16706,8 @@
                           <a:ea typeface="+mn-ea"/>
                           <a:cs typeface="Arial" panose="020B0604020202020204" pitchFamily="34" charset="0"/>
                         </a:rPr>
-                        <a:t>Failure in OEM Center flow or MM ECU flow</a:t>
+                        <a:t>Existing software components (other than RemoteDiag) require minimal changes.</a:t>
                       </a:r>
-                      <a:endParaRPr lang="en-US" sz="1600" b="0" kern="1200" baseline="0">
-                        <a:solidFill>
-                          <a:schemeClr val="dk1"/>
-                        </a:solidFill>
-                        <a:effectLst/>
-                        <a:latin typeface="+mn-lt"/>
-                        <a:ea typeface="+mn-ea"/>
-                        <a:cs typeface="Arial" panose="020B0604020202020204" pitchFamily="34" charset="0"/>
-                      </a:endParaRPr>
                     </a:p>
                   </a:txBody>
                   <a:tcPr marL="25400" marR="25400" marT="0" marB="0" anchor="ctr">
@@ -18021,31 +16772,22 @@
                         <a:defRPr/>
                       </a:pPr>
                       <a:r>
-                        <a:rPr lang="en-US" sz="1600" b="0" smtClean="0">
+                        <a:rPr lang="en-US" sz="1600" b="0">
                           <a:effectLst/>
                           <a:latin typeface="+mn-lt"/>
                           <a:ea typeface="Malgun Gothic" panose="020B0503020000020004" pitchFamily="34" charset="-127"/>
                           <a:cs typeface="Arial" panose="020B0604020202020204" pitchFamily="34" charset="0"/>
                         </a:rPr>
-                        <a:t>The other</a:t>
+                        <a:t>Number of component</a:t>
                       </a:r>
                       <a:r>
-                        <a:rPr lang="en-US" sz="1600" b="0" baseline="0" smtClean="0">
+                        <a:rPr lang="en-US" sz="1600" b="0" baseline="0">
                           <a:effectLst/>
                           <a:latin typeface="+mn-lt"/>
                           <a:ea typeface="Malgun Gothic" panose="020B0503020000020004" pitchFamily="34" charset="-127"/>
                           <a:cs typeface="Arial" panose="020B0604020202020204" pitchFamily="34" charset="0"/>
                         </a:rPr>
-                        <a:t> </a:t>
-                      </a:r>
-                      <a:r>
-                        <a:rPr lang="en-US" sz="1600" b="0" smtClean="0">
-                          <a:effectLst/>
-                          <a:latin typeface="+mn-lt"/>
-                          <a:ea typeface="Malgun Gothic" panose="020B0503020000020004" pitchFamily="34" charset="-127"/>
-                          <a:cs typeface="Arial" panose="020B0604020202020204" pitchFamily="34" charset="0"/>
-                        </a:rPr>
-                        <a:t>flow remains operational</a:t>
+                        <a:t> which needs to modify to align with new design </a:t>
                       </a:r>
                       <a:endParaRPr lang="en-US" sz="1600" b="0">
                         <a:effectLst/>
@@ -18117,20 +16859,14 @@
                         <a:defRPr/>
                       </a:pPr>
                       <a:r>
-                        <a:rPr lang="en-US" sz="1600" b="0" smtClean="0">
+                        <a:rPr lang="en-US" sz="1600" b="0">
                           <a:effectLst/>
                           <a:latin typeface="+mn-lt"/>
                           <a:ea typeface="Malgun Gothic" panose="020B0503020000020004" pitchFamily="34" charset="-127"/>
                           <a:cs typeface="Arial" panose="020B0604020202020204" pitchFamily="34" charset="0"/>
                         </a:rPr>
-                        <a:t>Availability</a:t>
+                        <a:t>Modifiability</a:t>
                       </a:r>
-                      <a:endParaRPr lang="en-US" sz="1600" b="0">
-                        <a:effectLst/>
-                        <a:latin typeface="+mn-lt"/>
-                        <a:ea typeface="Malgun Gothic" panose="020B0503020000020004" pitchFamily="34" charset="-127"/>
-                        <a:cs typeface="Arial" panose="020B0604020202020204" pitchFamily="34" charset="0"/>
-                      </a:endParaRPr>
                     </a:p>
                   </a:txBody>
                   <a:tcPr marL="106700" marR="106700" marT="53350" marB="53350" anchor="ctr">
@@ -18183,16 +16919,371 @@
                         </a:lnSpc>
                       </a:pPr>
                       <a:r>
-                        <a:rPr lang="en-US" sz="1600" b="0" smtClean="0">
+                        <a:rPr lang="en-US" sz="1600" b="0">
+                          <a:latin typeface="+mn-lt"/>
+                          <a:cs typeface="Arial" panose="020B0604020202020204" pitchFamily="34" charset="0"/>
+                        </a:rPr>
+                        <a:t>Medium</a:t>
+                      </a:r>
+                    </a:p>
+                  </a:txBody>
+                  <a:tcPr marL="106700" marR="106700" marT="53350" marB="53350" anchor="ctr">
+                    <a:lnL w="12700" cap="flat" cmpd="sng" algn="ctr">
+                      <a:solidFill>
+                        <a:schemeClr val="tx1"/>
+                      </a:solidFill>
+                      <a:prstDash val="solid"/>
+                      <a:round/>
+                      <a:headEnd type="none" w="med" len="med"/>
+                      <a:tailEnd type="none" w="med" len="med"/>
+                    </a:lnL>
+                    <a:lnR w="12700" cap="flat" cmpd="sng" algn="ctr">
+                      <a:solidFill>
+                        <a:schemeClr val="tx1"/>
+                      </a:solidFill>
+                      <a:prstDash val="solid"/>
+                      <a:round/>
+                      <a:headEnd type="none" w="med" len="med"/>
+                      <a:tailEnd type="none" w="med" len="med"/>
+                    </a:lnR>
+                    <a:lnT w="12700" cap="flat" cmpd="sng" algn="ctr">
+                      <a:solidFill>
+                        <a:schemeClr val="tx1"/>
+                      </a:solidFill>
+                      <a:prstDash val="solid"/>
+                      <a:round/>
+                      <a:headEnd type="none" w="med" len="med"/>
+                      <a:tailEnd type="none" w="med" len="med"/>
+                    </a:lnT>
+                    <a:lnB w="12700" cap="flat" cmpd="sng" algn="ctr">
+                      <a:solidFill>
+                        <a:schemeClr val="tx1"/>
+                      </a:solidFill>
+                      <a:prstDash val="solid"/>
+                      <a:round/>
+                      <a:headEnd type="none" w="med" len="med"/>
+                      <a:tailEnd type="none" w="med" len="med"/>
+                    </a:lnB>
+                  </a:tcPr>
+                </a:tc>
+                <a:extLst>
+                  <a:ext uri="{0D108BD9-81ED-4DB2-BD59-A6C34878D82A}">
+                    <a16:rowId xmlns:a16="http://schemas.microsoft.com/office/drawing/2014/main" val="10004"/>
+                  </a:ext>
+                </a:extLst>
+              </a:tr>
+              <a:tr h="0">
+                <a:tc>
+                  <a:txBody>
+                    <a:bodyPr/>
+                    <a:lstStyle/>
+                    <a:p>
+                      <a:pPr algn="l" latinLnBrk="0">
+                        <a:lnSpc>
+                          <a:spcPct val="150000"/>
+                        </a:lnSpc>
+                      </a:pPr>
+                      <a:r>
+                        <a:rPr lang="en-US" sz="1600" b="0" kern="1200">
+                          <a:solidFill>
+                            <a:schemeClr val="dk1"/>
+                          </a:solidFill>
+                          <a:effectLst/>
+                          <a:latin typeface="+mn-lt"/>
+                          <a:ea typeface="+mn-ea"/>
+                          <a:cs typeface="Arial" panose="020B0604020202020204" pitchFamily="34" charset="0"/>
+                        </a:rPr>
+                        <a:t>QA-05</a:t>
+                      </a:r>
+                    </a:p>
+                  </a:txBody>
+                  <a:tcPr marL="106700" marR="106700" marT="53350" marB="53350" anchor="ctr">
+                    <a:lnL w="12700" cap="flat" cmpd="sng" algn="ctr">
+                      <a:solidFill>
+                        <a:schemeClr val="tx1"/>
+                      </a:solidFill>
+                      <a:prstDash val="solid"/>
+                      <a:round/>
+                      <a:headEnd type="none" w="med" len="med"/>
+                      <a:tailEnd type="none" w="med" len="med"/>
+                    </a:lnL>
+                    <a:lnR w="12700" cap="flat" cmpd="sng" algn="ctr">
+                      <a:solidFill>
+                        <a:schemeClr val="tx1"/>
+                      </a:solidFill>
+                      <a:prstDash val="solid"/>
+                      <a:round/>
+                      <a:headEnd type="none" w="med" len="med"/>
+                      <a:tailEnd type="none" w="med" len="med"/>
+                    </a:lnR>
+                    <a:lnT w="12700" cap="flat" cmpd="sng" algn="ctr">
+                      <a:solidFill>
+                        <a:schemeClr val="tx1"/>
+                      </a:solidFill>
+                      <a:prstDash val="solid"/>
+                      <a:round/>
+                      <a:headEnd type="none" w="med" len="med"/>
+                      <a:tailEnd type="none" w="med" len="med"/>
+                    </a:lnT>
+                    <a:lnB w="12700" cap="flat" cmpd="sng" algn="ctr">
+                      <a:solidFill>
+                        <a:schemeClr val="tx1"/>
+                      </a:solidFill>
+                      <a:prstDash val="solid"/>
+                      <a:round/>
+                      <a:headEnd type="none" w="med" len="med"/>
+                      <a:tailEnd type="none" w="med" len="med"/>
+                    </a:lnB>
+                  </a:tcPr>
+                </a:tc>
+                <a:tc>
+                  <a:txBody>
+                    <a:bodyPr/>
+                    <a:lstStyle/>
+                    <a:p>
+                      <a:pPr marL="0" marR="0" algn="l">
+                        <a:lnSpc>
+                          <a:spcPct val="150000"/>
+                        </a:lnSpc>
+                        <a:spcBef>
+                          <a:spcPts val="200"/>
+                        </a:spcBef>
+                        <a:spcAft>
+                          <a:spcPts val="200"/>
+                        </a:spcAft>
+                      </a:pPr>
+                      <a:r>
+                        <a:rPr lang="en-US" sz="1600" b="0" kern="1200" baseline="0">
+                          <a:solidFill>
+                            <a:schemeClr val="dk1"/>
+                          </a:solidFill>
+                          <a:effectLst/>
+                          <a:latin typeface="+mn-lt"/>
+                          <a:ea typeface="+mn-ea"/>
+                          <a:cs typeface="Arial" panose="020B0604020202020204" pitchFamily="34" charset="0"/>
+                        </a:rPr>
+                        <a:t>Failure in OEM Center flow or MM ECU flow</a:t>
+                      </a:r>
+                    </a:p>
+                  </a:txBody>
+                  <a:tcPr marL="25400" marR="25400" marT="0" marB="0" anchor="ctr">
+                    <a:lnL w="12700" cap="flat" cmpd="sng" algn="ctr">
+                      <a:solidFill>
+                        <a:schemeClr val="tx1"/>
+                      </a:solidFill>
+                      <a:prstDash val="solid"/>
+                      <a:round/>
+                      <a:headEnd type="none" w="med" len="med"/>
+                      <a:tailEnd type="none" w="med" len="med"/>
+                    </a:lnL>
+                    <a:lnR w="12700" cap="flat" cmpd="sng" algn="ctr">
+                      <a:solidFill>
+                        <a:schemeClr val="tx1"/>
+                      </a:solidFill>
+                      <a:prstDash val="solid"/>
+                      <a:round/>
+                      <a:headEnd type="none" w="med" len="med"/>
+                      <a:tailEnd type="none" w="med" len="med"/>
+                    </a:lnR>
+                    <a:lnT w="12700" cap="flat" cmpd="sng" algn="ctr">
+                      <a:solidFill>
+                        <a:schemeClr val="tx1"/>
+                      </a:solidFill>
+                      <a:prstDash val="solid"/>
+                      <a:round/>
+                      <a:headEnd type="none" w="med" len="med"/>
+                      <a:tailEnd type="none" w="med" len="med"/>
+                    </a:lnT>
+                    <a:lnB w="12700" cap="flat" cmpd="sng" algn="ctr">
+                      <a:solidFill>
+                        <a:schemeClr val="tx1"/>
+                      </a:solidFill>
+                      <a:prstDash val="solid"/>
+                      <a:round/>
+                      <a:headEnd type="none" w="med" len="med"/>
+                      <a:tailEnd type="none" w="med" len="med"/>
+                    </a:lnB>
+                  </a:tcPr>
+                </a:tc>
+                <a:tc>
+                  <a:txBody>
+                    <a:bodyPr/>
+                    <a:lstStyle/>
+                    <a:p>
+                      <a:pPr marL="0" marR="0" indent="0" algn="l" defTabSz="914400" rtl="0" eaLnBrk="1" fontAlgn="auto" latinLnBrk="0" hangingPunct="1">
+                        <a:lnSpc>
+                          <a:spcPct val="150000"/>
+                        </a:lnSpc>
+                        <a:spcBef>
+                          <a:spcPts val="0"/>
+                        </a:spcBef>
+                        <a:spcAft>
+                          <a:spcPts val="0"/>
+                        </a:spcAft>
+                        <a:buClrTx/>
+                        <a:buSzTx/>
+                        <a:buFontTx/>
+                        <a:buNone/>
+                        <a:tabLst/>
+                        <a:defRPr/>
+                      </a:pPr>
+                      <a:r>
+                        <a:rPr lang="en-US" sz="1600" b="0">
+                          <a:effectLst/>
+                          <a:latin typeface="+mn-lt"/>
+                          <a:ea typeface="Malgun Gothic" panose="020B0503020000020004" pitchFamily="34" charset="-127"/>
+                          <a:cs typeface="Arial" panose="020B0604020202020204" pitchFamily="34" charset="0"/>
+                        </a:rPr>
+                        <a:t>The other</a:t>
+                      </a:r>
+                      <a:r>
+                        <a:rPr lang="en-US" sz="1600" b="0" baseline="0">
+                          <a:effectLst/>
+                          <a:latin typeface="+mn-lt"/>
+                          <a:ea typeface="Malgun Gothic" panose="020B0503020000020004" pitchFamily="34" charset="-127"/>
+                          <a:cs typeface="Arial" panose="020B0604020202020204" pitchFamily="34" charset="0"/>
+                        </a:rPr>
+                        <a:t> </a:t>
+                      </a:r>
+                      <a:r>
+                        <a:rPr lang="en-US" sz="1600" b="0">
+                          <a:effectLst/>
+                          <a:latin typeface="+mn-lt"/>
+                          <a:ea typeface="Malgun Gothic" panose="020B0503020000020004" pitchFamily="34" charset="-127"/>
+                          <a:cs typeface="Arial" panose="020B0604020202020204" pitchFamily="34" charset="0"/>
+                        </a:rPr>
+                        <a:t>flow remains operational</a:t>
+                      </a:r>
+                    </a:p>
+                  </a:txBody>
+                  <a:tcPr marL="106700" marR="106700" marT="53350" marB="53350" anchor="ctr">
+                    <a:lnL w="12700" cap="flat" cmpd="sng" algn="ctr">
+                      <a:solidFill>
+                        <a:schemeClr val="tx1"/>
+                      </a:solidFill>
+                      <a:prstDash val="solid"/>
+                      <a:round/>
+                      <a:headEnd type="none" w="med" len="med"/>
+                      <a:tailEnd type="none" w="med" len="med"/>
+                    </a:lnL>
+                    <a:lnR w="12700" cap="flat" cmpd="sng" algn="ctr">
+                      <a:solidFill>
+                        <a:schemeClr val="tx1"/>
+                      </a:solidFill>
+                      <a:prstDash val="solid"/>
+                      <a:round/>
+                      <a:headEnd type="none" w="med" len="med"/>
+                      <a:tailEnd type="none" w="med" len="med"/>
+                    </a:lnR>
+                    <a:lnT w="12700" cap="flat" cmpd="sng" algn="ctr">
+                      <a:solidFill>
+                        <a:schemeClr val="tx1"/>
+                      </a:solidFill>
+                      <a:prstDash val="solid"/>
+                      <a:round/>
+                      <a:headEnd type="none" w="med" len="med"/>
+                      <a:tailEnd type="none" w="med" len="med"/>
+                    </a:lnT>
+                    <a:lnB w="12700" cap="flat" cmpd="sng" algn="ctr">
+                      <a:solidFill>
+                        <a:schemeClr val="tx1"/>
+                      </a:solidFill>
+                      <a:prstDash val="solid"/>
+                      <a:round/>
+                      <a:headEnd type="none" w="med" len="med"/>
+                      <a:tailEnd type="none" w="med" len="med"/>
+                    </a:lnB>
+                  </a:tcPr>
+                </a:tc>
+                <a:tc>
+                  <a:txBody>
+                    <a:bodyPr/>
+                    <a:lstStyle/>
+                    <a:p>
+                      <a:pPr marL="0" marR="0" indent="0" algn="l" defTabSz="914400" rtl="0" eaLnBrk="1" fontAlgn="auto" latinLnBrk="0" hangingPunct="1">
+                        <a:lnSpc>
+                          <a:spcPct val="150000"/>
+                        </a:lnSpc>
+                        <a:spcBef>
+                          <a:spcPts val="0"/>
+                        </a:spcBef>
+                        <a:spcAft>
+                          <a:spcPts val="0"/>
+                        </a:spcAft>
+                        <a:buClrTx/>
+                        <a:buSzTx/>
+                        <a:buFontTx/>
+                        <a:buNone/>
+                        <a:tabLst/>
+                        <a:defRPr/>
+                      </a:pPr>
+                      <a:r>
+                        <a:rPr lang="en-US" sz="1600" b="0">
+                          <a:effectLst/>
+                          <a:latin typeface="+mn-lt"/>
+                          <a:ea typeface="Malgun Gothic" panose="020B0503020000020004" pitchFamily="34" charset="-127"/>
+                          <a:cs typeface="Arial" panose="020B0604020202020204" pitchFamily="34" charset="0"/>
+                        </a:rPr>
+                        <a:t>Availability</a:t>
+                      </a:r>
+                    </a:p>
+                  </a:txBody>
+                  <a:tcPr marL="106700" marR="106700" marT="53350" marB="53350" anchor="ctr">
+                    <a:lnL w="12700" cap="flat" cmpd="sng" algn="ctr">
+                      <a:solidFill>
+                        <a:schemeClr val="tx1"/>
+                      </a:solidFill>
+                      <a:prstDash val="solid"/>
+                      <a:round/>
+                      <a:headEnd type="none" w="med" len="med"/>
+                      <a:tailEnd type="none" w="med" len="med"/>
+                    </a:lnL>
+                    <a:lnR w="12700" cap="flat" cmpd="sng" algn="ctr">
+                      <a:solidFill>
+                        <a:schemeClr val="tx1"/>
+                      </a:solidFill>
+                      <a:prstDash val="solid"/>
+                      <a:round/>
+                      <a:headEnd type="none" w="med" len="med"/>
+                      <a:tailEnd type="none" w="med" len="med"/>
+                    </a:lnR>
+                    <a:lnT w="12700" cap="flat" cmpd="sng" algn="ctr">
+                      <a:solidFill>
+                        <a:schemeClr val="tx1"/>
+                      </a:solidFill>
+                      <a:prstDash val="solid"/>
+                      <a:round/>
+                      <a:headEnd type="none" w="med" len="med"/>
+                      <a:tailEnd type="none" w="med" len="med"/>
+                    </a:lnT>
+                    <a:lnB w="12700" cap="flat" cmpd="sng" algn="ctr">
+                      <a:solidFill>
+                        <a:schemeClr val="tx1"/>
+                      </a:solidFill>
+                      <a:prstDash val="solid"/>
+                      <a:round/>
+                      <a:headEnd type="none" w="med" len="med"/>
+                      <a:tailEnd type="none" w="med" len="med"/>
+                    </a:lnB>
+                  </a:tcPr>
+                </a:tc>
+                <a:tc>
+                  <a:txBody>
+                    <a:bodyPr/>
+                    <a:lstStyle/>
+                    <a:p>
+                      <a:pPr algn="l" latinLnBrk="0">
+                        <a:lnSpc>
+                          <a:spcPct val="150000"/>
+                        </a:lnSpc>
+                      </a:pPr>
+                      <a:r>
+                        <a:rPr lang="en-US" sz="1600" b="0">
                           <a:latin typeface="+mn-lt"/>
                           <a:cs typeface="Arial" panose="020B0604020202020204" pitchFamily="34" charset="0"/>
                         </a:rPr>
                         <a:t>Low</a:t>
                       </a:r>
-                      <a:endParaRPr lang="en-US" sz="1600" b="0">
-                        <a:latin typeface="+mn-lt"/>
-                        <a:cs typeface="Arial" panose="020B0604020202020204" pitchFamily="34" charset="0"/>
-                      </a:endParaRPr>
                     </a:p>
                   </a:txBody>
                   <a:tcPr marL="106700" marR="106700" marT="53350" marB="53350" anchor="ctr">
@@ -18234,6 +17325,11 @@
                     </a:lnB>
                   </a:tcPr>
                 </a:tc>
+                <a:extLst>
+                  <a:ext uri="{0D108BD9-81ED-4DB2-BD59-A6C34878D82A}">
+                    <a16:rowId xmlns:a16="http://schemas.microsoft.com/office/drawing/2014/main" val="10005"/>
+                  </a:ext>
+                </a:extLst>
               </a:tr>
             </a:tbl>
           </a:graphicData>
@@ -18249,13 +17345,6 @@
   <p:clrMapOvr>
     <a:masterClrMapping/>
   </p:clrMapOvr>
-  <p:timing>
-    <p:tnLst>
-      <p:par>
-        <p:cTn id="1" dur="indefinite" restart="never" nodeType="tmRoot"/>
-      </p:par>
-    </p:tnLst>
-  </p:timing>
 </p:sld>
 </file>
 
@@ -18306,15 +17395,15 @@
               <a:buChar char="•"/>
             </a:pPr>
             <a:r>
-              <a:rPr lang="en-US" smtClean="0"/>
+              <a:rPr lang="en-US"/>
               <a:t>Split RemoteDiag responsibilities into </a:t>
             </a:r>
             <a:r>
-              <a:rPr lang="en-US" b="1" smtClean="0"/>
+              <a:rPr lang="en-US" b="1"/>
               <a:t>2</a:t>
             </a:r>
             <a:r>
-              <a:rPr lang="en-US" smtClean="0"/>
+              <a:rPr lang="en-US"/>
               <a:t> apps: </a:t>
             </a:r>
           </a:p>
@@ -18327,11 +17416,11 @@
               <a:buChar char="§"/>
             </a:pPr>
             <a:r>
-              <a:rPr lang="en-US" b="1" smtClean="0"/>
+              <a:rPr lang="en-US" b="1"/>
               <a:t>RemoteDiag (EP):</a:t>
             </a:r>
             <a:r>
-              <a:rPr lang="en-US" smtClean="0"/>
+              <a:rPr lang="en-US"/>
               <a:t> handles diag messages from OEM server.</a:t>
             </a:r>
             <a:endParaRPr lang="en-US" b="1"/>
@@ -18345,11 +17434,11 @@
               <a:buChar char="§"/>
             </a:pPr>
             <a:r>
-              <a:rPr lang="en-US" b="1" smtClean="0"/>
+              <a:rPr lang="en-US" b="1"/>
               <a:t>RemoteOTA (IP):</a:t>
             </a:r>
             <a:r>
-              <a:rPr lang="en-US" smtClean="0"/>
+              <a:rPr lang="en-US"/>
               <a:t> handles OTA diag message flows from MM ECU.</a:t>
             </a:r>
           </a:p>
@@ -18362,27 +17451,23 @@
               <a:buChar char="•"/>
             </a:pPr>
             <a:r>
-              <a:rPr lang="en-US" smtClean="0"/>
+              <a:rPr lang="en-US"/>
               <a:t>OnBoardClient is responsible for </a:t>
             </a:r>
             <a:r>
-              <a:rPr lang="en-US" b="1" smtClean="0"/>
-              <a:t>reprogramming message </a:t>
+              <a:rPr lang="en-US" b="1"/>
+              <a:t>reprogramming message filtering</a:t>
+            </a:r>
+            <a:r>
+              <a:rPr lang="en-US"/>
+              <a:t> and </a:t>
             </a:r>
             <a:r>
               <a:rPr lang="en-US" b="1"/>
-              <a:t>filtering</a:t>
-            </a:r>
-            <a:r>
-              <a:rPr lang="en-US" smtClean="0"/>
-              <a:t> and </a:t>
-            </a:r>
-            <a:r>
-              <a:rPr lang="en-US" b="1" smtClean="0"/>
               <a:t>diagnostic  priority control</a:t>
             </a:r>
             <a:r>
-              <a:rPr lang="en-US" smtClean="0"/>
+              <a:rPr lang="en-US"/>
               <a:t>.</a:t>
             </a:r>
             <a:endParaRPr lang="en-US" sz="1600"/>
@@ -18406,14 +17491,10 @@
           <a:p>
             <a:r>
               <a:rPr lang="en-US"/>
-              <a:t>Design Alternative </a:t>
+              <a:t>Design Alternative – Alt-A: Split </a:t>
             </a:r>
             <a:r>
-              <a:rPr lang="en-US" smtClean="0"/>
-              <a:t>– Alt-A: Split </a:t>
-            </a:r>
-            <a:r>
-              <a:rPr lang="en-US" err="1" smtClean="0"/>
+              <a:rPr lang="en-US" err="1"/>
               <a:t>RemoteDiag</a:t>
             </a:r>
             <a:endParaRPr lang="en-US"/>
@@ -18491,10 +17572,9 @@
           <a:lstStyle/>
           <a:p>
             <a:r>
-              <a:rPr lang="en-US" smtClean="0"/>
+              <a:rPr lang="en-US"/>
               <a:t>Alt-A</a:t>
             </a:r>
-            <a:endParaRPr lang="en-US"/>
           </a:p>
         </p:txBody>
       </p:sp>
@@ -18508,13 +17588,6 @@
   <p:clrMapOvr>
     <a:masterClrMapping/>
   </p:clrMapOvr>
-  <p:timing>
-    <p:tnLst>
-      <p:par>
-        <p:cTn id="1" dur="indefinite" restart="never" nodeType="tmRoot"/>
-      </p:par>
-    </p:tnLst>
-  </p:timing>
 </p:sld>
 </file>
 
@@ -18552,14 +17625,10 @@
           <a:p>
             <a:r>
               <a:rPr lang="en-US"/>
-              <a:t>Design Alternative – </a:t>
+              <a:t>Design Alternative – Alt-B: Move </a:t>
             </a:r>
             <a:r>
-              <a:rPr lang="en-US" smtClean="0"/>
-              <a:t>Alt-B: Move </a:t>
-            </a:r>
-            <a:r>
-              <a:rPr lang="en-US" err="1" smtClean="0"/>
+              <a:rPr lang="en-US" err="1"/>
               <a:t>RemoteDiag</a:t>
             </a:r>
             <a:endParaRPr lang="en-US"/>
@@ -18620,7 +17689,7 @@
               <a:buChar char="•"/>
             </a:pPr>
             <a:r>
-              <a:rPr lang="en-US" smtClean="0"/>
+              <a:rPr lang="en-US"/>
               <a:t>Move RemoteDiag into the IP container.</a:t>
             </a:r>
           </a:p>
@@ -18633,14 +17702,14 @@
               <a:buChar char="•"/>
             </a:pPr>
             <a:r>
-              <a:rPr lang="en-US" smtClean="0"/>
+              <a:rPr lang="en-US"/>
               <a:t>To maintain communication with OEM server and other EP-side component, </a:t>
             </a:r>
             <a:r>
-              <a:rPr lang="en-US" b="1" smtClean="0"/>
+              <a:rPr lang="en-US" b="1"/>
               <a:t>establish UDS socket connections to each module</a:t>
             </a:r>
-            <a:endParaRPr lang="en-US" smtClean="0"/>
+            <a:endParaRPr lang="en-US"/>
           </a:p>
           <a:p>
             <a:pPr marL="227013" indent="-227013">
@@ -18650,7 +17719,7 @@
               <a:buFont typeface="Arial" panose="020B0604020202020204" pitchFamily="34" charset="0"/>
               <a:buChar char="•"/>
             </a:pPr>
-            <a:endParaRPr lang="en-US" smtClean="0"/>
+            <a:endParaRPr lang="en-US"/>
           </a:p>
           <a:p>
             <a:pPr marL="227013" indent="-227013">
@@ -18711,10 +17780,9 @@
           <a:lstStyle/>
           <a:p>
             <a:r>
-              <a:rPr lang="en-US" smtClean="0"/>
+              <a:rPr lang="en-US"/>
               <a:t>Alt-B</a:t>
             </a:r>
-            <a:endParaRPr lang="en-US"/>
           </a:p>
         </p:txBody>
       </p:sp>
@@ -18728,13 +17796,6 @@
   <p:clrMapOvr>
     <a:masterClrMapping/>
   </p:clrMapOvr>
-  <p:timing>
-    <p:tnLst>
-      <p:par>
-        <p:cTn id="1" dur="indefinite" restart="never" nodeType="tmRoot"/>
-      </p:par>
-    </p:tnLst>
-  </p:timing>
 </p:sld>
 </file>
 
@@ -18746,7 +17807,7 @@
         <p:cNvPr id="1" name="">
           <a:extLst>
             <a:ext uri="{FF2B5EF4-FFF2-40B4-BE49-F238E27FC236}">
-              <a16:creationId xmlns:a16="http://schemas.microsoft.com/office/drawing/2014/main" xmlns="" id="{7A3A9F39-394E-5437-993F-29D2F2093B00}"/>
+              <a16:creationId xmlns:a16="http://schemas.microsoft.com/office/drawing/2014/main" id="{7A3A9F39-394E-5437-993F-29D2F2093B00}"/>
             </a:ext>
           </a:extLst>
         </p:cNvPr>
@@ -18790,7 +17851,7 @@
           <p:cNvPr id="2" name="Title 1">
             <a:extLst>
               <a:ext uri="{FF2B5EF4-FFF2-40B4-BE49-F238E27FC236}">
-                <a16:creationId xmlns:a16="http://schemas.microsoft.com/office/drawing/2014/main" xmlns="" id="{554F77EA-2B30-AFDC-1349-3C58C2AB9061}"/>
+                <a16:creationId xmlns:a16="http://schemas.microsoft.com/office/drawing/2014/main" id="{554F77EA-2B30-AFDC-1349-3C58C2AB9061}"/>
               </a:ext>
             </a:extLst>
           </p:cNvPr>
@@ -18808,25 +17869,16 @@
           <a:p>
             <a:r>
               <a:rPr lang="en-US"/>
-              <a:t>Design Alternative – </a:t>
+              <a:t>Design Alternative – Alt-C: Move </a:t>
             </a:r>
             <a:r>
-              <a:rPr lang="en-US" smtClean="0"/>
-              <a:t>Alt-C</a:t>
+              <a:rPr lang="en-US" err="1"/>
+              <a:t>RemoteDiag</a:t>
             </a:r>
             <a:r>
               <a:rPr lang="en-US"/>
-              <a:t>: Move </a:t>
-            </a:r>
-            <a:r>
-              <a:rPr lang="en-US" err="1" smtClean="0"/>
-              <a:t>RemoteDiag</a:t>
-            </a:r>
-            <a:r>
-              <a:rPr lang="en-US" smtClean="0"/>
               <a:t> + Proxy</a:t>
             </a:r>
-            <a:endParaRPr lang="en-US"/>
           </a:p>
         </p:txBody>
       </p:sp>
@@ -18835,7 +17887,7 @@
           <p:cNvPr id="3" name="Content Placeholder 2">
             <a:extLst>
               <a:ext uri="{FF2B5EF4-FFF2-40B4-BE49-F238E27FC236}">
-                <a16:creationId xmlns:a16="http://schemas.microsoft.com/office/drawing/2014/main" xmlns="" id="{64FB7A4A-CF56-C0BD-9AB9-923B2D043291}"/>
+                <a16:creationId xmlns:a16="http://schemas.microsoft.com/office/drawing/2014/main" id="{64FB7A4A-CF56-C0BD-9AB9-923B2D043291}"/>
               </a:ext>
             </a:extLst>
           </p:cNvPr>
@@ -18884,42 +17936,17 @@
               <a:rPr lang="en-US" sz="1800"/>
               <a:t>. </a:t>
             </a:r>
-            <a:endParaRPr lang="en-US" sz="1800" smtClean="0"/>
           </a:p>
           <a:p>
             <a:r>
-              <a:rPr lang="en-US" sz="1800" smtClean="0"/>
-              <a:t>EP </a:t>
-            </a:r>
-            <a:r>
               <a:rPr lang="en-US" sz="1800"/>
-              <a:t>modules continue to interact with RDP using their </a:t>
-            </a:r>
-            <a:r>
-              <a:rPr lang="en-US" sz="1800"/>
-              <a:t>existing </a:t>
-            </a:r>
-            <a:r>
-              <a:rPr lang="en-US" sz="1800" smtClean="0"/>
-              <a:t>interface</a:t>
+              <a:t>EP modules continue to interact with RDP using their existing interface</a:t>
             </a:r>
           </a:p>
           <a:p>
             <a:r>
-              <a:rPr lang="en-US" sz="1800" smtClean="0"/>
-              <a:t>RDP </a:t>
-            </a:r>
-            <a:r>
               <a:rPr lang="en-US" sz="1800"/>
-              <a:t>forwards requests to </a:t>
-            </a:r>
-            <a:r>
-              <a:rPr lang="en-US" sz="1800"/>
-              <a:t>RemoteDiag </a:t>
-            </a:r>
-            <a:r>
-              <a:rPr lang="en-US" sz="1800" smtClean="0"/>
-              <a:t>via UDS socket channel.</a:t>
+              <a:t>RDP forwards requests to RemoteDiag via UDS socket channel.</a:t>
             </a:r>
             <a:endParaRPr lang="en-US" sz="1800" b="1"/>
           </a:p>
@@ -18951,10 +17978,9 @@
           <a:lstStyle/>
           <a:p>
             <a:r>
-              <a:rPr lang="en-US" smtClean="0"/>
+              <a:rPr lang="en-US"/>
               <a:t>Alt-C</a:t>
             </a:r>
-            <a:endParaRPr lang="en-US"/>
           </a:p>
         </p:txBody>
       </p:sp>
@@ -18992,13 +18018,6 @@
   <p:clrMapOvr>
     <a:masterClrMapping/>
   </p:clrMapOvr>
-  <p:timing>
-    <p:tnLst>
-      <p:par>
-        <p:cTn id="1" dur="indefinite" restart="never" nodeType="tmRoot"/>
-      </p:par>
-    </p:tnLst>
-  </p:timing>
 </p:sld>
 </file>
 

--- a/design/FE_phi.vu_Design of Secure Remote Diag on Container Separation Architecture_3rd.pptx
+++ b/design/FE_phi.vu_Design of Secure Remote Diag on Container Separation Architecture_3rd.pptx
@@ -5,26 +5,27 @@
     <p:sldMasterId id="2147483648" r:id="rId1"/>
   </p:sldMasterIdLst>
   <p:notesMasterIdLst>
-    <p:notesMasterId r:id="rId19"/>
+    <p:notesMasterId r:id="rId20"/>
   </p:notesMasterIdLst>
   <p:sldIdLst>
     <p:sldId id="256" r:id="rId2"/>
     <p:sldId id="257" r:id="rId3"/>
     <p:sldId id="280" r:id="rId4"/>
-    <p:sldId id="289" r:id="rId5"/>
-    <p:sldId id="262" r:id="rId6"/>
-    <p:sldId id="283" r:id="rId7"/>
-    <p:sldId id="269" r:id="rId8"/>
-    <p:sldId id="271" r:id="rId9"/>
-    <p:sldId id="287" r:id="rId10"/>
-    <p:sldId id="279" r:id="rId11"/>
-    <p:sldId id="288" r:id="rId12"/>
-    <p:sldId id="291" r:id="rId13"/>
-    <p:sldId id="274" r:id="rId14"/>
-    <p:sldId id="277" r:id="rId15"/>
-    <p:sldId id="276" r:id="rId16"/>
-    <p:sldId id="293" r:id="rId17"/>
-    <p:sldId id="292" r:id="rId18"/>
+    <p:sldId id="294" r:id="rId5"/>
+    <p:sldId id="289" r:id="rId6"/>
+    <p:sldId id="262" r:id="rId7"/>
+    <p:sldId id="283" r:id="rId8"/>
+    <p:sldId id="269" r:id="rId9"/>
+    <p:sldId id="271" r:id="rId10"/>
+    <p:sldId id="287" r:id="rId11"/>
+    <p:sldId id="279" r:id="rId12"/>
+    <p:sldId id="292" r:id="rId13"/>
+    <p:sldId id="293" r:id="rId14"/>
+    <p:sldId id="288" r:id="rId15"/>
+    <p:sldId id="291" r:id="rId16"/>
+    <p:sldId id="274" r:id="rId17"/>
+    <p:sldId id="277" r:id="rId18"/>
+    <p:sldId id="276" r:id="rId19"/>
   </p:sldIdLst>
   <p:sldSz cx="12192000" cy="6858000"/>
   <p:notesSz cx="6858000" cy="9144000"/>
@@ -224,7 +225,7 @@
           <a:p>
             <a:fld id="{341C17E2-92C1-406A-80C1-BA1B838099E9}" type="datetimeFigureOut">
               <a:rPr lang="en-US" smtClean="0"/>
-              <a:t>9/28/2026</a:t>
+              <a:t>9/29/2026</a:t>
             </a:fld>
             <a:endParaRPr lang="en-US"/>
           </a:p>
@@ -546,7 +547,7 @@
             <a:spLocks noGrp="1"/>
           </p:cNvSpPr>
           <p:nvPr>
-            <p:ph type="sldNum" sz="quarter" idx="5"/>
+            <p:ph type="sldNum" sz="quarter" idx="10"/>
           </p:nvPr>
         </p:nvSpPr>
         <p:spPr/>
@@ -556,7 +557,7 @@
           <a:p>
             <a:fld id="{EF277405-33BD-42BD-B604-93760E4185DC}" type="slidenum">
               <a:rPr lang="en-US" smtClean="0"/>
-              <a:t>6</a:t>
+              <a:t>3</a:t>
             </a:fld>
             <a:endParaRPr lang="en-US"/>
           </a:p>
@@ -565,7 +566,7 @@
     </p:spTree>
     <p:extLst>
       <p:ext uri="{BB962C8B-B14F-4D97-AF65-F5344CB8AC3E}">
-        <p14:creationId xmlns:p14="http://schemas.microsoft.com/office/powerpoint/2010/main" val="1380153111"/>
+        <p14:creationId xmlns:p14="http://schemas.microsoft.com/office/powerpoint/2010/main" val="632864446"/>
       </p:ext>
     </p:extLst>
   </p:cSld>
@@ -619,48 +620,6 @@
           <a:bodyPr/>
           <a:lstStyle/>
           <a:p>
-            <a:pPr fontAlgn="t"/>
-            <a:r>
-              <a:rPr lang="en-US" sz="1200" b="1" i="0" kern="1200">
-                <a:solidFill>
-                  <a:schemeClr val="tx1"/>
-                </a:solidFill>
-                <a:effectLst/>
-                <a:latin typeface="+mn-lt"/>
-                <a:ea typeface="+mn-ea"/>
-                <a:cs typeface="+mn-cs"/>
-              </a:rPr>
-              <a:t>Trade-offs</a:t>
-            </a:r>
-          </a:p>
-          <a:p>
-            <a:pPr fontAlgn="t"/>
-            <a:r>
-              <a:rPr lang="en-US" sz="1200" b="1" i="0" kern="1200">
-                <a:solidFill>
-                  <a:schemeClr val="tx1"/>
-                </a:solidFill>
-                <a:effectLst/>
-                <a:latin typeface="+mn-lt"/>
-                <a:ea typeface="+mn-ea"/>
-                <a:cs typeface="+mn-cs"/>
-              </a:rPr>
-              <a:t>Maintainability:</a:t>
-            </a:r>
-            <a:r>
-              <a:rPr lang="en-US" sz="1200" b="0" i="0" kern="1200">
-                <a:solidFill>
-                  <a:schemeClr val="tx1"/>
-                </a:solidFill>
-                <a:effectLst/>
-                <a:latin typeface="+mn-lt"/>
-                <a:ea typeface="+mn-ea"/>
-                <a:cs typeface="+mn-cs"/>
-              </a:rPr>
-              <a:t> All EP modules require cross-container IPC support, increasing implementation effort and code-change scope.</a:t>
-            </a:r>
-          </a:p>
-          <a:p>
             <a:endParaRPr lang="en-US"/>
           </a:p>
         </p:txBody>
@@ -682,7 +641,7 @@
           <a:p>
             <a:fld id="{EF277405-33BD-42BD-B604-93760E4185DC}" type="slidenum">
               <a:rPr lang="en-US" smtClean="0"/>
-              <a:t>8</a:t>
+              <a:t>4</a:t>
             </a:fld>
             <a:endParaRPr lang="en-US"/>
           </a:p>
@@ -691,7 +650,7 @@
     </p:spTree>
     <p:extLst>
       <p:ext uri="{BB962C8B-B14F-4D97-AF65-F5344CB8AC3E}">
-        <p14:creationId xmlns:p14="http://schemas.microsoft.com/office/powerpoint/2010/main" val="3809231641"/>
+        <p14:creationId xmlns:p14="http://schemas.microsoft.com/office/powerpoint/2010/main" val="3259099242"/>
       </p:ext>
     </p:extLst>
   </p:cSld>
@@ -756,7 +715,7 @@
             <a:spLocks noGrp="1"/>
           </p:cNvSpPr>
           <p:nvPr>
-            <p:ph type="sldNum" sz="quarter" idx="10"/>
+            <p:ph type="sldNum" sz="quarter" idx="5"/>
           </p:nvPr>
         </p:nvSpPr>
         <p:spPr/>
@@ -766,7 +725,7 @@
           <a:p>
             <a:fld id="{EF277405-33BD-42BD-B604-93760E4185DC}" type="slidenum">
               <a:rPr lang="en-US" smtClean="0"/>
-              <a:t>9</a:t>
+              <a:t>7</a:t>
             </a:fld>
             <a:endParaRPr lang="en-US"/>
           </a:p>
@@ -775,7 +734,7 @@
     </p:spTree>
     <p:extLst>
       <p:ext uri="{BB962C8B-B14F-4D97-AF65-F5344CB8AC3E}">
-        <p14:creationId xmlns:p14="http://schemas.microsoft.com/office/powerpoint/2010/main" val="3467681225"/>
+        <p14:creationId xmlns:p14="http://schemas.microsoft.com/office/powerpoint/2010/main" val="1380153111"/>
       </p:ext>
     </p:extLst>
   </p:cSld>
@@ -829,6 +788,48 @@
           <a:bodyPr/>
           <a:lstStyle/>
           <a:p>
+            <a:pPr fontAlgn="t"/>
+            <a:r>
+              <a:rPr lang="en-US" sz="1200" b="1" i="0" kern="1200">
+                <a:solidFill>
+                  <a:schemeClr val="tx1"/>
+                </a:solidFill>
+                <a:effectLst/>
+                <a:latin typeface="+mn-lt"/>
+                <a:ea typeface="+mn-ea"/>
+                <a:cs typeface="+mn-cs"/>
+              </a:rPr>
+              <a:t>Trade-offs</a:t>
+            </a:r>
+          </a:p>
+          <a:p>
+            <a:pPr fontAlgn="t"/>
+            <a:r>
+              <a:rPr lang="en-US" sz="1200" b="1" i="0" kern="1200">
+                <a:solidFill>
+                  <a:schemeClr val="tx1"/>
+                </a:solidFill>
+                <a:effectLst/>
+                <a:latin typeface="+mn-lt"/>
+                <a:ea typeface="+mn-ea"/>
+                <a:cs typeface="+mn-cs"/>
+              </a:rPr>
+              <a:t>Maintainability:</a:t>
+            </a:r>
+            <a:r>
+              <a:rPr lang="en-US" sz="1200" b="0" i="0" kern="1200">
+                <a:solidFill>
+                  <a:schemeClr val="tx1"/>
+                </a:solidFill>
+                <a:effectLst/>
+                <a:latin typeface="+mn-lt"/>
+                <a:ea typeface="+mn-ea"/>
+                <a:cs typeface="+mn-cs"/>
+              </a:rPr>
+              <a:t> All EP modules require cross-container IPC support, increasing implementation effort and code-change scope.</a:t>
+            </a:r>
+          </a:p>
+          <a:p>
             <a:endParaRPr lang="en-US"/>
           </a:p>
         </p:txBody>
@@ -850,7 +851,175 @@
           <a:p>
             <a:fld id="{EF277405-33BD-42BD-B604-93760E4185DC}" type="slidenum">
               <a:rPr lang="en-US" smtClean="0"/>
+              <a:t>9</a:t>
+            </a:fld>
+            <a:endParaRPr lang="en-US"/>
+          </a:p>
+        </p:txBody>
+      </p:sp>
+    </p:spTree>
+    <p:extLst>
+      <p:ext uri="{BB962C8B-B14F-4D97-AF65-F5344CB8AC3E}">
+        <p14:creationId xmlns:p14="http://schemas.microsoft.com/office/powerpoint/2010/main" val="3809231641"/>
+      </p:ext>
+    </p:extLst>
+  </p:cSld>
+  <p:clrMapOvr>
+    <a:masterClrMapping/>
+  </p:clrMapOvr>
+</p:notes>
+</file>
+
+<file path=ppt/notesSlides/notesSlide5.xml><?xml version="1.0" encoding="utf-8"?>
+<p:notes xmlns:a="http://schemas.openxmlformats.org/drawingml/2006/main" xmlns:r="http://schemas.openxmlformats.org/officeDocument/2006/relationships" xmlns:p="http://schemas.openxmlformats.org/presentationml/2006/main">
+  <p:cSld>
+    <p:spTree>
+      <p:nvGrpSpPr>
+        <p:cNvPr id="1" name=""/>
+        <p:cNvGrpSpPr/>
+        <p:nvPr/>
+      </p:nvGrpSpPr>
+      <p:grpSpPr>
+        <a:xfrm>
+          <a:off x="0" y="0"/>
+          <a:ext cx="0" cy="0"/>
+          <a:chOff x="0" y="0"/>
+          <a:chExt cx="0" cy="0"/>
+        </a:xfrm>
+      </p:grpSpPr>
+      <p:sp>
+        <p:nvSpPr>
+          <p:cNvPr id="2" name="Slide Image Placeholder 1"/>
+          <p:cNvSpPr>
+            <a:spLocks noGrp="1" noRot="1" noChangeAspect="1"/>
+          </p:cNvSpPr>
+          <p:nvPr>
+            <p:ph type="sldImg"/>
+          </p:nvPr>
+        </p:nvSpPr>
+        <p:spPr/>
+      </p:sp>
+      <p:sp>
+        <p:nvSpPr>
+          <p:cNvPr id="3" name="Notes Placeholder 2"/>
+          <p:cNvSpPr>
+            <a:spLocks noGrp="1"/>
+          </p:cNvSpPr>
+          <p:nvPr>
+            <p:ph type="body" idx="1"/>
+          </p:nvPr>
+        </p:nvSpPr>
+        <p:spPr/>
+        <p:txBody>
+          <a:bodyPr/>
+          <a:lstStyle/>
+          <a:p>
+            <a:endParaRPr lang="en-US"/>
+          </a:p>
+        </p:txBody>
+      </p:sp>
+      <p:sp>
+        <p:nvSpPr>
+          <p:cNvPr id="4" name="Slide Number Placeholder 3"/>
+          <p:cNvSpPr>
+            <a:spLocks noGrp="1"/>
+          </p:cNvSpPr>
+          <p:nvPr>
+            <p:ph type="sldNum" sz="quarter" idx="10"/>
+          </p:nvPr>
+        </p:nvSpPr>
+        <p:spPr/>
+        <p:txBody>
+          <a:bodyPr/>
+          <a:lstStyle/>
+          <a:p>
+            <a:fld id="{EF277405-33BD-42BD-B604-93760E4185DC}" type="slidenum">
+              <a:rPr lang="en-US" smtClean="0"/>
               <a:t>10</a:t>
+            </a:fld>
+            <a:endParaRPr lang="en-US"/>
+          </a:p>
+        </p:txBody>
+      </p:sp>
+    </p:spTree>
+    <p:extLst>
+      <p:ext uri="{BB962C8B-B14F-4D97-AF65-F5344CB8AC3E}">
+        <p14:creationId xmlns:p14="http://schemas.microsoft.com/office/powerpoint/2010/main" val="3467681225"/>
+      </p:ext>
+    </p:extLst>
+  </p:cSld>
+  <p:clrMapOvr>
+    <a:masterClrMapping/>
+  </p:clrMapOvr>
+</p:notes>
+</file>
+
+<file path=ppt/notesSlides/notesSlide6.xml><?xml version="1.0" encoding="utf-8"?>
+<p:notes xmlns:a="http://schemas.openxmlformats.org/drawingml/2006/main" xmlns:r="http://schemas.openxmlformats.org/officeDocument/2006/relationships" xmlns:p="http://schemas.openxmlformats.org/presentationml/2006/main">
+  <p:cSld>
+    <p:spTree>
+      <p:nvGrpSpPr>
+        <p:cNvPr id="1" name=""/>
+        <p:cNvGrpSpPr/>
+        <p:nvPr/>
+      </p:nvGrpSpPr>
+      <p:grpSpPr>
+        <a:xfrm>
+          <a:off x="0" y="0"/>
+          <a:ext cx="0" cy="0"/>
+          <a:chOff x="0" y="0"/>
+          <a:chExt cx="0" cy="0"/>
+        </a:xfrm>
+      </p:grpSpPr>
+      <p:sp>
+        <p:nvSpPr>
+          <p:cNvPr id="2" name="Slide Image Placeholder 1"/>
+          <p:cNvSpPr>
+            <a:spLocks noGrp="1" noRot="1" noChangeAspect="1"/>
+          </p:cNvSpPr>
+          <p:nvPr>
+            <p:ph type="sldImg"/>
+          </p:nvPr>
+        </p:nvSpPr>
+        <p:spPr/>
+      </p:sp>
+      <p:sp>
+        <p:nvSpPr>
+          <p:cNvPr id="3" name="Notes Placeholder 2"/>
+          <p:cNvSpPr>
+            <a:spLocks noGrp="1"/>
+          </p:cNvSpPr>
+          <p:nvPr>
+            <p:ph type="body" idx="1"/>
+          </p:nvPr>
+        </p:nvSpPr>
+        <p:spPr/>
+        <p:txBody>
+          <a:bodyPr/>
+          <a:lstStyle/>
+          <a:p>
+            <a:endParaRPr lang="en-US"/>
+          </a:p>
+        </p:txBody>
+      </p:sp>
+      <p:sp>
+        <p:nvSpPr>
+          <p:cNvPr id="4" name="Slide Number Placeholder 3"/>
+          <p:cNvSpPr>
+            <a:spLocks noGrp="1"/>
+          </p:cNvSpPr>
+          <p:nvPr>
+            <p:ph type="sldNum" sz="quarter" idx="10"/>
+          </p:nvPr>
+        </p:nvSpPr>
+        <p:spPr/>
+        <p:txBody>
+          <a:bodyPr/>
+          <a:lstStyle/>
+          <a:p>
+            <a:fld id="{EF277405-33BD-42BD-B604-93760E4185DC}" type="slidenum">
+              <a:rPr lang="en-US" smtClean="0"/>
+              <a:t>11</a:t>
             </a:fld>
             <a:endParaRPr lang="en-US"/>
           </a:p>
@@ -998,7 +1167,7 @@
           <a:p>
             <a:fld id="{B934B22C-8C05-4817-830F-8B9F9DEAE546}" type="datetimeFigureOut">
               <a:rPr lang="en-US" smtClean="0"/>
-              <a:t>9/28/2026</a:t>
+              <a:t>9/29/2026</a:t>
             </a:fld>
             <a:endParaRPr lang="en-US"/>
           </a:p>
@@ -1166,7 +1335,7 @@
           <a:p>
             <a:fld id="{B934B22C-8C05-4817-830F-8B9F9DEAE546}" type="datetimeFigureOut">
               <a:rPr lang="en-US" smtClean="0"/>
-              <a:t>9/28/2026</a:t>
+              <a:t>9/29/2026</a:t>
             </a:fld>
             <a:endParaRPr lang="en-US"/>
           </a:p>
@@ -1344,7 +1513,7 @@
           <a:p>
             <a:fld id="{B934B22C-8C05-4817-830F-8B9F9DEAE546}" type="datetimeFigureOut">
               <a:rPr lang="en-US" smtClean="0"/>
-              <a:t>9/28/2026</a:t>
+              <a:t>9/29/2026</a:t>
             </a:fld>
             <a:endParaRPr lang="en-US"/>
           </a:p>
@@ -1538,7 +1707,7 @@
           <a:p>
             <a:fld id="{B934B22C-8C05-4817-830F-8B9F9DEAE546}" type="datetimeFigureOut">
               <a:rPr lang="en-US" smtClean="0"/>
-              <a:t>9/28/2026</a:t>
+              <a:t>9/29/2026</a:t>
             </a:fld>
             <a:endParaRPr lang="en-US"/>
           </a:p>
@@ -1591,7 +1760,7 @@
           <p:cNvPr id="7" name="그림 5" descr="백색바탕.png">
             <a:extLst>
               <a:ext uri="{FF2B5EF4-FFF2-40B4-BE49-F238E27FC236}">
-                <a16:creationId xmlns:a16="http://schemas.microsoft.com/office/drawing/2014/main" id="{28873918-42A2-05FA-4A84-F17869DE34CF}"/>
+                <a16:creationId xmlns="" xmlns:a16="http://schemas.microsoft.com/office/drawing/2014/main" id="{28873918-42A2-05FA-4A84-F17869DE34CF}"/>
               </a:ext>
             </a:extLst>
           </p:cNvPr>
@@ -1843,7 +2012,7 @@
           <a:p>
             <a:fld id="{B934B22C-8C05-4817-830F-8B9F9DEAE546}" type="datetimeFigureOut">
               <a:rPr lang="en-US" smtClean="0"/>
-              <a:t>9/28/2026</a:t>
+              <a:t>9/29/2026</a:t>
             </a:fld>
             <a:endParaRPr lang="en-US"/>
           </a:p>
@@ -2072,7 +2241,7 @@
           <a:p>
             <a:fld id="{B934B22C-8C05-4817-830F-8B9F9DEAE546}" type="datetimeFigureOut">
               <a:rPr lang="en-US" smtClean="0"/>
-              <a:t>9/28/2026</a:t>
+              <a:t>9/29/2026</a:t>
             </a:fld>
             <a:endParaRPr lang="en-US"/>
           </a:p>
@@ -2436,7 +2605,7 @@
           <a:p>
             <a:fld id="{B934B22C-8C05-4817-830F-8B9F9DEAE546}" type="datetimeFigureOut">
               <a:rPr lang="en-US" smtClean="0"/>
-              <a:t>9/28/2026</a:t>
+              <a:t>9/29/2026</a:t>
             </a:fld>
             <a:endParaRPr lang="en-US"/>
           </a:p>
@@ -2553,7 +2722,7 @@
           <a:p>
             <a:fld id="{B934B22C-8C05-4817-830F-8B9F9DEAE546}" type="datetimeFigureOut">
               <a:rPr lang="en-US" smtClean="0"/>
-              <a:t>9/28/2026</a:t>
+              <a:t>9/29/2026</a:t>
             </a:fld>
             <a:endParaRPr lang="en-US"/>
           </a:p>
@@ -2648,7 +2817,7 @@
           <a:p>
             <a:fld id="{B934B22C-8C05-4817-830F-8B9F9DEAE546}" type="datetimeFigureOut">
               <a:rPr lang="en-US" smtClean="0"/>
-              <a:t>9/28/2026</a:t>
+              <a:t>9/29/2026</a:t>
             </a:fld>
             <a:endParaRPr lang="en-US"/>
           </a:p>
@@ -2923,7 +3092,7 @@
           <a:p>
             <a:fld id="{B934B22C-8C05-4817-830F-8B9F9DEAE546}" type="datetimeFigureOut">
               <a:rPr lang="en-US" smtClean="0"/>
-              <a:t>9/28/2026</a:t>
+              <a:t>9/29/2026</a:t>
             </a:fld>
             <a:endParaRPr lang="en-US"/>
           </a:p>
@@ -3175,7 +3344,7 @@
           <a:p>
             <a:fld id="{B934B22C-8C05-4817-830F-8B9F9DEAE546}" type="datetimeFigureOut">
               <a:rPr lang="en-US" smtClean="0"/>
-              <a:t>9/28/2026</a:t>
+              <a:t>9/29/2026</a:t>
             </a:fld>
             <a:endParaRPr lang="en-US"/>
           </a:p>
@@ -3386,7 +3555,7 @@
           <a:p>
             <a:fld id="{B934B22C-8C05-4817-830F-8B9F9DEAE546}" type="datetimeFigureOut">
               <a:rPr lang="en-US" smtClean="0"/>
-              <a:t>9/28/2026</a:t>
+              <a:t>9/29/2026</a:t>
             </a:fld>
             <a:endParaRPr lang="en-US"/>
           </a:p>
@@ -3475,7 +3644,7 @@
           <p:cNvPr id="8" name="TextBox 7">
             <a:extLst>
               <a:ext uri="{FF2B5EF4-FFF2-40B4-BE49-F238E27FC236}">
-                <a16:creationId xmlns:a16="http://schemas.microsoft.com/office/drawing/2014/main" id="{7DC87BF5-B759-FAAB-FE6D-F0E5F640800D}"/>
+                <a16:creationId xmlns="" xmlns:a16="http://schemas.microsoft.com/office/drawing/2014/main" id="{7DC87BF5-B759-FAAB-FE6D-F0E5F640800D}"/>
               </a:ext>
             </a:extLst>
           </p:cNvPr>
@@ -3483,7 +3652,7 @@
           <p:nvPr userDrawn="1">
             <p:extLst>
               <p:ext uri="{1162E1C5-73C7-4A58-AE30-91384D911F3F}">
-                <p184:classification xmlns:p184="http://schemas.microsoft.com/office/powerpoint/2018/4/main" val="hdr"/>
+                <p184:classification xmlns="" xmlns:p184="http://schemas.microsoft.com/office/powerpoint/2018/4/main" val="hdr"/>
               </p:ext>
             </p:extLst>
           </p:nvPr>
@@ -3930,10 +4099,282 @@
   <p:clrMapOvr>
     <a:masterClrMapping/>
   </p:clrMapOvr>
+  <p:timing>
+    <p:tnLst>
+      <p:par>
+        <p:cTn id="1" dur="indefinite" restart="never" nodeType="tmRoot"/>
+      </p:par>
+    </p:tnLst>
+  </p:timing>
 </p:sld>
 </file>
 
 <file path=ppt/slides/slide10.xml><?xml version="1.0" encoding="utf-8"?>
+<p:sld xmlns:a="http://schemas.openxmlformats.org/drawingml/2006/main" xmlns:r="http://schemas.openxmlformats.org/officeDocument/2006/relationships" xmlns:p="http://schemas.openxmlformats.org/presentationml/2006/main">
+  <p:cSld>
+    <p:spTree>
+      <p:nvGrpSpPr>
+        <p:cNvPr id="1" name="">
+          <a:extLst>
+            <a:ext uri="{FF2B5EF4-FFF2-40B4-BE49-F238E27FC236}">
+              <a16:creationId xmlns="" xmlns:a16="http://schemas.microsoft.com/office/drawing/2014/main" id="{7A3A9F39-394E-5437-993F-29D2F2093B00}"/>
+            </a:ext>
+          </a:extLst>
+        </p:cNvPr>
+        <p:cNvGrpSpPr/>
+        <p:nvPr/>
+      </p:nvGrpSpPr>
+      <p:grpSpPr>
+        <a:xfrm>
+          <a:off x="0" y="0"/>
+          <a:ext cx="0" cy="0"/>
+          <a:chOff x="0" y="0"/>
+          <a:chExt cx="0" cy="0"/>
+        </a:xfrm>
+      </p:grpSpPr>
+      <p:pic>
+        <p:nvPicPr>
+          <p:cNvPr id="7" name="Picture 6"/>
+          <p:cNvPicPr>
+            <a:picLocks noChangeAspect="1"/>
+          </p:cNvPicPr>
+          <p:nvPr/>
+        </p:nvPicPr>
+        <p:blipFill>
+          <a:blip r:embed="rId3"/>
+          <a:stretch>
+            <a:fillRect/>
+          </a:stretch>
+        </p:blipFill>
+        <p:spPr>
+          <a:xfrm>
+            <a:off x="3314700" y="2354870"/>
+            <a:ext cx="8678897" cy="4350305"/>
+          </a:xfrm>
+          <a:prstGeom prst="rect">
+            <a:avLst/>
+          </a:prstGeom>
+        </p:spPr>
+      </p:pic>
+      <p:sp>
+        <p:nvSpPr>
+          <p:cNvPr id="2" name="Title 1">
+            <a:extLst>
+              <a:ext uri="{FF2B5EF4-FFF2-40B4-BE49-F238E27FC236}">
+                <a16:creationId xmlns="" xmlns:a16="http://schemas.microsoft.com/office/drawing/2014/main" id="{554F77EA-2B30-AFDC-1349-3C58C2AB9061}"/>
+              </a:ext>
+            </a:extLst>
+          </p:cNvPr>
+          <p:cNvSpPr>
+            <a:spLocks noGrp="1"/>
+          </p:cNvSpPr>
+          <p:nvPr>
+            <p:ph type="title"/>
+          </p:nvPr>
+        </p:nvSpPr>
+        <p:spPr/>
+        <p:txBody>
+          <a:bodyPr/>
+          <a:lstStyle/>
+          <a:p>
+            <a:r>
+              <a:rPr lang="en-US"/>
+              <a:t>Design Alternative – Alt-C: Move </a:t>
+            </a:r>
+            <a:r>
+              <a:rPr lang="en-US" err="1"/>
+              <a:t>RemoteDiag</a:t>
+            </a:r>
+            <a:r>
+              <a:rPr lang="en-US"/>
+              <a:t> + Proxy</a:t>
+            </a:r>
+          </a:p>
+        </p:txBody>
+      </p:sp>
+      <p:sp>
+        <p:nvSpPr>
+          <p:cNvPr id="3" name="Content Placeholder 2">
+            <a:extLst>
+              <a:ext uri="{FF2B5EF4-FFF2-40B4-BE49-F238E27FC236}">
+                <a16:creationId xmlns="" xmlns:a16="http://schemas.microsoft.com/office/drawing/2014/main" id="{64FB7A4A-CF56-C0BD-9AB9-923B2D043291}"/>
+              </a:ext>
+            </a:extLst>
+          </p:cNvPr>
+          <p:cNvSpPr>
+            <a:spLocks noGrp="1"/>
+          </p:cNvSpPr>
+          <p:nvPr>
+            <p:ph idx="1"/>
+          </p:nvPr>
+        </p:nvSpPr>
+        <p:spPr>
+          <a:xfrm>
+            <a:off x="160867" y="990599"/>
+            <a:ext cx="11825921" cy="1219201"/>
+          </a:xfrm>
+        </p:spPr>
+        <p:txBody>
+          <a:bodyPr>
+            <a:normAutofit fontScale="92500" lnSpcReduction="20000"/>
+          </a:bodyPr>
+          <a:lstStyle/>
+          <a:p>
+            <a:r>
+              <a:rPr lang="en-US" sz="1800"/>
+              <a:t>Move RemoteDiag into the IP container.</a:t>
+            </a:r>
+          </a:p>
+          <a:p>
+            <a:r>
+              <a:rPr lang="en-US" sz="1800" smtClean="0"/>
+              <a:t>Add </a:t>
+            </a:r>
+            <a:r>
+              <a:rPr lang="en-US" sz="1800"/>
+              <a:t>a </a:t>
+            </a:r>
+            <a:r>
+              <a:rPr lang="en-US" sz="1800" b="1"/>
+              <a:t>new RemoteDiagProxy (RDP) </a:t>
+            </a:r>
+            <a:r>
+              <a:rPr lang="en-US" sz="1800" b="1" smtClean="0"/>
+              <a:t>component</a:t>
+            </a:r>
+            <a:r>
+              <a:rPr lang="en-US" sz="1800" smtClean="0"/>
+              <a:t> </a:t>
+            </a:r>
+            <a:r>
+              <a:rPr lang="en-US" sz="1800"/>
+              <a:t>in the EP that acts as a </a:t>
+            </a:r>
+            <a:r>
+              <a:rPr lang="en-US" sz="1800" b="1"/>
+              <a:t>transparent proxy</a:t>
+            </a:r>
+            <a:r>
+              <a:rPr lang="en-US" sz="1800"/>
+              <a:t>. </a:t>
+            </a:r>
+          </a:p>
+          <a:p>
+            <a:r>
+              <a:rPr lang="en-US" sz="1800"/>
+              <a:t>EP modules continue to interact with RDP using their existing interface</a:t>
+            </a:r>
+          </a:p>
+          <a:p>
+            <a:r>
+              <a:rPr lang="en-US" sz="1800"/>
+              <a:t>RDP forwards requests to RemoteDiag via UDS socket channel.</a:t>
+            </a:r>
+            <a:endParaRPr lang="en-US" sz="1800" b="1"/>
+          </a:p>
+          <a:p>
+            <a:endParaRPr lang="en-US" sz="1800"/>
+          </a:p>
+        </p:txBody>
+      </p:sp>
+      <p:sp>
+        <p:nvSpPr>
+          <p:cNvPr id="6" name="TextBox 5"/>
+          <p:cNvSpPr txBox="1"/>
+          <p:nvPr/>
+        </p:nvSpPr>
+        <p:spPr>
+          <a:xfrm>
+            <a:off x="6781612" y="6335843"/>
+            <a:ext cx="643125" cy="369332"/>
+          </a:xfrm>
+          <a:prstGeom prst="rect">
+            <a:avLst/>
+          </a:prstGeom>
+          <a:noFill/>
+        </p:spPr>
+        <p:txBody>
+          <a:bodyPr wrap="none" rtlCol="0">
+            <a:spAutoFit/>
+          </a:bodyPr>
+          <a:lstStyle/>
+          <a:p>
+            <a:r>
+              <a:rPr lang="en-US"/>
+              <a:t>Alt-C</a:t>
+            </a:r>
+          </a:p>
+        </p:txBody>
+      </p:sp>
+      <p:pic>
+        <p:nvPicPr>
+          <p:cNvPr id="8" name="Picture 7"/>
+          <p:cNvPicPr>
+            <a:picLocks noChangeAspect="1"/>
+          </p:cNvPicPr>
+          <p:nvPr/>
+        </p:nvPicPr>
+        <p:blipFill>
+          <a:blip r:embed="rId4"/>
+          <a:stretch>
+            <a:fillRect/>
+          </a:stretch>
+        </p:blipFill>
+        <p:spPr>
+          <a:xfrm>
+            <a:off x="9326" y="4530022"/>
+            <a:ext cx="2196413" cy="1688471"/>
+          </a:xfrm>
+          <a:prstGeom prst="rect">
+            <a:avLst/>
+          </a:prstGeom>
+        </p:spPr>
+      </p:pic>
+      <p:pic>
+        <p:nvPicPr>
+          <p:cNvPr id="4" name="Picture 3"/>
+          <p:cNvPicPr>
+            <a:picLocks noChangeAspect="1"/>
+          </p:cNvPicPr>
+          <p:nvPr/>
+        </p:nvPicPr>
+        <p:blipFill>
+          <a:blip r:embed="rId5"/>
+          <a:stretch>
+            <a:fillRect/>
+          </a:stretch>
+        </p:blipFill>
+        <p:spPr>
+          <a:xfrm>
+            <a:off x="2205739" y="2354869"/>
+            <a:ext cx="9937672" cy="4417405"/>
+          </a:xfrm>
+          <a:prstGeom prst="rect">
+            <a:avLst/>
+          </a:prstGeom>
+        </p:spPr>
+      </p:pic>
+    </p:spTree>
+    <p:extLst>
+      <p:ext uri="{BB962C8B-B14F-4D97-AF65-F5344CB8AC3E}">
+        <p14:creationId xmlns:p14="http://schemas.microsoft.com/office/powerpoint/2010/main" val="4181377362"/>
+      </p:ext>
+    </p:extLst>
+  </p:cSld>
+  <p:clrMapOvr>
+    <a:masterClrMapping/>
+  </p:clrMapOvr>
+  <p:timing>
+    <p:tnLst>
+      <p:par>
+        <p:cTn id="1" dur="indefinite" restart="never" nodeType="tmRoot"/>
+      </p:par>
+    </p:tnLst>
+  </p:timing>
+</p:sld>
+</file>
+
+<file path=ppt/slides/slide11.xml><?xml version="1.0" encoding="utf-8"?>
 <p:sld xmlns:a="http://schemas.openxmlformats.org/drawingml/2006/main" xmlns:r="http://schemas.openxmlformats.org/officeDocument/2006/relationships" xmlns:p="http://schemas.openxmlformats.org/presentationml/2006/main">
   <p:cSld>
     <p:spTree>
@@ -3979,565 +4420,6 @@
           </a:p>
         </p:txBody>
       </p:sp>
-      <p:graphicFrame>
-        <p:nvGraphicFramePr>
-          <p:cNvPr id="6" name="Content Placeholder 5"/>
-          <p:cNvGraphicFramePr>
-            <a:graphicFrameLocks noGrp="1"/>
-          </p:cNvGraphicFramePr>
-          <p:nvPr>
-            <p:ph idx="1"/>
-            <p:extLst>
-              <p:ext uri="{D42A27DB-BD31-4B8C-83A1-F6EECF244321}">
-                <p14:modId xmlns:p14="http://schemas.microsoft.com/office/powerpoint/2010/main" val="4074359379"/>
-              </p:ext>
-            </p:extLst>
-          </p:nvPr>
-        </p:nvGraphicFramePr>
-        <p:xfrm>
-          <a:off x="0" y="7276193"/>
-          <a:ext cx="12019689" cy="4006407"/>
-        </p:xfrm>
-        <a:graphic>
-          <a:graphicData uri="http://schemas.openxmlformats.org/drawingml/2006/table">
-            <a:tbl>
-              <a:tblPr firstRow="1" bandRow="1">
-                <a:tableStyleId>{5C22544A-7EE6-4342-B048-85BDC9FD1C3A}</a:tableStyleId>
-              </a:tblPr>
-              <a:tblGrid>
-                <a:gridCol w="1630147">
-                  <a:extLst>
-                    <a:ext uri="{9D8B030D-6E8A-4147-A177-3AD203B41FA5}">
-                      <a16:colId xmlns:a16="http://schemas.microsoft.com/office/drawing/2014/main" val="20000"/>
-                    </a:ext>
-                  </a:extLst>
-                </a:gridCol>
-                <a:gridCol w="3619436">
-                  <a:extLst>
-                    <a:ext uri="{9D8B030D-6E8A-4147-A177-3AD203B41FA5}">
-                      <a16:colId xmlns:a16="http://schemas.microsoft.com/office/drawing/2014/main" val="20001"/>
-                    </a:ext>
-                  </a:extLst>
-                </a:gridCol>
-                <a:gridCol w="3279774">
-                  <a:extLst>
-                    <a:ext uri="{9D8B030D-6E8A-4147-A177-3AD203B41FA5}">
-                      <a16:colId xmlns:a16="http://schemas.microsoft.com/office/drawing/2014/main" val="20002"/>
-                    </a:ext>
-                  </a:extLst>
-                </a:gridCol>
-                <a:gridCol w="3490332">
-                  <a:extLst>
-                    <a:ext uri="{9D8B030D-6E8A-4147-A177-3AD203B41FA5}">
-                      <a16:colId xmlns:a16="http://schemas.microsoft.com/office/drawing/2014/main" val="20003"/>
-                    </a:ext>
-                  </a:extLst>
-                </a:gridCol>
-              </a:tblGrid>
-              <a:tr h="491543">
-                <a:tc>
-                  <a:txBody>
-                    <a:bodyPr/>
-                    <a:lstStyle/>
-                    <a:p>
-                      <a:pPr algn="ctr"/>
-                      <a:r>
-                        <a:rPr lang="en-US"/>
-                        <a:t>QA</a:t>
-                      </a:r>
-                    </a:p>
-                  </a:txBody>
-                  <a:tcPr/>
-                </a:tc>
-                <a:tc>
-                  <a:txBody>
-                    <a:bodyPr/>
-                    <a:lstStyle/>
-                    <a:p>
-                      <a:pPr algn="ctr"/>
-                      <a:r>
-                        <a:rPr lang="en-US"/>
-                        <a:t>Alt-A – Keep </a:t>
-                      </a:r>
-                      <a:r>
-                        <a:rPr lang="en-US" err="1"/>
-                        <a:t>RemoteDiag</a:t>
-                      </a:r>
-                      <a:r>
-                        <a:rPr lang="en-US"/>
-                        <a:t> in EP</a:t>
-                      </a:r>
-                    </a:p>
-                  </a:txBody>
-                  <a:tcPr/>
-                </a:tc>
-                <a:tc>
-                  <a:txBody>
-                    <a:bodyPr/>
-                    <a:lstStyle/>
-                    <a:p>
-                      <a:pPr algn="ctr"/>
-                      <a:r>
-                        <a:rPr lang="en-US"/>
-                        <a:t>Alt-B – Move </a:t>
-                      </a:r>
-                      <a:r>
-                        <a:rPr lang="en-US" err="1"/>
-                        <a:t>RemoteDiag</a:t>
-                      </a:r>
-                      <a:r>
-                        <a:rPr lang="en-US"/>
-                        <a:t> to IP</a:t>
-                      </a:r>
-                    </a:p>
-                  </a:txBody>
-                  <a:tcPr/>
-                </a:tc>
-                <a:tc>
-                  <a:txBody>
-                    <a:bodyPr/>
-                    <a:lstStyle/>
-                    <a:p>
-                      <a:pPr algn="ctr"/>
-                      <a:r>
-                        <a:rPr lang="en-US"/>
-                        <a:t>Alt-C – Move +</a:t>
-                      </a:r>
-                      <a:r>
-                        <a:rPr lang="en-US" baseline="0"/>
-                        <a:t> Proxy</a:t>
-                      </a:r>
-                      <a:endParaRPr lang="en-US"/>
-                    </a:p>
-                  </a:txBody>
-                  <a:tcPr/>
-                </a:tc>
-                <a:extLst>
-                  <a:ext uri="{0D108BD9-81ED-4DB2-BD59-A6C34878D82A}">
-                    <a16:rowId xmlns:a16="http://schemas.microsoft.com/office/drawing/2014/main" val="10000"/>
-                  </a:ext>
-                </a:extLst>
-              </a:tr>
-              <a:tr h="1575628">
-                <a:tc>
-                  <a:txBody>
-                    <a:bodyPr/>
-                    <a:lstStyle/>
-                    <a:p>
-                      <a:r>
-                        <a:rPr lang="en-US"/>
-                        <a:t>Security</a:t>
-                      </a:r>
-                    </a:p>
-                  </a:txBody>
-                  <a:tcPr/>
-                </a:tc>
-                <a:tc>
-                  <a:txBody>
-                    <a:bodyPr/>
-                    <a:lstStyle/>
-                    <a:p>
-                      <a:r>
-                        <a:rPr lang="en-US" b="1">
-                          <a:solidFill>
-                            <a:schemeClr val="accent2"/>
-                          </a:solidFill>
-                        </a:rPr>
-                        <a:t>Medium</a:t>
-                      </a:r>
-                    </a:p>
-                    <a:p>
-                      <a:r>
-                        <a:rPr lang="en-US"/>
-                        <a:t>CAN</a:t>
-                      </a:r>
-                      <a:r>
-                        <a:rPr lang="en-US" baseline="0"/>
-                        <a:t> is protected by SID Filter but </a:t>
-                      </a:r>
-                      <a:r>
-                        <a:rPr lang="en-US" err="1"/>
-                        <a:t>RemoteDiag</a:t>
-                      </a:r>
-                      <a:r>
-                        <a:rPr lang="en-US"/>
-                        <a:t> </a:t>
-                      </a:r>
-                      <a:r>
-                        <a:rPr lang="en-US" baseline="0"/>
-                        <a:t>remains controllable from compromised EP</a:t>
-                      </a:r>
-                      <a:endParaRPr lang="en-US"/>
-                    </a:p>
-                  </a:txBody>
-                  <a:tcPr/>
-                </a:tc>
-                <a:tc>
-                  <a:txBody>
-                    <a:bodyPr/>
-                    <a:lstStyle/>
-                    <a:p>
-                      <a:r>
-                        <a:rPr lang="en-US" b="1">
-                          <a:solidFill>
-                            <a:srgbClr val="00B050"/>
-                          </a:solidFill>
-                        </a:rPr>
-                        <a:t>High</a:t>
-                      </a:r>
-                    </a:p>
-                    <a:p>
-                      <a:r>
-                        <a:rPr lang="en-US" b="0">
-                          <a:solidFill>
-                            <a:schemeClr val="tx1"/>
-                          </a:solidFill>
-                        </a:rPr>
-                        <a:t>Complete </a:t>
-                      </a:r>
-                      <a:r>
-                        <a:rPr lang="en-US" err="1"/>
-                        <a:t>RemoteDiag</a:t>
-                      </a:r>
-                      <a:r>
-                        <a:rPr lang="en-US"/>
-                        <a:t> </a:t>
-                      </a:r>
-                      <a:r>
-                        <a:rPr lang="en-US" b="0">
-                          <a:solidFill>
-                            <a:schemeClr val="tx1"/>
-                          </a:solidFill>
-                        </a:rPr>
-                        <a:t>isolation and SID Filter</a:t>
-                      </a:r>
-                      <a:r>
-                        <a:rPr lang="en-US" b="0" baseline="0">
-                          <a:solidFill>
-                            <a:schemeClr val="tx1"/>
-                          </a:solidFill>
-                        </a:rPr>
-                        <a:t> in trusted IP.</a:t>
-                      </a:r>
-                      <a:endParaRPr lang="en-US" b="0">
-                        <a:solidFill>
-                          <a:schemeClr val="tx1"/>
-                        </a:solidFill>
-                      </a:endParaRPr>
-                    </a:p>
-                  </a:txBody>
-                  <a:tcPr/>
-                </a:tc>
-                <a:tc>
-                  <a:txBody>
-                    <a:bodyPr/>
-                    <a:lstStyle/>
-                    <a:p>
-                      <a:r>
-                        <a:rPr lang="en-US" b="1">
-                          <a:solidFill>
-                            <a:srgbClr val="00B050"/>
-                          </a:solidFill>
-                        </a:rPr>
-                        <a:t>High</a:t>
-                      </a:r>
-                    </a:p>
-                    <a:p>
-                      <a:r>
-                        <a:rPr lang="en-US" b="0">
-                          <a:solidFill>
-                            <a:schemeClr val="tx1"/>
-                          </a:solidFill>
-                        </a:rPr>
-                        <a:t>Complete </a:t>
-                      </a:r>
-                      <a:r>
-                        <a:rPr lang="en-US" err="1"/>
-                        <a:t>RemoteDiag</a:t>
-                      </a:r>
-                      <a:r>
-                        <a:rPr lang="en-US"/>
-                        <a:t> </a:t>
-                      </a:r>
-                      <a:r>
-                        <a:rPr lang="en-US" b="0">
-                          <a:solidFill>
-                            <a:schemeClr val="tx1"/>
-                          </a:solidFill>
-                        </a:rPr>
-                        <a:t>isolation and SID Filter</a:t>
-                      </a:r>
-                      <a:r>
-                        <a:rPr lang="en-US" b="0" baseline="0">
-                          <a:solidFill>
-                            <a:schemeClr val="tx1"/>
-                          </a:solidFill>
-                        </a:rPr>
-                        <a:t> in trusted IP.</a:t>
-                      </a:r>
-                      <a:endParaRPr lang="en-US" b="0">
-                        <a:solidFill>
-                          <a:schemeClr val="tx1"/>
-                        </a:solidFill>
-                      </a:endParaRPr>
-                    </a:p>
-                  </a:txBody>
-                  <a:tcPr/>
-                </a:tc>
-                <a:extLst>
-                  <a:ext uri="{0D108BD9-81ED-4DB2-BD59-A6C34878D82A}">
-                    <a16:rowId xmlns:a16="http://schemas.microsoft.com/office/drawing/2014/main" val="10001"/>
-                  </a:ext>
-                </a:extLst>
-              </a:tr>
-              <a:tr h="1939236">
-                <a:tc>
-                  <a:txBody>
-                    <a:bodyPr/>
-                    <a:lstStyle/>
-                    <a:p>
-                      <a:r>
-                        <a:rPr lang="en-US"/>
-                        <a:t>Maintainability</a:t>
-                      </a:r>
-                    </a:p>
-                  </a:txBody>
-                  <a:tcPr/>
-                </a:tc>
-                <a:tc>
-                  <a:txBody>
-                    <a:bodyPr/>
-                    <a:lstStyle/>
-                    <a:p>
-                      <a:r>
-                        <a:rPr lang="en-US" b="1">
-                          <a:solidFill>
-                            <a:schemeClr val="accent2"/>
-                          </a:solidFill>
-                        </a:rPr>
-                        <a:t>Medium</a:t>
-                      </a:r>
-                      <a:endParaRPr lang="en-US" b="1">
-                        <a:solidFill>
-                          <a:srgbClr val="00B050"/>
-                        </a:solidFill>
-                      </a:endParaRPr>
-                    </a:p>
-                    <a:p>
-                      <a:r>
-                        <a:rPr lang="en-US" b="0">
-                          <a:solidFill>
-                            <a:schemeClr val="tx1"/>
-                          </a:solidFill>
-                        </a:rPr>
-                        <a:t>Existing</a:t>
-                      </a:r>
-                      <a:r>
-                        <a:rPr lang="en-US" b="0" baseline="0">
-                          <a:solidFill>
-                            <a:schemeClr val="tx1"/>
-                          </a:solidFill>
-                        </a:rPr>
-                        <a:t> </a:t>
-                      </a:r>
-                      <a:r>
-                        <a:rPr lang="en-US" b="0">
-                          <a:solidFill>
-                            <a:schemeClr val="tx1"/>
-                          </a:solidFill>
-                        </a:rPr>
-                        <a:t>EP modules and </a:t>
-                      </a:r>
-                      <a:r>
-                        <a:rPr lang="en-US" err="1"/>
-                        <a:t>RemoteDiag</a:t>
-                      </a:r>
-                      <a:r>
-                        <a:rPr lang="en-US"/>
-                        <a:t> </a:t>
-                      </a:r>
-                      <a:r>
-                        <a:rPr lang="en-US" b="0">
-                          <a:solidFill>
-                            <a:schemeClr val="tx1"/>
-                          </a:solidFill>
-                        </a:rPr>
-                        <a:t>keep their current</a:t>
-                      </a:r>
-                      <a:r>
-                        <a:rPr lang="en-US" b="0" baseline="0">
-                          <a:solidFill>
-                            <a:schemeClr val="tx1"/>
-                          </a:solidFill>
-                        </a:rPr>
-                        <a:t> </a:t>
-                      </a:r>
-                      <a:r>
-                        <a:rPr lang="en-US" b="0">
-                          <a:solidFill>
-                            <a:schemeClr val="tx1"/>
-                          </a:solidFill>
-                        </a:rPr>
-                        <a:t>interface. But </a:t>
-                      </a:r>
-                      <a:r>
-                        <a:rPr lang="en-US" b="0" err="1">
-                          <a:solidFill>
-                            <a:schemeClr val="tx1"/>
-                          </a:solidFill>
-                        </a:rPr>
-                        <a:t>OnBoardClient</a:t>
-                      </a:r>
-                      <a:r>
-                        <a:rPr lang="en-US" b="0" baseline="0">
-                          <a:solidFill>
-                            <a:schemeClr val="tx1"/>
-                          </a:solidFill>
-                        </a:rPr>
-                        <a:t> has to be modified.</a:t>
-                      </a:r>
-                      <a:endParaRPr lang="en-US" b="0">
-                        <a:solidFill>
-                          <a:schemeClr val="tx1"/>
-                        </a:solidFill>
-                      </a:endParaRPr>
-                    </a:p>
-                    <a:p>
-                      <a:endParaRPr lang="en-US" b="0">
-                        <a:solidFill>
-                          <a:schemeClr val="tx1"/>
-                        </a:solidFill>
-                      </a:endParaRPr>
-                    </a:p>
-                  </a:txBody>
-                  <a:tcPr/>
-                </a:tc>
-                <a:tc>
-                  <a:txBody>
-                    <a:bodyPr/>
-                    <a:lstStyle/>
-                    <a:p>
-                      <a:r>
-                        <a:rPr lang="en-US" b="1">
-                          <a:solidFill>
-                            <a:srgbClr val="FF0000"/>
-                          </a:solidFill>
-                        </a:rPr>
-                        <a:t>Low</a:t>
-                      </a:r>
-                    </a:p>
-                    <a:p>
-                      <a:r>
-                        <a:rPr lang="en-US" b="0">
-                          <a:solidFill>
-                            <a:schemeClr val="tx1"/>
-                          </a:solidFill>
-                        </a:rPr>
-                        <a:t>More than 10 EP modules have to change their implementation to support cross-container IPC</a:t>
-                      </a:r>
-                      <a:r>
-                        <a:rPr lang="en-US" b="0" baseline="0">
-                          <a:solidFill>
-                            <a:schemeClr val="tx1"/>
-                          </a:solidFill>
-                        </a:rPr>
-                        <a:t> mechanism.</a:t>
-                      </a:r>
-                      <a:endParaRPr lang="en-US" b="0">
-                        <a:solidFill>
-                          <a:schemeClr val="tx1"/>
-                        </a:solidFill>
-                      </a:endParaRPr>
-                    </a:p>
-                  </a:txBody>
-                  <a:tcPr/>
-                </a:tc>
-                <a:tc>
-                  <a:txBody>
-                    <a:bodyPr/>
-                    <a:lstStyle/>
-                    <a:p>
-                      <a:r>
-                        <a:rPr lang="en-US" b="1">
-                          <a:solidFill>
-                            <a:schemeClr val="accent2"/>
-                          </a:solidFill>
-                        </a:rPr>
-                        <a:t>Medium</a:t>
-                      </a:r>
-                    </a:p>
-                    <a:p>
-                      <a:r>
-                        <a:rPr lang="en-US" b="0">
-                          <a:solidFill>
-                            <a:schemeClr val="tx1"/>
-                          </a:solidFill>
-                        </a:rPr>
-                        <a:t>EP modules’ interface unchanged,</a:t>
-                      </a:r>
-                      <a:r>
-                        <a:rPr lang="en-US" b="0" baseline="0">
-                          <a:solidFill>
-                            <a:schemeClr val="tx1"/>
-                          </a:solidFill>
-                        </a:rPr>
-                        <a:t> but</a:t>
-                      </a:r>
-                      <a:r>
-                        <a:rPr lang="en-US" b="0">
-                          <a:solidFill>
-                            <a:schemeClr val="tx1"/>
-                          </a:solidFill>
-                        </a:rPr>
-                        <a:t> </a:t>
-                      </a:r>
-                      <a:r>
-                        <a:rPr lang="en-US"/>
-                        <a:t>additional</a:t>
-                      </a:r>
-                      <a:r>
-                        <a:rPr lang="en-US" baseline="0"/>
-                        <a:t> components (proxy and cross-container IPC)</a:t>
-                      </a:r>
-                      <a:r>
-                        <a:rPr lang="en-US"/>
-                        <a:t> </a:t>
-                      </a:r>
-                      <a:r>
-                        <a:rPr lang="en-US" b="0">
-                          <a:solidFill>
-                            <a:schemeClr val="tx1"/>
-                          </a:solidFill>
-                        </a:rPr>
-                        <a:t>have to</a:t>
-                      </a:r>
-                      <a:r>
-                        <a:rPr lang="en-US" b="0" baseline="0">
-                          <a:solidFill>
-                            <a:schemeClr val="tx1"/>
-                          </a:solidFill>
-                        </a:rPr>
-                        <a:t> be implemented and maintained.</a:t>
-                      </a:r>
-                      <a:endParaRPr lang="en-US" b="0">
-                        <a:solidFill>
-                          <a:schemeClr val="tx1"/>
-                        </a:solidFill>
-                      </a:endParaRPr>
-                    </a:p>
-                  </a:txBody>
-                  <a:tcPr/>
-                </a:tc>
-                <a:extLst>
-                  <a:ext uri="{0D108BD9-81ED-4DB2-BD59-A6C34878D82A}">
-                    <a16:rowId xmlns:a16="http://schemas.microsoft.com/office/drawing/2014/main" val="2845297163"/>
-                  </a:ext>
-                </a:extLst>
-              </a:tr>
-            </a:tbl>
-          </a:graphicData>
-        </a:graphic>
-      </p:graphicFrame>
       <p:sp>
         <p:nvSpPr>
           <p:cNvPr id="5" name="TextBox 4"/>
@@ -4584,7 +4466,7 @@
           <p:cNvPr id="7" name="Table 6">
             <a:extLst>
               <a:ext uri="{FF2B5EF4-FFF2-40B4-BE49-F238E27FC236}">
-                <a16:creationId xmlns:a16="http://schemas.microsoft.com/office/drawing/2014/main" id="{6C8AAA51-C203-CD8B-4B02-DE7401134C21}"/>
+                <a16:creationId xmlns="" xmlns:a16="http://schemas.microsoft.com/office/drawing/2014/main" id="{6C8AAA51-C203-CD8B-4B02-DE7401134C21}"/>
               </a:ext>
             </a:extLst>
           </p:cNvPr>
@@ -4594,14 +4476,14 @@
           <p:nvPr>
             <p:extLst>
               <p:ext uri="{D42A27DB-BD31-4B8C-83A1-F6EECF244321}">
-                <p14:modId xmlns:p14="http://schemas.microsoft.com/office/powerpoint/2010/main" val="1223815471"/>
+                <p14:modId xmlns:p14="http://schemas.microsoft.com/office/powerpoint/2010/main" val="810080571"/>
               </p:ext>
             </p:extLst>
           </p:nvPr>
         </p:nvGraphicFramePr>
         <p:xfrm>
-          <a:off x="72428" y="616718"/>
-          <a:ext cx="12050161" cy="5010143"/>
+          <a:off x="72428" y="725354"/>
+          <a:ext cx="12050161" cy="4910976"/>
         </p:xfrm>
         <a:graphic>
           <a:graphicData uri="http://schemas.openxmlformats.org/drawingml/2006/table">
@@ -4613,28 +4495,28 @@
                 <a:gridCol w="1149790">
                   <a:extLst>
                     <a:ext uri="{9D8B030D-6E8A-4147-A177-3AD203B41FA5}">
-                      <a16:colId xmlns:a16="http://schemas.microsoft.com/office/drawing/2014/main" val="20000"/>
+                      <a16:colId xmlns="" xmlns:a16="http://schemas.microsoft.com/office/drawing/2014/main" val="20000"/>
                     </a:ext>
                   </a:extLst>
                 </a:gridCol>
                 <a:gridCol w="3633457">
                   <a:extLst>
                     <a:ext uri="{9D8B030D-6E8A-4147-A177-3AD203B41FA5}">
-                      <a16:colId xmlns:a16="http://schemas.microsoft.com/office/drawing/2014/main" val="20001"/>
+                      <a16:colId xmlns="" xmlns:a16="http://schemas.microsoft.com/office/drawing/2014/main" val="20001"/>
                     </a:ext>
                   </a:extLst>
                 </a:gridCol>
                 <a:gridCol w="3781331">
                   <a:extLst>
                     <a:ext uri="{9D8B030D-6E8A-4147-A177-3AD203B41FA5}">
-                      <a16:colId xmlns:a16="http://schemas.microsoft.com/office/drawing/2014/main" val="2530683369"/>
+                      <a16:colId xmlns="" xmlns:a16="http://schemas.microsoft.com/office/drawing/2014/main" val="2530683369"/>
                     </a:ext>
                   </a:extLst>
                 </a:gridCol>
                 <a:gridCol w="3485583">
                   <a:extLst>
                     <a:ext uri="{9D8B030D-6E8A-4147-A177-3AD203B41FA5}">
-                      <a16:colId xmlns:a16="http://schemas.microsoft.com/office/drawing/2014/main" val="20002"/>
+                      <a16:colId xmlns="" xmlns:a16="http://schemas.microsoft.com/office/drawing/2014/main" val="20002"/>
                     </a:ext>
                   </a:extLst>
                 </a:gridCol>
@@ -4973,7 +4855,7 @@
                 </a:tc>
                 <a:extLst>
                   <a:ext uri="{0D108BD9-81ED-4DB2-BD59-A6C34878D82A}">
-                    <a16:rowId xmlns:a16="http://schemas.microsoft.com/office/drawing/2014/main" val="10000"/>
+                    <a16:rowId xmlns="" xmlns:a16="http://schemas.microsoft.com/office/drawing/2014/main" val="10000"/>
                   </a:ext>
                 </a:extLst>
               </a:tr>
@@ -5424,7 +5306,7 @@
                 </a:tc>
                 <a:extLst>
                   <a:ext uri="{0D108BD9-81ED-4DB2-BD59-A6C34878D82A}">
-                    <a16:rowId xmlns:a16="http://schemas.microsoft.com/office/drawing/2014/main" val="10001"/>
+                    <a16:rowId xmlns="" xmlns:a16="http://schemas.microsoft.com/office/drawing/2014/main" val="10001"/>
                   </a:ext>
                 </a:extLst>
               </a:tr>
@@ -5586,7 +5468,7 @@
                         <a:t>within the EP container</a:t>
                       </a:r>
                       <a:r>
-                        <a:rPr lang="en-US" sz="1300" b="0" kern="1200" baseline="0">
+                        <a:rPr lang="en-US" sz="1300" b="0" kern="1200" baseline="0" smtClean="0">
                           <a:solidFill>
                             <a:schemeClr val="dk1"/>
                           </a:solidFill>
@@ -5595,8 +5477,17 @@
                           <a:ea typeface="+mn-ea"/>
                           <a:cs typeface="Arial" panose="020B0604020202020204" pitchFamily="34" charset="0"/>
                         </a:rPr>
-                        <a:t>.</a:t>
+                        <a:t>. (CyberSecurity team confirmed)</a:t>
                       </a:r>
+                      <a:endParaRPr lang="en-US" sz="1300" b="0" kern="1200" baseline="0">
+                        <a:solidFill>
+                          <a:schemeClr val="dk1"/>
+                        </a:solidFill>
+                        <a:effectLst/>
+                        <a:latin typeface="+mn-lt"/>
+                        <a:ea typeface="+mn-ea"/>
+                        <a:cs typeface="Arial" panose="020B0604020202020204" pitchFamily="34" charset="0"/>
+                      </a:endParaRPr>
                     </a:p>
                   </a:txBody>
                   <a:tcPr marL="25400" marR="25400" marT="0" marB="0">
@@ -5696,7 +5587,7 @@
                         <a:t>within the EP container</a:t>
                       </a:r>
                       <a:r>
-                        <a:rPr lang="en-US" sz="1300" b="0" kern="1200" baseline="0">
+                        <a:rPr lang="en-US" sz="1300" b="0" kern="1200" baseline="0" smtClean="0">
                           <a:solidFill>
                             <a:schemeClr val="dk1"/>
                           </a:solidFill>
@@ -5705,8 +5596,17 @@
                           <a:ea typeface="+mn-ea"/>
                           <a:cs typeface="Arial" panose="020B0604020202020204" pitchFamily="34" charset="0"/>
                         </a:rPr>
-                        <a:t>.</a:t>
+                        <a:t>. (CyberSecurity team confirmed)</a:t>
                       </a:r>
+                      <a:endParaRPr lang="en-US" sz="1300" b="0" kern="1200" baseline="0">
+                        <a:solidFill>
+                          <a:schemeClr val="dk1"/>
+                        </a:solidFill>
+                        <a:effectLst/>
+                        <a:latin typeface="+mn-lt"/>
+                        <a:ea typeface="+mn-ea"/>
+                        <a:cs typeface="Arial" panose="020B0604020202020204" pitchFamily="34" charset="0"/>
+                      </a:endParaRPr>
                     </a:p>
                   </a:txBody>
                   <a:tcPr marL="106700" marR="106700" marT="53350" marB="53350">
@@ -5803,8 +5703,41 @@
                           <a:ea typeface="+mn-ea"/>
                           <a:cs typeface="Arial" panose="020B0604020202020204" pitchFamily="34" charset="0"/>
                         </a:rPr>
-                        <a:t>within the EP container.</a:t>
+                        <a:t>within the EP container</a:t>
                       </a:r>
+                      <a:r>
+                        <a:rPr lang="en-US" sz="1300" b="1" kern="1200" baseline="0" smtClean="0">
+                          <a:solidFill>
+                            <a:schemeClr val="dk1"/>
+                          </a:solidFill>
+                          <a:effectLst/>
+                          <a:latin typeface="+mn-lt"/>
+                          <a:ea typeface="+mn-ea"/>
+                          <a:cs typeface="Arial" panose="020B0604020202020204" pitchFamily="34" charset="0"/>
+                        </a:rPr>
+                        <a:t>.</a:t>
+                      </a:r>
+                      <a:r>
+                        <a:rPr lang="en-US" sz="1300" b="0" kern="1200" baseline="0" smtClean="0">
+                          <a:solidFill>
+                            <a:schemeClr val="dk1"/>
+                          </a:solidFill>
+                          <a:effectLst/>
+                          <a:latin typeface="+mn-lt"/>
+                          <a:ea typeface="+mn-ea"/>
+                          <a:cs typeface="Arial" panose="020B0604020202020204" pitchFamily="34" charset="0"/>
+                        </a:rPr>
+                        <a:t> (CyberSecurity team confirmed)</a:t>
+                      </a:r>
+                      <a:endParaRPr lang="en-US" sz="1300" b="1" kern="1200" baseline="0">
+                        <a:solidFill>
+                          <a:schemeClr val="dk1"/>
+                        </a:solidFill>
+                        <a:effectLst/>
+                        <a:latin typeface="+mn-lt"/>
+                        <a:ea typeface="+mn-ea"/>
+                        <a:cs typeface="Arial" panose="020B0604020202020204" pitchFamily="34" charset="0"/>
+                      </a:endParaRPr>
                     </a:p>
                   </a:txBody>
                   <a:tcPr marL="106700" marR="106700" marT="53350" marB="53350">
@@ -5848,7 +5781,7 @@
                 </a:tc>
                 <a:extLst>
                   <a:ext uri="{0D108BD9-81ED-4DB2-BD59-A6C34878D82A}">
-                    <a16:rowId xmlns:a16="http://schemas.microsoft.com/office/drawing/2014/main" val="10002"/>
+                    <a16:rowId xmlns="" xmlns:a16="http://schemas.microsoft.com/office/drawing/2014/main" val="10002"/>
                   </a:ext>
                 </a:extLst>
               </a:tr>
@@ -5982,6 +5915,18 @@
                         </a:spcAft>
                       </a:pPr>
                       <a:r>
+                        <a:rPr lang="en-US" sz="1300" b="0" kern="1200" baseline="0" smtClean="0">
+                          <a:solidFill>
+                            <a:schemeClr val="dk1"/>
+                          </a:solidFill>
+                          <a:effectLst/>
+                          <a:latin typeface="+mn-lt"/>
+                          <a:ea typeface="+mn-ea"/>
+                          <a:cs typeface="Arial" panose="020B0604020202020204" pitchFamily="34" charset="0"/>
+                        </a:rPr>
+                        <a:t>RemoteDiag </a:t>
+                      </a:r>
+                      <a:r>
                         <a:rPr lang="en-US" sz="1300" b="0" kern="1200" baseline="0">
                           <a:solidFill>
                             <a:schemeClr val="dk1"/>
@@ -5991,7 +5936,31 @@
                           <a:ea typeface="+mn-ea"/>
                           <a:cs typeface="Arial" panose="020B0604020202020204" pitchFamily="34" charset="0"/>
                         </a:rPr>
-                        <a:t>Responsibilities of RemoteDiag and OnBoardClient change (</a:t>
+                        <a:t>and </a:t>
+                      </a:r>
+                      <a:r>
+                        <a:rPr lang="en-US" sz="1300" b="0" kern="1200" baseline="0" smtClean="0">
+                          <a:solidFill>
+                            <a:schemeClr val="dk1"/>
+                          </a:solidFill>
+                          <a:effectLst/>
+                          <a:latin typeface="+mn-lt"/>
+                          <a:ea typeface="+mn-ea"/>
+                          <a:cs typeface="Arial" panose="020B0604020202020204" pitchFamily="34" charset="0"/>
+                        </a:rPr>
+                        <a:t>OnBoardClient’s responsibility is changed </a:t>
+                      </a:r>
+                      <a:r>
+                        <a:rPr lang="en-US" sz="1300" b="0" kern="1200" baseline="0">
+                          <a:solidFill>
+                            <a:schemeClr val="dk1"/>
+                          </a:solidFill>
+                          <a:effectLst/>
+                          <a:latin typeface="+mn-lt"/>
+                          <a:ea typeface="+mn-ea"/>
+                          <a:cs typeface="Arial" panose="020B0604020202020204" pitchFamily="34" charset="0"/>
+                        </a:rPr>
+                        <a:t>(</a:t>
                       </a:r>
                       <a:r>
                         <a:rPr lang="en-US" sz="1300" b="1" kern="1200" baseline="0">
@@ -6015,8 +5984,77 @@
                           <a:ea typeface="+mn-ea"/>
                           <a:cs typeface="Arial" panose="020B0604020202020204" pitchFamily="34" charset="0"/>
                         </a:rPr>
-                        <a:t> moves to and specifications.. OnBoardClient), requiring updates to requirements </a:t>
+                        <a:t> </a:t>
                       </a:r>
+                      <a:r>
+                        <a:rPr lang="en-US" sz="1300" b="0" kern="1200" baseline="0" smtClean="0">
+                          <a:solidFill>
+                            <a:schemeClr val="dk1"/>
+                          </a:solidFill>
+                          <a:effectLst/>
+                          <a:latin typeface="+mn-lt"/>
+                          <a:ea typeface="+mn-ea"/>
+                          <a:cs typeface="Arial" panose="020B0604020202020204" pitchFamily="34" charset="0"/>
+                        </a:rPr>
+                        <a:t>is moved </a:t>
+                      </a:r>
+                      <a:r>
+                        <a:rPr lang="en-US" sz="1300" b="0" kern="1200" baseline="0">
+                          <a:solidFill>
+                            <a:schemeClr val="dk1"/>
+                          </a:solidFill>
+                          <a:effectLst/>
+                          <a:latin typeface="+mn-lt"/>
+                          <a:ea typeface="+mn-ea"/>
+                          <a:cs typeface="Arial" panose="020B0604020202020204" pitchFamily="34" charset="0"/>
+                        </a:rPr>
+                        <a:t>to </a:t>
+                      </a:r>
+                      <a:r>
+                        <a:rPr lang="en-US" sz="1300" b="0" kern="1200" baseline="0" smtClean="0">
+                          <a:solidFill>
+                            <a:schemeClr val="dk1"/>
+                          </a:solidFill>
+                          <a:effectLst/>
+                          <a:latin typeface="+mn-lt"/>
+                          <a:ea typeface="+mn-ea"/>
+                          <a:cs typeface="Arial" panose="020B0604020202020204" pitchFamily="34" charset="0"/>
+                        </a:rPr>
+                        <a:t>OnBoardClient</a:t>
+                      </a:r>
+                      <a:r>
+                        <a:rPr lang="en-US" sz="1300" b="0" kern="1200" baseline="0">
+                          <a:solidFill>
+                            <a:schemeClr val="dk1"/>
+                          </a:solidFill>
+                          <a:effectLst/>
+                          <a:latin typeface="+mn-lt"/>
+                          <a:ea typeface="+mn-ea"/>
+                          <a:cs typeface="Arial" panose="020B0604020202020204" pitchFamily="34" charset="0"/>
+                        </a:rPr>
+                        <a:t>), requiring </a:t>
+                      </a:r>
+                      <a:r>
+                        <a:rPr lang="en-US" sz="1300" b="0" kern="1200" baseline="0" smtClean="0">
+                          <a:solidFill>
+                            <a:schemeClr val="dk1"/>
+                          </a:solidFill>
+                          <a:effectLst/>
+                          <a:latin typeface="+mn-lt"/>
+                          <a:ea typeface="+mn-ea"/>
+                          <a:cs typeface="Arial" panose="020B0604020202020204" pitchFamily="34" charset="0"/>
+                        </a:rPr>
+                        <a:t>requirement updates.</a:t>
+                      </a:r>
+                      <a:endParaRPr lang="en-US" sz="1300" b="0" kern="1200" baseline="0">
+                        <a:solidFill>
+                          <a:schemeClr val="dk1"/>
+                        </a:solidFill>
+                        <a:effectLst/>
+                        <a:latin typeface="+mn-lt"/>
+                        <a:ea typeface="+mn-ea"/>
+                        <a:cs typeface="Arial" panose="020B0604020202020204" pitchFamily="34" charset="0"/>
+                      </a:endParaRPr>
                     </a:p>
                   </a:txBody>
                   <a:tcPr marL="25400" marR="25400" marT="0" marB="0">
@@ -6275,7 +6313,7 @@
                 </a:tc>
                 <a:extLst>
                   <a:ext uri="{0D108BD9-81ED-4DB2-BD59-A6C34878D82A}">
-                    <a16:rowId xmlns:a16="http://schemas.microsoft.com/office/drawing/2014/main" val="10003"/>
+                    <a16:rowId xmlns="" xmlns:a16="http://schemas.microsoft.com/office/drawing/2014/main" val="10003"/>
                   </a:ext>
                 </a:extLst>
               </a:tr>
@@ -6673,7 +6711,7 @@
                 </a:tc>
                 <a:extLst>
                   <a:ext uri="{0D108BD9-81ED-4DB2-BD59-A6C34878D82A}">
-                    <a16:rowId xmlns:a16="http://schemas.microsoft.com/office/drawing/2014/main" val="10004"/>
+                    <a16:rowId xmlns="" xmlns:a16="http://schemas.microsoft.com/office/drawing/2014/main" val="10004"/>
                   </a:ext>
                 </a:extLst>
               </a:tr>
@@ -6689,7 +6727,7 @@
                         </a:lnSpc>
                       </a:pPr>
                       <a:r>
-                        <a:rPr lang="en-US" sz="1200" b="0" kern="1200">
+                        <a:rPr lang="en-US" sz="1200" b="0" strike="sngStrike" kern="1200">
                           <a:solidFill>
                             <a:schemeClr val="dk1"/>
                           </a:solidFill>
@@ -6708,7 +6746,7 @@
                         </a:lnSpc>
                       </a:pPr>
                       <a:r>
-                        <a:rPr lang="en-US" sz="1200" b="0" kern="1200">
+                        <a:rPr lang="en-US" sz="1200" b="0" strike="sngStrike" kern="1200">
                           <a:solidFill>
                             <a:schemeClr val="dk1"/>
                           </a:solidFill>
@@ -6777,7 +6815,7 @@
                         </a:spcAft>
                       </a:pPr>
                       <a:r>
-                        <a:rPr lang="en-US" sz="1300" b="1">
+                        <a:rPr lang="en-US" sz="1300" b="1" strike="sngStrike">
                           <a:solidFill>
                             <a:srgbClr val="00B050"/>
                           </a:solidFill>
@@ -6804,7 +6842,7 @@
                         <a:defRPr/>
                       </a:pPr>
                       <a:r>
-                        <a:rPr lang="en-US" sz="1300" b="0" kern="1200" baseline="0">
+                        <a:rPr lang="en-US" sz="1300" b="0" strike="sngStrike" kern="1200" baseline="0">
                           <a:solidFill>
                             <a:schemeClr val="dk1"/>
                           </a:solidFill>
@@ -6813,8 +6851,29 @@
                           <a:ea typeface="+mn-ea"/>
                           <a:cs typeface="Arial" panose="020B0604020202020204" pitchFamily="34" charset="0"/>
                         </a:rPr>
-                        <a:t>OEM center and MM ECU communication flows run in separate processes. Failure of one flow does not impact the other.</a:t>
+                        <a:t>OEM center and MM ECU communication flows run in separate processes. Failure of one flow does not impact the other</a:t>
                       </a:r>
+                      <a:r>
+                        <a:rPr lang="en-US" sz="1300" b="0" strike="sngStrike" kern="1200" baseline="0" smtClean="0">
+                          <a:solidFill>
+                            <a:schemeClr val="dk1"/>
+                          </a:solidFill>
+                          <a:effectLst/>
+                          <a:latin typeface="+mn-lt"/>
+                          <a:ea typeface="+mn-ea"/>
+                          <a:cs typeface="Arial" panose="020B0604020202020204" pitchFamily="34" charset="0"/>
+                        </a:rPr>
+                        <a:t>.</a:t>
+                      </a:r>
+                      <a:endParaRPr lang="en-US" sz="1300" b="0" strike="sngStrike" kern="1200" baseline="0">
+                        <a:solidFill>
+                          <a:schemeClr val="dk1"/>
+                        </a:solidFill>
+                        <a:effectLst/>
+                        <a:latin typeface="+mn-lt"/>
+                        <a:ea typeface="+mn-ea"/>
+                        <a:cs typeface="Arial" panose="020B0604020202020204" pitchFamily="34" charset="0"/>
+                      </a:endParaRPr>
                     </a:p>
                   </a:txBody>
                   <a:tcPr marL="25400" marR="25400" marT="0" marB="0">
@@ -6879,7 +6938,7 @@
                         <a:defRPr/>
                       </a:pPr>
                       <a:r>
-                        <a:rPr lang="en-US" sz="1300" b="1">
+                        <a:rPr lang="en-US" sz="1300" b="1" strike="sngStrike">
                           <a:solidFill>
                             <a:srgbClr val="FF0000"/>
                           </a:solidFill>
@@ -6906,7 +6965,7 @@
                         <a:defRPr/>
                       </a:pPr>
                       <a:r>
-                        <a:rPr lang="en-US" sz="1300" b="0" kern="1200" baseline="0">
+                        <a:rPr lang="en-US" sz="1300" b="0" strike="sngStrike" kern="1200" baseline="0">
                           <a:solidFill>
                             <a:schemeClr val="tx1"/>
                           </a:solidFill>
@@ -6918,7 +6977,7 @@
                         <a:t>OEM center and MM ECU </a:t>
                       </a:r>
                       <a:r>
-                        <a:rPr lang="en-US" sz="1300" b="0" kern="1200" baseline="0">
+                        <a:rPr lang="en-US" sz="1300" b="0" strike="sngStrike" kern="1200" baseline="0">
                           <a:solidFill>
                             <a:schemeClr val="dk1"/>
                           </a:solidFill>
@@ -6930,7 +6989,7 @@
                         <a:t>communication </a:t>
                       </a:r>
                       <a:r>
-                        <a:rPr lang="en-US" sz="1300" b="0" kern="1200" baseline="0">
+                        <a:rPr lang="en-US" sz="1300" b="0" strike="sngStrike" kern="1200" baseline="0">
                           <a:solidFill>
                             <a:schemeClr val="tx1"/>
                           </a:solidFill>
@@ -6993,7 +7052,7 @@
                         </a:lnSpc>
                       </a:pPr>
                       <a:r>
-                        <a:rPr lang="en-US" sz="1300" b="1">
+                        <a:rPr lang="en-US" sz="1300" b="1" strike="sngStrike">
                           <a:solidFill>
                             <a:srgbClr val="FF0000"/>
                           </a:solidFill>
@@ -7020,7 +7079,7 @@
                         <a:defRPr/>
                       </a:pPr>
                       <a:r>
-                        <a:rPr lang="en-US" sz="1300" b="0" kern="1200" baseline="0">
+                        <a:rPr lang="en-US" sz="1300" b="0" strike="sngStrike" kern="1200" baseline="0">
                           <a:solidFill>
                             <a:schemeClr val="tx1"/>
                           </a:solidFill>
@@ -7032,7 +7091,7 @@
                         <a:t>OEM center and MM ECU </a:t>
                       </a:r>
                       <a:r>
-                        <a:rPr lang="en-US" sz="1300" b="0" kern="1200" baseline="0">
+                        <a:rPr lang="en-US" sz="1300" b="0" strike="sngStrike" kern="1200" baseline="0">
                           <a:solidFill>
                             <a:schemeClr val="dk1"/>
                           </a:solidFill>
@@ -7044,7 +7103,7 @@
                         <a:t>communication </a:t>
                       </a:r>
                       <a:r>
-                        <a:rPr lang="en-US" sz="1300" b="0" kern="1200" baseline="0">
+                        <a:rPr lang="en-US" sz="1300" b="0" strike="sngStrike" kern="1200" baseline="0">
                           <a:solidFill>
                             <a:schemeClr val="tx1"/>
                           </a:solidFill>
@@ -7055,7 +7114,7 @@
                         </a:rPr>
                         <a:t>flows share the same process. Failure in one flow may impact the other.</a:t>
                       </a:r>
-                      <a:endParaRPr lang="en-US" sz="1300" b="0">
+                      <a:endParaRPr lang="en-US" sz="1300" b="0" strike="sngStrike">
                         <a:solidFill>
                           <a:schemeClr val="tx1"/>
                         </a:solidFill>
@@ -7105,7 +7164,7 @@
                 </a:tc>
                 <a:extLst>
                   <a:ext uri="{0D108BD9-81ED-4DB2-BD59-A6C34878D82A}">
-                    <a16:rowId xmlns:a16="http://schemas.microsoft.com/office/drawing/2014/main" val="10005"/>
+                    <a16:rowId xmlns="" xmlns:a16="http://schemas.microsoft.com/office/drawing/2014/main" val="10005"/>
                   </a:ext>
                 </a:extLst>
               </a:tr>
@@ -7377,7 +7436,7 @@
                 </a:tc>
                 <a:extLst>
                   <a:ext uri="{0D108BD9-81ED-4DB2-BD59-A6C34878D82A}">
-                    <a16:rowId xmlns:a16="http://schemas.microsoft.com/office/drawing/2014/main" val="10006"/>
+                    <a16:rowId xmlns="" xmlns:a16="http://schemas.microsoft.com/office/drawing/2014/main" val="10006"/>
                   </a:ext>
                 </a:extLst>
               </a:tr>
@@ -7460,7 +7519,7 @@
           <p:cNvPr id="9" name="Picture 2" descr="체크 표시 클립 아트. 무료 다운로드. | Creazilla">
             <a:extLst>
               <a:ext uri="{FF2B5EF4-FFF2-40B4-BE49-F238E27FC236}">
-                <a16:creationId xmlns:a16="http://schemas.microsoft.com/office/drawing/2014/main" id="{07DB846E-8DD2-9BB2-88FF-8A7E0BD6CA84}"/>
+                <a16:creationId xmlns="" xmlns:a16="http://schemas.microsoft.com/office/drawing/2014/main" id="{07DB846E-8DD2-9BB2-88FF-8A7E0BD6CA84}"/>
               </a:ext>
             </a:extLst>
           </p:cNvPr>
@@ -7512,10 +7571,239 @@
   <p:clrMapOvr>
     <a:masterClrMapping/>
   </p:clrMapOvr>
+  <p:timing>
+    <p:tnLst>
+      <p:par>
+        <p:cTn id="1" dur="indefinite" restart="never" nodeType="tmRoot"/>
+      </p:par>
+    </p:tnLst>
+  </p:timing>
 </p:sld>
 </file>
 
-<file path=ppt/slides/slide11.xml><?xml version="1.0" encoding="utf-8"?>
+<file path=ppt/slides/slide12.xml><?xml version="1.0" encoding="utf-8"?>
+<p:sld xmlns:a="http://schemas.openxmlformats.org/drawingml/2006/main" xmlns:r="http://schemas.openxmlformats.org/officeDocument/2006/relationships" xmlns:p="http://schemas.openxmlformats.org/presentationml/2006/main">
+  <p:cSld>
+    <p:spTree>
+      <p:nvGrpSpPr>
+        <p:cNvPr id="1" name=""/>
+        <p:cNvGrpSpPr/>
+        <p:nvPr/>
+      </p:nvGrpSpPr>
+      <p:grpSpPr>
+        <a:xfrm>
+          <a:off x="0" y="0"/>
+          <a:ext cx="0" cy="0"/>
+          <a:chOff x="0" y="0"/>
+          <a:chExt cx="0" cy="0"/>
+        </a:xfrm>
+      </p:grpSpPr>
+      <p:sp>
+        <p:nvSpPr>
+          <p:cNvPr id="2" name="Title 1">
+            <a:extLst>
+              <a:ext uri="{FF2B5EF4-FFF2-40B4-BE49-F238E27FC236}">
+                <a16:creationId xmlns="" xmlns:a16="http://schemas.microsoft.com/office/drawing/2014/main" id="{4CA99A5D-DD39-1919-FD58-65B06FAFDE0F}"/>
+              </a:ext>
+            </a:extLst>
+          </p:cNvPr>
+          <p:cNvSpPr>
+            <a:spLocks noGrp="1"/>
+          </p:cNvSpPr>
+          <p:nvPr>
+            <p:ph type="title"/>
+          </p:nvPr>
+        </p:nvSpPr>
+        <p:spPr/>
+        <p:txBody>
+          <a:bodyPr/>
+          <a:lstStyle/>
+          <a:p>
+            <a:r>
+              <a:rPr lang="en-US" smtClean="0"/>
+              <a:t>Detail design: Forward </a:t>
+            </a:r>
+            <a:r>
+              <a:rPr lang="en-US" dirty="0"/>
+              <a:t>API call from proxy to </a:t>
+            </a:r>
+            <a:r>
+              <a:rPr lang="en-US" dirty="0" err="1"/>
+              <a:t>remotediag</a:t>
+            </a:r>
+            <a:r>
+              <a:rPr lang="en-US" dirty="0"/>
+              <a:t> </a:t>
+            </a:r>
+          </a:p>
+        </p:txBody>
+      </p:sp>
+      <p:pic>
+        <p:nvPicPr>
+          <p:cNvPr id="5" name="Content Placeholder 4">
+            <a:extLst>
+              <a:ext uri="{FF2B5EF4-FFF2-40B4-BE49-F238E27FC236}">
+                <a16:creationId xmlns="" xmlns:a16="http://schemas.microsoft.com/office/drawing/2014/main" id="{20EC3E71-48BE-FEC7-88E8-47DB96F90E14}"/>
+              </a:ext>
+            </a:extLst>
+          </p:cNvPr>
+          <p:cNvPicPr>
+            <a:picLocks noGrp="1" noChangeAspect="1"/>
+          </p:cNvPicPr>
+          <p:nvPr>
+            <p:ph idx="1"/>
+          </p:nvPr>
+        </p:nvPicPr>
+        <p:blipFill>
+          <a:blip r:embed="rId2">
+            <a:extLst>
+              <a:ext uri="{28A0092B-C50C-407E-A947-70E740481C1C}">
+                <a14:useLocalDpi xmlns:a14="http://schemas.microsoft.com/office/drawing/2010/main" val="0"/>
+              </a:ext>
+            </a:extLst>
+          </a:blip>
+          <a:stretch>
+            <a:fillRect/>
+          </a:stretch>
+        </p:blipFill>
+        <p:spPr>
+          <a:xfrm>
+            <a:off x="20172" y="1043549"/>
+            <a:ext cx="12163910" cy="5360052"/>
+          </a:xfrm>
+          <a:prstGeom prst="rect">
+            <a:avLst/>
+          </a:prstGeom>
+        </p:spPr>
+      </p:pic>
+    </p:spTree>
+    <p:extLst>
+      <p:ext uri="{BB962C8B-B14F-4D97-AF65-F5344CB8AC3E}">
+        <p14:creationId xmlns:p14="http://schemas.microsoft.com/office/powerpoint/2010/main" val="1015164566"/>
+      </p:ext>
+    </p:extLst>
+  </p:cSld>
+  <p:clrMapOvr>
+    <a:masterClrMapping/>
+  </p:clrMapOvr>
+  <p:timing>
+    <p:tnLst>
+      <p:par>
+        <p:cTn id="1" dur="indefinite" restart="never" nodeType="tmRoot"/>
+      </p:par>
+    </p:tnLst>
+  </p:timing>
+</p:sld>
+</file>
+
+<file path=ppt/slides/slide13.xml><?xml version="1.0" encoding="utf-8"?>
+<p:sld xmlns:a="http://schemas.openxmlformats.org/drawingml/2006/main" xmlns:r="http://schemas.openxmlformats.org/officeDocument/2006/relationships" xmlns:p="http://schemas.openxmlformats.org/presentationml/2006/main">
+  <p:cSld>
+    <p:spTree>
+      <p:nvGrpSpPr>
+        <p:cNvPr id="1" name=""/>
+        <p:cNvGrpSpPr/>
+        <p:nvPr/>
+      </p:nvGrpSpPr>
+      <p:grpSpPr>
+        <a:xfrm>
+          <a:off x="0" y="0"/>
+          <a:ext cx="0" cy="0"/>
+          <a:chOff x="0" y="0"/>
+          <a:chExt cx="0" cy="0"/>
+        </a:xfrm>
+      </p:grpSpPr>
+      <p:sp>
+        <p:nvSpPr>
+          <p:cNvPr id="2" name="Title 1">
+            <a:extLst>
+              <a:ext uri="{FF2B5EF4-FFF2-40B4-BE49-F238E27FC236}">
+                <a16:creationId xmlns="" xmlns:a16="http://schemas.microsoft.com/office/drawing/2014/main" id="{B643E24B-1160-F6BA-5A0C-DB3B3DD9CD8A}"/>
+              </a:ext>
+            </a:extLst>
+          </p:cNvPr>
+          <p:cNvSpPr>
+            <a:spLocks noGrp="1"/>
+          </p:cNvSpPr>
+          <p:nvPr>
+            <p:ph type="title"/>
+          </p:nvPr>
+        </p:nvSpPr>
+        <p:spPr/>
+        <p:txBody>
+          <a:bodyPr/>
+          <a:lstStyle/>
+          <a:p>
+            <a:r>
+              <a:rPr lang="en-US" smtClean="0"/>
+              <a:t>Detail design: Filter </a:t>
+            </a:r>
+            <a:r>
+              <a:rPr lang="en-US" dirty="0"/>
+              <a:t>scenario</a:t>
+            </a:r>
+          </a:p>
+        </p:txBody>
+      </p:sp>
+      <p:pic>
+        <p:nvPicPr>
+          <p:cNvPr id="5" name="Content Placeholder 4">
+            <a:extLst>
+              <a:ext uri="{FF2B5EF4-FFF2-40B4-BE49-F238E27FC236}">
+                <a16:creationId xmlns="" xmlns:a16="http://schemas.microsoft.com/office/drawing/2014/main" id="{3D875D97-63D9-E3DF-760D-4A57DB7A20FB}"/>
+              </a:ext>
+            </a:extLst>
+          </p:cNvPr>
+          <p:cNvPicPr>
+            <a:picLocks noGrp="1" noChangeAspect="1"/>
+          </p:cNvPicPr>
+          <p:nvPr>
+            <p:ph idx="1"/>
+          </p:nvPr>
+        </p:nvPicPr>
+        <p:blipFill>
+          <a:blip r:embed="rId2">
+            <a:extLst>
+              <a:ext uri="{28A0092B-C50C-407E-A947-70E740481C1C}">
+                <a14:useLocalDpi xmlns:a14="http://schemas.microsoft.com/office/drawing/2010/main" val="0"/>
+              </a:ext>
+            </a:extLst>
+          </a:blip>
+          <a:stretch>
+            <a:fillRect/>
+          </a:stretch>
+        </p:blipFill>
+        <p:spPr>
+          <a:xfrm>
+            <a:off x="627596" y="862011"/>
+            <a:ext cx="10936808" cy="5613841"/>
+          </a:xfrm>
+          <a:prstGeom prst="rect">
+            <a:avLst/>
+          </a:prstGeom>
+        </p:spPr>
+      </p:pic>
+    </p:spTree>
+    <p:extLst>
+      <p:ext uri="{BB962C8B-B14F-4D97-AF65-F5344CB8AC3E}">
+        <p14:creationId xmlns:p14="http://schemas.microsoft.com/office/powerpoint/2010/main" val="807167957"/>
+      </p:ext>
+    </p:extLst>
+  </p:cSld>
+  <p:clrMapOvr>
+    <a:masterClrMapping/>
+  </p:clrMapOvr>
+  <p:timing>
+    <p:tnLst>
+      <p:par>
+        <p:cTn id="1" dur="indefinite" restart="never" nodeType="tmRoot"/>
+      </p:par>
+    </p:tnLst>
+  </p:timing>
+</p:sld>
+</file>
+
+<file path=ppt/slides/slide14.xml><?xml version="1.0" encoding="utf-8"?>
 <p:sld xmlns:a="http://schemas.openxmlformats.org/drawingml/2006/main" xmlns:r="http://schemas.openxmlformats.org/officeDocument/2006/relationships" xmlns:p="http://schemas.openxmlformats.org/presentationml/2006/main">
   <p:cSld>
     <p:spTree>
@@ -7556,7 +7844,7 @@
       </p:sp>
       <p:pic>
         <p:nvPicPr>
-          <p:cNvPr id="11" name="Picture 10"/>
+          <p:cNvPr id="15" name="Picture 14"/>
           <p:cNvPicPr>
             <a:picLocks noChangeAspect="1"/>
           </p:cNvPicPr>
@@ -7564,69 +7852,6 @@
         </p:nvPicPr>
         <p:blipFill>
           <a:blip r:embed="rId2">
-            <a:extLst>
-              <a:ext uri="{28A0092B-C50C-407E-A947-70E740481C1C}">
-                <a14:useLocalDpi xmlns:a14="http://schemas.microsoft.com/office/drawing/2010/main" val="0"/>
-              </a:ext>
-            </a:extLst>
-          </a:blip>
-          <a:stretch>
-            <a:fillRect/>
-          </a:stretch>
-        </p:blipFill>
-        <p:spPr>
-          <a:xfrm>
-            <a:off x="646641" y="1693307"/>
-            <a:ext cx="10269609" cy="2392918"/>
-          </a:xfrm>
-          <a:prstGeom prst="rect">
-            <a:avLst/>
-          </a:prstGeom>
-        </p:spPr>
-      </p:pic>
-      <p:sp>
-        <p:nvSpPr>
-          <p:cNvPr id="12" name="TextBox 11"/>
-          <p:cNvSpPr txBox="1"/>
-          <p:nvPr/>
-        </p:nvSpPr>
-        <p:spPr>
-          <a:xfrm>
-            <a:off x="160866" y="1190625"/>
-            <a:ext cx="8010142" cy="369332"/>
-          </a:xfrm>
-          <a:prstGeom prst="rect">
-            <a:avLst/>
-          </a:prstGeom>
-          <a:noFill/>
-        </p:spPr>
-        <p:txBody>
-          <a:bodyPr wrap="none" rtlCol="0">
-            <a:spAutoFit/>
-          </a:bodyPr>
-          <a:lstStyle/>
-          <a:p>
-            <a:pPr marL="285750" indent="-285750">
-              <a:buFont typeface="Arial" panose="020B0604020202020204" pitchFamily="34" charset="0"/>
-              <a:buChar char="•"/>
-            </a:pPr>
-            <a:r>
-              <a:rPr lang="en-US"/>
-              <a:t>RemoteDiagProxy communication with EP-side components (Telephony, Mqtt, …)</a:t>
-            </a:r>
-          </a:p>
-        </p:txBody>
-      </p:sp>
-      <p:pic>
-        <p:nvPicPr>
-          <p:cNvPr id="15" name="Picture 14"/>
-          <p:cNvPicPr>
-            <a:picLocks noChangeAspect="1"/>
-          </p:cNvPicPr>
-          <p:nvPr/>
-        </p:nvPicPr>
-        <p:blipFill>
-          <a:blip r:embed="rId3">
             <a:extLst>
               <a:ext uri="{28A0092B-C50C-407E-A947-70E740481C1C}">
                 <a14:useLocalDpi xmlns:a14="http://schemas.microsoft.com/office/drawing/2010/main" val="0"/>
@@ -7647,6 +7872,64 @@
           </a:prstGeom>
         </p:spPr>
       </p:pic>
+      <p:pic>
+        <p:nvPicPr>
+          <p:cNvPr id="3" name="Picture 2"/>
+          <p:cNvPicPr>
+            <a:picLocks noChangeAspect="1"/>
+          </p:cNvPicPr>
+          <p:nvPr/>
+        </p:nvPicPr>
+        <p:blipFill>
+          <a:blip r:embed="rId3"/>
+          <a:stretch>
+            <a:fillRect/>
+          </a:stretch>
+        </p:blipFill>
+        <p:spPr>
+          <a:xfrm>
+            <a:off x="487985" y="1399738"/>
+            <a:ext cx="10544082" cy="2338915"/>
+          </a:xfrm>
+          <a:prstGeom prst="rect">
+            <a:avLst/>
+          </a:prstGeom>
+        </p:spPr>
+      </p:pic>
+      <p:sp>
+        <p:nvSpPr>
+          <p:cNvPr id="4" name="TextBox 3"/>
+          <p:cNvSpPr txBox="1"/>
+          <p:nvPr/>
+        </p:nvSpPr>
+        <p:spPr>
+          <a:xfrm>
+            <a:off x="344900" y="1030406"/>
+            <a:ext cx="5251566" cy="369332"/>
+          </a:xfrm>
+          <a:prstGeom prst="rect">
+            <a:avLst/>
+          </a:prstGeom>
+          <a:noFill/>
+        </p:spPr>
+        <p:txBody>
+          <a:bodyPr wrap="none" rtlCol="0">
+            <a:spAutoFit/>
+          </a:bodyPr>
+          <a:lstStyle/>
+          <a:p>
+            <a:pPr marL="285750" indent="-285750">
+              <a:buFont typeface="Arial" panose="020B0604020202020204" pitchFamily="34" charset="0"/>
+              <a:buChar char="•"/>
+            </a:pPr>
+            <a:r>
+              <a:rPr lang="en-US" smtClean="0"/>
+              <a:t>SidFilter blocks reprogramming diagnostic requests</a:t>
+            </a:r>
+            <a:endParaRPr lang="en-US"/>
+          </a:p>
+        </p:txBody>
+      </p:sp>
     </p:spTree>
     <p:extLst>
       <p:ext uri="{BB962C8B-B14F-4D97-AF65-F5344CB8AC3E}">
@@ -7657,10 +7940,17 @@
   <p:clrMapOvr>
     <a:masterClrMapping/>
   </p:clrMapOvr>
+  <p:timing>
+    <p:tnLst>
+      <p:par>
+        <p:cTn id="1" dur="indefinite" restart="never" nodeType="tmRoot"/>
+      </p:par>
+    </p:tnLst>
+  </p:timing>
 </p:sld>
 </file>
 
-<file path=ppt/slides/slide12.xml><?xml version="1.0" encoding="utf-8"?>
+<file path=ppt/slides/slide15.xml><?xml version="1.0" encoding="utf-8"?>
 <p:sld xmlns:a="http://schemas.openxmlformats.org/drawingml/2006/main" xmlns:r="http://schemas.openxmlformats.org/officeDocument/2006/relationships" xmlns:p="http://schemas.openxmlformats.org/presentationml/2006/main">
   <p:cSld>
     <p:spTree>
@@ -7772,10 +8062,17 @@
   <p:clrMapOvr>
     <a:masterClrMapping/>
   </p:clrMapOvr>
+  <p:timing>
+    <p:tnLst>
+      <p:par>
+        <p:cTn id="1" dur="indefinite" restart="never" nodeType="tmRoot"/>
+      </p:par>
+    </p:tnLst>
+  </p:timing>
 </p:sld>
 </file>
 
-<file path=ppt/slides/slide13.xml><?xml version="1.0" encoding="utf-8"?>
+<file path=ppt/slides/slide16.xml><?xml version="1.0" encoding="utf-8"?>
 <p:sld xmlns:a="http://schemas.openxmlformats.org/drawingml/2006/main" xmlns:r="http://schemas.openxmlformats.org/officeDocument/2006/relationships" xmlns:p="http://schemas.openxmlformats.org/presentationml/2006/main">
   <p:cSld>
     <p:spTree>
@@ -7862,10 +8159,17 @@
   <p:clrMapOvr>
     <a:masterClrMapping/>
   </p:clrMapOvr>
+  <p:timing>
+    <p:tnLst>
+      <p:par>
+        <p:cTn id="1" dur="indefinite" restart="never" nodeType="tmRoot"/>
+      </p:par>
+    </p:tnLst>
+  </p:timing>
 </p:sld>
 </file>
 
-<file path=ppt/slides/slide14.xml><?xml version="1.0" encoding="utf-8"?>
+<file path=ppt/slides/slide17.xml><?xml version="1.0" encoding="utf-8"?>
 <p:sld xmlns:a="http://schemas.openxmlformats.org/drawingml/2006/main" xmlns:r="http://schemas.openxmlformats.org/officeDocument/2006/relationships" xmlns:p="http://schemas.openxmlformats.org/presentationml/2006/main">
   <p:cSld>
     <p:spTree>
@@ -7943,10 +8247,17 @@
   <p:clrMapOvr>
     <a:masterClrMapping/>
   </p:clrMapOvr>
+  <p:timing>
+    <p:tnLst>
+      <p:par>
+        <p:cTn id="1" dur="indefinite" restart="never" nodeType="tmRoot"/>
+      </p:par>
+    </p:tnLst>
+  </p:timing>
 </p:sld>
 </file>
 
-<file path=ppt/slides/slide15.xml><?xml version="1.0" encoding="utf-8"?>
+<file path=ppt/slides/slide18.xml><?xml version="1.0" encoding="utf-8"?>
 <p:sld xmlns:a="http://schemas.openxmlformats.org/drawingml/2006/main" xmlns:r="http://schemas.openxmlformats.org/officeDocument/2006/relationships" xmlns:p="http://schemas.openxmlformats.org/presentationml/2006/main">
   <p:cSld>
     <p:spTree>
@@ -7968,7 +8279,7 @@
           <p:cNvPr id="2" name="Title 1">
             <a:extLst>
               <a:ext uri="{FF2B5EF4-FFF2-40B4-BE49-F238E27FC236}">
-                <a16:creationId xmlns:a16="http://schemas.microsoft.com/office/drawing/2014/main" id="{65C86E6E-BE59-7A7B-6BE9-16A0A094C3D6}"/>
+                <a16:creationId xmlns="" xmlns:a16="http://schemas.microsoft.com/office/drawing/2014/main" id="{65C86E6E-BE59-7A7B-6BE9-16A0A094C3D6}"/>
               </a:ext>
             </a:extLst>
           </p:cNvPr>
@@ -7996,7 +8307,7 @@
           <p:cNvPr id="7" name="Content Placeholder 6">
             <a:extLst>
               <a:ext uri="{FF2B5EF4-FFF2-40B4-BE49-F238E27FC236}">
-                <a16:creationId xmlns:a16="http://schemas.microsoft.com/office/drawing/2014/main" id="{AD4A4EC6-9BB8-2849-8D75-05C44DE9A384}"/>
+                <a16:creationId xmlns="" xmlns:a16="http://schemas.microsoft.com/office/drawing/2014/main" id="{AD4A4EC6-9BB8-2849-8D75-05C44DE9A384}"/>
               </a:ext>
             </a:extLst>
           </p:cNvPr>
@@ -8028,7 +8339,7 @@
           <p:cNvPr id="9" name="Picture 8">
             <a:extLst>
               <a:ext uri="{FF2B5EF4-FFF2-40B4-BE49-F238E27FC236}">
-                <a16:creationId xmlns:a16="http://schemas.microsoft.com/office/drawing/2014/main" id="{C985C62C-76E5-84A1-DEF1-FC486F2BF179}"/>
+                <a16:creationId xmlns="" xmlns:a16="http://schemas.microsoft.com/office/drawing/2014/main" id="{C985C62C-76E5-84A1-DEF1-FC486F2BF179}"/>
               </a:ext>
             </a:extLst>
           </p:cNvPr>
@@ -8063,206 +8374,13 @@
   <p:clrMapOvr>
     <a:masterClrMapping/>
   </p:clrMapOvr>
-</p:sld>
-</file>
-
-<file path=ppt/slides/slide16.xml><?xml version="1.0" encoding="utf-8"?>
-<p:sld xmlns:a="http://schemas.openxmlformats.org/drawingml/2006/main" xmlns:r="http://schemas.openxmlformats.org/officeDocument/2006/relationships" xmlns:p="http://schemas.openxmlformats.org/presentationml/2006/main">
-  <p:cSld>
-    <p:spTree>
-      <p:nvGrpSpPr>
-        <p:cNvPr id="1" name=""/>
-        <p:cNvGrpSpPr/>
-        <p:nvPr/>
-      </p:nvGrpSpPr>
-      <p:grpSpPr>
-        <a:xfrm>
-          <a:off x="0" y="0"/>
-          <a:ext cx="0" cy="0"/>
-          <a:chOff x="0" y="0"/>
-          <a:chExt cx="0" cy="0"/>
-        </a:xfrm>
-      </p:grpSpPr>
-      <p:sp>
-        <p:nvSpPr>
-          <p:cNvPr id="2" name="Title 1">
-            <a:extLst>
-              <a:ext uri="{FF2B5EF4-FFF2-40B4-BE49-F238E27FC236}">
-                <a16:creationId xmlns:a16="http://schemas.microsoft.com/office/drawing/2014/main" id="{B643E24B-1160-F6BA-5A0C-DB3B3DD9CD8A}"/>
-              </a:ext>
-            </a:extLst>
-          </p:cNvPr>
-          <p:cNvSpPr>
-            <a:spLocks noGrp="1"/>
-          </p:cNvSpPr>
-          <p:nvPr>
-            <p:ph type="title"/>
-          </p:nvPr>
-        </p:nvSpPr>
-        <p:spPr/>
-        <p:txBody>
-          <a:bodyPr/>
-          <a:lstStyle/>
-          <a:p>
-            <a:r>
-              <a:rPr lang="en-US" dirty="0"/>
-              <a:t>Filter scenario</a:t>
-            </a:r>
-          </a:p>
-        </p:txBody>
-      </p:sp>
-      <p:pic>
-        <p:nvPicPr>
-          <p:cNvPr id="5" name="Content Placeholder 4">
-            <a:extLst>
-              <a:ext uri="{FF2B5EF4-FFF2-40B4-BE49-F238E27FC236}">
-                <a16:creationId xmlns:a16="http://schemas.microsoft.com/office/drawing/2014/main" id="{3D875D97-63D9-E3DF-760D-4A57DB7A20FB}"/>
-              </a:ext>
-            </a:extLst>
-          </p:cNvPr>
-          <p:cNvPicPr>
-            <a:picLocks noGrp="1" noChangeAspect="1"/>
-          </p:cNvPicPr>
-          <p:nvPr>
-            <p:ph idx="1"/>
-          </p:nvPr>
-        </p:nvPicPr>
-        <p:blipFill>
-          <a:blip r:embed="rId2">
-            <a:extLst>
-              <a:ext uri="{28A0092B-C50C-407E-A947-70E740481C1C}">
-                <a14:useLocalDpi xmlns:a14="http://schemas.microsoft.com/office/drawing/2010/main" val="0"/>
-              </a:ext>
-            </a:extLst>
-          </a:blip>
-          <a:stretch>
-            <a:fillRect/>
-          </a:stretch>
-        </p:blipFill>
-        <p:spPr>
-          <a:xfrm>
-            <a:off x="627596" y="930861"/>
-            <a:ext cx="10936808" cy="5613841"/>
-          </a:xfrm>
-          <a:prstGeom prst="rect">
-            <a:avLst/>
-          </a:prstGeom>
-        </p:spPr>
-      </p:pic>
-    </p:spTree>
-    <p:extLst>
-      <p:ext uri="{BB962C8B-B14F-4D97-AF65-F5344CB8AC3E}">
-        <p14:creationId xmlns:p14="http://schemas.microsoft.com/office/powerpoint/2010/main" val="807167957"/>
-      </p:ext>
-    </p:extLst>
-  </p:cSld>
-  <p:clrMapOvr>
-    <a:masterClrMapping/>
-  </p:clrMapOvr>
-</p:sld>
-</file>
-
-<file path=ppt/slides/slide17.xml><?xml version="1.0" encoding="utf-8"?>
-<p:sld xmlns:a="http://schemas.openxmlformats.org/drawingml/2006/main" xmlns:r="http://schemas.openxmlformats.org/officeDocument/2006/relationships" xmlns:p="http://schemas.openxmlformats.org/presentationml/2006/main">
-  <p:cSld>
-    <p:spTree>
-      <p:nvGrpSpPr>
-        <p:cNvPr id="1" name=""/>
-        <p:cNvGrpSpPr/>
-        <p:nvPr/>
-      </p:nvGrpSpPr>
-      <p:grpSpPr>
-        <a:xfrm>
-          <a:off x="0" y="0"/>
-          <a:ext cx="0" cy="0"/>
-          <a:chOff x="0" y="0"/>
-          <a:chExt cx="0" cy="0"/>
-        </a:xfrm>
-      </p:grpSpPr>
-      <p:sp>
-        <p:nvSpPr>
-          <p:cNvPr id="2" name="Title 1">
-            <a:extLst>
-              <a:ext uri="{FF2B5EF4-FFF2-40B4-BE49-F238E27FC236}">
-                <a16:creationId xmlns:a16="http://schemas.microsoft.com/office/drawing/2014/main" id="{4CA99A5D-DD39-1919-FD58-65B06FAFDE0F}"/>
-              </a:ext>
-            </a:extLst>
-          </p:cNvPr>
-          <p:cNvSpPr>
-            <a:spLocks noGrp="1"/>
-          </p:cNvSpPr>
-          <p:nvPr>
-            <p:ph type="title"/>
-          </p:nvPr>
-        </p:nvSpPr>
-        <p:spPr/>
-        <p:txBody>
-          <a:bodyPr/>
-          <a:lstStyle/>
-          <a:p>
-            <a:r>
-              <a:rPr lang="en-US" dirty="0"/>
-              <a:t>Forward API call from proxy to </a:t>
-            </a:r>
-            <a:r>
-              <a:rPr lang="en-US" dirty="0" err="1"/>
-              <a:t>remotediag</a:t>
-            </a:r>
-            <a:r>
-              <a:rPr lang="en-US" dirty="0"/>
-              <a:t> </a:t>
-            </a:r>
-          </a:p>
-        </p:txBody>
-      </p:sp>
-      <p:pic>
-        <p:nvPicPr>
-          <p:cNvPr id="5" name="Content Placeholder 4">
-            <a:extLst>
-              <a:ext uri="{FF2B5EF4-FFF2-40B4-BE49-F238E27FC236}">
-                <a16:creationId xmlns:a16="http://schemas.microsoft.com/office/drawing/2014/main" id="{20EC3E71-48BE-FEC7-88E8-47DB96F90E14}"/>
-              </a:ext>
-            </a:extLst>
-          </p:cNvPr>
-          <p:cNvPicPr>
-            <a:picLocks noGrp="1" noChangeAspect="1"/>
-          </p:cNvPicPr>
-          <p:nvPr>
-            <p:ph idx="1"/>
-          </p:nvPr>
-        </p:nvPicPr>
-        <p:blipFill>
-          <a:blip r:embed="rId2">
-            <a:extLst>
-              <a:ext uri="{28A0092B-C50C-407E-A947-70E740481C1C}">
-                <a14:useLocalDpi xmlns:a14="http://schemas.microsoft.com/office/drawing/2010/main" val="0"/>
-              </a:ext>
-            </a:extLst>
-          </a:blip>
-          <a:stretch>
-            <a:fillRect/>
-          </a:stretch>
-        </p:blipFill>
-        <p:spPr>
-          <a:xfrm>
-            <a:off x="20172" y="1043549"/>
-            <a:ext cx="12163910" cy="5360052"/>
-          </a:xfrm>
-          <a:prstGeom prst="rect">
-            <a:avLst/>
-          </a:prstGeom>
-        </p:spPr>
-      </p:pic>
-    </p:spTree>
-    <p:extLst>
-      <p:ext uri="{BB962C8B-B14F-4D97-AF65-F5344CB8AC3E}">
-        <p14:creationId xmlns:p14="http://schemas.microsoft.com/office/powerpoint/2010/main" val="1015164566"/>
-      </p:ext>
-    </p:extLst>
-  </p:cSld>
-  <p:clrMapOvr>
-    <a:masterClrMapping/>
-  </p:clrMapOvr>
+  <p:timing>
+    <p:tnLst>
+      <p:par>
+        <p:cTn id="1" dur="indefinite" restart="never" nodeType="tmRoot"/>
+      </p:par>
+    </p:tnLst>
+  </p:timing>
 </p:sld>
 </file>
 
@@ -13619,6 +13737,13 @@
   <p:clrMapOvr>
     <a:masterClrMapping/>
   </p:clrMapOvr>
+  <p:timing>
+    <p:tnLst>
+      <p:par>
+        <p:cTn id="1" dur="indefinite" restart="never" nodeType="tmRoot"/>
+      </p:par>
+    </p:tnLst>
+  </p:timing>
 </p:sld>
 </file>
 
@@ -13647,8 +13772,8 @@
         </p:nvCxnSpPr>
         <p:spPr>
           <a:xfrm>
-            <a:off x="5635782" y="2872148"/>
-            <a:ext cx="0" cy="3985852"/>
+            <a:off x="5635782" y="3384550"/>
+            <a:ext cx="0" cy="3473450"/>
           </a:xfrm>
           <a:prstGeom prst="line">
             <a:avLst/>
@@ -13674,7 +13799,7 @@
           <p:cNvPr id="2" name="Title 1">
             <a:extLst>
               <a:ext uri="{FF2B5EF4-FFF2-40B4-BE49-F238E27FC236}">
-                <a16:creationId xmlns:a16="http://schemas.microsoft.com/office/drawing/2014/main" id="{F11C1235-51B4-A8A0-3A61-9C767F437001}"/>
+                <a16:creationId xmlns="" xmlns:a16="http://schemas.microsoft.com/office/drawing/2014/main" id="{F11C1235-51B4-A8A0-3A61-9C767F437001}"/>
               </a:ext>
             </a:extLst>
           </p:cNvPr>
@@ -13699,8 +13824,13 @@
           <a:p>
             <a:r>
               <a:rPr lang="en-US"/>
-              <a:t>Context &amp; Motivation</a:t>
-            </a:r>
+              <a:t>Context &amp; </a:t>
+            </a:r>
+            <a:r>
+              <a:rPr lang="en-US" smtClean="0"/>
+              <a:t>Motivation – Toyota 24DCM project</a:t>
+            </a:r>
+            <a:endParaRPr lang="en-US"/>
           </a:p>
         </p:txBody>
       </p:sp>
@@ -13709,7 +13839,7 @@
           <p:cNvPr id="7" name="Content Placeholder 6">
             <a:extLst>
               <a:ext uri="{FF2B5EF4-FFF2-40B4-BE49-F238E27FC236}">
-                <a16:creationId xmlns:a16="http://schemas.microsoft.com/office/drawing/2014/main" id="{4A0E7BDD-2CF4-321B-0637-D9AF63CAB0BF}"/>
+                <a16:creationId xmlns="" xmlns:a16="http://schemas.microsoft.com/office/drawing/2014/main" id="{4A0E7BDD-2CF4-321B-0637-D9AF63CAB0BF}"/>
               </a:ext>
             </a:extLst>
           </p:cNvPr>
@@ -13722,7 +13852,7 @@
         </p:nvSpPr>
         <p:spPr>
           <a:xfrm>
-            <a:off x="160866" y="896130"/>
+            <a:off x="160866" y="878996"/>
             <a:ext cx="11916834" cy="1756536"/>
           </a:xfrm>
         </p:spPr>
@@ -13733,47 +13863,157 @@
           <a:lstStyle/>
           <a:p>
             <a:r>
+              <a:rPr lang="en-US" sz="1800" smtClean="0"/>
+              <a:t>Toyota </a:t>
+            </a:r>
+            <a:r>
+              <a:rPr lang="en-US" sz="1800" b="1" smtClean="0"/>
+              <a:t>DCM</a:t>
+            </a:r>
+            <a:r>
+              <a:rPr lang="en-US" sz="1800" smtClean="0"/>
+              <a:t>: </a:t>
+            </a:r>
+            <a:r>
+              <a:rPr lang="en-US" sz="1800" smtClean="0"/>
+              <a:t>a telematics platform providing connected vehicle services, including </a:t>
+            </a:r>
+            <a:r>
+              <a:rPr lang="en-US" sz="1800" b="1" smtClean="0"/>
+              <a:t>remote diagnostics</a:t>
+            </a:r>
+            <a:r>
+              <a:rPr lang="en-US" sz="1800" b="1"/>
+              <a:t> </a:t>
+            </a:r>
+            <a:r>
+              <a:rPr lang="en-US" sz="1800" smtClean="0"/>
+              <a:t>from OEM server.</a:t>
+            </a:r>
+            <a:endParaRPr lang="en-US" sz="1800" smtClean="0"/>
+          </a:p>
+          <a:p>
+            <a:r>
+              <a:rPr lang="en-US" sz="1800" smtClean="0"/>
+              <a:t>Supports diagnostic </a:t>
+            </a:r>
+            <a:r>
               <a:rPr lang="en-US" sz="1800"/>
-              <a:t>Currently, Toyota telematics stack (DCM) runs in a single partition</a:t>
-            </a:r>
-          </a:p>
-          <a:p>
+              <a:t>communication and OTA updates through the Internal CAN </a:t>
+            </a:r>
+            <a:r>
+              <a:rPr lang="en-US" sz="1800"/>
+              <a:t>bus</a:t>
+            </a:r>
+            <a:r>
+              <a:rPr lang="en-US" sz="1800" smtClean="0"/>
+              <a:t>.</a:t>
+            </a:r>
+          </a:p>
+          <a:p>
+            <a:r>
+              <a:rPr lang="en-US" sz="1800" b="1" smtClean="0"/>
+              <a:t>Current architecture</a:t>
+            </a:r>
+            <a:r>
+              <a:rPr lang="en-US" sz="1800" smtClean="0"/>
+              <a:t>: monolithic </a:t>
+            </a:r>
+            <a:r>
+              <a:rPr lang="en-US" sz="1800"/>
+              <a:t>deployment model</a:t>
+            </a:r>
+            <a:r>
+              <a:rPr lang="en-US" sz="1800"/>
+              <a:t>, </a:t>
+            </a:r>
+            <a:r>
+              <a:rPr lang="en-US" sz="1800" smtClean="0"/>
+              <a:t>with all </a:t>
+            </a:r>
+            <a:r>
+              <a:rPr lang="en-US" sz="1800"/>
+              <a:t>components running in </a:t>
+            </a:r>
+            <a:r>
+              <a:rPr lang="en-US" sz="1800"/>
+              <a:t>a </a:t>
+            </a:r>
+            <a:r>
+              <a:rPr lang="en-US" sz="1800" smtClean="0"/>
+              <a:t>single </a:t>
+            </a:r>
+            <a:r>
+              <a:rPr lang="en-US" sz="1800"/>
+              <a:t>partition</a:t>
+            </a:r>
+            <a:r>
+              <a:rPr lang="en-US" sz="1800" smtClean="0"/>
+              <a:t>.</a:t>
+            </a:r>
+          </a:p>
+          <a:p>
+            <a:r>
+              <a:rPr lang="en-US" sz="1800" b="1" smtClean="0"/>
+              <a:t>System </a:t>
+            </a:r>
             <a:r>
               <a:rPr lang="en-US" sz="1800" b="1"/>
-              <a:t>System architecture change</a:t>
+              <a:t>architecture </a:t>
+            </a:r>
+            <a:r>
+              <a:rPr lang="en-US" sz="1800" b="1" smtClean="0"/>
+              <a:t>migration</a:t>
+            </a:r>
+            <a:r>
+              <a:rPr lang="en-US" sz="1800" smtClean="0"/>
+              <a:t>: </a:t>
+            </a:r>
+            <a:endParaRPr lang="en-US" sz="1800"/>
+          </a:p>
+          <a:p>
+            <a:pPr lvl="1"/>
+            <a:r>
+              <a:rPr lang="en-US" sz="1800" smtClean="0"/>
+              <a:t>Due to security, OEM wants to separate DCM into 2 partition using LXC </a:t>
             </a:r>
             <a:r>
               <a:rPr lang="en-US" sz="1800"/>
+              <a:t>containers: </a:t>
+            </a:r>
+          </a:p>
+          <a:p>
+            <a:pPr lvl="2"/>
+            <a:r>
+              <a:rPr lang="en-US" sz="1800" b="1"/>
+              <a:t>EP </a:t>
+            </a:r>
+            <a:r>
+              <a:rPr lang="en-US" sz="1800" b="1" smtClean="0"/>
+              <a:t>container (Entry Point)</a:t>
+            </a:r>
+            <a:r>
+              <a:rPr lang="en-US" sz="1800" smtClean="0"/>
               <a:t>: </a:t>
             </a:r>
-          </a:p>
-          <a:p>
-            <a:pPr lvl="1"/>
             <a:r>
               <a:rPr lang="en-US" sz="1800"/>
-              <a:t>DCM is separated into 2 containers: </a:t>
+              <a:t>externally exposed network components</a:t>
             </a:r>
           </a:p>
           <a:p>
             <a:pPr lvl="2"/>
             <a:r>
-              <a:rPr lang="en-US" sz="1800" b="1"/>
-              <a:t>EP container</a:t>
+              <a:rPr lang="en-US" sz="1800" b="1" smtClean="0"/>
+              <a:t>Internal container: </a:t>
+            </a:r>
+            <a:r>
+              <a:rPr lang="en-US" sz="1800" smtClean="0"/>
+              <a:t>components </a:t>
             </a:r>
             <a:r>
               <a:rPr lang="en-US" sz="1800"/>
-              <a:t>: externally exposed network components</a:t>
-            </a:r>
-          </a:p>
-          <a:p>
-            <a:pPr lvl="2"/>
-            <a:r>
-              <a:rPr lang="en-US" sz="1800" b="1"/>
-              <a:t>IP container</a:t>
-            </a:r>
-            <a:r>
-              <a:rPr lang="en-US" sz="1800"/>
-              <a:t>: components which have access to CAN bus.</a:t>
+              <a:t>which have access to CAN bus.</a:t>
             </a:r>
           </a:p>
         </p:txBody>
@@ -13787,15 +14027,15 @@
           <p:nvPr/>
         </p:nvPicPr>
         <p:blipFill>
-          <a:blip r:embed="rId2"/>
+          <a:blip r:embed="rId3"/>
           <a:stretch>
             <a:fillRect/>
           </a:stretch>
         </p:blipFill>
         <p:spPr>
           <a:xfrm>
-            <a:off x="0" y="2872955"/>
-            <a:ext cx="5359652" cy="3423267"/>
+            <a:off x="0" y="3357951"/>
+            <a:ext cx="5359652" cy="3083122"/>
           </a:xfrm>
           <a:prstGeom prst="rect">
             <a:avLst/>
@@ -13811,15 +14051,15 @@
           <p:nvPr/>
         </p:nvPicPr>
         <p:blipFill>
-          <a:blip r:embed="rId3"/>
+          <a:blip r:embed="rId4"/>
           <a:stretch>
             <a:fillRect/>
           </a:stretch>
         </p:blipFill>
         <p:spPr>
           <a:xfrm>
-            <a:off x="5911913" y="2872148"/>
-            <a:ext cx="6165787" cy="3502033"/>
+            <a:off x="5911913" y="3357951"/>
+            <a:ext cx="6165787" cy="3161081"/>
           </a:xfrm>
           <a:prstGeom prst="rect">
             <a:avLst/>
@@ -13834,8 +14074,8 @@
         </p:nvSpPr>
         <p:spPr>
           <a:xfrm>
-            <a:off x="5388393" y="6296222"/>
-            <a:ext cx="494779" cy="490589"/>
+            <a:off x="4395655" y="6430521"/>
+            <a:ext cx="2480253" cy="412399"/>
           </a:xfrm>
           <a:prstGeom prst="rightArrow">
             <a:avLst/>
@@ -13880,7 +14120,7 @@
         </p:nvSpPr>
         <p:spPr>
           <a:xfrm>
-            <a:off x="1233987" y="6374182"/>
+            <a:off x="1233987" y="6528086"/>
             <a:ext cx="2793009" cy="369332"/>
           </a:xfrm>
           <a:prstGeom prst="rect">
@@ -13909,7 +14149,7 @@
         </p:nvSpPr>
         <p:spPr>
           <a:xfrm>
-            <a:off x="7059510" y="6336364"/>
+            <a:off x="7059510" y="6490268"/>
             <a:ext cx="3969548" cy="369332"/>
           </a:xfrm>
           <a:prstGeom prst="rect">
@@ -13939,15 +14179,15 @@
           <p:nvPr/>
         </p:nvPicPr>
         <p:blipFill>
-          <a:blip r:embed="rId4"/>
+          <a:blip r:embed="rId5"/>
           <a:stretch>
             <a:fillRect/>
           </a:stretch>
         </p:blipFill>
         <p:spPr>
           <a:xfrm>
-            <a:off x="10106025" y="803448"/>
-            <a:ext cx="2085975" cy="1941900"/>
+            <a:off x="10547287" y="1826835"/>
+            <a:ext cx="1644713" cy="1531115"/>
           </a:xfrm>
           <a:prstGeom prst="rect">
             <a:avLst/>
@@ -13964,6 +14204,13 @@
   <p:clrMapOvr>
     <a:masterClrMapping/>
   </p:clrMapOvr>
+  <p:timing>
+    <p:tnLst>
+      <p:par>
+        <p:cTn id="1" dur="indefinite" restart="never" nodeType="tmRoot"/>
+      </p:par>
+    </p:tnLst>
+  </p:timing>
 </p:sld>
 </file>
 
@@ -13984,6 +14231,497 @@
           <a:chExt cx="0" cy="0"/>
         </a:xfrm>
       </p:grpSpPr>
+      <p:cxnSp>
+        <p:nvCxnSpPr>
+          <p:cNvPr id="16" name="Straight Connector 15"/>
+          <p:cNvCxnSpPr/>
+          <p:nvPr/>
+        </p:nvCxnSpPr>
+        <p:spPr>
+          <a:xfrm>
+            <a:off x="5635782" y="3384550"/>
+            <a:ext cx="0" cy="3473450"/>
+          </a:xfrm>
+          <a:prstGeom prst="line">
+            <a:avLst/>
+          </a:prstGeom>
+        </p:spPr>
+        <p:style>
+          <a:lnRef idx="1">
+            <a:schemeClr val="accent1"/>
+          </a:lnRef>
+          <a:fillRef idx="0">
+            <a:schemeClr val="accent1"/>
+          </a:fillRef>
+          <a:effectRef idx="0">
+            <a:schemeClr val="accent1"/>
+          </a:effectRef>
+          <a:fontRef idx="minor">
+            <a:schemeClr val="tx1"/>
+          </a:fontRef>
+        </p:style>
+      </p:cxnSp>
+      <p:sp>
+        <p:nvSpPr>
+          <p:cNvPr id="2" name="Title 1">
+            <a:extLst>
+              <a:ext uri="{FF2B5EF4-FFF2-40B4-BE49-F238E27FC236}">
+                <a16:creationId xmlns="" xmlns:a16="http://schemas.microsoft.com/office/drawing/2014/main" id="{F11C1235-51B4-A8A0-3A61-9C767F437001}"/>
+              </a:ext>
+            </a:extLst>
+          </p:cNvPr>
+          <p:cNvSpPr>
+            <a:spLocks noGrp="1"/>
+          </p:cNvSpPr>
+          <p:nvPr>
+            <p:ph type="title"/>
+          </p:nvPr>
+        </p:nvSpPr>
+        <p:spPr>
+          <a:xfrm>
+            <a:off x="160866" y="189168"/>
+            <a:ext cx="10871201" cy="672843"/>
+          </a:xfrm>
+        </p:spPr>
+        <p:txBody>
+          <a:bodyPr anchor="ctr">
+            <a:normAutofit/>
+          </a:bodyPr>
+          <a:lstStyle/>
+          <a:p>
+            <a:r>
+              <a:rPr lang="en-US"/>
+              <a:t>Context &amp; </a:t>
+            </a:r>
+            <a:r>
+              <a:rPr lang="en-US" smtClean="0"/>
+              <a:t>Motivation – Toyota 24DCM project</a:t>
+            </a:r>
+            <a:endParaRPr lang="en-US"/>
+          </a:p>
+        </p:txBody>
+      </p:sp>
+      <p:sp>
+        <p:nvSpPr>
+          <p:cNvPr id="7" name="Content Placeholder 6">
+            <a:extLst>
+              <a:ext uri="{FF2B5EF4-FFF2-40B4-BE49-F238E27FC236}">
+                <a16:creationId xmlns="" xmlns:a16="http://schemas.microsoft.com/office/drawing/2014/main" id="{4A0E7BDD-2CF4-321B-0637-D9AF63CAB0BF}"/>
+              </a:ext>
+            </a:extLst>
+          </p:cNvPr>
+          <p:cNvSpPr>
+            <a:spLocks noGrp="1"/>
+          </p:cNvSpPr>
+          <p:nvPr>
+            <p:ph idx="1"/>
+          </p:nvPr>
+        </p:nvSpPr>
+        <p:spPr>
+          <a:xfrm>
+            <a:off x="160866" y="878996"/>
+            <a:ext cx="11916834" cy="1756536"/>
+          </a:xfrm>
+        </p:spPr>
+        <p:txBody>
+          <a:bodyPr>
+            <a:noAutofit/>
+          </a:bodyPr>
+          <a:lstStyle/>
+          <a:p>
+            <a:r>
+              <a:rPr lang="en-US" sz="1800" smtClean="0"/>
+              <a:t>Toyota </a:t>
+            </a:r>
+            <a:r>
+              <a:rPr lang="en-US" sz="1800" b="1" smtClean="0"/>
+              <a:t>DCM</a:t>
+            </a:r>
+            <a:r>
+              <a:rPr lang="en-US" sz="1800" smtClean="0"/>
+              <a:t>: </a:t>
+            </a:r>
+            <a:r>
+              <a:rPr lang="en-US" sz="1800" smtClean="0"/>
+              <a:t>a telematics platform providing connected vehicle services, including </a:t>
+            </a:r>
+            <a:r>
+              <a:rPr lang="en-US" sz="1800" b="1" smtClean="0"/>
+              <a:t>remote diagnostics</a:t>
+            </a:r>
+            <a:r>
+              <a:rPr lang="en-US" sz="1800" b="1"/>
+              <a:t> </a:t>
+            </a:r>
+            <a:r>
+              <a:rPr lang="en-US" sz="1800" smtClean="0"/>
+              <a:t>from OEM server.</a:t>
+            </a:r>
+            <a:endParaRPr lang="en-US" sz="1800" smtClean="0"/>
+          </a:p>
+          <a:p>
+            <a:r>
+              <a:rPr lang="en-US" sz="1800" smtClean="0"/>
+              <a:t>Supports diagnostic </a:t>
+            </a:r>
+            <a:r>
+              <a:rPr lang="en-US" sz="1800"/>
+              <a:t>communication and OTA updates through the Internal CAN </a:t>
+            </a:r>
+            <a:r>
+              <a:rPr lang="en-US" sz="1800"/>
+              <a:t>bus</a:t>
+            </a:r>
+            <a:r>
+              <a:rPr lang="en-US" sz="1800" smtClean="0"/>
+              <a:t>.</a:t>
+            </a:r>
+          </a:p>
+          <a:p>
+            <a:r>
+              <a:rPr lang="en-US" sz="1800" b="1" smtClean="0"/>
+              <a:t>Current architecture</a:t>
+            </a:r>
+            <a:r>
+              <a:rPr lang="en-US" sz="1800" smtClean="0"/>
+              <a:t>: monolithic </a:t>
+            </a:r>
+            <a:r>
+              <a:rPr lang="en-US" sz="1800"/>
+              <a:t>deployment model</a:t>
+            </a:r>
+            <a:r>
+              <a:rPr lang="en-US" sz="1800"/>
+              <a:t>, </a:t>
+            </a:r>
+            <a:r>
+              <a:rPr lang="en-US" sz="1800" smtClean="0"/>
+              <a:t>with all </a:t>
+            </a:r>
+            <a:r>
+              <a:rPr lang="en-US" sz="1800"/>
+              <a:t>components running in </a:t>
+            </a:r>
+            <a:r>
+              <a:rPr lang="en-US" sz="1800"/>
+              <a:t>a </a:t>
+            </a:r>
+            <a:r>
+              <a:rPr lang="en-US" sz="1800" smtClean="0"/>
+              <a:t>single </a:t>
+            </a:r>
+            <a:r>
+              <a:rPr lang="en-US" sz="1800"/>
+              <a:t>partition</a:t>
+            </a:r>
+            <a:r>
+              <a:rPr lang="en-US" sz="1800" smtClean="0"/>
+              <a:t>.</a:t>
+            </a:r>
+          </a:p>
+          <a:p>
+            <a:r>
+              <a:rPr lang="en-US" sz="1800" b="1" smtClean="0"/>
+              <a:t>System </a:t>
+            </a:r>
+            <a:r>
+              <a:rPr lang="en-US" sz="1800" b="1"/>
+              <a:t>architecture </a:t>
+            </a:r>
+            <a:r>
+              <a:rPr lang="en-US" sz="1800" b="1" smtClean="0"/>
+              <a:t>migration</a:t>
+            </a:r>
+            <a:r>
+              <a:rPr lang="en-US" sz="1800" smtClean="0"/>
+              <a:t>: </a:t>
+            </a:r>
+            <a:endParaRPr lang="en-US" sz="1800"/>
+          </a:p>
+          <a:p>
+            <a:pPr lvl="1"/>
+            <a:r>
+              <a:rPr lang="en-US" sz="1800" smtClean="0"/>
+              <a:t>Due to security, OEM wants to separate DCM into 2 partition using LXC </a:t>
+            </a:r>
+            <a:r>
+              <a:rPr lang="en-US" sz="1800"/>
+              <a:t>containers: </a:t>
+            </a:r>
+          </a:p>
+          <a:p>
+            <a:pPr lvl="2"/>
+            <a:r>
+              <a:rPr lang="en-US" sz="1800" b="1"/>
+              <a:t>EP </a:t>
+            </a:r>
+            <a:r>
+              <a:rPr lang="en-US" sz="1800" b="1" smtClean="0"/>
+              <a:t>container (Entry Point)</a:t>
+            </a:r>
+            <a:r>
+              <a:rPr lang="en-US" sz="1800" smtClean="0"/>
+              <a:t>: </a:t>
+            </a:r>
+            <a:r>
+              <a:rPr lang="en-US" sz="1800"/>
+              <a:t>externally exposed network components</a:t>
+            </a:r>
+          </a:p>
+          <a:p>
+            <a:pPr lvl="2"/>
+            <a:r>
+              <a:rPr lang="en-US" sz="1800" b="1" smtClean="0"/>
+              <a:t>Internal container: </a:t>
+            </a:r>
+            <a:r>
+              <a:rPr lang="en-US" sz="1800" smtClean="0"/>
+              <a:t>components </a:t>
+            </a:r>
+            <a:r>
+              <a:rPr lang="en-US" sz="1800"/>
+              <a:t>which have access to CAN bus.</a:t>
+            </a:r>
+          </a:p>
+        </p:txBody>
+      </p:sp>
+      <p:pic>
+        <p:nvPicPr>
+          <p:cNvPr id="3" name="Picture 2"/>
+          <p:cNvPicPr>
+            <a:picLocks noChangeAspect="1"/>
+          </p:cNvPicPr>
+          <p:nvPr/>
+        </p:nvPicPr>
+        <p:blipFill>
+          <a:blip r:embed="rId3"/>
+          <a:stretch>
+            <a:fillRect/>
+          </a:stretch>
+        </p:blipFill>
+        <p:spPr>
+          <a:xfrm>
+            <a:off x="0" y="3357951"/>
+            <a:ext cx="5359652" cy="3083122"/>
+          </a:xfrm>
+          <a:prstGeom prst="rect">
+            <a:avLst/>
+          </a:prstGeom>
+        </p:spPr>
+      </p:pic>
+      <p:pic>
+        <p:nvPicPr>
+          <p:cNvPr id="4" name="Picture 3"/>
+          <p:cNvPicPr>
+            <a:picLocks noChangeAspect="1"/>
+          </p:cNvPicPr>
+          <p:nvPr/>
+        </p:nvPicPr>
+        <p:blipFill>
+          <a:blip r:embed="rId4"/>
+          <a:stretch>
+            <a:fillRect/>
+          </a:stretch>
+        </p:blipFill>
+        <p:spPr>
+          <a:xfrm>
+            <a:off x="5911913" y="3357951"/>
+            <a:ext cx="6165787" cy="3161081"/>
+          </a:xfrm>
+          <a:prstGeom prst="rect">
+            <a:avLst/>
+          </a:prstGeom>
+        </p:spPr>
+      </p:pic>
+      <p:sp>
+        <p:nvSpPr>
+          <p:cNvPr id="8" name="Right Arrow 7"/>
+          <p:cNvSpPr/>
+          <p:nvPr/>
+        </p:nvSpPr>
+        <p:spPr>
+          <a:xfrm>
+            <a:off x="4395655" y="6430521"/>
+            <a:ext cx="2480253" cy="412399"/>
+          </a:xfrm>
+          <a:prstGeom prst="rightArrow">
+            <a:avLst/>
+          </a:prstGeom>
+          <a:solidFill>
+            <a:schemeClr val="accent4">
+              <a:lumMod val="60000"/>
+              <a:lumOff val="40000"/>
+            </a:schemeClr>
+          </a:solidFill>
+        </p:spPr>
+        <p:style>
+          <a:lnRef idx="2">
+            <a:schemeClr val="accent1">
+              <a:shade val="50000"/>
+            </a:schemeClr>
+          </a:lnRef>
+          <a:fillRef idx="1">
+            <a:schemeClr val="accent1"/>
+          </a:fillRef>
+          <a:effectRef idx="0">
+            <a:schemeClr val="accent1"/>
+          </a:effectRef>
+          <a:fontRef idx="minor">
+            <a:schemeClr val="lt1"/>
+          </a:fontRef>
+        </p:style>
+        <p:txBody>
+          <a:bodyPr rtlCol="0" anchor="ctr"/>
+          <a:lstStyle/>
+          <a:p>
+            <a:pPr algn="ctr"/>
+            <a:endParaRPr lang="en-US"/>
+          </a:p>
+        </p:txBody>
+      </p:sp>
+      <p:sp>
+        <p:nvSpPr>
+          <p:cNvPr id="10" name="TextBox 9"/>
+          <p:cNvSpPr txBox="1"/>
+          <p:nvPr/>
+        </p:nvSpPr>
+        <p:spPr>
+          <a:xfrm>
+            <a:off x="1233987" y="6528086"/>
+            <a:ext cx="2793009" cy="369332"/>
+          </a:xfrm>
+          <a:prstGeom prst="rect">
+            <a:avLst/>
+          </a:prstGeom>
+          <a:noFill/>
+        </p:spPr>
+        <p:txBody>
+          <a:bodyPr wrap="none" rtlCol="0">
+            <a:spAutoFit/>
+          </a:bodyPr>
+          <a:lstStyle/>
+          <a:p>
+            <a:r>
+              <a:rPr lang="en-US"/>
+              <a:t>Current system architecture</a:t>
+            </a:r>
+          </a:p>
+        </p:txBody>
+      </p:sp>
+      <p:sp>
+        <p:nvSpPr>
+          <p:cNvPr id="13" name="TextBox 12"/>
+          <p:cNvSpPr txBox="1"/>
+          <p:nvPr/>
+        </p:nvSpPr>
+        <p:spPr>
+          <a:xfrm>
+            <a:off x="7059510" y="6490268"/>
+            <a:ext cx="3969548" cy="369332"/>
+          </a:xfrm>
+          <a:prstGeom prst="rect">
+            <a:avLst/>
+          </a:prstGeom>
+          <a:noFill/>
+        </p:spPr>
+        <p:txBody>
+          <a:bodyPr wrap="none" rtlCol="0">
+            <a:spAutoFit/>
+          </a:bodyPr>
+          <a:lstStyle/>
+          <a:p>
+            <a:r>
+              <a:rPr lang="en-US"/>
+              <a:t>New system architecture (containerized)</a:t>
+            </a:r>
+          </a:p>
+        </p:txBody>
+      </p:sp>
+      <p:pic>
+        <p:nvPicPr>
+          <p:cNvPr id="11" name="Picture 10"/>
+          <p:cNvPicPr>
+            <a:picLocks noChangeAspect="1"/>
+          </p:cNvPicPr>
+          <p:nvPr/>
+        </p:nvPicPr>
+        <p:blipFill>
+          <a:blip r:embed="rId5"/>
+          <a:stretch>
+            <a:fillRect/>
+          </a:stretch>
+        </p:blipFill>
+        <p:spPr>
+          <a:xfrm>
+            <a:off x="10547287" y="1826835"/>
+            <a:ext cx="1644713" cy="1531115"/>
+          </a:xfrm>
+          <a:prstGeom prst="rect">
+            <a:avLst/>
+          </a:prstGeom>
+        </p:spPr>
+      </p:pic>
+    </p:spTree>
+    <p:extLst>
+      <p:ext uri="{BB962C8B-B14F-4D97-AF65-F5344CB8AC3E}">
+        <p14:creationId xmlns:p14="http://schemas.microsoft.com/office/powerpoint/2010/main" val="3549224995"/>
+      </p:ext>
+    </p:extLst>
+  </p:cSld>
+  <p:clrMapOvr>
+    <a:masterClrMapping/>
+  </p:clrMapOvr>
+  <p:timing>
+    <p:tnLst>
+      <p:par>
+        <p:cTn id="1" dur="indefinite" restart="never" nodeType="tmRoot"/>
+      </p:par>
+    </p:tnLst>
+  </p:timing>
+</p:sld>
+</file>
+
+<file path=ppt/slides/slide5.xml><?xml version="1.0" encoding="utf-8"?>
+<p:sld xmlns:a="http://schemas.openxmlformats.org/drawingml/2006/main" xmlns:r="http://schemas.openxmlformats.org/officeDocument/2006/relationships" xmlns:p="http://schemas.openxmlformats.org/presentationml/2006/main">
+  <p:cSld>
+    <p:spTree>
+      <p:nvGrpSpPr>
+        <p:cNvPr id="1" name=""/>
+        <p:cNvGrpSpPr/>
+        <p:nvPr/>
+      </p:nvGrpSpPr>
+      <p:grpSpPr>
+        <a:xfrm>
+          <a:off x="0" y="0"/>
+          <a:ext cx="0" cy="0"/>
+          <a:chOff x="0" y="0"/>
+          <a:chExt cx="0" cy="0"/>
+        </a:xfrm>
+      </p:grpSpPr>
+      <p:pic>
+        <p:nvPicPr>
+          <p:cNvPr id="4" name="Picture 3"/>
+          <p:cNvPicPr>
+            <a:picLocks noChangeAspect="1"/>
+          </p:cNvPicPr>
+          <p:nvPr/>
+        </p:nvPicPr>
+        <p:blipFill>
+          <a:blip r:embed="rId2"/>
+          <a:stretch>
+            <a:fillRect/>
+          </a:stretch>
+        </p:blipFill>
+        <p:spPr>
+          <a:xfrm>
+            <a:off x="4438038" y="2594783"/>
+            <a:ext cx="7684020" cy="4158444"/>
+          </a:xfrm>
+          <a:prstGeom prst="rect">
+            <a:avLst/>
+          </a:prstGeom>
+        </p:spPr>
+      </p:pic>
       <p:sp>
         <p:nvSpPr>
           <p:cNvPr id="12" name="TextBox 11"/>
@@ -14110,7 +14848,7 @@
           <p:cNvPr id="2" name="Title 1">
             <a:extLst>
               <a:ext uri="{FF2B5EF4-FFF2-40B4-BE49-F238E27FC236}">
-                <a16:creationId xmlns:a16="http://schemas.microsoft.com/office/drawing/2014/main" id="{C3585339-B774-DFDC-4DB4-D02F5083DD3E}"/>
+                <a16:creationId xmlns="" xmlns:a16="http://schemas.microsoft.com/office/drawing/2014/main" id="{C3585339-B774-DFDC-4DB4-D02F5083DD3E}"/>
               </a:ext>
             </a:extLst>
           </p:cNvPr>
@@ -14133,30 +14871,6 @@
           </a:p>
         </p:txBody>
       </p:sp>
-      <p:pic>
-        <p:nvPicPr>
-          <p:cNvPr id="5" name="Picture 4"/>
-          <p:cNvPicPr>
-            <a:picLocks noChangeAspect="1"/>
-          </p:cNvPicPr>
-          <p:nvPr/>
-        </p:nvPicPr>
-        <p:blipFill>
-          <a:blip r:embed="rId2"/>
-          <a:stretch>
-            <a:fillRect/>
-          </a:stretch>
-        </p:blipFill>
-        <p:spPr>
-          <a:xfrm>
-            <a:off x="4443225" y="2594782"/>
-            <a:ext cx="7726458" cy="4158444"/>
-          </a:xfrm>
-          <a:prstGeom prst="rect">
-            <a:avLst/>
-          </a:prstGeom>
-        </p:spPr>
-      </p:pic>
       <p:grpSp>
         <p:nvGrpSpPr>
           <p:cNvPr id="21" name="Group 20"/>
@@ -14176,7 +14890,7 @@
             <p:cNvPr id="15" name="TextBox 14">
               <a:extLst>
                 <a:ext uri="{FF2B5EF4-FFF2-40B4-BE49-F238E27FC236}">
-                  <a16:creationId xmlns:a16="http://schemas.microsoft.com/office/drawing/2014/main" id="{2477AED6-8D6F-D505-6D7B-78460A03A2E8}"/>
+                  <a16:creationId xmlns="" xmlns:a16="http://schemas.microsoft.com/office/drawing/2014/main" id="{2477AED6-8D6F-D505-6D7B-78460A03A2E8}"/>
                 </a:ext>
               </a:extLst>
             </p:cNvPr>
@@ -14278,7 +14992,7 @@
       </p:grpSp>
       <p:pic>
         <p:nvPicPr>
-          <p:cNvPr id="9" name="Picture 8"/>
+          <p:cNvPr id="6" name="Picture 5"/>
           <p:cNvPicPr>
             <a:picLocks noChangeAspect="1"/>
           </p:cNvPicPr>
@@ -14292,8 +15006,8 @@
         </p:blipFill>
         <p:spPr>
           <a:xfrm>
-            <a:off x="9850170" y="924518"/>
-            <a:ext cx="2271888" cy="1645856"/>
+            <a:off x="9850171" y="595898"/>
+            <a:ext cx="2271888" cy="1907846"/>
           </a:xfrm>
           <a:prstGeom prst="rect">
             <a:avLst/>
@@ -14310,10 +15024,17 @@
   <p:clrMapOvr>
     <a:masterClrMapping/>
   </p:clrMapOvr>
+  <p:timing>
+    <p:tnLst>
+      <p:par>
+        <p:cTn id="1" dur="indefinite" restart="never" nodeType="tmRoot"/>
+      </p:par>
+    </p:tnLst>
+  </p:timing>
 </p:sld>
 </file>
 
-<file path=ppt/slides/slide5.xml><?xml version="1.0" encoding="utf-8"?>
+<file path=ppt/slides/slide6.xml><?xml version="1.0" encoding="utf-8"?>
 <p:sld xmlns:a="http://schemas.openxmlformats.org/drawingml/2006/main" xmlns:r="http://schemas.openxmlformats.org/officeDocument/2006/relationships" xmlns:p="http://schemas.openxmlformats.org/presentationml/2006/main">
   <p:cSld>
     <p:spTree>
@@ -14357,7 +15078,7 @@
           <p:cNvPr id="4" name="Content Placeholder 3">
             <a:extLst>
               <a:ext uri="{FF2B5EF4-FFF2-40B4-BE49-F238E27FC236}">
-                <a16:creationId xmlns:a16="http://schemas.microsoft.com/office/drawing/2014/main" id="{E5625E47-EFA5-9C35-32C7-F793664192AF}"/>
+                <a16:creationId xmlns="" xmlns:a16="http://schemas.microsoft.com/office/drawing/2014/main" id="{E5625E47-EFA5-9C35-32C7-F793664192AF}"/>
               </a:ext>
             </a:extLst>
           </p:cNvPr>
@@ -14392,7 +15113,7 @@
           <p:cNvPr id="10" name="Table 9">
             <a:extLst>
               <a:ext uri="{FF2B5EF4-FFF2-40B4-BE49-F238E27FC236}">
-                <a16:creationId xmlns:a16="http://schemas.microsoft.com/office/drawing/2014/main" id="{658A328F-ADBC-7C5F-15DF-73E4DC21B209}"/>
+                <a16:creationId xmlns="" xmlns:a16="http://schemas.microsoft.com/office/drawing/2014/main" id="{658A328F-ADBC-7C5F-15DF-73E4DC21B209}"/>
               </a:ext>
             </a:extLst>
           </p:cNvPr>
@@ -14409,7 +15130,7 @@
         </p:nvGraphicFramePr>
         <p:xfrm>
           <a:off x="204773" y="1505336"/>
-          <a:ext cx="11782454" cy="1332290"/>
+          <a:ext cx="11782454" cy="1417380"/>
         </p:xfrm>
         <a:graphic>
           <a:graphicData uri="http://schemas.openxmlformats.org/drawingml/2006/table">
@@ -14421,14 +15142,14 @@
                 <a:gridCol w="1298801">
                   <a:extLst>
                     <a:ext uri="{9D8B030D-6E8A-4147-A177-3AD203B41FA5}">
-                      <a16:colId xmlns:a16="http://schemas.microsoft.com/office/drawing/2014/main" val="20000"/>
+                      <a16:colId xmlns="" xmlns:a16="http://schemas.microsoft.com/office/drawing/2014/main" val="20000"/>
                     </a:ext>
                   </a:extLst>
                 </a:gridCol>
                 <a:gridCol w="10483653">
                   <a:extLst>
                     <a:ext uri="{9D8B030D-6E8A-4147-A177-3AD203B41FA5}">
-                      <a16:colId xmlns:a16="http://schemas.microsoft.com/office/drawing/2014/main" val="20001"/>
+                      <a16:colId xmlns="" xmlns:a16="http://schemas.microsoft.com/office/drawing/2014/main" val="20001"/>
                     </a:ext>
                   </a:extLst>
                 </a:gridCol>
@@ -14567,7 +15288,7 @@
                 </a:tc>
                 <a:extLst>
                   <a:ext uri="{0D108BD9-81ED-4DB2-BD59-A6C34878D82A}">
-                    <a16:rowId xmlns:a16="http://schemas.microsoft.com/office/drawing/2014/main" val="10000"/>
+                    <a16:rowId xmlns="" xmlns:a16="http://schemas.microsoft.com/office/drawing/2014/main" val="10000"/>
                   </a:ext>
                 </a:extLst>
               </a:tr>
@@ -14703,7 +15424,7 @@
                 </a:tc>
                 <a:extLst>
                   <a:ext uri="{0D108BD9-81ED-4DB2-BD59-A6C34878D82A}">
-                    <a16:rowId xmlns:a16="http://schemas.microsoft.com/office/drawing/2014/main" val="10001"/>
+                    <a16:rowId xmlns="" xmlns:a16="http://schemas.microsoft.com/office/drawing/2014/main" val="10001"/>
                   </a:ext>
                 </a:extLst>
               </a:tr>
@@ -14851,7 +15572,7 @@
                 </a:tc>
                 <a:extLst>
                   <a:ext uri="{0D108BD9-81ED-4DB2-BD59-A6C34878D82A}">
-                    <a16:rowId xmlns:a16="http://schemas.microsoft.com/office/drawing/2014/main" val="10002"/>
+                    <a16:rowId xmlns="" xmlns:a16="http://schemas.microsoft.com/office/drawing/2014/main" val="10002"/>
                   </a:ext>
                 </a:extLst>
               </a:tr>
@@ -14869,10 +15590,17 @@
   <p:clrMapOvr>
     <a:masterClrMapping/>
   </p:clrMapOvr>
+  <p:timing>
+    <p:tnLst>
+      <p:par>
+        <p:cTn id="1" dur="indefinite" restart="never" nodeType="tmRoot"/>
+      </p:par>
+    </p:tnLst>
+  </p:timing>
 </p:sld>
 </file>
 
-<file path=ppt/slides/slide6.xml><?xml version="1.0" encoding="utf-8"?>
+<file path=ppt/slides/slide7.xml><?xml version="1.0" encoding="utf-8"?>
 <p:sld xmlns:a="http://schemas.openxmlformats.org/drawingml/2006/main" xmlns:r="http://schemas.openxmlformats.org/officeDocument/2006/relationships" xmlns:p="http://schemas.openxmlformats.org/presentationml/2006/main">
   <p:cSld>
     <p:spTree>
@@ -14880,7 +15608,7 @@
         <p:cNvPr id="1" name="">
           <a:extLst>
             <a:ext uri="{FF2B5EF4-FFF2-40B4-BE49-F238E27FC236}">
-              <a16:creationId xmlns:a16="http://schemas.microsoft.com/office/drawing/2014/main" id="{C0816B88-86B3-799E-3A3E-FA919E3E0922}"/>
+              <a16:creationId xmlns="" xmlns:a16="http://schemas.microsoft.com/office/drawing/2014/main" id="{C0816B88-86B3-799E-3A3E-FA919E3E0922}"/>
             </a:ext>
           </a:extLst>
         </p:cNvPr>
@@ -14900,7 +15628,7 @@
           <p:cNvPr id="2" name="Title 1">
             <a:extLst>
               <a:ext uri="{FF2B5EF4-FFF2-40B4-BE49-F238E27FC236}">
-                <a16:creationId xmlns:a16="http://schemas.microsoft.com/office/drawing/2014/main" id="{C36E5815-73D6-DA66-29AA-3BE061A3E84B}"/>
+                <a16:creationId xmlns="" xmlns:a16="http://schemas.microsoft.com/office/drawing/2014/main" id="{C36E5815-73D6-DA66-29AA-3BE061A3E84B}"/>
               </a:ext>
             </a:extLst>
           </p:cNvPr>
@@ -14928,7 +15656,7 @@
           <p:cNvPr id="11" name="Content Placeholder 3">
             <a:extLst>
               <a:ext uri="{FF2B5EF4-FFF2-40B4-BE49-F238E27FC236}">
-                <a16:creationId xmlns:a16="http://schemas.microsoft.com/office/drawing/2014/main" id="{6010EF79-766B-D3A2-10CE-882C40A1E836}"/>
+                <a16:creationId xmlns="" xmlns:a16="http://schemas.microsoft.com/office/drawing/2014/main" id="{6010EF79-766B-D3A2-10CE-882C40A1E836}"/>
               </a:ext>
             </a:extLst>
           </p:cNvPr>
@@ -15124,7 +15852,7 @@
           <p:cNvPr id="3" name="Table 2">
             <a:extLst>
               <a:ext uri="{FF2B5EF4-FFF2-40B4-BE49-F238E27FC236}">
-                <a16:creationId xmlns:a16="http://schemas.microsoft.com/office/drawing/2014/main" id="{6C8AAA51-C203-CD8B-4B02-DE7401134C21}"/>
+                <a16:creationId xmlns="" xmlns:a16="http://schemas.microsoft.com/office/drawing/2014/main" id="{6C8AAA51-C203-CD8B-4B02-DE7401134C21}"/>
               </a:ext>
             </a:extLst>
           </p:cNvPr>
@@ -15134,14 +15862,14 @@
           <p:nvPr>
             <p:extLst>
               <p:ext uri="{D42A27DB-BD31-4B8C-83A1-F6EECF244321}">
-                <p14:modId xmlns:p14="http://schemas.microsoft.com/office/powerpoint/2010/main" val="113273878"/>
+                <p14:modId xmlns:p14="http://schemas.microsoft.com/office/powerpoint/2010/main" val="32169731"/>
               </p:ext>
             </p:extLst>
           </p:nvPr>
         </p:nvGraphicFramePr>
         <p:xfrm>
           <a:off x="182820" y="960039"/>
-          <a:ext cx="11826361" cy="4611470"/>
+          <a:ext cx="11903556" cy="4869554"/>
         </p:xfrm>
         <a:graphic>
           <a:graphicData uri="http://schemas.openxmlformats.org/drawingml/2006/table">
@@ -15150,38 +15878,38 @@
                 <a:tableStyleId>{5C22544A-7EE6-4342-B048-85BDC9FD1C3A}</a:tableStyleId>
               </a:tblPr>
               <a:tblGrid>
-                <a:gridCol w="741105">
+                <a:gridCol w="745942">
                   <a:extLst>
                     <a:ext uri="{9D8B030D-6E8A-4147-A177-3AD203B41FA5}">
-                      <a16:colId xmlns:a16="http://schemas.microsoft.com/office/drawing/2014/main" val="20000"/>
+                      <a16:colId xmlns="" xmlns:a16="http://schemas.microsoft.com/office/drawing/2014/main" val="20000"/>
                     </a:ext>
                   </a:extLst>
                 </a:gridCol>
-                <a:gridCol w="4248150">
+                <a:gridCol w="4275879">
                   <a:extLst>
                     <a:ext uri="{9D8B030D-6E8A-4147-A177-3AD203B41FA5}">
-                      <a16:colId xmlns:a16="http://schemas.microsoft.com/office/drawing/2014/main" val="20001"/>
+                      <a16:colId xmlns="" xmlns:a16="http://schemas.microsoft.com/office/drawing/2014/main" val="20001"/>
                     </a:ext>
                   </a:extLst>
                 </a:gridCol>
-                <a:gridCol w="4629150">
+                <a:gridCol w="4419193">
                   <a:extLst>
                     <a:ext uri="{9D8B030D-6E8A-4147-A177-3AD203B41FA5}">
-                      <a16:colId xmlns:a16="http://schemas.microsoft.com/office/drawing/2014/main" val="2530683369"/>
+                      <a16:colId xmlns="" xmlns:a16="http://schemas.microsoft.com/office/drawing/2014/main" val="2530683369"/>
                     </a:ext>
                   </a:extLst>
                 </a:gridCol>
-                <a:gridCol w="1295400">
+                <a:gridCol w="1475715">
                   <a:extLst>
                     <a:ext uri="{9D8B030D-6E8A-4147-A177-3AD203B41FA5}">
-                      <a16:colId xmlns:a16="http://schemas.microsoft.com/office/drawing/2014/main" val="20002"/>
+                      <a16:colId xmlns="" xmlns:a16="http://schemas.microsoft.com/office/drawing/2014/main" val="20002"/>
                     </a:ext>
                   </a:extLst>
                 </a:gridCol>
-                <a:gridCol w="912556">
+                <a:gridCol w="986827">
                   <a:extLst>
                     <a:ext uri="{9D8B030D-6E8A-4147-A177-3AD203B41FA5}">
-                      <a16:colId xmlns:a16="http://schemas.microsoft.com/office/drawing/2014/main" val="20003"/>
+                      <a16:colId xmlns="" xmlns:a16="http://schemas.microsoft.com/office/drawing/2014/main" val="20003"/>
                     </a:ext>
                   </a:extLst>
                 </a:gridCol>
@@ -15541,7 +16269,7 @@
                 </a:tc>
                 <a:extLst>
                   <a:ext uri="{0D108BD9-81ED-4DB2-BD59-A6C34878D82A}">
-                    <a16:rowId xmlns:a16="http://schemas.microsoft.com/office/drawing/2014/main" val="10000"/>
+                    <a16:rowId xmlns="" xmlns:a16="http://schemas.microsoft.com/office/drawing/2014/main" val="10000"/>
                   </a:ext>
                 </a:extLst>
               </a:tr>
@@ -15635,7 +16363,31 @@
                           <a:ea typeface="+mn-ea"/>
                           <a:cs typeface="Arial" panose="020B0604020202020204" pitchFamily="34" charset="0"/>
                         </a:rPr>
-                        <a:t>A compromised app/service sends reprogramming command to CAN</a:t>
+                        <a:t>A compromised app/service sends reprogramming </a:t>
+                      </a:r>
+                      <a:r>
+                        <a:rPr lang="en-US" sz="1600" b="0" kern="1200" baseline="0" smtClean="0">
+                          <a:solidFill>
+                            <a:schemeClr val="dk1"/>
+                          </a:solidFill>
+                          <a:effectLst/>
+                          <a:latin typeface="+mn-lt"/>
+                          <a:ea typeface="+mn-ea"/>
+                          <a:cs typeface="Arial" panose="020B0604020202020204" pitchFamily="34" charset="0"/>
+                        </a:rPr>
+                        <a:t>diagnostic </a:t>
+                      </a:r>
+                      <a:r>
+                        <a:rPr lang="en-US" sz="1600" b="0" kern="1200" baseline="0">
+                          <a:solidFill>
+                            <a:schemeClr val="dk1"/>
+                          </a:solidFill>
+                          <a:effectLst/>
+                          <a:latin typeface="+mn-lt"/>
+                          <a:ea typeface="+mn-ea"/>
+                          <a:cs typeface="Arial" panose="020B0604020202020204" pitchFamily="34" charset="0"/>
+                        </a:rPr>
+                        <a:t>to CAN</a:t>
                       </a:r>
                     </a:p>
                   </a:txBody>
@@ -15873,7 +16625,7 @@
                 </a:tc>
                 <a:extLst>
                   <a:ext uri="{0D108BD9-81ED-4DB2-BD59-A6C34878D82A}">
-                    <a16:rowId xmlns:a16="http://schemas.microsoft.com/office/drawing/2014/main" val="10001"/>
+                    <a16:rowId xmlns="" xmlns:a16="http://schemas.microsoft.com/office/drawing/2014/main" val="10001"/>
                   </a:ext>
                 </a:extLst>
               </a:tr>
@@ -16240,7 +16992,7 @@
                 </a:tc>
                 <a:extLst>
                   <a:ext uri="{0D108BD9-81ED-4DB2-BD59-A6C34878D82A}">
-                    <a16:rowId xmlns:a16="http://schemas.microsoft.com/office/drawing/2014/main" val="10002"/>
+                    <a16:rowId xmlns="" xmlns:a16="http://schemas.microsoft.com/office/drawing/2014/main" val="10002"/>
                   </a:ext>
                 </a:extLst>
               </a:tr>
@@ -16612,7 +17364,7 @@
                 </a:tc>
                 <a:extLst>
                   <a:ext uri="{0D108BD9-81ED-4DB2-BD59-A6C34878D82A}">
-                    <a16:rowId xmlns:a16="http://schemas.microsoft.com/office/drawing/2014/main" val="10003"/>
+                    <a16:rowId xmlns="" xmlns:a16="http://schemas.microsoft.com/office/drawing/2014/main" val="10003"/>
                   </a:ext>
                 </a:extLst>
               </a:tr>
@@ -16859,14 +17611,20 @@
                         <a:defRPr/>
                       </a:pPr>
                       <a:r>
-                        <a:rPr lang="en-US" sz="1600" b="0">
+                        <a:rPr lang="en-US" sz="1600" b="0" smtClean="0">
                           <a:effectLst/>
                           <a:latin typeface="+mn-lt"/>
                           <a:ea typeface="Malgun Gothic" panose="020B0503020000020004" pitchFamily="34" charset="-127"/>
                           <a:cs typeface="Arial" panose="020B0604020202020204" pitchFamily="34" charset="0"/>
                         </a:rPr>
-                        <a:t>Modifiability</a:t>
+                        <a:t>Maintainability</a:t>
                       </a:r>
+                      <a:endParaRPr lang="en-US" sz="1600" b="0">
+                        <a:effectLst/>
+                        <a:latin typeface="+mn-lt"/>
+                        <a:ea typeface="Malgun Gothic" panose="020B0503020000020004" pitchFamily="34" charset="-127"/>
+                        <a:cs typeface="Arial" panose="020B0604020202020204" pitchFamily="34" charset="0"/>
+                      </a:endParaRPr>
                     </a:p>
                   </a:txBody>
                   <a:tcPr marL="106700" marR="106700" marT="53350" marB="53350" anchor="ctr">
@@ -16968,7 +17726,7 @@
                 </a:tc>
                 <a:extLst>
                   <a:ext uri="{0D108BD9-81ED-4DB2-BD59-A6C34878D82A}">
-                    <a16:rowId xmlns:a16="http://schemas.microsoft.com/office/drawing/2014/main" val="10004"/>
+                    <a16:rowId xmlns="" xmlns:a16="http://schemas.microsoft.com/office/drawing/2014/main" val="10004"/>
                   </a:ext>
                 </a:extLst>
               </a:tr>
@@ -16984,7 +17742,7 @@
                         </a:lnSpc>
                       </a:pPr>
                       <a:r>
-                        <a:rPr lang="en-US" sz="1600" b="0" kern="1200">
+                        <a:rPr lang="en-US" sz="1600" b="0" strike="sngStrike" kern="1200">
                           <a:solidFill>
                             <a:schemeClr val="dk1"/>
                           </a:solidFill>
@@ -17053,7 +17811,7 @@
                         </a:spcAft>
                       </a:pPr>
                       <a:r>
-                        <a:rPr lang="en-US" sz="1600" b="0" kern="1200" baseline="0">
+                        <a:rPr lang="en-US" sz="1600" b="0" strike="sngStrike" kern="1200" baseline="0">
                           <a:solidFill>
                             <a:schemeClr val="dk1"/>
                           </a:solidFill>
@@ -17128,7 +17886,7 @@
                         <a:defRPr/>
                       </a:pPr>
                       <a:r>
-                        <a:rPr lang="en-US" sz="1600" b="0">
+                        <a:rPr lang="en-US" sz="1600" b="0" strike="sngStrike">
                           <a:effectLst/>
                           <a:latin typeface="+mn-lt"/>
                           <a:ea typeface="Malgun Gothic" panose="020B0503020000020004" pitchFamily="34" charset="-127"/>
@@ -17137,7 +17895,7 @@
                         <a:t>The other</a:t>
                       </a:r>
                       <a:r>
-                        <a:rPr lang="en-US" sz="1600" b="0" baseline="0">
+                        <a:rPr lang="en-US" sz="1600" b="0" strike="sngStrike" baseline="0">
                           <a:effectLst/>
                           <a:latin typeface="+mn-lt"/>
                           <a:ea typeface="Malgun Gothic" panose="020B0503020000020004" pitchFamily="34" charset="-127"/>
@@ -17146,7 +17904,7 @@
                         <a:t> </a:t>
                       </a:r>
                       <a:r>
-                        <a:rPr lang="en-US" sz="1600" b="0">
+                        <a:rPr lang="en-US" sz="1600" b="0" strike="sngStrike">
                           <a:effectLst/>
                           <a:latin typeface="+mn-lt"/>
                           <a:ea typeface="Malgun Gothic" panose="020B0503020000020004" pitchFamily="34" charset="-127"/>
@@ -17218,7 +17976,7 @@
                         <a:defRPr/>
                       </a:pPr>
                       <a:r>
-                        <a:rPr lang="en-US" sz="1600" b="0">
+                        <a:rPr lang="en-US" sz="1600" b="0" strike="sngStrike">
                           <a:effectLst/>
                           <a:latin typeface="+mn-lt"/>
                           <a:ea typeface="Malgun Gothic" panose="020B0503020000020004" pitchFamily="34" charset="-127"/>
@@ -17278,7 +18036,7 @@
                         </a:lnSpc>
                       </a:pPr>
                       <a:r>
-                        <a:rPr lang="en-US" sz="1600" b="0">
+                        <a:rPr lang="en-US" sz="1600" b="0" strike="sngStrike">
                           <a:latin typeface="+mn-lt"/>
                           <a:cs typeface="Arial" panose="020B0604020202020204" pitchFamily="34" charset="0"/>
                         </a:rPr>
@@ -17327,7 +18085,7 @@
                 </a:tc>
                 <a:extLst>
                   <a:ext uri="{0D108BD9-81ED-4DB2-BD59-A6C34878D82A}">
-                    <a16:rowId xmlns:a16="http://schemas.microsoft.com/office/drawing/2014/main" val="10005"/>
+                    <a16:rowId xmlns="" xmlns:a16="http://schemas.microsoft.com/office/drawing/2014/main" val="10005"/>
                   </a:ext>
                 </a:extLst>
               </a:tr>
@@ -17345,10 +18103,17 @@
   <p:clrMapOvr>
     <a:masterClrMapping/>
   </p:clrMapOvr>
+  <p:timing>
+    <p:tnLst>
+      <p:par>
+        <p:cTn id="1" dur="indefinite" restart="never" nodeType="tmRoot"/>
+      </p:par>
+    </p:tnLst>
+  </p:timing>
 </p:sld>
 </file>
 
-<file path=ppt/slides/slide7.xml><?xml version="1.0" encoding="utf-8"?>
+<file path=ppt/slides/slide8.xml><?xml version="1.0" encoding="utf-8"?>
 <p:sld xmlns:a="http://schemas.openxmlformats.org/drawingml/2006/main" xmlns:r="http://schemas.openxmlformats.org/officeDocument/2006/relationships" xmlns:p="http://schemas.openxmlformats.org/presentationml/2006/main">
   <p:cSld>
     <p:spTree>
@@ -17365,6 +18130,30 @@
           <a:chExt cx="0" cy="0"/>
         </a:xfrm>
       </p:grpSpPr>
+      <p:pic>
+        <p:nvPicPr>
+          <p:cNvPr id="3" name="Picture 2"/>
+          <p:cNvPicPr>
+            <a:picLocks noChangeAspect="1"/>
+          </p:cNvPicPr>
+          <p:nvPr/>
+        </p:nvPicPr>
+        <p:blipFill>
+          <a:blip r:embed="rId2"/>
+          <a:stretch>
+            <a:fillRect/>
+          </a:stretch>
+        </p:blipFill>
+        <p:spPr>
+          <a:xfrm>
+            <a:off x="2969538" y="2394738"/>
+            <a:ext cx="9183866" cy="4310270"/>
+          </a:xfrm>
+          <a:prstGeom prst="rect">
+            <a:avLst/>
+          </a:prstGeom>
+        </p:spPr>
+      </p:pic>
       <p:sp>
         <p:nvSpPr>
           <p:cNvPr id="5" name="TextBox 4"/>
@@ -17501,54 +18290,6 @@
           </a:p>
         </p:txBody>
       </p:sp>
-      <p:pic>
-        <p:nvPicPr>
-          <p:cNvPr id="4" name="Picture 3"/>
-          <p:cNvPicPr>
-            <a:picLocks noChangeAspect="1"/>
-          </p:cNvPicPr>
-          <p:nvPr/>
-        </p:nvPicPr>
-        <p:blipFill>
-          <a:blip r:embed="rId2"/>
-          <a:stretch>
-            <a:fillRect/>
-          </a:stretch>
-        </p:blipFill>
-        <p:spPr>
-          <a:xfrm>
-            <a:off x="3209925" y="2399168"/>
-            <a:ext cx="8785917" cy="4367400"/>
-          </a:xfrm>
-          <a:prstGeom prst="rect">
-            <a:avLst/>
-          </a:prstGeom>
-        </p:spPr>
-      </p:pic>
-      <p:pic>
-        <p:nvPicPr>
-          <p:cNvPr id="8" name="Picture 7"/>
-          <p:cNvPicPr>
-            <a:picLocks noChangeAspect="1"/>
-          </p:cNvPicPr>
-          <p:nvPr/>
-        </p:nvPicPr>
-        <p:blipFill>
-          <a:blip r:embed="rId3"/>
-          <a:stretch>
-            <a:fillRect/>
-          </a:stretch>
-        </p:blipFill>
-        <p:spPr>
-          <a:xfrm>
-            <a:off x="600387" y="5078097"/>
-            <a:ext cx="2196413" cy="1688471"/>
-          </a:xfrm>
-          <a:prstGeom prst="rect">
-            <a:avLst/>
-          </a:prstGeom>
-        </p:spPr>
-      </p:pic>
       <p:sp>
         <p:nvSpPr>
           <p:cNvPr id="9" name="TextBox 8"/>
@@ -17578,6 +18319,30 @@
           </a:p>
         </p:txBody>
       </p:sp>
+      <p:pic>
+        <p:nvPicPr>
+          <p:cNvPr id="7" name="Picture 6"/>
+          <p:cNvPicPr>
+            <a:picLocks noChangeAspect="1"/>
+          </p:cNvPicPr>
+          <p:nvPr/>
+        </p:nvPicPr>
+        <p:blipFill>
+          <a:blip r:embed="rId3"/>
+          <a:stretch>
+            <a:fillRect/>
+          </a:stretch>
+        </p:blipFill>
+        <p:spPr>
+          <a:xfrm>
+            <a:off x="264898" y="4359136"/>
+            <a:ext cx="2372009" cy="1843350"/>
+          </a:xfrm>
+          <a:prstGeom prst="rect">
+            <a:avLst/>
+          </a:prstGeom>
+        </p:spPr>
+      </p:pic>
     </p:spTree>
     <p:extLst>
       <p:ext uri="{BB962C8B-B14F-4D97-AF65-F5344CB8AC3E}">
@@ -17588,10 +18353,17 @@
   <p:clrMapOvr>
     <a:masterClrMapping/>
   </p:clrMapOvr>
+  <p:timing>
+    <p:tnLst>
+      <p:par>
+        <p:cTn id="1" dur="indefinite" restart="never" nodeType="tmRoot"/>
+      </p:par>
+    </p:tnLst>
+  </p:timing>
 </p:sld>
 </file>
 
-<file path=ppt/slides/slide8.xml><?xml version="1.0" encoding="utf-8"?>
+<file path=ppt/slides/slide9.xml><?xml version="1.0" encoding="utf-8"?>
 <p:sld xmlns:a="http://schemas.openxmlformats.org/drawingml/2006/main" xmlns:r="http://schemas.openxmlformats.org/officeDocument/2006/relationships" xmlns:p="http://schemas.openxmlformats.org/presentationml/2006/main">
   <p:cSld>
     <p:spTree>
@@ -17608,6 +18380,54 @@
           <a:chExt cx="0" cy="0"/>
         </a:xfrm>
       </p:grpSpPr>
+      <p:pic>
+        <p:nvPicPr>
+          <p:cNvPr id="10" name="Picture 9"/>
+          <p:cNvPicPr>
+            <a:picLocks noChangeAspect="1"/>
+          </p:cNvPicPr>
+          <p:nvPr/>
+        </p:nvPicPr>
+        <p:blipFill>
+          <a:blip r:embed="rId3"/>
+          <a:stretch>
+            <a:fillRect/>
+          </a:stretch>
+        </p:blipFill>
+        <p:spPr>
+          <a:xfrm>
+            <a:off x="547016" y="4202246"/>
+            <a:ext cx="2372009" cy="1843350"/>
+          </a:xfrm>
+          <a:prstGeom prst="rect">
+            <a:avLst/>
+          </a:prstGeom>
+        </p:spPr>
+      </p:pic>
+      <p:pic>
+        <p:nvPicPr>
+          <p:cNvPr id="4" name="Picture 3"/>
+          <p:cNvPicPr>
+            <a:picLocks noChangeAspect="1"/>
+          </p:cNvPicPr>
+          <p:nvPr/>
+        </p:nvPicPr>
+        <p:blipFill>
+          <a:blip r:embed="rId4"/>
+          <a:stretch>
+            <a:fillRect/>
+          </a:stretch>
+        </p:blipFill>
+        <p:spPr>
+          <a:xfrm>
+            <a:off x="3305175" y="1542094"/>
+            <a:ext cx="8886825" cy="5320305"/>
+          </a:xfrm>
+          <a:prstGeom prst="rect">
+            <a:avLst/>
+          </a:prstGeom>
+        </p:spPr>
+      </p:pic>
       <p:sp>
         <p:nvSpPr>
           <p:cNvPr id="2" name="Title 1"/>
@@ -17635,30 +18455,6 @@
           </a:p>
         </p:txBody>
       </p:sp>
-      <p:pic>
-        <p:nvPicPr>
-          <p:cNvPr id="5" name="Picture 4"/>
-          <p:cNvPicPr>
-            <a:picLocks noChangeAspect="1"/>
-          </p:cNvPicPr>
-          <p:nvPr/>
-        </p:nvPicPr>
-        <p:blipFill>
-          <a:blip r:embed="rId3"/>
-          <a:stretch>
-            <a:fillRect/>
-          </a:stretch>
-        </p:blipFill>
-        <p:spPr>
-          <a:xfrm>
-            <a:off x="600387" y="5078097"/>
-            <a:ext cx="2196413" cy="1688471"/>
-          </a:xfrm>
-          <a:prstGeom prst="rect">
-            <a:avLst/>
-          </a:prstGeom>
-        </p:spPr>
-      </p:pic>
       <p:sp>
         <p:nvSpPr>
           <p:cNvPr id="6" name="TextBox 5"/>
@@ -17733,30 +18529,6 @@
           </a:p>
         </p:txBody>
       </p:sp>
-      <p:pic>
-        <p:nvPicPr>
-          <p:cNvPr id="7" name="Picture 6"/>
-          <p:cNvPicPr>
-            <a:picLocks noChangeAspect="1"/>
-          </p:cNvPicPr>
-          <p:nvPr/>
-        </p:nvPicPr>
-        <p:blipFill>
-          <a:blip r:embed="rId4"/>
-          <a:stretch>
-            <a:fillRect/>
-          </a:stretch>
-        </p:blipFill>
-        <p:spPr>
-          <a:xfrm>
-            <a:off x="3305175" y="1847523"/>
-            <a:ext cx="8814401" cy="4919045"/>
-          </a:xfrm>
-          <a:prstGeom prst="rect">
-            <a:avLst/>
-          </a:prstGeom>
-        </p:spPr>
-      </p:pic>
       <p:sp>
         <p:nvSpPr>
           <p:cNvPr id="8" name="TextBox 7"/>
@@ -17796,228 +18568,13 @@
   <p:clrMapOvr>
     <a:masterClrMapping/>
   </p:clrMapOvr>
-</p:sld>
-</file>
-
-<file path=ppt/slides/slide9.xml><?xml version="1.0" encoding="utf-8"?>
-<p:sld xmlns:a="http://schemas.openxmlformats.org/drawingml/2006/main" xmlns:r="http://schemas.openxmlformats.org/officeDocument/2006/relationships" xmlns:p="http://schemas.openxmlformats.org/presentationml/2006/main">
-  <p:cSld>
-    <p:spTree>
-      <p:nvGrpSpPr>
-        <p:cNvPr id="1" name="">
-          <a:extLst>
-            <a:ext uri="{FF2B5EF4-FFF2-40B4-BE49-F238E27FC236}">
-              <a16:creationId xmlns:a16="http://schemas.microsoft.com/office/drawing/2014/main" id="{7A3A9F39-394E-5437-993F-29D2F2093B00}"/>
-            </a:ext>
-          </a:extLst>
-        </p:cNvPr>
-        <p:cNvGrpSpPr/>
-        <p:nvPr/>
-      </p:nvGrpSpPr>
-      <p:grpSpPr>
-        <a:xfrm>
-          <a:off x="0" y="0"/>
-          <a:ext cx="0" cy="0"/>
-          <a:chOff x="0" y="0"/>
-          <a:chExt cx="0" cy="0"/>
-        </a:xfrm>
-      </p:grpSpPr>
-      <p:pic>
-        <p:nvPicPr>
-          <p:cNvPr id="7" name="Picture 6"/>
-          <p:cNvPicPr>
-            <a:picLocks noChangeAspect="1"/>
-          </p:cNvPicPr>
-          <p:nvPr/>
-        </p:nvPicPr>
-        <p:blipFill>
-          <a:blip r:embed="rId3"/>
-          <a:stretch>
-            <a:fillRect/>
-          </a:stretch>
-        </p:blipFill>
-        <p:spPr>
-          <a:xfrm>
-            <a:off x="3314700" y="2354870"/>
-            <a:ext cx="8678897" cy="4350305"/>
-          </a:xfrm>
-          <a:prstGeom prst="rect">
-            <a:avLst/>
-          </a:prstGeom>
-        </p:spPr>
-      </p:pic>
-      <p:sp>
-        <p:nvSpPr>
-          <p:cNvPr id="2" name="Title 1">
-            <a:extLst>
-              <a:ext uri="{FF2B5EF4-FFF2-40B4-BE49-F238E27FC236}">
-                <a16:creationId xmlns:a16="http://schemas.microsoft.com/office/drawing/2014/main" id="{554F77EA-2B30-AFDC-1349-3C58C2AB9061}"/>
-              </a:ext>
-            </a:extLst>
-          </p:cNvPr>
-          <p:cNvSpPr>
-            <a:spLocks noGrp="1"/>
-          </p:cNvSpPr>
-          <p:nvPr>
-            <p:ph type="title"/>
-          </p:nvPr>
-        </p:nvSpPr>
-        <p:spPr/>
-        <p:txBody>
-          <a:bodyPr/>
-          <a:lstStyle/>
-          <a:p>
-            <a:r>
-              <a:rPr lang="en-US"/>
-              <a:t>Design Alternative – Alt-C: Move </a:t>
-            </a:r>
-            <a:r>
-              <a:rPr lang="en-US" err="1"/>
-              <a:t>RemoteDiag</a:t>
-            </a:r>
-            <a:r>
-              <a:rPr lang="en-US"/>
-              <a:t> + Proxy</a:t>
-            </a:r>
-          </a:p>
-        </p:txBody>
-      </p:sp>
-      <p:sp>
-        <p:nvSpPr>
-          <p:cNvPr id="3" name="Content Placeholder 2">
-            <a:extLst>
-              <a:ext uri="{FF2B5EF4-FFF2-40B4-BE49-F238E27FC236}">
-                <a16:creationId xmlns:a16="http://schemas.microsoft.com/office/drawing/2014/main" id="{64FB7A4A-CF56-C0BD-9AB9-923B2D043291}"/>
-              </a:ext>
-            </a:extLst>
-          </p:cNvPr>
-          <p:cNvSpPr>
-            <a:spLocks noGrp="1"/>
-          </p:cNvSpPr>
-          <p:nvPr>
-            <p:ph idx="1"/>
-          </p:nvPr>
-        </p:nvSpPr>
-        <p:spPr>
-          <a:xfrm>
-            <a:off x="160867" y="990599"/>
-            <a:ext cx="11825921" cy="1219201"/>
-          </a:xfrm>
-        </p:spPr>
-        <p:txBody>
-          <a:bodyPr>
-            <a:normAutofit fontScale="92500" lnSpcReduction="20000"/>
-          </a:bodyPr>
-          <a:lstStyle/>
-          <a:p>
-            <a:r>
-              <a:rPr lang="en-US" sz="1800"/>
-              <a:t>Move RemoteDiag into the IP container.</a:t>
-            </a:r>
-          </a:p>
-          <a:p>
-            <a:r>
-              <a:rPr lang="en-US" sz="1800"/>
-              <a:t>Introduce a </a:t>
-            </a:r>
-            <a:r>
-              <a:rPr lang="en-US" sz="1800" b="1"/>
-              <a:t>new RemoteDiagProxy (RDP) module</a:t>
-            </a:r>
-            <a:r>
-              <a:rPr lang="en-US" sz="1800"/>
-              <a:t> in the EP that acts as a </a:t>
-            </a:r>
-            <a:r>
-              <a:rPr lang="en-US" sz="1800" b="1"/>
-              <a:t>transparent proxy</a:t>
-            </a:r>
-            <a:r>
-              <a:rPr lang="en-US" sz="1800"/>
-              <a:t>. </a:t>
-            </a:r>
-          </a:p>
-          <a:p>
-            <a:r>
-              <a:rPr lang="en-US" sz="1800"/>
-              <a:t>EP modules continue to interact with RDP using their existing interface</a:t>
-            </a:r>
-          </a:p>
-          <a:p>
-            <a:r>
-              <a:rPr lang="en-US" sz="1800"/>
-              <a:t>RDP forwards requests to RemoteDiag via UDS socket channel.</a:t>
-            </a:r>
-            <a:endParaRPr lang="en-US" sz="1800" b="1"/>
-          </a:p>
-          <a:p>
-            <a:endParaRPr lang="en-US" sz="1800"/>
-          </a:p>
-        </p:txBody>
-      </p:sp>
-      <p:sp>
-        <p:nvSpPr>
-          <p:cNvPr id="6" name="TextBox 5"/>
-          <p:cNvSpPr txBox="1"/>
-          <p:nvPr/>
-        </p:nvSpPr>
-        <p:spPr>
-          <a:xfrm>
-            <a:off x="6781612" y="6335843"/>
-            <a:ext cx="643125" cy="369332"/>
-          </a:xfrm>
-          <a:prstGeom prst="rect">
-            <a:avLst/>
-          </a:prstGeom>
-          <a:noFill/>
-        </p:spPr>
-        <p:txBody>
-          <a:bodyPr wrap="none" rtlCol="0">
-            <a:spAutoFit/>
-          </a:bodyPr>
-          <a:lstStyle/>
-          <a:p>
-            <a:r>
-              <a:rPr lang="en-US"/>
-              <a:t>Alt-C</a:t>
-            </a:r>
-          </a:p>
-        </p:txBody>
-      </p:sp>
-      <p:pic>
-        <p:nvPicPr>
-          <p:cNvPr id="8" name="Picture 7"/>
-          <p:cNvPicPr>
-            <a:picLocks noChangeAspect="1"/>
-          </p:cNvPicPr>
-          <p:nvPr/>
-        </p:nvPicPr>
-        <p:blipFill>
-          <a:blip r:embed="rId4"/>
-          <a:stretch>
-            <a:fillRect/>
-          </a:stretch>
-        </p:blipFill>
-        <p:spPr>
-          <a:xfrm>
-            <a:off x="600075" y="5083804"/>
-            <a:ext cx="2196413" cy="1688471"/>
-          </a:xfrm>
-          <a:prstGeom prst="rect">
-            <a:avLst/>
-          </a:prstGeom>
-        </p:spPr>
-      </p:pic>
-    </p:spTree>
-    <p:extLst>
-      <p:ext uri="{BB962C8B-B14F-4D97-AF65-F5344CB8AC3E}">
-        <p14:creationId xmlns:p14="http://schemas.microsoft.com/office/powerpoint/2010/main" val="4181377362"/>
-      </p:ext>
-    </p:extLst>
-  </p:cSld>
-  <p:clrMapOvr>
-    <a:masterClrMapping/>
-  </p:clrMapOvr>
+  <p:timing>
+    <p:tnLst>
+      <p:par>
+        <p:cTn id="1" dur="indefinite" restart="never" nodeType="tmRoot"/>
+      </p:par>
+    </p:tnLst>
+  </p:timing>
 </p:sld>
 </file>
 

--- a/design/FE_phi.vu_Design of Secure Remote Diag on Container Separation Architecture_3rd.pptx
+++ b/design/FE_phi.vu_Design of Secure Remote Diag on Container Separation Architecture_3rd.pptx
@@ -225,7 +225,7 @@
           <a:p>
             <a:fld id="{341C17E2-92C1-406A-80C1-BA1B838099E9}" type="datetimeFigureOut">
               <a:rPr lang="en-US" smtClean="0"/>
-              <a:t>9/29/2026</a:t>
+              <a:t>9/30/2026</a:t>
             </a:fld>
             <a:endParaRPr lang="en-US"/>
           </a:p>
@@ -1167,7 +1167,7 @@
           <a:p>
             <a:fld id="{B934B22C-8C05-4817-830F-8B9F9DEAE546}" type="datetimeFigureOut">
               <a:rPr lang="en-US" smtClean="0"/>
-              <a:t>9/29/2026</a:t>
+              <a:t>9/30/2026</a:t>
             </a:fld>
             <a:endParaRPr lang="en-US"/>
           </a:p>
@@ -1335,7 +1335,7 @@
           <a:p>
             <a:fld id="{B934B22C-8C05-4817-830F-8B9F9DEAE546}" type="datetimeFigureOut">
               <a:rPr lang="en-US" smtClean="0"/>
-              <a:t>9/29/2026</a:t>
+              <a:t>9/30/2026</a:t>
             </a:fld>
             <a:endParaRPr lang="en-US"/>
           </a:p>
@@ -1513,7 +1513,7 @@
           <a:p>
             <a:fld id="{B934B22C-8C05-4817-830F-8B9F9DEAE546}" type="datetimeFigureOut">
               <a:rPr lang="en-US" smtClean="0"/>
-              <a:t>9/29/2026</a:t>
+              <a:t>9/30/2026</a:t>
             </a:fld>
             <a:endParaRPr lang="en-US"/>
           </a:p>
@@ -1707,7 +1707,7 @@
           <a:p>
             <a:fld id="{B934B22C-8C05-4817-830F-8B9F9DEAE546}" type="datetimeFigureOut">
               <a:rPr lang="en-US" smtClean="0"/>
-              <a:t>9/29/2026</a:t>
+              <a:t>9/30/2026</a:t>
             </a:fld>
             <a:endParaRPr lang="en-US"/>
           </a:p>
@@ -1760,7 +1760,7 @@
           <p:cNvPr id="7" name="그림 5" descr="백색바탕.png">
             <a:extLst>
               <a:ext uri="{FF2B5EF4-FFF2-40B4-BE49-F238E27FC236}">
-                <a16:creationId xmlns="" xmlns:a16="http://schemas.microsoft.com/office/drawing/2014/main" id="{28873918-42A2-05FA-4A84-F17869DE34CF}"/>
+                <a16:creationId xmlns:a16="http://schemas.microsoft.com/office/drawing/2014/main" xmlns="" id="{28873918-42A2-05FA-4A84-F17869DE34CF}"/>
               </a:ext>
             </a:extLst>
           </p:cNvPr>
@@ -2012,7 +2012,7 @@
           <a:p>
             <a:fld id="{B934B22C-8C05-4817-830F-8B9F9DEAE546}" type="datetimeFigureOut">
               <a:rPr lang="en-US" smtClean="0"/>
-              <a:t>9/29/2026</a:t>
+              <a:t>9/30/2026</a:t>
             </a:fld>
             <a:endParaRPr lang="en-US"/>
           </a:p>
@@ -2241,7 +2241,7 @@
           <a:p>
             <a:fld id="{B934B22C-8C05-4817-830F-8B9F9DEAE546}" type="datetimeFigureOut">
               <a:rPr lang="en-US" smtClean="0"/>
-              <a:t>9/29/2026</a:t>
+              <a:t>9/30/2026</a:t>
             </a:fld>
             <a:endParaRPr lang="en-US"/>
           </a:p>
@@ -2605,7 +2605,7 @@
           <a:p>
             <a:fld id="{B934B22C-8C05-4817-830F-8B9F9DEAE546}" type="datetimeFigureOut">
               <a:rPr lang="en-US" smtClean="0"/>
-              <a:t>9/29/2026</a:t>
+              <a:t>9/30/2026</a:t>
             </a:fld>
             <a:endParaRPr lang="en-US"/>
           </a:p>
@@ -2722,7 +2722,7 @@
           <a:p>
             <a:fld id="{B934B22C-8C05-4817-830F-8B9F9DEAE546}" type="datetimeFigureOut">
               <a:rPr lang="en-US" smtClean="0"/>
-              <a:t>9/29/2026</a:t>
+              <a:t>9/30/2026</a:t>
             </a:fld>
             <a:endParaRPr lang="en-US"/>
           </a:p>
@@ -2817,7 +2817,7 @@
           <a:p>
             <a:fld id="{B934B22C-8C05-4817-830F-8B9F9DEAE546}" type="datetimeFigureOut">
               <a:rPr lang="en-US" smtClean="0"/>
-              <a:t>9/29/2026</a:t>
+              <a:t>9/30/2026</a:t>
             </a:fld>
             <a:endParaRPr lang="en-US"/>
           </a:p>
@@ -3092,7 +3092,7 @@
           <a:p>
             <a:fld id="{B934B22C-8C05-4817-830F-8B9F9DEAE546}" type="datetimeFigureOut">
               <a:rPr lang="en-US" smtClean="0"/>
-              <a:t>9/29/2026</a:t>
+              <a:t>9/30/2026</a:t>
             </a:fld>
             <a:endParaRPr lang="en-US"/>
           </a:p>
@@ -3344,7 +3344,7 @@
           <a:p>
             <a:fld id="{B934B22C-8C05-4817-830F-8B9F9DEAE546}" type="datetimeFigureOut">
               <a:rPr lang="en-US" smtClean="0"/>
-              <a:t>9/29/2026</a:t>
+              <a:t>9/30/2026</a:t>
             </a:fld>
             <a:endParaRPr lang="en-US"/>
           </a:p>
@@ -3555,7 +3555,7 @@
           <a:p>
             <a:fld id="{B934B22C-8C05-4817-830F-8B9F9DEAE546}" type="datetimeFigureOut">
               <a:rPr lang="en-US" smtClean="0"/>
-              <a:t>9/29/2026</a:t>
+              <a:t>9/30/2026</a:t>
             </a:fld>
             <a:endParaRPr lang="en-US"/>
           </a:p>
@@ -3644,7 +3644,7 @@
           <p:cNvPr id="8" name="TextBox 7">
             <a:extLst>
               <a:ext uri="{FF2B5EF4-FFF2-40B4-BE49-F238E27FC236}">
-                <a16:creationId xmlns="" xmlns:a16="http://schemas.microsoft.com/office/drawing/2014/main" id="{7DC87BF5-B759-FAAB-FE6D-F0E5F640800D}"/>
+                <a16:creationId xmlns:a16="http://schemas.microsoft.com/office/drawing/2014/main" xmlns="" id="{7DC87BF5-B759-FAAB-FE6D-F0E5F640800D}"/>
               </a:ext>
             </a:extLst>
           </p:cNvPr>
@@ -3652,7 +3652,7 @@
           <p:nvPr userDrawn="1">
             <p:extLst>
               <p:ext uri="{1162E1C5-73C7-4A58-AE30-91384D911F3F}">
-                <p184:classification xmlns="" xmlns:p184="http://schemas.microsoft.com/office/powerpoint/2018/4/main" val="hdr"/>
+                <p184:classification xmlns:p184="http://schemas.microsoft.com/office/powerpoint/2018/4/main" xmlns="" val="hdr"/>
               </p:ext>
             </p:extLst>
           </p:nvPr>
@@ -4117,7 +4117,7 @@
         <p:cNvPr id="1" name="">
           <a:extLst>
             <a:ext uri="{FF2B5EF4-FFF2-40B4-BE49-F238E27FC236}">
-              <a16:creationId xmlns="" xmlns:a16="http://schemas.microsoft.com/office/drawing/2014/main" id="{7A3A9F39-394E-5437-993F-29D2F2093B00}"/>
+              <a16:creationId xmlns:a16="http://schemas.microsoft.com/office/drawing/2014/main" xmlns="" id="{7A3A9F39-394E-5437-993F-29D2F2093B00}"/>
             </a:ext>
           </a:extLst>
         </p:cNvPr>
@@ -4161,7 +4161,7 @@
           <p:cNvPr id="2" name="Title 1">
             <a:extLst>
               <a:ext uri="{FF2B5EF4-FFF2-40B4-BE49-F238E27FC236}">
-                <a16:creationId xmlns="" xmlns:a16="http://schemas.microsoft.com/office/drawing/2014/main" id="{554F77EA-2B30-AFDC-1349-3C58C2AB9061}"/>
+                <a16:creationId xmlns:a16="http://schemas.microsoft.com/office/drawing/2014/main" xmlns="" id="{554F77EA-2B30-AFDC-1349-3C58C2AB9061}"/>
               </a:ext>
             </a:extLst>
           </p:cNvPr>
@@ -4197,7 +4197,7 @@
           <p:cNvPr id="3" name="Content Placeholder 2">
             <a:extLst>
               <a:ext uri="{FF2B5EF4-FFF2-40B4-BE49-F238E27FC236}">
-                <a16:creationId xmlns="" xmlns:a16="http://schemas.microsoft.com/office/drawing/2014/main" id="{64FB7A4A-CF56-C0BD-9AB9-923B2D043291}"/>
+                <a16:creationId xmlns:a16="http://schemas.microsoft.com/office/drawing/2014/main" xmlns="" id="{64FB7A4A-CF56-C0BD-9AB9-923B2D043291}"/>
               </a:ext>
             </a:extLst>
           </p:cNvPr>
@@ -4466,7 +4466,7 @@
           <p:cNvPr id="7" name="Table 6">
             <a:extLst>
               <a:ext uri="{FF2B5EF4-FFF2-40B4-BE49-F238E27FC236}">
-                <a16:creationId xmlns="" xmlns:a16="http://schemas.microsoft.com/office/drawing/2014/main" id="{6C8AAA51-C203-CD8B-4B02-DE7401134C21}"/>
+                <a16:creationId xmlns:a16="http://schemas.microsoft.com/office/drawing/2014/main" xmlns="" id="{6C8AAA51-C203-CD8B-4B02-DE7401134C21}"/>
               </a:ext>
             </a:extLst>
           </p:cNvPr>
@@ -4495,28 +4495,28 @@
                 <a:gridCol w="1149790">
                   <a:extLst>
                     <a:ext uri="{9D8B030D-6E8A-4147-A177-3AD203B41FA5}">
-                      <a16:colId xmlns="" xmlns:a16="http://schemas.microsoft.com/office/drawing/2014/main" val="20000"/>
+                      <a16:colId xmlns:a16="http://schemas.microsoft.com/office/drawing/2014/main" xmlns="" val="20000"/>
                     </a:ext>
                   </a:extLst>
                 </a:gridCol>
                 <a:gridCol w="3633457">
                   <a:extLst>
                     <a:ext uri="{9D8B030D-6E8A-4147-A177-3AD203B41FA5}">
-                      <a16:colId xmlns="" xmlns:a16="http://schemas.microsoft.com/office/drawing/2014/main" val="20001"/>
+                      <a16:colId xmlns:a16="http://schemas.microsoft.com/office/drawing/2014/main" xmlns="" val="20001"/>
                     </a:ext>
                   </a:extLst>
                 </a:gridCol>
                 <a:gridCol w="3781331">
                   <a:extLst>
                     <a:ext uri="{9D8B030D-6E8A-4147-A177-3AD203B41FA5}">
-                      <a16:colId xmlns="" xmlns:a16="http://schemas.microsoft.com/office/drawing/2014/main" val="2530683369"/>
+                      <a16:colId xmlns:a16="http://schemas.microsoft.com/office/drawing/2014/main" xmlns="" val="2530683369"/>
                     </a:ext>
                   </a:extLst>
                 </a:gridCol>
                 <a:gridCol w="3485583">
                   <a:extLst>
                     <a:ext uri="{9D8B030D-6E8A-4147-A177-3AD203B41FA5}">
-                      <a16:colId xmlns="" xmlns:a16="http://schemas.microsoft.com/office/drawing/2014/main" val="20002"/>
+                      <a16:colId xmlns:a16="http://schemas.microsoft.com/office/drawing/2014/main" xmlns="" val="20002"/>
                     </a:ext>
                   </a:extLst>
                 </a:gridCol>
@@ -4855,7 +4855,7 @@
                 </a:tc>
                 <a:extLst>
                   <a:ext uri="{0D108BD9-81ED-4DB2-BD59-A6C34878D82A}">
-                    <a16:rowId xmlns="" xmlns:a16="http://schemas.microsoft.com/office/drawing/2014/main" val="10000"/>
+                    <a16:rowId xmlns:a16="http://schemas.microsoft.com/office/drawing/2014/main" xmlns="" val="10000"/>
                   </a:ext>
                 </a:extLst>
               </a:tr>
@@ -5306,7 +5306,7 @@
                 </a:tc>
                 <a:extLst>
                   <a:ext uri="{0D108BD9-81ED-4DB2-BD59-A6C34878D82A}">
-                    <a16:rowId xmlns="" xmlns:a16="http://schemas.microsoft.com/office/drawing/2014/main" val="10001"/>
+                    <a16:rowId xmlns:a16="http://schemas.microsoft.com/office/drawing/2014/main" xmlns="" val="10001"/>
                   </a:ext>
                 </a:extLst>
               </a:tr>
@@ -5781,7 +5781,7 @@
                 </a:tc>
                 <a:extLst>
                   <a:ext uri="{0D108BD9-81ED-4DB2-BD59-A6C34878D82A}">
-                    <a16:rowId xmlns="" xmlns:a16="http://schemas.microsoft.com/office/drawing/2014/main" val="10002"/>
+                    <a16:rowId xmlns:a16="http://schemas.microsoft.com/office/drawing/2014/main" xmlns="" val="10002"/>
                   </a:ext>
                 </a:extLst>
               </a:tr>
@@ -6313,7 +6313,7 @@
                 </a:tc>
                 <a:extLst>
                   <a:ext uri="{0D108BD9-81ED-4DB2-BD59-A6C34878D82A}">
-                    <a16:rowId xmlns="" xmlns:a16="http://schemas.microsoft.com/office/drawing/2014/main" val="10003"/>
+                    <a16:rowId xmlns:a16="http://schemas.microsoft.com/office/drawing/2014/main" xmlns="" val="10003"/>
                   </a:ext>
                 </a:extLst>
               </a:tr>
@@ -6711,7 +6711,7 @@
                 </a:tc>
                 <a:extLst>
                   <a:ext uri="{0D108BD9-81ED-4DB2-BD59-A6C34878D82A}">
-                    <a16:rowId xmlns="" xmlns:a16="http://schemas.microsoft.com/office/drawing/2014/main" val="10004"/>
+                    <a16:rowId xmlns:a16="http://schemas.microsoft.com/office/drawing/2014/main" xmlns="" val="10004"/>
                   </a:ext>
                 </a:extLst>
               </a:tr>
@@ -7164,7 +7164,7 @@
                 </a:tc>
                 <a:extLst>
                   <a:ext uri="{0D108BD9-81ED-4DB2-BD59-A6C34878D82A}">
-                    <a16:rowId xmlns="" xmlns:a16="http://schemas.microsoft.com/office/drawing/2014/main" val="10005"/>
+                    <a16:rowId xmlns:a16="http://schemas.microsoft.com/office/drawing/2014/main" xmlns="" val="10005"/>
                   </a:ext>
                 </a:extLst>
               </a:tr>
@@ -7436,7 +7436,7 @@
                 </a:tc>
                 <a:extLst>
                   <a:ext uri="{0D108BD9-81ED-4DB2-BD59-A6C34878D82A}">
-                    <a16:rowId xmlns="" xmlns:a16="http://schemas.microsoft.com/office/drawing/2014/main" val="10006"/>
+                    <a16:rowId xmlns:a16="http://schemas.microsoft.com/office/drawing/2014/main" xmlns="" val="10006"/>
                   </a:ext>
                 </a:extLst>
               </a:tr>
@@ -7519,7 +7519,7 @@
           <p:cNvPr id="9" name="Picture 2" descr="체크 표시 클립 아트. 무료 다운로드. | Creazilla">
             <a:extLst>
               <a:ext uri="{FF2B5EF4-FFF2-40B4-BE49-F238E27FC236}">
-                <a16:creationId xmlns="" xmlns:a16="http://schemas.microsoft.com/office/drawing/2014/main" id="{07DB846E-8DD2-9BB2-88FF-8A7E0BD6CA84}"/>
+                <a16:creationId xmlns:a16="http://schemas.microsoft.com/office/drawing/2014/main" xmlns="" id="{07DB846E-8DD2-9BB2-88FF-8A7E0BD6CA84}"/>
               </a:ext>
             </a:extLst>
           </p:cNvPr>
@@ -7603,7 +7603,7 @@
           <p:cNvPr id="2" name="Title 1">
             <a:extLst>
               <a:ext uri="{FF2B5EF4-FFF2-40B4-BE49-F238E27FC236}">
-                <a16:creationId xmlns="" xmlns:a16="http://schemas.microsoft.com/office/drawing/2014/main" id="{4CA99A5D-DD39-1919-FD58-65B06FAFDE0F}"/>
+                <a16:creationId xmlns:a16="http://schemas.microsoft.com/office/drawing/2014/main" xmlns="" id="{4CA99A5D-DD39-1919-FD58-65B06FAFDE0F}"/>
               </a:ext>
             </a:extLst>
           </p:cNvPr>
@@ -7643,7 +7643,7 @@
           <p:cNvPr id="5" name="Content Placeholder 4">
             <a:extLst>
               <a:ext uri="{FF2B5EF4-FFF2-40B4-BE49-F238E27FC236}">
-                <a16:creationId xmlns="" xmlns:a16="http://schemas.microsoft.com/office/drawing/2014/main" id="{20EC3E71-48BE-FEC7-88E8-47DB96F90E14}"/>
+                <a16:creationId xmlns:a16="http://schemas.microsoft.com/office/drawing/2014/main" xmlns="" id="{20EC3E71-48BE-FEC7-88E8-47DB96F90E14}"/>
               </a:ext>
             </a:extLst>
           </p:cNvPr>
@@ -7718,7 +7718,7 @@
           <p:cNvPr id="2" name="Title 1">
             <a:extLst>
               <a:ext uri="{FF2B5EF4-FFF2-40B4-BE49-F238E27FC236}">
-                <a16:creationId xmlns="" xmlns:a16="http://schemas.microsoft.com/office/drawing/2014/main" id="{B643E24B-1160-F6BA-5A0C-DB3B3DD9CD8A}"/>
+                <a16:creationId xmlns:a16="http://schemas.microsoft.com/office/drawing/2014/main" xmlns="" id="{B643E24B-1160-F6BA-5A0C-DB3B3DD9CD8A}"/>
               </a:ext>
             </a:extLst>
           </p:cNvPr>
@@ -7750,7 +7750,7 @@
           <p:cNvPr id="5" name="Content Placeholder 4">
             <a:extLst>
               <a:ext uri="{FF2B5EF4-FFF2-40B4-BE49-F238E27FC236}">
-                <a16:creationId xmlns="" xmlns:a16="http://schemas.microsoft.com/office/drawing/2014/main" id="{3D875D97-63D9-E3DF-760D-4A57DB7A20FB}"/>
+                <a16:creationId xmlns:a16="http://schemas.microsoft.com/office/drawing/2014/main" xmlns="" id="{3D875D97-63D9-E3DF-760D-4A57DB7A20FB}"/>
               </a:ext>
             </a:extLst>
           </p:cNvPr>
@@ -8279,7 +8279,7 @@
           <p:cNvPr id="2" name="Title 1">
             <a:extLst>
               <a:ext uri="{FF2B5EF4-FFF2-40B4-BE49-F238E27FC236}">
-                <a16:creationId xmlns="" xmlns:a16="http://schemas.microsoft.com/office/drawing/2014/main" id="{65C86E6E-BE59-7A7B-6BE9-16A0A094C3D6}"/>
+                <a16:creationId xmlns:a16="http://schemas.microsoft.com/office/drawing/2014/main" xmlns="" id="{65C86E6E-BE59-7A7B-6BE9-16A0A094C3D6}"/>
               </a:ext>
             </a:extLst>
           </p:cNvPr>
@@ -8307,7 +8307,7 @@
           <p:cNvPr id="7" name="Content Placeholder 6">
             <a:extLst>
               <a:ext uri="{FF2B5EF4-FFF2-40B4-BE49-F238E27FC236}">
-                <a16:creationId xmlns="" xmlns:a16="http://schemas.microsoft.com/office/drawing/2014/main" id="{AD4A4EC6-9BB8-2849-8D75-05C44DE9A384}"/>
+                <a16:creationId xmlns:a16="http://schemas.microsoft.com/office/drawing/2014/main" xmlns="" id="{AD4A4EC6-9BB8-2849-8D75-05C44DE9A384}"/>
               </a:ext>
             </a:extLst>
           </p:cNvPr>
@@ -8339,7 +8339,7 @@
           <p:cNvPr id="9" name="Picture 8">
             <a:extLst>
               <a:ext uri="{FF2B5EF4-FFF2-40B4-BE49-F238E27FC236}">
-                <a16:creationId xmlns="" xmlns:a16="http://schemas.microsoft.com/office/drawing/2014/main" id="{C985C62C-76E5-84A1-DEF1-FC486F2BF179}"/>
+                <a16:creationId xmlns:a16="http://schemas.microsoft.com/office/drawing/2014/main" xmlns="" id="{C985C62C-76E5-84A1-DEF1-FC486F2BF179}"/>
               </a:ext>
             </a:extLst>
           </p:cNvPr>
@@ -13799,7 +13799,7 @@
           <p:cNvPr id="2" name="Title 1">
             <a:extLst>
               <a:ext uri="{FF2B5EF4-FFF2-40B4-BE49-F238E27FC236}">
-                <a16:creationId xmlns="" xmlns:a16="http://schemas.microsoft.com/office/drawing/2014/main" id="{F11C1235-51B4-A8A0-3A61-9C767F437001}"/>
+                <a16:creationId xmlns:a16="http://schemas.microsoft.com/office/drawing/2014/main" xmlns="" id="{F11C1235-51B4-A8A0-3A61-9C767F437001}"/>
               </a:ext>
             </a:extLst>
           </p:cNvPr>
@@ -13839,7 +13839,7 @@
           <p:cNvPr id="7" name="Content Placeholder 6">
             <a:extLst>
               <a:ext uri="{FF2B5EF4-FFF2-40B4-BE49-F238E27FC236}">
-                <a16:creationId xmlns="" xmlns:a16="http://schemas.microsoft.com/office/drawing/2014/main" id="{4A0E7BDD-2CF4-321B-0637-D9AF63CAB0BF}"/>
+                <a16:creationId xmlns:a16="http://schemas.microsoft.com/office/drawing/2014/main" xmlns="" id="{4A0E7BDD-2CF4-321B-0637-D9AF63CAB0BF}"/>
               </a:ext>
             </a:extLst>
           </p:cNvPr>
@@ -13872,11 +13872,7 @@
             </a:r>
             <a:r>
               <a:rPr lang="en-US" sz="1800" smtClean="0"/>
-              <a:t>: </a:t>
-            </a:r>
-            <a:r>
-              <a:rPr lang="en-US" sz="1800" smtClean="0"/>
-              <a:t>a telematics platform providing connected vehicle services, including </a:t>
+              <a:t>: a telematics platform providing connected vehicle services, including </a:t>
             </a:r>
             <a:r>
               <a:rPr lang="en-US" sz="1800" b="1" smtClean="0"/>
@@ -13890,7 +13886,6 @@
               <a:rPr lang="en-US" sz="1800" smtClean="0"/>
               <a:t>from OEM server.</a:t>
             </a:r>
-            <a:endParaRPr lang="en-US" sz="1800" smtClean="0"/>
           </a:p>
           <a:p>
             <a:r>
@@ -13899,11 +13894,7 @@
             </a:r>
             <a:r>
               <a:rPr lang="en-US" sz="1800"/>
-              <a:t>communication and OTA updates through the Internal CAN </a:t>
-            </a:r>
-            <a:r>
-              <a:rPr lang="en-US" sz="1800"/>
-              <a:t>bus</a:t>
+              <a:t>communication and OTA updates through the Internal CAN bus</a:t>
             </a:r>
             <a:r>
               <a:rPr lang="en-US" sz="1800" smtClean="0"/>
@@ -13921,11 +13912,7 @@
             </a:r>
             <a:r>
               <a:rPr lang="en-US" sz="1800"/>
-              <a:t>deployment model</a:t>
-            </a:r>
-            <a:r>
-              <a:rPr lang="en-US" sz="1800"/>
-              <a:t>, </a:t>
+              <a:t>deployment model, </a:t>
             </a:r>
             <a:r>
               <a:rPr lang="en-US" sz="1800" smtClean="0"/>
@@ -13933,11 +13920,7 @@
             </a:r>
             <a:r>
               <a:rPr lang="en-US" sz="1800"/>
-              <a:t>components running in </a:t>
-            </a:r>
-            <a:r>
-              <a:rPr lang="en-US" sz="1800"/>
-              <a:t>a </a:t>
+              <a:t>components running in a </a:t>
             </a:r>
             <a:r>
               <a:rPr lang="en-US" sz="1800" smtClean="0"/>
@@ -14266,7 +14249,7 @@
           <p:cNvPr id="2" name="Title 1">
             <a:extLst>
               <a:ext uri="{FF2B5EF4-FFF2-40B4-BE49-F238E27FC236}">
-                <a16:creationId xmlns="" xmlns:a16="http://schemas.microsoft.com/office/drawing/2014/main" id="{F11C1235-51B4-A8A0-3A61-9C767F437001}"/>
+                <a16:creationId xmlns:a16="http://schemas.microsoft.com/office/drawing/2014/main" xmlns="" id="{F11C1235-51B4-A8A0-3A61-9C767F437001}"/>
               </a:ext>
             </a:extLst>
           </p:cNvPr>
@@ -14306,7 +14289,7 @@
           <p:cNvPr id="7" name="Content Placeholder 6">
             <a:extLst>
               <a:ext uri="{FF2B5EF4-FFF2-40B4-BE49-F238E27FC236}">
-                <a16:creationId xmlns="" xmlns:a16="http://schemas.microsoft.com/office/drawing/2014/main" id="{4A0E7BDD-2CF4-321B-0637-D9AF63CAB0BF}"/>
+                <a16:creationId xmlns:a16="http://schemas.microsoft.com/office/drawing/2014/main" xmlns="" id="{4A0E7BDD-2CF4-321B-0637-D9AF63CAB0BF}"/>
               </a:ext>
             </a:extLst>
           </p:cNvPr>
@@ -14339,11 +14322,7 @@
             </a:r>
             <a:r>
               <a:rPr lang="en-US" sz="1800" smtClean="0"/>
-              <a:t>: </a:t>
-            </a:r>
-            <a:r>
-              <a:rPr lang="en-US" sz="1800" smtClean="0"/>
-              <a:t>a telematics platform providing connected vehicle services, including </a:t>
+              <a:t>: a telematics platform providing connected vehicle services, including </a:t>
             </a:r>
             <a:r>
               <a:rPr lang="en-US" sz="1800" b="1" smtClean="0"/>
@@ -14357,7 +14336,6 @@
               <a:rPr lang="en-US" sz="1800" smtClean="0"/>
               <a:t>from OEM server.</a:t>
             </a:r>
-            <a:endParaRPr lang="en-US" sz="1800" smtClean="0"/>
           </a:p>
           <a:p>
             <a:r>
@@ -14366,11 +14344,7 @@
             </a:r>
             <a:r>
               <a:rPr lang="en-US" sz="1800"/>
-              <a:t>communication and OTA updates through the Internal CAN </a:t>
-            </a:r>
-            <a:r>
-              <a:rPr lang="en-US" sz="1800"/>
-              <a:t>bus</a:t>
+              <a:t>communication and OTA updates through the Internal CAN bus</a:t>
             </a:r>
             <a:r>
               <a:rPr lang="en-US" sz="1800" smtClean="0"/>
@@ -14388,11 +14362,7 @@
             </a:r>
             <a:r>
               <a:rPr lang="en-US" sz="1800"/>
-              <a:t>deployment model</a:t>
-            </a:r>
-            <a:r>
-              <a:rPr lang="en-US" sz="1800"/>
-              <a:t>, </a:t>
+              <a:t>deployment model, </a:t>
             </a:r>
             <a:r>
               <a:rPr lang="en-US" sz="1800" smtClean="0"/>
@@ -14400,11 +14370,7 @@
             </a:r>
             <a:r>
               <a:rPr lang="en-US" sz="1800"/>
-              <a:t>components running in </a:t>
-            </a:r>
-            <a:r>
-              <a:rPr lang="en-US" sz="1800"/>
-              <a:t>a </a:t>
+              <a:t>components running in a </a:t>
             </a:r>
             <a:r>
               <a:rPr lang="en-US" sz="1800" smtClean="0"/>
@@ -14848,7 +14814,7 @@
           <p:cNvPr id="2" name="Title 1">
             <a:extLst>
               <a:ext uri="{FF2B5EF4-FFF2-40B4-BE49-F238E27FC236}">
-                <a16:creationId xmlns="" xmlns:a16="http://schemas.microsoft.com/office/drawing/2014/main" id="{C3585339-B774-DFDC-4DB4-D02F5083DD3E}"/>
+                <a16:creationId xmlns:a16="http://schemas.microsoft.com/office/drawing/2014/main" xmlns="" id="{C3585339-B774-DFDC-4DB4-D02F5083DD3E}"/>
               </a:ext>
             </a:extLst>
           </p:cNvPr>
@@ -14890,7 +14856,7 @@
             <p:cNvPr id="15" name="TextBox 14">
               <a:extLst>
                 <a:ext uri="{FF2B5EF4-FFF2-40B4-BE49-F238E27FC236}">
-                  <a16:creationId xmlns="" xmlns:a16="http://schemas.microsoft.com/office/drawing/2014/main" id="{2477AED6-8D6F-D505-6D7B-78460A03A2E8}"/>
+                  <a16:creationId xmlns:a16="http://schemas.microsoft.com/office/drawing/2014/main" xmlns="" id="{2477AED6-8D6F-D505-6D7B-78460A03A2E8}"/>
                 </a:ext>
               </a:extLst>
             </p:cNvPr>
@@ -15078,7 +15044,7 @@
           <p:cNvPr id="4" name="Content Placeholder 3">
             <a:extLst>
               <a:ext uri="{FF2B5EF4-FFF2-40B4-BE49-F238E27FC236}">
-                <a16:creationId xmlns="" xmlns:a16="http://schemas.microsoft.com/office/drawing/2014/main" id="{E5625E47-EFA5-9C35-32C7-F793664192AF}"/>
+                <a16:creationId xmlns:a16="http://schemas.microsoft.com/office/drawing/2014/main" xmlns="" id="{E5625E47-EFA5-9C35-32C7-F793664192AF}"/>
               </a:ext>
             </a:extLst>
           </p:cNvPr>
@@ -15113,7 +15079,7 @@
           <p:cNvPr id="10" name="Table 9">
             <a:extLst>
               <a:ext uri="{FF2B5EF4-FFF2-40B4-BE49-F238E27FC236}">
-                <a16:creationId xmlns="" xmlns:a16="http://schemas.microsoft.com/office/drawing/2014/main" id="{658A328F-ADBC-7C5F-15DF-73E4DC21B209}"/>
+                <a16:creationId xmlns:a16="http://schemas.microsoft.com/office/drawing/2014/main" xmlns="" id="{658A328F-ADBC-7C5F-15DF-73E4DC21B209}"/>
               </a:ext>
             </a:extLst>
           </p:cNvPr>
@@ -15142,14 +15108,14 @@
                 <a:gridCol w="1298801">
                   <a:extLst>
                     <a:ext uri="{9D8B030D-6E8A-4147-A177-3AD203B41FA5}">
-                      <a16:colId xmlns="" xmlns:a16="http://schemas.microsoft.com/office/drawing/2014/main" val="20000"/>
+                      <a16:colId xmlns:a16="http://schemas.microsoft.com/office/drawing/2014/main" xmlns="" val="20000"/>
                     </a:ext>
                   </a:extLst>
                 </a:gridCol>
                 <a:gridCol w="10483653">
                   <a:extLst>
                     <a:ext uri="{9D8B030D-6E8A-4147-A177-3AD203B41FA5}">
-                      <a16:colId xmlns="" xmlns:a16="http://schemas.microsoft.com/office/drawing/2014/main" val="20001"/>
+                      <a16:colId xmlns:a16="http://schemas.microsoft.com/office/drawing/2014/main" xmlns="" val="20001"/>
                     </a:ext>
                   </a:extLst>
                 </a:gridCol>
@@ -15288,7 +15254,7 @@
                 </a:tc>
                 <a:extLst>
                   <a:ext uri="{0D108BD9-81ED-4DB2-BD59-A6C34878D82A}">
-                    <a16:rowId xmlns="" xmlns:a16="http://schemas.microsoft.com/office/drawing/2014/main" val="10000"/>
+                    <a16:rowId xmlns:a16="http://schemas.microsoft.com/office/drawing/2014/main" xmlns="" val="10000"/>
                   </a:ext>
                 </a:extLst>
               </a:tr>
@@ -15424,7 +15390,7 @@
                 </a:tc>
                 <a:extLst>
                   <a:ext uri="{0D108BD9-81ED-4DB2-BD59-A6C34878D82A}">
-                    <a16:rowId xmlns="" xmlns:a16="http://schemas.microsoft.com/office/drawing/2014/main" val="10001"/>
+                    <a16:rowId xmlns:a16="http://schemas.microsoft.com/office/drawing/2014/main" xmlns="" val="10001"/>
                   </a:ext>
                 </a:extLst>
               </a:tr>
@@ -15572,7 +15538,7 @@
                 </a:tc>
                 <a:extLst>
                   <a:ext uri="{0D108BD9-81ED-4DB2-BD59-A6C34878D82A}">
-                    <a16:rowId xmlns="" xmlns:a16="http://schemas.microsoft.com/office/drawing/2014/main" val="10002"/>
+                    <a16:rowId xmlns:a16="http://schemas.microsoft.com/office/drawing/2014/main" xmlns="" val="10002"/>
                   </a:ext>
                 </a:extLst>
               </a:tr>
@@ -15608,7 +15574,7 @@
         <p:cNvPr id="1" name="">
           <a:extLst>
             <a:ext uri="{FF2B5EF4-FFF2-40B4-BE49-F238E27FC236}">
-              <a16:creationId xmlns="" xmlns:a16="http://schemas.microsoft.com/office/drawing/2014/main" id="{C0816B88-86B3-799E-3A3E-FA919E3E0922}"/>
+              <a16:creationId xmlns:a16="http://schemas.microsoft.com/office/drawing/2014/main" xmlns="" id="{C0816B88-86B3-799E-3A3E-FA919E3E0922}"/>
             </a:ext>
           </a:extLst>
         </p:cNvPr>
@@ -15628,7 +15594,7 @@
           <p:cNvPr id="2" name="Title 1">
             <a:extLst>
               <a:ext uri="{FF2B5EF4-FFF2-40B4-BE49-F238E27FC236}">
-                <a16:creationId xmlns="" xmlns:a16="http://schemas.microsoft.com/office/drawing/2014/main" id="{C36E5815-73D6-DA66-29AA-3BE061A3E84B}"/>
+                <a16:creationId xmlns:a16="http://schemas.microsoft.com/office/drawing/2014/main" xmlns="" id="{C36E5815-73D6-DA66-29AA-3BE061A3E84B}"/>
               </a:ext>
             </a:extLst>
           </p:cNvPr>
@@ -15656,7 +15622,7 @@
           <p:cNvPr id="11" name="Content Placeholder 3">
             <a:extLst>
               <a:ext uri="{FF2B5EF4-FFF2-40B4-BE49-F238E27FC236}">
-                <a16:creationId xmlns="" xmlns:a16="http://schemas.microsoft.com/office/drawing/2014/main" id="{6010EF79-766B-D3A2-10CE-882C40A1E836}"/>
+                <a16:creationId xmlns:a16="http://schemas.microsoft.com/office/drawing/2014/main" xmlns="" id="{6010EF79-766B-D3A2-10CE-882C40A1E836}"/>
               </a:ext>
             </a:extLst>
           </p:cNvPr>
@@ -15852,7 +15818,7 @@
           <p:cNvPr id="3" name="Table 2">
             <a:extLst>
               <a:ext uri="{FF2B5EF4-FFF2-40B4-BE49-F238E27FC236}">
-                <a16:creationId xmlns="" xmlns:a16="http://schemas.microsoft.com/office/drawing/2014/main" id="{6C8AAA51-C203-CD8B-4B02-DE7401134C21}"/>
+                <a16:creationId xmlns:a16="http://schemas.microsoft.com/office/drawing/2014/main" xmlns="" id="{6C8AAA51-C203-CD8B-4B02-DE7401134C21}"/>
               </a:ext>
             </a:extLst>
           </p:cNvPr>
@@ -15881,35 +15847,35 @@
                 <a:gridCol w="745942">
                   <a:extLst>
                     <a:ext uri="{9D8B030D-6E8A-4147-A177-3AD203B41FA5}">
-                      <a16:colId xmlns="" xmlns:a16="http://schemas.microsoft.com/office/drawing/2014/main" val="20000"/>
+                      <a16:colId xmlns:a16="http://schemas.microsoft.com/office/drawing/2014/main" xmlns="" val="20000"/>
                     </a:ext>
                   </a:extLst>
                 </a:gridCol>
                 <a:gridCol w="4275879">
                   <a:extLst>
                     <a:ext uri="{9D8B030D-6E8A-4147-A177-3AD203B41FA5}">
-                      <a16:colId xmlns="" xmlns:a16="http://schemas.microsoft.com/office/drawing/2014/main" val="20001"/>
+                      <a16:colId xmlns:a16="http://schemas.microsoft.com/office/drawing/2014/main" xmlns="" val="20001"/>
                     </a:ext>
                   </a:extLst>
                 </a:gridCol>
                 <a:gridCol w="4419193">
                   <a:extLst>
                     <a:ext uri="{9D8B030D-6E8A-4147-A177-3AD203B41FA5}">
-                      <a16:colId xmlns="" xmlns:a16="http://schemas.microsoft.com/office/drawing/2014/main" val="2530683369"/>
+                      <a16:colId xmlns:a16="http://schemas.microsoft.com/office/drawing/2014/main" xmlns="" val="2530683369"/>
                     </a:ext>
                   </a:extLst>
                 </a:gridCol>
                 <a:gridCol w="1475715">
                   <a:extLst>
                     <a:ext uri="{9D8B030D-6E8A-4147-A177-3AD203B41FA5}">
-                      <a16:colId xmlns="" xmlns:a16="http://schemas.microsoft.com/office/drawing/2014/main" val="20002"/>
+                      <a16:colId xmlns:a16="http://schemas.microsoft.com/office/drawing/2014/main" xmlns="" val="20002"/>
                     </a:ext>
                   </a:extLst>
                 </a:gridCol>
                 <a:gridCol w="986827">
                   <a:extLst>
                     <a:ext uri="{9D8B030D-6E8A-4147-A177-3AD203B41FA5}">
-                      <a16:colId xmlns="" xmlns:a16="http://schemas.microsoft.com/office/drawing/2014/main" val="20003"/>
+                      <a16:colId xmlns:a16="http://schemas.microsoft.com/office/drawing/2014/main" xmlns="" val="20003"/>
                     </a:ext>
                   </a:extLst>
                 </a:gridCol>
@@ -16269,7 +16235,7 @@
                 </a:tc>
                 <a:extLst>
                   <a:ext uri="{0D108BD9-81ED-4DB2-BD59-A6C34878D82A}">
-                    <a16:rowId xmlns="" xmlns:a16="http://schemas.microsoft.com/office/drawing/2014/main" val="10000"/>
+                    <a16:rowId xmlns:a16="http://schemas.microsoft.com/office/drawing/2014/main" xmlns="" val="10000"/>
                   </a:ext>
                 </a:extLst>
               </a:tr>
@@ -16625,7 +16591,7 @@
                 </a:tc>
                 <a:extLst>
                   <a:ext uri="{0D108BD9-81ED-4DB2-BD59-A6C34878D82A}">
-                    <a16:rowId xmlns="" xmlns:a16="http://schemas.microsoft.com/office/drawing/2014/main" val="10001"/>
+                    <a16:rowId xmlns:a16="http://schemas.microsoft.com/office/drawing/2014/main" xmlns="" val="10001"/>
                   </a:ext>
                 </a:extLst>
               </a:tr>
@@ -16992,7 +16958,7 @@
                 </a:tc>
                 <a:extLst>
                   <a:ext uri="{0D108BD9-81ED-4DB2-BD59-A6C34878D82A}">
-                    <a16:rowId xmlns="" xmlns:a16="http://schemas.microsoft.com/office/drawing/2014/main" val="10002"/>
+                    <a16:rowId xmlns:a16="http://schemas.microsoft.com/office/drawing/2014/main" xmlns="" val="10002"/>
                   </a:ext>
                 </a:extLst>
               </a:tr>
@@ -17364,7 +17330,7 @@
                 </a:tc>
                 <a:extLst>
                   <a:ext uri="{0D108BD9-81ED-4DB2-BD59-A6C34878D82A}">
-                    <a16:rowId xmlns="" xmlns:a16="http://schemas.microsoft.com/office/drawing/2014/main" val="10003"/>
+                    <a16:rowId xmlns:a16="http://schemas.microsoft.com/office/drawing/2014/main" xmlns="" val="10003"/>
                   </a:ext>
                 </a:extLst>
               </a:tr>
@@ -17726,7 +17692,7 @@
                 </a:tc>
                 <a:extLst>
                   <a:ext uri="{0D108BD9-81ED-4DB2-BD59-A6C34878D82A}">
-                    <a16:rowId xmlns="" xmlns:a16="http://schemas.microsoft.com/office/drawing/2014/main" val="10004"/>
+                    <a16:rowId xmlns:a16="http://schemas.microsoft.com/office/drawing/2014/main" xmlns="" val="10004"/>
                   </a:ext>
                 </a:extLst>
               </a:tr>
@@ -18085,7 +18051,7 @@
                 </a:tc>
                 <a:extLst>
                   <a:ext uri="{0D108BD9-81ED-4DB2-BD59-A6C34878D82A}">
-                    <a16:rowId xmlns="" xmlns:a16="http://schemas.microsoft.com/office/drawing/2014/main" val="10005"/>
+                    <a16:rowId xmlns:a16="http://schemas.microsoft.com/office/drawing/2014/main" xmlns="" val="10005"/>
                   </a:ext>
                 </a:extLst>
               </a:tr>

--- a/design/FE_phi.vu_Design of Secure Remote Diag on Container Separation Architecture_3rd.pptx
+++ b/design/FE_phi.vu_Design of Secure Remote Diag on Container Separation Architecture_3rd.pptx
@@ -5,27 +5,26 @@
     <p:sldMasterId id="2147483648" r:id="rId1"/>
   </p:sldMasterIdLst>
   <p:notesMasterIdLst>
-    <p:notesMasterId r:id="rId20"/>
+    <p:notesMasterId r:id="rId19"/>
   </p:notesMasterIdLst>
   <p:sldIdLst>
     <p:sldId id="256" r:id="rId2"/>
     <p:sldId id="257" r:id="rId3"/>
     <p:sldId id="280" r:id="rId4"/>
-    <p:sldId id="294" r:id="rId5"/>
-    <p:sldId id="289" r:id="rId6"/>
-    <p:sldId id="262" r:id="rId7"/>
-    <p:sldId id="283" r:id="rId8"/>
-    <p:sldId id="269" r:id="rId9"/>
-    <p:sldId id="271" r:id="rId10"/>
-    <p:sldId id="287" r:id="rId11"/>
-    <p:sldId id="279" r:id="rId12"/>
-    <p:sldId id="292" r:id="rId13"/>
-    <p:sldId id="293" r:id="rId14"/>
-    <p:sldId id="288" r:id="rId15"/>
-    <p:sldId id="291" r:id="rId16"/>
-    <p:sldId id="274" r:id="rId17"/>
-    <p:sldId id="277" r:id="rId18"/>
-    <p:sldId id="276" r:id="rId19"/>
+    <p:sldId id="289" r:id="rId5"/>
+    <p:sldId id="262" r:id="rId6"/>
+    <p:sldId id="283" r:id="rId7"/>
+    <p:sldId id="269" r:id="rId8"/>
+    <p:sldId id="271" r:id="rId9"/>
+    <p:sldId id="287" r:id="rId10"/>
+    <p:sldId id="279" r:id="rId11"/>
+    <p:sldId id="292" r:id="rId12"/>
+    <p:sldId id="293" r:id="rId13"/>
+    <p:sldId id="288" r:id="rId14"/>
+    <p:sldId id="291" r:id="rId15"/>
+    <p:sldId id="274" r:id="rId16"/>
+    <p:sldId id="277" r:id="rId17"/>
+    <p:sldId id="276" r:id="rId18"/>
   </p:sldIdLst>
   <p:sldSz cx="12192000" cy="6858000"/>
   <p:notesSz cx="6858000" cy="9144000"/>
@@ -631,7 +630,7 @@
             <a:spLocks noGrp="1"/>
           </p:cNvSpPr>
           <p:nvPr>
-            <p:ph type="sldNum" sz="quarter" idx="10"/>
+            <p:ph type="sldNum" sz="quarter" idx="5"/>
           </p:nvPr>
         </p:nvSpPr>
         <p:spPr/>
@@ -641,7 +640,7 @@
           <a:p>
             <a:fld id="{EF277405-33BD-42BD-B604-93760E4185DC}" type="slidenum">
               <a:rPr lang="en-US" smtClean="0"/>
-              <a:t>4</a:t>
+              <a:t>6</a:t>
             </a:fld>
             <a:endParaRPr lang="en-US"/>
           </a:p>
@@ -650,7 +649,7 @@
     </p:spTree>
     <p:extLst>
       <p:ext uri="{BB962C8B-B14F-4D97-AF65-F5344CB8AC3E}">
-        <p14:creationId xmlns:p14="http://schemas.microsoft.com/office/powerpoint/2010/main" val="3259099242"/>
+        <p14:creationId xmlns:p14="http://schemas.microsoft.com/office/powerpoint/2010/main" val="1380153111"/>
       </p:ext>
     </p:extLst>
   </p:cSld>
@@ -704,6 +703,48 @@
           <a:bodyPr/>
           <a:lstStyle/>
           <a:p>
+            <a:pPr fontAlgn="t"/>
+            <a:r>
+              <a:rPr lang="en-US" sz="1200" b="1" i="0" kern="1200">
+                <a:solidFill>
+                  <a:schemeClr val="tx1"/>
+                </a:solidFill>
+                <a:effectLst/>
+                <a:latin typeface="+mn-lt"/>
+                <a:ea typeface="+mn-ea"/>
+                <a:cs typeface="+mn-cs"/>
+              </a:rPr>
+              <a:t>Trade-offs</a:t>
+            </a:r>
+          </a:p>
+          <a:p>
+            <a:pPr fontAlgn="t"/>
+            <a:r>
+              <a:rPr lang="en-US" sz="1200" b="1" i="0" kern="1200">
+                <a:solidFill>
+                  <a:schemeClr val="tx1"/>
+                </a:solidFill>
+                <a:effectLst/>
+                <a:latin typeface="+mn-lt"/>
+                <a:ea typeface="+mn-ea"/>
+                <a:cs typeface="+mn-cs"/>
+              </a:rPr>
+              <a:t>Maintainability:</a:t>
+            </a:r>
+            <a:r>
+              <a:rPr lang="en-US" sz="1200" b="0" i="0" kern="1200">
+                <a:solidFill>
+                  <a:schemeClr val="tx1"/>
+                </a:solidFill>
+                <a:effectLst/>
+                <a:latin typeface="+mn-lt"/>
+                <a:ea typeface="+mn-ea"/>
+                <a:cs typeface="+mn-cs"/>
+              </a:rPr>
+              <a:t> All EP modules require cross-container IPC support, increasing implementation effort and code-change scope.</a:t>
+            </a:r>
+          </a:p>
+          <a:p>
             <a:endParaRPr lang="en-US"/>
           </a:p>
         </p:txBody>
@@ -715,7 +756,7 @@
             <a:spLocks noGrp="1"/>
           </p:cNvSpPr>
           <p:nvPr>
-            <p:ph type="sldNum" sz="quarter" idx="5"/>
+            <p:ph type="sldNum" sz="quarter" idx="10"/>
           </p:nvPr>
         </p:nvSpPr>
         <p:spPr/>
@@ -725,7 +766,7 @@
           <a:p>
             <a:fld id="{EF277405-33BD-42BD-B604-93760E4185DC}" type="slidenum">
               <a:rPr lang="en-US" smtClean="0"/>
-              <a:t>7</a:t>
+              <a:t>8</a:t>
             </a:fld>
             <a:endParaRPr lang="en-US"/>
           </a:p>
@@ -734,7 +775,7 @@
     </p:spTree>
     <p:extLst>
       <p:ext uri="{BB962C8B-B14F-4D97-AF65-F5344CB8AC3E}">
-        <p14:creationId xmlns:p14="http://schemas.microsoft.com/office/powerpoint/2010/main" val="1380153111"/>
+        <p14:creationId xmlns:p14="http://schemas.microsoft.com/office/powerpoint/2010/main" val="3809231641"/>
       </p:ext>
     </p:extLst>
   </p:cSld>
@@ -788,48 +829,6 @@
           <a:bodyPr/>
           <a:lstStyle/>
           <a:p>
-            <a:pPr fontAlgn="t"/>
-            <a:r>
-              <a:rPr lang="en-US" sz="1200" b="1" i="0" kern="1200">
-                <a:solidFill>
-                  <a:schemeClr val="tx1"/>
-                </a:solidFill>
-                <a:effectLst/>
-                <a:latin typeface="+mn-lt"/>
-                <a:ea typeface="+mn-ea"/>
-                <a:cs typeface="+mn-cs"/>
-              </a:rPr>
-              <a:t>Trade-offs</a:t>
-            </a:r>
-          </a:p>
-          <a:p>
-            <a:pPr fontAlgn="t"/>
-            <a:r>
-              <a:rPr lang="en-US" sz="1200" b="1" i="0" kern="1200">
-                <a:solidFill>
-                  <a:schemeClr val="tx1"/>
-                </a:solidFill>
-                <a:effectLst/>
-                <a:latin typeface="+mn-lt"/>
-                <a:ea typeface="+mn-ea"/>
-                <a:cs typeface="+mn-cs"/>
-              </a:rPr>
-              <a:t>Maintainability:</a:t>
-            </a:r>
-            <a:r>
-              <a:rPr lang="en-US" sz="1200" b="0" i="0" kern="1200">
-                <a:solidFill>
-                  <a:schemeClr val="tx1"/>
-                </a:solidFill>
-                <a:effectLst/>
-                <a:latin typeface="+mn-lt"/>
-                <a:ea typeface="+mn-ea"/>
-                <a:cs typeface="+mn-cs"/>
-              </a:rPr>
-              <a:t> All EP modules require cross-container IPC support, increasing implementation effort and code-change scope.</a:t>
-            </a:r>
-          </a:p>
-          <a:p>
             <a:endParaRPr lang="en-US"/>
           </a:p>
         </p:txBody>
@@ -860,7 +859,7 @@
     </p:spTree>
     <p:extLst>
       <p:ext uri="{BB962C8B-B14F-4D97-AF65-F5344CB8AC3E}">
-        <p14:creationId xmlns:p14="http://schemas.microsoft.com/office/powerpoint/2010/main" val="3809231641"/>
+        <p14:creationId xmlns:p14="http://schemas.microsoft.com/office/powerpoint/2010/main" val="3467681225"/>
       </p:ext>
     </p:extLst>
   </p:cSld>
@@ -936,90 +935,6 @@
             <a:fld id="{EF277405-33BD-42BD-B604-93760E4185DC}" type="slidenum">
               <a:rPr lang="en-US" smtClean="0"/>
               <a:t>10</a:t>
-            </a:fld>
-            <a:endParaRPr lang="en-US"/>
-          </a:p>
-        </p:txBody>
-      </p:sp>
-    </p:spTree>
-    <p:extLst>
-      <p:ext uri="{BB962C8B-B14F-4D97-AF65-F5344CB8AC3E}">
-        <p14:creationId xmlns:p14="http://schemas.microsoft.com/office/powerpoint/2010/main" val="3467681225"/>
-      </p:ext>
-    </p:extLst>
-  </p:cSld>
-  <p:clrMapOvr>
-    <a:masterClrMapping/>
-  </p:clrMapOvr>
-</p:notes>
-</file>
-
-<file path=ppt/notesSlides/notesSlide6.xml><?xml version="1.0" encoding="utf-8"?>
-<p:notes xmlns:a="http://schemas.openxmlformats.org/drawingml/2006/main" xmlns:r="http://schemas.openxmlformats.org/officeDocument/2006/relationships" xmlns:p="http://schemas.openxmlformats.org/presentationml/2006/main">
-  <p:cSld>
-    <p:spTree>
-      <p:nvGrpSpPr>
-        <p:cNvPr id="1" name=""/>
-        <p:cNvGrpSpPr/>
-        <p:nvPr/>
-      </p:nvGrpSpPr>
-      <p:grpSpPr>
-        <a:xfrm>
-          <a:off x="0" y="0"/>
-          <a:ext cx="0" cy="0"/>
-          <a:chOff x="0" y="0"/>
-          <a:chExt cx="0" cy="0"/>
-        </a:xfrm>
-      </p:grpSpPr>
-      <p:sp>
-        <p:nvSpPr>
-          <p:cNvPr id="2" name="Slide Image Placeholder 1"/>
-          <p:cNvSpPr>
-            <a:spLocks noGrp="1" noRot="1" noChangeAspect="1"/>
-          </p:cNvSpPr>
-          <p:nvPr>
-            <p:ph type="sldImg"/>
-          </p:nvPr>
-        </p:nvSpPr>
-        <p:spPr/>
-      </p:sp>
-      <p:sp>
-        <p:nvSpPr>
-          <p:cNvPr id="3" name="Notes Placeholder 2"/>
-          <p:cNvSpPr>
-            <a:spLocks noGrp="1"/>
-          </p:cNvSpPr>
-          <p:nvPr>
-            <p:ph type="body" idx="1"/>
-          </p:nvPr>
-        </p:nvSpPr>
-        <p:spPr/>
-        <p:txBody>
-          <a:bodyPr/>
-          <a:lstStyle/>
-          <a:p>
-            <a:endParaRPr lang="en-US"/>
-          </a:p>
-        </p:txBody>
-      </p:sp>
-      <p:sp>
-        <p:nvSpPr>
-          <p:cNvPr id="4" name="Slide Number Placeholder 3"/>
-          <p:cNvSpPr>
-            <a:spLocks noGrp="1"/>
-          </p:cNvSpPr>
-          <p:nvPr>
-            <p:ph type="sldNum" sz="quarter" idx="10"/>
-          </p:nvPr>
-        </p:nvSpPr>
-        <p:spPr/>
-        <p:txBody>
-          <a:bodyPr/>
-          <a:lstStyle/>
-          <a:p>
-            <a:fld id="{EF277405-33BD-42BD-B604-93760E4185DC}" type="slidenum">
-              <a:rPr lang="en-US" smtClean="0"/>
-              <a:t>11</a:t>
             </a:fld>
             <a:endParaRPr lang="en-US"/>
           </a:p>
@@ -1760,7 +1675,7 @@
           <p:cNvPr id="7" name="그림 5" descr="백색바탕.png">
             <a:extLst>
               <a:ext uri="{FF2B5EF4-FFF2-40B4-BE49-F238E27FC236}">
-                <a16:creationId xmlns:a16="http://schemas.microsoft.com/office/drawing/2014/main" xmlns="" id="{28873918-42A2-05FA-4A84-F17869DE34CF}"/>
+                <a16:creationId xmlns:a16="http://schemas.microsoft.com/office/drawing/2014/main" id="{28873918-42A2-05FA-4A84-F17869DE34CF}"/>
               </a:ext>
             </a:extLst>
           </p:cNvPr>
@@ -3644,7 +3559,7 @@
           <p:cNvPr id="8" name="TextBox 7">
             <a:extLst>
               <a:ext uri="{FF2B5EF4-FFF2-40B4-BE49-F238E27FC236}">
-                <a16:creationId xmlns:a16="http://schemas.microsoft.com/office/drawing/2014/main" xmlns="" id="{7DC87BF5-B759-FAAB-FE6D-F0E5F640800D}"/>
+                <a16:creationId xmlns:a16="http://schemas.microsoft.com/office/drawing/2014/main" id="{7DC87BF5-B759-FAAB-FE6D-F0E5F640800D}"/>
               </a:ext>
             </a:extLst>
           </p:cNvPr>
@@ -3652,7 +3567,7 @@
           <p:nvPr userDrawn="1">
             <p:extLst>
               <p:ext uri="{1162E1C5-73C7-4A58-AE30-91384D911F3F}">
-                <p184:classification xmlns:p184="http://schemas.microsoft.com/office/powerpoint/2018/4/main" xmlns="" val="hdr"/>
+                <p184:classification xmlns:p184="http://schemas.microsoft.com/office/powerpoint/2018/4/main" val="hdr"/>
               </p:ext>
             </p:extLst>
           </p:nvPr>
@@ -4099,282 +4014,10 @@
   <p:clrMapOvr>
     <a:masterClrMapping/>
   </p:clrMapOvr>
-  <p:timing>
-    <p:tnLst>
-      <p:par>
-        <p:cTn id="1" dur="indefinite" restart="never" nodeType="tmRoot"/>
-      </p:par>
-    </p:tnLst>
-  </p:timing>
 </p:sld>
 </file>
 
 <file path=ppt/slides/slide10.xml><?xml version="1.0" encoding="utf-8"?>
-<p:sld xmlns:a="http://schemas.openxmlformats.org/drawingml/2006/main" xmlns:r="http://schemas.openxmlformats.org/officeDocument/2006/relationships" xmlns:p="http://schemas.openxmlformats.org/presentationml/2006/main">
-  <p:cSld>
-    <p:spTree>
-      <p:nvGrpSpPr>
-        <p:cNvPr id="1" name="">
-          <a:extLst>
-            <a:ext uri="{FF2B5EF4-FFF2-40B4-BE49-F238E27FC236}">
-              <a16:creationId xmlns:a16="http://schemas.microsoft.com/office/drawing/2014/main" xmlns="" id="{7A3A9F39-394E-5437-993F-29D2F2093B00}"/>
-            </a:ext>
-          </a:extLst>
-        </p:cNvPr>
-        <p:cNvGrpSpPr/>
-        <p:nvPr/>
-      </p:nvGrpSpPr>
-      <p:grpSpPr>
-        <a:xfrm>
-          <a:off x="0" y="0"/>
-          <a:ext cx="0" cy="0"/>
-          <a:chOff x="0" y="0"/>
-          <a:chExt cx="0" cy="0"/>
-        </a:xfrm>
-      </p:grpSpPr>
-      <p:pic>
-        <p:nvPicPr>
-          <p:cNvPr id="7" name="Picture 6"/>
-          <p:cNvPicPr>
-            <a:picLocks noChangeAspect="1"/>
-          </p:cNvPicPr>
-          <p:nvPr/>
-        </p:nvPicPr>
-        <p:blipFill>
-          <a:blip r:embed="rId3"/>
-          <a:stretch>
-            <a:fillRect/>
-          </a:stretch>
-        </p:blipFill>
-        <p:spPr>
-          <a:xfrm>
-            <a:off x="3314700" y="2354870"/>
-            <a:ext cx="8678897" cy="4350305"/>
-          </a:xfrm>
-          <a:prstGeom prst="rect">
-            <a:avLst/>
-          </a:prstGeom>
-        </p:spPr>
-      </p:pic>
-      <p:sp>
-        <p:nvSpPr>
-          <p:cNvPr id="2" name="Title 1">
-            <a:extLst>
-              <a:ext uri="{FF2B5EF4-FFF2-40B4-BE49-F238E27FC236}">
-                <a16:creationId xmlns:a16="http://schemas.microsoft.com/office/drawing/2014/main" xmlns="" id="{554F77EA-2B30-AFDC-1349-3C58C2AB9061}"/>
-              </a:ext>
-            </a:extLst>
-          </p:cNvPr>
-          <p:cNvSpPr>
-            <a:spLocks noGrp="1"/>
-          </p:cNvSpPr>
-          <p:nvPr>
-            <p:ph type="title"/>
-          </p:nvPr>
-        </p:nvSpPr>
-        <p:spPr/>
-        <p:txBody>
-          <a:bodyPr/>
-          <a:lstStyle/>
-          <a:p>
-            <a:r>
-              <a:rPr lang="en-US"/>
-              <a:t>Design Alternative – Alt-C: Move </a:t>
-            </a:r>
-            <a:r>
-              <a:rPr lang="en-US" err="1"/>
-              <a:t>RemoteDiag</a:t>
-            </a:r>
-            <a:r>
-              <a:rPr lang="en-US"/>
-              <a:t> + Proxy</a:t>
-            </a:r>
-          </a:p>
-        </p:txBody>
-      </p:sp>
-      <p:sp>
-        <p:nvSpPr>
-          <p:cNvPr id="3" name="Content Placeholder 2">
-            <a:extLst>
-              <a:ext uri="{FF2B5EF4-FFF2-40B4-BE49-F238E27FC236}">
-                <a16:creationId xmlns:a16="http://schemas.microsoft.com/office/drawing/2014/main" xmlns="" id="{64FB7A4A-CF56-C0BD-9AB9-923B2D043291}"/>
-              </a:ext>
-            </a:extLst>
-          </p:cNvPr>
-          <p:cNvSpPr>
-            <a:spLocks noGrp="1"/>
-          </p:cNvSpPr>
-          <p:nvPr>
-            <p:ph idx="1"/>
-          </p:nvPr>
-        </p:nvSpPr>
-        <p:spPr>
-          <a:xfrm>
-            <a:off x="160867" y="990599"/>
-            <a:ext cx="11825921" cy="1219201"/>
-          </a:xfrm>
-        </p:spPr>
-        <p:txBody>
-          <a:bodyPr>
-            <a:normAutofit fontScale="92500" lnSpcReduction="20000"/>
-          </a:bodyPr>
-          <a:lstStyle/>
-          <a:p>
-            <a:r>
-              <a:rPr lang="en-US" sz="1800"/>
-              <a:t>Move RemoteDiag into the IP container.</a:t>
-            </a:r>
-          </a:p>
-          <a:p>
-            <a:r>
-              <a:rPr lang="en-US" sz="1800" smtClean="0"/>
-              <a:t>Add </a:t>
-            </a:r>
-            <a:r>
-              <a:rPr lang="en-US" sz="1800"/>
-              <a:t>a </a:t>
-            </a:r>
-            <a:r>
-              <a:rPr lang="en-US" sz="1800" b="1"/>
-              <a:t>new RemoteDiagProxy (RDP) </a:t>
-            </a:r>
-            <a:r>
-              <a:rPr lang="en-US" sz="1800" b="1" smtClean="0"/>
-              <a:t>component</a:t>
-            </a:r>
-            <a:r>
-              <a:rPr lang="en-US" sz="1800" smtClean="0"/>
-              <a:t> </a:t>
-            </a:r>
-            <a:r>
-              <a:rPr lang="en-US" sz="1800"/>
-              <a:t>in the EP that acts as a </a:t>
-            </a:r>
-            <a:r>
-              <a:rPr lang="en-US" sz="1800" b="1"/>
-              <a:t>transparent proxy</a:t>
-            </a:r>
-            <a:r>
-              <a:rPr lang="en-US" sz="1800"/>
-              <a:t>. </a:t>
-            </a:r>
-          </a:p>
-          <a:p>
-            <a:r>
-              <a:rPr lang="en-US" sz="1800"/>
-              <a:t>EP modules continue to interact with RDP using their existing interface</a:t>
-            </a:r>
-          </a:p>
-          <a:p>
-            <a:r>
-              <a:rPr lang="en-US" sz="1800"/>
-              <a:t>RDP forwards requests to RemoteDiag via UDS socket channel.</a:t>
-            </a:r>
-            <a:endParaRPr lang="en-US" sz="1800" b="1"/>
-          </a:p>
-          <a:p>
-            <a:endParaRPr lang="en-US" sz="1800"/>
-          </a:p>
-        </p:txBody>
-      </p:sp>
-      <p:sp>
-        <p:nvSpPr>
-          <p:cNvPr id="6" name="TextBox 5"/>
-          <p:cNvSpPr txBox="1"/>
-          <p:nvPr/>
-        </p:nvSpPr>
-        <p:spPr>
-          <a:xfrm>
-            <a:off x="6781612" y="6335843"/>
-            <a:ext cx="643125" cy="369332"/>
-          </a:xfrm>
-          <a:prstGeom prst="rect">
-            <a:avLst/>
-          </a:prstGeom>
-          <a:noFill/>
-        </p:spPr>
-        <p:txBody>
-          <a:bodyPr wrap="none" rtlCol="0">
-            <a:spAutoFit/>
-          </a:bodyPr>
-          <a:lstStyle/>
-          <a:p>
-            <a:r>
-              <a:rPr lang="en-US"/>
-              <a:t>Alt-C</a:t>
-            </a:r>
-          </a:p>
-        </p:txBody>
-      </p:sp>
-      <p:pic>
-        <p:nvPicPr>
-          <p:cNvPr id="8" name="Picture 7"/>
-          <p:cNvPicPr>
-            <a:picLocks noChangeAspect="1"/>
-          </p:cNvPicPr>
-          <p:nvPr/>
-        </p:nvPicPr>
-        <p:blipFill>
-          <a:blip r:embed="rId4"/>
-          <a:stretch>
-            <a:fillRect/>
-          </a:stretch>
-        </p:blipFill>
-        <p:spPr>
-          <a:xfrm>
-            <a:off x="9326" y="4530022"/>
-            <a:ext cx="2196413" cy="1688471"/>
-          </a:xfrm>
-          <a:prstGeom prst="rect">
-            <a:avLst/>
-          </a:prstGeom>
-        </p:spPr>
-      </p:pic>
-      <p:pic>
-        <p:nvPicPr>
-          <p:cNvPr id="4" name="Picture 3"/>
-          <p:cNvPicPr>
-            <a:picLocks noChangeAspect="1"/>
-          </p:cNvPicPr>
-          <p:nvPr/>
-        </p:nvPicPr>
-        <p:blipFill>
-          <a:blip r:embed="rId5"/>
-          <a:stretch>
-            <a:fillRect/>
-          </a:stretch>
-        </p:blipFill>
-        <p:spPr>
-          <a:xfrm>
-            <a:off x="2205739" y="2354869"/>
-            <a:ext cx="9937672" cy="4417405"/>
-          </a:xfrm>
-          <a:prstGeom prst="rect">
-            <a:avLst/>
-          </a:prstGeom>
-        </p:spPr>
-      </p:pic>
-    </p:spTree>
-    <p:extLst>
-      <p:ext uri="{BB962C8B-B14F-4D97-AF65-F5344CB8AC3E}">
-        <p14:creationId xmlns:p14="http://schemas.microsoft.com/office/powerpoint/2010/main" val="4181377362"/>
-      </p:ext>
-    </p:extLst>
-  </p:cSld>
-  <p:clrMapOvr>
-    <a:masterClrMapping/>
-  </p:clrMapOvr>
-  <p:timing>
-    <p:tnLst>
-      <p:par>
-        <p:cTn id="1" dur="indefinite" restart="never" nodeType="tmRoot"/>
-      </p:par>
-    </p:tnLst>
-  </p:timing>
-</p:sld>
-</file>
-
-<file path=ppt/slides/slide11.xml><?xml version="1.0" encoding="utf-8"?>
 <p:sld xmlns:a="http://schemas.openxmlformats.org/drawingml/2006/main" xmlns:r="http://schemas.openxmlformats.org/officeDocument/2006/relationships" xmlns:p="http://schemas.openxmlformats.org/presentationml/2006/main">
   <p:cSld>
     <p:spTree>
@@ -4466,7 +4109,7 @@
           <p:cNvPr id="7" name="Table 6">
             <a:extLst>
               <a:ext uri="{FF2B5EF4-FFF2-40B4-BE49-F238E27FC236}">
-                <a16:creationId xmlns:a16="http://schemas.microsoft.com/office/drawing/2014/main" xmlns="" id="{6C8AAA51-C203-CD8B-4B02-DE7401134C21}"/>
+                <a16:creationId xmlns:a16="http://schemas.microsoft.com/office/drawing/2014/main" id="{6C8AAA51-C203-CD8B-4B02-DE7401134C21}"/>
               </a:ext>
             </a:extLst>
           </p:cNvPr>
@@ -4476,14 +4119,14 @@
           <p:nvPr>
             <p:extLst>
               <p:ext uri="{D42A27DB-BD31-4B8C-83A1-F6EECF244321}">
-                <p14:modId xmlns:p14="http://schemas.microsoft.com/office/powerpoint/2010/main" val="810080571"/>
+                <p14:modId xmlns:p14="http://schemas.microsoft.com/office/powerpoint/2010/main" val="3810738059"/>
               </p:ext>
             </p:extLst>
           </p:nvPr>
         </p:nvGraphicFramePr>
         <p:xfrm>
           <a:off x="72428" y="725354"/>
-          <a:ext cx="12050161" cy="4910976"/>
+          <a:ext cx="12050161" cy="3880605"/>
         </p:xfrm>
         <a:graphic>
           <a:graphicData uri="http://schemas.openxmlformats.org/drawingml/2006/table">
@@ -4495,28 +4138,28 @@
                 <a:gridCol w="1149790">
                   <a:extLst>
                     <a:ext uri="{9D8B030D-6E8A-4147-A177-3AD203B41FA5}">
-                      <a16:colId xmlns:a16="http://schemas.microsoft.com/office/drawing/2014/main" xmlns="" val="20000"/>
+                      <a16:colId xmlns:a16="http://schemas.microsoft.com/office/drawing/2014/main" val="20000"/>
                     </a:ext>
                   </a:extLst>
                 </a:gridCol>
                 <a:gridCol w="3633457">
                   <a:extLst>
                     <a:ext uri="{9D8B030D-6E8A-4147-A177-3AD203B41FA5}">
-                      <a16:colId xmlns:a16="http://schemas.microsoft.com/office/drawing/2014/main" xmlns="" val="20001"/>
+                      <a16:colId xmlns:a16="http://schemas.microsoft.com/office/drawing/2014/main" val="20001"/>
                     </a:ext>
                   </a:extLst>
                 </a:gridCol>
                 <a:gridCol w="3781331">
                   <a:extLst>
                     <a:ext uri="{9D8B030D-6E8A-4147-A177-3AD203B41FA5}">
-                      <a16:colId xmlns:a16="http://schemas.microsoft.com/office/drawing/2014/main" xmlns="" val="2530683369"/>
+                      <a16:colId xmlns:a16="http://schemas.microsoft.com/office/drawing/2014/main" val="2530683369"/>
                     </a:ext>
                   </a:extLst>
                 </a:gridCol>
                 <a:gridCol w="3485583">
                   <a:extLst>
                     <a:ext uri="{9D8B030D-6E8A-4147-A177-3AD203B41FA5}">
-                      <a16:colId xmlns:a16="http://schemas.microsoft.com/office/drawing/2014/main" xmlns="" val="20002"/>
+                      <a16:colId xmlns:a16="http://schemas.microsoft.com/office/drawing/2014/main" val="20002"/>
                     </a:ext>
                   </a:extLst>
                 </a:gridCol>
@@ -4855,7 +4498,7 @@
                 </a:tc>
                 <a:extLst>
                   <a:ext uri="{0D108BD9-81ED-4DB2-BD59-A6C34878D82A}">
-                    <a16:rowId xmlns:a16="http://schemas.microsoft.com/office/drawing/2014/main" xmlns="" val="10000"/>
+                    <a16:rowId xmlns:a16="http://schemas.microsoft.com/office/drawing/2014/main" val="10000"/>
                   </a:ext>
                 </a:extLst>
               </a:tr>
@@ -5306,7 +4949,7 @@
                 </a:tc>
                 <a:extLst>
                   <a:ext uri="{0D108BD9-81ED-4DB2-BD59-A6C34878D82A}">
-                    <a16:rowId xmlns:a16="http://schemas.microsoft.com/office/drawing/2014/main" xmlns="" val="10001"/>
+                    <a16:rowId xmlns:a16="http://schemas.microsoft.com/office/drawing/2014/main" val="10001"/>
                   </a:ext>
                 </a:extLst>
               </a:tr>
@@ -5468,7 +5111,7 @@
                         <a:t>within the EP container</a:t>
                       </a:r>
                       <a:r>
-                        <a:rPr lang="en-US" sz="1300" b="0" kern="1200" baseline="0" smtClean="0">
+                        <a:rPr lang="en-US" sz="1300" b="0" kern="1200" baseline="0">
                           <a:solidFill>
                             <a:schemeClr val="dk1"/>
                           </a:solidFill>
@@ -5479,15 +5122,6 @@
                         </a:rPr>
                         <a:t>. (CyberSecurity team confirmed)</a:t>
                       </a:r>
-                      <a:endParaRPr lang="en-US" sz="1300" b="0" kern="1200" baseline="0">
-                        <a:solidFill>
-                          <a:schemeClr val="dk1"/>
-                        </a:solidFill>
-                        <a:effectLst/>
-                        <a:latin typeface="+mn-lt"/>
-                        <a:ea typeface="+mn-ea"/>
-                        <a:cs typeface="Arial" panose="020B0604020202020204" pitchFamily="34" charset="0"/>
-                      </a:endParaRPr>
                     </a:p>
                   </a:txBody>
                   <a:tcPr marL="25400" marR="25400" marT="0" marB="0">
@@ -5587,7 +5221,7 @@
                         <a:t>within the EP container</a:t>
                       </a:r>
                       <a:r>
-                        <a:rPr lang="en-US" sz="1300" b="0" kern="1200" baseline="0" smtClean="0">
+                        <a:rPr lang="en-US" sz="1300" b="0" kern="1200" baseline="0">
                           <a:solidFill>
                             <a:schemeClr val="dk1"/>
                           </a:solidFill>
@@ -5598,15 +5232,6 @@
                         </a:rPr>
                         <a:t>. (CyberSecurity team confirmed)</a:t>
                       </a:r>
-                      <a:endParaRPr lang="en-US" sz="1300" b="0" kern="1200" baseline="0">
-                        <a:solidFill>
-                          <a:schemeClr val="dk1"/>
-                        </a:solidFill>
-                        <a:effectLst/>
-                        <a:latin typeface="+mn-lt"/>
-                        <a:ea typeface="+mn-ea"/>
-                        <a:cs typeface="Arial" panose="020B0604020202020204" pitchFamily="34" charset="0"/>
-                      </a:endParaRPr>
                     </a:p>
                   </a:txBody>
                   <a:tcPr marL="106700" marR="106700" marT="53350" marB="53350">
@@ -5703,22 +5328,10 @@
                           <a:ea typeface="+mn-ea"/>
                           <a:cs typeface="Arial" panose="020B0604020202020204" pitchFamily="34" charset="0"/>
                         </a:rPr>
-                        <a:t>within the EP container</a:t>
+                        <a:t>within the EP container.</a:t>
                       </a:r>
                       <a:r>
-                        <a:rPr lang="en-US" sz="1300" b="1" kern="1200" baseline="0" smtClean="0">
-                          <a:solidFill>
-                            <a:schemeClr val="dk1"/>
-                          </a:solidFill>
-                          <a:effectLst/>
-                          <a:latin typeface="+mn-lt"/>
-                          <a:ea typeface="+mn-ea"/>
-                          <a:cs typeface="Arial" panose="020B0604020202020204" pitchFamily="34" charset="0"/>
-                        </a:rPr>
-                        <a:t>.</a:t>
-                      </a:r>
-                      <a:r>
-                        <a:rPr lang="en-US" sz="1300" b="0" kern="1200" baseline="0" smtClean="0">
+                        <a:rPr lang="en-US" sz="1300" b="0" kern="1200" baseline="0">
                           <a:solidFill>
                             <a:schemeClr val="dk1"/>
                           </a:solidFill>
@@ -5781,7 +5394,7 @@
                 </a:tc>
                 <a:extLst>
                   <a:ext uri="{0D108BD9-81ED-4DB2-BD59-A6C34878D82A}">
-                    <a16:rowId xmlns:a16="http://schemas.microsoft.com/office/drawing/2014/main" xmlns="" val="10002"/>
+                    <a16:rowId xmlns:a16="http://schemas.microsoft.com/office/drawing/2014/main" val="10002"/>
                   </a:ext>
                 </a:extLst>
               </a:tr>
@@ -5915,18 +5528,6 @@
                         </a:spcAft>
                       </a:pPr>
                       <a:r>
-                        <a:rPr lang="en-US" sz="1300" b="0" kern="1200" baseline="0" smtClean="0">
-                          <a:solidFill>
-                            <a:schemeClr val="dk1"/>
-                          </a:solidFill>
-                          <a:effectLst/>
-                          <a:latin typeface="+mn-lt"/>
-                          <a:ea typeface="+mn-ea"/>
-                          <a:cs typeface="Arial" panose="020B0604020202020204" pitchFamily="34" charset="0"/>
-                        </a:rPr>
-                        <a:t>RemoteDiag </a:t>
-                      </a:r>
-                      <a:r>
                         <a:rPr lang="en-US" sz="1300" b="0" kern="1200" baseline="0">
                           <a:solidFill>
                             <a:schemeClr val="dk1"/>
@@ -5936,31 +5537,7 @@
                           <a:ea typeface="+mn-ea"/>
                           <a:cs typeface="Arial" panose="020B0604020202020204" pitchFamily="34" charset="0"/>
                         </a:rPr>
-                        <a:t>and </a:t>
-                      </a:r>
-                      <a:r>
-                        <a:rPr lang="en-US" sz="1300" b="0" kern="1200" baseline="0" smtClean="0">
-                          <a:solidFill>
-                            <a:schemeClr val="dk1"/>
-                          </a:solidFill>
-                          <a:effectLst/>
-                          <a:latin typeface="+mn-lt"/>
-                          <a:ea typeface="+mn-ea"/>
-                          <a:cs typeface="Arial" panose="020B0604020202020204" pitchFamily="34" charset="0"/>
-                        </a:rPr>
-                        <a:t>OnBoardClient’s responsibility is changed </a:t>
-                      </a:r>
-                      <a:r>
-                        <a:rPr lang="en-US" sz="1300" b="0" kern="1200" baseline="0">
-                          <a:solidFill>
-                            <a:schemeClr val="dk1"/>
-                          </a:solidFill>
-                          <a:effectLst/>
-                          <a:latin typeface="+mn-lt"/>
-                          <a:ea typeface="+mn-ea"/>
-                          <a:cs typeface="Arial" panose="020B0604020202020204" pitchFamily="34" charset="0"/>
-                        </a:rPr>
-                        <a:t>(</a:t>
+                        <a:t>RemoteDiag and OnBoardClient’s responsibility is changed (</a:t>
                       </a:r>
                       <a:r>
                         <a:rPr lang="en-US" sz="1300" b="1" kern="1200" baseline="0">
@@ -5984,77 +5561,8 @@
                           <a:ea typeface="+mn-ea"/>
                           <a:cs typeface="Arial" panose="020B0604020202020204" pitchFamily="34" charset="0"/>
                         </a:rPr>
-                        <a:t> </a:t>
+                        <a:t> is moved to OnBoardClient), requiring requirement updates.</a:t>
                       </a:r>
-                      <a:r>
-                        <a:rPr lang="en-US" sz="1300" b="0" kern="1200" baseline="0" smtClean="0">
-                          <a:solidFill>
-                            <a:schemeClr val="dk1"/>
-                          </a:solidFill>
-                          <a:effectLst/>
-                          <a:latin typeface="+mn-lt"/>
-                          <a:ea typeface="+mn-ea"/>
-                          <a:cs typeface="Arial" panose="020B0604020202020204" pitchFamily="34" charset="0"/>
-                        </a:rPr>
-                        <a:t>is moved </a:t>
-                      </a:r>
-                      <a:r>
-                        <a:rPr lang="en-US" sz="1300" b="0" kern="1200" baseline="0">
-                          <a:solidFill>
-                            <a:schemeClr val="dk1"/>
-                          </a:solidFill>
-                          <a:effectLst/>
-                          <a:latin typeface="+mn-lt"/>
-                          <a:ea typeface="+mn-ea"/>
-                          <a:cs typeface="Arial" panose="020B0604020202020204" pitchFamily="34" charset="0"/>
-                        </a:rPr>
-                        <a:t>to </a:t>
-                      </a:r>
-                      <a:r>
-                        <a:rPr lang="en-US" sz="1300" b="0" kern="1200" baseline="0" smtClean="0">
-                          <a:solidFill>
-                            <a:schemeClr val="dk1"/>
-                          </a:solidFill>
-                          <a:effectLst/>
-                          <a:latin typeface="+mn-lt"/>
-                          <a:ea typeface="+mn-ea"/>
-                          <a:cs typeface="Arial" panose="020B0604020202020204" pitchFamily="34" charset="0"/>
-                        </a:rPr>
-                        <a:t>OnBoardClient</a:t>
-                      </a:r>
-                      <a:r>
-                        <a:rPr lang="en-US" sz="1300" b="0" kern="1200" baseline="0">
-                          <a:solidFill>
-                            <a:schemeClr val="dk1"/>
-                          </a:solidFill>
-                          <a:effectLst/>
-                          <a:latin typeface="+mn-lt"/>
-                          <a:ea typeface="+mn-ea"/>
-                          <a:cs typeface="Arial" panose="020B0604020202020204" pitchFamily="34" charset="0"/>
-                        </a:rPr>
-                        <a:t>), requiring </a:t>
-                      </a:r>
-                      <a:r>
-                        <a:rPr lang="en-US" sz="1300" b="0" kern="1200" baseline="0" smtClean="0">
-                          <a:solidFill>
-                            <a:schemeClr val="dk1"/>
-                          </a:solidFill>
-                          <a:effectLst/>
-                          <a:latin typeface="+mn-lt"/>
-                          <a:ea typeface="+mn-ea"/>
-                          <a:cs typeface="Arial" panose="020B0604020202020204" pitchFamily="34" charset="0"/>
-                        </a:rPr>
-                        <a:t>requirement updates.</a:t>
-                      </a:r>
-                      <a:endParaRPr lang="en-US" sz="1300" b="0" kern="1200" baseline="0">
-                        <a:solidFill>
-                          <a:schemeClr val="dk1"/>
-                        </a:solidFill>
-                        <a:effectLst/>
-                        <a:latin typeface="+mn-lt"/>
-                        <a:ea typeface="+mn-ea"/>
-                        <a:cs typeface="Arial" panose="020B0604020202020204" pitchFamily="34" charset="0"/>
-                      </a:endParaRPr>
                     </a:p>
                   </a:txBody>
                   <a:tcPr marL="25400" marR="25400" marT="0" marB="0">
@@ -6313,7 +5821,7 @@
                 </a:tc>
                 <a:extLst>
                   <a:ext uri="{0D108BD9-81ED-4DB2-BD59-A6C34878D82A}">
-                    <a16:rowId xmlns:a16="http://schemas.microsoft.com/office/drawing/2014/main" xmlns="" val="10003"/>
+                    <a16:rowId xmlns:a16="http://schemas.microsoft.com/office/drawing/2014/main" val="10003"/>
                   </a:ext>
                 </a:extLst>
               </a:tr>
@@ -6711,7 +6219,7 @@
                 </a:tc>
                 <a:extLst>
                   <a:ext uri="{0D108BD9-81ED-4DB2-BD59-A6C34878D82A}">
-                    <a16:rowId xmlns:a16="http://schemas.microsoft.com/office/drawing/2014/main" xmlns="" val="10004"/>
+                    <a16:rowId xmlns:a16="http://schemas.microsoft.com/office/drawing/2014/main" val="10004"/>
                   </a:ext>
                 </a:extLst>
               </a:tr>
@@ -6727,460 +6235,7 @@
                         </a:lnSpc>
                       </a:pPr>
                       <a:r>
-                        <a:rPr lang="en-US" sz="1200" b="0" strike="sngStrike" kern="1200">
-                          <a:solidFill>
-                            <a:schemeClr val="dk1"/>
-                          </a:solidFill>
-                          <a:effectLst/>
-                          <a:latin typeface="+mn-lt"/>
-                          <a:ea typeface="+mn-ea"/>
-                          <a:cs typeface="Arial" panose="020B0604020202020204" pitchFamily="34" charset="0"/>
-                        </a:rPr>
-                        <a:t>QA-05</a:t>
-                      </a:r>
-                    </a:p>
-                    <a:p>
-                      <a:pPr algn="ctr" latinLnBrk="0">
-                        <a:lnSpc>
-                          <a:spcPct val="110000"/>
-                        </a:lnSpc>
-                      </a:pPr>
-                      <a:r>
-                        <a:rPr lang="en-US" sz="1200" b="0" strike="sngStrike" kern="1200">
-                          <a:solidFill>
-                            <a:schemeClr val="dk1"/>
-                          </a:solidFill>
-                          <a:effectLst/>
-                          <a:latin typeface="+mn-lt"/>
-                          <a:ea typeface="+mn-ea"/>
-                          <a:cs typeface="Arial" panose="020B0604020202020204" pitchFamily="34" charset="0"/>
-                        </a:rPr>
-                        <a:t>Availability</a:t>
-                      </a:r>
-                    </a:p>
-                  </a:txBody>
-                  <a:tcPr marL="106700" marR="106700" marT="53350" marB="53350" anchor="ctr">
-                    <a:lnL w="12700" cap="flat" cmpd="sng" algn="ctr">
-                      <a:solidFill>
-                        <a:schemeClr val="tx1"/>
-                      </a:solidFill>
-                      <a:prstDash val="solid"/>
-                      <a:round/>
-                      <a:headEnd type="none" w="med" len="med"/>
-                      <a:tailEnd type="none" w="med" len="med"/>
-                    </a:lnL>
-                    <a:lnR w="12700" cap="flat" cmpd="sng" algn="ctr">
-                      <a:solidFill>
-                        <a:schemeClr val="tx1"/>
-                      </a:solidFill>
-                      <a:prstDash val="solid"/>
-                      <a:round/>
-                      <a:headEnd type="none" w="med" len="med"/>
-                      <a:tailEnd type="none" w="med" len="med"/>
-                    </a:lnR>
-                    <a:lnT w="12700" cap="flat" cmpd="sng" algn="ctr">
-                      <a:solidFill>
-                        <a:schemeClr val="tx1"/>
-                      </a:solidFill>
-                      <a:prstDash val="solid"/>
-                      <a:round/>
-                      <a:headEnd type="none" w="med" len="med"/>
-                      <a:tailEnd type="none" w="med" len="med"/>
-                    </a:lnT>
-                    <a:lnB w="12700" cap="flat" cmpd="sng" algn="ctr">
-                      <a:solidFill>
-                        <a:schemeClr val="tx1"/>
-                      </a:solidFill>
-                      <a:prstDash val="solid"/>
-                      <a:round/>
-                      <a:headEnd type="none" w="med" len="med"/>
-                      <a:tailEnd type="none" w="med" len="med"/>
-                    </a:lnB>
-                  </a:tcPr>
-                </a:tc>
-                <a:tc>
-                  <a:txBody>
-                    <a:bodyPr/>
-                    <a:lstStyle/>
-                    <a:p>
-                      <a:pPr marL="0" marR="0" algn="l">
-                        <a:lnSpc>
-                          <a:spcPct val="110000"/>
-                        </a:lnSpc>
-                        <a:spcBef>
-                          <a:spcPts val="200"/>
-                        </a:spcBef>
-                        <a:spcAft>
-                          <a:spcPts val="200"/>
-                        </a:spcAft>
-                      </a:pPr>
-                      <a:r>
-                        <a:rPr lang="en-US" sz="1300" b="1" strike="sngStrike">
-                          <a:solidFill>
-                            <a:srgbClr val="00B050"/>
-                          </a:solidFill>
-                        </a:rPr>
-                        <a:t>High</a:t>
-                      </a:r>
-                    </a:p>
-                    <a:p>
-                      <a:pPr marL="0" marR="0" indent="0" algn="l" defTabSz="914400" rtl="0" eaLnBrk="1" fontAlgn="auto" latinLnBrk="0" hangingPunct="1">
-                        <a:lnSpc>
-                          <a:spcPct val="110000"/>
-                        </a:lnSpc>
-                        <a:spcBef>
-                          <a:spcPts val="200"/>
-                        </a:spcBef>
-                        <a:spcAft>
-                          <a:spcPts val="200"/>
-                        </a:spcAft>
-                        <a:buClrTx/>
-                        <a:buSzTx/>
-                        <a:buFontTx/>
-                        <a:buNone/>
-                        <a:tabLst/>
-                        <a:defRPr/>
-                      </a:pPr>
-                      <a:r>
-                        <a:rPr lang="en-US" sz="1300" b="0" strike="sngStrike" kern="1200" baseline="0">
-                          <a:solidFill>
-                            <a:schemeClr val="dk1"/>
-                          </a:solidFill>
-                          <a:effectLst/>
-                          <a:latin typeface="+mn-lt"/>
-                          <a:ea typeface="+mn-ea"/>
-                          <a:cs typeface="Arial" panose="020B0604020202020204" pitchFamily="34" charset="0"/>
-                        </a:rPr>
-                        <a:t>OEM center and MM ECU communication flows run in separate processes. Failure of one flow does not impact the other</a:t>
-                      </a:r>
-                      <a:r>
-                        <a:rPr lang="en-US" sz="1300" b="0" strike="sngStrike" kern="1200" baseline="0" smtClean="0">
-                          <a:solidFill>
-                            <a:schemeClr val="dk1"/>
-                          </a:solidFill>
-                          <a:effectLst/>
-                          <a:latin typeface="+mn-lt"/>
-                          <a:ea typeface="+mn-ea"/>
-                          <a:cs typeface="Arial" panose="020B0604020202020204" pitchFamily="34" charset="0"/>
-                        </a:rPr>
-                        <a:t>.</a:t>
-                      </a:r>
-                      <a:endParaRPr lang="en-US" sz="1300" b="0" strike="sngStrike" kern="1200" baseline="0">
-                        <a:solidFill>
-                          <a:schemeClr val="dk1"/>
-                        </a:solidFill>
-                        <a:effectLst/>
-                        <a:latin typeface="+mn-lt"/>
-                        <a:ea typeface="+mn-ea"/>
-                        <a:cs typeface="Arial" panose="020B0604020202020204" pitchFamily="34" charset="0"/>
-                      </a:endParaRPr>
-                    </a:p>
-                  </a:txBody>
-                  <a:tcPr marL="25400" marR="25400" marT="0" marB="0">
-                    <a:lnL w="12700" cap="flat" cmpd="sng" algn="ctr">
-                      <a:solidFill>
-                        <a:schemeClr val="tx1"/>
-                      </a:solidFill>
-                      <a:prstDash val="solid"/>
-                      <a:round/>
-                      <a:headEnd type="none" w="med" len="med"/>
-                      <a:tailEnd type="none" w="med" len="med"/>
-                    </a:lnL>
-                    <a:lnR w="12700" cap="flat" cmpd="sng" algn="ctr">
-                      <a:solidFill>
-                        <a:schemeClr val="tx1"/>
-                      </a:solidFill>
-                      <a:prstDash val="solid"/>
-                      <a:round/>
-                      <a:headEnd type="none" w="med" len="med"/>
-                      <a:tailEnd type="none" w="med" len="med"/>
-                    </a:lnR>
-                    <a:lnT w="12700" cap="flat" cmpd="sng" algn="ctr">
-                      <a:solidFill>
-                        <a:schemeClr val="tx1"/>
-                      </a:solidFill>
-                      <a:prstDash val="solid"/>
-                      <a:round/>
-                      <a:headEnd type="none" w="med" len="med"/>
-                      <a:tailEnd type="none" w="med" len="med"/>
-                    </a:lnT>
-                    <a:lnB w="12700" cap="flat" cmpd="sng" algn="ctr">
-                      <a:solidFill>
-                        <a:schemeClr val="tx1"/>
-                      </a:solidFill>
-                      <a:prstDash val="solid"/>
-                      <a:round/>
-                      <a:headEnd type="none" w="med" len="med"/>
-                      <a:tailEnd type="none" w="med" len="med"/>
-                    </a:lnB>
-                  </a:tcPr>
-                </a:tc>
-                <a:tc>
-                  <a:txBody>
-                    <a:bodyPr/>
-                    <a:lstStyle/>
-                    <a:p>
-                      <a:pPr marL="0" marR="0" indent="0" algn="l" defTabSz="914400" rtl="0" eaLnBrk="1" fontAlgn="auto" latinLnBrk="0" hangingPunct="1">
-                        <a:lnSpc>
-                          <a:spcPct val="110000"/>
-                        </a:lnSpc>
-                        <a:spcBef>
-                          <a:spcPts val="0"/>
-                        </a:spcBef>
-                        <a:spcAft>
-                          <a:spcPts val="0"/>
-                        </a:spcAft>
-                        <a:buClrTx/>
-                        <a:buSzTx/>
-                        <a:buFontTx/>
-                        <a:buNone/>
-                        <a:tabLst/>
-                        <a:defRPr/>
-                      </a:pPr>
-                      <a:r>
-                        <a:rPr lang="en-US" sz="1300" b="1" strike="sngStrike">
-                          <a:solidFill>
-                            <a:srgbClr val="FF0000"/>
-                          </a:solidFill>
-                        </a:rPr>
-                        <a:t>Low</a:t>
-                      </a:r>
-                    </a:p>
-                    <a:p>
-                      <a:pPr marL="0" marR="0" indent="0" algn="l" defTabSz="914400" rtl="0" eaLnBrk="1" fontAlgn="auto" latinLnBrk="0" hangingPunct="1">
-                        <a:lnSpc>
-                          <a:spcPct val="110000"/>
-                        </a:lnSpc>
-                        <a:spcBef>
-                          <a:spcPts val="0"/>
-                        </a:spcBef>
-                        <a:spcAft>
-                          <a:spcPts val="0"/>
-                        </a:spcAft>
-                        <a:buClrTx/>
-                        <a:buSzTx/>
-                        <a:buFontTx/>
-                        <a:buNone/>
-                        <a:tabLst/>
-                        <a:defRPr/>
-                      </a:pPr>
-                      <a:r>
-                        <a:rPr lang="en-US" sz="1300" b="0" strike="sngStrike" kern="1200" baseline="0">
-                          <a:solidFill>
-                            <a:schemeClr val="tx1"/>
-                          </a:solidFill>
-                          <a:effectLst/>
-                          <a:latin typeface="+mn-lt"/>
-                          <a:ea typeface="+mn-ea"/>
-                          <a:cs typeface="Arial" panose="020B0604020202020204" pitchFamily="34" charset="0"/>
-                        </a:rPr>
-                        <a:t>OEM center and MM ECU </a:t>
-                      </a:r>
-                      <a:r>
-                        <a:rPr lang="en-US" sz="1300" b="0" strike="sngStrike" kern="1200" baseline="0">
-                          <a:solidFill>
-                            <a:schemeClr val="dk1"/>
-                          </a:solidFill>
-                          <a:effectLst/>
-                          <a:latin typeface="+mn-lt"/>
-                          <a:ea typeface="+mn-ea"/>
-                          <a:cs typeface="Arial" panose="020B0604020202020204" pitchFamily="34" charset="0"/>
-                        </a:rPr>
-                        <a:t>communication </a:t>
-                      </a:r>
-                      <a:r>
-                        <a:rPr lang="en-US" sz="1300" b="0" strike="sngStrike" kern="1200" baseline="0">
-                          <a:solidFill>
-                            <a:schemeClr val="tx1"/>
-                          </a:solidFill>
-                          <a:effectLst/>
-                          <a:latin typeface="+mn-lt"/>
-                          <a:ea typeface="+mn-ea"/>
-                          <a:cs typeface="Arial" panose="020B0604020202020204" pitchFamily="34" charset="0"/>
-                        </a:rPr>
-                        <a:t>flows share the same process. Failure in one flow may impact the other.</a:t>
-                      </a:r>
-                    </a:p>
-                  </a:txBody>
-                  <a:tcPr marL="106700" marR="106700" marT="53350" marB="53350">
-                    <a:lnL w="12700" cap="flat" cmpd="sng" algn="ctr">
-                      <a:solidFill>
-                        <a:schemeClr val="tx1"/>
-                      </a:solidFill>
-                      <a:prstDash val="solid"/>
-                      <a:round/>
-                      <a:headEnd type="none" w="med" len="med"/>
-                      <a:tailEnd type="none" w="med" len="med"/>
-                    </a:lnL>
-                    <a:lnR w="12700" cap="flat" cmpd="sng" algn="ctr">
-                      <a:solidFill>
-                        <a:schemeClr val="tx1"/>
-                      </a:solidFill>
-                      <a:prstDash val="solid"/>
-                      <a:round/>
-                      <a:headEnd type="none" w="med" len="med"/>
-                      <a:tailEnd type="none" w="med" len="med"/>
-                    </a:lnR>
-                    <a:lnT w="12700" cap="flat" cmpd="sng" algn="ctr">
-                      <a:solidFill>
-                        <a:schemeClr val="tx1"/>
-                      </a:solidFill>
-                      <a:prstDash val="solid"/>
-                      <a:round/>
-                      <a:headEnd type="none" w="med" len="med"/>
-                      <a:tailEnd type="none" w="med" len="med"/>
-                    </a:lnT>
-                    <a:lnB w="12700" cap="flat" cmpd="sng" algn="ctr">
-                      <a:solidFill>
-                        <a:schemeClr val="tx1"/>
-                      </a:solidFill>
-                      <a:prstDash val="solid"/>
-                      <a:round/>
-                      <a:headEnd type="none" w="med" len="med"/>
-                      <a:tailEnd type="none" w="med" len="med"/>
-                    </a:lnB>
-                  </a:tcPr>
-                </a:tc>
-                <a:tc>
-                  <a:txBody>
-                    <a:bodyPr/>
-                    <a:lstStyle/>
-                    <a:p>
-                      <a:pPr algn="l" latinLnBrk="0">
-                        <a:lnSpc>
-                          <a:spcPct val="110000"/>
-                        </a:lnSpc>
-                      </a:pPr>
-                      <a:r>
-                        <a:rPr lang="en-US" sz="1300" b="1" strike="sngStrike">
-                          <a:solidFill>
-                            <a:srgbClr val="FF0000"/>
-                          </a:solidFill>
-                        </a:rPr>
-                        <a:t>Low</a:t>
-                      </a:r>
-                    </a:p>
-                    <a:p>
-                      <a:pPr marL="0" marR="0" indent="0" algn="l" defTabSz="914400" rtl="0" eaLnBrk="1" fontAlgn="auto" latinLnBrk="0" hangingPunct="1">
-                        <a:lnSpc>
-                          <a:spcPct val="110000"/>
-                        </a:lnSpc>
-                        <a:spcBef>
-                          <a:spcPts val="0"/>
-                        </a:spcBef>
-                        <a:spcAft>
-                          <a:spcPts val="0"/>
-                        </a:spcAft>
-                        <a:buClrTx/>
-                        <a:buSzTx/>
-                        <a:buFontTx/>
-                        <a:buNone/>
-                        <a:tabLst/>
-                        <a:defRPr/>
-                      </a:pPr>
-                      <a:r>
-                        <a:rPr lang="en-US" sz="1300" b="0" strike="sngStrike" kern="1200" baseline="0">
-                          <a:solidFill>
-                            <a:schemeClr val="tx1"/>
-                          </a:solidFill>
-                          <a:effectLst/>
-                          <a:latin typeface="+mn-lt"/>
-                          <a:ea typeface="+mn-ea"/>
-                          <a:cs typeface="Arial" panose="020B0604020202020204" pitchFamily="34" charset="0"/>
-                        </a:rPr>
-                        <a:t>OEM center and MM ECU </a:t>
-                      </a:r>
-                      <a:r>
-                        <a:rPr lang="en-US" sz="1300" b="0" strike="sngStrike" kern="1200" baseline="0">
-                          <a:solidFill>
-                            <a:schemeClr val="dk1"/>
-                          </a:solidFill>
-                          <a:effectLst/>
-                          <a:latin typeface="+mn-lt"/>
-                          <a:ea typeface="+mn-ea"/>
-                          <a:cs typeface="Arial" panose="020B0604020202020204" pitchFamily="34" charset="0"/>
-                        </a:rPr>
-                        <a:t>communication </a:t>
-                      </a:r>
-                      <a:r>
-                        <a:rPr lang="en-US" sz="1300" b="0" strike="sngStrike" kern="1200" baseline="0">
-                          <a:solidFill>
-                            <a:schemeClr val="tx1"/>
-                          </a:solidFill>
-                          <a:effectLst/>
-                          <a:latin typeface="+mn-lt"/>
-                          <a:ea typeface="+mn-ea"/>
-                          <a:cs typeface="Arial" panose="020B0604020202020204" pitchFamily="34" charset="0"/>
-                        </a:rPr>
-                        <a:t>flows share the same process. Failure in one flow may impact the other.</a:t>
-                      </a:r>
-                      <a:endParaRPr lang="en-US" sz="1300" b="0" strike="sngStrike">
-                        <a:solidFill>
-                          <a:schemeClr val="tx1"/>
-                        </a:solidFill>
-                        <a:latin typeface="+mn-lt"/>
-                        <a:cs typeface="Arial" panose="020B0604020202020204" pitchFamily="34" charset="0"/>
-                      </a:endParaRPr>
-                    </a:p>
-                  </a:txBody>
-                  <a:tcPr marL="106700" marR="106700" marT="53350" marB="53350">
-                    <a:lnL w="12700" cap="flat" cmpd="sng" algn="ctr">
-                      <a:solidFill>
-                        <a:schemeClr val="tx1"/>
-                      </a:solidFill>
-                      <a:prstDash val="solid"/>
-                      <a:round/>
-                      <a:headEnd type="none" w="med" len="med"/>
-                      <a:tailEnd type="none" w="med" len="med"/>
-                    </a:lnL>
-                    <a:lnR w="12700" cap="flat" cmpd="sng" algn="ctr">
-                      <a:solidFill>
-                        <a:schemeClr val="tx1"/>
-                      </a:solidFill>
-                      <a:prstDash val="solid"/>
-                      <a:round/>
-                      <a:headEnd type="none" w="med" len="med"/>
-                      <a:tailEnd type="none" w="med" len="med"/>
-                    </a:lnR>
-                    <a:lnT w="12700" cap="flat" cmpd="sng" algn="ctr">
-                      <a:solidFill>
-                        <a:schemeClr val="tx1"/>
-                      </a:solidFill>
-                      <a:prstDash val="solid"/>
-                      <a:round/>
-                      <a:headEnd type="none" w="med" len="med"/>
-                      <a:tailEnd type="none" w="med" len="med"/>
-                    </a:lnT>
-                    <a:lnB w="12700" cap="flat" cmpd="sng" algn="ctr">
-                      <a:solidFill>
-                        <a:schemeClr val="tx1"/>
-                      </a:solidFill>
-                      <a:prstDash val="solid"/>
-                      <a:round/>
-                      <a:headEnd type="none" w="med" len="med"/>
-                      <a:tailEnd type="none" w="med" len="med"/>
-                    </a:lnB>
-                  </a:tcPr>
-                </a:tc>
-                <a:extLst>
-                  <a:ext uri="{0D108BD9-81ED-4DB2-BD59-A6C34878D82A}">
-                    <a16:rowId xmlns:a16="http://schemas.microsoft.com/office/drawing/2014/main" xmlns="" val="10005"/>
-                  </a:ext>
-                </a:extLst>
-              </a:tr>
-              <a:tr h="0">
-                <a:tc>
-                  <a:txBody>
-                    <a:bodyPr/>
-                    <a:lstStyle/>
-                    <a:p>
-                      <a:pPr algn="ctr" latinLnBrk="0">
-                        <a:lnSpc>
-                          <a:spcPct val="110000"/>
-                        </a:lnSpc>
-                      </a:pPr>
-                      <a:r>
-                        <a:rPr lang="en-US" sz="1300" b="1" kern="1200">
+                        <a:rPr lang="en-US" sz="1300" b="1" kern="1200" dirty="0">
                           <a:solidFill>
                             <a:schemeClr val="dk1"/>
                           </a:solidFill>
@@ -7387,7 +6442,7 @@
                         </a:lnSpc>
                       </a:pPr>
                       <a:r>
-                        <a:rPr lang="en-US" sz="1300" b="0">
+                        <a:rPr lang="en-US" sz="1300" b="0" dirty="0">
                           <a:latin typeface="+mn-lt"/>
                           <a:cs typeface="Arial" panose="020B0604020202020204" pitchFamily="34" charset="0"/>
                         </a:rPr>
@@ -7436,7 +6491,7 @@
                 </a:tc>
                 <a:extLst>
                   <a:ext uri="{0D108BD9-81ED-4DB2-BD59-A6C34878D82A}">
-                    <a16:rowId xmlns:a16="http://schemas.microsoft.com/office/drawing/2014/main" xmlns="" val="10006"/>
+                    <a16:rowId xmlns:a16="http://schemas.microsoft.com/office/drawing/2014/main" val="10006"/>
                   </a:ext>
                 </a:extLst>
               </a:tr>
@@ -7519,7 +6574,7 @@
           <p:cNvPr id="9" name="Picture 2" descr="체크 표시 클립 아트. 무료 다운로드. | Creazilla">
             <a:extLst>
               <a:ext uri="{FF2B5EF4-FFF2-40B4-BE49-F238E27FC236}">
-                <a16:creationId xmlns:a16="http://schemas.microsoft.com/office/drawing/2014/main" xmlns="" id="{07DB846E-8DD2-9BB2-88FF-8A7E0BD6CA84}"/>
+                <a16:creationId xmlns:a16="http://schemas.microsoft.com/office/drawing/2014/main" id="{07DB846E-8DD2-9BB2-88FF-8A7E0BD6CA84}"/>
               </a:ext>
             </a:extLst>
           </p:cNvPr>
@@ -7543,7 +6598,7 @@
         </p:blipFill>
         <p:spPr bwMode="auto">
           <a:xfrm>
-            <a:off x="9814245" y="5392287"/>
+            <a:off x="9807521" y="4329969"/>
             <a:ext cx="216024" cy="216024"/>
           </a:xfrm>
           <a:prstGeom prst="rect">
@@ -7571,17 +6626,10 @@
   <p:clrMapOvr>
     <a:masterClrMapping/>
   </p:clrMapOvr>
-  <p:timing>
-    <p:tnLst>
-      <p:par>
-        <p:cTn id="1" dur="indefinite" restart="never" nodeType="tmRoot"/>
-      </p:par>
-    </p:tnLst>
-  </p:timing>
 </p:sld>
 </file>
 
-<file path=ppt/slides/slide12.xml><?xml version="1.0" encoding="utf-8"?>
+<file path=ppt/slides/slide11.xml><?xml version="1.0" encoding="utf-8"?>
 <p:sld xmlns:a="http://schemas.openxmlformats.org/drawingml/2006/main" xmlns:r="http://schemas.openxmlformats.org/officeDocument/2006/relationships" xmlns:p="http://schemas.openxmlformats.org/presentationml/2006/main">
   <p:cSld>
     <p:spTree>
@@ -7603,7 +6651,7 @@
           <p:cNvPr id="2" name="Title 1">
             <a:extLst>
               <a:ext uri="{FF2B5EF4-FFF2-40B4-BE49-F238E27FC236}">
-                <a16:creationId xmlns:a16="http://schemas.microsoft.com/office/drawing/2014/main" xmlns="" id="{4CA99A5D-DD39-1919-FD58-65B06FAFDE0F}"/>
+                <a16:creationId xmlns:a16="http://schemas.microsoft.com/office/drawing/2014/main" id="{4CA99A5D-DD39-1919-FD58-65B06FAFDE0F}"/>
               </a:ext>
             </a:extLst>
           </p:cNvPr>
@@ -7620,7 +6668,7 @@
           <a:lstStyle/>
           <a:p>
             <a:r>
-              <a:rPr lang="en-US" smtClean="0"/>
+              <a:rPr lang="en-US"/>
               <a:t>Detail design: Forward </a:t>
             </a:r>
             <a:r>
@@ -7643,7 +6691,7 @@
           <p:cNvPr id="5" name="Content Placeholder 4">
             <a:extLst>
               <a:ext uri="{FF2B5EF4-FFF2-40B4-BE49-F238E27FC236}">
-                <a16:creationId xmlns:a16="http://schemas.microsoft.com/office/drawing/2014/main" xmlns="" id="{20EC3E71-48BE-FEC7-88E8-47DB96F90E14}"/>
+                <a16:creationId xmlns:a16="http://schemas.microsoft.com/office/drawing/2014/main" id="{20EC3E71-48BE-FEC7-88E8-47DB96F90E14}"/>
               </a:ext>
             </a:extLst>
           </p:cNvPr>
@@ -7686,17 +6734,10 @@
   <p:clrMapOvr>
     <a:masterClrMapping/>
   </p:clrMapOvr>
-  <p:timing>
-    <p:tnLst>
-      <p:par>
-        <p:cTn id="1" dur="indefinite" restart="never" nodeType="tmRoot"/>
-      </p:par>
-    </p:tnLst>
-  </p:timing>
 </p:sld>
 </file>
 
-<file path=ppt/slides/slide13.xml><?xml version="1.0" encoding="utf-8"?>
+<file path=ppt/slides/slide12.xml><?xml version="1.0" encoding="utf-8"?>
 <p:sld xmlns:a="http://schemas.openxmlformats.org/drawingml/2006/main" xmlns:r="http://schemas.openxmlformats.org/officeDocument/2006/relationships" xmlns:p="http://schemas.openxmlformats.org/presentationml/2006/main">
   <p:cSld>
     <p:spTree>
@@ -7718,7 +6759,7 @@
           <p:cNvPr id="2" name="Title 1">
             <a:extLst>
               <a:ext uri="{FF2B5EF4-FFF2-40B4-BE49-F238E27FC236}">
-                <a16:creationId xmlns:a16="http://schemas.microsoft.com/office/drawing/2014/main" xmlns="" id="{B643E24B-1160-F6BA-5A0C-DB3B3DD9CD8A}"/>
+                <a16:creationId xmlns:a16="http://schemas.microsoft.com/office/drawing/2014/main" id="{B643E24B-1160-F6BA-5A0C-DB3B3DD9CD8A}"/>
               </a:ext>
             </a:extLst>
           </p:cNvPr>
@@ -7735,7 +6776,7 @@
           <a:lstStyle/>
           <a:p>
             <a:r>
-              <a:rPr lang="en-US" smtClean="0"/>
+              <a:rPr lang="en-US"/>
               <a:t>Detail design: Filter </a:t>
             </a:r>
             <a:r>
@@ -7750,7 +6791,7 @@
           <p:cNvPr id="5" name="Content Placeholder 4">
             <a:extLst>
               <a:ext uri="{FF2B5EF4-FFF2-40B4-BE49-F238E27FC236}">
-                <a16:creationId xmlns:a16="http://schemas.microsoft.com/office/drawing/2014/main" xmlns="" id="{3D875D97-63D9-E3DF-760D-4A57DB7A20FB}"/>
+                <a16:creationId xmlns:a16="http://schemas.microsoft.com/office/drawing/2014/main" id="{3D875D97-63D9-E3DF-760D-4A57DB7A20FB}"/>
               </a:ext>
             </a:extLst>
           </p:cNvPr>
@@ -7793,17 +6834,10 @@
   <p:clrMapOvr>
     <a:masterClrMapping/>
   </p:clrMapOvr>
-  <p:timing>
-    <p:tnLst>
-      <p:par>
-        <p:cTn id="1" dur="indefinite" restart="never" nodeType="tmRoot"/>
-      </p:par>
-    </p:tnLst>
-  </p:timing>
 </p:sld>
 </file>
 
-<file path=ppt/slides/slide14.xml><?xml version="1.0" encoding="utf-8"?>
+<file path=ppt/slides/slide13.xml><?xml version="1.0" encoding="utf-8"?>
 <p:sld xmlns:a="http://schemas.openxmlformats.org/drawingml/2006/main" xmlns:r="http://schemas.openxmlformats.org/officeDocument/2006/relationships" xmlns:p="http://schemas.openxmlformats.org/presentationml/2006/main">
   <p:cSld>
     <p:spTree>
@@ -7923,10 +6957,9 @@
               <a:buChar char="•"/>
             </a:pPr>
             <a:r>
-              <a:rPr lang="en-US" smtClean="0"/>
+              <a:rPr lang="en-US"/>
               <a:t>SidFilter blocks reprogramming diagnostic requests</a:t>
             </a:r>
-            <a:endParaRPr lang="en-US"/>
           </a:p>
         </p:txBody>
       </p:sp>
@@ -7940,17 +6973,10 @@
   <p:clrMapOvr>
     <a:masterClrMapping/>
   </p:clrMapOvr>
-  <p:timing>
-    <p:tnLst>
-      <p:par>
-        <p:cTn id="1" dur="indefinite" restart="never" nodeType="tmRoot"/>
-      </p:par>
-    </p:tnLst>
-  </p:timing>
 </p:sld>
 </file>
 
-<file path=ppt/slides/slide15.xml><?xml version="1.0" encoding="utf-8"?>
+<file path=ppt/slides/slide14.xml><?xml version="1.0" encoding="utf-8"?>
 <p:sld xmlns:a="http://schemas.openxmlformats.org/drawingml/2006/main" xmlns:r="http://schemas.openxmlformats.org/officeDocument/2006/relationships" xmlns:p="http://schemas.openxmlformats.org/presentationml/2006/main">
   <p:cSld>
     <p:spTree>
@@ -8062,13 +7088,96 @@
   <p:clrMapOvr>
     <a:masterClrMapping/>
   </p:clrMapOvr>
-  <p:timing>
-    <p:tnLst>
-      <p:par>
-        <p:cTn id="1" dur="indefinite" restart="never" nodeType="tmRoot"/>
-      </p:par>
-    </p:tnLst>
-  </p:timing>
+</p:sld>
+</file>
+
+<file path=ppt/slides/slide15.xml><?xml version="1.0" encoding="utf-8"?>
+<p:sld xmlns:a="http://schemas.openxmlformats.org/drawingml/2006/main" xmlns:r="http://schemas.openxmlformats.org/officeDocument/2006/relationships" xmlns:p="http://schemas.openxmlformats.org/presentationml/2006/main">
+  <p:cSld>
+    <p:spTree>
+      <p:nvGrpSpPr>
+        <p:cNvPr id="1" name=""/>
+        <p:cNvGrpSpPr/>
+        <p:nvPr/>
+      </p:nvGrpSpPr>
+      <p:grpSpPr>
+        <a:xfrm>
+          <a:off x="0" y="0"/>
+          <a:ext cx="0" cy="0"/>
+          <a:chOff x="0" y="0"/>
+          <a:chExt cx="0" cy="0"/>
+        </a:xfrm>
+      </p:grpSpPr>
+      <p:sp>
+        <p:nvSpPr>
+          <p:cNvPr id="2" name="Title 1"/>
+          <p:cNvSpPr>
+            <a:spLocks noGrp="1"/>
+          </p:cNvSpPr>
+          <p:nvPr>
+            <p:ph type="title"/>
+          </p:nvPr>
+        </p:nvSpPr>
+        <p:spPr/>
+        <p:txBody>
+          <a:bodyPr/>
+          <a:lstStyle/>
+          <a:p>
+            <a:endParaRPr lang="en-US"/>
+          </a:p>
+        </p:txBody>
+      </p:sp>
+      <p:sp>
+        <p:nvSpPr>
+          <p:cNvPr id="3" name="Content Placeholder 2"/>
+          <p:cNvSpPr>
+            <a:spLocks noGrp="1"/>
+          </p:cNvSpPr>
+          <p:nvPr>
+            <p:ph idx="1"/>
+          </p:nvPr>
+        </p:nvSpPr>
+        <p:spPr>
+          <a:xfrm>
+            <a:off x="160866" y="2064190"/>
+            <a:ext cx="11887201" cy="4003894"/>
+          </a:xfrm>
+        </p:spPr>
+        <p:txBody>
+          <a:bodyPr>
+            <a:normAutofit/>
+          </a:bodyPr>
+          <a:lstStyle/>
+          <a:p>
+            <a:pPr marL="0" indent="0" algn="ctr">
+              <a:buNone/>
+            </a:pPr>
+            <a:r>
+              <a:rPr lang="en-US" sz="8800" b="1"/>
+              <a:t>Q&amp;A</a:t>
+            </a:r>
+          </a:p>
+          <a:p>
+            <a:pPr marL="0" indent="0" algn="ctr">
+              <a:buNone/>
+            </a:pPr>
+            <a:r>
+              <a:rPr lang="en-US" sz="3600" b="1"/>
+              <a:t>Thank you for listening</a:t>
+            </a:r>
+          </a:p>
+        </p:txBody>
+      </p:sp>
+    </p:spTree>
+    <p:extLst>
+      <p:ext uri="{BB962C8B-B14F-4D97-AF65-F5344CB8AC3E}">
+        <p14:creationId xmlns:p14="http://schemas.microsoft.com/office/powerpoint/2010/main" val="1581111654"/>
+      </p:ext>
+    </p:extLst>
+  </p:cSld>
+  <p:clrMapOvr>
+    <a:masterClrMapping/>
+  </p:clrMapOvr>
 </p:sld>
 </file>
 
@@ -8110,7 +7219,7 @@
       </p:sp>
       <p:sp>
         <p:nvSpPr>
-          <p:cNvPr id="3" name="Content Placeholder 2"/>
+          <p:cNvPr id="4" name="Content Placeholder 2"/>
           <p:cNvSpPr>
             <a:spLocks noGrp="1"/>
           </p:cNvSpPr>
@@ -8134,17 +7243,8 @@
               <a:buNone/>
             </a:pPr>
             <a:r>
-              <a:rPr lang="en-US" sz="8800" b="1"/>
-              <a:t>Q&amp;A</a:t>
-            </a:r>
-          </a:p>
-          <a:p>
-            <a:pPr marL="0" indent="0" algn="ctr">
-              <a:buNone/>
-            </a:pPr>
-            <a:r>
-              <a:rPr lang="en-US" sz="3600" b="1"/>
-              <a:t>Thank you for listening</a:t>
+              <a:rPr lang="en-US" sz="6600" b="1"/>
+              <a:t>Appendix</a:t>
             </a:r>
           </a:p>
         </p:txBody>
@@ -8152,20 +7252,13 @@
     </p:spTree>
     <p:extLst>
       <p:ext uri="{BB962C8B-B14F-4D97-AF65-F5344CB8AC3E}">
-        <p14:creationId xmlns:p14="http://schemas.microsoft.com/office/powerpoint/2010/main" val="1581111654"/>
+        <p14:creationId xmlns:p14="http://schemas.microsoft.com/office/powerpoint/2010/main" val="522549367"/>
       </p:ext>
     </p:extLst>
   </p:cSld>
   <p:clrMapOvr>
     <a:masterClrMapping/>
   </p:clrMapOvr>
-  <p:timing>
-    <p:tnLst>
-      <p:par>
-        <p:cTn id="1" dur="indefinite" restart="never" nodeType="tmRoot"/>
-      </p:par>
-    </p:tnLst>
-  </p:timing>
 </p:sld>
 </file>
 
@@ -8188,98 +7281,10 @@
       </p:grpSpPr>
       <p:sp>
         <p:nvSpPr>
-          <p:cNvPr id="2" name="Title 1"/>
-          <p:cNvSpPr>
-            <a:spLocks noGrp="1"/>
-          </p:cNvSpPr>
-          <p:nvPr>
-            <p:ph type="title"/>
-          </p:nvPr>
-        </p:nvSpPr>
-        <p:spPr/>
-        <p:txBody>
-          <a:bodyPr/>
-          <a:lstStyle/>
-          <a:p>
-            <a:endParaRPr lang="en-US"/>
-          </a:p>
-        </p:txBody>
-      </p:sp>
-      <p:sp>
-        <p:nvSpPr>
-          <p:cNvPr id="4" name="Content Placeholder 2"/>
-          <p:cNvSpPr>
-            <a:spLocks noGrp="1"/>
-          </p:cNvSpPr>
-          <p:nvPr>
-            <p:ph idx="1"/>
-          </p:nvPr>
-        </p:nvSpPr>
-        <p:spPr>
-          <a:xfrm>
-            <a:off x="160866" y="2064190"/>
-            <a:ext cx="11887201" cy="4003894"/>
-          </a:xfrm>
-        </p:spPr>
-        <p:txBody>
-          <a:bodyPr>
-            <a:normAutofit/>
-          </a:bodyPr>
-          <a:lstStyle/>
-          <a:p>
-            <a:pPr marL="0" indent="0" algn="ctr">
-              <a:buNone/>
-            </a:pPr>
-            <a:r>
-              <a:rPr lang="en-US" sz="6600" b="1"/>
-              <a:t>Appendix</a:t>
-            </a:r>
-          </a:p>
-        </p:txBody>
-      </p:sp>
-    </p:spTree>
-    <p:extLst>
-      <p:ext uri="{BB962C8B-B14F-4D97-AF65-F5344CB8AC3E}">
-        <p14:creationId xmlns:p14="http://schemas.microsoft.com/office/powerpoint/2010/main" val="522549367"/>
-      </p:ext>
-    </p:extLst>
-  </p:cSld>
-  <p:clrMapOvr>
-    <a:masterClrMapping/>
-  </p:clrMapOvr>
-  <p:timing>
-    <p:tnLst>
-      <p:par>
-        <p:cTn id="1" dur="indefinite" restart="never" nodeType="tmRoot"/>
-      </p:par>
-    </p:tnLst>
-  </p:timing>
-</p:sld>
-</file>
-
-<file path=ppt/slides/slide18.xml><?xml version="1.0" encoding="utf-8"?>
-<p:sld xmlns:a="http://schemas.openxmlformats.org/drawingml/2006/main" xmlns:r="http://schemas.openxmlformats.org/officeDocument/2006/relationships" xmlns:p="http://schemas.openxmlformats.org/presentationml/2006/main">
-  <p:cSld>
-    <p:spTree>
-      <p:nvGrpSpPr>
-        <p:cNvPr id="1" name=""/>
-        <p:cNvGrpSpPr/>
-        <p:nvPr/>
-      </p:nvGrpSpPr>
-      <p:grpSpPr>
-        <a:xfrm>
-          <a:off x="0" y="0"/>
-          <a:ext cx="0" cy="0"/>
-          <a:chOff x="0" y="0"/>
-          <a:chExt cx="0" cy="0"/>
-        </a:xfrm>
-      </p:grpSpPr>
-      <p:sp>
-        <p:nvSpPr>
           <p:cNvPr id="2" name="Title 1">
             <a:extLst>
               <a:ext uri="{FF2B5EF4-FFF2-40B4-BE49-F238E27FC236}">
-                <a16:creationId xmlns:a16="http://schemas.microsoft.com/office/drawing/2014/main" xmlns="" id="{65C86E6E-BE59-7A7B-6BE9-16A0A094C3D6}"/>
+                <a16:creationId xmlns:a16="http://schemas.microsoft.com/office/drawing/2014/main" id="{65C86E6E-BE59-7A7B-6BE9-16A0A094C3D6}"/>
               </a:ext>
             </a:extLst>
           </p:cNvPr>
@@ -8307,7 +7312,7 @@
           <p:cNvPr id="7" name="Content Placeholder 6">
             <a:extLst>
               <a:ext uri="{FF2B5EF4-FFF2-40B4-BE49-F238E27FC236}">
-                <a16:creationId xmlns:a16="http://schemas.microsoft.com/office/drawing/2014/main" xmlns="" id="{AD4A4EC6-9BB8-2849-8D75-05C44DE9A384}"/>
+                <a16:creationId xmlns:a16="http://schemas.microsoft.com/office/drawing/2014/main" id="{AD4A4EC6-9BB8-2849-8D75-05C44DE9A384}"/>
               </a:ext>
             </a:extLst>
           </p:cNvPr>
@@ -8339,7 +7344,7 @@
           <p:cNvPr id="9" name="Picture 8">
             <a:extLst>
               <a:ext uri="{FF2B5EF4-FFF2-40B4-BE49-F238E27FC236}">
-                <a16:creationId xmlns:a16="http://schemas.microsoft.com/office/drawing/2014/main" xmlns="" id="{C985C62C-76E5-84A1-DEF1-FC486F2BF179}"/>
+                <a16:creationId xmlns:a16="http://schemas.microsoft.com/office/drawing/2014/main" id="{C985C62C-76E5-84A1-DEF1-FC486F2BF179}"/>
               </a:ext>
             </a:extLst>
           </p:cNvPr>
@@ -8374,13 +7379,6 @@
   <p:clrMapOvr>
     <a:masterClrMapping/>
   </p:clrMapOvr>
-  <p:timing>
-    <p:tnLst>
-      <p:par>
-        <p:cTn id="1" dur="indefinite" restart="never" nodeType="tmRoot"/>
-      </p:par>
-    </p:tnLst>
-  </p:timing>
 </p:sld>
 </file>
 
@@ -13737,13 +12735,6 @@
   <p:clrMapOvr>
     <a:masterClrMapping/>
   </p:clrMapOvr>
-  <p:timing>
-    <p:tnLst>
-      <p:par>
-        <p:cTn id="1" dur="indefinite" restart="never" nodeType="tmRoot"/>
-      </p:par>
-    </p:tnLst>
-  </p:timing>
 </p:sld>
 </file>
 
@@ -13799,7 +12790,7 @@
           <p:cNvPr id="2" name="Title 1">
             <a:extLst>
               <a:ext uri="{FF2B5EF4-FFF2-40B4-BE49-F238E27FC236}">
-                <a16:creationId xmlns:a16="http://schemas.microsoft.com/office/drawing/2014/main" xmlns="" id="{F11C1235-51B4-A8A0-3A61-9C767F437001}"/>
+                <a16:creationId xmlns:a16="http://schemas.microsoft.com/office/drawing/2014/main" id="{F11C1235-51B4-A8A0-3A61-9C767F437001}"/>
               </a:ext>
             </a:extLst>
           </p:cNvPr>
@@ -13824,13 +12815,8 @@
           <a:p>
             <a:r>
               <a:rPr lang="en-US"/>
-              <a:t>Context &amp; </a:t>
+              <a:t>Context &amp; Motivation – Toyota 24DCM project</a:t>
             </a:r>
-            <a:r>
-              <a:rPr lang="en-US" smtClean="0"/>
-              <a:t>Motivation – Toyota 24DCM project</a:t>
-            </a:r>
-            <a:endParaRPr lang="en-US"/>
           </a:p>
         </p:txBody>
       </p:sp>
@@ -13839,7 +12825,7 @@
           <p:cNvPr id="7" name="Content Placeholder 6">
             <a:extLst>
               <a:ext uri="{FF2B5EF4-FFF2-40B4-BE49-F238E27FC236}">
-                <a16:creationId xmlns:a16="http://schemas.microsoft.com/office/drawing/2014/main" xmlns="" id="{4A0E7BDD-2CF4-321B-0637-D9AF63CAB0BF}"/>
+                <a16:creationId xmlns:a16="http://schemas.microsoft.com/office/drawing/2014/main" id="{4A0E7BDD-2CF4-321B-0637-D9AF63CAB0BF}"/>
               </a:ext>
             </a:extLst>
           </p:cNvPr>
@@ -13863,140 +12849,79 @@
           <a:lstStyle/>
           <a:p>
             <a:r>
-              <a:rPr lang="en-US" sz="1800" smtClean="0"/>
+              <a:rPr lang="en-US" sz="1800" dirty="0"/>
               <a:t>Toyota </a:t>
             </a:r>
             <a:r>
-              <a:rPr lang="en-US" sz="1800" b="1" smtClean="0"/>
+              <a:rPr lang="en-US" sz="1800" b="1" dirty="0"/>
               <a:t>DCM</a:t>
             </a:r>
             <a:r>
-              <a:rPr lang="en-US" sz="1800" smtClean="0"/>
+              <a:rPr lang="en-US" sz="1800" dirty="0"/>
               <a:t>: a telematics platform providing connected vehicle services, including </a:t>
             </a:r>
             <a:r>
-              <a:rPr lang="en-US" sz="1800" b="1" smtClean="0"/>
-              <a:t>remote diagnostics</a:t>
+              <a:rPr lang="en-US" sz="1800" b="1" dirty="0"/>
+              <a:t>remote diagnostics </a:t>
             </a:r>
             <a:r>
-              <a:rPr lang="en-US" sz="1800" b="1"/>
-              <a:t> </a:t>
-            </a:r>
-            <a:r>
-              <a:rPr lang="en-US" sz="1800" smtClean="0"/>
+              <a:rPr lang="en-US" sz="1800" dirty="0"/>
               <a:t>from OEM server.</a:t>
             </a:r>
           </a:p>
           <a:p>
             <a:r>
-              <a:rPr lang="en-US" sz="1800" smtClean="0"/>
-              <a:t>Supports diagnostic </a:t>
+              <a:rPr lang="en-US" sz="1800" dirty="0"/>
+              <a:t>Supports diagnostic communication and OTA updates through the Internal CAN bus.</a:t>
             </a:r>
+          </a:p>
+          <a:p>
             <a:r>
-              <a:rPr lang="en-US" sz="1800"/>
-              <a:t>communication and OTA updates through the Internal CAN bus</a:t>
-            </a:r>
-            <a:r>
-              <a:rPr lang="en-US" sz="1800" smtClean="0"/>
-              <a:t>.</a:t>
-            </a:r>
-          </a:p>
-          <a:p>
-            <a:r>
-              <a:rPr lang="en-US" sz="1800" b="1" smtClean="0"/>
+              <a:rPr lang="en-US" sz="1800" b="1" dirty="0"/>
               <a:t>Current architecture</a:t>
             </a:r>
             <a:r>
-              <a:rPr lang="en-US" sz="1800" smtClean="0"/>
-              <a:t>: monolithic </a:t>
+              <a:rPr lang="en-US" sz="1800" dirty="0"/>
+              <a:t>: monolithic deployment model, with all components running in a single partition.</a:t>
+            </a:r>
+          </a:p>
+          <a:p>
+            <a:r>
+              <a:rPr lang="en-US" sz="1800" b="1" dirty="0"/>
+              <a:t>System architecture migration</a:t>
             </a:r>
             <a:r>
-              <a:rPr lang="en-US" sz="1800"/>
-              <a:t>deployment model, </a:t>
+              <a:rPr lang="en-US" sz="1800" dirty="0"/>
+              <a:t>: </a:t>
+            </a:r>
+          </a:p>
+          <a:p>
+            <a:pPr lvl="1"/>
+            <a:r>
+              <a:rPr lang="en-US" sz="1800" dirty="0"/>
+              <a:t>Due to security, OEM wants to separate DCM into 2 partition using LXC containers: </a:t>
+            </a:r>
+          </a:p>
+          <a:p>
+            <a:pPr lvl="2"/>
+            <a:r>
+              <a:rPr lang="en-US" sz="1800" b="1" dirty="0"/>
+              <a:t>EP container (Entry Point)</a:t>
             </a:r>
             <a:r>
-              <a:rPr lang="en-US" sz="1800" smtClean="0"/>
-              <a:t>with all </a:t>
-            </a:r>
-            <a:r>
-              <a:rPr lang="en-US" sz="1800"/>
-              <a:t>components running in a </a:t>
-            </a:r>
-            <a:r>
-              <a:rPr lang="en-US" sz="1800" smtClean="0"/>
-              <a:t>single </a:t>
-            </a:r>
-            <a:r>
-              <a:rPr lang="en-US" sz="1800"/>
-              <a:t>partition</a:t>
-            </a:r>
-            <a:r>
-              <a:rPr lang="en-US" sz="1800" smtClean="0"/>
-              <a:t>.</a:t>
-            </a:r>
-          </a:p>
-          <a:p>
-            <a:r>
-              <a:rPr lang="en-US" sz="1800" b="1" smtClean="0"/>
-              <a:t>System </a:t>
-            </a:r>
-            <a:r>
-              <a:rPr lang="en-US" sz="1800" b="1"/>
-              <a:t>architecture </a:t>
-            </a:r>
-            <a:r>
-              <a:rPr lang="en-US" sz="1800" b="1" smtClean="0"/>
-              <a:t>migration</a:t>
-            </a:r>
-            <a:r>
-              <a:rPr lang="en-US" sz="1800" smtClean="0"/>
-              <a:t>: </a:t>
-            </a:r>
-            <a:endParaRPr lang="en-US" sz="1800"/>
-          </a:p>
-          <a:p>
-            <a:pPr lvl="1"/>
-            <a:r>
-              <a:rPr lang="en-US" sz="1800" smtClean="0"/>
-              <a:t>Due to security, OEM wants to separate DCM into 2 partition using LXC </a:t>
-            </a:r>
-            <a:r>
-              <a:rPr lang="en-US" sz="1800"/>
-              <a:t>containers: </a:t>
+              <a:rPr lang="en-US" sz="1800" dirty="0"/>
+              <a:t>: externally exposed network components</a:t>
             </a:r>
           </a:p>
           <a:p>
             <a:pPr lvl="2"/>
             <a:r>
-              <a:rPr lang="en-US" sz="1800" b="1"/>
-              <a:t>EP </a:t>
-            </a:r>
-            <a:r>
-              <a:rPr lang="en-US" sz="1800" b="1" smtClean="0"/>
-              <a:t>container (Entry Point)</a:t>
-            </a:r>
-            <a:r>
-              <a:rPr lang="en-US" sz="1800" smtClean="0"/>
-              <a:t>: </a:t>
-            </a:r>
-            <a:r>
-              <a:rPr lang="en-US" sz="1800"/>
-              <a:t>externally exposed network components</a:t>
-            </a:r>
-          </a:p>
-          <a:p>
-            <a:pPr lvl="2"/>
-            <a:r>
-              <a:rPr lang="en-US" sz="1800" b="1" smtClean="0"/>
+              <a:rPr lang="en-US" sz="1800" b="1" dirty="0"/>
               <a:t>Internal container: </a:t>
             </a:r>
             <a:r>
-              <a:rPr lang="en-US" sz="1800" smtClean="0"/>
-              <a:t>components </a:t>
-            </a:r>
-            <a:r>
-              <a:rPr lang="en-US" sz="1800"/>
-              <a:t>which have access to CAN bus.</a:t>
+              <a:rPr lang="en-US" sz="1800" dirty="0"/>
+              <a:t>components which have access to CAN bus.</a:t>
             </a:r>
           </a:p>
         </p:txBody>
@@ -14187,467 +13112,10 @@
   <p:clrMapOvr>
     <a:masterClrMapping/>
   </p:clrMapOvr>
-  <p:timing>
-    <p:tnLst>
-      <p:par>
-        <p:cTn id="1" dur="indefinite" restart="never" nodeType="tmRoot"/>
-      </p:par>
-    </p:tnLst>
-  </p:timing>
 </p:sld>
 </file>
 
 <file path=ppt/slides/slide4.xml><?xml version="1.0" encoding="utf-8"?>
-<p:sld xmlns:a="http://schemas.openxmlformats.org/drawingml/2006/main" xmlns:r="http://schemas.openxmlformats.org/officeDocument/2006/relationships" xmlns:p="http://schemas.openxmlformats.org/presentationml/2006/main">
-  <p:cSld>
-    <p:spTree>
-      <p:nvGrpSpPr>
-        <p:cNvPr id="1" name=""/>
-        <p:cNvGrpSpPr/>
-        <p:nvPr/>
-      </p:nvGrpSpPr>
-      <p:grpSpPr>
-        <a:xfrm>
-          <a:off x="0" y="0"/>
-          <a:ext cx="0" cy="0"/>
-          <a:chOff x="0" y="0"/>
-          <a:chExt cx="0" cy="0"/>
-        </a:xfrm>
-      </p:grpSpPr>
-      <p:cxnSp>
-        <p:nvCxnSpPr>
-          <p:cNvPr id="16" name="Straight Connector 15"/>
-          <p:cNvCxnSpPr/>
-          <p:nvPr/>
-        </p:nvCxnSpPr>
-        <p:spPr>
-          <a:xfrm>
-            <a:off x="5635782" y="3384550"/>
-            <a:ext cx="0" cy="3473450"/>
-          </a:xfrm>
-          <a:prstGeom prst="line">
-            <a:avLst/>
-          </a:prstGeom>
-        </p:spPr>
-        <p:style>
-          <a:lnRef idx="1">
-            <a:schemeClr val="accent1"/>
-          </a:lnRef>
-          <a:fillRef idx="0">
-            <a:schemeClr val="accent1"/>
-          </a:fillRef>
-          <a:effectRef idx="0">
-            <a:schemeClr val="accent1"/>
-          </a:effectRef>
-          <a:fontRef idx="minor">
-            <a:schemeClr val="tx1"/>
-          </a:fontRef>
-        </p:style>
-      </p:cxnSp>
-      <p:sp>
-        <p:nvSpPr>
-          <p:cNvPr id="2" name="Title 1">
-            <a:extLst>
-              <a:ext uri="{FF2B5EF4-FFF2-40B4-BE49-F238E27FC236}">
-                <a16:creationId xmlns:a16="http://schemas.microsoft.com/office/drawing/2014/main" xmlns="" id="{F11C1235-51B4-A8A0-3A61-9C767F437001}"/>
-              </a:ext>
-            </a:extLst>
-          </p:cNvPr>
-          <p:cNvSpPr>
-            <a:spLocks noGrp="1"/>
-          </p:cNvSpPr>
-          <p:nvPr>
-            <p:ph type="title"/>
-          </p:nvPr>
-        </p:nvSpPr>
-        <p:spPr>
-          <a:xfrm>
-            <a:off x="160866" y="189168"/>
-            <a:ext cx="10871201" cy="672843"/>
-          </a:xfrm>
-        </p:spPr>
-        <p:txBody>
-          <a:bodyPr anchor="ctr">
-            <a:normAutofit/>
-          </a:bodyPr>
-          <a:lstStyle/>
-          <a:p>
-            <a:r>
-              <a:rPr lang="en-US"/>
-              <a:t>Context &amp; </a:t>
-            </a:r>
-            <a:r>
-              <a:rPr lang="en-US" smtClean="0"/>
-              <a:t>Motivation – Toyota 24DCM project</a:t>
-            </a:r>
-            <a:endParaRPr lang="en-US"/>
-          </a:p>
-        </p:txBody>
-      </p:sp>
-      <p:sp>
-        <p:nvSpPr>
-          <p:cNvPr id="7" name="Content Placeholder 6">
-            <a:extLst>
-              <a:ext uri="{FF2B5EF4-FFF2-40B4-BE49-F238E27FC236}">
-                <a16:creationId xmlns:a16="http://schemas.microsoft.com/office/drawing/2014/main" xmlns="" id="{4A0E7BDD-2CF4-321B-0637-D9AF63CAB0BF}"/>
-              </a:ext>
-            </a:extLst>
-          </p:cNvPr>
-          <p:cNvSpPr>
-            <a:spLocks noGrp="1"/>
-          </p:cNvSpPr>
-          <p:nvPr>
-            <p:ph idx="1"/>
-          </p:nvPr>
-        </p:nvSpPr>
-        <p:spPr>
-          <a:xfrm>
-            <a:off x="160866" y="878996"/>
-            <a:ext cx="11916834" cy="1756536"/>
-          </a:xfrm>
-        </p:spPr>
-        <p:txBody>
-          <a:bodyPr>
-            <a:noAutofit/>
-          </a:bodyPr>
-          <a:lstStyle/>
-          <a:p>
-            <a:r>
-              <a:rPr lang="en-US" sz="1800" smtClean="0"/>
-              <a:t>Toyota </a:t>
-            </a:r>
-            <a:r>
-              <a:rPr lang="en-US" sz="1800" b="1" smtClean="0"/>
-              <a:t>DCM</a:t>
-            </a:r>
-            <a:r>
-              <a:rPr lang="en-US" sz="1800" smtClean="0"/>
-              <a:t>: a telematics platform providing connected vehicle services, including </a:t>
-            </a:r>
-            <a:r>
-              <a:rPr lang="en-US" sz="1800" b="1" smtClean="0"/>
-              <a:t>remote diagnostics</a:t>
-            </a:r>
-            <a:r>
-              <a:rPr lang="en-US" sz="1800" b="1"/>
-              <a:t> </a:t>
-            </a:r>
-            <a:r>
-              <a:rPr lang="en-US" sz="1800" smtClean="0"/>
-              <a:t>from OEM server.</a:t>
-            </a:r>
-          </a:p>
-          <a:p>
-            <a:r>
-              <a:rPr lang="en-US" sz="1800" smtClean="0"/>
-              <a:t>Supports diagnostic </a:t>
-            </a:r>
-            <a:r>
-              <a:rPr lang="en-US" sz="1800"/>
-              <a:t>communication and OTA updates through the Internal CAN bus</a:t>
-            </a:r>
-            <a:r>
-              <a:rPr lang="en-US" sz="1800" smtClean="0"/>
-              <a:t>.</a:t>
-            </a:r>
-          </a:p>
-          <a:p>
-            <a:r>
-              <a:rPr lang="en-US" sz="1800" b="1" smtClean="0"/>
-              <a:t>Current architecture</a:t>
-            </a:r>
-            <a:r>
-              <a:rPr lang="en-US" sz="1800" smtClean="0"/>
-              <a:t>: monolithic </a:t>
-            </a:r>
-            <a:r>
-              <a:rPr lang="en-US" sz="1800"/>
-              <a:t>deployment model, </a:t>
-            </a:r>
-            <a:r>
-              <a:rPr lang="en-US" sz="1800" smtClean="0"/>
-              <a:t>with all </a:t>
-            </a:r>
-            <a:r>
-              <a:rPr lang="en-US" sz="1800"/>
-              <a:t>components running in a </a:t>
-            </a:r>
-            <a:r>
-              <a:rPr lang="en-US" sz="1800" smtClean="0"/>
-              <a:t>single </a:t>
-            </a:r>
-            <a:r>
-              <a:rPr lang="en-US" sz="1800"/>
-              <a:t>partition</a:t>
-            </a:r>
-            <a:r>
-              <a:rPr lang="en-US" sz="1800" smtClean="0"/>
-              <a:t>.</a:t>
-            </a:r>
-          </a:p>
-          <a:p>
-            <a:r>
-              <a:rPr lang="en-US" sz="1800" b="1" smtClean="0"/>
-              <a:t>System </a:t>
-            </a:r>
-            <a:r>
-              <a:rPr lang="en-US" sz="1800" b="1"/>
-              <a:t>architecture </a:t>
-            </a:r>
-            <a:r>
-              <a:rPr lang="en-US" sz="1800" b="1" smtClean="0"/>
-              <a:t>migration</a:t>
-            </a:r>
-            <a:r>
-              <a:rPr lang="en-US" sz="1800" smtClean="0"/>
-              <a:t>: </a:t>
-            </a:r>
-            <a:endParaRPr lang="en-US" sz="1800"/>
-          </a:p>
-          <a:p>
-            <a:pPr lvl="1"/>
-            <a:r>
-              <a:rPr lang="en-US" sz="1800" smtClean="0"/>
-              <a:t>Due to security, OEM wants to separate DCM into 2 partition using LXC </a:t>
-            </a:r>
-            <a:r>
-              <a:rPr lang="en-US" sz="1800"/>
-              <a:t>containers: </a:t>
-            </a:r>
-          </a:p>
-          <a:p>
-            <a:pPr lvl="2"/>
-            <a:r>
-              <a:rPr lang="en-US" sz="1800" b="1"/>
-              <a:t>EP </a:t>
-            </a:r>
-            <a:r>
-              <a:rPr lang="en-US" sz="1800" b="1" smtClean="0"/>
-              <a:t>container (Entry Point)</a:t>
-            </a:r>
-            <a:r>
-              <a:rPr lang="en-US" sz="1800" smtClean="0"/>
-              <a:t>: </a:t>
-            </a:r>
-            <a:r>
-              <a:rPr lang="en-US" sz="1800"/>
-              <a:t>externally exposed network components</a:t>
-            </a:r>
-          </a:p>
-          <a:p>
-            <a:pPr lvl="2"/>
-            <a:r>
-              <a:rPr lang="en-US" sz="1800" b="1" smtClean="0"/>
-              <a:t>Internal container: </a:t>
-            </a:r>
-            <a:r>
-              <a:rPr lang="en-US" sz="1800" smtClean="0"/>
-              <a:t>components </a:t>
-            </a:r>
-            <a:r>
-              <a:rPr lang="en-US" sz="1800"/>
-              <a:t>which have access to CAN bus.</a:t>
-            </a:r>
-          </a:p>
-        </p:txBody>
-      </p:sp>
-      <p:pic>
-        <p:nvPicPr>
-          <p:cNvPr id="3" name="Picture 2"/>
-          <p:cNvPicPr>
-            <a:picLocks noChangeAspect="1"/>
-          </p:cNvPicPr>
-          <p:nvPr/>
-        </p:nvPicPr>
-        <p:blipFill>
-          <a:blip r:embed="rId3"/>
-          <a:stretch>
-            <a:fillRect/>
-          </a:stretch>
-        </p:blipFill>
-        <p:spPr>
-          <a:xfrm>
-            <a:off x="0" y="3357951"/>
-            <a:ext cx="5359652" cy="3083122"/>
-          </a:xfrm>
-          <a:prstGeom prst="rect">
-            <a:avLst/>
-          </a:prstGeom>
-        </p:spPr>
-      </p:pic>
-      <p:pic>
-        <p:nvPicPr>
-          <p:cNvPr id="4" name="Picture 3"/>
-          <p:cNvPicPr>
-            <a:picLocks noChangeAspect="1"/>
-          </p:cNvPicPr>
-          <p:nvPr/>
-        </p:nvPicPr>
-        <p:blipFill>
-          <a:blip r:embed="rId4"/>
-          <a:stretch>
-            <a:fillRect/>
-          </a:stretch>
-        </p:blipFill>
-        <p:spPr>
-          <a:xfrm>
-            <a:off x="5911913" y="3357951"/>
-            <a:ext cx="6165787" cy="3161081"/>
-          </a:xfrm>
-          <a:prstGeom prst="rect">
-            <a:avLst/>
-          </a:prstGeom>
-        </p:spPr>
-      </p:pic>
-      <p:sp>
-        <p:nvSpPr>
-          <p:cNvPr id="8" name="Right Arrow 7"/>
-          <p:cNvSpPr/>
-          <p:nvPr/>
-        </p:nvSpPr>
-        <p:spPr>
-          <a:xfrm>
-            <a:off x="4395655" y="6430521"/>
-            <a:ext cx="2480253" cy="412399"/>
-          </a:xfrm>
-          <a:prstGeom prst="rightArrow">
-            <a:avLst/>
-          </a:prstGeom>
-          <a:solidFill>
-            <a:schemeClr val="accent4">
-              <a:lumMod val="60000"/>
-              <a:lumOff val="40000"/>
-            </a:schemeClr>
-          </a:solidFill>
-        </p:spPr>
-        <p:style>
-          <a:lnRef idx="2">
-            <a:schemeClr val="accent1">
-              <a:shade val="50000"/>
-            </a:schemeClr>
-          </a:lnRef>
-          <a:fillRef idx="1">
-            <a:schemeClr val="accent1"/>
-          </a:fillRef>
-          <a:effectRef idx="0">
-            <a:schemeClr val="accent1"/>
-          </a:effectRef>
-          <a:fontRef idx="minor">
-            <a:schemeClr val="lt1"/>
-          </a:fontRef>
-        </p:style>
-        <p:txBody>
-          <a:bodyPr rtlCol="0" anchor="ctr"/>
-          <a:lstStyle/>
-          <a:p>
-            <a:pPr algn="ctr"/>
-            <a:endParaRPr lang="en-US"/>
-          </a:p>
-        </p:txBody>
-      </p:sp>
-      <p:sp>
-        <p:nvSpPr>
-          <p:cNvPr id="10" name="TextBox 9"/>
-          <p:cNvSpPr txBox="1"/>
-          <p:nvPr/>
-        </p:nvSpPr>
-        <p:spPr>
-          <a:xfrm>
-            <a:off x="1233987" y="6528086"/>
-            <a:ext cx="2793009" cy="369332"/>
-          </a:xfrm>
-          <a:prstGeom prst="rect">
-            <a:avLst/>
-          </a:prstGeom>
-          <a:noFill/>
-        </p:spPr>
-        <p:txBody>
-          <a:bodyPr wrap="none" rtlCol="0">
-            <a:spAutoFit/>
-          </a:bodyPr>
-          <a:lstStyle/>
-          <a:p>
-            <a:r>
-              <a:rPr lang="en-US"/>
-              <a:t>Current system architecture</a:t>
-            </a:r>
-          </a:p>
-        </p:txBody>
-      </p:sp>
-      <p:sp>
-        <p:nvSpPr>
-          <p:cNvPr id="13" name="TextBox 12"/>
-          <p:cNvSpPr txBox="1"/>
-          <p:nvPr/>
-        </p:nvSpPr>
-        <p:spPr>
-          <a:xfrm>
-            <a:off x="7059510" y="6490268"/>
-            <a:ext cx="3969548" cy="369332"/>
-          </a:xfrm>
-          <a:prstGeom prst="rect">
-            <a:avLst/>
-          </a:prstGeom>
-          <a:noFill/>
-        </p:spPr>
-        <p:txBody>
-          <a:bodyPr wrap="none" rtlCol="0">
-            <a:spAutoFit/>
-          </a:bodyPr>
-          <a:lstStyle/>
-          <a:p>
-            <a:r>
-              <a:rPr lang="en-US"/>
-              <a:t>New system architecture (containerized)</a:t>
-            </a:r>
-          </a:p>
-        </p:txBody>
-      </p:sp>
-      <p:pic>
-        <p:nvPicPr>
-          <p:cNvPr id="11" name="Picture 10"/>
-          <p:cNvPicPr>
-            <a:picLocks noChangeAspect="1"/>
-          </p:cNvPicPr>
-          <p:nvPr/>
-        </p:nvPicPr>
-        <p:blipFill>
-          <a:blip r:embed="rId5"/>
-          <a:stretch>
-            <a:fillRect/>
-          </a:stretch>
-        </p:blipFill>
-        <p:spPr>
-          <a:xfrm>
-            <a:off x="10547287" y="1826835"/>
-            <a:ext cx="1644713" cy="1531115"/>
-          </a:xfrm>
-          <a:prstGeom prst="rect">
-            <a:avLst/>
-          </a:prstGeom>
-        </p:spPr>
-      </p:pic>
-    </p:spTree>
-    <p:extLst>
-      <p:ext uri="{BB962C8B-B14F-4D97-AF65-F5344CB8AC3E}">
-        <p14:creationId xmlns:p14="http://schemas.microsoft.com/office/powerpoint/2010/main" val="3549224995"/>
-      </p:ext>
-    </p:extLst>
-  </p:cSld>
-  <p:clrMapOvr>
-    <a:masterClrMapping/>
-  </p:clrMapOvr>
-  <p:timing>
-    <p:tnLst>
-      <p:par>
-        <p:cTn id="1" dur="indefinite" restart="never" nodeType="tmRoot"/>
-      </p:par>
-    </p:tnLst>
-  </p:timing>
-</p:sld>
-</file>
-
-<file path=ppt/slides/slide5.xml><?xml version="1.0" encoding="utf-8"?>
 <p:sld xmlns:a="http://schemas.openxmlformats.org/drawingml/2006/main" xmlns:r="http://schemas.openxmlformats.org/officeDocument/2006/relationships" xmlns:p="http://schemas.openxmlformats.org/presentationml/2006/main">
   <p:cSld>
     <p:spTree>
@@ -14715,11 +13183,11 @@
               <a:buChar char="•"/>
             </a:pPr>
             <a:r>
-              <a:rPr lang="en-US" sz="1600" b="1"/>
+              <a:rPr lang="en-US" sz="1600" b="1" dirty="0" err="1"/>
               <a:t>RemoteDiag</a:t>
             </a:r>
             <a:r>
-              <a:rPr lang="en-US" sz="1600"/>
+              <a:rPr lang="en-US" sz="1600" dirty="0"/>
               <a:t>: a module processes diagnostic for each ECU and uploads diagnostic data to OEM Server</a:t>
             </a:r>
           </a:p>
@@ -14729,8 +13197,12 @@
               <a:buChar char="•"/>
             </a:pPr>
             <a:r>
-              <a:rPr lang="en-US" sz="1600"/>
-              <a:t>RemoteDiag has 2 communication paths:</a:t>
+              <a:rPr lang="en-US" sz="1600" dirty="0" err="1"/>
+              <a:t>RemoteDiag</a:t>
+            </a:r>
+            <a:r>
+              <a:rPr lang="en-US" sz="1600" dirty="0"/>
+              <a:t> has 2 communication paths:</a:t>
             </a:r>
           </a:p>
           <a:p>
@@ -14739,15 +13211,15 @@
               <a:buChar char="•"/>
             </a:pPr>
             <a:r>
-              <a:rPr lang="en-US" sz="1600"/>
+              <a:rPr lang="en-US" sz="1600" dirty="0"/>
               <a:t>with </a:t>
             </a:r>
             <a:r>
-              <a:rPr lang="en-US" sz="1600" b="1"/>
+              <a:rPr lang="en-US" sz="1600" b="1" dirty="0"/>
               <a:t>OEM Server</a:t>
             </a:r>
             <a:r>
-              <a:rPr lang="en-US" sz="1600"/>
+              <a:rPr lang="en-US" sz="1600" dirty="0"/>
               <a:t>: performs direct diagnostic commands</a:t>
             </a:r>
           </a:p>
@@ -14757,15 +13229,15 @@
               <a:buChar char="•"/>
             </a:pPr>
             <a:r>
-              <a:rPr lang="en-US" sz="1600"/>
+              <a:rPr lang="en-US" sz="1600" dirty="0"/>
               <a:t>with </a:t>
             </a:r>
             <a:r>
-              <a:rPr lang="en-US" sz="1600" b="1"/>
+              <a:rPr lang="en-US" sz="1600" b="1" dirty="0"/>
               <a:t>MM ecu</a:t>
             </a:r>
             <a:r>
-              <a:rPr lang="en-US" sz="1600"/>
+              <a:rPr lang="en-US" sz="1600" dirty="0"/>
               <a:t>: OTA diagnostic update</a:t>
             </a:r>
           </a:p>
@@ -14774,7 +13246,7 @@
               <a:buFont typeface="Arial" panose="020B0604020202020204" pitchFamily="34" charset="0"/>
               <a:buChar char="•"/>
             </a:pPr>
-            <a:endParaRPr lang="en-US" sz="1600"/>
+            <a:endParaRPr lang="en-US" sz="1600" dirty="0"/>
           </a:p>
           <a:p>
             <a:pPr marL="285750" indent="-285750">
@@ -14782,11 +13254,19 @@
               <a:buChar char="•"/>
             </a:pPr>
             <a:r>
-              <a:rPr lang="en-US" sz="1600" b="1"/>
-              <a:t>Risk: RemoteDiag &lt;-&gt; MM path </a:t>
+              <a:rPr lang="en-US" sz="1600" b="1" dirty="0"/>
+              <a:t>Risk: </a:t>
             </a:r>
             <a:r>
-              <a:rPr lang="en-US" sz="1600"/>
+              <a:rPr lang="en-US" sz="1600" b="1" dirty="0" err="1"/>
+              <a:t>RemoteDiag</a:t>
+            </a:r>
+            <a:r>
+              <a:rPr lang="en-US" sz="1600" b="1" dirty="0"/>
+              <a:t> &lt;-&gt; MM path </a:t>
+            </a:r>
+            <a:r>
+              <a:rPr lang="en-US" sz="1600" dirty="0"/>
               <a:t>routes in EP which is insecure</a:t>
             </a:r>
           </a:p>
@@ -14796,16 +13276,16 @@
               <a:buChar char="•"/>
             </a:pPr>
             <a:r>
-              <a:rPr lang="en-US" sz="1600"/>
+              <a:rPr lang="en-US" sz="1600" dirty="0"/>
               <a:t>OEM requests that </a:t>
             </a:r>
             <a:r>
-              <a:rPr lang="en-US" sz="1600" b="1"/>
+              <a:rPr lang="en-US" sz="1600" b="1" dirty="0"/>
               <a:t>unauthorized reprogramming requests should be filtered.</a:t>
             </a:r>
           </a:p>
           <a:p>
-            <a:endParaRPr lang="en-US" sz="1600"/>
+            <a:endParaRPr lang="en-US" sz="1600" dirty="0"/>
           </a:p>
         </p:txBody>
       </p:sp>
@@ -14814,7 +13294,7 @@
           <p:cNvPr id="2" name="Title 1">
             <a:extLst>
               <a:ext uri="{FF2B5EF4-FFF2-40B4-BE49-F238E27FC236}">
-                <a16:creationId xmlns:a16="http://schemas.microsoft.com/office/drawing/2014/main" xmlns="" id="{C3585339-B774-DFDC-4DB4-D02F5083DD3E}"/>
+                <a16:creationId xmlns:a16="http://schemas.microsoft.com/office/drawing/2014/main" id="{C3585339-B774-DFDC-4DB4-D02F5083DD3E}"/>
               </a:ext>
             </a:extLst>
           </p:cNvPr>
@@ -14856,7 +13336,7 @@
             <p:cNvPr id="15" name="TextBox 14">
               <a:extLst>
                 <a:ext uri="{FF2B5EF4-FFF2-40B4-BE49-F238E27FC236}">
-                  <a16:creationId xmlns:a16="http://schemas.microsoft.com/office/drawing/2014/main" xmlns="" id="{2477AED6-8D6F-D505-6D7B-78460A03A2E8}"/>
+                  <a16:creationId xmlns:a16="http://schemas.microsoft.com/office/drawing/2014/main" id="{2477AED6-8D6F-D505-6D7B-78460A03A2E8}"/>
                 </a:ext>
               </a:extLst>
             </p:cNvPr>
@@ -14990,17 +13470,10 @@
   <p:clrMapOvr>
     <a:masterClrMapping/>
   </p:clrMapOvr>
-  <p:timing>
-    <p:tnLst>
-      <p:par>
-        <p:cTn id="1" dur="indefinite" restart="never" nodeType="tmRoot"/>
-      </p:par>
-    </p:tnLst>
-  </p:timing>
 </p:sld>
 </file>
 
-<file path=ppt/slides/slide6.xml><?xml version="1.0" encoding="utf-8"?>
+<file path=ppt/slides/slide5.xml><?xml version="1.0" encoding="utf-8"?>
 <p:sld xmlns:a="http://schemas.openxmlformats.org/drawingml/2006/main" xmlns:r="http://schemas.openxmlformats.org/officeDocument/2006/relationships" xmlns:p="http://schemas.openxmlformats.org/presentationml/2006/main">
   <p:cSld>
     <p:spTree>
@@ -15044,7 +13517,7 @@
           <p:cNvPr id="4" name="Content Placeholder 3">
             <a:extLst>
               <a:ext uri="{FF2B5EF4-FFF2-40B4-BE49-F238E27FC236}">
-                <a16:creationId xmlns:a16="http://schemas.microsoft.com/office/drawing/2014/main" xmlns="" id="{E5625E47-EFA5-9C35-32C7-F793664192AF}"/>
+                <a16:creationId xmlns:a16="http://schemas.microsoft.com/office/drawing/2014/main" id="{E5625E47-EFA5-9C35-32C7-F793664192AF}"/>
               </a:ext>
             </a:extLst>
           </p:cNvPr>
@@ -15079,7 +13552,7 @@
           <p:cNvPr id="10" name="Table 9">
             <a:extLst>
               <a:ext uri="{FF2B5EF4-FFF2-40B4-BE49-F238E27FC236}">
-                <a16:creationId xmlns:a16="http://schemas.microsoft.com/office/drawing/2014/main" xmlns="" id="{658A328F-ADBC-7C5F-15DF-73E4DC21B209}"/>
+                <a16:creationId xmlns:a16="http://schemas.microsoft.com/office/drawing/2014/main" id="{658A328F-ADBC-7C5F-15DF-73E4DC21B209}"/>
               </a:ext>
             </a:extLst>
           </p:cNvPr>
@@ -15096,7 +13569,7 @@
         </p:nvGraphicFramePr>
         <p:xfrm>
           <a:off x="204773" y="1505336"/>
-          <a:ext cx="11782454" cy="1417380"/>
+          <a:ext cx="11782454" cy="1332290"/>
         </p:xfrm>
         <a:graphic>
           <a:graphicData uri="http://schemas.openxmlformats.org/drawingml/2006/table">
@@ -15108,14 +13581,14 @@
                 <a:gridCol w="1298801">
                   <a:extLst>
                     <a:ext uri="{9D8B030D-6E8A-4147-A177-3AD203B41FA5}">
-                      <a16:colId xmlns:a16="http://schemas.microsoft.com/office/drawing/2014/main" xmlns="" val="20000"/>
+                      <a16:colId xmlns:a16="http://schemas.microsoft.com/office/drawing/2014/main" val="20000"/>
                     </a:ext>
                   </a:extLst>
                 </a:gridCol>
                 <a:gridCol w="10483653">
                   <a:extLst>
                     <a:ext uri="{9D8B030D-6E8A-4147-A177-3AD203B41FA5}">
-                      <a16:colId xmlns:a16="http://schemas.microsoft.com/office/drawing/2014/main" xmlns="" val="20001"/>
+                      <a16:colId xmlns:a16="http://schemas.microsoft.com/office/drawing/2014/main" val="20001"/>
                     </a:ext>
                   </a:extLst>
                 </a:gridCol>
@@ -15254,7 +13727,7 @@
                 </a:tc>
                 <a:extLst>
                   <a:ext uri="{0D108BD9-81ED-4DB2-BD59-A6C34878D82A}">
-                    <a16:rowId xmlns:a16="http://schemas.microsoft.com/office/drawing/2014/main" xmlns="" val="10000"/>
+                    <a16:rowId xmlns:a16="http://schemas.microsoft.com/office/drawing/2014/main" val="10000"/>
                   </a:ext>
                 </a:extLst>
               </a:tr>
@@ -15390,7 +13863,7 @@
                 </a:tc>
                 <a:extLst>
                   <a:ext uri="{0D108BD9-81ED-4DB2-BD59-A6C34878D82A}">
-                    <a16:rowId xmlns:a16="http://schemas.microsoft.com/office/drawing/2014/main" xmlns="" val="10001"/>
+                    <a16:rowId xmlns:a16="http://schemas.microsoft.com/office/drawing/2014/main" val="10001"/>
                   </a:ext>
                 </a:extLst>
               </a:tr>
@@ -15538,7 +14011,7 @@
                 </a:tc>
                 <a:extLst>
                   <a:ext uri="{0D108BD9-81ED-4DB2-BD59-A6C34878D82A}">
-                    <a16:rowId xmlns:a16="http://schemas.microsoft.com/office/drawing/2014/main" xmlns="" val="10002"/>
+                    <a16:rowId xmlns:a16="http://schemas.microsoft.com/office/drawing/2014/main" val="10002"/>
                   </a:ext>
                 </a:extLst>
               </a:tr>
@@ -15556,17 +14029,10 @@
   <p:clrMapOvr>
     <a:masterClrMapping/>
   </p:clrMapOvr>
-  <p:timing>
-    <p:tnLst>
-      <p:par>
-        <p:cTn id="1" dur="indefinite" restart="never" nodeType="tmRoot"/>
-      </p:par>
-    </p:tnLst>
-  </p:timing>
 </p:sld>
 </file>
 
-<file path=ppt/slides/slide7.xml><?xml version="1.0" encoding="utf-8"?>
+<file path=ppt/slides/slide6.xml><?xml version="1.0" encoding="utf-8"?>
 <p:sld xmlns:a="http://schemas.openxmlformats.org/drawingml/2006/main" xmlns:r="http://schemas.openxmlformats.org/officeDocument/2006/relationships" xmlns:p="http://schemas.openxmlformats.org/presentationml/2006/main">
   <p:cSld>
     <p:spTree>
@@ -15574,7 +14040,7 @@
         <p:cNvPr id="1" name="">
           <a:extLst>
             <a:ext uri="{FF2B5EF4-FFF2-40B4-BE49-F238E27FC236}">
-              <a16:creationId xmlns:a16="http://schemas.microsoft.com/office/drawing/2014/main" xmlns="" id="{C0816B88-86B3-799E-3A3E-FA919E3E0922}"/>
+              <a16:creationId xmlns:a16="http://schemas.microsoft.com/office/drawing/2014/main" id="{C0816B88-86B3-799E-3A3E-FA919E3E0922}"/>
             </a:ext>
           </a:extLst>
         </p:cNvPr>
@@ -15594,7 +14060,7 @@
           <p:cNvPr id="2" name="Title 1">
             <a:extLst>
               <a:ext uri="{FF2B5EF4-FFF2-40B4-BE49-F238E27FC236}">
-                <a16:creationId xmlns:a16="http://schemas.microsoft.com/office/drawing/2014/main" xmlns="" id="{C36E5815-73D6-DA66-29AA-3BE061A3E84B}"/>
+                <a16:creationId xmlns:a16="http://schemas.microsoft.com/office/drawing/2014/main" id="{C36E5815-73D6-DA66-29AA-3BE061A3E84B}"/>
               </a:ext>
             </a:extLst>
           </p:cNvPr>
@@ -15622,7 +14088,7 @@
           <p:cNvPr id="11" name="Content Placeholder 3">
             <a:extLst>
               <a:ext uri="{FF2B5EF4-FFF2-40B4-BE49-F238E27FC236}">
-                <a16:creationId xmlns:a16="http://schemas.microsoft.com/office/drawing/2014/main" xmlns="" id="{6010EF79-766B-D3A2-10CE-882C40A1E836}"/>
+                <a16:creationId xmlns:a16="http://schemas.microsoft.com/office/drawing/2014/main" id="{6010EF79-766B-D3A2-10CE-882C40A1E836}"/>
               </a:ext>
             </a:extLst>
           </p:cNvPr>
@@ -15818,7 +14284,7 @@
           <p:cNvPr id="3" name="Table 2">
             <a:extLst>
               <a:ext uri="{FF2B5EF4-FFF2-40B4-BE49-F238E27FC236}">
-                <a16:creationId xmlns:a16="http://schemas.microsoft.com/office/drawing/2014/main" xmlns="" id="{6C8AAA51-C203-CD8B-4B02-DE7401134C21}"/>
+                <a16:creationId xmlns:a16="http://schemas.microsoft.com/office/drawing/2014/main" id="{6C8AAA51-C203-CD8B-4B02-DE7401134C21}"/>
               </a:ext>
             </a:extLst>
           </p:cNvPr>
@@ -15828,14 +14294,14 @@
           <p:nvPr>
             <p:extLst>
               <p:ext uri="{D42A27DB-BD31-4B8C-83A1-F6EECF244321}">
-                <p14:modId xmlns:p14="http://schemas.microsoft.com/office/powerpoint/2010/main" val="32169731"/>
+                <p14:modId xmlns:p14="http://schemas.microsoft.com/office/powerpoint/2010/main" val="2452195264"/>
               </p:ext>
             </p:extLst>
           </p:nvPr>
         </p:nvGraphicFramePr>
         <p:xfrm>
           <a:off x="182820" y="960039"/>
-          <a:ext cx="11903556" cy="4869554"/>
+          <a:ext cx="11903556" cy="4283556"/>
         </p:xfrm>
         <a:graphic>
           <a:graphicData uri="http://schemas.openxmlformats.org/drawingml/2006/table">
@@ -15847,35 +14313,35 @@
                 <a:gridCol w="745942">
                   <a:extLst>
                     <a:ext uri="{9D8B030D-6E8A-4147-A177-3AD203B41FA5}">
-                      <a16:colId xmlns:a16="http://schemas.microsoft.com/office/drawing/2014/main" xmlns="" val="20000"/>
+                      <a16:colId xmlns:a16="http://schemas.microsoft.com/office/drawing/2014/main" val="20000"/>
                     </a:ext>
                   </a:extLst>
                 </a:gridCol>
                 <a:gridCol w="4275879">
                   <a:extLst>
                     <a:ext uri="{9D8B030D-6E8A-4147-A177-3AD203B41FA5}">
-                      <a16:colId xmlns:a16="http://schemas.microsoft.com/office/drawing/2014/main" xmlns="" val="20001"/>
+                      <a16:colId xmlns:a16="http://schemas.microsoft.com/office/drawing/2014/main" val="20001"/>
                     </a:ext>
                   </a:extLst>
                 </a:gridCol>
                 <a:gridCol w="4419193">
                   <a:extLst>
                     <a:ext uri="{9D8B030D-6E8A-4147-A177-3AD203B41FA5}">
-                      <a16:colId xmlns:a16="http://schemas.microsoft.com/office/drawing/2014/main" xmlns="" val="2530683369"/>
+                      <a16:colId xmlns:a16="http://schemas.microsoft.com/office/drawing/2014/main" val="2530683369"/>
                     </a:ext>
                   </a:extLst>
                 </a:gridCol>
                 <a:gridCol w="1475715">
                   <a:extLst>
                     <a:ext uri="{9D8B030D-6E8A-4147-A177-3AD203B41FA5}">
-                      <a16:colId xmlns:a16="http://schemas.microsoft.com/office/drawing/2014/main" xmlns="" val="20002"/>
+                      <a16:colId xmlns:a16="http://schemas.microsoft.com/office/drawing/2014/main" val="20002"/>
                     </a:ext>
                   </a:extLst>
                 </a:gridCol>
                 <a:gridCol w="986827">
                   <a:extLst>
                     <a:ext uri="{9D8B030D-6E8A-4147-A177-3AD203B41FA5}">
-                      <a16:colId xmlns:a16="http://schemas.microsoft.com/office/drawing/2014/main" xmlns="" val="20003"/>
+                      <a16:colId xmlns:a16="http://schemas.microsoft.com/office/drawing/2014/main" val="20003"/>
                     </a:ext>
                   </a:extLst>
                 </a:gridCol>
@@ -16235,7 +14701,7 @@
                 </a:tc>
                 <a:extLst>
                   <a:ext uri="{0D108BD9-81ED-4DB2-BD59-A6C34878D82A}">
-                    <a16:rowId xmlns:a16="http://schemas.microsoft.com/office/drawing/2014/main" xmlns="" val="10000"/>
+                    <a16:rowId xmlns:a16="http://schemas.microsoft.com/office/drawing/2014/main" val="10000"/>
                   </a:ext>
                 </a:extLst>
               </a:tr>
@@ -16329,31 +14795,7 @@
                           <a:ea typeface="+mn-ea"/>
                           <a:cs typeface="Arial" panose="020B0604020202020204" pitchFamily="34" charset="0"/>
                         </a:rPr>
-                        <a:t>A compromised app/service sends reprogramming </a:t>
-                      </a:r>
-                      <a:r>
-                        <a:rPr lang="en-US" sz="1600" b="0" kern="1200" baseline="0" smtClean="0">
-                          <a:solidFill>
-                            <a:schemeClr val="dk1"/>
-                          </a:solidFill>
-                          <a:effectLst/>
-                          <a:latin typeface="+mn-lt"/>
-                          <a:ea typeface="+mn-ea"/>
-                          <a:cs typeface="Arial" panose="020B0604020202020204" pitchFamily="34" charset="0"/>
-                        </a:rPr>
-                        <a:t>diagnostic </a:t>
-                      </a:r>
-                      <a:r>
-                        <a:rPr lang="en-US" sz="1600" b="0" kern="1200" baseline="0">
-                          <a:solidFill>
-                            <a:schemeClr val="dk1"/>
-                          </a:solidFill>
-                          <a:effectLst/>
-                          <a:latin typeface="+mn-lt"/>
-                          <a:ea typeface="+mn-ea"/>
-                          <a:cs typeface="Arial" panose="020B0604020202020204" pitchFamily="34" charset="0"/>
-                        </a:rPr>
-                        <a:t>to CAN</a:t>
+                        <a:t>A compromised app/service sends reprogramming diagnostic to CAN</a:t>
                       </a:r>
                     </a:p>
                   </a:txBody>
@@ -16591,7 +15033,7 @@
                 </a:tc>
                 <a:extLst>
                   <a:ext uri="{0D108BD9-81ED-4DB2-BD59-A6C34878D82A}">
-                    <a16:rowId xmlns:a16="http://schemas.microsoft.com/office/drawing/2014/main" xmlns="" val="10001"/>
+                    <a16:rowId xmlns:a16="http://schemas.microsoft.com/office/drawing/2014/main" val="10001"/>
                   </a:ext>
                 </a:extLst>
               </a:tr>
@@ -16688,7 +15130,7 @@
                         </a:spcAft>
                       </a:pPr>
                       <a:r>
-                        <a:rPr lang="en-US" sz="1600" b="0" kern="1200" baseline="0">
+                        <a:rPr lang="en-US" sz="1600" b="0" kern="1200" baseline="0" dirty="0">
                           <a:solidFill>
                             <a:schemeClr val="dk1"/>
                           </a:solidFill>
@@ -16700,7 +15142,7 @@
                         <a:t>MM ECU sends a diagnostic request via TCP to </a:t>
                       </a:r>
                       <a:r>
-                        <a:rPr lang="en-US" sz="1600" b="0" kern="1200" baseline="0" err="1">
+                        <a:rPr lang="en-US" sz="1600" b="0" kern="1200" baseline="0" dirty="0" err="1">
                           <a:solidFill>
                             <a:schemeClr val="dk1"/>
                           </a:solidFill>
@@ -16711,7 +15153,7 @@
                         </a:rPr>
                         <a:t>RemoteDiag</a:t>
                       </a:r>
-                      <a:endParaRPr lang="en-US" sz="1600" b="0" kern="1200" baseline="0">
+                      <a:endParaRPr lang="en-US" sz="1600" b="0" kern="1200" baseline="0" dirty="0">
                         <a:solidFill>
                           <a:schemeClr val="dk1"/>
                         </a:solidFill>
@@ -16958,7 +15400,7 @@
                 </a:tc>
                 <a:extLst>
                   <a:ext uri="{0D108BD9-81ED-4DB2-BD59-A6C34878D82A}">
-                    <a16:rowId xmlns:a16="http://schemas.microsoft.com/office/drawing/2014/main" xmlns="" val="10002"/>
+                    <a16:rowId xmlns:a16="http://schemas.microsoft.com/office/drawing/2014/main" val="10002"/>
                   </a:ext>
                 </a:extLst>
               </a:tr>
@@ -17330,7 +15772,7 @@
                 </a:tc>
                 <a:extLst>
                   <a:ext uri="{0D108BD9-81ED-4DB2-BD59-A6C34878D82A}">
-                    <a16:rowId xmlns:a16="http://schemas.microsoft.com/office/drawing/2014/main" xmlns="" val="10003"/>
+                    <a16:rowId xmlns:a16="http://schemas.microsoft.com/office/drawing/2014/main" val="10003"/>
                   </a:ext>
                 </a:extLst>
               </a:tr>
@@ -17577,7 +16019,7 @@
                         <a:defRPr/>
                       </a:pPr>
                       <a:r>
-                        <a:rPr lang="en-US" sz="1600" b="0" smtClean="0">
+                        <a:rPr lang="en-US" sz="1600" b="0">
                           <a:effectLst/>
                           <a:latin typeface="+mn-lt"/>
                           <a:ea typeface="Malgun Gothic" panose="020B0503020000020004" pitchFamily="34" charset="-127"/>
@@ -17585,12 +16027,6 @@
                         </a:rPr>
                         <a:t>Maintainability</a:t>
                       </a:r>
-                      <a:endParaRPr lang="en-US" sz="1600" b="0">
-                        <a:effectLst/>
-                        <a:latin typeface="+mn-lt"/>
-                        <a:ea typeface="Malgun Gothic" panose="020B0503020000020004" pitchFamily="34" charset="-127"/>
-                        <a:cs typeface="Arial" panose="020B0604020202020204" pitchFamily="34" charset="0"/>
-                      </a:endParaRPr>
                     </a:p>
                   </a:txBody>
                   <a:tcPr marL="106700" marR="106700" marT="53350" marB="53350" anchor="ctr">
@@ -17643,7 +16079,7 @@
                         </a:lnSpc>
                       </a:pPr>
                       <a:r>
-                        <a:rPr lang="en-US" sz="1600" b="0">
+                        <a:rPr lang="en-US" sz="1600" b="0" dirty="0">
                           <a:latin typeface="+mn-lt"/>
                           <a:cs typeface="Arial" panose="020B0604020202020204" pitchFamily="34" charset="0"/>
                         </a:rPr>
@@ -17692,366 +16128,7 @@
                 </a:tc>
                 <a:extLst>
                   <a:ext uri="{0D108BD9-81ED-4DB2-BD59-A6C34878D82A}">
-                    <a16:rowId xmlns:a16="http://schemas.microsoft.com/office/drawing/2014/main" xmlns="" val="10004"/>
-                  </a:ext>
-                </a:extLst>
-              </a:tr>
-              <a:tr h="0">
-                <a:tc>
-                  <a:txBody>
-                    <a:bodyPr/>
-                    <a:lstStyle/>
-                    <a:p>
-                      <a:pPr algn="l" latinLnBrk="0">
-                        <a:lnSpc>
-                          <a:spcPct val="150000"/>
-                        </a:lnSpc>
-                      </a:pPr>
-                      <a:r>
-                        <a:rPr lang="en-US" sz="1600" b="0" strike="sngStrike" kern="1200">
-                          <a:solidFill>
-                            <a:schemeClr val="dk1"/>
-                          </a:solidFill>
-                          <a:effectLst/>
-                          <a:latin typeface="+mn-lt"/>
-                          <a:ea typeface="+mn-ea"/>
-                          <a:cs typeface="Arial" panose="020B0604020202020204" pitchFamily="34" charset="0"/>
-                        </a:rPr>
-                        <a:t>QA-05</a:t>
-                      </a:r>
-                    </a:p>
-                  </a:txBody>
-                  <a:tcPr marL="106700" marR="106700" marT="53350" marB="53350" anchor="ctr">
-                    <a:lnL w="12700" cap="flat" cmpd="sng" algn="ctr">
-                      <a:solidFill>
-                        <a:schemeClr val="tx1"/>
-                      </a:solidFill>
-                      <a:prstDash val="solid"/>
-                      <a:round/>
-                      <a:headEnd type="none" w="med" len="med"/>
-                      <a:tailEnd type="none" w="med" len="med"/>
-                    </a:lnL>
-                    <a:lnR w="12700" cap="flat" cmpd="sng" algn="ctr">
-                      <a:solidFill>
-                        <a:schemeClr val="tx1"/>
-                      </a:solidFill>
-                      <a:prstDash val="solid"/>
-                      <a:round/>
-                      <a:headEnd type="none" w="med" len="med"/>
-                      <a:tailEnd type="none" w="med" len="med"/>
-                    </a:lnR>
-                    <a:lnT w="12700" cap="flat" cmpd="sng" algn="ctr">
-                      <a:solidFill>
-                        <a:schemeClr val="tx1"/>
-                      </a:solidFill>
-                      <a:prstDash val="solid"/>
-                      <a:round/>
-                      <a:headEnd type="none" w="med" len="med"/>
-                      <a:tailEnd type="none" w="med" len="med"/>
-                    </a:lnT>
-                    <a:lnB w="12700" cap="flat" cmpd="sng" algn="ctr">
-                      <a:solidFill>
-                        <a:schemeClr val="tx1"/>
-                      </a:solidFill>
-                      <a:prstDash val="solid"/>
-                      <a:round/>
-                      <a:headEnd type="none" w="med" len="med"/>
-                      <a:tailEnd type="none" w="med" len="med"/>
-                    </a:lnB>
-                  </a:tcPr>
-                </a:tc>
-                <a:tc>
-                  <a:txBody>
-                    <a:bodyPr/>
-                    <a:lstStyle/>
-                    <a:p>
-                      <a:pPr marL="0" marR="0" algn="l">
-                        <a:lnSpc>
-                          <a:spcPct val="150000"/>
-                        </a:lnSpc>
-                        <a:spcBef>
-                          <a:spcPts val="200"/>
-                        </a:spcBef>
-                        <a:spcAft>
-                          <a:spcPts val="200"/>
-                        </a:spcAft>
-                      </a:pPr>
-                      <a:r>
-                        <a:rPr lang="en-US" sz="1600" b="0" strike="sngStrike" kern="1200" baseline="0">
-                          <a:solidFill>
-                            <a:schemeClr val="dk1"/>
-                          </a:solidFill>
-                          <a:effectLst/>
-                          <a:latin typeface="+mn-lt"/>
-                          <a:ea typeface="+mn-ea"/>
-                          <a:cs typeface="Arial" panose="020B0604020202020204" pitchFamily="34" charset="0"/>
-                        </a:rPr>
-                        <a:t>Failure in OEM Center flow or MM ECU flow</a:t>
-                      </a:r>
-                    </a:p>
-                  </a:txBody>
-                  <a:tcPr marL="25400" marR="25400" marT="0" marB="0" anchor="ctr">
-                    <a:lnL w="12700" cap="flat" cmpd="sng" algn="ctr">
-                      <a:solidFill>
-                        <a:schemeClr val="tx1"/>
-                      </a:solidFill>
-                      <a:prstDash val="solid"/>
-                      <a:round/>
-                      <a:headEnd type="none" w="med" len="med"/>
-                      <a:tailEnd type="none" w="med" len="med"/>
-                    </a:lnL>
-                    <a:lnR w="12700" cap="flat" cmpd="sng" algn="ctr">
-                      <a:solidFill>
-                        <a:schemeClr val="tx1"/>
-                      </a:solidFill>
-                      <a:prstDash val="solid"/>
-                      <a:round/>
-                      <a:headEnd type="none" w="med" len="med"/>
-                      <a:tailEnd type="none" w="med" len="med"/>
-                    </a:lnR>
-                    <a:lnT w="12700" cap="flat" cmpd="sng" algn="ctr">
-                      <a:solidFill>
-                        <a:schemeClr val="tx1"/>
-                      </a:solidFill>
-                      <a:prstDash val="solid"/>
-                      <a:round/>
-                      <a:headEnd type="none" w="med" len="med"/>
-                      <a:tailEnd type="none" w="med" len="med"/>
-                    </a:lnT>
-                    <a:lnB w="12700" cap="flat" cmpd="sng" algn="ctr">
-                      <a:solidFill>
-                        <a:schemeClr val="tx1"/>
-                      </a:solidFill>
-                      <a:prstDash val="solid"/>
-                      <a:round/>
-                      <a:headEnd type="none" w="med" len="med"/>
-                      <a:tailEnd type="none" w="med" len="med"/>
-                    </a:lnB>
-                  </a:tcPr>
-                </a:tc>
-                <a:tc>
-                  <a:txBody>
-                    <a:bodyPr/>
-                    <a:lstStyle/>
-                    <a:p>
-                      <a:pPr marL="0" marR="0" indent="0" algn="l" defTabSz="914400" rtl="0" eaLnBrk="1" fontAlgn="auto" latinLnBrk="0" hangingPunct="1">
-                        <a:lnSpc>
-                          <a:spcPct val="150000"/>
-                        </a:lnSpc>
-                        <a:spcBef>
-                          <a:spcPts val="0"/>
-                        </a:spcBef>
-                        <a:spcAft>
-                          <a:spcPts val="0"/>
-                        </a:spcAft>
-                        <a:buClrTx/>
-                        <a:buSzTx/>
-                        <a:buFontTx/>
-                        <a:buNone/>
-                        <a:tabLst/>
-                        <a:defRPr/>
-                      </a:pPr>
-                      <a:r>
-                        <a:rPr lang="en-US" sz="1600" b="0" strike="sngStrike">
-                          <a:effectLst/>
-                          <a:latin typeface="+mn-lt"/>
-                          <a:ea typeface="Malgun Gothic" panose="020B0503020000020004" pitchFamily="34" charset="-127"/>
-                          <a:cs typeface="Arial" panose="020B0604020202020204" pitchFamily="34" charset="0"/>
-                        </a:rPr>
-                        <a:t>The other</a:t>
-                      </a:r>
-                      <a:r>
-                        <a:rPr lang="en-US" sz="1600" b="0" strike="sngStrike" baseline="0">
-                          <a:effectLst/>
-                          <a:latin typeface="+mn-lt"/>
-                          <a:ea typeface="Malgun Gothic" panose="020B0503020000020004" pitchFamily="34" charset="-127"/>
-                          <a:cs typeface="Arial" panose="020B0604020202020204" pitchFamily="34" charset="0"/>
-                        </a:rPr>
-                        <a:t> </a:t>
-                      </a:r>
-                      <a:r>
-                        <a:rPr lang="en-US" sz="1600" b="0" strike="sngStrike">
-                          <a:effectLst/>
-                          <a:latin typeface="+mn-lt"/>
-                          <a:ea typeface="Malgun Gothic" panose="020B0503020000020004" pitchFamily="34" charset="-127"/>
-                          <a:cs typeface="Arial" panose="020B0604020202020204" pitchFamily="34" charset="0"/>
-                        </a:rPr>
-                        <a:t>flow remains operational</a:t>
-                      </a:r>
-                    </a:p>
-                  </a:txBody>
-                  <a:tcPr marL="106700" marR="106700" marT="53350" marB="53350" anchor="ctr">
-                    <a:lnL w="12700" cap="flat" cmpd="sng" algn="ctr">
-                      <a:solidFill>
-                        <a:schemeClr val="tx1"/>
-                      </a:solidFill>
-                      <a:prstDash val="solid"/>
-                      <a:round/>
-                      <a:headEnd type="none" w="med" len="med"/>
-                      <a:tailEnd type="none" w="med" len="med"/>
-                    </a:lnL>
-                    <a:lnR w="12700" cap="flat" cmpd="sng" algn="ctr">
-                      <a:solidFill>
-                        <a:schemeClr val="tx1"/>
-                      </a:solidFill>
-                      <a:prstDash val="solid"/>
-                      <a:round/>
-                      <a:headEnd type="none" w="med" len="med"/>
-                      <a:tailEnd type="none" w="med" len="med"/>
-                    </a:lnR>
-                    <a:lnT w="12700" cap="flat" cmpd="sng" algn="ctr">
-                      <a:solidFill>
-                        <a:schemeClr val="tx1"/>
-                      </a:solidFill>
-                      <a:prstDash val="solid"/>
-                      <a:round/>
-                      <a:headEnd type="none" w="med" len="med"/>
-                      <a:tailEnd type="none" w="med" len="med"/>
-                    </a:lnT>
-                    <a:lnB w="12700" cap="flat" cmpd="sng" algn="ctr">
-                      <a:solidFill>
-                        <a:schemeClr val="tx1"/>
-                      </a:solidFill>
-                      <a:prstDash val="solid"/>
-                      <a:round/>
-                      <a:headEnd type="none" w="med" len="med"/>
-                      <a:tailEnd type="none" w="med" len="med"/>
-                    </a:lnB>
-                  </a:tcPr>
-                </a:tc>
-                <a:tc>
-                  <a:txBody>
-                    <a:bodyPr/>
-                    <a:lstStyle/>
-                    <a:p>
-                      <a:pPr marL="0" marR="0" indent="0" algn="l" defTabSz="914400" rtl="0" eaLnBrk="1" fontAlgn="auto" latinLnBrk="0" hangingPunct="1">
-                        <a:lnSpc>
-                          <a:spcPct val="150000"/>
-                        </a:lnSpc>
-                        <a:spcBef>
-                          <a:spcPts val="0"/>
-                        </a:spcBef>
-                        <a:spcAft>
-                          <a:spcPts val="0"/>
-                        </a:spcAft>
-                        <a:buClrTx/>
-                        <a:buSzTx/>
-                        <a:buFontTx/>
-                        <a:buNone/>
-                        <a:tabLst/>
-                        <a:defRPr/>
-                      </a:pPr>
-                      <a:r>
-                        <a:rPr lang="en-US" sz="1600" b="0" strike="sngStrike">
-                          <a:effectLst/>
-                          <a:latin typeface="+mn-lt"/>
-                          <a:ea typeface="Malgun Gothic" panose="020B0503020000020004" pitchFamily="34" charset="-127"/>
-                          <a:cs typeface="Arial" panose="020B0604020202020204" pitchFamily="34" charset="0"/>
-                        </a:rPr>
-                        <a:t>Availability</a:t>
-                      </a:r>
-                    </a:p>
-                  </a:txBody>
-                  <a:tcPr marL="106700" marR="106700" marT="53350" marB="53350" anchor="ctr">
-                    <a:lnL w="12700" cap="flat" cmpd="sng" algn="ctr">
-                      <a:solidFill>
-                        <a:schemeClr val="tx1"/>
-                      </a:solidFill>
-                      <a:prstDash val="solid"/>
-                      <a:round/>
-                      <a:headEnd type="none" w="med" len="med"/>
-                      <a:tailEnd type="none" w="med" len="med"/>
-                    </a:lnL>
-                    <a:lnR w="12700" cap="flat" cmpd="sng" algn="ctr">
-                      <a:solidFill>
-                        <a:schemeClr val="tx1"/>
-                      </a:solidFill>
-                      <a:prstDash val="solid"/>
-                      <a:round/>
-                      <a:headEnd type="none" w="med" len="med"/>
-                      <a:tailEnd type="none" w="med" len="med"/>
-                    </a:lnR>
-                    <a:lnT w="12700" cap="flat" cmpd="sng" algn="ctr">
-                      <a:solidFill>
-                        <a:schemeClr val="tx1"/>
-                      </a:solidFill>
-                      <a:prstDash val="solid"/>
-                      <a:round/>
-                      <a:headEnd type="none" w="med" len="med"/>
-                      <a:tailEnd type="none" w="med" len="med"/>
-                    </a:lnT>
-                    <a:lnB w="12700" cap="flat" cmpd="sng" algn="ctr">
-                      <a:solidFill>
-                        <a:schemeClr val="tx1"/>
-                      </a:solidFill>
-                      <a:prstDash val="solid"/>
-                      <a:round/>
-                      <a:headEnd type="none" w="med" len="med"/>
-                      <a:tailEnd type="none" w="med" len="med"/>
-                    </a:lnB>
-                  </a:tcPr>
-                </a:tc>
-                <a:tc>
-                  <a:txBody>
-                    <a:bodyPr/>
-                    <a:lstStyle/>
-                    <a:p>
-                      <a:pPr algn="l" latinLnBrk="0">
-                        <a:lnSpc>
-                          <a:spcPct val="150000"/>
-                        </a:lnSpc>
-                      </a:pPr>
-                      <a:r>
-                        <a:rPr lang="en-US" sz="1600" b="0" strike="sngStrike">
-                          <a:latin typeface="+mn-lt"/>
-                          <a:cs typeface="Arial" panose="020B0604020202020204" pitchFamily="34" charset="0"/>
-                        </a:rPr>
-                        <a:t>Low</a:t>
-                      </a:r>
-                    </a:p>
-                  </a:txBody>
-                  <a:tcPr marL="106700" marR="106700" marT="53350" marB="53350" anchor="ctr">
-                    <a:lnL w="12700" cap="flat" cmpd="sng" algn="ctr">
-                      <a:solidFill>
-                        <a:schemeClr val="tx1"/>
-                      </a:solidFill>
-                      <a:prstDash val="solid"/>
-                      <a:round/>
-                      <a:headEnd type="none" w="med" len="med"/>
-                      <a:tailEnd type="none" w="med" len="med"/>
-                    </a:lnL>
-                    <a:lnR w="12700" cap="flat" cmpd="sng" algn="ctr">
-                      <a:solidFill>
-                        <a:schemeClr val="tx1"/>
-                      </a:solidFill>
-                      <a:prstDash val="solid"/>
-                      <a:round/>
-                      <a:headEnd type="none" w="med" len="med"/>
-                      <a:tailEnd type="none" w="med" len="med"/>
-                    </a:lnR>
-                    <a:lnT w="12700" cap="flat" cmpd="sng" algn="ctr">
-                      <a:solidFill>
-                        <a:schemeClr val="tx1"/>
-                      </a:solidFill>
-                      <a:prstDash val="solid"/>
-                      <a:round/>
-                      <a:headEnd type="none" w="med" len="med"/>
-                      <a:tailEnd type="none" w="med" len="med"/>
-                    </a:lnT>
-                    <a:lnB w="12700" cap="flat" cmpd="sng" algn="ctr">
-                      <a:solidFill>
-                        <a:schemeClr val="tx1"/>
-                      </a:solidFill>
-                      <a:prstDash val="solid"/>
-                      <a:round/>
-                      <a:headEnd type="none" w="med" len="med"/>
-                      <a:tailEnd type="none" w="med" len="med"/>
-                    </a:lnB>
-                  </a:tcPr>
-                </a:tc>
-                <a:extLst>
-                  <a:ext uri="{0D108BD9-81ED-4DB2-BD59-A6C34878D82A}">
-                    <a16:rowId xmlns:a16="http://schemas.microsoft.com/office/drawing/2014/main" xmlns="" val="10005"/>
+                    <a16:rowId xmlns:a16="http://schemas.microsoft.com/office/drawing/2014/main" val="10004"/>
                   </a:ext>
                 </a:extLst>
               </a:tr>
@@ -18069,17 +16146,10 @@
   <p:clrMapOvr>
     <a:masterClrMapping/>
   </p:clrMapOvr>
-  <p:timing>
-    <p:tnLst>
-      <p:par>
-        <p:cTn id="1" dur="indefinite" restart="never" nodeType="tmRoot"/>
-      </p:par>
-    </p:tnLst>
-  </p:timing>
 </p:sld>
 </file>
 
-<file path=ppt/slides/slide8.xml><?xml version="1.0" encoding="utf-8"?>
+<file path=ppt/slides/slide7.xml><?xml version="1.0" encoding="utf-8"?>
 <p:sld xmlns:a="http://schemas.openxmlformats.org/drawingml/2006/main" xmlns:r="http://schemas.openxmlformats.org/officeDocument/2006/relationships" xmlns:p="http://schemas.openxmlformats.org/presentationml/2006/main">
   <p:cSld>
     <p:spTree>
@@ -18319,17 +16389,10 @@
   <p:clrMapOvr>
     <a:masterClrMapping/>
   </p:clrMapOvr>
-  <p:timing>
-    <p:tnLst>
-      <p:par>
-        <p:cTn id="1" dur="indefinite" restart="never" nodeType="tmRoot"/>
-      </p:par>
-    </p:tnLst>
-  </p:timing>
 </p:sld>
 </file>
 
-<file path=ppt/slides/slide9.xml><?xml version="1.0" encoding="utf-8"?>
+<file path=ppt/slides/slide8.xml><?xml version="1.0" encoding="utf-8"?>
 <p:sld xmlns:a="http://schemas.openxmlformats.org/drawingml/2006/main" xmlns:r="http://schemas.openxmlformats.org/officeDocument/2006/relationships" xmlns:p="http://schemas.openxmlformats.org/presentationml/2006/main">
   <p:cSld>
     <p:spTree>
@@ -18534,13 +16597,252 @@
   <p:clrMapOvr>
     <a:masterClrMapping/>
   </p:clrMapOvr>
-  <p:timing>
-    <p:tnLst>
-      <p:par>
-        <p:cTn id="1" dur="indefinite" restart="never" nodeType="tmRoot"/>
-      </p:par>
-    </p:tnLst>
-  </p:timing>
+</p:sld>
+</file>
+
+<file path=ppt/slides/slide9.xml><?xml version="1.0" encoding="utf-8"?>
+<p:sld xmlns:a="http://schemas.openxmlformats.org/drawingml/2006/main" xmlns:r="http://schemas.openxmlformats.org/officeDocument/2006/relationships" xmlns:p="http://schemas.openxmlformats.org/presentationml/2006/main">
+  <p:cSld>
+    <p:spTree>
+      <p:nvGrpSpPr>
+        <p:cNvPr id="1" name="">
+          <a:extLst>
+            <a:ext uri="{FF2B5EF4-FFF2-40B4-BE49-F238E27FC236}">
+              <a16:creationId xmlns:a16="http://schemas.microsoft.com/office/drawing/2014/main" id="{7A3A9F39-394E-5437-993F-29D2F2093B00}"/>
+            </a:ext>
+          </a:extLst>
+        </p:cNvPr>
+        <p:cNvGrpSpPr/>
+        <p:nvPr/>
+      </p:nvGrpSpPr>
+      <p:grpSpPr>
+        <a:xfrm>
+          <a:off x="0" y="0"/>
+          <a:ext cx="0" cy="0"/>
+          <a:chOff x="0" y="0"/>
+          <a:chExt cx="0" cy="0"/>
+        </a:xfrm>
+      </p:grpSpPr>
+      <p:pic>
+        <p:nvPicPr>
+          <p:cNvPr id="7" name="Picture 6"/>
+          <p:cNvPicPr>
+            <a:picLocks noChangeAspect="1"/>
+          </p:cNvPicPr>
+          <p:nvPr/>
+        </p:nvPicPr>
+        <p:blipFill>
+          <a:blip r:embed="rId3"/>
+          <a:stretch>
+            <a:fillRect/>
+          </a:stretch>
+        </p:blipFill>
+        <p:spPr>
+          <a:xfrm>
+            <a:off x="3314700" y="2354870"/>
+            <a:ext cx="8678897" cy="4350305"/>
+          </a:xfrm>
+          <a:prstGeom prst="rect">
+            <a:avLst/>
+          </a:prstGeom>
+        </p:spPr>
+      </p:pic>
+      <p:sp>
+        <p:nvSpPr>
+          <p:cNvPr id="2" name="Title 1">
+            <a:extLst>
+              <a:ext uri="{FF2B5EF4-FFF2-40B4-BE49-F238E27FC236}">
+                <a16:creationId xmlns:a16="http://schemas.microsoft.com/office/drawing/2014/main" id="{554F77EA-2B30-AFDC-1349-3C58C2AB9061}"/>
+              </a:ext>
+            </a:extLst>
+          </p:cNvPr>
+          <p:cNvSpPr>
+            <a:spLocks noGrp="1"/>
+          </p:cNvSpPr>
+          <p:nvPr>
+            <p:ph type="title"/>
+          </p:nvPr>
+        </p:nvSpPr>
+        <p:spPr/>
+        <p:txBody>
+          <a:bodyPr/>
+          <a:lstStyle/>
+          <a:p>
+            <a:r>
+              <a:rPr lang="en-US"/>
+              <a:t>Design Alternative – Alt-C: Move </a:t>
+            </a:r>
+            <a:r>
+              <a:rPr lang="en-US" err="1"/>
+              <a:t>RemoteDiag</a:t>
+            </a:r>
+            <a:r>
+              <a:rPr lang="en-US"/>
+              <a:t> + Proxy</a:t>
+            </a:r>
+          </a:p>
+        </p:txBody>
+      </p:sp>
+      <p:sp>
+        <p:nvSpPr>
+          <p:cNvPr id="3" name="Content Placeholder 2">
+            <a:extLst>
+              <a:ext uri="{FF2B5EF4-FFF2-40B4-BE49-F238E27FC236}">
+                <a16:creationId xmlns:a16="http://schemas.microsoft.com/office/drawing/2014/main" id="{64FB7A4A-CF56-C0BD-9AB9-923B2D043291}"/>
+              </a:ext>
+            </a:extLst>
+          </p:cNvPr>
+          <p:cNvSpPr>
+            <a:spLocks noGrp="1"/>
+          </p:cNvSpPr>
+          <p:nvPr>
+            <p:ph idx="1"/>
+          </p:nvPr>
+        </p:nvSpPr>
+        <p:spPr>
+          <a:xfrm>
+            <a:off x="160867" y="990599"/>
+            <a:ext cx="11825921" cy="1219201"/>
+          </a:xfrm>
+        </p:spPr>
+        <p:txBody>
+          <a:bodyPr>
+            <a:normAutofit fontScale="92500" lnSpcReduction="20000"/>
+          </a:bodyPr>
+          <a:lstStyle/>
+          <a:p>
+            <a:r>
+              <a:rPr lang="en-US" sz="1800"/>
+              <a:t>Move RemoteDiag into the IP container.</a:t>
+            </a:r>
+          </a:p>
+          <a:p>
+            <a:r>
+              <a:rPr lang="en-US" sz="1800"/>
+              <a:t>Add a </a:t>
+            </a:r>
+            <a:r>
+              <a:rPr lang="en-US" sz="1800" b="1"/>
+              <a:t>new RemoteDiagProxy (RDP) component</a:t>
+            </a:r>
+            <a:r>
+              <a:rPr lang="en-US" sz="1800"/>
+              <a:t> in the EP that acts as a </a:t>
+            </a:r>
+            <a:r>
+              <a:rPr lang="en-US" sz="1800" b="1"/>
+              <a:t>transparent proxy</a:t>
+            </a:r>
+            <a:r>
+              <a:rPr lang="en-US" sz="1800"/>
+              <a:t>. </a:t>
+            </a:r>
+          </a:p>
+          <a:p>
+            <a:r>
+              <a:rPr lang="en-US" sz="1800"/>
+              <a:t>EP modules continue to interact with RDP using their existing interface</a:t>
+            </a:r>
+          </a:p>
+          <a:p>
+            <a:r>
+              <a:rPr lang="en-US" sz="1800"/>
+              <a:t>RDP forwards requests to RemoteDiag via UDS socket channel.</a:t>
+            </a:r>
+            <a:endParaRPr lang="en-US" sz="1800" b="1"/>
+          </a:p>
+          <a:p>
+            <a:endParaRPr lang="en-US" sz="1800"/>
+          </a:p>
+        </p:txBody>
+      </p:sp>
+      <p:sp>
+        <p:nvSpPr>
+          <p:cNvPr id="6" name="TextBox 5"/>
+          <p:cNvSpPr txBox="1"/>
+          <p:nvPr/>
+        </p:nvSpPr>
+        <p:spPr>
+          <a:xfrm>
+            <a:off x="6781612" y="6335843"/>
+            <a:ext cx="643125" cy="369332"/>
+          </a:xfrm>
+          <a:prstGeom prst="rect">
+            <a:avLst/>
+          </a:prstGeom>
+          <a:noFill/>
+        </p:spPr>
+        <p:txBody>
+          <a:bodyPr wrap="none" rtlCol="0">
+            <a:spAutoFit/>
+          </a:bodyPr>
+          <a:lstStyle/>
+          <a:p>
+            <a:r>
+              <a:rPr lang="en-US"/>
+              <a:t>Alt-C</a:t>
+            </a:r>
+          </a:p>
+        </p:txBody>
+      </p:sp>
+      <p:pic>
+        <p:nvPicPr>
+          <p:cNvPr id="8" name="Picture 7"/>
+          <p:cNvPicPr>
+            <a:picLocks noChangeAspect="1"/>
+          </p:cNvPicPr>
+          <p:nvPr/>
+        </p:nvPicPr>
+        <p:blipFill>
+          <a:blip r:embed="rId4"/>
+          <a:stretch>
+            <a:fillRect/>
+          </a:stretch>
+        </p:blipFill>
+        <p:spPr>
+          <a:xfrm>
+            <a:off x="9326" y="4530022"/>
+            <a:ext cx="2196413" cy="1688471"/>
+          </a:xfrm>
+          <a:prstGeom prst="rect">
+            <a:avLst/>
+          </a:prstGeom>
+        </p:spPr>
+      </p:pic>
+      <p:pic>
+        <p:nvPicPr>
+          <p:cNvPr id="4" name="Picture 3"/>
+          <p:cNvPicPr>
+            <a:picLocks noChangeAspect="1"/>
+          </p:cNvPicPr>
+          <p:nvPr/>
+        </p:nvPicPr>
+        <p:blipFill>
+          <a:blip r:embed="rId5"/>
+          <a:stretch>
+            <a:fillRect/>
+          </a:stretch>
+        </p:blipFill>
+        <p:spPr>
+          <a:xfrm>
+            <a:off x="2205739" y="2354869"/>
+            <a:ext cx="9937672" cy="4417405"/>
+          </a:xfrm>
+          <a:prstGeom prst="rect">
+            <a:avLst/>
+          </a:prstGeom>
+        </p:spPr>
+      </p:pic>
+    </p:spTree>
+    <p:extLst>
+      <p:ext uri="{BB962C8B-B14F-4D97-AF65-F5344CB8AC3E}">
+        <p14:creationId xmlns:p14="http://schemas.microsoft.com/office/powerpoint/2010/main" val="4181377362"/>
+      </p:ext>
+    </p:extLst>
+  </p:cSld>
+  <p:clrMapOvr>
+    <a:masterClrMapping/>
+  </p:clrMapOvr>
 </p:sld>
 </file>
 

--- a/design/FE_phi.vu_Design of Secure Remote Diag on Container Separation Architecture_3rd.pptx
+++ b/design/FE_phi.vu_Design of Secure Remote Diag on Container Separation Architecture_3rd.pptx
@@ -5,26 +5,27 @@
     <p:sldMasterId id="2147483648" r:id="rId1"/>
   </p:sldMasterIdLst>
   <p:notesMasterIdLst>
-    <p:notesMasterId r:id="rId19"/>
+    <p:notesMasterId r:id="rId20"/>
   </p:notesMasterIdLst>
   <p:sldIdLst>
     <p:sldId id="256" r:id="rId2"/>
     <p:sldId id="257" r:id="rId3"/>
-    <p:sldId id="280" r:id="rId4"/>
-    <p:sldId id="289" r:id="rId5"/>
-    <p:sldId id="262" r:id="rId6"/>
-    <p:sldId id="283" r:id="rId7"/>
-    <p:sldId id="269" r:id="rId8"/>
-    <p:sldId id="271" r:id="rId9"/>
-    <p:sldId id="287" r:id="rId10"/>
-    <p:sldId id="279" r:id="rId11"/>
-    <p:sldId id="292" r:id="rId12"/>
-    <p:sldId id="293" r:id="rId13"/>
-    <p:sldId id="288" r:id="rId14"/>
-    <p:sldId id="291" r:id="rId15"/>
-    <p:sldId id="274" r:id="rId16"/>
-    <p:sldId id="277" r:id="rId17"/>
-    <p:sldId id="276" r:id="rId18"/>
+    <p:sldId id="294" r:id="rId4"/>
+    <p:sldId id="280" r:id="rId5"/>
+    <p:sldId id="289" r:id="rId6"/>
+    <p:sldId id="262" r:id="rId7"/>
+    <p:sldId id="283" r:id="rId8"/>
+    <p:sldId id="269" r:id="rId9"/>
+    <p:sldId id="271" r:id="rId10"/>
+    <p:sldId id="287" r:id="rId11"/>
+    <p:sldId id="279" r:id="rId12"/>
+    <p:sldId id="292" r:id="rId13"/>
+    <p:sldId id="293" r:id="rId14"/>
+    <p:sldId id="288" r:id="rId15"/>
+    <p:sldId id="291" r:id="rId16"/>
+    <p:sldId id="274" r:id="rId17"/>
+    <p:sldId id="277" r:id="rId18"/>
+    <p:sldId id="276" r:id="rId19"/>
   </p:sldIdLst>
   <p:sldSz cx="12192000" cy="6858000"/>
   <p:notesSz cx="6858000" cy="9144000"/>
@@ -224,7 +225,7 @@
           <a:p>
             <a:fld id="{341C17E2-92C1-406A-80C1-BA1B838099E9}" type="datetimeFigureOut">
               <a:rPr lang="en-US" smtClean="0"/>
-              <a:t>9/30/2026</a:t>
+              <a:t>10/4/2026</a:t>
             </a:fld>
             <a:endParaRPr lang="en-US"/>
           </a:p>
@@ -496,7 +497,13 @@
   <p:cSld>
     <p:spTree>
       <p:nvGrpSpPr>
-        <p:cNvPr id="1" name=""/>
+        <p:cNvPr id="1" name="">
+          <a:extLst>
+            <a:ext uri="{FF2B5EF4-FFF2-40B4-BE49-F238E27FC236}">
+              <a16:creationId xmlns:a16="http://schemas.microsoft.com/office/drawing/2014/main" id="{7871B573-D46B-DD18-A2C4-C4082199D6A7}"/>
+            </a:ext>
+          </a:extLst>
+        </p:cNvPr>
         <p:cNvGrpSpPr/>
         <p:nvPr/>
       </p:nvGrpSpPr>
@@ -510,7 +517,13 @@
       </p:grpSpPr>
       <p:sp>
         <p:nvSpPr>
-          <p:cNvPr id="2" name="Slide Image Placeholder 1"/>
+          <p:cNvPr id="2" name="Slide Image Placeholder 1">
+            <a:extLst>
+              <a:ext uri="{FF2B5EF4-FFF2-40B4-BE49-F238E27FC236}">
+                <a16:creationId xmlns:a16="http://schemas.microsoft.com/office/drawing/2014/main" id="{F16CD46A-A877-3DE1-9984-1B961658209F}"/>
+              </a:ext>
+            </a:extLst>
+          </p:cNvPr>
           <p:cNvSpPr>
             <a:spLocks noGrp="1" noRot="1" noChangeAspect="1"/>
           </p:cNvSpPr>
@@ -522,7 +535,13 @@
       </p:sp>
       <p:sp>
         <p:nvSpPr>
-          <p:cNvPr id="3" name="Notes Placeholder 2"/>
+          <p:cNvPr id="3" name="Notes Placeholder 2">
+            <a:extLst>
+              <a:ext uri="{FF2B5EF4-FFF2-40B4-BE49-F238E27FC236}">
+                <a16:creationId xmlns:a16="http://schemas.microsoft.com/office/drawing/2014/main" id="{3CAC9709-5C79-D782-6C8E-2BC9A65C8D0F}"/>
+              </a:ext>
+            </a:extLst>
+          </p:cNvPr>
           <p:cNvSpPr>
             <a:spLocks noGrp="1"/>
           </p:cNvSpPr>
@@ -541,7 +560,13 @@
       </p:sp>
       <p:sp>
         <p:nvSpPr>
-          <p:cNvPr id="4" name="Slide Number Placeholder 3"/>
+          <p:cNvPr id="4" name="Slide Number Placeholder 3">
+            <a:extLst>
+              <a:ext uri="{FF2B5EF4-FFF2-40B4-BE49-F238E27FC236}">
+                <a16:creationId xmlns:a16="http://schemas.microsoft.com/office/drawing/2014/main" id="{CA1C9B43-13E9-E1D6-156A-5CB894C64FDE}"/>
+              </a:ext>
+            </a:extLst>
+          </p:cNvPr>
           <p:cNvSpPr>
             <a:spLocks noGrp="1"/>
           </p:cNvSpPr>
@@ -565,7 +590,7 @@
     </p:spTree>
     <p:extLst>
       <p:ext uri="{BB962C8B-B14F-4D97-AF65-F5344CB8AC3E}">
-        <p14:creationId xmlns:p14="http://schemas.microsoft.com/office/powerpoint/2010/main" val="632864446"/>
+        <p14:creationId xmlns:p14="http://schemas.microsoft.com/office/powerpoint/2010/main" val="1475643500"/>
       </p:ext>
     </p:extLst>
   </p:cSld>
@@ -630,7 +655,7 @@
             <a:spLocks noGrp="1"/>
           </p:cNvSpPr>
           <p:nvPr>
-            <p:ph type="sldNum" sz="quarter" idx="5"/>
+            <p:ph type="sldNum" sz="quarter" idx="10"/>
           </p:nvPr>
         </p:nvSpPr>
         <p:spPr/>
@@ -640,7 +665,7 @@
           <a:p>
             <a:fld id="{EF277405-33BD-42BD-B604-93760E4185DC}" type="slidenum">
               <a:rPr lang="en-US" smtClean="0"/>
-              <a:t>6</a:t>
+              <a:t>4</a:t>
             </a:fld>
             <a:endParaRPr lang="en-US"/>
           </a:p>
@@ -649,7 +674,7 @@
     </p:spTree>
     <p:extLst>
       <p:ext uri="{BB962C8B-B14F-4D97-AF65-F5344CB8AC3E}">
-        <p14:creationId xmlns:p14="http://schemas.microsoft.com/office/powerpoint/2010/main" val="1380153111"/>
+        <p14:creationId xmlns:p14="http://schemas.microsoft.com/office/powerpoint/2010/main" val="632864446"/>
       </p:ext>
     </p:extLst>
   </p:cSld>
@@ -703,48 +728,6 @@
           <a:bodyPr/>
           <a:lstStyle/>
           <a:p>
-            <a:pPr fontAlgn="t"/>
-            <a:r>
-              <a:rPr lang="en-US" sz="1200" b="1" i="0" kern="1200">
-                <a:solidFill>
-                  <a:schemeClr val="tx1"/>
-                </a:solidFill>
-                <a:effectLst/>
-                <a:latin typeface="+mn-lt"/>
-                <a:ea typeface="+mn-ea"/>
-                <a:cs typeface="+mn-cs"/>
-              </a:rPr>
-              <a:t>Trade-offs</a:t>
-            </a:r>
-          </a:p>
-          <a:p>
-            <a:pPr fontAlgn="t"/>
-            <a:r>
-              <a:rPr lang="en-US" sz="1200" b="1" i="0" kern="1200">
-                <a:solidFill>
-                  <a:schemeClr val="tx1"/>
-                </a:solidFill>
-                <a:effectLst/>
-                <a:latin typeface="+mn-lt"/>
-                <a:ea typeface="+mn-ea"/>
-                <a:cs typeface="+mn-cs"/>
-              </a:rPr>
-              <a:t>Maintainability:</a:t>
-            </a:r>
-            <a:r>
-              <a:rPr lang="en-US" sz="1200" b="0" i="0" kern="1200">
-                <a:solidFill>
-                  <a:schemeClr val="tx1"/>
-                </a:solidFill>
-                <a:effectLst/>
-                <a:latin typeface="+mn-lt"/>
-                <a:ea typeface="+mn-ea"/>
-                <a:cs typeface="+mn-cs"/>
-              </a:rPr>
-              <a:t> All EP modules require cross-container IPC support, increasing implementation effort and code-change scope.</a:t>
-            </a:r>
-          </a:p>
-          <a:p>
             <a:endParaRPr lang="en-US"/>
           </a:p>
         </p:txBody>
@@ -756,7 +739,7 @@
             <a:spLocks noGrp="1"/>
           </p:cNvSpPr>
           <p:nvPr>
-            <p:ph type="sldNum" sz="quarter" idx="10"/>
+            <p:ph type="sldNum" sz="quarter" idx="5"/>
           </p:nvPr>
         </p:nvSpPr>
         <p:spPr/>
@@ -766,7 +749,7 @@
           <a:p>
             <a:fld id="{EF277405-33BD-42BD-B604-93760E4185DC}" type="slidenum">
               <a:rPr lang="en-US" smtClean="0"/>
-              <a:t>8</a:t>
+              <a:t>7</a:t>
             </a:fld>
             <a:endParaRPr lang="en-US"/>
           </a:p>
@@ -775,7 +758,7 @@
     </p:spTree>
     <p:extLst>
       <p:ext uri="{BB962C8B-B14F-4D97-AF65-F5344CB8AC3E}">
-        <p14:creationId xmlns:p14="http://schemas.microsoft.com/office/powerpoint/2010/main" val="3809231641"/>
+        <p14:creationId xmlns:p14="http://schemas.microsoft.com/office/powerpoint/2010/main" val="1380153111"/>
       </p:ext>
     </p:extLst>
   </p:cSld>
@@ -829,6 +812,48 @@
           <a:bodyPr/>
           <a:lstStyle/>
           <a:p>
+            <a:pPr fontAlgn="t"/>
+            <a:r>
+              <a:rPr lang="en-US" sz="1200" b="1" i="0" kern="1200">
+                <a:solidFill>
+                  <a:schemeClr val="tx1"/>
+                </a:solidFill>
+                <a:effectLst/>
+                <a:latin typeface="+mn-lt"/>
+                <a:ea typeface="+mn-ea"/>
+                <a:cs typeface="+mn-cs"/>
+              </a:rPr>
+              <a:t>Trade-offs</a:t>
+            </a:r>
+          </a:p>
+          <a:p>
+            <a:pPr fontAlgn="t"/>
+            <a:r>
+              <a:rPr lang="en-US" sz="1200" b="1" i="0" kern="1200">
+                <a:solidFill>
+                  <a:schemeClr val="tx1"/>
+                </a:solidFill>
+                <a:effectLst/>
+                <a:latin typeface="+mn-lt"/>
+                <a:ea typeface="+mn-ea"/>
+                <a:cs typeface="+mn-cs"/>
+              </a:rPr>
+              <a:t>Maintainability:</a:t>
+            </a:r>
+            <a:r>
+              <a:rPr lang="en-US" sz="1200" b="0" i="0" kern="1200">
+                <a:solidFill>
+                  <a:schemeClr val="tx1"/>
+                </a:solidFill>
+                <a:effectLst/>
+                <a:latin typeface="+mn-lt"/>
+                <a:ea typeface="+mn-ea"/>
+                <a:cs typeface="+mn-cs"/>
+              </a:rPr>
+              <a:t> All EP modules require cross-container IPC support, increasing implementation effort and code-change scope.</a:t>
+            </a:r>
+          </a:p>
+          <a:p>
             <a:endParaRPr lang="en-US"/>
           </a:p>
         </p:txBody>
@@ -859,7 +884,7 @@
     </p:spTree>
     <p:extLst>
       <p:ext uri="{BB962C8B-B14F-4D97-AF65-F5344CB8AC3E}">
-        <p14:creationId xmlns:p14="http://schemas.microsoft.com/office/powerpoint/2010/main" val="3467681225"/>
+        <p14:creationId xmlns:p14="http://schemas.microsoft.com/office/powerpoint/2010/main" val="3809231641"/>
       </p:ext>
     </p:extLst>
   </p:cSld>
@@ -935,6 +960,90 @@
             <a:fld id="{EF277405-33BD-42BD-B604-93760E4185DC}" type="slidenum">
               <a:rPr lang="en-US" smtClean="0"/>
               <a:t>10</a:t>
+            </a:fld>
+            <a:endParaRPr lang="en-US"/>
+          </a:p>
+        </p:txBody>
+      </p:sp>
+    </p:spTree>
+    <p:extLst>
+      <p:ext uri="{BB962C8B-B14F-4D97-AF65-F5344CB8AC3E}">
+        <p14:creationId xmlns:p14="http://schemas.microsoft.com/office/powerpoint/2010/main" val="3467681225"/>
+      </p:ext>
+    </p:extLst>
+  </p:cSld>
+  <p:clrMapOvr>
+    <a:masterClrMapping/>
+  </p:clrMapOvr>
+</p:notes>
+</file>
+
+<file path=ppt/notesSlides/notesSlide6.xml><?xml version="1.0" encoding="utf-8"?>
+<p:notes xmlns:a="http://schemas.openxmlformats.org/drawingml/2006/main" xmlns:r="http://schemas.openxmlformats.org/officeDocument/2006/relationships" xmlns:p="http://schemas.openxmlformats.org/presentationml/2006/main">
+  <p:cSld>
+    <p:spTree>
+      <p:nvGrpSpPr>
+        <p:cNvPr id="1" name=""/>
+        <p:cNvGrpSpPr/>
+        <p:nvPr/>
+      </p:nvGrpSpPr>
+      <p:grpSpPr>
+        <a:xfrm>
+          <a:off x="0" y="0"/>
+          <a:ext cx="0" cy="0"/>
+          <a:chOff x="0" y="0"/>
+          <a:chExt cx="0" cy="0"/>
+        </a:xfrm>
+      </p:grpSpPr>
+      <p:sp>
+        <p:nvSpPr>
+          <p:cNvPr id="2" name="Slide Image Placeholder 1"/>
+          <p:cNvSpPr>
+            <a:spLocks noGrp="1" noRot="1" noChangeAspect="1"/>
+          </p:cNvSpPr>
+          <p:nvPr>
+            <p:ph type="sldImg"/>
+          </p:nvPr>
+        </p:nvSpPr>
+        <p:spPr/>
+      </p:sp>
+      <p:sp>
+        <p:nvSpPr>
+          <p:cNvPr id="3" name="Notes Placeholder 2"/>
+          <p:cNvSpPr>
+            <a:spLocks noGrp="1"/>
+          </p:cNvSpPr>
+          <p:nvPr>
+            <p:ph type="body" idx="1"/>
+          </p:nvPr>
+        </p:nvSpPr>
+        <p:spPr/>
+        <p:txBody>
+          <a:bodyPr/>
+          <a:lstStyle/>
+          <a:p>
+            <a:endParaRPr lang="en-US"/>
+          </a:p>
+        </p:txBody>
+      </p:sp>
+      <p:sp>
+        <p:nvSpPr>
+          <p:cNvPr id="4" name="Slide Number Placeholder 3"/>
+          <p:cNvSpPr>
+            <a:spLocks noGrp="1"/>
+          </p:cNvSpPr>
+          <p:nvPr>
+            <p:ph type="sldNum" sz="quarter" idx="10"/>
+          </p:nvPr>
+        </p:nvSpPr>
+        <p:spPr/>
+        <p:txBody>
+          <a:bodyPr/>
+          <a:lstStyle/>
+          <a:p>
+            <a:fld id="{EF277405-33BD-42BD-B604-93760E4185DC}" type="slidenum">
+              <a:rPr lang="en-US" smtClean="0"/>
+              <a:t>11</a:t>
             </a:fld>
             <a:endParaRPr lang="en-US"/>
           </a:p>
@@ -1082,7 +1191,7 @@
           <a:p>
             <a:fld id="{B934B22C-8C05-4817-830F-8B9F9DEAE546}" type="datetimeFigureOut">
               <a:rPr lang="en-US" smtClean="0"/>
-              <a:t>9/30/2026</a:t>
+              <a:t>10/4/2026</a:t>
             </a:fld>
             <a:endParaRPr lang="en-US"/>
           </a:p>
@@ -1250,7 +1359,7 @@
           <a:p>
             <a:fld id="{B934B22C-8C05-4817-830F-8B9F9DEAE546}" type="datetimeFigureOut">
               <a:rPr lang="en-US" smtClean="0"/>
-              <a:t>9/30/2026</a:t>
+              <a:t>10/4/2026</a:t>
             </a:fld>
             <a:endParaRPr lang="en-US"/>
           </a:p>
@@ -1428,7 +1537,7 @@
           <a:p>
             <a:fld id="{B934B22C-8C05-4817-830F-8B9F9DEAE546}" type="datetimeFigureOut">
               <a:rPr lang="en-US" smtClean="0"/>
-              <a:t>9/30/2026</a:t>
+              <a:t>10/4/2026</a:t>
             </a:fld>
             <a:endParaRPr lang="en-US"/>
           </a:p>
@@ -1622,7 +1731,7 @@
           <a:p>
             <a:fld id="{B934B22C-8C05-4817-830F-8B9F9DEAE546}" type="datetimeFigureOut">
               <a:rPr lang="en-US" smtClean="0"/>
-              <a:t>9/30/2026</a:t>
+              <a:t>10/4/2026</a:t>
             </a:fld>
             <a:endParaRPr lang="en-US"/>
           </a:p>
@@ -1927,7 +2036,7 @@
           <a:p>
             <a:fld id="{B934B22C-8C05-4817-830F-8B9F9DEAE546}" type="datetimeFigureOut">
               <a:rPr lang="en-US" smtClean="0"/>
-              <a:t>9/30/2026</a:t>
+              <a:t>10/4/2026</a:t>
             </a:fld>
             <a:endParaRPr lang="en-US"/>
           </a:p>
@@ -2156,7 +2265,7 @@
           <a:p>
             <a:fld id="{B934B22C-8C05-4817-830F-8B9F9DEAE546}" type="datetimeFigureOut">
               <a:rPr lang="en-US" smtClean="0"/>
-              <a:t>9/30/2026</a:t>
+              <a:t>10/4/2026</a:t>
             </a:fld>
             <a:endParaRPr lang="en-US"/>
           </a:p>
@@ -2520,7 +2629,7 @@
           <a:p>
             <a:fld id="{B934B22C-8C05-4817-830F-8B9F9DEAE546}" type="datetimeFigureOut">
               <a:rPr lang="en-US" smtClean="0"/>
-              <a:t>9/30/2026</a:t>
+              <a:t>10/4/2026</a:t>
             </a:fld>
             <a:endParaRPr lang="en-US"/>
           </a:p>
@@ -2637,7 +2746,7 @@
           <a:p>
             <a:fld id="{B934B22C-8C05-4817-830F-8B9F9DEAE546}" type="datetimeFigureOut">
               <a:rPr lang="en-US" smtClean="0"/>
-              <a:t>9/30/2026</a:t>
+              <a:t>10/4/2026</a:t>
             </a:fld>
             <a:endParaRPr lang="en-US"/>
           </a:p>
@@ -2732,7 +2841,7 @@
           <a:p>
             <a:fld id="{B934B22C-8C05-4817-830F-8B9F9DEAE546}" type="datetimeFigureOut">
               <a:rPr lang="en-US" smtClean="0"/>
-              <a:t>9/30/2026</a:t>
+              <a:t>10/4/2026</a:t>
             </a:fld>
             <a:endParaRPr lang="en-US"/>
           </a:p>
@@ -3007,7 +3116,7 @@
           <a:p>
             <a:fld id="{B934B22C-8C05-4817-830F-8B9F9DEAE546}" type="datetimeFigureOut">
               <a:rPr lang="en-US" smtClean="0"/>
-              <a:t>9/30/2026</a:t>
+              <a:t>10/4/2026</a:t>
             </a:fld>
             <a:endParaRPr lang="en-US"/>
           </a:p>
@@ -3259,7 +3368,7 @@
           <a:p>
             <a:fld id="{B934B22C-8C05-4817-830F-8B9F9DEAE546}" type="datetimeFigureOut">
               <a:rPr lang="en-US" smtClean="0"/>
-              <a:t>9/30/2026</a:t>
+              <a:t>10/4/2026</a:t>
             </a:fld>
             <a:endParaRPr lang="en-US"/>
           </a:p>
@@ -3470,7 +3579,7 @@
           <a:p>
             <a:fld id="{B934B22C-8C05-4817-830F-8B9F9DEAE546}" type="datetimeFigureOut">
               <a:rPr lang="en-US" smtClean="0"/>
-              <a:t>9/30/2026</a:t>
+              <a:t>10/4/2026</a:t>
             </a:fld>
             <a:endParaRPr lang="en-US"/>
           </a:p>
@@ -4022,6 +4131,270 @@
   <p:cSld>
     <p:spTree>
       <p:nvGrpSpPr>
+        <p:cNvPr id="1" name="">
+          <a:extLst>
+            <a:ext uri="{FF2B5EF4-FFF2-40B4-BE49-F238E27FC236}">
+              <a16:creationId xmlns:a16="http://schemas.microsoft.com/office/drawing/2014/main" id="{7A3A9F39-394E-5437-993F-29D2F2093B00}"/>
+            </a:ext>
+          </a:extLst>
+        </p:cNvPr>
+        <p:cNvGrpSpPr/>
+        <p:nvPr/>
+      </p:nvGrpSpPr>
+      <p:grpSpPr>
+        <a:xfrm>
+          <a:off x="0" y="0"/>
+          <a:ext cx="0" cy="0"/>
+          <a:chOff x="0" y="0"/>
+          <a:chExt cx="0" cy="0"/>
+        </a:xfrm>
+      </p:grpSpPr>
+      <p:pic>
+        <p:nvPicPr>
+          <p:cNvPr id="13" name="Picture 12">
+            <a:extLst>
+              <a:ext uri="{FF2B5EF4-FFF2-40B4-BE49-F238E27FC236}">
+                <a16:creationId xmlns:a16="http://schemas.microsoft.com/office/drawing/2014/main" id="{D51D2743-5B87-CC81-8D97-271314E9E8B1}"/>
+              </a:ext>
+            </a:extLst>
+          </p:cNvPr>
+          <p:cNvPicPr>
+            <a:picLocks noChangeAspect="1"/>
+          </p:cNvPicPr>
+          <p:nvPr/>
+        </p:nvPicPr>
+        <p:blipFill>
+          <a:blip r:embed="rId3"/>
+          <a:stretch>
+            <a:fillRect/>
+          </a:stretch>
+        </p:blipFill>
+        <p:spPr>
+          <a:xfrm>
+            <a:off x="2205739" y="2354869"/>
+            <a:ext cx="9937672" cy="4415152"/>
+          </a:xfrm>
+          <a:prstGeom prst="rect">
+            <a:avLst/>
+          </a:prstGeom>
+        </p:spPr>
+      </p:pic>
+      <p:sp>
+        <p:nvSpPr>
+          <p:cNvPr id="2" name="Title 1">
+            <a:extLst>
+              <a:ext uri="{FF2B5EF4-FFF2-40B4-BE49-F238E27FC236}">
+                <a16:creationId xmlns:a16="http://schemas.microsoft.com/office/drawing/2014/main" id="{554F77EA-2B30-AFDC-1349-3C58C2AB9061}"/>
+              </a:ext>
+            </a:extLst>
+          </p:cNvPr>
+          <p:cNvSpPr>
+            <a:spLocks noGrp="1"/>
+          </p:cNvSpPr>
+          <p:nvPr>
+            <p:ph type="title"/>
+          </p:nvPr>
+        </p:nvSpPr>
+        <p:spPr/>
+        <p:txBody>
+          <a:bodyPr/>
+          <a:lstStyle/>
+          <a:p>
+            <a:r>
+              <a:rPr lang="en-US"/>
+              <a:t>Design Alternative – Alt-C: Move </a:t>
+            </a:r>
+            <a:r>
+              <a:rPr lang="en-US" err="1"/>
+              <a:t>RemoteDiag</a:t>
+            </a:r>
+            <a:r>
+              <a:rPr lang="en-US"/>
+              <a:t> + Proxy</a:t>
+            </a:r>
+          </a:p>
+        </p:txBody>
+      </p:sp>
+      <p:sp>
+        <p:nvSpPr>
+          <p:cNvPr id="3" name="Content Placeholder 2">
+            <a:extLst>
+              <a:ext uri="{FF2B5EF4-FFF2-40B4-BE49-F238E27FC236}">
+                <a16:creationId xmlns:a16="http://schemas.microsoft.com/office/drawing/2014/main" id="{64FB7A4A-CF56-C0BD-9AB9-923B2D043291}"/>
+              </a:ext>
+            </a:extLst>
+          </p:cNvPr>
+          <p:cNvSpPr>
+            <a:spLocks noGrp="1"/>
+          </p:cNvSpPr>
+          <p:nvPr>
+            <p:ph idx="1"/>
+          </p:nvPr>
+        </p:nvSpPr>
+        <p:spPr>
+          <a:xfrm>
+            <a:off x="160867" y="990599"/>
+            <a:ext cx="11825921" cy="1219201"/>
+          </a:xfrm>
+        </p:spPr>
+        <p:txBody>
+          <a:bodyPr>
+            <a:normAutofit fontScale="92500" lnSpcReduction="20000"/>
+          </a:bodyPr>
+          <a:lstStyle/>
+          <a:p>
+            <a:r>
+              <a:rPr lang="en-US" sz="1800" dirty="0"/>
+              <a:t>Move </a:t>
+            </a:r>
+            <a:r>
+              <a:rPr lang="en-US" sz="1800" dirty="0" err="1"/>
+              <a:t>RemoteDiag</a:t>
+            </a:r>
+            <a:r>
+              <a:rPr lang="en-US" sz="1800" dirty="0"/>
+              <a:t> into the IP container.</a:t>
+            </a:r>
+          </a:p>
+          <a:p>
+            <a:r>
+              <a:rPr lang="en-US" sz="1800" dirty="0"/>
+              <a:t>Add a </a:t>
+            </a:r>
+            <a:r>
+              <a:rPr lang="en-US" sz="1800" b="1" dirty="0"/>
+              <a:t>new </a:t>
+            </a:r>
+            <a:r>
+              <a:rPr lang="en-US" sz="1800" b="1" dirty="0" err="1"/>
+              <a:t>RemoteDiagProxy</a:t>
+            </a:r>
+            <a:r>
+              <a:rPr lang="en-US" sz="1800" b="1" dirty="0"/>
+              <a:t> (RDP) component</a:t>
+            </a:r>
+            <a:r>
+              <a:rPr lang="en-US" sz="1800" dirty="0"/>
+              <a:t> in the EP that acts as a </a:t>
+            </a:r>
+            <a:r>
+              <a:rPr lang="en-US" sz="1800" b="1" dirty="0"/>
+              <a:t>transparent proxy</a:t>
+            </a:r>
+            <a:r>
+              <a:rPr lang="en-US" sz="1800" dirty="0"/>
+              <a:t>. </a:t>
+            </a:r>
+          </a:p>
+          <a:p>
+            <a:r>
+              <a:rPr lang="en-US" sz="1800" dirty="0"/>
+              <a:t>EP modules continue to interact with RDP using their existing interface</a:t>
+            </a:r>
+          </a:p>
+          <a:p>
+            <a:r>
+              <a:rPr lang="en-US" sz="1800" dirty="0"/>
+              <a:t>RDP forwards requests to </a:t>
+            </a:r>
+            <a:r>
+              <a:rPr lang="en-US" sz="1800" dirty="0" err="1"/>
+              <a:t>RemoteDiag</a:t>
+            </a:r>
+            <a:r>
+              <a:rPr lang="en-US" sz="1800" dirty="0"/>
+              <a:t> via UDS socket channel.</a:t>
+            </a:r>
+            <a:endParaRPr lang="en-US" sz="1800" b="1" dirty="0"/>
+          </a:p>
+          <a:p>
+            <a:endParaRPr lang="en-US" sz="1800" dirty="0"/>
+          </a:p>
+        </p:txBody>
+      </p:sp>
+      <p:pic>
+        <p:nvPicPr>
+          <p:cNvPr id="11" name="Picture 10">
+            <a:extLst>
+              <a:ext uri="{FF2B5EF4-FFF2-40B4-BE49-F238E27FC236}">
+                <a16:creationId xmlns:a16="http://schemas.microsoft.com/office/drawing/2014/main" id="{B0A483E6-6ECF-F5F2-5FFC-55A9FD629F07}"/>
+              </a:ext>
+            </a:extLst>
+          </p:cNvPr>
+          <p:cNvPicPr>
+            <a:picLocks noChangeAspect="1"/>
+          </p:cNvPicPr>
+          <p:nvPr/>
+        </p:nvPicPr>
+        <p:blipFill>
+          <a:blip r:embed="rId4"/>
+          <a:stretch>
+            <a:fillRect/>
+          </a:stretch>
+        </p:blipFill>
+        <p:spPr>
+          <a:xfrm>
+            <a:off x="160866" y="4783026"/>
+            <a:ext cx="1863379" cy="1532727"/>
+          </a:xfrm>
+          <a:prstGeom prst="rect">
+            <a:avLst/>
+          </a:prstGeom>
+        </p:spPr>
+      </p:pic>
+      <p:sp>
+        <p:nvSpPr>
+          <p:cNvPr id="15" name="TextBox 14">
+            <a:extLst>
+              <a:ext uri="{FF2B5EF4-FFF2-40B4-BE49-F238E27FC236}">
+                <a16:creationId xmlns:a16="http://schemas.microsoft.com/office/drawing/2014/main" id="{12425196-F6FB-6F05-9DFF-490CE43C23AD}"/>
+              </a:ext>
+            </a:extLst>
+          </p:cNvPr>
+          <p:cNvSpPr txBox="1"/>
+          <p:nvPr/>
+        </p:nvSpPr>
+        <p:spPr>
+          <a:xfrm>
+            <a:off x="6898742" y="6315754"/>
+            <a:ext cx="641522" cy="369332"/>
+          </a:xfrm>
+          <a:prstGeom prst="rect">
+            <a:avLst/>
+          </a:prstGeom>
+          <a:noFill/>
+        </p:spPr>
+        <p:txBody>
+          <a:bodyPr wrap="none" rtlCol="0">
+            <a:spAutoFit/>
+          </a:bodyPr>
+          <a:lstStyle/>
+          <a:p>
+            <a:r>
+              <a:rPr lang="en-US" dirty="0"/>
+              <a:t>Alt-C</a:t>
+            </a:r>
+          </a:p>
+        </p:txBody>
+      </p:sp>
+    </p:spTree>
+    <p:extLst>
+      <p:ext uri="{BB962C8B-B14F-4D97-AF65-F5344CB8AC3E}">
+        <p14:creationId xmlns:p14="http://schemas.microsoft.com/office/powerpoint/2010/main" val="4181377362"/>
+      </p:ext>
+    </p:extLst>
+  </p:cSld>
+  <p:clrMapOvr>
+    <a:masterClrMapping/>
+  </p:clrMapOvr>
+</p:sld>
+</file>
+
+<file path=ppt/slides/slide11.xml><?xml version="1.0" encoding="utf-8"?>
+<p:sld xmlns:a="http://schemas.openxmlformats.org/drawingml/2006/main" xmlns:r="http://schemas.openxmlformats.org/officeDocument/2006/relationships" xmlns:p="http://schemas.openxmlformats.org/presentationml/2006/main">
+  <p:cSld>
+    <p:spTree>
+      <p:nvGrpSpPr>
         <p:cNvPr id="1" name=""/>
         <p:cNvGrpSpPr/>
         <p:nvPr/>
@@ -4119,14 +4492,14 @@
           <p:nvPr>
             <p:extLst>
               <p:ext uri="{D42A27DB-BD31-4B8C-83A1-F6EECF244321}">
-                <p14:modId xmlns:p14="http://schemas.microsoft.com/office/powerpoint/2010/main" val="3810738059"/>
+                <p14:modId xmlns:p14="http://schemas.microsoft.com/office/powerpoint/2010/main" val="217221726"/>
               </p:ext>
             </p:extLst>
           </p:nvPr>
         </p:nvGraphicFramePr>
         <p:xfrm>
           <a:off x="72428" y="725354"/>
-          <a:ext cx="12050161" cy="3880605"/>
+          <a:ext cx="12050161" cy="4798033"/>
         </p:xfrm>
         <a:graphic>
           <a:graphicData uri="http://schemas.openxmlformats.org/drawingml/2006/table">
@@ -5498,14 +5871,14 @@
                         </a:spcAft>
                       </a:pPr>
                       <a:r>
-                        <a:rPr lang="en-US" sz="1300" b="1">
+                        <a:rPr lang="en-US" sz="1300" b="1" dirty="0">
                           <a:solidFill>
                             <a:srgbClr val="FF0000"/>
                           </a:solidFill>
                         </a:rPr>
                         <a:t>Low</a:t>
                       </a:r>
-                      <a:endParaRPr lang="en-US" sz="1300" b="1" kern="1200" baseline="0">
+                      <a:endParaRPr lang="en-US" sz="1300" b="1" kern="1200" baseline="0" dirty="0">
                         <a:solidFill>
                           <a:schemeClr val="dk1"/>
                         </a:solidFill>
@@ -5528,7 +5901,7 @@
                         </a:spcAft>
                       </a:pPr>
                       <a:r>
-                        <a:rPr lang="en-US" sz="1300" b="0" kern="1200" baseline="0">
+                        <a:rPr lang="en-US" sz="1300" b="0" kern="1200" baseline="0" dirty="0" err="1">
                           <a:solidFill>
                             <a:schemeClr val="dk1"/>
                           </a:solidFill>
@@ -5537,10 +5910,10 @@
                           <a:ea typeface="+mn-ea"/>
                           <a:cs typeface="Arial" panose="020B0604020202020204" pitchFamily="34" charset="0"/>
                         </a:rPr>
-                        <a:t>RemoteDiag and OnBoardClient’s responsibility is changed (</a:t>
+                        <a:t>RemoteDiag</a:t>
                       </a:r>
                       <a:r>
-                        <a:rPr lang="en-US" sz="1300" b="1" kern="1200" baseline="0">
+                        <a:rPr lang="en-US" sz="1300" b="0" kern="1200" baseline="0" dirty="0">
                           <a:solidFill>
                             <a:schemeClr val="dk1"/>
                           </a:solidFill>
@@ -5549,10 +5922,10 @@
                           <a:ea typeface="+mn-ea"/>
                           <a:cs typeface="Arial" panose="020B0604020202020204" pitchFamily="34" charset="0"/>
                         </a:rPr>
-                        <a:t>diagnostic priority control</a:t>
+                        <a:t> and </a:t>
                       </a:r>
                       <a:r>
-                        <a:rPr lang="en-US" sz="1300" b="0" kern="1200" baseline="0">
+                        <a:rPr lang="en-US" sz="1300" b="0" kern="1200" baseline="0" dirty="0" err="1">
                           <a:solidFill>
                             <a:schemeClr val="dk1"/>
                           </a:solidFill>
@@ -5561,7 +5934,165 @@
                           <a:ea typeface="+mn-ea"/>
                           <a:cs typeface="Arial" panose="020B0604020202020204" pitchFamily="34" charset="0"/>
                         </a:rPr>
-                        <a:t> is moved to OnBoardClient), requiring requirement updates.</a:t>
+                        <a:t>OnBoardClient’s</a:t>
+                      </a:r>
+                      <a:r>
+                        <a:rPr lang="en-US" sz="1300" b="0" kern="1200" baseline="0" dirty="0">
+                          <a:solidFill>
+                            <a:schemeClr val="dk1"/>
+                          </a:solidFill>
+                          <a:effectLst/>
+                          <a:latin typeface="+mn-lt"/>
+                          <a:ea typeface="+mn-ea"/>
+                          <a:cs typeface="Arial" panose="020B0604020202020204" pitchFamily="34" charset="0"/>
+                        </a:rPr>
+                        <a:t> responsibility is changed:</a:t>
+                      </a:r>
+                    </a:p>
+                    <a:p>
+                      <a:pPr marL="0" marR="0" algn="l">
+                        <a:lnSpc>
+                          <a:spcPct val="110000"/>
+                        </a:lnSpc>
+                        <a:spcBef>
+                          <a:spcPts val="200"/>
+                        </a:spcBef>
+                        <a:spcAft>
+                          <a:spcPts val="200"/>
+                        </a:spcAft>
+                      </a:pPr>
+                      <a:r>
+                        <a:rPr lang="en-US" sz="1300" b="0" kern="1200" baseline="0" dirty="0">
+                          <a:solidFill>
+                            <a:schemeClr val="dk1"/>
+                          </a:solidFill>
+                          <a:effectLst/>
+                          <a:latin typeface="+mn-lt"/>
+                          <a:ea typeface="+mn-ea"/>
+                          <a:cs typeface="Arial" panose="020B0604020202020204" pitchFamily="34" charset="0"/>
+                        </a:rPr>
+                        <a:t>- </a:t>
+                      </a:r>
+                      <a:r>
+                        <a:rPr lang="en-US" sz="1300" b="1" kern="1200" baseline="0" dirty="0">
+                          <a:solidFill>
+                            <a:schemeClr val="dk1"/>
+                          </a:solidFill>
+                          <a:effectLst/>
+                          <a:latin typeface="+mn-lt"/>
+                          <a:ea typeface="+mn-ea"/>
+                          <a:cs typeface="Arial" panose="020B0604020202020204" pitchFamily="34" charset="0"/>
+                        </a:rPr>
+                        <a:t>Diagnostic priority control</a:t>
+                      </a:r>
+                      <a:r>
+                        <a:rPr lang="en-US" sz="1300" b="0" kern="1200" baseline="0" dirty="0">
+                          <a:solidFill>
+                            <a:schemeClr val="dk1"/>
+                          </a:solidFill>
+                          <a:effectLst/>
+                          <a:latin typeface="+mn-lt"/>
+                          <a:ea typeface="+mn-ea"/>
+                          <a:cs typeface="Arial" panose="020B0604020202020204" pitchFamily="34" charset="0"/>
+                        </a:rPr>
+                        <a:t> is moved to </a:t>
+                      </a:r>
+                      <a:r>
+                        <a:rPr lang="en-US" sz="1300" b="0" kern="1200" baseline="0" dirty="0" err="1">
+                          <a:solidFill>
+                            <a:schemeClr val="dk1"/>
+                          </a:solidFill>
+                          <a:effectLst/>
+                          <a:latin typeface="+mn-lt"/>
+                          <a:ea typeface="+mn-ea"/>
+                          <a:cs typeface="Arial" panose="020B0604020202020204" pitchFamily="34" charset="0"/>
+                        </a:rPr>
+                        <a:t>OnBoardClient</a:t>
+                      </a:r>
+                      <a:r>
+                        <a:rPr lang="en-US" sz="1300" b="0" kern="1200" baseline="0" dirty="0">
+                          <a:solidFill>
+                            <a:schemeClr val="dk1"/>
+                          </a:solidFill>
+                          <a:effectLst/>
+                          <a:latin typeface="+mn-lt"/>
+                          <a:ea typeface="+mn-ea"/>
+                          <a:cs typeface="Arial" panose="020B0604020202020204" pitchFamily="34" charset="0"/>
+                        </a:rPr>
+                        <a:t> which requires requirement updates.</a:t>
+                      </a:r>
+                    </a:p>
+                    <a:p>
+                      <a:pPr marL="0" marR="0" algn="l">
+                        <a:lnSpc>
+                          <a:spcPct val="110000"/>
+                        </a:lnSpc>
+                        <a:spcBef>
+                          <a:spcPts val="200"/>
+                        </a:spcBef>
+                        <a:spcAft>
+                          <a:spcPts val="200"/>
+                        </a:spcAft>
+                      </a:pPr>
+                      <a:r>
+                        <a:rPr lang="en-US" sz="1300" b="0" kern="1200" baseline="0" dirty="0">
+                          <a:solidFill>
+                            <a:schemeClr val="dk1"/>
+                          </a:solidFill>
+                          <a:effectLst/>
+                          <a:latin typeface="+mn-lt"/>
+                          <a:ea typeface="+mn-ea"/>
+                          <a:cs typeface="Arial" panose="020B0604020202020204" pitchFamily="34" charset="0"/>
+                        </a:rPr>
+                        <a:t>- Existing </a:t>
+                      </a:r>
+                      <a:r>
+                        <a:rPr lang="en-US" sz="1300" b="0" kern="1200" baseline="0" dirty="0" err="1">
+                          <a:solidFill>
+                            <a:schemeClr val="dk1"/>
+                          </a:solidFill>
+                          <a:effectLst/>
+                          <a:latin typeface="+mn-lt"/>
+                          <a:ea typeface="+mn-ea"/>
+                          <a:cs typeface="Arial" panose="020B0604020202020204" pitchFamily="34" charset="0"/>
+                        </a:rPr>
+                        <a:t>RemoteDiag</a:t>
+                      </a:r>
+                      <a:r>
+                        <a:rPr lang="en-US" sz="1300" b="0" kern="1200" baseline="0" dirty="0">
+                          <a:solidFill>
+                            <a:schemeClr val="dk1"/>
+                          </a:solidFill>
+                          <a:effectLst/>
+                          <a:latin typeface="+mn-lt"/>
+                          <a:ea typeface="+mn-ea"/>
+                          <a:cs typeface="Arial" panose="020B0604020202020204" pitchFamily="34" charset="0"/>
+                        </a:rPr>
+                        <a:t> responsibilities are distributed across </a:t>
+                      </a:r>
+                      <a:r>
+                        <a:rPr lang="en-US" sz="1300" b="1" kern="1200" baseline="0" dirty="0">
+                          <a:solidFill>
+                            <a:schemeClr val="dk1"/>
+                          </a:solidFill>
+                          <a:effectLst/>
+                          <a:latin typeface="+mn-lt"/>
+                          <a:ea typeface="+mn-ea"/>
+                          <a:cs typeface="Arial" panose="020B0604020202020204" pitchFamily="34" charset="0"/>
+                        </a:rPr>
+                        <a:t>two applications</a:t>
+                      </a:r>
+                      <a:r>
+                        <a:rPr lang="en-US" sz="1300" b="0" kern="1200" baseline="0" dirty="0">
+                          <a:solidFill>
+                            <a:schemeClr val="dk1"/>
+                          </a:solidFill>
+                          <a:effectLst/>
+                          <a:latin typeface="+mn-lt"/>
+                          <a:ea typeface="+mn-ea"/>
+                          <a:cs typeface="Arial" panose="020B0604020202020204" pitchFamily="34" charset="0"/>
+                        </a:rPr>
+                        <a:t>, increasing OEM specification and coordination effort.</a:t>
                       </a:r>
                     </a:p>
                   </a:txBody>
@@ -5627,7 +6158,7 @@
                         <a:defRPr/>
                       </a:pPr>
                       <a:r>
-                        <a:rPr lang="en-US" sz="1300" b="1">
+                        <a:rPr lang="en-US" sz="1300" b="1" dirty="0">
                           <a:solidFill>
                             <a:srgbClr val="00B050"/>
                           </a:solidFill>
@@ -5654,7 +6185,7 @@
                         <a:defRPr/>
                       </a:pPr>
                       <a:r>
-                        <a:rPr lang="en-US" sz="1300" b="0" kern="1200" baseline="0">
+                        <a:rPr lang="en-US" sz="1300" b="0" kern="1200" baseline="0" dirty="0">
                           <a:solidFill>
                             <a:schemeClr val="tx1"/>
                           </a:solidFill>
@@ -5925,7 +6456,7 @@
                         </a:spcAft>
                       </a:pPr>
                       <a:r>
-                        <a:rPr lang="en-US" sz="1300" b="1">
+                        <a:rPr lang="en-US" sz="1300" b="1" dirty="0">
                           <a:solidFill>
                             <a:schemeClr val="accent2"/>
                           </a:solidFill>
@@ -5946,7 +6477,7 @@
                         </a:spcAft>
                       </a:pPr>
                       <a:r>
-                        <a:rPr lang="en-US" sz="1300" b="1" kern="1200" baseline="0">
+                        <a:rPr lang="en-US" sz="1300" b="1" kern="1200" baseline="0" dirty="0">
                           <a:solidFill>
                             <a:schemeClr val="dk1"/>
                           </a:solidFill>
@@ -5958,7 +6489,7 @@
                         <a:t>01 additional component is modified </a:t>
                       </a:r>
                       <a:r>
-                        <a:rPr lang="en-US" sz="1300" b="0" kern="1200" baseline="0">
+                        <a:rPr lang="en-US" sz="1300" b="0" kern="1200" baseline="0" dirty="0">
                           <a:solidFill>
                             <a:schemeClr val="dk1"/>
                           </a:solidFill>
@@ -5967,7 +6498,31 @@
                           <a:ea typeface="+mn-ea"/>
                           <a:cs typeface="Arial" panose="020B0604020202020204" pitchFamily="34" charset="0"/>
                         </a:rPr>
-                        <a:t>(OnBoardClient - implements UDS socket server and priority control) </a:t>
+                        <a:t>(</a:t>
+                      </a:r>
+                      <a:r>
+                        <a:rPr lang="en-US" sz="1300" b="0" kern="1200" baseline="0" dirty="0" err="1">
+                          <a:solidFill>
+                            <a:schemeClr val="dk1"/>
+                          </a:solidFill>
+                          <a:effectLst/>
+                          <a:latin typeface="+mn-lt"/>
+                          <a:ea typeface="+mn-ea"/>
+                          <a:cs typeface="Arial" panose="020B0604020202020204" pitchFamily="34" charset="0"/>
+                        </a:rPr>
+                        <a:t>OnBoardClient</a:t>
+                      </a:r>
+                      <a:r>
+                        <a:rPr lang="en-US" sz="1300" b="0" kern="1200" baseline="0" dirty="0">
+                          <a:solidFill>
+                            <a:schemeClr val="dk1"/>
+                          </a:solidFill>
+                          <a:effectLst/>
+                          <a:latin typeface="+mn-lt"/>
+                          <a:ea typeface="+mn-ea"/>
+                          <a:cs typeface="Arial" panose="020B0604020202020204" pitchFamily="34" charset="0"/>
+                        </a:rPr>
+                        <a:t> - implements UDS socket server and priority control) </a:t>
                       </a:r>
                     </a:p>
                   </a:txBody>
@@ -6033,14 +6588,14 @@
                         <a:defRPr/>
                       </a:pPr>
                       <a:r>
-                        <a:rPr lang="en-US" sz="1300" b="1">
+                        <a:rPr lang="en-US" sz="1300" b="1" dirty="0">
                           <a:solidFill>
                             <a:srgbClr val="FF0000"/>
                           </a:solidFill>
                         </a:rPr>
                         <a:t>Low</a:t>
                       </a:r>
-                      <a:endParaRPr lang="en-US" sz="1300" b="0" kern="1200" baseline="0">
+                      <a:endParaRPr lang="en-US" sz="1300" b="0" kern="1200" baseline="0" dirty="0">
                         <a:solidFill>
                           <a:schemeClr val="dk1"/>
                         </a:solidFill>
@@ -6069,7 +6624,7 @@
                         <a:defRPr/>
                       </a:pPr>
                       <a:r>
-                        <a:rPr lang="en-US" sz="1300" b="1" kern="1200" baseline="0">
+                        <a:rPr lang="en-US" sz="1300" b="1" kern="1200" baseline="0" dirty="0">
                           <a:solidFill>
                             <a:schemeClr val="dk1"/>
                           </a:solidFill>
@@ -6081,7 +6636,7 @@
                         <a:t>10 EP modules</a:t>
                       </a:r>
                       <a:r>
-                        <a:rPr lang="en-US" sz="1300" b="0" kern="1200" baseline="0">
+                        <a:rPr lang="en-US" sz="1300" b="0" kern="1200" baseline="0" dirty="0">
                           <a:solidFill>
                             <a:schemeClr val="dk1"/>
                           </a:solidFill>
@@ -6090,7 +6645,55 @@
                           <a:ea typeface="+mn-ea"/>
                           <a:cs typeface="Arial" panose="020B0604020202020204" pitchFamily="34" charset="0"/>
                         </a:rPr>
-                        <a:t> (PowerMgr, HttpMgr, …) have to implement cross-container UDS socket communication and fail-safe handling.</a:t>
+                        <a:t> (</a:t>
+                      </a:r>
+                      <a:r>
+                        <a:rPr lang="en-US" sz="1300" b="0" kern="1200" baseline="0" dirty="0" err="1">
+                          <a:solidFill>
+                            <a:schemeClr val="dk1"/>
+                          </a:solidFill>
+                          <a:effectLst/>
+                          <a:latin typeface="+mn-lt"/>
+                          <a:ea typeface="+mn-ea"/>
+                          <a:cs typeface="Arial" panose="020B0604020202020204" pitchFamily="34" charset="0"/>
+                        </a:rPr>
+                        <a:t>PowerMgr</a:t>
+                      </a:r>
+                      <a:r>
+                        <a:rPr lang="en-US" sz="1300" b="0" kern="1200" baseline="0" dirty="0">
+                          <a:solidFill>
+                            <a:schemeClr val="dk1"/>
+                          </a:solidFill>
+                          <a:effectLst/>
+                          <a:latin typeface="+mn-lt"/>
+                          <a:ea typeface="+mn-ea"/>
+                          <a:cs typeface="Arial" panose="020B0604020202020204" pitchFamily="34" charset="0"/>
+                        </a:rPr>
+                        <a:t>, </a:t>
+                      </a:r>
+                      <a:r>
+                        <a:rPr lang="en-US" sz="1300" b="0" kern="1200" baseline="0" dirty="0" err="1">
+                          <a:solidFill>
+                            <a:schemeClr val="dk1"/>
+                          </a:solidFill>
+                          <a:effectLst/>
+                          <a:latin typeface="+mn-lt"/>
+                          <a:ea typeface="+mn-ea"/>
+                          <a:cs typeface="Arial" panose="020B0604020202020204" pitchFamily="34" charset="0"/>
+                        </a:rPr>
+                        <a:t>HttpMgr</a:t>
+                      </a:r>
+                      <a:r>
+                        <a:rPr lang="en-US" sz="1300" b="0" kern="1200" baseline="0" dirty="0">
+                          <a:solidFill>
+                            <a:schemeClr val="dk1"/>
+                          </a:solidFill>
+                          <a:effectLst/>
+                          <a:latin typeface="+mn-lt"/>
+                          <a:ea typeface="+mn-ea"/>
+                          <a:cs typeface="Arial" panose="020B0604020202020204" pitchFamily="34" charset="0"/>
+                        </a:rPr>
+                        <a:t>, …) have to implement cross-container UDS socket communication and fail-safe handling.</a:t>
                       </a:r>
                     </a:p>
                   </a:txBody>
@@ -6144,14 +6747,14 @@
                         </a:lnSpc>
                       </a:pPr>
                       <a:r>
-                        <a:rPr lang="en-US" sz="1300" b="1">
+                        <a:rPr lang="en-US" sz="1300" b="1" dirty="0">
                           <a:solidFill>
                             <a:srgbClr val="00B050"/>
                           </a:solidFill>
                         </a:rPr>
                         <a:t>High</a:t>
                       </a:r>
-                      <a:endParaRPr lang="en-US" sz="1300" b="0">
+                      <a:endParaRPr lang="en-US" sz="1300" b="0" dirty="0">
                         <a:latin typeface="+mn-lt"/>
                         <a:cs typeface="Arial" panose="020B0604020202020204" pitchFamily="34" charset="0"/>
                       </a:endParaRPr>
@@ -6163,18 +6766,32 @@
                         </a:lnSpc>
                       </a:pPr>
                       <a:r>
-                        <a:rPr lang="en-US" sz="1300" b="1" baseline="0">
+                        <a:rPr lang="en-US" sz="1300" b="1" baseline="0" dirty="0">
                           <a:latin typeface="+mn-lt"/>
                           <a:cs typeface="Arial" panose="020B0604020202020204" pitchFamily="34" charset="0"/>
                         </a:rPr>
                         <a:t>No changes </a:t>
                       </a:r>
                       <a:r>
-                        <a:rPr lang="en-US" sz="1300" b="0" baseline="0">
+                        <a:rPr lang="en-US" sz="1300" b="0" baseline="0" dirty="0">
                           <a:latin typeface="+mn-lt"/>
                           <a:cs typeface="Arial" panose="020B0604020202020204" pitchFamily="34" charset="0"/>
                         </a:rPr>
-                        <a:t>required in existing modules. RemoteDiagProxy preserves the current binder interface</a:t>
+                        <a:t>required in existing modules. </a:t>
+                      </a:r>
+                      <a:r>
+                        <a:rPr lang="en-US" sz="1300" b="0" baseline="0" dirty="0" err="1">
+                          <a:latin typeface="+mn-lt"/>
+                          <a:cs typeface="Arial" panose="020B0604020202020204" pitchFamily="34" charset="0"/>
+                        </a:rPr>
+                        <a:t>RemoteDiagProxy</a:t>
+                      </a:r>
+                      <a:r>
+                        <a:rPr lang="en-US" sz="1300" b="0" baseline="0" dirty="0">
+                          <a:latin typeface="+mn-lt"/>
+                          <a:cs typeface="Arial" panose="020B0604020202020204" pitchFamily="34" charset="0"/>
+                        </a:rPr>
+                        <a:t> preserves the current binder interface</a:t>
                       </a:r>
                     </a:p>
                   </a:txBody>
@@ -6598,7 +7215,7 @@
         </p:blipFill>
         <p:spPr bwMode="auto">
           <a:xfrm>
-            <a:off x="9807521" y="4329969"/>
+            <a:off x="9787350" y="5257816"/>
             <a:ext cx="216024" cy="216024"/>
           </a:xfrm>
           <a:prstGeom prst="rect">
@@ -6629,7 +7246,7 @@
 </p:sld>
 </file>
 
-<file path=ppt/slides/slide11.xml><?xml version="1.0" encoding="utf-8"?>
+<file path=ppt/slides/slide12.xml><?xml version="1.0" encoding="utf-8"?>
 <p:sld xmlns:a="http://schemas.openxmlformats.org/drawingml/2006/main" xmlns:r="http://schemas.openxmlformats.org/officeDocument/2006/relationships" xmlns:p="http://schemas.openxmlformats.org/presentationml/2006/main">
   <p:cSld>
     <p:spTree>
@@ -6737,7 +7354,7 @@
 </p:sld>
 </file>
 
-<file path=ppt/slides/slide12.xml><?xml version="1.0" encoding="utf-8"?>
+<file path=ppt/slides/slide13.xml><?xml version="1.0" encoding="utf-8"?>
 <p:sld xmlns:a="http://schemas.openxmlformats.org/drawingml/2006/main" xmlns:r="http://schemas.openxmlformats.org/officeDocument/2006/relationships" xmlns:p="http://schemas.openxmlformats.org/presentationml/2006/main">
   <p:cSld>
     <p:spTree>
@@ -6837,7 +7454,7 @@
 </p:sld>
 </file>
 
-<file path=ppt/slides/slide13.xml><?xml version="1.0" encoding="utf-8"?>
+<file path=ppt/slides/slide14.xml><?xml version="1.0" encoding="utf-8"?>
 <p:sld xmlns:a="http://schemas.openxmlformats.org/drawingml/2006/main" xmlns:r="http://schemas.openxmlformats.org/officeDocument/2006/relationships" xmlns:p="http://schemas.openxmlformats.org/presentationml/2006/main">
   <p:cSld>
     <p:spTree>
@@ -6976,7 +7593,7 @@
 </p:sld>
 </file>
 
-<file path=ppt/slides/slide14.xml><?xml version="1.0" encoding="utf-8"?>
+<file path=ppt/slides/slide15.xml><?xml version="1.0" encoding="utf-8"?>
 <p:sld xmlns:a="http://schemas.openxmlformats.org/drawingml/2006/main" xmlns:r="http://schemas.openxmlformats.org/officeDocument/2006/relationships" xmlns:p="http://schemas.openxmlformats.org/presentationml/2006/main">
   <p:cSld>
     <p:spTree>
@@ -7091,96 +7708,6 @@
 </p:sld>
 </file>
 
-<file path=ppt/slides/slide15.xml><?xml version="1.0" encoding="utf-8"?>
-<p:sld xmlns:a="http://schemas.openxmlformats.org/drawingml/2006/main" xmlns:r="http://schemas.openxmlformats.org/officeDocument/2006/relationships" xmlns:p="http://schemas.openxmlformats.org/presentationml/2006/main">
-  <p:cSld>
-    <p:spTree>
-      <p:nvGrpSpPr>
-        <p:cNvPr id="1" name=""/>
-        <p:cNvGrpSpPr/>
-        <p:nvPr/>
-      </p:nvGrpSpPr>
-      <p:grpSpPr>
-        <a:xfrm>
-          <a:off x="0" y="0"/>
-          <a:ext cx="0" cy="0"/>
-          <a:chOff x="0" y="0"/>
-          <a:chExt cx="0" cy="0"/>
-        </a:xfrm>
-      </p:grpSpPr>
-      <p:sp>
-        <p:nvSpPr>
-          <p:cNvPr id="2" name="Title 1"/>
-          <p:cNvSpPr>
-            <a:spLocks noGrp="1"/>
-          </p:cNvSpPr>
-          <p:nvPr>
-            <p:ph type="title"/>
-          </p:nvPr>
-        </p:nvSpPr>
-        <p:spPr/>
-        <p:txBody>
-          <a:bodyPr/>
-          <a:lstStyle/>
-          <a:p>
-            <a:endParaRPr lang="en-US"/>
-          </a:p>
-        </p:txBody>
-      </p:sp>
-      <p:sp>
-        <p:nvSpPr>
-          <p:cNvPr id="3" name="Content Placeholder 2"/>
-          <p:cNvSpPr>
-            <a:spLocks noGrp="1"/>
-          </p:cNvSpPr>
-          <p:nvPr>
-            <p:ph idx="1"/>
-          </p:nvPr>
-        </p:nvSpPr>
-        <p:spPr>
-          <a:xfrm>
-            <a:off x="160866" y="2064190"/>
-            <a:ext cx="11887201" cy="4003894"/>
-          </a:xfrm>
-        </p:spPr>
-        <p:txBody>
-          <a:bodyPr>
-            <a:normAutofit/>
-          </a:bodyPr>
-          <a:lstStyle/>
-          <a:p>
-            <a:pPr marL="0" indent="0" algn="ctr">
-              <a:buNone/>
-            </a:pPr>
-            <a:r>
-              <a:rPr lang="en-US" sz="8800" b="1"/>
-              <a:t>Q&amp;A</a:t>
-            </a:r>
-          </a:p>
-          <a:p>
-            <a:pPr marL="0" indent="0" algn="ctr">
-              <a:buNone/>
-            </a:pPr>
-            <a:r>
-              <a:rPr lang="en-US" sz="3600" b="1"/>
-              <a:t>Thank you for listening</a:t>
-            </a:r>
-          </a:p>
-        </p:txBody>
-      </p:sp>
-    </p:spTree>
-    <p:extLst>
-      <p:ext uri="{BB962C8B-B14F-4D97-AF65-F5344CB8AC3E}">
-        <p14:creationId xmlns:p14="http://schemas.microsoft.com/office/powerpoint/2010/main" val="1581111654"/>
-      </p:ext>
-    </p:extLst>
-  </p:cSld>
-  <p:clrMapOvr>
-    <a:masterClrMapping/>
-  </p:clrMapOvr>
-</p:sld>
-</file>
-
 <file path=ppt/slides/slide16.xml><?xml version="1.0" encoding="utf-8"?>
 <p:sld xmlns:a="http://schemas.openxmlformats.org/drawingml/2006/main" xmlns:r="http://schemas.openxmlformats.org/officeDocument/2006/relationships" xmlns:p="http://schemas.openxmlformats.org/presentationml/2006/main">
   <p:cSld>
@@ -7219,6 +7746,96 @@
       </p:sp>
       <p:sp>
         <p:nvSpPr>
+          <p:cNvPr id="3" name="Content Placeholder 2"/>
+          <p:cNvSpPr>
+            <a:spLocks noGrp="1"/>
+          </p:cNvSpPr>
+          <p:nvPr>
+            <p:ph idx="1"/>
+          </p:nvPr>
+        </p:nvSpPr>
+        <p:spPr>
+          <a:xfrm>
+            <a:off x="160866" y="2064190"/>
+            <a:ext cx="11887201" cy="4003894"/>
+          </a:xfrm>
+        </p:spPr>
+        <p:txBody>
+          <a:bodyPr>
+            <a:normAutofit/>
+          </a:bodyPr>
+          <a:lstStyle/>
+          <a:p>
+            <a:pPr marL="0" indent="0" algn="ctr">
+              <a:buNone/>
+            </a:pPr>
+            <a:r>
+              <a:rPr lang="en-US" sz="8800" b="1"/>
+              <a:t>Q&amp;A</a:t>
+            </a:r>
+          </a:p>
+          <a:p>
+            <a:pPr marL="0" indent="0" algn="ctr">
+              <a:buNone/>
+            </a:pPr>
+            <a:r>
+              <a:rPr lang="en-US" sz="3600" b="1"/>
+              <a:t>Thank you for listening</a:t>
+            </a:r>
+          </a:p>
+        </p:txBody>
+      </p:sp>
+    </p:spTree>
+    <p:extLst>
+      <p:ext uri="{BB962C8B-B14F-4D97-AF65-F5344CB8AC3E}">
+        <p14:creationId xmlns:p14="http://schemas.microsoft.com/office/powerpoint/2010/main" val="1581111654"/>
+      </p:ext>
+    </p:extLst>
+  </p:cSld>
+  <p:clrMapOvr>
+    <a:masterClrMapping/>
+  </p:clrMapOvr>
+</p:sld>
+</file>
+
+<file path=ppt/slides/slide17.xml><?xml version="1.0" encoding="utf-8"?>
+<p:sld xmlns:a="http://schemas.openxmlformats.org/drawingml/2006/main" xmlns:r="http://schemas.openxmlformats.org/officeDocument/2006/relationships" xmlns:p="http://schemas.openxmlformats.org/presentationml/2006/main">
+  <p:cSld>
+    <p:spTree>
+      <p:nvGrpSpPr>
+        <p:cNvPr id="1" name=""/>
+        <p:cNvGrpSpPr/>
+        <p:nvPr/>
+      </p:nvGrpSpPr>
+      <p:grpSpPr>
+        <a:xfrm>
+          <a:off x="0" y="0"/>
+          <a:ext cx="0" cy="0"/>
+          <a:chOff x="0" y="0"/>
+          <a:chExt cx="0" cy="0"/>
+        </a:xfrm>
+      </p:grpSpPr>
+      <p:sp>
+        <p:nvSpPr>
+          <p:cNvPr id="2" name="Title 1"/>
+          <p:cNvSpPr>
+            <a:spLocks noGrp="1"/>
+          </p:cNvSpPr>
+          <p:nvPr>
+            <p:ph type="title"/>
+          </p:nvPr>
+        </p:nvSpPr>
+        <p:spPr/>
+        <p:txBody>
+          <a:bodyPr/>
+          <a:lstStyle/>
+          <a:p>
+            <a:endParaRPr lang="en-US"/>
+          </a:p>
+        </p:txBody>
+      </p:sp>
+      <p:sp>
+        <p:nvSpPr>
           <p:cNvPr id="4" name="Content Placeholder 2"/>
           <p:cNvSpPr>
             <a:spLocks noGrp="1"/>
@@ -7262,7 +7879,7 @@
 </p:sld>
 </file>
 
-<file path=ppt/slides/slide17.xml><?xml version="1.0" encoding="utf-8"?>
+<file path=ppt/slides/slide18.xml><?xml version="1.0" encoding="utf-8"?>
 <p:sld xmlns:a="http://schemas.openxmlformats.org/drawingml/2006/main" xmlns:r="http://schemas.openxmlformats.org/officeDocument/2006/relationships" xmlns:p="http://schemas.openxmlformats.org/presentationml/2006/main">
   <p:cSld>
     <p:spTree>
@@ -12743,6 +13360,239 @@
   <p:cSld>
     <p:spTree>
       <p:nvGrpSpPr>
+        <p:cNvPr id="1" name="">
+          <a:extLst>
+            <a:ext uri="{FF2B5EF4-FFF2-40B4-BE49-F238E27FC236}">
+              <a16:creationId xmlns:a16="http://schemas.microsoft.com/office/drawing/2014/main" id="{498DF60D-9815-C72C-E039-867021DB81A5}"/>
+            </a:ext>
+          </a:extLst>
+        </p:cNvPr>
+        <p:cNvGrpSpPr/>
+        <p:nvPr/>
+      </p:nvGrpSpPr>
+      <p:grpSpPr>
+        <a:xfrm>
+          <a:off x="0" y="0"/>
+          <a:ext cx="0" cy="0"/>
+          <a:chOff x="0" y="0"/>
+          <a:chExt cx="0" cy="0"/>
+        </a:xfrm>
+      </p:grpSpPr>
+      <p:sp>
+        <p:nvSpPr>
+          <p:cNvPr id="2" name="Title 1">
+            <a:extLst>
+              <a:ext uri="{FF2B5EF4-FFF2-40B4-BE49-F238E27FC236}">
+                <a16:creationId xmlns:a16="http://schemas.microsoft.com/office/drawing/2014/main" id="{ED5429F4-17DA-8C65-E10D-772D18EA9959}"/>
+              </a:ext>
+            </a:extLst>
+          </p:cNvPr>
+          <p:cNvSpPr>
+            <a:spLocks noGrp="1"/>
+          </p:cNvSpPr>
+          <p:nvPr>
+            <p:ph type="title"/>
+          </p:nvPr>
+        </p:nvSpPr>
+        <p:spPr>
+          <a:xfrm>
+            <a:off x="160866" y="189168"/>
+            <a:ext cx="10871201" cy="672843"/>
+          </a:xfrm>
+        </p:spPr>
+        <p:txBody>
+          <a:bodyPr anchor="ctr">
+            <a:normAutofit/>
+          </a:bodyPr>
+          <a:lstStyle/>
+          <a:p>
+            <a:r>
+              <a:rPr lang="en-US"/>
+              <a:t>Context &amp; Motivation – Toyota 24DCM project</a:t>
+            </a:r>
+          </a:p>
+        </p:txBody>
+      </p:sp>
+      <p:sp>
+        <p:nvSpPr>
+          <p:cNvPr id="7" name="Content Placeholder 6">
+            <a:extLst>
+              <a:ext uri="{FF2B5EF4-FFF2-40B4-BE49-F238E27FC236}">
+                <a16:creationId xmlns:a16="http://schemas.microsoft.com/office/drawing/2014/main" id="{C9BB87FF-FFF5-432F-99E1-3CFA176F711C}"/>
+              </a:ext>
+            </a:extLst>
+          </p:cNvPr>
+          <p:cNvSpPr>
+            <a:spLocks noGrp="1"/>
+          </p:cNvSpPr>
+          <p:nvPr>
+            <p:ph idx="1"/>
+          </p:nvPr>
+        </p:nvSpPr>
+        <p:spPr>
+          <a:xfrm>
+            <a:off x="160866" y="878996"/>
+            <a:ext cx="11916834" cy="1756536"/>
+          </a:xfrm>
+        </p:spPr>
+        <p:txBody>
+          <a:bodyPr>
+            <a:noAutofit/>
+          </a:bodyPr>
+          <a:lstStyle/>
+          <a:p>
+            <a:r>
+              <a:rPr lang="en-US" sz="1800" dirty="0"/>
+              <a:t>Toyota </a:t>
+            </a:r>
+            <a:r>
+              <a:rPr lang="en-US" sz="1800" b="1" dirty="0"/>
+              <a:t>DCM</a:t>
+            </a:r>
+            <a:r>
+              <a:rPr lang="en-US" sz="1800" dirty="0"/>
+              <a:t>: a telematics platform providing connected vehicle services, including </a:t>
+            </a:r>
+            <a:r>
+              <a:rPr lang="en-US" sz="1800" b="1" dirty="0"/>
+              <a:t>remote diagnostics </a:t>
+            </a:r>
+            <a:r>
+              <a:rPr lang="en-US" sz="1800" dirty="0"/>
+              <a:t>from OEM server.</a:t>
+            </a:r>
+          </a:p>
+          <a:p>
+            <a:r>
+              <a:rPr lang="en-US" sz="1800" dirty="0"/>
+              <a:t>Supports diagnostic communication and OTA updates through the Internal CAN bus.</a:t>
+            </a:r>
+          </a:p>
+          <a:p>
+            <a:r>
+              <a:rPr lang="en-US" sz="1800" b="1" dirty="0"/>
+              <a:t>Current architecture</a:t>
+            </a:r>
+            <a:r>
+              <a:rPr lang="en-US" sz="1800" dirty="0"/>
+              <a:t>: monolithic deployment model, with all components running in a single partition.</a:t>
+            </a:r>
+          </a:p>
+        </p:txBody>
+      </p:sp>
+      <p:pic>
+        <p:nvPicPr>
+          <p:cNvPr id="3" name="Picture 2">
+            <a:extLst>
+              <a:ext uri="{FF2B5EF4-FFF2-40B4-BE49-F238E27FC236}">
+                <a16:creationId xmlns:a16="http://schemas.microsoft.com/office/drawing/2014/main" id="{E28FFDEC-FAE3-F715-C17D-E64EBFEF57E2}"/>
+              </a:ext>
+            </a:extLst>
+          </p:cNvPr>
+          <p:cNvPicPr>
+            <a:picLocks noChangeAspect="1"/>
+          </p:cNvPicPr>
+          <p:nvPr/>
+        </p:nvPicPr>
+        <p:blipFill>
+          <a:blip r:embed="rId3"/>
+          <a:stretch>
+            <a:fillRect/>
+          </a:stretch>
+        </p:blipFill>
+        <p:spPr>
+          <a:xfrm>
+            <a:off x="2790266" y="2652517"/>
+            <a:ext cx="6611468" cy="3803224"/>
+          </a:xfrm>
+          <a:prstGeom prst="rect">
+            <a:avLst/>
+          </a:prstGeom>
+        </p:spPr>
+      </p:pic>
+      <p:sp>
+        <p:nvSpPr>
+          <p:cNvPr id="10" name="TextBox 9">
+            <a:extLst>
+              <a:ext uri="{FF2B5EF4-FFF2-40B4-BE49-F238E27FC236}">
+                <a16:creationId xmlns:a16="http://schemas.microsoft.com/office/drawing/2014/main" id="{E5AD2A0C-B319-E101-9513-01BAFF04FFE6}"/>
+              </a:ext>
+            </a:extLst>
+          </p:cNvPr>
+          <p:cNvSpPr txBox="1"/>
+          <p:nvPr/>
+        </p:nvSpPr>
+        <p:spPr>
+          <a:xfrm>
+            <a:off x="4199961" y="6454982"/>
+            <a:ext cx="2793009" cy="369332"/>
+          </a:xfrm>
+          <a:prstGeom prst="rect">
+            <a:avLst/>
+          </a:prstGeom>
+          <a:noFill/>
+        </p:spPr>
+        <p:txBody>
+          <a:bodyPr wrap="none" rtlCol="0">
+            <a:spAutoFit/>
+          </a:bodyPr>
+          <a:lstStyle/>
+          <a:p>
+            <a:r>
+              <a:rPr lang="en-US" dirty="0"/>
+              <a:t>Current system architecture</a:t>
+            </a:r>
+          </a:p>
+        </p:txBody>
+      </p:sp>
+      <p:pic>
+        <p:nvPicPr>
+          <p:cNvPr id="12" name="Picture 11">
+            <a:extLst>
+              <a:ext uri="{FF2B5EF4-FFF2-40B4-BE49-F238E27FC236}">
+                <a16:creationId xmlns:a16="http://schemas.microsoft.com/office/drawing/2014/main" id="{52CEA5CE-1C3F-5BA0-00F6-DC7933C7618E}"/>
+              </a:ext>
+            </a:extLst>
+          </p:cNvPr>
+          <p:cNvPicPr>
+            <a:picLocks noChangeAspect="1"/>
+          </p:cNvPicPr>
+          <p:nvPr/>
+        </p:nvPicPr>
+        <p:blipFill>
+          <a:blip r:embed="rId4"/>
+          <a:stretch>
+            <a:fillRect/>
+          </a:stretch>
+        </p:blipFill>
+        <p:spPr>
+          <a:xfrm>
+            <a:off x="10517475" y="5088291"/>
+            <a:ext cx="1578980" cy="1697239"/>
+          </a:xfrm>
+          <a:prstGeom prst="rect">
+            <a:avLst/>
+          </a:prstGeom>
+        </p:spPr>
+      </p:pic>
+    </p:spTree>
+    <p:extLst>
+      <p:ext uri="{BB962C8B-B14F-4D97-AF65-F5344CB8AC3E}">
+        <p14:creationId xmlns:p14="http://schemas.microsoft.com/office/powerpoint/2010/main" val="3675657201"/>
+      </p:ext>
+    </p:extLst>
+  </p:cSld>
+  <p:clrMapOvr>
+    <a:masterClrMapping/>
+  </p:clrMapOvr>
+</p:sld>
+</file>
+
+<file path=ppt/slides/slide4.xml><?xml version="1.0" encoding="utf-8"?>
+<p:sld xmlns:a="http://schemas.openxmlformats.org/drawingml/2006/main" xmlns:r="http://schemas.openxmlformats.org/officeDocument/2006/relationships" xmlns:p="http://schemas.openxmlformats.org/presentationml/2006/main">
+  <p:cSld>
+    <p:spTree>
+      <p:nvGrpSpPr>
         <p:cNvPr id="1" name=""/>
         <p:cNvGrpSpPr/>
         <p:nvPr/>
@@ -12758,17 +13608,20 @@
       <p:cxnSp>
         <p:nvCxnSpPr>
           <p:cNvPr id="16" name="Straight Connector 15"/>
-          <p:cNvCxnSpPr/>
+          <p:cNvCxnSpPr>
+            <a:cxnSpLocks/>
+          </p:cNvCxnSpPr>
           <p:nvPr/>
         </p:nvCxnSpPr>
         <p:spPr>
           <a:xfrm>
-            <a:off x="5635782" y="3384550"/>
-            <a:ext cx="0" cy="3473450"/>
+            <a:off x="3470806" y="3153335"/>
+            <a:ext cx="0" cy="3671681"/>
           </a:xfrm>
           <a:prstGeom prst="line">
             <a:avLst/>
           </a:prstGeom>
+          <a:ln w="12700"/>
         </p:spPr>
         <p:style>
           <a:lnRef idx="1">
@@ -12814,8 +13667,8 @@
           <a:lstStyle/>
           <a:p>
             <a:r>
-              <a:rPr lang="en-US"/>
-              <a:t>Context &amp; Motivation – Toyota 24DCM project</a:t>
+              <a:rPr lang="en-US" dirty="0"/>
+              <a:t>Context &amp; Motivation – System architecture migration</a:t>
             </a:r>
           </a:p>
         </p:txBody>
@@ -12838,8 +13691,8 @@
         </p:nvSpPr>
         <p:spPr>
           <a:xfrm>
-            <a:off x="160866" y="878996"/>
-            <a:ext cx="11916834" cy="1756536"/>
+            <a:off x="160866" y="878995"/>
+            <a:ext cx="11916834" cy="2357405"/>
           </a:xfrm>
         </p:spPr>
         <p:txBody>
@@ -12849,78 +13702,61 @@
           <a:lstStyle/>
           <a:p>
             <a:r>
-              <a:rPr lang="en-US" sz="1800" dirty="0"/>
-              <a:t>Toyota </a:t>
-            </a:r>
-            <a:r>
-              <a:rPr lang="en-US" sz="1800" b="1" dirty="0"/>
-              <a:t>DCM</a:t>
-            </a:r>
-            <a:r>
-              <a:rPr lang="en-US" sz="1800" dirty="0"/>
-              <a:t>: a telematics platform providing connected vehicle services, including </a:t>
-            </a:r>
-            <a:r>
-              <a:rPr lang="en-US" sz="1800" b="1" dirty="0"/>
-              <a:t>remote diagnostics </a:t>
-            </a:r>
-            <a:r>
-              <a:rPr lang="en-US" sz="1800" dirty="0"/>
-              <a:t>from OEM server.</a:t>
-            </a:r>
-          </a:p>
-          <a:p>
-            <a:r>
-              <a:rPr lang="en-US" sz="1800" dirty="0"/>
-              <a:t>Supports diagnostic communication and OTA updates through the Internal CAN bus.</a:t>
-            </a:r>
-          </a:p>
-          <a:p>
-            <a:r>
-              <a:rPr lang="en-US" sz="1800" b="1" dirty="0"/>
-              <a:t>Current architecture</a:t>
-            </a:r>
-            <a:r>
-              <a:rPr lang="en-US" sz="1800" dirty="0"/>
-              <a:t>: monolithic deployment model, with all components running in a single partition.</a:t>
-            </a:r>
-          </a:p>
-          <a:p>
-            <a:r>
-              <a:rPr lang="en-US" sz="1800" b="1" dirty="0"/>
+              <a:rPr lang="en-US" sz="1600" dirty="0"/>
+              <a:t>OEM Security Threat</a:t>
+            </a:r>
+            <a:r>
+              <a:rPr lang="en-US" sz="1600" b="1" dirty="0"/>
+              <a:t>: </a:t>
+            </a:r>
+            <a:r>
+              <a:rPr lang="en-US" sz="1600" dirty="0"/>
+              <a:t>Entry Point (EP) partition is compromised by unauthorized software and has been taken over.</a:t>
+            </a:r>
+            <a:endParaRPr lang="en-US" sz="1400" dirty="0"/>
+          </a:p>
+          <a:p>
+            <a:r>
+              <a:rPr lang="en-US" sz="1600" dirty="0"/>
+              <a:t>OEM Security Proposal: The scope of compromise shall be limited to the EP partition and shall not propagate internal (to internal partition or in-vehicle CAN bus)</a:t>
+            </a:r>
+          </a:p>
+          <a:p>
+            <a:r>
+              <a:rPr lang="en-US" sz="1600" b="1" dirty="0"/>
               <a:t>System architecture migration</a:t>
             </a:r>
             <a:r>
-              <a:rPr lang="en-US" sz="1800" dirty="0"/>
+              <a:rPr lang="en-US" sz="1600" dirty="0"/>
               <a:t>: </a:t>
             </a:r>
           </a:p>
           <a:p>
             <a:pPr lvl="1"/>
             <a:r>
-              <a:rPr lang="en-US" sz="1800" dirty="0"/>
-              <a:t>Due to security, OEM wants to separate DCM into 2 partition using LXC containers: </a:t>
+              <a:rPr lang="en-US" sz="1600" dirty="0"/>
+              <a:t>DCM is separated into 2 partitions using LXC containers: </a:t>
             </a:r>
           </a:p>
           <a:p>
             <a:pPr lvl="2"/>
             <a:r>
-              <a:rPr lang="en-US" sz="1800" b="1" dirty="0"/>
+              <a:rPr lang="en-US" sz="1600" b="1" dirty="0"/>
               <a:t>EP container (Entry Point)</a:t>
             </a:r>
             <a:r>
-              <a:rPr lang="en-US" sz="1800" dirty="0"/>
-              <a:t>: externally exposed network components</a:t>
+              <a:rPr lang="en-US" sz="1600" dirty="0"/>
+              <a:t>: externally exposed network components.</a:t>
             </a:r>
           </a:p>
           <a:p>
             <a:pPr lvl="2"/>
             <a:r>
-              <a:rPr lang="en-US" sz="1800" b="1" dirty="0"/>
+              <a:rPr lang="en-US" sz="1600" b="1" dirty="0"/>
               <a:t>Internal container: </a:t>
             </a:r>
             <a:r>
-              <a:rPr lang="en-US" sz="1800" dirty="0"/>
+              <a:rPr lang="en-US" sz="1600" dirty="0"/>
               <a:t>components which have access to CAN bus.</a:t>
             </a:r>
           </a:p>
@@ -12942,32 +13778,8 @@
         </p:blipFill>
         <p:spPr>
           <a:xfrm>
-            <a:off x="0" y="3357951"/>
-            <a:ext cx="5359652" cy="3083122"/>
-          </a:xfrm>
-          <a:prstGeom prst="rect">
-            <a:avLst/>
-          </a:prstGeom>
-        </p:spPr>
-      </p:pic>
-      <p:pic>
-        <p:nvPicPr>
-          <p:cNvPr id="4" name="Picture 3"/>
-          <p:cNvPicPr>
-            <a:picLocks noChangeAspect="1"/>
-          </p:cNvPicPr>
-          <p:nvPr/>
-        </p:nvPicPr>
-        <p:blipFill>
-          <a:blip r:embed="rId4"/>
-          <a:stretch>
-            <a:fillRect/>
-          </a:stretch>
-        </p:blipFill>
-        <p:spPr>
-          <a:xfrm>
-            <a:off x="5911913" y="3357951"/>
-            <a:ext cx="6165787" cy="3161081"/>
+            <a:off x="83944" y="4578725"/>
+            <a:ext cx="3237478" cy="1862348"/>
           </a:xfrm>
           <a:prstGeom prst="rect">
             <a:avLst/>
@@ -12982,8 +13794,8 @@
         </p:nvSpPr>
         <p:spPr>
           <a:xfrm>
-            <a:off x="4395655" y="6430521"/>
-            <a:ext cx="2480253" cy="412399"/>
+            <a:off x="3079651" y="6512647"/>
+            <a:ext cx="1109108" cy="312369"/>
           </a:xfrm>
           <a:prstGeom prst="rightArrow">
             <a:avLst/>
@@ -13028,7 +13840,7 @@
         </p:nvSpPr>
         <p:spPr>
           <a:xfrm>
-            <a:off x="1233987" y="6528086"/>
+            <a:off x="225431" y="6473588"/>
             <a:ext cx="2793009" cy="369332"/>
           </a:xfrm>
           <a:prstGeom prst="rect">
@@ -13043,7 +13855,7 @@
           <a:lstStyle/>
           <a:p>
             <a:r>
-              <a:rPr lang="en-US"/>
+              <a:rPr lang="en-US" dirty="0"/>
               <a:t>Current system architecture</a:t>
             </a:r>
           </a:p>
@@ -13057,7 +13869,7 @@
         </p:nvSpPr>
         <p:spPr>
           <a:xfrm>
-            <a:off x="7059510" y="6490268"/>
+            <a:off x="5044273" y="6490268"/>
             <a:ext cx="3969548" cy="369332"/>
           </a:xfrm>
           <a:prstGeom prst="rect">
@@ -13072,7 +13884,7 @@
           <a:lstStyle/>
           <a:p>
             <a:r>
-              <a:rPr lang="en-US"/>
+              <a:rPr lang="en-US" dirty="0"/>
               <a:t>New system architecture (containerized)</a:t>
             </a:r>
           </a:p>
@@ -13080,7 +13892,43 @@
       </p:sp>
       <p:pic>
         <p:nvPicPr>
-          <p:cNvPr id="11" name="Picture 10"/>
+          <p:cNvPr id="15" name="Picture 14">
+            <a:extLst>
+              <a:ext uri="{FF2B5EF4-FFF2-40B4-BE49-F238E27FC236}">
+                <a16:creationId xmlns:a16="http://schemas.microsoft.com/office/drawing/2014/main" id="{82300E94-D641-5E7E-D410-1F95BB0C9A9B}"/>
+              </a:ext>
+            </a:extLst>
+          </p:cNvPr>
+          <p:cNvPicPr>
+            <a:picLocks noChangeAspect="1"/>
+          </p:cNvPicPr>
+          <p:nvPr/>
+        </p:nvPicPr>
+        <p:blipFill>
+          <a:blip r:embed="rId4"/>
+          <a:stretch>
+            <a:fillRect/>
+          </a:stretch>
+        </p:blipFill>
+        <p:spPr>
+          <a:xfrm>
+            <a:off x="10517475" y="5088291"/>
+            <a:ext cx="1578980" cy="1697239"/>
+          </a:xfrm>
+          <a:prstGeom prst="rect">
+            <a:avLst/>
+          </a:prstGeom>
+        </p:spPr>
+      </p:pic>
+      <p:pic>
+        <p:nvPicPr>
+          <p:cNvPr id="18" name="Picture 17">
+            <a:extLst>
+              <a:ext uri="{FF2B5EF4-FFF2-40B4-BE49-F238E27FC236}">
+                <a16:creationId xmlns:a16="http://schemas.microsoft.com/office/drawing/2014/main" id="{55A41CDD-7CE6-4D63-F256-F3E90D329D71}"/>
+              </a:ext>
+            </a:extLst>
+          </p:cNvPr>
           <p:cNvPicPr>
             <a:picLocks noChangeAspect="1"/>
           </p:cNvPicPr>
@@ -13094,8 +13942,8 @@
         </p:blipFill>
         <p:spPr>
           <a:xfrm>
-            <a:off x="10547287" y="1826835"/>
-            <a:ext cx="1644713" cy="1531115"/>
+            <a:off x="3601830" y="3202531"/>
+            <a:ext cx="6854434" cy="3287737"/>
           </a:xfrm>
           <a:prstGeom prst="rect">
             <a:avLst/>
@@ -13115,7 +13963,7 @@
 </p:sld>
 </file>
 
-<file path=ppt/slides/slide4.xml><?xml version="1.0" encoding="utf-8"?>
+<file path=ppt/slides/slide5.xml><?xml version="1.0" encoding="utf-8"?>
 <p:sld xmlns:a="http://schemas.openxmlformats.org/drawingml/2006/main" xmlns:r="http://schemas.openxmlformats.org/officeDocument/2006/relationships" xmlns:p="http://schemas.openxmlformats.org/presentationml/2006/main">
   <p:cSld>
     <p:spTree>
@@ -13134,7 +13982,13 @@
       </p:grpSpPr>
       <p:pic>
         <p:nvPicPr>
-          <p:cNvPr id="4" name="Picture 3"/>
+          <p:cNvPr id="10" name="Picture 9">
+            <a:extLst>
+              <a:ext uri="{FF2B5EF4-FFF2-40B4-BE49-F238E27FC236}">
+                <a16:creationId xmlns:a16="http://schemas.microsoft.com/office/drawing/2014/main" id="{20FEF80F-391D-5C0D-3E70-1754E47CE21A}"/>
+              </a:ext>
+            </a:extLst>
+          </p:cNvPr>
           <p:cNvPicPr>
             <a:picLocks noChangeAspect="1"/>
           </p:cNvPicPr>
@@ -13148,8 +14002,8 @@
         </p:blipFill>
         <p:spPr>
           <a:xfrm>
-            <a:off x="4438038" y="2594783"/>
-            <a:ext cx="7684020" cy="4158444"/>
+            <a:off x="4323985" y="2961460"/>
+            <a:ext cx="7774134" cy="3707372"/>
           </a:xfrm>
           <a:prstGeom prst="rect">
             <a:avLst/>
@@ -13164,8 +14018,8 @@
         </p:nvSpPr>
         <p:spPr>
           <a:xfrm>
-            <a:off x="0" y="862011"/>
-            <a:ext cx="12122058" cy="2062103"/>
+            <a:off x="160866" y="862011"/>
+            <a:ext cx="11870268" cy="2307042"/>
           </a:xfrm>
           <a:prstGeom prst="rect">
             <a:avLst/>
@@ -13179,6 +14033,9 @@
           <a:lstStyle/>
           <a:p>
             <a:pPr marL="285750" indent="-285750">
+              <a:lnSpc>
+                <a:spcPct val="130000"/>
+              </a:lnSpc>
               <a:buFont typeface="Arial" panose="020B0604020202020204" pitchFamily="34" charset="0"/>
               <a:buChar char="•"/>
             </a:pPr>
@@ -13193,6 +14050,9 @@
           </a:p>
           <a:p>
             <a:pPr marL="285750" indent="-285750">
+              <a:lnSpc>
+                <a:spcPct val="130000"/>
+              </a:lnSpc>
               <a:buFont typeface="Arial" panose="020B0604020202020204" pitchFamily="34" charset="0"/>
               <a:buChar char="•"/>
             </a:pPr>
@@ -13207,6 +14067,9 @@
           </a:p>
           <a:p>
             <a:pPr marL="742950" lvl="1" indent="-285750">
+              <a:lnSpc>
+                <a:spcPct val="130000"/>
+              </a:lnSpc>
               <a:buFont typeface="Arial" panose="020B0604020202020204" pitchFamily="34" charset="0"/>
               <a:buChar char="•"/>
             </a:pPr>
@@ -13225,6 +14088,9 @@
           </a:p>
           <a:p>
             <a:pPr marL="742950" lvl="1" indent="-285750">
+              <a:lnSpc>
+                <a:spcPct val="130000"/>
+              </a:lnSpc>
               <a:buFont typeface="Arial" panose="020B0604020202020204" pitchFamily="34" charset="0"/>
               <a:buChar char="•"/>
             </a:pPr>
@@ -13242,40 +14108,39 @@
             </a:r>
           </a:p>
           <a:p>
-            <a:pPr marL="742950" lvl="1" indent="-285750">
+            <a:pPr marL="285750" indent="-285750">
+              <a:lnSpc>
+                <a:spcPct val="130000"/>
+              </a:lnSpc>
               <a:buFont typeface="Arial" panose="020B0604020202020204" pitchFamily="34" charset="0"/>
               <a:buChar char="•"/>
             </a:pPr>
-            <a:endParaRPr lang="en-US" sz="1600" dirty="0"/>
+            <a:r>
+              <a:rPr lang="en-US" sz="1600" b="1" dirty="0"/>
+              <a:t>Risk: </a:t>
+            </a:r>
+            <a:r>
+              <a:rPr lang="en-US" sz="1600" b="1" dirty="0" err="1"/>
+              <a:t>RemoteDiag</a:t>
+            </a:r>
+            <a:r>
+              <a:rPr lang="en-US" sz="1600" b="1" dirty="0"/>
+              <a:t> &lt;-&gt; MM path </a:t>
+            </a:r>
+            <a:r>
+              <a:rPr lang="en-US" sz="1600" dirty="0"/>
+              <a:t>traverses the EP container, exposing the communication to an attacker if EP container is compromised</a:t>
+            </a:r>
           </a:p>
           <a:p>
             <a:pPr marL="285750" indent="-285750">
+              <a:lnSpc>
+                <a:spcPct val="130000"/>
+              </a:lnSpc>
               <a:buFont typeface="Arial" panose="020B0604020202020204" pitchFamily="34" charset="0"/>
               <a:buChar char="•"/>
             </a:pPr>
             <a:r>
-              <a:rPr lang="en-US" sz="1600" b="1" dirty="0"/>
-              <a:t>Risk: </a:t>
-            </a:r>
-            <a:r>
-              <a:rPr lang="en-US" sz="1600" b="1" dirty="0" err="1"/>
-              <a:t>RemoteDiag</a:t>
-            </a:r>
-            <a:r>
-              <a:rPr lang="en-US" sz="1600" b="1" dirty="0"/>
-              <a:t> &lt;-&gt; MM path </a:t>
-            </a:r>
-            <a:r>
-              <a:rPr lang="en-US" sz="1600" dirty="0"/>
-              <a:t>routes in EP which is insecure</a:t>
-            </a:r>
-          </a:p>
-          <a:p>
-            <a:pPr marL="285750" indent="-285750">
-              <a:buFont typeface="Arial" panose="020B0604020202020204" pitchFamily="34" charset="0"/>
-              <a:buChar char="•"/>
-            </a:pPr>
-            <a:r>
               <a:rPr lang="en-US" sz="1600" dirty="0"/>
               <a:t>OEM requests that </a:t>
             </a:r>
@@ -13285,6 +14150,11 @@
             </a:r>
           </a:p>
           <a:p>
+            <a:pPr>
+              <a:lnSpc>
+                <a:spcPct val="130000"/>
+              </a:lnSpc>
+            </a:pPr>
             <a:endParaRPr lang="en-US" sz="1600" dirty="0"/>
           </a:p>
         </p:txBody>
@@ -13311,7 +14181,7 @@
           <a:lstStyle/>
           <a:p>
             <a:r>
-              <a:rPr lang="en-US"/>
+              <a:rPr lang="en-US" dirty="0"/>
               <a:t>Problem</a:t>
             </a:r>
           </a:p>
@@ -13438,7 +14308,13 @@
       </p:grpSp>
       <p:pic>
         <p:nvPicPr>
-          <p:cNvPr id="6" name="Picture 5"/>
+          <p:cNvPr id="5" name="Picture 4">
+            <a:extLst>
+              <a:ext uri="{FF2B5EF4-FFF2-40B4-BE49-F238E27FC236}">
+                <a16:creationId xmlns:a16="http://schemas.microsoft.com/office/drawing/2014/main" id="{8B985467-A9DA-DE11-1910-E778EDD530AB}"/>
+              </a:ext>
+            </a:extLst>
+          </p:cNvPr>
           <p:cNvPicPr>
             <a:picLocks noChangeAspect="1"/>
           </p:cNvPicPr>
@@ -13452,8 +14328,8 @@
         </p:blipFill>
         <p:spPr>
           <a:xfrm>
-            <a:off x="9850171" y="595898"/>
-            <a:ext cx="2271888" cy="1907846"/>
+            <a:off x="2484294" y="5213119"/>
+            <a:ext cx="1749283" cy="1565739"/>
           </a:xfrm>
           <a:prstGeom prst="rect">
             <a:avLst/>
@@ -13473,7 +14349,7 @@
 </p:sld>
 </file>
 
-<file path=ppt/slides/slide5.xml><?xml version="1.0" encoding="utf-8"?>
+<file path=ppt/slides/slide6.xml><?xml version="1.0" encoding="utf-8"?>
 <p:sld xmlns:a="http://schemas.openxmlformats.org/drawingml/2006/main" xmlns:r="http://schemas.openxmlformats.org/officeDocument/2006/relationships" xmlns:p="http://schemas.openxmlformats.org/presentationml/2006/main">
   <p:cSld>
     <p:spTree>
@@ -13562,14 +14438,14 @@
           <p:nvPr>
             <p:extLst>
               <p:ext uri="{D42A27DB-BD31-4B8C-83A1-F6EECF244321}">
-                <p14:modId xmlns:p14="http://schemas.microsoft.com/office/powerpoint/2010/main" val="618279638"/>
+                <p14:modId xmlns:p14="http://schemas.microsoft.com/office/powerpoint/2010/main" val="3689793615"/>
               </p:ext>
             </p:extLst>
           </p:nvPr>
         </p:nvGraphicFramePr>
         <p:xfrm>
           <a:off x="204773" y="1505336"/>
-          <a:ext cx="11782454" cy="1332290"/>
+          <a:ext cx="11782454" cy="1405295"/>
         </p:xfrm>
         <a:graphic>
           <a:graphicData uri="http://schemas.openxmlformats.org/drawingml/2006/table">
@@ -13957,7 +14833,7 @@
                         </a:spcAft>
                       </a:pPr>
                       <a:r>
-                        <a:rPr lang="en-US" sz="1800" kern="1200" baseline="0">
+                        <a:rPr lang="en-US" sz="1800" kern="1200" baseline="0" dirty="0">
                           <a:solidFill>
                             <a:schemeClr val="dk1"/>
                           </a:solidFill>
@@ -13966,7 +14842,7 @@
                           <a:ea typeface="+mn-ea"/>
                           <a:cs typeface="Arial" panose="020B0604020202020204" pitchFamily="34" charset="0"/>
                         </a:rPr>
-                        <a:t>The system shall route UDS diagnostic messages exchanged with the MM ECU entirely within the IP.</a:t>
+                        <a:t>The system shall route UDS diagnostic messages exchanged with the MM ECU entirely within the Internal container.</a:t>
                       </a:r>
                     </a:p>
                   </a:txBody>
@@ -14032,7 +14908,7 @@
 </p:sld>
 </file>
 
-<file path=ppt/slides/slide6.xml><?xml version="1.0" encoding="utf-8"?>
+<file path=ppt/slides/slide7.xml><?xml version="1.0" encoding="utf-8"?>
 <p:sld xmlns:a="http://schemas.openxmlformats.org/drawingml/2006/main" xmlns:r="http://schemas.openxmlformats.org/officeDocument/2006/relationships" xmlns:p="http://schemas.openxmlformats.org/presentationml/2006/main">
   <p:cSld>
     <p:spTree>
@@ -14294,14 +15170,14 @@
           <p:nvPr>
             <p:extLst>
               <p:ext uri="{D42A27DB-BD31-4B8C-83A1-F6EECF244321}">
-                <p14:modId xmlns:p14="http://schemas.microsoft.com/office/powerpoint/2010/main" val="2452195264"/>
+                <p14:modId xmlns:p14="http://schemas.microsoft.com/office/powerpoint/2010/main" val="2327283940"/>
               </p:ext>
             </p:extLst>
           </p:nvPr>
         </p:nvGraphicFramePr>
         <p:xfrm>
           <a:off x="182820" y="960039"/>
-          <a:ext cx="11903556" cy="4283556"/>
+          <a:ext cx="11903556" cy="4908376"/>
         </p:xfrm>
         <a:graphic>
           <a:graphicData uri="http://schemas.openxmlformats.org/drawingml/2006/table">
@@ -14717,7 +15593,7 @@
                         </a:lnSpc>
                       </a:pPr>
                       <a:r>
-                        <a:rPr lang="en-US" sz="1600" b="0" kern="1200">
+                        <a:rPr lang="en-US" sz="1600" b="0" kern="1200" dirty="0">
                           <a:solidFill>
                             <a:schemeClr val="dk1"/>
                           </a:solidFill>
@@ -15214,20 +16090,20 @@
                         </a:lnSpc>
                       </a:pPr>
                       <a:r>
-                        <a:rPr lang="en-US" sz="1600" b="0">
+                        <a:rPr lang="en-US" sz="1600" b="0" dirty="0">
                           <a:latin typeface="+mn-lt"/>
                           <a:cs typeface="Arial" panose="020B0604020202020204" pitchFamily="34" charset="0"/>
                         </a:rPr>
                         <a:t>Zero diagnostic communication is found in EP. 100% number of</a:t>
                       </a:r>
                       <a:r>
-                        <a:rPr lang="en-US" sz="1600" b="0" baseline="0">
+                        <a:rPr lang="en-US" sz="1600" b="0" baseline="0" dirty="0">
                           <a:latin typeface="+mn-lt"/>
                           <a:cs typeface="Arial" panose="020B0604020202020204" pitchFamily="34" charset="0"/>
                         </a:rPr>
-                        <a:t> requests are handled within IP.</a:t>
+                        <a:t> requests are communicated within IP.</a:t>
                       </a:r>
-                      <a:endParaRPr lang="en-US" sz="1600" b="0">
+                      <a:endParaRPr lang="en-US" sz="1600" b="0" dirty="0">
                         <a:latin typeface="+mn-lt"/>
                         <a:cs typeface="Arial" panose="020B0604020202020204" pitchFamily="34" charset="0"/>
                       </a:endParaRPr>
@@ -15416,7 +16292,7 @@
                         </a:lnSpc>
                       </a:pPr>
                       <a:r>
-                        <a:rPr lang="en-US" sz="1600" b="0" kern="1200">
+                        <a:rPr lang="en-US" sz="1600" b="0" kern="1200" dirty="0">
                           <a:solidFill>
                             <a:schemeClr val="dk1"/>
                           </a:solidFill>
@@ -15485,7 +16361,7 @@
                         </a:spcAft>
                       </a:pPr>
                       <a:r>
-                        <a:rPr lang="en-US" sz="1600" b="0" kern="1200" baseline="0">
+                        <a:rPr lang="en-US" sz="1600" b="0" kern="1200" baseline="0" dirty="0">
                           <a:solidFill>
                             <a:schemeClr val="dk1"/>
                           </a:solidFill>
@@ -15494,7 +16370,7 @@
                           <a:ea typeface="+mn-ea"/>
                           <a:cs typeface="Arial" panose="020B0604020202020204" pitchFamily="34" charset="0"/>
                         </a:rPr>
-                        <a:t>The new design preserves the original core responsibility of each component.</a:t>
+                        <a:t>A new design reallocates responsibilities among existing software components.</a:t>
                       </a:r>
                     </a:p>
                   </a:txBody>
@@ -15560,7 +16436,7 @@
                         <a:defRPr/>
                       </a:pPr>
                       <a:r>
-                        <a:rPr lang="en-US" sz="1600" b="0" kern="1200" baseline="0">
+                        <a:rPr lang="en-US" sz="1600" b="0" kern="1200" baseline="0" dirty="0">
                           <a:solidFill>
                             <a:schemeClr val="dk1"/>
                           </a:solidFill>
@@ -15591,7 +16467,7 @@
                         <a:defRPr/>
                       </a:pPr>
                       <a:r>
-                        <a:rPr lang="en-US" sz="1600" b="0">
+                        <a:rPr lang="en-US" sz="1600" b="0" dirty="0">
                           <a:effectLst/>
                           <a:latin typeface="+mn-lt"/>
                           <a:ea typeface="Malgun Gothic" panose="020B0503020000020004" pitchFamily="34" charset="-127"/>
@@ -15723,11 +16599,11 @@
                         </a:lnSpc>
                       </a:pPr>
                       <a:r>
-                        <a:rPr lang="en-US" sz="1600" b="0">
+                        <a:rPr lang="en-US" sz="1600" b="0" dirty="0">
                           <a:latin typeface="+mn-lt"/>
                           <a:cs typeface="Arial" panose="020B0604020202020204" pitchFamily="34" charset="0"/>
                         </a:rPr>
-                        <a:t>High</a:t>
+                        <a:t>Medium</a:t>
                       </a:r>
                     </a:p>
                   </a:txBody>
@@ -15857,7 +16733,7 @@
                         </a:spcAft>
                       </a:pPr>
                       <a:r>
-                        <a:rPr lang="en-US" sz="1600" b="0" kern="1200" baseline="0">
+                        <a:rPr lang="en-US" sz="1600" b="0" kern="1200" baseline="0" dirty="0">
                           <a:solidFill>
                             <a:schemeClr val="dk1"/>
                           </a:solidFill>
@@ -15866,7 +16742,31 @@
                           <a:ea typeface="+mn-ea"/>
                           <a:cs typeface="Arial" panose="020B0604020202020204" pitchFamily="34" charset="0"/>
                         </a:rPr>
-                        <a:t>Existing software components (other than RemoteDiag) require minimal changes.</a:t>
+                        <a:t>A new design requires existing software components (other than </a:t>
+                      </a:r>
+                      <a:r>
+                        <a:rPr lang="en-US" sz="1600" b="0" kern="1200" baseline="0" dirty="0" err="1">
+                          <a:solidFill>
+                            <a:schemeClr val="dk1"/>
+                          </a:solidFill>
+                          <a:effectLst/>
+                          <a:latin typeface="+mn-lt"/>
+                          <a:ea typeface="+mn-ea"/>
+                          <a:cs typeface="Arial" panose="020B0604020202020204" pitchFamily="34" charset="0"/>
+                        </a:rPr>
+                        <a:t>RemoteDiag</a:t>
+                      </a:r>
+                      <a:r>
+                        <a:rPr lang="en-US" sz="1600" b="0" kern="1200" baseline="0" dirty="0">
+                          <a:solidFill>
+                            <a:schemeClr val="dk1"/>
+                          </a:solidFill>
+                          <a:effectLst/>
+                          <a:latin typeface="+mn-lt"/>
+                          <a:ea typeface="+mn-ea"/>
+                          <a:cs typeface="Arial" panose="020B0604020202020204" pitchFamily="34" charset="0"/>
+                        </a:rPr>
+                        <a:t>) to adapt to the new architecture.</a:t>
                       </a:r>
                     </a:p>
                   </a:txBody>
@@ -15932,7 +16832,7 @@
                         <a:defRPr/>
                       </a:pPr>
                       <a:r>
-                        <a:rPr lang="en-US" sz="1600" b="0">
+                        <a:rPr lang="en-US" sz="1600" b="0" dirty="0">
                           <a:effectLst/>
                           <a:latin typeface="+mn-lt"/>
                           <a:ea typeface="Malgun Gothic" panose="020B0503020000020004" pitchFamily="34" charset="-127"/>
@@ -15941,7 +16841,7 @@
                         <a:t>Number of component</a:t>
                       </a:r>
                       <a:r>
-                        <a:rPr lang="en-US" sz="1600" b="0" baseline="0">
+                        <a:rPr lang="en-US" sz="1600" b="0" baseline="0" dirty="0">
                           <a:effectLst/>
                           <a:latin typeface="+mn-lt"/>
                           <a:ea typeface="Malgun Gothic" panose="020B0503020000020004" pitchFamily="34" charset="-127"/>
@@ -15949,7 +16849,7 @@
                         </a:rPr>
                         <a:t> which needs to modify to align with new design </a:t>
                       </a:r>
-                      <a:endParaRPr lang="en-US" sz="1600" b="0">
+                      <a:endParaRPr lang="en-US" sz="1600" b="0" dirty="0">
                         <a:effectLst/>
                         <a:latin typeface="+mn-lt"/>
                         <a:ea typeface="Malgun Gothic" panose="020B0503020000020004" pitchFamily="34" charset="-127"/>
@@ -16019,7 +16919,7 @@
                         <a:defRPr/>
                       </a:pPr>
                       <a:r>
-                        <a:rPr lang="en-US" sz="1600" b="0">
+                        <a:rPr lang="en-US" sz="1600" b="0" dirty="0">
                           <a:effectLst/>
                           <a:latin typeface="+mn-lt"/>
                           <a:ea typeface="Malgun Gothic" panose="020B0503020000020004" pitchFamily="34" charset="-127"/>
@@ -16140,249 +17040,6 @@
     <p:extLst>
       <p:ext uri="{BB962C8B-B14F-4D97-AF65-F5344CB8AC3E}">
         <p14:creationId xmlns:p14="http://schemas.microsoft.com/office/powerpoint/2010/main" val="3183845142"/>
-      </p:ext>
-    </p:extLst>
-  </p:cSld>
-  <p:clrMapOvr>
-    <a:masterClrMapping/>
-  </p:clrMapOvr>
-</p:sld>
-</file>
-
-<file path=ppt/slides/slide7.xml><?xml version="1.0" encoding="utf-8"?>
-<p:sld xmlns:a="http://schemas.openxmlformats.org/drawingml/2006/main" xmlns:r="http://schemas.openxmlformats.org/officeDocument/2006/relationships" xmlns:p="http://schemas.openxmlformats.org/presentationml/2006/main">
-  <p:cSld>
-    <p:spTree>
-      <p:nvGrpSpPr>
-        <p:cNvPr id="1" name=""/>
-        <p:cNvGrpSpPr/>
-        <p:nvPr/>
-      </p:nvGrpSpPr>
-      <p:grpSpPr>
-        <a:xfrm>
-          <a:off x="0" y="0"/>
-          <a:ext cx="0" cy="0"/>
-          <a:chOff x="0" y="0"/>
-          <a:chExt cx="0" cy="0"/>
-        </a:xfrm>
-      </p:grpSpPr>
-      <p:pic>
-        <p:nvPicPr>
-          <p:cNvPr id="3" name="Picture 2"/>
-          <p:cNvPicPr>
-            <a:picLocks noChangeAspect="1"/>
-          </p:cNvPicPr>
-          <p:nvPr/>
-        </p:nvPicPr>
-        <p:blipFill>
-          <a:blip r:embed="rId2"/>
-          <a:stretch>
-            <a:fillRect/>
-          </a:stretch>
-        </p:blipFill>
-        <p:spPr>
-          <a:xfrm>
-            <a:off x="2969538" y="2394738"/>
-            <a:ext cx="9183866" cy="4310270"/>
-          </a:xfrm>
-          <a:prstGeom prst="rect">
-            <a:avLst/>
-          </a:prstGeom>
-        </p:spPr>
-      </p:pic>
-      <p:sp>
-        <p:nvSpPr>
-          <p:cNvPr id="5" name="TextBox 4"/>
-          <p:cNvSpPr txBox="1"/>
-          <p:nvPr/>
-        </p:nvSpPr>
-        <p:spPr>
-          <a:xfrm>
-            <a:off x="160866" y="862011"/>
-            <a:ext cx="11834976" cy="1532727"/>
-          </a:xfrm>
-          <a:prstGeom prst="rect">
-            <a:avLst/>
-          </a:prstGeom>
-          <a:noFill/>
-        </p:spPr>
-        <p:txBody>
-          <a:bodyPr wrap="square" rtlCol="0">
-            <a:spAutoFit/>
-          </a:bodyPr>
-          <a:lstStyle/>
-          <a:p>
-            <a:pPr marL="285750" indent="-285750">
-              <a:lnSpc>
-                <a:spcPct val="130000"/>
-              </a:lnSpc>
-              <a:buFont typeface="Arial" panose="020B0604020202020204" pitchFamily="34" charset="0"/>
-              <a:buChar char="•"/>
-            </a:pPr>
-            <a:r>
-              <a:rPr lang="en-US"/>
-              <a:t>Split RemoteDiag responsibilities into </a:t>
-            </a:r>
-            <a:r>
-              <a:rPr lang="en-US" b="1"/>
-              <a:t>2</a:t>
-            </a:r>
-            <a:r>
-              <a:rPr lang="en-US"/>
-              <a:t> apps: </a:t>
-            </a:r>
-          </a:p>
-          <a:p>
-            <a:pPr marL="742950" lvl="1" indent="-285750">
-              <a:lnSpc>
-                <a:spcPct val="130000"/>
-              </a:lnSpc>
-              <a:buFont typeface="Wingdings" panose="05000000000000000000" pitchFamily="2" charset="2"/>
-              <a:buChar char="§"/>
-            </a:pPr>
-            <a:r>
-              <a:rPr lang="en-US" b="1"/>
-              <a:t>RemoteDiag (EP):</a:t>
-            </a:r>
-            <a:r>
-              <a:rPr lang="en-US"/>
-              <a:t> handles diag messages from OEM server.</a:t>
-            </a:r>
-            <a:endParaRPr lang="en-US" b="1"/>
-          </a:p>
-          <a:p>
-            <a:pPr marL="742950" lvl="1" indent="-285750">
-              <a:lnSpc>
-                <a:spcPct val="130000"/>
-              </a:lnSpc>
-              <a:buFont typeface="Wingdings" panose="05000000000000000000" pitchFamily="2" charset="2"/>
-              <a:buChar char="§"/>
-            </a:pPr>
-            <a:r>
-              <a:rPr lang="en-US" b="1"/>
-              <a:t>RemoteOTA (IP):</a:t>
-            </a:r>
-            <a:r>
-              <a:rPr lang="en-US"/>
-              <a:t> handles OTA diag message flows from MM ECU.</a:t>
-            </a:r>
-          </a:p>
-          <a:p>
-            <a:pPr marL="285750" indent="-285750">
-              <a:lnSpc>
-                <a:spcPct val="130000"/>
-              </a:lnSpc>
-              <a:buFont typeface="Arial" panose="020B0604020202020204" pitchFamily="34" charset="0"/>
-              <a:buChar char="•"/>
-            </a:pPr>
-            <a:r>
-              <a:rPr lang="en-US"/>
-              <a:t>OnBoardClient is responsible for </a:t>
-            </a:r>
-            <a:r>
-              <a:rPr lang="en-US" b="1"/>
-              <a:t>reprogramming message filtering</a:t>
-            </a:r>
-            <a:r>
-              <a:rPr lang="en-US"/>
-              <a:t> and </a:t>
-            </a:r>
-            <a:r>
-              <a:rPr lang="en-US" b="1"/>
-              <a:t>diagnostic  priority control</a:t>
-            </a:r>
-            <a:r>
-              <a:rPr lang="en-US"/>
-              <a:t>.</a:t>
-            </a:r>
-            <a:endParaRPr lang="en-US" sz="1600"/>
-          </a:p>
-        </p:txBody>
-      </p:sp>
-      <p:sp>
-        <p:nvSpPr>
-          <p:cNvPr id="2" name="Title 1"/>
-          <p:cNvSpPr>
-            <a:spLocks noGrp="1"/>
-          </p:cNvSpPr>
-          <p:nvPr>
-            <p:ph type="title"/>
-          </p:nvPr>
-        </p:nvSpPr>
-        <p:spPr/>
-        <p:txBody>
-          <a:bodyPr/>
-          <a:lstStyle/>
-          <a:p>
-            <a:r>
-              <a:rPr lang="en-US"/>
-              <a:t>Design Alternative – Alt-A: Split </a:t>
-            </a:r>
-            <a:r>
-              <a:rPr lang="en-US" err="1"/>
-              <a:t>RemoteDiag</a:t>
-            </a:r>
-            <a:endParaRPr lang="en-US"/>
-          </a:p>
-        </p:txBody>
-      </p:sp>
-      <p:sp>
-        <p:nvSpPr>
-          <p:cNvPr id="9" name="TextBox 8"/>
-          <p:cNvSpPr txBox="1"/>
-          <p:nvPr/>
-        </p:nvSpPr>
-        <p:spPr>
-          <a:xfrm>
-            <a:off x="6898742" y="6315754"/>
-            <a:ext cx="651140" cy="369332"/>
-          </a:xfrm>
-          <a:prstGeom prst="rect">
-            <a:avLst/>
-          </a:prstGeom>
-          <a:noFill/>
-        </p:spPr>
-        <p:txBody>
-          <a:bodyPr wrap="none" rtlCol="0">
-            <a:spAutoFit/>
-          </a:bodyPr>
-          <a:lstStyle/>
-          <a:p>
-            <a:r>
-              <a:rPr lang="en-US"/>
-              <a:t>Alt-A</a:t>
-            </a:r>
-          </a:p>
-        </p:txBody>
-      </p:sp>
-      <p:pic>
-        <p:nvPicPr>
-          <p:cNvPr id="7" name="Picture 6"/>
-          <p:cNvPicPr>
-            <a:picLocks noChangeAspect="1"/>
-          </p:cNvPicPr>
-          <p:nvPr/>
-        </p:nvPicPr>
-        <p:blipFill>
-          <a:blip r:embed="rId3"/>
-          <a:stretch>
-            <a:fillRect/>
-          </a:stretch>
-        </p:blipFill>
-        <p:spPr>
-          <a:xfrm>
-            <a:off x="264898" y="4359136"/>
-            <a:ext cx="2372009" cy="1843350"/>
-          </a:xfrm>
-          <a:prstGeom prst="rect">
-            <a:avLst/>
-          </a:prstGeom>
-        </p:spPr>
-      </p:pic>
-    </p:spTree>
-    <p:extLst>
-      <p:ext uri="{BB962C8B-B14F-4D97-AF65-F5344CB8AC3E}">
-        <p14:creationId xmlns:p14="http://schemas.microsoft.com/office/powerpoint/2010/main" val="3092409316"/>
       </p:ext>
     </p:extLst>
   </p:cSld>
@@ -16411,7 +17068,244 @@
       </p:grpSpPr>
       <p:pic>
         <p:nvPicPr>
-          <p:cNvPr id="10" name="Picture 9"/>
+          <p:cNvPr id="14" name="Picture 13">
+            <a:extLst>
+              <a:ext uri="{FF2B5EF4-FFF2-40B4-BE49-F238E27FC236}">
+                <a16:creationId xmlns:a16="http://schemas.microsoft.com/office/drawing/2014/main" id="{79F3C30A-9B01-61F0-056C-27C80301C91F}"/>
+              </a:ext>
+            </a:extLst>
+          </p:cNvPr>
+          <p:cNvPicPr>
+            <a:picLocks noChangeAspect="1"/>
+          </p:cNvPicPr>
+          <p:nvPr/>
+        </p:nvPicPr>
+        <p:blipFill>
+          <a:blip r:embed="rId2"/>
+          <a:stretch>
+            <a:fillRect/>
+          </a:stretch>
+        </p:blipFill>
+        <p:spPr>
+          <a:xfrm>
+            <a:off x="2517439" y="2506013"/>
+            <a:ext cx="9602347" cy="4256948"/>
+          </a:xfrm>
+          <a:prstGeom prst="rect">
+            <a:avLst/>
+          </a:prstGeom>
+        </p:spPr>
+      </p:pic>
+      <p:sp>
+        <p:nvSpPr>
+          <p:cNvPr id="5" name="TextBox 4"/>
+          <p:cNvSpPr txBox="1"/>
+          <p:nvPr/>
+        </p:nvSpPr>
+        <p:spPr>
+          <a:xfrm>
+            <a:off x="160866" y="862011"/>
+            <a:ext cx="11834976" cy="1532727"/>
+          </a:xfrm>
+          <a:prstGeom prst="rect">
+            <a:avLst/>
+          </a:prstGeom>
+          <a:noFill/>
+        </p:spPr>
+        <p:txBody>
+          <a:bodyPr wrap="square" rtlCol="0">
+            <a:spAutoFit/>
+          </a:bodyPr>
+          <a:lstStyle/>
+          <a:p>
+            <a:pPr marL="285750" indent="-285750">
+              <a:lnSpc>
+                <a:spcPct val="130000"/>
+              </a:lnSpc>
+              <a:buFont typeface="Arial" panose="020B0604020202020204" pitchFamily="34" charset="0"/>
+              <a:buChar char="•"/>
+            </a:pPr>
+            <a:r>
+              <a:rPr lang="en-US" dirty="0"/>
+              <a:t>Split </a:t>
+            </a:r>
+            <a:r>
+              <a:rPr lang="en-US" dirty="0" err="1"/>
+              <a:t>RemoteDiag</a:t>
+            </a:r>
+            <a:r>
+              <a:rPr lang="en-US" dirty="0"/>
+              <a:t> responsibilities into </a:t>
+            </a:r>
+            <a:r>
+              <a:rPr lang="en-US" b="1" dirty="0"/>
+              <a:t>2</a:t>
+            </a:r>
+            <a:r>
+              <a:rPr lang="en-US" dirty="0"/>
+              <a:t> apps: </a:t>
+            </a:r>
+          </a:p>
+          <a:p>
+            <a:pPr marL="742950" lvl="1" indent="-285750">
+              <a:lnSpc>
+                <a:spcPct val="130000"/>
+              </a:lnSpc>
+              <a:buFont typeface="Wingdings" panose="05000000000000000000" pitchFamily="2" charset="2"/>
+              <a:buChar char="§"/>
+            </a:pPr>
+            <a:r>
+              <a:rPr lang="en-US" b="1" dirty="0" err="1"/>
+              <a:t>RemoteDiag</a:t>
+            </a:r>
+            <a:r>
+              <a:rPr lang="en-US" b="1" dirty="0"/>
+              <a:t> (EP container):</a:t>
+            </a:r>
+            <a:r>
+              <a:rPr lang="en-US" dirty="0"/>
+              <a:t> handles </a:t>
+            </a:r>
+            <a:r>
+              <a:rPr lang="en-US" dirty="0" err="1"/>
+              <a:t>diag</a:t>
+            </a:r>
+            <a:r>
+              <a:rPr lang="en-US" dirty="0"/>
+              <a:t> messages from OEM server.</a:t>
+            </a:r>
+            <a:endParaRPr lang="en-US" b="1" dirty="0"/>
+          </a:p>
+          <a:p>
+            <a:pPr marL="742950" lvl="1" indent="-285750">
+              <a:lnSpc>
+                <a:spcPct val="130000"/>
+              </a:lnSpc>
+              <a:buFont typeface="Wingdings" panose="05000000000000000000" pitchFamily="2" charset="2"/>
+              <a:buChar char="§"/>
+            </a:pPr>
+            <a:r>
+              <a:rPr lang="en-US" b="1" dirty="0" err="1"/>
+              <a:t>RemoteOTA</a:t>
+            </a:r>
+            <a:r>
+              <a:rPr lang="en-US" b="1" dirty="0"/>
+              <a:t> (Internal container):</a:t>
+            </a:r>
+            <a:r>
+              <a:rPr lang="en-US" dirty="0"/>
+              <a:t> handles OTA </a:t>
+            </a:r>
+            <a:r>
+              <a:rPr lang="en-US" dirty="0" err="1"/>
+              <a:t>diag</a:t>
+            </a:r>
+            <a:r>
+              <a:rPr lang="en-US" dirty="0"/>
+              <a:t> message flows from MM ECU.</a:t>
+            </a:r>
+          </a:p>
+          <a:p>
+            <a:pPr marL="285750" indent="-285750">
+              <a:lnSpc>
+                <a:spcPct val="130000"/>
+              </a:lnSpc>
+              <a:buFont typeface="Arial" panose="020B0604020202020204" pitchFamily="34" charset="0"/>
+              <a:buChar char="•"/>
+            </a:pPr>
+            <a:r>
+              <a:rPr lang="en-US" dirty="0" err="1"/>
+              <a:t>OnBoardClient</a:t>
+            </a:r>
+            <a:r>
+              <a:rPr lang="en-US" dirty="0"/>
+              <a:t> is responsible for </a:t>
+            </a:r>
+            <a:r>
+              <a:rPr lang="en-US" b="1" dirty="0"/>
+              <a:t>reprogramming message filtering</a:t>
+            </a:r>
+            <a:r>
+              <a:rPr lang="en-US" dirty="0"/>
+              <a:t> and </a:t>
+            </a:r>
+            <a:r>
+              <a:rPr lang="en-US" b="1" dirty="0"/>
+              <a:t>diagnostic  priority control</a:t>
+            </a:r>
+            <a:r>
+              <a:rPr lang="en-US" dirty="0"/>
+              <a:t>.</a:t>
+            </a:r>
+            <a:endParaRPr lang="en-US" sz="1600" dirty="0"/>
+          </a:p>
+        </p:txBody>
+      </p:sp>
+      <p:sp>
+        <p:nvSpPr>
+          <p:cNvPr id="2" name="Title 1"/>
+          <p:cNvSpPr>
+            <a:spLocks noGrp="1"/>
+          </p:cNvSpPr>
+          <p:nvPr>
+            <p:ph type="title"/>
+          </p:nvPr>
+        </p:nvSpPr>
+        <p:spPr/>
+        <p:txBody>
+          <a:bodyPr/>
+          <a:lstStyle/>
+          <a:p>
+            <a:r>
+              <a:rPr lang="en-US"/>
+              <a:t>Design Alternative – Alt-A: Split </a:t>
+            </a:r>
+            <a:r>
+              <a:rPr lang="en-US" err="1"/>
+              <a:t>RemoteDiag</a:t>
+            </a:r>
+            <a:endParaRPr lang="en-US"/>
+          </a:p>
+        </p:txBody>
+      </p:sp>
+      <p:sp>
+        <p:nvSpPr>
+          <p:cNvPr id="9" name="TextBox 8"/>
+          <p:cNvSpPr txBox="1"/>
+          <p:nvPr/>
+        </p:nvSpPr>
+        <p:spPr>
+          <a:xfrm>
+            <a:off x="6898742" y="6315754"/>
+            <a:ext cx="651140" cy="369332"/>
+          </a:xfrm>
+          <a:prstGeom prst="rect">
+            <a:avLst/>
+          </a:prstGeom>
+          <a:noFill/>
+        </p:spPr>
+        <p:txBody>
+          <a:bodyPr wrap="none" rtlCol="0">
+            <a:spAutoFit/>
+          </a:bodyPr>
+          <a:lstStyle/>
+          <a:p>
+            <a:r>
+              <a:rPr lang="en-US" dirty="0"/>
+              <a:t>Alt-A</a:t>
+            </a:r>
+          </a:p>
+        </p:txBody>
+      </p:sp>
+      <p:pic>
+        <p:nvPicPr>
+          <p:cNvPr id="10" name="Picture 9">
+            <a:extLst>
+              <a:ext uri="{FF2B5EF4-FFF2-40B4-BE49-F238E27FC236}">
+                <a16:creationId xmlns:a16="http://schemas.microsoft.com/office/drawing/2014/main" id="{09AB2A3E-4A5A-80E7-6BD7-3F4F73E5CF93}"/>
+              </a:ext>
+            </a:extLst>
+          </p:cNvPr>
           <p:cNvPicPr>
             <a:picLocks noChangeAspect="1"/>
           </p:cNvPicPr>
@@ -16425,32 +17319,68 @@
         </p:blipFill>
         <p:spPr>
           <a:xfrm>
-            <a:off x="547016" y="4202246"/>
-            <a:ext cx="2372009" cy="1843350"/>
+            <a:off x="160866" y="4783026"/>
+            <a:ext cx="1863379" cy="1532727"/>
           </a:xfrm>
           <a:prstGeom prst="rect">
             <a:avLst/>
           </a:prstGeom>
         </p:spPr>
       </p:pic>
+    </p:spTree>
+    <p:extLst>
+      <p:ext uri="{BB962C8B-B14F-4D97-AF65-F5344CB8AC3E}">
+        <p14:creationId xmlns:p14="http://schemas.microsoft.com/office/powerpoint/2010/main" val="3092409316"/>
+      </p:ext>
+    </p:extLst>
+  </p:cSld>
+  <p:clrMapOvr>
+    <a:masterClrMapping/>
+  </p:clrMapOvr>
+</p:sld>
+</file>
+
+<file path=ppt/slides/slide9.xml><?xml version="1.0" encoding="utf-8"?>
+<p:sld xmlns:a="http://schemas.openxmlformats.org/drawingml/2006/main" xmlns:r="http://schemas.openxmlformats.org/officeDocument/2006/relationships" xmlns:p="http://schemas.openxmlformats.org/presentationml/2006/main">
+  <p:cSld>
+    <p:spTree>
+      <p:nvGrpSpPr>
+        <p:cNvPr id="1" name=""/>
+        <p:cNvGrpSpPr/>
+        <p:nvPr/>
+      </p:nvGrpSpPr>
+      <p:grpSpPr>
+        <a:xfrm>
+          <a:off x="0" y="0"/>
+          <a:ext cx="0" cy="0"/>
+          <a:chOff x="0" y="0"/>
+          <a:chExt cx="0" cy="0"/>
+        </a:xfrm>
+      </p:grpSpPr>
       <p:pic>
         <p:nvPicPr>
-          <p:cNvPr id="4" name="Picture 3"/>
+          <p:cNvPr id="12" name="Picture 11">
+            <a:extLst>
+              <a:ext uri="{FF2B5EF4-FFF2-40B4-BE49-F238E27FC236}">
+                <a16:creationId xmlns:a16="http://schemas.microsoft.com/office/drawing/2014/main" id="{1687716E-3FC0-6720-F07D-6C24184342FD}"/>
+              </a:ext>
+            </a:extLst>
+          </p:cNvPr>
           <p:cNvPicPr>
             <a:picLocks noChangeAspect="1"/>
           </p:cNvPicPr>
           <p:nvPr/>
         </p:nvPicPr>
         <p:blipFill>
-          <a:blip r:embed="rId4"/>
+          <a:blip r:embed="rId3"/>
           <a:stretch>
             <a:fillRect/>
           </a:stretch>
         </p:blipFill>
         <p:spPr>
           <a:xfrm>
-            <a:off x="3305175" y="1542094"/>
-            <a:ext cx="8886825" cy="5320305"/>
+            <a:off x="4021716" y="1969092"/>
+            <a:ext cx="8070964" cy="4807324"/>
           </a:xfrm>
           <a:prstGeom prst="rect">
             <a:avLst/>
@@ -16558,236 +17488,15 @@
           </a:p>
         </p:txBody>
       </p:sp>
-      <p:sp>
-        <p:nvSpPr>
-          <p:cNvPr id="8" name="TextBox 7"/>
-          <p:cNvSpPr txBox="1"/>
-          <p:nvPr/>
-        </p:nvSpPr>
-        <p:spPr>
-          <a:xfrm>
-            <a:off x="6953062" y="6189006"/>
-            <a:ext cx="643125" cy="369332"/>
-          </a:xfrm>
-          <a:prstGeom prst="rect">
-            <a:avLst/>
-          </a:prstGeom>
-          <a:noFill/>
-        </p:spPr>
-        <p:txBody>
-          <a:bodyPr wrap="none" rtlCol="0">
-            <a:spAutoFit/>
-          </a:bodyPr>
-          <a:lstStyle/>
-          <a:p>
-            <a:r>
-              <a:rPr lang="en-US"/>
-              <a:t>Alt-B</a:t>
-            </a:r>
-          </a:p>
-        </p:txBody>
-      </p:sp>
-    </p:spTree>
-    <p:extLst>
-      <p:ext uri="{BB962C8B-B14F-4D97-AF65-F5344CB8AC3E}">
-        <p14:creationId xmlns:p14="http://schemas.microsoft.com/office/powerpoint/2010/main" val="681369838"/>
-      </p:ext>
-    </p:extLst>
-  </p:cSld>
-  <p:clrMapOvr>
-    <a:masterClrMapping/>
-  </p:clrMapOvr>
-</p:sld>
-</file>
-
-<file path=ppt/slides/slide9.xml><?xml version="1.0" encoding="utf-8"?>
-<p:sld xmlns:a="http://schemas.openxmlformats.org/drawingml/2006/main" xmlns:r="http://schemas.openxmlformats.org/officeDocument/2006/relationships" xmlns:p="http://schemas.openxmlformats.org/presentationml/2006/main">
-  <p:cSld>
-    <p:spTree>
-      <p:nvGrpSpPr>
-        <p:cNvPr id="1" name="">
-          <a:extLst>
-            <a:ext uri="{FF2B5EF4-FFF2-40B4-BE49-F238E27FC236}">
-              <a16:creationId xmlns:a16="http://schemas.microsoft.com/office/drawing/2014/main" id="{7A3A9F39-394E-5437-993F-29D2F2093B00}"/>
-            </a:ext>
-          </a:extLst>
-        </p:cNvPr>
-        <p:cNvGrpSpPr/>
-        <p:nvPr/>
-      </p:nvGrpSpPr>
-      <p:grpSpPr>
-        <a:xfrm>
-          <a:off x="0" y="0"/>
-          <a:ext cx="0" cy="0"/>
-          <a:chOff x="0" y="0"/>
-          <a:chExt cx="0" cy="0"/>
-        </a:xfrm>
-      </p:grpSpPr>
       <p:pic>
         <p:nvPicPr>
-          <p:cNvPr id="7" name="Picture 6"/>
-          <p:cNvPicPr>
-            <a:picLocks noChangeAspect="1"/>
-          </p:cNvPicPr>
-          <p:nvPr/>
-        </p:nvPicPr>
-        <p:blipFill>
-          <a:blip r:embed="rId3"/>
-          <a:stretch>
-            <a:fillRect/>
-          </a:stretch>
-        </p:blipFill>
-        <p:spPr>
-          <a:xfrm>
-            <a:off x="3314700" y="2354870"/>
-            <a:ext cx="8678897" cy="4350305"/>
-          </a:xfrm>
-          <a:prstGeom prst="rect">
-            <a:avLst/>
-          </a:prstGeom>
-        </p:spPr>
-      </p:pic>
-      <p:sp>
-        <p:nvSpPr>
-          <p:cNvPr id="2" name="Title 1">
+          <p:cNvPr id="9" name="Picture 8">
             <a:extLst>
               <a:ext uri="{FF2B5EF4-FFF2-40B4-BE49-F238E27FC236}">
-                <a16:creationId xmlns:a16="http://schemas.microsoft.com/office/drawing/2014/main" id="{554F77EA-2B30-AFDC-1349-3C58C2AB9061}"/>
+                <a16:creationId xmlns:a16="http://schemas.microsoft.com/office/drawing/2014/main" id="{33B21BAC-9E9C-F667-EB81-43F48A0E1E40}"/>
               </a:ext>
             </a:extLst>
           </p:cNvPr>
-          <p:cNvSpPr>
-            <a:spLocks noGrp="1"/>
-          </p:cNvSpPr>
-          <p:nvPr>
-            <p:ph type="title"/>
-          </p:nvPr>
-        </p:nvSpPr>
-        <p:spPr/>
-        <p:txBody>
-          <a:bodyPr/>
-          <a:lstStyle/>
-          <a:p>
-            <a:r>
-              <a:rPr lang="en-US"/>
-              <a:t>Design Alternative – Alt-C: Move </a:t>
-            </a:r>
-            <a:r>
-              <a:rPr lang="en-US" err="1"/>
-              <a:t>RemoteDiag</a:t>
-            </a:r>
-            <a:r>
-              <a:rPr lang="en-US"/>
-              <a:t> + Proxy</a:t>
-            </a:r>
-          </a:p>
-        </p:txBody>
-      </p:sp>
-      <p:sp>
-        <p:nvSpPr>
-          <p:cNvPr id="3" name="Content Placeholder 2">
-            <a:extLst>
-              <a:ext uri="{FF2B5EF4-FFF2-40B4-BE49-F238E27FC236}">
-                <a16:creationId xmlns:a16="http://schemas.microsoft.com/office/drawing/2014/main" id="{64FB7A4A-CF56-C0BD-9AB9-923B2D043291}"/>
-              </a:ext>
-            </a:extLst>
-          </p:cNvPr>
-          <p:cNvSpPr>
-            <a:spLocks noGrp="1"/>
-          </p:cNvSpPr>
-          <p:nvPr>
-            <p:ph idx="1"/>
-          </p:nvPr>
-        </p:nvSpPr>
-        <p:spPr>
-          <a:xfrm>
-            <a:off x="160867" y="990599"/>
-            <a:ext cx="11825921" cy="1219201"/>
-          </a:xfrm>
-        </p:spPr>
-        <p:txBody>
-          <a:bodyPr>
-            <a:normAutofit fontScale="92500" lnSpcReduction="20000"/>
-          </a:bodyPr>
-          <a:lstStyle/>
-          <a:p>
-            <a:r>
-              <a:rPr lang="en-US" sz="1800"/>
-              <a:t>Move RemoteDiag into the IP container.</a:t>
-            </a:r>
-          </a:p>
-          <a:p>
-            <a:r>
-              <a:rPr lang="en-US" sz="1800"/>
-              <a:t>Add a </a:t>
-            </a:r>
-            <a:r>
-              <a:rPr lang="en-US" sz="1800" b="1"/>
-              <a:t>new RemoteDiagProxy (RDP) component</a:t>
-            </a:r>
-            <a:r>
-              <a:rPr lang="en-US" sz="1800"/>
-              <a:t> in the EP that acts as a </a:t>
-            </a:r>
-            <a:r>
-              <a:rPr lang="en-US" sz="1800" b="1"/>
-              <a:t>transparent proxy</a:t>
-            </a:r>
-            <a:r>
-              <a:rPr lang="en-US" sz="1800"/>
-              <a:t>. </a:t>
-            </a:r>
-          </a:p>
-          <a:p>
-            <a:r>
-              <a:rPr lang="en-US" sz="1800"/>
-              <a:t>EP modules continue to interact with RDP using their existing interface</a:t>
-            </a:r>
-          </a:p>
-          <a:p>
-            <a:r>
-              <a:rPr lang="en-US" sz="1800"/>
-              <a:t>RDP forwards requests to RemoteDiag via UDS socket channel.</a:t>
-            </a:r>
-            <a:endParaRPr lang="en-US" sz="1800" b="1"/>
-          </a:p>
-          <a:p>
-            <a:endParaRPr lang="en-US" sz="1800"/>
-          </a:p>
-        </p:txBody>
-      </p:sp>
-      <p:sp>
-        <p:nvSpPr>
-          <p:cNvPr id="6" name="TextBox 5"/>
-          <p:cNvSpPr txBox="1"/>
-          <p:nvPr/>
-        </p:nvSpPr>
-        <p:spPr>
-          <a:xfrm>
-            <a:off x="6781612" y="6335843"/>
-            <a:ext cx="643125" cy="369332"/>
-          </a:xfrm>
-          <a:prstGeom prst="rect">
-            <a:avLst/>
-          </a:prstGeom>
-          <a:noFill/>
-        </p:spPr>
-        <p:txBody>
-          <a:bodyPr wrap="none" rtlCol="0">
-            <a:spAutoFit/>
-          </a:bodyPr>
-          <a:lstStyle/>
-          <a:p>
-            <a:r>
-              <a:rPr lang="en-US"/>
-              <a:t>Alt-C</a:t>
-            </a:r>
-          </a:p>
-        </p:txBody>
-      </p:sp>
-      <p:pic>
-        <p:nvPicPr>
-          <p:cNvPr id="8" name="Picture 7"/>
           <p:cNvPicPr>
             <a:picLocks noChangeAspect="1"/>
           </p:cNvPicPr>
@@ -16801,42 +17510,53 @@
         </p:blipFill>
         <p:spPr>
           <a:xfrm>
-            <a:off x="9326" y="4530022"/>
-            <a:ext cx="2196413" cy="1688471"/>
+            <a:off x="160866" y="4783026"/>
+            <a:ext cx="1863379" cy="1532727"/>
           </a:xfrm>
           <a:prstGeom prst="rect">
             <a:avLst/>
           </a:prstGeom>
         </p:spPr>
       </p:pic>
-      <p:pic>
-        <p:nvPicPr>
-          <p:cNvPr id="4" name="Picture 3"/>
-          <p:cNvPicPr>
-            <a:picLocks noChangeAspect="1"/>
-          </p:cNvPicPr>
+      <p:sp>
+        <p:nvSpPr>
+          <p:cNvPr id="14" name="TextBox 13">
+            <a:extLst>
+              <a:ext uri="{FF2B5EF4-FFF2-40B4-BE49-F238E27FC236}">
+                <a16:creationId xmlns:a16="http://schemas.microsoft.com/office/drawing/2014/main" id="{2AAE2910-7B87-F3B5-8408-E04FE9F21D42}"/>
+              </a:ext>
+            </a:extLst>
+          </p:cNvPr>
+          <p:cNvSpPr txBox="1"/>
           <p:nvPr/>
-        </p:nvPicPr>
-        <p:blipFill>
-          <a:blip r:embed="rId5"/>
-          <a:stretch>
-            <a:fillRect/>
-          </a:stretch>
-        </p:blipFill>
+        </p:nvSpPr>
         <p:spPr>
           <a:xfrm>
-            <a:off x="2205739" y="2354869"/>
-            <a:ext cx="9937672" cy="4417405"/>
+            <a:off x="6898742" y="6315754"/>
+            <a:ext cx="643125" cy="369332"/>
           </a:xfrm>
           <a:prstGeom prst="rect">
             <a:avLst/>
           </a:prstGeom>
+          <a:noFill/>
         </p:spPr>
-      </p:pic>
+        <p:txBody>
+          <a:bodyPr wrap="none" rtlCol="0">
+            <a:spAutoFit/>
+          </a:bodyPr>
+          <a:lstStyle/>
+          <a:p>
+            <a:r>
+              <a:rPr lang="en-US" dirty="0"/>
+              <a:t>Alt-B</a:t>
+            </a:r>
+          </a:p>
+        </p:txBody>
+      </p:sp>
     </p:spTree>
     <p:extLst>
       <p:ext uri="{BB962C8B-B14F-4D97-AF65-F5344CB8AC3E}">
-        <p14:creationId xmlns:p14="http://schemas.microsoft.com/office/powerpoint/2010/main" val="4181377362"/>
+        <p14:creationId xmlns:p14="http://schemas.microsoft.com/office/powerpoint/2010/main" val="681369838"/>
       </p:ext>
     </p:extLst>
   </p:cSld>

--- a/design/FE_phi.vu_Design of Secure Remote Diag on Container Separation Architecture_3rd.pptx
+++ b/design/FE_phi.vu_Design of Secure Remote Diag on Container Separation Architecture_3rd.pptx
@@ -5,7 +5,7 @@
     <p:sldMasterId id="2147483648" r:id="rId1"/>
   </p:sldMasterIdLst>
   <p:notesMasterIdLst>
-    <p:notesMasterId r:id="rId20"/>
+    <p:notesMasterId r:id="rId23"/>
   </p:notesMasterIdLst>
   <p:sldIdLst>
     <p:sldId id="256" r:id="rId2"/>
@@ -26,6 +26,9 @@
     <p:sldId id="274" r:id="rId17"/>
     <p:sldId id="277" r:id="rId18"/>
     <p:sldId id="276" r:id="rId19"/>
+    <p:sldId id="295" r:id="rId20"/>
+    <p:sldId id="296" r:id="rId21"/>
+    <p:sldId id="297" r:id="rId22"/>
   </p:sldIdLst>
   <p:sldSz cx="12192000" cy="6858000"/>
   <p:notesSz cx="6858000" cy="9144000"/>
@@ -225,7 +228,7 @@
           <a:p>
             <a:fld id="{341C17E2-92C1-406A-80C1-BA1B838099E9}" type="datetimeFigureOut">
               <a:rPr lang="en-US" smtClean="0"/>
-              <a:t>10/4/2026</a:t>
+              <a:t>10/5/2026</a:t>
             </a:fld>
             <a:endParaRPr lang="en-US"/>
           </a:p>
@@ -500,7 +503,7 @@
         <p:cNvPr id="1" name="">
           <a:extLst>
             <a:ext uri="{FF2B5EF4-FFF2-40B4-BE49-F238E27FC236}">
-              <a16:creationId xmlns:a16="http://schemas.microsoft.com/office/drawing/2014/main" id="{7871B573-D46B-DD18-A2C4-C4082199D6A7}"/>
+              <a16:creationId xmlns:a16="http://schemas.microsoft.com/office/drawing/2014/main" xmlns="" id="{7871B573-D46B-DD18-A2C4-C4082199D6A7}"/>
             </a:ext>
           </a:extLst>
         </p:cNvPr>
@@ -520,7 +523,7 @@
           <p:cNvPr id="2" name="Slide Image Placeholder 1">
             <a:extLst>
               <a:ext uri="{FF2B5EF4-FFF2-40B4-BE49-F238E27FC236}">
-                <a16:creationId xmlns:a16="http://schemas.microsoft.com/office/drawing/2014/main" id="{F16CD46A-A877-3DE1-9984-1B961658209F}"/>
+                <a16:creationId xmlns:a16="http://schemas.microsoft.com/office/drawing/2014/main" xmlns="" id="{F16CD46A-A877-3DE1-9984-1B961658209F}"/>
               </a:ext>
             </a:extLst>
           </p:cNvPr>
@@ -538,7 +541,7 @@
           <p:cNvPr id="3" name="Notes Placeholder 2">
             <a:extLst>
               <a:ext uri="{FF2B5EF4-FFF2-40B4-BE49-F238E27FC236}">
-                <a16:creationId xmlns:a16="http://schemas.microsoft.com/office/drawing/2014/main" id="{3CAC9709-5C79-D782-6C8E-2BC9A65C8D0F}"/>
+                <a16:creationId xmlns:a16="http://schemas.microsoft.com/office/drawing/2014/main" xmlns="" id="{3CAC9709-5C79-D782-6C8E-2BC9A65C8D0F}"/>
               </a:ext>
             </a:extLst>
           </p:cNvPr>
@@ -563,7 +566,7 @@
           <p:cNvPr id="4" name="Slide Number Placeholder 3">
             <a:extLst>
               <a:ext uri="{FF2B5EF4-FFF2-40B4-BE49-F238E27FC236}">
-                <a16:creationId xmlns:a16="http://schemas.microsoft.com/office/drawing/2014/main" id="{CA1C9B43-13E9-E1D6-156A-5CB894C64FDE}"/>
+                <a16:creationId xmlns:a16="http://schemas.microsoft.com/office/drawing/2014/main" xmlns="" id="{CA1C9B43-13E9-E1D6-156A-5CB894C64FDE}"/>
               </a:ext>
             </a:extLst>
           </p:cNvPr>
@@ -1062,6 +1065,90 @@
 </p:notes>
 </file>
 
+<file path=ppt/notesSlides/notesSlide7.xml><?xml version="1.0" encoding="utf-8"?>
+<p:notes xmlns:a="http://schemas.openxmlformats.org/drawingml/2006/main" xmlns:r="http://schemas.openxmlformats.org/officeDocument/2006/relationships" xmlns:p="http://schemas.openxmlformats.org/presentationml/2006/main">
+  <p:cSld>
+    <p:spTree>
+      <p:nvGrpSpPr>
+        <p:cNvPr id="1" name=""/>
+        <p:cNvGrpSpPr/>
+        <p:nvPr/>
+      </p:nvGrpSpPr>
+      <p:grpSpPr>
+        <a:xfrm>
+          <a:off x="0" y="0"/>
+          <a:ext cx="0" cy="0"/>
+          <a:chOff x="0" y="0"/>
+          <a:chExt cx="0" cy="0"/>
+        </a:xfrm>
+      </p:grpSpPr>
+      <p:sp>
+        <p:nvSpPr>
+          <p:cNvPr id="2" name="Slide Image Placeholder 1"/>
+          <p:cNvSpPr>
+            <a:spLocks noGrp="1" noRot="1" noChangeAspect="1"/>
+          </p:cNvSpPr>
+          <p:nvPr>
+            <p:ph type="sldImg"/>
+          </p:nvPr>
+        </p:nvSpPr>
+        <p:spPr/>
+      </p:sp>
+      <p:sp>
+        <p:nvSpPr>
+          <p:cNvPr id="3" name="Notes Placeholder 2"/>
+          <p:cNvSpPr>
+            <a:spLocks noGrp="1"/>
+          </p:cNvSpPr>
+          <p:nvPr>
+            <p:ph type="body" idx="1"/>
+          </p:nvPr>
+        </p:nvSpPr>
+        <p:spPr/>
+        <p:txBody>
+          <a:bodyPr/>
+          <a:lstStyle/>
+          <a:p>
+            <a:endParaRPr lang="en-US"/>
+          </a:p>
+        </p:txBody>
+      </p:sp>
+      <p:sp>
+        <p:nvSpPr>
+          <p:cNvPr id="4" name="Slide Number Placeholder 3"/>
+          <p:cNvSpPr>
+            <a:spLocks noGrp="1"/>
+          </p:cNvSpPr>
+          <p:nvPr>
+            <p:ph type="sldNum" sz="quarter" idx="10"/>
+          </p:nvPr>
+        </p:nvSpPr>
+        <p:spPr/>
+        <p:txBody>
+          <a:bodyPr/>
+          <a:lstStyle/>
+          <a:p>
+            <a:fld id="{EF277405-33BD-42BD-B604-93760E4185DC}" type="slidenum">
+              <a:rPr lang="en-US" smtClean="0"/>
+              <a:t>12</a:t>
+            </a:fld>
+            <a:endParaRPr lang="en-US"/>
+          </a:p>
+        </p:txBody>
+      </p:sp>
+    </p:spTree>
+    <p:extLst>
+      <p:ext uri="{BB962C8B-B14F-4D97-AF65-F5344CB8AC3E}">
+        <p14:creationId xmlns:p14="http://schemas.microsoft.com/office/powerpoint/2010/main" val="3095113047"/>
+      </p:ext>
+    </p:extLst>
+  </p:cSld>
+  <p:clrMapOvr>
+    <a:masterClrMapping/>
+  </p:clrMapOvr>
+</p:notes>
+</file>
+
 <file path=ppt/slideLayouts/slideLayout1.xml><?xml version="1.0" encoding="utf-8"?>
 <p:sldLayout xmlns:a="http://schemas.openxmlformats.org/drawingml/2006/main" xmlns:r="http://schemas.openxmlformats.org/officeDocument/2006/relationships" xmlns:p="http://schemas.openxmlformats.org/presentationml/2006/main" type="title" preserve="1">
   <p:cSld name="Title Slide">
@@ -1191,7 +1278,7 @@
           <a:p>
             <a:fld id="{B934B22C-8C05-4817-830F-8B9F9DEAE546}" type="datetimeFigureOut">
               <a:rPr lang="en-US" smtClean="0"/>
-              <a:t>10/4/2026</a:t>
+              <a:t>10/5/2026</a:t>
             </a:fld>
             <a:endParaRPr lang="en-US"/>
           </a:p>
@@ -1359,7 +1446,7 @@
           <a:p>
             <a:fld id="{B934B22C-8C05-4817-830F-8B9F9DEAE546}" type="datetimeFigureOut">
               <a:rPr lang="en-US" smtClean="0"/>
-              <a:t>10/4/2026</a:t>
+              <a:t>10/5/2026</a:t>
             </a:fld>
             <a:endParaRPr lang="en-US"/>
           </a:p>
@@ -1537,7 +1624,7 @@
           <a:p>
             <a:fld id="{B934B22C-8C05-4817-830F-8B9F9DEAE546}" type="datetimeFigureOut">
               <a:rPr lang="en-US" smtClean="0"/>
-              <a:t>10/4/2026</a:t>
+              <a:t>10/5/2026</a:t>
             </a:fld>
             <a:endParaRPr lang="en-US"/>
           </a:p>
@@ -1731,7 +1818,7 @@
           <a:p>
             <a:fld id="{B934B22C-8C05-4817-830F-8B9F9DEAE546}" type="datetimeFigureOut">
               <a:rPr lang="en-US" smtClean="0"/>
-              <a:t>10/4/2026</a:t>
+              <a:t>10/5/2026</a:t>
             </a:fld>
             <a:endParaRPr lang="en-US"/>
           </a:p>
@@ -1784,7 +1871,7 @@
           <p:cNvPr id="7" name="그림 5" descr="백색바탕.png">
             <a:extLst>
               <a:ext uri="{FF2B5EF4-FFF2-40B4-BE49-F238E27FC236}">
-                <a16:creationId xmlns:a16="http://schemas.microsoft.com/office/drawing/2014/main" id="{28873918-42A2-05FA-4A84-F17869DE34CF}"/>
+                <a16:creationId xmlns:a16="http://schemas.microsoft.com/office/drawing/2014/main" xmlns="" id="{28873918-42A2-05FA-4A84-F17869DE34CF}"/>
               </a:ext>
             </a:extLst>
           </p:cNvPr>
@@ -2036,7 +2123,7 @@
           <a:p>
             <a:fld id="{B934B22C-8C05-4817-830F-8B9F9DEAE546}" type="datetimeFigureOut">
               <a:rPr lang="en-US" smtClean="0"/>
-              <a:t>10/4/2026</a:t>
+              <a:t>10/5/2026</a:t>
             </a:fld>
             <a:endParaRPr lang="en-US"/>
           </a:p>
@@ -2265,7 +2352,7 @@
           <a:p>
             <a:fld id="{B934B22C-8C05-4817-830F-8B9F9DEAE546}" type="datetimeFigureOut">
               <a:rPr lang="en-US" smtClean="0"/>
-              <a:t>10/4/2026</a:t>
+              <a:t>10/5/2026</a:t>
             </a:fld>
             <a:endParaRPr lang="en-US"/>
           </a:p>
@@ -2629,7 +2716,7 @@
           <a:p>
             <a:fld id="{B934B22C-8C05-4817-830F-8B9F9DEAE546}" type="datetimeFigureOut">
               <a:rPr lang="en-US" smtClean="0"/>
-              <a:t>10/4/2026</a:t>
+              <a:t>10/5/2026</a:t>
             </a:fld>
             <a:endParaRPr lang="en-US"/>
           </a:p>
@@ -2746,7 +2833,7 @@
           <a:p>
             <a:fld id="{B934B22C-8C05-4817-830F-8B9F9DEAE546}" type="datetimeFigureOut">
               <a:rPr lang="en-US" smtClean="0"/>
-              <a:t>10/4/2026</a:t>
+              <a:t>10/5/2026</a:t>
             </a:fld>
             <a:endParaRPr lang="en-US"/>
           </a:p>
@@ -2841,7 +2928,7 @@
           <a:p>
             <a:fld id="{B934B22C-8C05-4817-830F-8B9F9DEAE546}" type="datetimeFigureOut">
               <a:rPr lang="en-US" smtClean="0"/>
-              <a:t>10/4/2026</a:t>
+              <a:t>10/5/2026</a:t>
             </a:fld>
             <a:endParaRPr lang="en-US"/>
           </a:p>
@@ -3116,7 +3203,7 @@
           <a:p>
             <a:fld id="{B934B22C-8C05-4817-830F-8B9F9DEAE546}" type="datetimeFigureOut">
               <a:rPr lang="en-US" smtClean="0"/>
-              <a:t>10/4/2026</a:t>
+              <a:t>10/5/2026</a:t>
             </a:fld>
             <a:endParaRPr lang="en-US"/>
           </a:p>
@@ -3368,7 +3455,7 @@
           <a:p>
             <a:fld id="{B934B22C-8C05-4817-830F-8B9F9DEAE546}" type="datetimeFigureOut">
               <a:rPr lang="en-US" smtClean="0"/>
-              <a:t>10/4/2026</a:t>
+              <a:t>10/5/2026</a:t>
             </a:fld>
             <a:endParaRPr lang="en-US"/>
           </a:p>
@@ -3579,7 +3666,7 @@
           <a:p>
             <a:fld id="{B934B22C-8C05-4817-830F-8B9F9DEAE546}" type="datetimeFigureOut">
               <a:rPr lang="en-US" smtClean="0"/>
-              <a:t>10/4/2026</a:t>
+              <a:t>10/5/2026</a:t>
             </a:fld>
             <a:endParaRPr lang="en-US"/>
           </a:p>
@@ -3668,7 +3755,7 @@
           <p:cNvPr id="8" name="TextBox 7">
             <a:extLst>
               <a:ext uri="{FF2B5EF4-FFF2-40B4-BE49-F238E27FC236}">
-                <a16:creationId xmlns:a16="http://schemas.microsoft.com/office/drawing/2014/main" id="{7DC87BF5-B759-FAAB-FE6D-F0E5F640800D}"/>
+                <a16:creationId xmlns:a16="http://schemas.microsoft.com/office/drawing/2014/main" xmlns="" id="{7DC87BF5-B759-FAAB-FE6D-F0E5F640800D}"/>
               </a:ext>
             </a:extLst>
           </p:cNvPr>
@@ -3676,7 +3763,7 @@
           <p:nvPr userDrawn="1">
             <p:extLst>
               <p:ext uri="{1162E1C5-73C7-4A58-AE30-91384D911F3F}">
-                <p184:classification xmlns:p184="http://schemas.microsoft.com/office/powerpoint/2018/4/main" val="hdr"/>
+                <p184:classification xmlns:p184="http://schemas.microsoft.com/office/powerpoint/2018/4/main" xmlns="" val="hdr"/>
               </p:ext>
             </p:extLst>
           </p:nvPr>
@@ -4123,6 +4210,13 @@
   <p:clrMapOvr>
     <a:masterClrMapping/>
   </p:clrMapOvr>
+  <p:timing>
+    <p:tnLst>
+      <p:par>
+        <p:cTn id="1" dur="indefinite" restart="never" nodeType="tmRoot"/>
+      </p:par>
+    </p:tnLst>
+  </p:timing>
 </p:sld>
 </file>
 
@@ -4134,7 +4228,7 @@
         <p:cNvPr id="1" name="">
           <a:extLst>
             <a:ext uri="{FF2B5EF4-FFF2-40B4-BE49-F238E27FC236}">
-              <a16:creationId xmlns:a16="http://schemas.microsoft.com/office/drawing/2014/main" id="{7A3A9F39-394E-5437-993F-29D2F2093B00}"/>
+              <a16:creationId xmlns:a16="http://schemas.microsoft.com/office/drawing/2014/main" xmlns="" id="{7A3A9F39-394E-5437-993F-29D2F2093B00}"/>
             </a:ext>
           </a:extLst>
         </p:cNvPr>
@@ -4154,7 +4248,7 @@
           <p:cNvPr id="13" name="Picture 12">
             <a:extLst>
               <a:ext uri="{FF2B5EF4-FFF2-40B4-BE49-F238E27FC236}">
-                <a16:creationId xmlns:a16="http://schemas.microsoft.com/office/drawing/2014/main" id="{D51D2743-5B87-CC81-8D97-271314E9E8B1}"/>
+                <a16:creationId xmlns:a16="http://schemas.microsoft.com/office/drawing/2014/main" xmlns="" id="{D51D2743-5B87-CC81-8D97-271314E9E8B1}"/>
               </a:ext>
             </a:extLst>
           </p:cNvPr>
@@ -4184,7 +4278,7 @@
           <p:cNvPr id="2" name="Title 1">
             <a:extLst>
               <a:ext uri="{FF2B5EF4-FFF2-40B4-BE49-F238E27FC236}">
-                <a16:creationId xmlns:a16="http://schemas.microsoft.com/office/drawing/2014/main" id="{554F77EA-2B30-AFDC-1349-3C58C2AB9061}"/>
+                <a16:creationId xmlns:a16="http://schemas.microsoft.com/office/drawing/2014/main" xmlns="" id="{554F77EA-2B30-AFDC-1349-3C58C2AB9061}"/>
               </a:ext>
             </a:extLst>
           </p:cNvPr>
@@ -4220,7 +4314,7 @@
           <p:cNvPr id="3" name="Content Placeholder 2">
             <a:extLst>
               <a:ext uri="{FF2B5EF4-FFF2-40B4-BE49-F238E27FC236}">
-                <a16:creationId xmlns:a16="http://schemas.microsoft.com/office/drawing/2014/main" id="{64FB7A4A-CF56-C0BD-9AB9-923B2D043291}"/>
+                <a16:creationId xmlns:a16="http://schemas.microsoft.com/office/drawing/2014/main" xmlns="" id="{64FB7A4A-CF56-C0BD-9AB9-923B2D043291}"/>
               </a:ext>
             </a:extLst>
           </p:cNvPr>
@@ -4317,7 +4411,7 @@
           <p:cNvPr id="11" name="Picture 10">
             <a:extLst>
               <a:ext uri="{FF2B5EF4-FFF2-40B4-BE49-F238E27FC236}">
-                <a16:creationId xmlns:a16="http://schemas.microsoft.com/office/drawing/2014/main" id="{B0A483E6-6ECF-F5F2-5FFC-55A9FD629F07}"/>
+                <a16:creationId xmlns:a16="http://schemas.microsoft.com/office/drawing/2014/main" xmlns="" id="{B0A483E6-6ECF-F5F2-5FFC-55A9FD629F07}"/>
               </a:ext>
             </a:extLst>
           </p:cNvPr>
@@ -4347,7 +4441,7 @@
           <p:cNvPr id="15" name="TextBox 14">
             <a:extLst>
               <a:ext uri="{FF2B5EF4-FFF2-40B4-BE49-F238E27FC236}">
-                <a16:creationId xmlns:a16="http://schemas.microsoft.com/office/drawing/2014/main" id="{12425196-F6FB-6F05-9DFF-490CE43C23AD}"/>
+                <a16:creationId xmlns:a16="http://schemas.microsoft.com/office/drawing/2014/main" xmlns="" id="{12425196-F6FB-6F05-9DFF-490CE43C23AD}"/>
               </a:ext>
             </a:extLst>
           </p:cNvPr>
@@ -4387,6 +4481,13 @@
   <p:clrMapOvr>
     <a:masterClrMapping/>
   </p:clrMapOvr>
+  <p:timing>
+    <p:tnLst>
+      <p:par>
+        <p:cTn id="1" dur="indefinite" restart="never" nodeType="tmRoot"/>
+      </p:par>
+    </p:tnLst>
+  </p:timing>
 </p:sld>
 </file>
 
@@ -4444,7 +4545,7 @@
         </p:nvSpPr>
         <p:spPr>
           <a:xfrm>
-            <a:off x="160866" y="5932081"/>
+            <a:off x="160866" y="6178302"/>
             <a:ext cx="3439584" cy="492443"/>
           </a:xfrm>
           <a:prstGeom prst="rect">
@@ -4482,7 +4583,7 @@
           <p:cNvPr id="7" name="Table 6">
             <a:extLst>
               <a:ext uri="{FF2B5EF4-FFF2-40B4-BE49-F238E27FC236}">
-                <a16:creationId xmlns:a16="http://schemas.microsoft.com/office/drawing/2014/main" id="{6C8AAA51-C203-CD8B-4B02-DE7401134C21}"/>
+                <a16:creationId xmlns:a16="http://schemas.microsoft.com/office/drawing/2014/main" xmlns="" id="{6C8AAA51-C203-CD8B-4B02-DE7401134C21}"/>
               </a:ext>
             </a:extLst>
           </p:cNvPr>
@@ -4492,14 +4593,14 @@
           <p:nvPr>
             <p:extLst>
               <p:ext uri="{D42A27DB-BD31-4B8C-83A1-F6EECF244321}">
-                <p14:modId xmlns:p14="http://schemas.microsoft.com/office/powerpoint/2010/main" val="217221726"/>
+                <p14:modId xmlns:p14="http://schemas.microsoft.com/office/powerpoint/2010/main" val="550902463"/>
               </p:ext>
             </p:extLst>
           </p:nvPr>
         </p:nvGraphicFramePr>
         <p:xfrm>
-          <a:off x="72428" y="725354"/>
-          <a:ext cx="12050161" cy="4798033"/>
+          <a:off x="72428" y="625771"/>
+          <a:ext cx="12050161" cy="5296762"/>
         </p:xfrm>
         <a:graphic>
           <a:graphicData uri="http://schemas.openxmlformats.org/drawingml/2006/table">
@@ -4511,28 +4612,28 @@
                 <a:gridCol w="1149790">
                   <a:extLst>
                     <a:ext uri="{9D8B030D-6E8A-4147-A177-3AD203B41FA5}">
-                      <a16:colId xmlns:a16="http://schemas.microsoft.com/office/drawing/2014/main" val="20000"/>
+                      <a16:colId xmlns:a16="http://schemas.microsoft.com/office/drawing/2014/main" xmlns="" val="20000"/>
                     </a:ext>
                   </a:extLst>
                 </a:gridCol>
-                <a:gridCol w="3633457">
+                <a:gridCol w="3648546">
                   <a:extLst>
                     <a:ext uri="{9D8B030D-6E8A-4147-A177-3AD203B41FA5}">
-                      <a16:colId xmlns:a16="http://schemas.microsoft.com/office/drawing/2014/main" val="20001"/>
+                      <a16:colId xmlns:a16="http://schemas.microsoft.com/office/drawing/2014/main" xmlns="" val="20001"/>
                     </a:ext>
                   </a:extLst>
                 </a:gridCol>
-                <a:gridCol w="3781331">
+                <a:gridCol w="3440317">
                   <a:extLst>
                     <a:ext uri="{9D8B030D-6E8A-4147-A177-3AD203B41FA5}">
-                      <a16:colId xmlns:a16="http://schemas.microsoft.com/office/drawing/2014/main" val="2530683369"/>
+                      <a16:colId xmlns:a16="http://schemas.microsoft.com/office/drawing/2014/main" xmlns="" val="2530683369"/>
                     </a:ext>
                   </a:extLst>
                 </a:gridCol>
-                <a:gridCol w="3485583">
+                <a:gridCol w="3811508">
                   <a:extLst>
                     <a:ext uri="{9D8B030D-6E8A-4147-A177-3AD203B41FA5}">
-                      <a16:colId xmlns:a16="http://schemas.microsoft.com/office/drawing/2014/main" val="20002"/>
+                      <a16:colId xmlns:a16="http://schemas.microsoft.com/office/drawing/2014/main" xmlns="" val="20002"/>
                     </a:ext>
                   </a:extLst>
                 </a:gridCol>
@@ -4871,7 +4972,7 @@
                 </a:tc>
                 <a:extLst>
                   <a:ext uri="{0D108BD9-81ED-4DB2-BD59-A6C34878D82A}">
-                    <a16:rowId xmlns:a16="http://schemas.microsoft.com/office/drawing/2014/main" val="10000"/>
+                    <a16:rowId xmlns:a16="http://schemas.microsoft.com/office/drawing/2014/main" xmlns="" val="10000"/>
                   </a:ext>
                 </a:extLst>
               </a:tr>
@@ -5322,7 +5423,7 @@
                 </a:tc>
                 <a:extLst>
                   <a:ext uri="{0D108BD9-81ED-4DB2-BD59-A6C34878D82A}">
-                    <a16:rowId xmlns:a16="http://schemas.microsoft.com/office/drawing/2014/main" val="10001"/>
+                    <a16:rowId xmlns:a16="http://schemas.microsoft.com/office/drawing/2014/main" xmlns="" val="10001"/>
                   </a:ext>
                 </a:extLst>
               </a:tr>
@@ -5767,7 +5868,7 @@
                 </a:tc>
                 <a:extLst>
                   <a:ext uri="{0D108BD9-81ED-4DB2-BD59-A6C34878D82A}">
-                    <a16:rowId xmlns:a16="http://schemas.microsoft.com/office/drawing/2014/main" val="10002"/>
+                    <a16:rowId xmlns:a16="http://schemas.microsoft.com/office/drawing/2014/main" xmlns="" val="10002"/>
                   </a:ext>
                 </a:extLst>
               </a:tr>
@@ -6352,7 +6453,7 @@
                 </a:tc>
                 <a:extLst>
                   <a:ext uri="{0D108BD9-81ED-4DB2-BD59-A6C34878D82A}">
-                    <a16:rowId xmlns:a16="http://schemas.microsoft.com/office/drawing/2014/main" val="10003"/>
+                    <a16:rowId xmlns:a16="http://schemas.microsoft.com/office/drawing/2014/main" xmlns="" val="10003"/>
                   </a:ext>
                 </a:extLst>
               </a:tr>
@@ -6747,12 +6848,19 @@
                         </a:lnSpc>
                       </a:pPr>
                       <a:r>
-                        <a:rPr lang="en-US" sz="1300" b="1" dirty="0">
+                        <a:rPr kumimoji="0" lang="en-US" sz="1300" b="1" i="0" u="none" strike="noStrike" kern="1200" cap="none" spc="0" normalizeH="0" baseline="0" noProof="0" smtClean="0">
+                          <a:ln>
+                            <a:noFill/>
+                          </a:ln>
                           <a:solidFill>
-                            <a:srgbClr val="00B050"/>
+                            <a:srgbClr val="ED7D31"/>
                           </a:solidFill>
+                          <a:effectLst/>
+                          <a:uLnTx/>
+                          <a:uFillTx/>
+                          <a:latin typeface="+mn-lt"/>
                         </a:rPr>
-                        <a:t>High</a:t>
+                        <a:t>Medium</a:t>
                       </a:r>
                       <a:endParaRPr lang="en-US" sz="1300" b="0" dirty="0">
                         <a:latin typeface="+mn-lt"/>
@@ -6777,22 +6885,61 @@
                           <a:latin typeface="+mn-lt"/>
                           <a:cs typeface="Arial" panose="020B0604020202020204" pitchFamily="34" charset="0"/>
                         </a:rPr>
-                        <a:t>required in existing modules. </a:t>
+                        <a:t>required in </a:t>
                       </a:r>
                       <a:r>
-                        <a:rPr lang="en-US" sz="1300" b="0" baseline="0" dirty="0" err="1">
+                        <a:rPr lang="en-US" sz="1300" b="0" baseline="0">
                           <a:latin typeface="+mn-lt"/>
                           <a:cs typeface="Arial" panose="020B0604020202020204" pitchFamily="34" charset="0"/>
                         </a:rPr>
-                        <a:t>RemoteDiagProxy</a:t>
+                        <a:t>existing </a:t>
+                      </a:r>
+                      <a:r>
+                        <a:rPr lang="en-US" sz="1300" b="0" baseline="0" smtClean="0">
+                          <a:latin typeface="+mn-lt"/>
+                          <a:cs typeface="Arial" panose="020B0604020202020204" pitchFamily="34" charset="0"/>
+                        </a:rPr>
+                        <a:t>modules but a </a:t>
+                      </a:r>
+                      <a:r>
+                        <a:rPr lang="en-US" sz="1300" b="1" baseline="0" smtClean="0">
+                          <a:latin typeface="+mn-lt"/>
+                          <a:cs typeface="Arial" panose="020B0604020202020204" pitchFamily="34" charset="0"/>
+                        </a:rPr>
+                        <a:t>new module</a:t>
+                      </a:r>
+                      <a:r>
+                        <a:rPr lang="en-US" sz="1300" b="0" baseline="0" smtClean="0">
+                          <a:latin typeface="+mn-lt"/>
+                          <a:cs typeface="Arial" panose="020B0604020202020204" pitchFamily="34" charset="0"/>
+                        </a:rPr>
+                        <a:t> RemoteDiagProxy is required. RemoteDiagProxy </a:t>
                       </a:r>
                       <a:r>
                         <a:rPr lang="en-US" sz="1300" b="0" baseline="0" dirty="0">
                           <a:latin typeface="+mn-lt"/>
                           <a:cs typeface="Arial" panose="020B0604020202020204" pitchFamily="34" charset="0"/>
                         </a:rPr>
-                        <a:t> preserves the current binder interface</a:t>
+                        <a:t>preserves the current </a:t>
                       </a:r>
+                      <a:r>
+                        <a:rPr lang="en-US" sz="1300" b="0" baseline="0">
+                          <a:latin typeface="+mn-lt"/>
+                          <a:cs typeface="Arial" panose="020B0604020202020204" pitchFamily="34" charset="0"/>
+                        </a:rPr>
+                        <a:t>binder </a:t>
+                      </a:r>
+                      <a:r>
+                        <a:rPr lang="en-US" sz="1300" b="0" baseline="0" smtClean="0">
+                          <a:latin typeface="+mn-lt"/>
+                          <a:cs typeface="Arial" panose="020B0604020202020204" pitchFamily="34" charset="0"/>
+                        </a:rPr>
+                        <a:t>interface. </a:t>
+                      </a:r>
+                      <a:endParaRPr lang="en-US" sz="1300" b="0" baseline="0" dirty="0">
+                        <a:latin typeface="+mn-lt"/>
+                        <a:cs typeface="Arial" panose="020B0604020202020204" pitchFamily="34" charset="0"/>
+                      </a:endParaRPr>
                     </a:p>
                   </a:txBody>
                   <a:tcPr marL="106700" marR="106700" marT="53350" marB="53350">
@@ -6836,7 +6983,7 @@
                 </a:tc>
                 <a:extLst>
                   <a:ext uri="{0D108BD9-81ED-4DB2-BD59-A6C34878D82A}">
-                    <a16:rowId xmlns:a16="http://schemas.microsoft.com/office/drawing/2014/main" val="10004"/>
+                    <a16:rowId xmlns:a16="http://schemas.microsoft.com/office/drawing/2014/main" xmlns="" val="10004"/>
                   </a:ext>
                 </a:extLst>
               </a:tr>
@@ -7108,7 +7255,7 @@
                 </a:tc>
                 <a:extLst>
                   <a:ext uri="{0D108BD9-81ED-4DB2-BD59-A6C34878D82A}">
-                    <a16:rowId xmlns:a16="http://schemas.microsoft.com/office/drawing/2014/main" val="10006"/>
+                    <a16:rowId xmlns:a16="http://schemas.microsoft.com/office/drawing/2014/main" xmlns="" val="10006"/>
                   </a:ext>
                 </a:extLst>
               </a:tr>
@@ -7124,7 +7271,7 @@
         </p:nvSpPr>
         <p:spPr>
           <a:xfrm>
-            <a:off x="10138020" y="5808971"/>
+            <a:off x="10112016" y="6009927"/>
             <a:ext cx="1981877" cy="738664"/>
           </a:xfrm>
           <a:prstGeom prst="rect">
@@ -7191,7 +7338,7 @@
           <p:cNvPr id="9" name="Picture 2" descr="체크 표시 클립 아트. 무료 다운로드. | Creazilla">
             <a:extLst>
               <a:ext uri="{FF2B5EF4-FFF2-40B4-BE49-F238E27FC236}">
-                <a16:creationId xmlns:a16="http://schemas.microsoft.com/office/drawing/2014/main" id="{07DB846E-8DD2-9BB2-88FF-8A7E0BD6CA84}"/>
+                <a16:creationId xmlns:a16="http://schemas.microsoft.com/office/drawing/2014/main" xmlns="" id="{07DB846E-8DD2-9BB2-88FF-8A7E0BD6CA84}"/>
               </a:ext>
             </a:extLst>
           </p:cNvPr>
@@ -7215,7 +7362,7 @@
         </p:blipFill>
         <p:spPr bwMode="auto">
           <a:xfrm>
-            <a:off x="9787350" y="5257816"/>
+            <a:off x="9660602" y="5657752"/>
             <a:ext cx="216024" cy="216024"/>
           </a:xfrm>
           <a:prstGeom prst="rect">
@@ -7243,6 +7390,13 @@
   <p:clrMapOvr>
     <a:masterClrMapping/>
   </p:clrMapOvr>
+  <p:timing>
+    <p:tnLst>
+      <p:par>
+        <p:cTn id="1" dur="indefinite" restart="never" nodeType="tmRoot"/>
+      </p:par>
+    </p:tnLst>
+  </p:timing>
 </p:sld>
 </file>
 
@@ -7268,7 +7422,7 @@
           <p:cNvPr id="2" name="Title 1">
             <a:extLst>
               <a:ext uri="{FF2B5EF4-FFF2-40B4-BE49-F238E27FC236}">
-                <a16:creationId xmlns:a16="http://schemas.microsoft.com/office/drawing/2014/main" id="{4CA99A5D-DD39-1919-FD58-65B06FAFDE0F}"/>
+                <a16:creationId xmlns:a16="http://schemas.microsoft.com/office/drawing/2014/main" xmlns="" id="{4CA99A5D-DD39-1919-FD58-65B06FAFDE0F}"/>
               </a:ext>
             </a:extLst>
           </p:cNvPr>
@@ -7286,7 +7440,15 @@
           <a:p>
             <a:r>
               <a:rPr lang="en-US"/>
-              <a:t>Detail design: Forward </a:t>
+              <a:t>Detail </a:t>
+            </a:r>
+            <a:r>
+              <a:rPr lang="en-US" smtClean="0"/>
+              <a:t>design Alt-C: </a:t>
+            </a:r>
+            <a:r>
+              <a:rPr lang="en-US"/>
+              <a:t>Forward </a:t>
             </a:r>
             <a:r>
               <a:rPr lang="en-US" dirty="0"/>
@@ -7305,13 +7467,7 @@
       </p:sp>
       <p:pic>
         <p:nvPicPr>
-          <p:cNvPr id="5" name="Content Placeholder 4">
-            <a:extLst>
-              <a:ext uri="{FF2B5EF4-FFF2-40B4-BE49-F238E27FC236}">
-                <a16:creationId xmlns:a16="http://schemas.microsoft.com/office/drawing/2014/main" id="{20EC3E71-48BE-FEC7-88E8-47DB96F90E14}"/>
-              </a:ext>
-            </a:extLst>
-          </p:cNvPr>
+          <p:cNvPr id="4" name="Content Placeholder 3"/>
           <p:cNvPicPr>
             <a:picLocks noGrp="1" noChangeAspect="1"/>
           </p:cNvPicPr>
@@ -7320,7 +7476,7 @@
           </p:nvPr>
         </p:nvPicPr>
         <p:blipFill>
-          <a:blip r:embed="rId2">
+          <a:blip r:embed="rId3">
             <a:extLst>
               <a:ext uri="{28A0092B-C50C-407E-A947-70E740481C1C}">
                 <a14:useLocalDpi xmlns:a14="http://schemas.microsoft.com/office/drawing/2010/main" val="0"/>
@@ -7333,8 +7489,29 @@
         </p:blipFill>
         <p:spPr>
           <a:xfrm>
-            <a:off x="20172" y="1043549"/>
-            <a:ext cx="12163910" cy="5360052"/>
+            <a:off x="756508" y="990600"/>
+            <a:ext cx="10678985" cy="4966970"/>
+          </a:xfrm>
+        </p:spPr>
+      </p:pic>
+      <p:pic>
+        <p:nvPicPr>
+          <p:cNvPr id="6" name="Picture 5"/>
+          <p:cNvPicPr>
+            <a:picLocks noChangeAspect="1"/>
+          </p:cNvPicPr>
+          <p:nvPr/>
+        </p:nvPicPr>
+        <p:blipFill>
+          <a:blip r:embed="rId4"/>
+          <a:stretch>
+            <a:fillRect/>
+          </a:stretch>
+        </p:blipFill>
+        <p:spPr>
+          <a:xfrm>
+            <a:off x="8863129" y="6086159"/>
+            <a:ext cx="2572364" cy="685964"/>
           </a:xfrm>
           <a:prstGeom prst="rect">
             <a:avLst/>
@@ -7351,6 +7528,13 @@
   <p:clrMapOvr>
     <a:masterClrMapping/>
   </p:clrMapOvr>
+  <p:timing>
+    <p:tnLst>
+      <p:par>
+        <p:cTn id="1" dur="indefinite" restart="never" nodeType="tmRoot"/>
+      </p:par>
+    </p:tnLst>
+  </p:timing>
 </p:sld>
 </file>
 
@@ -7376,7 +7560,7 @@
           <p:cNvPr id="2" name="Title 1">
             <a:extLst>
               <a:ext uri="{FF2B5EF4-FFF2-40B4-BE49-F238E27FC236}">
-                <a16:creationId xmlns:a16="http://schemas.microsoft.com/office/drawing/2014/main" id="{B643E24B-1160-F6BA-5A0C-DB3B3DD9CD8A}"/>
+                <a16:creationId xmlns:a16="http://schemas.microsoft.com/office/drawing/2014/main" xmlns="" id="{B643E24B-1160-F6BA-5A0C-DB3B3DD9CD8A}"/>
               </a:ext>
             </a:extLst>
           </p:cNvPr>
@@ -7394,7 +7578,15 @@
           <a:p>
             <a:r>
               <a:rPr lang="en-US"/>
-              <a:t>Detail design: Filter </a:t>
+              <a:t>Detail </a:t>
+            </a:r>
+            <a:r>
+              <a:rPr lang="en-US" smtClean="0"/>
+              <a:t>design Alt-C: </a:t>
+            </a:r>
+            <a:r>
+              <a:rPr lang="en-US"/>
+              <a:t>Filter </a:t>
             </a:r>
             <a:r>
               <a:rPr lang="en-US" dirty="0"/>
@@ -7405,13 +7597,7 @@
       </p:sp>
       <p:pic>
         <p:nvPicPr>
-          <p:cNvPr id="5" name="Content Placeholder 4">
-            <a:extLst>
-              <a:ext uri="{FF2B5EF4-FFF2-40B4-BE49-F238E27FC236}">
-                <a16:creationId xmlns:a16="http://schemas.microsoft.com/office/drawing/2014/main" id="{3D875D97-63D9-E3DF-760D-4A57DB7A20FB}"/>
-              </a:ext>
-            </a:extLst>
-          </p:cNvPr>
+          <p:cNvPr id="4" name="Content Placeholder 3"/>
           <p:cNvPicPr>
             <a:picLocks noGrp="1" noChangeAspect="1"/>
           </p:cNvPicPr>
@@ -7433,8 +7619,29 @@
         </p:blipFill>
         <p:spPr>
           <a:xfrm>
-            <a:off x="627596" y="862011"/>
-            <a:ext cx="10936808" cy="5613841"/>
+            <a:off x="1217144" y="990600"/>
+            <a:ext cx="9757712" cy="5034565"/>
+          </a:xfrm>
+        </p:spPr>
+      </p:pic>
+      <p:pic>
+        <p:nvPicPr>
+          <p:cNvPr id="6" name="Picture 5"/>
+          <p:cNvPicPr>
+            <a:picLocks noChangeAspect="1"/>
+          </p:cNvPicPr>
+          <p:nvPr/>
+        </p:nvPicPr>
+        <p:blipFill>
+          <a:blip r:embed="rId3"/>
+          <a:stretch>
+            <a:fillRect/>
+          </a:stretch>
+        </p:blipFill>
+        <p:spPr>
+          <a:xfrm>
+            <a:off x="8402492" y="6153754"/>
+            <a:ext cx="2572364" cy="685964"/>
           </a:xfrm>
           <a:prstGeom prst="rect">
             <a:avLst/>
@@ -7451,6 +7658,13 @@
   <p:clrMapOvr>
     <a:masterClrMapping/>
   </p:clrMapOvr>
+  <p:timing>
+    <p:tnLst>
+      <p:par>
+        <p:cTn id="1" dur="indefinite" restart="never" nodeType="tmRoot"/>
+      </p:par>
+    </p:tnLst>
+  </p:timing>
 </p:sld>
 </file>
 
@@ -7495,36 +7709,6 @@
       </p:sp>
       <p:pic>
         <p:nvPicPr>
-          <p:cNvPr id="15" name="Picture 14"/>
-          <p:cNvPicPr>
-            <a:picLocks noChangeAspect="1"/>
-          </p:cNvPicPr>
-          <p:nvPr/>
-        </p:nvPicPr>
-        <p:blipFill>
-          <a:blip r:embed="rId2">
-            <a:extLst>
-              <a:ext uri="{28A0092B-C50C-407E-A947-70E740481C1C}">
-                <a14:useLocalDpi xmlns:a14="http://schemas.microsoft.com/office/drawing/2010/main" val="0"/>
-              </a:ext>
-            </a:extLst>
-          </a:blip>
-          <a:stretch>
-            <a:fillRect/>
-          </a:stretch>
-        </p:blipFill>
-        <p:spPr>
-          <a:xfrm>
-            <a:off x="646640" y="4219575"/>
-            <a:ext cx="10269609" cy="1927903"/>
-          </a:xfrm>
-          <a:prstGeom prst="rect">
-            <a:avLst/>
-          </a:prstGeom>
-        </p:spPr>
-      </p:pic>
-      <p:pic>
-        <p:nvPicPr>
           <p:cNvPr id="3" name="Picture 2"/>
           <p:cNvPicPr>
             <a:picLocks noChangeAspect="1"/>
@@ -7532,7 +7716,7 @@
           <p:nvPr/>
         </p:nvPicPr>
         <p:blipFill>
-          <a:blip r:embed="rId3"/>
+          <a:blip r:embed="rId2"/>
           <a:stretch>
             <a:fillRect/>
           </a:stretch>
@@ -7590,6 +7774,13 @@
   <p:clrMapOvr>
     <a:masterClrMapping/>
   </p:clrMapOvr>
+  <p:timing>
+    <p:tnLst>
+      <p:par>
+        <p:cTn id="1" dur="indefinite" restart="never" nodeType="tmRoot"/>
+      </p:par>
+    </p:tnLst>
+  </p:timing>
 </p:sld>
 </file>
 
@@ -7705,6 +7896,13 @@
   <p:clrMapOvr>
     <a:masterClrMapping/>
   </p:clrMapOvr>
+  <p:timing>
+    <p:tnLst>
+      <p:par>
+        <p:cTn id="1" dur="indefinite" restart="never" nodeType="tmRoot"/>
+      </p:par>
+    </p:tnLst>
+  </p:timing>
 </p:sld>
 </file>
 
@@ -7795,6 +7993,13 @@
   <p:clrMapOvr>
     <a:masterClrMapping/>
   </p:clrMapOvr>
+  <p:timing>
+    <p:tnLst>
+      <p:par>
+        <p:cTn id="1" dur="indefinite" restart="never" nodeType="tmRoot"/>
+      </p:par>
+    </p:tnLst>
+  </p:timing>
 </p:sld>
 </file>
 
@@ -7876,6 +8081,13 @@
   <p:clrMapOvr>
     <a:masterClrMapping/>
   </p:clrMapOvr>
+  <p:timing>
+    <p:tnLst>
+      <p:par>
+        <p:cTn id="1" dur="indefinite" restart="never" nodeType="tmRoot"/>
+      </p:par>
+    </p:tnLst>
+  </p:timing>
 </p:sld>
 </file>
 
@@ -7901,7 +8113,7 @@
           <p:cNvPr id="2" name="Title 1">
             <a:extLst>
               <a:ext uri="{FF2B5EF4-FFF2-40B4-BE49-F238E27FC236}">
-                <a16:creationId xmlns:a16="http://schemas.microsoft.com/office/drawing/2014/main" id="{65C86E6E-BE59-7A7B-6BE9-16A0A094C3D6}"/>
+                <a16:creationId xmlns:a16="http://schemas.microsoft.com/office/drawing/2014/main" xmlns="" id="{65C86E6E-BE59-7A7B-6BE9-16A0A094C3D6}"/>
               </a:ext>
             </a:extLst>
           </p:cNvPr>
@@ -7929,7 +8141,7 @@
           <p:cNvPr id="7" name="Content Placeholder 6">
             <a:extLst>
               <a:ext uri="{FF2B5EF4-FFF2-40B4-BE49-F238E27FC236}">
-                <a16:creationId xmlns:a16="http://schemas.microsoft.com/office/drawing/2014/main" id="{AD4A4EC6-9BB8-2849-8D75-05C44DE9A384}"/>
+                <a16:creationId xmlns:a16="http://schemas.microsoft.com/office/drawing/2014/main" xmlns="" id="{AD4A4EC6-9BB8-2849-8D75-05C44DE9A384}"/>
               </a:ext>
             </a:extLst>
           </p:cNvPr>
@@ -7961,7 +8173,7 @@
           <p:cNvPr id="9" name="Picture 8">
             <a:extLst>
               <a:ext uri="{FF2B5EF4-FFF2-40B4-BE49-F238E27FC236}">
-                <a16:creationId xmlns:a16="http://schemas.microsoft.com/office/drawing/2014/main" id="{C985C62C-76E5-84A1-DEF1-FC486F2BF179}"/>
+                <a16:creationId xmlns:a16="http://schemas.microsoft.com/office/drawing/2014/main" xmlns="" id="{C985C62C-76E5-84A1-DEF1-FC486F2BF179}"/>
               </a:ext>
             </a:extLst>
           </p:cNvPr>
@@ -7996,6 +8208,126 @@
   <p:clrMapOvr>
     <a:masterClrMapping/>
   </p:clrMapOvr>
+  <p:timing>
+    <p:tnLst>
+      <p:par>
+        <p:cTn id="1" dur="indefinite" restart="never" nodeType="tmRoot"/>
+      </p:par>
+    </p:tnLst>
+  </p:timing>
+</p:sld>
+</file>
+
+<file path=ppt/slides/slide19.xml><?xml version="1.0" encoding="utf-8"?>
+<p:sld xmlns:a="http://schemas.openxmlformats.org/drawingml/2006/main" xmlns:r="http://schemas.openxmlformats.org/officeDocument/2006/relationships" xmlns:p="http://schemas.openxmlformats.org/presentationml/2006/main">
+  <p:cSld>
+    <p:spTree>
+      <p:nvGrpSpPr>
+        <p:cNvPr id="1" name=""/>
+        <p:cNvGrpSpPr/>
+        <p:nvPr/>
+      </p:nvGrpSpPr>
+      <p:grpSpPr>
+        <a:xfrm>
+          <a:off x="0" y="0"/>
+          <a:ext cx="0" cy="0"/>
+          <a:chOff x="0" y="0"/>
+          <a:chExt cx="0" cy="0"/>
+        </a:xfrm>
+      </p:grpSpPr>
+      <p:pic>
+        <p:nvPicPr>
+          <p:cNvPr id="9" name="Content Placeholder 8"/>
+          <p:cNvPicPr>
+            <a:picLocks noGrp="1" noChangeAspect="1"/>
+          </p:cNvPicPr>
+          <p:nvPr>
+            <p:ph idx="1"/>
+          </p:nvPr>
+        </p:nvPicPr>
+        <p:blipFill>
+          <a:blip r:embed="rId2">
+            <a:extLst>
+              <a:ext uri="{28A0092B-C50C-407E-A947-70E740481C1C}">
+                <a14:useLocalDpi xmlns:a14="http://schemas.microsoft.com/office/drawing/2010/main" val="0"/>
+              </a:ext>
+            </a:extLst>
+          </a:blip>
+          <a:stretch>
+            <a:fillRect/>
+          </a:stretch>
+        </p:blipFill>
+        <p:spPr>
+          <a:xfrm>
+            <a:off x="1247946" y="990600"/>
+            <a:ext cx="8390180" cy="5278438"/>
+          </a:xfrm>
+        </p:spPr>
+      </p:pic>
+      <p:sp>
+        <p:nvSpPr>
+          <p:cNvPr id="2" name="Title 1"/>
+          <p:cNvSpPr>
+            <a:spLocks noGrp="1"/>
+          </p:cNvSpPr>
+          <p:nvPr>
+            <p:ph type="title"/>
+          </p:nvPr>
+        </p:nvSpPr>
+        <p:spPr/>
+        <p:txBody>
+          <a:bodyPr/>
+          <a:lstStyle/>
+          <a:p>
+            <a:r>
+              <a:rPr lang="en-US" smtClean="0"/>
+              <a:t>Detai design: IPC connection setup</a:t>
+            </a:r>
+            <a:endParaRPr lang="en-US"/>
+          </a:p>
+        </p:txBody>
+      </p:sp>
+      <p:pic>
+        <p:nvPicPr>
+          <p:cNvPr id="5" name="Picture 4"/>
+          <p:cNvPicPr>
+            <a:picLocks noChangeAspect="1"/>
+          </p:cNvPicPr>
+          <p:nvPr/>
+        </p:nvPicPr>
+        <p:blipFill>
+          <a:blip r:embed="rId3"/>
+          <a:stretch>
+            <a:fillRect/>
+          </a:stretch>
+        </p:blipFill>
+        <p:spPr>
+          <a:xfrm>
+            <a:off x="9478765" y="5306316"/>
+            <a:ext cx="2572364" cy="685964"/>
+          </a:xfrm>
+          <a:prstGeom prst="rect">
+            <a:avLst/>
+          </a:prstGeom>
+        </p:spPr>
+      </p:pic>
+    </p:spTree>
+    <p:extLst>
+      <p:ext uri="{BB962C8B-B14F-4D97-AF65-F5344CB8AC3E}">
+        <p14:creationId xmlns:p14="http://schemas.microsoft.com/office/powerpoint/2010/main" val="1807360373"/>
+      </p:ext>
+    </p:extLst>
+  </p:cSld>
+  <p:clrMapOvr>
+    <a:masterClrMapping/>
+  </p:clrMapOvr>
+  <p:timing>
+    <p:tnLst>
+      <p:par>
+        <p:cTn id="1" dur="indefinite" restart="never" nodeType="tmRoot"/>
+      </p:par>
+    </p:tnLst>
+  </p:timing>
 </p:sld>
 </file>
 
@@ -13352,6 +13684,286 @@
   <p:clrMapOvr>
     <a:masterClrMapping/>
   </p:clrMapOvr>
+  <p:timing>
+    <p:tnLst>
+      <p:par>
+        <p:cTn id="1" dur="indefinite" restart="never" nodeType="tmRoot"/>
+      </p:par>
+    </p:tnLst>
+  </p:timing>
+</p:sld>
+</file>
+
+<file path=ppt/slides/slide20.xml><?xml version="1.0" encoding="utf-8"?>
+<p:sld xmlns:a="http://schemas.openxmlformats.org/drawingml/2006/main" xmlns:r="http://schemas.openxmlformats.org/officeDocument/2006/relationships" xmlns:p="http://schemas.openxmlformats.org/presentationml/2006/main">
+  <p:cSld>
+    <p:spTree>
+      <p:nvGrpSpPr>
+        <p:cNvPr id="1" name=""/>
+        <p:cNvGrpSpPr/>
+        <p:nvPr/>
+      </p:nvGrpSpPr>
+      <p:grpSpPr>
+        <a:xfrm>
+          <a:off x="0" y="0"/>
+          <a:ext cx="0" cy="0"/>
+          <a:chOff x="0" y="0"/>
+          <a:chExt cx="0" cy="0"/>
+        </a:xfrm>
+      </p:grpSpPr>
+      <p:sp>
+        <p:nvSpPr>
+          <p:cNvPr id="2" name="Title 1"/>
+          <p:cNvSpPr>
+            <a:spLocks noGrp="1"/>
+          </p:cNvSpPr>
+          <p:nvPr>
+            <p:ph type="title"/>
+          </p:nvPr>
+        </p:nvSpPr>
+        <p:spPr/>
+        <p:txBody>
+          <a:bodyPr/>
+          <a:lstStyle/>
+          <a:p>
+            <a:r>
+              <a:rPr lang="en-US" smtClean="0"/>
+              <a:t>Detail design: API request-response </a:t>
+            </a:r>
+            <a:endParaRPr lang="en-US"/>
+          </a:p>
+        </p:txBody>
+      </p:sp>
+      <p:pic>
+        <p:nvPicPr>
+          <p:cNvPr id="4" name="Content Placeholder 3"/>
+          <p:cNvPicPr>
+            <a:picLocks noGrp="1" noChangeAspect="1"/>
+          </p:cNvPicPr>
+          <p:nvPr>
+            <p:ph idx="1"/>
+          </p:nvPr>
+        </p:nvPicPr>
+        <p:blipFill>
+          <a:blip r:embed="rId2">
+            <a:extLst>
+              <a:ext uri="{28A0092B-C50C-407E-A947-70E740481C1C}">
+                <a14:useLocalDpi xmlns:a14="http://schemas.microsoft.com/office/drawing/2010/main" val="0"/>
+              </a:ext>
+            </a:extLst>
+          </a:blip>
+          <a:stretch>
+            <a:fillRect/>
+          </a:stretch>
+        </p:blipFill>
+        <p:spPr>
+          <a:xfrm>
+            <a:off x="449852" y="1025348"/>
+            <a:ext cx="11292296" cy="4948255"/>
+          </a:xfrm>
+        </p:spPr>
+      </p:pic>
+      <p:pic>
+        <p:nvPicPr>
+          <p:cNvPr id="5" name="Picture 4"/>
+          <p:cNvPicPr>
+            <a:picLocks noChangeAspect="1"/>
+          </p:cNvPicPr>
+          <p:nvPr/>
+        </p:nvPicPr>
+        <p:blipFill>
+          <a:blip r:embed="rId3"/>
+          <a:stretch>
+            <a:fillRect/>
+          </a:stretch>
+        </p:blipFill>
+        <p:spPr>
+          <a:xfrm>
+            <a:off x="9097356" y="6036978"/>
+            <a:ext cx="2572364" cy="685964"/>
+          </a:xfrm>
+          <a:prstGeom prst="rect">
+            <a:avLst/>
+          </a:prstGeom>
+        </p:spPr>
+      </p:pic>
+    </p:spTree>
+    <p:extLst>
+      <p:ext uri="{BB962C8B-B14F-4D97-AF65-F5344CB8AC3E}">
+        <p14:creationId xmlns:p14="http://schemas.microsoft.com/office/powerpoint/2010/main" val="412209850"/>
+      </p:ext>
+    </p:extLst>
+  </p:cSld>
+  <p:clrMapOvr>
+    <a:masterClrMapping/>
+  </p:clrMapOvr>
+  <p:timing>
+    <p:tnLst>
+      <p:par>
+        <p:cTn id="1" dur="indefinite" restart="never" nodeType="tmRoot"/>
+      </p:par>
+    </p:tnLst>
+  </p:timing>
+</p:sld>
+</file>
+
+<file path=ppt/slides/slide21.xml><?xml version="1.0" encoding="utf-8"?>
+<p:sld xmlns:a="http://schemas.openxmlformats.org/drawingml/2006/main" xmlns:r="http://schemas.openxmlformats.org/officeDocument/2006/relationships" xmlns:p="http://schemas.openxmlformats.org/presentationml/2006/main">
+  <p:cSld>
+    <p:spTree>
+      <p:nvGrpSpPr>
+        <p:cNvPr id="1" name=""/>
+        <p:cNvGrpSpPr/>
+        <p:nvPr/>
+      </p:nvGrpSpPr>
+      <p:grpSpPr>
+        <a:xfrm>
+          <a:off x="0" y="0"/>
+          <a:ext cx="0" cy="0"/>
+          <a:chOff x="0" y="0"/>
+          <a:chExt cx="0" cy="0"/>
+        </a:xfrm>
+      </p:grpSpPr>
+      <p:sp>
+        <p:nvSpPr>
+          <p:cNvPr id="2" name="Title 1"/>
+          <p:cNvSpPr>
+            <a:spLocks noGrp="1"/>
+          </p:cNvSpPr>
+          <p:nvPr>
+            <p:ph type="title"/>
+          </p:nvPr>
+        </p:nvSpPr>
+        <p:spPr>
+          <a:xfrm>
+            <a:off x="160866" y="189168"/>
+            <a:ext cx="12031134" cy="672843"/>
+          </a:xfrm>
+          <a:solidFill>
+            <a:schemeClr val="bg1"/>
+          </a:solidFill>
+        </p:spPr>
+        <p:txBody>
+          <a:bodyPr/>
+          <a:lstStyle/>
+          <a:p>
+            <a:pPr algn="r"/>
+            <a:r>
+              <a:rPr lang="en-US"/>
+              <a:t>Detail design</a:t>
+            </a:r>
+            <a:r>
+              <a:rPr lang="en-US"/>
+              <a:t>: </a:t>
+            </a:r>
+            <a:r>
+              <a:rPr lang="en-US" smtClean="0"/>
+              <a:t>Re-connect mechanism</a:t>
+            </a:r>
+            <a:endParaRPr lang="en-US"/>
+          </a:p>
+        </p:txBody>
+      </p:sp>
+      <p:pic>
+        <p:nvPicPr>
+          <p:cNvPr id="5" name="Picture 4"/>
+          <p:cNvPicPr>
+            <a:picLocks noChangeAspect="1"/>
+          </p:cNvPicPr>
+          <p:nvPr/>
+        </p:nvPicPr>
+        <p:blipFill>
+          <a:blip r:embed="rId2"/>
+          <a:stretch>
+            <a:fillRect/>
+          </a:stretch>
+        </p:blipFill>
+        <p:spPr>
+          <a:xfrm>
+            <a:off x="6176433" y="5323813"/>
+            <a:ext cx="2572364" cy="685964"/>
+          </a:xfrm>
+          <a:prstGeom prst="rect">
+            <a:avLst/>
+          </a:prstGeom>
+        </p:spPr>
+      </p:pic>
+      <p:pic>
+        <p:nvPicPr>
+          <p:cNvPr id="8" name="Content Placeholder 7"/>
+          <p:cNvPicPr>
+            <a:picLocks noGrp="1" noChangeAspect="1"/>
+          </p:cNvPicPr>
+          <p:nvPr>
+            <p:ph idx="1"/>
+          </p:nvPr>
+        </p:nvPicPr>
+        <p:blipFill>
+          <a:blip r:embed="rId3" cstate="print">
+            <a:extLst>
+              <a:ext uri="{28A0092B-C50C-407E-A947-70E740481C1C}">
+                <a14:useLocalDpi xmlns:a14="http://schemas.microsoft.com/office/drawing/2010/main" val="0"/>
+              </a:ext>
+            </a:extLst>
+          </a:blip>
+          <a:stretch>
+            <a:fillRect/>
+          </a:stretch>
+        </p:blipFill>
+        <p:spPr>
+          <a:xfrm>
+            <a:off x="160866" y="64828"/>
+            <a:ext cx="5714833" cy="6728344"/>
+          </a:xfrm>
+        </p:spPr>
+      </p:pic>
+      <p:pic>
+        <p:nvPicPr>
+          <p:cNvPr id="9" name="Picture 8"/>
+          <p:cNvPicPr>
+            <a:picLocks noChangeAspect="1"/>
+          </p:cNvPicPr>
+          <p:nvPr/>
+        </p:nvPicPr>
+        <p:blipFill>
+          <a:blip r:embed="rId4">
+            <a:extLst>
+              <a:ext uri="{28A0092B-C50C-407E-A947-70E740481C1C}">
+                <a14:useLocalDpi xmlns:a14="http://schemas.microsoft.com/office/drawing/2010/main" val="0"/>
+              </a:ext>
+            </a:extLst>
+          </a:blip>
+          <a:stretch>
+            <a:fillRect/>
+          </a:stretch>
+        </p:blipFill>
+        <p:spPr>
+          <a:xfrm>
+            <a:off x="6176433" y="862011"/>
+            <a:ext cx="5738258" cy="4131941"/>
+          </a:xfrm>
+          <a:prstGeom prst="rect">
+            <a:avLst/>
+          </a:prstGeom>
+        </p:spPr>
+      </p:pic>
+    </p:spTree>
+    <p:extLst>
+      <p:ext uri="{BB962C8B-B14F-4D97-AF65-F5344CB8AC3E}">
+        <p14:creationId xmlns:p14="http://schemas.microsoft.com/office/powerpoint/2010/main" val="1397155477"/>
+      </p:ext>
+    </p:extLst>
+  </p:cSld>
+  <p:clrMapOvr>
+    <a:masterClrMapping/>
+  </p:clrMapOvr>
+  <p:timing>
+    <p:tnLst>
+      <p:par>
+        <p:cTn id="1" dur="indefinite" restart="never" nodeType="tmRoot"/>
+      </p:par>
+    </p:tnLst>
+  </p:timing>
 </p:sld>
 </file>
 
@@ -13363,7 +13975,7 @@
         <p:cNvPr id="1" name="">
           <a:extLst>
             <a:ext uri="{FF2B5EF4-FFF2-40B4-BE49-F238E27FC236}">
-              <a16:creationId xmlns:a16="http://schemas.microsoft.com/office/drawing/2014/main" id="{498DF60D-9815-C72C-E039-867021DB81A5}"/>
+              <a16:creationId xmlns:a16="http://schemas.microsoft.com/office/drawing/2014/main" xmlns="" id="{498DF60D-9815-C72C-E039-867021DB81A5}"/>
             </a:ext>
           </a:extLst>
         </p:cNvPr>
@@ -13383,7 +13995,7 @@
           <p:cNvPr id="2" name="Title 1">
             <a:extLst>
               <a:ext uri="{FF2B5EF4-FFF2-40B4-BE49-F238E27FC236}">
-                <a16:creationId xmlns:a16="http://schemas.microsoft.com/office/drawing/2014/main" id="{ED5429F4-17DA-8C65-E10D-772D18EA9959}"/>
+                <a16:creationId xmlns:a16="http://schemas.microsoft.com/office/drawing/2014/main" xmlns="" id="{ED5429F4-17DA-8C65-E10D-772D18EA9959}"/>
               </a:ext>
             </a:extLst>
           </p:cNvPr>
@@ -13418,7 +14030,7 @@
           <p:cNvPr id="7" name="Content Placeholder 6">
             <a:extLst>
               <a:ext uri="{FF2B5EF4-FFF2-40B4-BE49-F238E27FC236}">
-                <a16:creationId xmlns:a16="http://schemas.microsoft.com/office/drawing/2014/main" id="{C9BB87FF-FFF5-432F-99E1-3CFA176F711C}"/>
+                <a16:creationId xmlns:a16="http://schemas.microsoft.com/office/drawing/2014/main" xmlns="" id="{C9BB87FF-FFF5-432F-99E1-3CFA176F711C}"/>
               </a:ext>
             </a:extLst>
           </p:cNvPr>
@@ -13485,7 +14097,7 @@
           <p:cNvPr id="3" name="Picture 2">
             <a:extLst>
               <a:ext uri="{FF2B5EF4-FFF2-40B4-BE49-F238E27FC236}">
-                <a16:creationId xmlns:a16="http://schemas.microsoft.com/office/drawing/2014/main" id="{E28FFDEC-FAE3-F715-C17D-E64EBFEF57E2}"/>
+                <a16:creationId xmlns:a16="http://schemas.microsoft.com/office/drawing/2014/main" xmlns="" id="{E28FFDEC-FAE3-F715-C17D-E64EBFEF57E2}"/>
               </a:ext>
             </a:extLst>
           </p:cNvPr>
@@ -13515,7 +14127,7 @@
           <p:cNvPr id="10" name="TextBox 9">
             <a:extLst>
               <a:ext uri="{FF2B5EF4-FFF2-40B4-BE49-F238E27FC236}">
-                <a16:creationId xmlns:a16="http://schemas.microsoft.com/office/drawing/2014/main" id="{E5AD2A0C-B319-E101-9513-01BAFF04FFE6}"/>
+                <a16:creationId xmlns:a16="http://schemas.microsoft.com/office/drawing/2014/main" xmlns="" id="{E5AD2A0C-B319-E101-9513-01BAFF04FFE6}"/>
               </a:ext>
             </a:extLst>
           </p:cNvPr>
@@ -13550,7 +14162,7 @@
           <p:cNvPr id="12" name="Picture 11">
             <a:extLst>
               <a:ext uri="{FF2B5EF4-FFF2-40B4-BE49-F238E27FC236}">
-                <a16:creationId xmlns:a16="http://schemas.microsoft.com/office/drawing/2014/main" id="{52CEA5CE-1C3F-5BA0-00F6-DC7933C7618E}"/>
+                <a16:creationId xmlns:a16="http://schemas.microsoft.com/office/drawing/2014/main" xmlns="" id="{52CEA5CE-1C3F-5BA0-00F6-DC7933C7618E}"/>
               </a:ext>
             </a:extLst>
           </p:cNvPr>
@@ -13585,6 +14197,13 @@
   <p:clrMapOvr>
     <a:masterClrMapping/>
   </p:clrMapOvr>
+  <p:timing>
+    <p:tnLst>
+      <p:par>
+        <p:cTn id="1" dur="indefinite" restart="never" nodeType="tmRoot"/>
+      </p:par>
+    </p:tnLst>
+  </p:timing>
 </p:sld>
 </file>
 
@@ -13643,7 +14262,7 @@
           <p:cNvPr id="2" name="Title 1">
             <a:extLst>
               <a:ext uri="{FF2B5EF4-FFF2-40B4-BE49-F238E27FC236}">
-                <a16:creationId xmlns:a16="http://schemas.microsoft.com/office/drawing/2014/main" id="{F11C1235-51B4-A8A0-3A61-9C767F437001}"/>
+                <a16:creationId xmlns:a16="http://schemas.microsoft.com/office/drawing/2014/main" xmlns="" id="{F11C1235-51B4-A8A0-3A61-9C767F437001}"/>
               </a:ext>
             </a:extLst>
           </p:cNvPr>
@@ -13678,7 +14297,7 @@
           <p:cNvPr id="7" name="Content Placeholder 6">
             <a:extLst>
               <a:ext uri="{FF2B5EF4-FFF2-40B4-BE49-F238E27FC236}">
-                <a16:creationId xmlns:a16="http://schemas.microsoft.com/office/drawing/2014/main" id="{4A0E7BDD-2CF4-321B-0637-D9AF63CAB0BF}"/>
+                <a16:creationId xmlns:a16="http://schemas.microsoft.com/office/drawing/2014/main" xmlns="" id="{4A0E7BDD-2CF4-321B-0637-D9AF63CAB0BF}"/>
               </a:ext>
             </a:extLst>
           </p:cNvPr>
@@ -13895,7 +14514,7 @@
           <p:cNvPr id="15" name="Picture 14">
             <a:extLst>
               <a:ext uri="{FF2B5EF4-FFF2-40B4-BE49-F238E27FC236}">
-                <a16:creationId xmlns:a16="http://schemas.microsoft.com/office/drawing/2014/main" id="{82300E94-D641-5E7E-D410-1F95BB0C9A9B}"/>
+                <a16:creationId xmlns:a16="http://schemas.microsoft.com/office/drawing/2014/main" xmlns="" id="{82300E94-D641-5E7E-D410-1F95BB0C9A9B}"/>
               </a:ext>
             </a:extLst>
           </p:cNvPr>
@@ -13925,7 +14544,7 @@
           <p:cNvPr id="18" name="Picture 17">
             <a:extLst>
               <a:ext uri="{FF2B5EF4-FFF2-40B4-BE49-F238E27FC236}">
-                <a16:creationId xmlns:a16="http://schemas.microsoft.com/office/drawing/2014/main" id="{55A41CDD-7CE6-4D63-F256-F3E90D329D71}"/>
+                <a16:creationId xmlns:a16="http://schemas.microsoft.com/office/drawing/2014/main" xmlns="" id="{55A41CDD-7CE6-4D63-F256-F3E90D329D71}"/>
               </a:ext>
             </a:extLst>
           </p:cNvPr>
@@ -13960,6 +14579,13 @@
   <p:clrMapOvr>
     <a:masterClrMapping/>
   </p:clrMapOvr>
+  <p:timing>
+    <p:tnLst>
+      <p:par>
+        <p:cTn id="1" dur="indefinite" restart="never" nodeType="tmRoot"/>
+      </p:par>
+    </p:tnLst>
+  </p:timing>
 </p:sld>
 </file>
 
@@ -13985,7 +14611,7 @@
           <p:cNvPr id="10" name="Picture 9">
             <a:extLst>
               <a:ext uri="{FF2B5EF4-FFF2-40B4-BE49-F238E27FC236}">
-                <a16:creationId xmlns:a16="http://schemas.microsoft.com/office/drawing/2014/main" id="{20FEF80F-391D-5C0D-3E70-1754E47CE21A}"/>
+                <a16:creationId xmlns:a16="http://schemas.microsoft.com/office/drawing/2014/main" xmlns="" id="{20FEF80F-391D-5C0D-3E70-1754E47CE21A}"/>
               </a:ext>
             </a:extLst>
           </p:cNvPr>
@@ -14164,7 +14790,7 @@
           <p:cNvPr id="2" name="Title 1">
             <a:extLst>
               <a:ext uri="{FF2B5EF4-FFF2-40B4-BE49-F238E27FC236}">
-                <a16:creationId xmlns:a16="http://schemas.microsoft.com/office/drawing/2014/main" id="{C3585339-B774-DFDC-4DB4-D02F5083DD3E}"/>
+                <a16:creationId xmlns:a16="http://schemas.microsoft.com/office/drawing/2014/main" xmlns="" id="{C3585339-B774-DFDC-4DB4-D02F5083DD3E}"/>
               </a:ext>
             </a:extLst>
           </p:cNvPr>
@@ -14206,7 +14832,7 @@
             <p:cNvPr id="15" name="TextBox 14">
               <a:extLst>
                 <a:ext uri="{FF2B5EF4-FFF2-40B4-BE49-F238E27FC236}">
-                  <a16:creationId xmlns:a16="http://schemas.microsoft.com/office/drawing/2014/main" id="{2477AED6-8D6F-D505-6D7B-78460A03A2E8}"/>
+                  <a16:creationId xmlns:a16="http://schemas.microsoft.com/office/drawing/2014/main" xmlns="" id="{2477AED6-8D6F-D505-6D7B-78460A03A2E8}"/>
                 </a:ext>
               </a:extLst>
             </p:cNvPr>
@@ -14311,7 +14937,7 @@
           <p:cNvPr id="5" name="Picture 4">
             <a:extLst>
               <a:ext uri="{FF2B5EF4-FFF2-40B4-BE49-F238E27FC236}">
-                <a16:creationId xmlns:a16="http://schemas.microsoft.com/office/drawing/2014/main" id="{8B985467-A9DA-DE11-1910-E778EDD530AB}"/>
+                <a16:creationId xmlns:a16="http://schemas.microsoft.com/office/drawing/2014/main" xmlns="" id="{8B985467-A9DA-DE11-1910-E778EDD530AB}"/>
               </a:ext>
             </a:extLst>
           </p:cNvPr>
@@ -14346,6 +14972,13 @@
   <p:clrMapOvr>
     <a:masterClrMapping/>
   </p:clrMapOvr>
+  <p:timing>
+    <p:tnLst>
+      <p:par>
+        <p:cTn id="1" dur="indefinite" restart="never" nodeType="tmRoot"/>
+      </p:par>
+    </p:tnLst>
+  </p:timing>
 </p:sld>
 </file>
 
@@ -14393,7 +15026,7 @@
           <p:cNvPr id="4" name="Content Placeholder 3">
             <a:extLst>
               <a:ext uri="{FF2B5EF4-FFF2-40B4-BE49-F238E27FC236}">
-                <a16:creationId xmlns:a16="http://schemas.microsoft.com/office/drawing/2014/main" id="{E5625E47-EFA5-9C35-32C7-F793664192AF}"/>
+                <a16:creationId xmlns:a16="http://schemas.microsoft.com/office/drawing/2014/main" xmlns="" id="{E5625E47-EFA5-9C35-32C7-F793664192AF}"/>
               </a:ext>
             </a:extLst>
           </p:cNvPr>
@@ -14428,7 +15061,7 @@
           <p:cNvPr id="10" name="Table 9">
             <a:extLst>
               <a:ext uri="{FF2B5EF4-FFF2-40B4-BE49-F238E27FC236}">
-                <a16:creationId xmlns:a16="http://schemas.microsoft.com/office/drawing/2014/main" id="{658A328F-ADBC-7C5F-15DF-73E4DC21B209}"/>
+                <a16:creationId xmlns:a16="http://schemas.microsoft.com/office/drawing/2014/main" xmlns="" id="{658A328F-ADBC-7C5F-15DF-73E4DC21B209}"/>
               </a:ext>
             </a:extLst>
           </p:cNvPr>
@@ -14445,7 +15078,7 @@
         </p:nvGraphicFramePr>
         <p:xfrm>
           <a:off x="204773" y="1505336"/>
-          <a:ext cx="11782454" cy="1405295"/>
+          <a:ext cx="11782454" cy="1447840"/>
         </p:xfrm>
         <a:graphic>
           <a:graphicData uri="http://schemas.openxmlformats.org/drawingml/2006/table">
@@ -14457,14 +15090,14 @@
                 <a:gridCol w="1298801">
                   <a:extLst>
                     <a:ext uri="{9D8B030D-6E8A-4147-A177-3AD203B41FA5}">
-                      <a16:colId xmlns:a16="http://schemas.microsoft.com/office/drawing/2014/main" val="20000"/>
+                      <a16:colId xmlns:a16="http://schemas.microsoft.com/office/drawing/2014/main" xmlns="" val="20000"/>
                     </a:ext>
                   </a:extLst>
                 </a:gridCol>
                 <a:gridCol w="10483653">
                   <a:extLst>
                     <a:ext uri="{9D8B030D-6E8A-4147-A177-3AD203B41FA5}">
-                      <a16:colId xmlns:a16="http://schemas.microsoft.com/office/drawing/2014/main" val="20001"/>
+                      <a16:colId xmlns:a16="http://schemas.microsoft.com/office/drawing/2014/main" xmlns="" val="20001"/>
                     </a:ext>
                   </a:extLst>
                 </a:gridCol>
@@ -14603,7 +15236,7 @@
                 </a:tc>
                 <a:extLst>
                   <a:ext uri="{0D108BD9-81ED-4DB2-BD59-A6C34878D82A}">
-                    <a16:rowId xmlns:a16="http://schemas.microsoft.com/office/drawing/2014/main" val="10000"/>
+                    <a16:rowId xmlns:a16="http://schemas.microsoft.com/office/drawing/2014/main" xmlns="" val="10000"/>
                   </a:ext>
                 </a:extLst>
               </a:tr>
@@ -14739,7 +15372,7 @@
                 </a:tc>
                 <a:extLst>
                   <a:ext uri="{0D108BD9-81ED-4DB2-BD59-A6C34878D82A}">
-                    <a16:rowId xmlns:a16="http://schemas.microsoft.com/office/drawing/2014/main" val="10001"/>
+                    <a16:rowId xmlns:a16="http://schemas.microsoft.com/office/drawing/2014/main" xmlns="" val="10001"/>
                   </a:ext>
                 </a:extLst>
               </a:tr>
@@ -14887,7 +15520,7 @@
                 </a:tc>
                 <a:extLst>
                   <a:ext uri="{0D108BD9-81ED-4DB2-BD59-A6C34878D82A}">
-                    <a16:rowId xmlns:a16="http://schemas.microsoft.com/office/drawing/2014/main" val="10002"/>
+                    <a16:rowId xmlns:a16="http://schemas.microsoft.com/office/drawing/2014/main" xmlns="" val="10002"/>
                   </a:ext>
                 </a:extLst>
               </a:tr>
@@ -14905,6 +15538,13 @@
   <p:clrMapOvr>
     <a:masterClrMapping/>
   </p:clrMapOvr>
+  <p:timing>
+    <p:tnLst>
+      <p:par>
+        <p:cTn id="1" dur="indefinite" restart="never" nodeType="tmRoot"/>
+      </p:par>
+    </p:tnLst>
+  </p:timing>
 </p:sld>
 </file>
 
@@ -14916,7 +15556,7 @@
         <p:cNvPr id="1" name="">
           <a:extLst>
             <a:ext uri="{FF2B5EF4-FFF2-40B4-BE49-F238E27FC236}">
-              <a16:creationId xmlns:a16="http://schemas.microsoft.com/office/drawing/2014/main" id="{C0816B88-86B3-799E-3A3E-FA919E3E0922}"/>
+              <a16:creationId xmlns:a16="http://schemas.microsoft.com/office/drawing/2014/main" xmlns="" id="{C0816B88-86B3-799E-3A3E-FA919E3E0922}"/>
             </a:ext>
           </a:extLst>
         </p:cNvPr>
@@ -14936,7 +15576,7 @@
           <p:cNvPr id="2" name="Title 1">
             <a:extLst>
               <a:ext uri="{FF2B5EF4-FFF2-40B4-BE49-F238E27FC236}">
-                <a16:creationId xmlns:a16="http://schemas.microsoft.com/office/drawing/2014/main" id="{C36E5815-73D6-DA66-29AA-3BE061A3E84B}"/>
+                <a16:creationId xmlns:a16="http://schemas.microsoft.com/office/drawing/2014/main" xmlns="" id="{C36E5815-73D6-DA66-29AA-3BE061A3E84B}"/>
               </a:ext>
             </a:extLst>
           </p:cNvPr>
@@ -14964,7 +15604,7 @@
           <p:cNvPr id="11" name="Content Placeholder 3">
             <a:extLst>
               <a:ext uri="{FF2B5EF4-FFF2-40B4-BE49-F238E27FC236}">
-                <a16:creationId xmlns:a16="http://schemas.microsoft.com/office/drawing/2014/main" id="{6010EF79-766B-D3A2-10CE-882C40A1E836}"/>
+                <a16:creationId xmlns:a16="http://schemas.microsoft.com/office/drawing/2014/main" xmlns="" id="{6010EF79-766B-D3A2-10CE-882C40A1E836}"/>
               </a:ext>
             </a:extLst>
           </p:cNvPr>
@@ -15160,7 +15800,7 @@
           <p:cNvPr id="3" name="Table 2">
             <a:extLst>
               <a:ext uri="{FF2B5EF4-FFF2-40B4-BE49-F238E27FC236}">
-                <a16:creationId xmlns:a16="http://schemas.microsoft.com/office/drawing/2014/main" id="{6C8AAA51-C203-CD8B-4B02-DE7401134C21}"/>
+                <a16:creationId xmlns:a16="http://schemas.microsoft.com/office/drawing/2014/main" xmlns="" id="{6C8AAA51-C203-CD8B-4B02-DE7401134C21}"/>
               </a:ext>
             </a:extLst>
           </p:cNvPr>
@@ -15177,7 +15817,7 @@
         </p:nvGraphicFramePr>
         <p:xfrm>
           <a:off x="182820" y="960039"/>
-          <a:ext cx="11903556" cy="4908376"/>
+          <a:ext cx="11903556" cy="5059760"/>
         </p:xfrm>
         <a:graphic>
           <a:graphicData uri="http://schemas.openxmlformats.org/drawingml/2006/table">
@@ -15189,35 +15829,35 @@
                 <a:gridCol w="745942">
                   <a:extLst>
                     <a:ext uri="{9D8B030D-6E8A-4147-A177-3AD203B41FA5}">
-                      <a16:colId xmlns:a16="http://schemas.microsoft.com/office/drawing/2014/main" val="20000"/>
+                      <a16:colId xmlns:a16="http://schemas.microsoft.com/office/drawing/2014/main" xmlns="" val="20000"/>
                     </a:ext>
                   </a:extLst>
                 </a:gridCol>
                 <a:gridCol w="4275879">
                   <a:extLst>
                     <a:ext uri="{9D8B030D-6E8A-4147-A177-3AD203B41FA5}">
-                      <a16:colId xmlns:a16="http://schemas.microsoft.com/office/drawing/2014/main" val="20001"/>
+                      <a16:colId xmlns:a16="http://schemas.microsoft.com/office/drawing/2014/main" xmlns="" val="20001"/>
                     </a:ext>
                   </a:extLst>
                 </a:gridCol>
                 <a:gridCol w="4419193">
                   <a:extLst>
                     <a:ext uri="{9D8B030D-6E8A-4147-A177-3AD203B41FA5}">
-                      <a16:colId xmlns:a16="http://schemas.microsoft.com/office/drawing/2014/main" val="2530683369"/>
+                      <a16:colId xmlns:a16="http://schemas.microsoft.com/office/drawing/2014/main" xmlns="" val="2530683369"/>
                     </a:ext>
                   </a:extLst>
                 </a:gridCol>
                 <a:gridCol w="1475715">
                   <a:extLst>
                     <a:ext uri="{9D8B030D-6E8A-4147-A177-3AD203B41FA5}">
-                      <a16:colId xmlns:a16="http://schemas.microsoft.com/office/drawing/2014/main" val="20002"/>
+                      <a16:colId xmlns:a16="http://schemas.microsoft.com/office/drawing/2014/main" xmlns="" val="20002"/>
                     </a:ext>
                   </a:extLst>
                 </a:gridCol>
                 <a:gridCol w="986827">
                   <a:extLst>
                     <a:ext uri="{9D8B030D-6E8A-4147-A177-3AD203B41FA5}">
-                      <a16:colId xmlns:a16="http://schemas.microsoft.com/office/drawing/2014/main" val="20003"/>
+                      <a16:colId xmlns:a16="http://schemas.microsoft.com/office/drawing/2014/main" xmlns="" val="20003"/>
                     </a:ext>
                   </a:extLst>
                 </a:gridCol>
@@ -15577,7 +16217,7 @@
                 </a:tc>
                 <a:extLst>
                   <a:ext uri="{0D108BD9-81ED-4DB2-BD59-A6C34878D82A}">
-                    <a16:rowId xmlns:a16="http://schemas.microsoft.com/office/drawing/2014/main" val="10000"/>
+                    <a16:rowId xmlns:a16="http://schemas.microsoft.com/office/drawing/2014/main" xmlns="" val="10000"/>
                   </a:ext>
                 </a:extLst>
               </a:tr>
@@ -15909,7 +16549,7 @@
                 </a:tc>
                 <a:extLst>
                   <a:ext uri="{0D108BD9-81ED-4DB2-BD59-A6C34878D82A}">
-                    <a16:rowId xmlns:a16="http://schemas.microsoft.com/office/drawing/2014/main" val="10001"/>
+                    <a16:rowId xmlns:a16="http://schemas.microsoft.com/office/drawing/2014/main" xmlns="" val="10001"/>
                   </a:ext>
                 </a:extLst>
               </a:tr>
@@ -16276,7 +16916,7 @@
                 </a:tc>
                 <a:extLst>
                   <a:ext uri="{0D108BD9-81ED-4DB2-BD59-A6C34878D82A}">
-                    <a16:rowId xmlns:a16="http://schemas.microsoft.com/office/drawing/2014/main" val="10002"/>
+                    <a16:rowId xmlns:a16="http://schemas.microsoft.com/office/drawing/2014/main" xmlns="" val="10002"/>
                   </a:ext>
                 </a:extLst>
               </a:tr>
@@ -16648,7 +17288,7 @@
                 </a:tc>
                 <a:extLst>
                   <a:ext uri="{0D108BD9-81ED-4DB2-BD59-A6C34878D82A}">
-                    <a16:rowId xmlns:a16="http://schemas.microsoft.com/office/drawing/2014/main" val="10003"/>
+                    <a16:rowId xmlns:a16="http://schemas.microsoft.com/office/drawing/2014/main" xmlns="" val="10003"/>
                   </a:ext>
                 </a:extLst>
               </a:tr>
@@ -17028,7 +17668,7 @@
                 </a:tc>
                 <a:extLst>
                   <a:ext uri="{0D108BD9-81ED-4DB2-BD59-A6C34878D82A}">
-                    <a16:rowId xmlns:a16="http://schemas.microsoft.com/office/drawing/2014/main" val="10004"/>
+                    <a16:rowId xmlns:a16="http://schemas.microsoft.com/office/drawing/2014/main" xmlns="" val="10004"/>
                   </a:ext>
                 </a:extLst>
               </a:tr>
@@ -17046,6 +17686,13 @@
   <p:clrMapOvr>
     <a:masterClrMapping/>
   </p:clrMapOvr>
+  <p:timing>
+    <p:tnLst>
+      <p:par>
+        <p:cTn id="1" dur="indefinite" restart="never" nodeType="tmRoot"/>
+      </p:par>
+    </p:tnLst>
+  </p:timing>
 </p:sld>
 </file>
 
@@ -17071,7 +17718,7 @@
           <p:cNvPr id="14" name="Picture 13">
             <a:extLst>
               <a:ext uri="{FF2B5EF4-FFF2-40B4-BE49-F238E27FC236}">
-                <a16:creationId xmlns:a16="http://schemas.microsoft.com/office/drawing/2014/main" id="{79F3C30A-9B01-61F0-056C-27C80301C91F}"/>
+                <a16:creationId xmlns:a16="http://schemas.microsoft.com/office/drawing/2014/main" xmlns="" id="{79F3C30A-9B01-61F0-056C-27C80301C91F}"/>
               </a:ext>
             </a:extLst>
           </p:cNvPr>
@@ -17302,7 +17949,7 @@
           <p:cNvPr id="10" name="Picture 9">
             <a:extLst>
               <a:ext uri="{FF2B5EF4-FFF2-40B4-BE49-F238E27FC236}">
-                <a16:creationId xmlns:a16="http://schemas.microsoft.com/office/drawing/2014/main" id="{09AB2A3E-4A5A-80E7-6BD7-3F4F73E5CF93}"/>
+                <a16:creationId xmlns:a16="http://schemas.microsoft.com/office/drawing/2014/main" xmlns="" id="{09AB2A3E-4A5A-80E7-6BD7-3F4F73E5CF93}"/>
               </a:ext>
             </a:extLst>
           </p:cNvPr>
@@ -17337,6 +17984,13 @@
   <p:clrMapOvr>
     <a:masterClrMapping/>
   </p:clrMapOvr>
+  <p:timing>
+    <p:tnLst>
+      <p:par>
+        <p:cTn id="1" dur="indefinite" restart="never" nodeType="tmRoot"/>
+      </p:par>
+    </p:tnLst>
+  </p:timing>
 </p:sld>
 </file>
 
@@ -17362,7 +18016,7 @@
           <p:cNvPr id="12" name="Picture 11">
             <a:extLst>
               <a:ext uri="{FF2B5EF4-FFF2-40B4-BE49-F238E27FC236}">
-                <a16:creationId xmlns:a16="http://schemas.microsoft.com/office/drawing/2014/main" id="{1687716E-3FC0-6720-F07D-6C24184342FD}"/>
+                <a16:creationId xmlns:a16="http://schemas.microsoft.com/office/drawing/2014/main" xmlns="" id="{1687716E-3FC0-6720-F07D-6C24184342FD}"/>
               </a:ext>
             </a:extLst>
           </p:cNvPr>
@@ -17493,7 +18147,7 @@
           <p:cNvPr id="9" name="Picture 8">
             <a:extLst>
               <a:ext uri="{FF2B5EF4-FFF2-40B4-BE49-F238E27FC236}">
-                <a16:creationId xmlns:a16="http://schemas.microsoft.com/office/drawing/2014/main" id="{33B21BAC-9E9C-F667-EB81-43F48A0E1E40}"/>
+                <a16:creationId xmlns:a16="http://schemas.microsoft.com/office/drawing/2014/main" xmlns="" id="{33B21BAC-9E9C-F667-EB81-43F48A0E1E40}"/>
               </a:ext>
             </a:extLst>
           </p:cNvPr>
@@ -17523,7 +18177,7 @@
           <p:cNvPr id="14" name="TextBox 13">
             <a:extLst>
               <a:ext uri="{FF2B5EF4-FFF2-40B4-BE49-F238E27FC236}">
-                <a16:creationId xmlns:a16="http://schemas.microsoft.com/office/drawing/2014/main" id="{2AAE2910-7B87-F3B5-8408-E04FE9F21D42}"/>
+                <a16:creationId xmlns:a16="http://schemas.microsoft.com/office/drawing/2014/main" xmlns="" id="{2AAE2910-7B87-F3B5-8408-E04FE9F21D42}"/>
               </a:ext>
             </a:extLst>
           </p:cNvPr>
@@ -17563,6 +18217,13 @@
   <p:clrMapOvr>
     <a:masterClrMapping/>
   </p:clrMapOvr>
+  <p:timing>
+    <p:tnLst>
+      <p:par>
+        <p:cTn id="1" dur="indefinite" restart="never" nodeType="tmRoot"/>
+      </p:par>
+    </p:tnLst>
+  </p:timing>
 </p:sld>
 </file>
 
